--- a/slides/final_deck.pptx
+++ b/slides/final_deck.pptx
@@ -2253,7 +2253,7 @@
         </p:nvSpPr>
         <p:spPr>
           <a:xfrm>
-            <a:off x="502920" y="256032"/>
+            <a:off x="502920" y="228600"/>
             <a:ext cx="11247120" cy="777240"/>
           </a:xfrm>
           <a:prstGeom prst="rect">
@@ -2278,7 +2278,7 @@
                 <a:ea typeface="Georgia" pitchFamily="34" charset="-122"/>
                 <a:cs typeface="Georgia" pitchFamily="34" charset="-120"/>
               </a:rPr>
-              <a:t>Live pilot · SAS @ OKC, 2026-05-26 (FINAL OKC 127–114)</a:t>
+              <a:t>Live pilot · SAS @ OKC, 2026-05-26  (FINAL OKC 127–114)</a:t>
             </a:r>
             <a:endParaRPr lang="en-US" sz="2800" dirty="0"/>
           </a:p>
@@ -2292,7 +2292,7 @@
         </p:nvSpPr>
         <p:spPr>
           <a:xfrm>
-            <a:off x="502920" y="960120"/>
+            <a:off x="502920" y="932688"/>
             <a:ext cx="11247120" cy="365760"/>
           </a:xfrm>
           <a:prstGeom prst="rect">
@@ -2331,7 +2331,7 @@
         </p:nvSpPr>
         <p:spPr>
           <a:xfrm>
-            <a:off x="502920" y="1325880"/>
+            <a:off x="502920" y="1298448"/>
             <a:ext cx="11247120" cy="0"/>
           </a:xfrm>
           <a:prstGeom prst="line">
@@ -2346,1031 +2346,30 @@
           </a:ln>
         </p:spPr>
       </p:sp>
-      <p:graphicFrame>
-        <p:nvGraphicFramePr>
-          <p:cNvPr id="11" name="Table 0"/>
-          <p:cNvGraphicFramePr>
-            <a:graphicFrameLocks noGrp="1"/>
-          </p:cNvGraphicFramePr>
-          <p:nvPr>
-            <p:extLst>
-              <p:ext uri="{D42A27DB-BD31-4B8C-83A1-F6EECF244321}">
-                <p14:modId xmlns:p14="http://schemas.microsoft.com/office/powerpoint/2010/main" val="1579011935"/>
-              </p:ext>
-            </p:extLst>
-          </p:nvPr>
-        </p:nvGraphicFramePr>
-        <p:xfrm>
-          <a:off x="502920" y="1554480"/>
-          <a:ext cx="5486400" cy="914400"/>
-        </p:xfrm>
-        <a:graphic>
-          <a:graphicData uri="http://schemas.openxmlformats.org/drawingml/2006/table">
-            <a:tbl>
-              <a:tblPr/>
-              <a:tblGrid>
-                <a:gridCol w="2926080"/>
-                <a:gridCol w="914400"/>
-                <a:gridCol w="1645920"/>
-              </a:tblGrid>
-              <a:tr h="548640">
-                <a:tc>
-                  <a:txBody>
-                    <a:bodyPr/>
-                    <a:lstStyle/>
-                    <a:p>
-                      <a:pPr indent="0" marL="0">
-                        <a:buNone/>
-                      </a:pPr>
-                      <a:r>
-                        <a:rPr lang="en-US" sz="1500" b="1" dirty="0">
-                          <a:solidFill>
-                            <a:srgbClr val="F6F6F2"/>
-                          </a:solidFill>
-                          <a:latin typeface="Calibri" pitchFamily="34" charset="0"/>
-                          <a:ea typeface="Calibri" pitchFamily="34" charset="-122"/>
-                          <a:cs typeface="Calibri" pitchFamily="34" charset="-120"/>
-                        </a:rPr>
-                        <a:t>Strategy</a:t>
-                      </a:r>
-                      <a:endParaRPr lang="en-US" sz="1500" dirty="0">
-                        <a:latin typeface="Calibri" charset="0"/>
-                        <a:ea typeface="Calibri" charset="0"/>
-                        <a:cs typeface="Calibri" charset="0"/>
-                      </a:endParaRPr>
-                    </a:p>
-                  </a:txBody>
-                  <a:tcPr marL="91440" marR="91440" marT="45720" marB="45720">
-                    <a:lnL w="12700" cap="flat" cmpd="sng" algn="ctr">
-                      <a:solidFill>
-                        <a:srgbClr val="8DA9C4"/>
-                      </a:solidFill>
-                      <a:prstDash val="solid"/>
-                      <a:round/>
-                      <a:headEnd type="none" w="med" len="med"/>
-                      <a:tailEnd type="none" w="med" len="med"/>
-                    </a:lnL>
-                    <a:lnR w="12700" cap="flat" cmpd="sng" algn="ctr">
-                      <a:solidFill>
-                        <a:srgbClr val="8DA9C4"/>
-                      </a:solidFill>
-                      <a:prstDash val="solid"/>
-                      <a:round/>
-                      <a:headEnd type="none" w="med" len="med"/>
-                      <a:tailEnd type="none" w="med" len="med"/>
-                    </a:lnR>
-                    <a:lnT w="12700" cap="flat" cmpd="sng" algn="ctr">
-                      <a:solidFill>
-                        <a:srgbClr val="8DA9C4"/>
-                      </a:solidFill>
-                      <a:prstDash val="solid"/>
-                      <a:round/>
-                      <a:headEnd type="none" w="med" len="med"/>
-                      <a:tailEnd type="none" w="med" len="med"/>
-                    </a:lnT>
-                    <a:lnB w="12700" cap="flat" cmpd="sng" algn="ctr">
-                      <a:solidFill>
-                        <a:srgbClr val="8DA9C4"/>
-                      </a:solidFill>
-                      <a:prstDash val="solid"/>
-                      <a:round/>
-                      <a:headEnd type="none" w="med" len="med"/>
-                      <a:tailEnd type="none" w="med" len="med"/>
-                    </a:lnB>
-                    <a:solidFill>
-                      <a:srgbClr val="0B2545"/>
-                    </a:solidFill>
-                  </a:tcPr>
-                </a:tc>
-                <a:tc>
-                  <a:txBody>
-                    <a:bodyPr/>
-                    <a:lstStyle/>
-                    <a:p>
-                      <a:pPr algn="ctr" indent="0" marL="0">
-                        <a:buNone/>
-                      </a:pPr>
-                      <a:r>
-                        <a:rPr lang="en-US" sz="1500" b="1" dirty="0">
-                          <a:solidFill>
-                            <a:srgbClr val="F6F6F2"/>
-                          </a:solidFill>
-                          <a:latin typeface="Calibri" pitchFamily="34" charset="0"/>
-                          <a:ea typeface="Calibri" pitchFamily="34" charset="-122"/>
-                          <a:cs typeface="Calibri" pitchFamily="34" charset="-120"/>
-                        </a:rPr>
-                        <a:t>Bets</a:t>
-                      </a:r>
-                      <a:endParaRPr lang="en-US" sz="1500" dirty="0">
-                        <a:latin typeface="Calibri" charset="0"/>
-                        <a:ea typeface="Calibri" charset="0"/>
-                        <a:cs typeface="Calibri" charset="0"/>
-                      </a:endParaRPr>
-                    </a:p>
-                  </a:txBody>
-                  <a:tcPr marL="91440" marR="91440" marT="45720" marB="45720">
-                    <a:lnL w="12700" cap="flat" cmpd="sng" algn="ctr">
-                      <a:solidFill>
-                        <a:srgbClr val="8DA9C4"/>
-                      </a:solidFill>
-                      <a:prstDash val="solid"/>
-                      <a:round/>
-                      <a:headEnd type="none" w="med" len="med"/>
-                      <a:tailEnd type="none" w="med" len="med"/>
-                    </a:lnL>
-                    <a:lnR w="12700" cap="flat" cmpd="sng" algn="ctr">
-                      <a:solidFill>
-                        <a:srgbClr val="8DA9C4"/>
-                      </a:solidFill>
-                      <a:prstDash val="solid"/>
-                      <a:round/>
-                      <a:headEnd type="none" w="med" len="med"/>
-                      <a:tailEnd type="none" w="med" len="med"/>
-                    </a:lnR>
-                    <a:lnT w="12700" cap="flat" cmpd="sng" algn="ctr">
-                      <a:solidFill>
-                        <a:srgbClr val="8DA9C4"/>
-                      </a:solidFill>
-                      <a:prstDash val="solid"/>
-                      <a:round/>
-                      <a:headEnd type="none" w="med" len="med"/>
-                      <a:tailEnd type="none" w="med" len="med"/>
-                    </a:lnT>
-                    <a:lnB w="12700" cap="flat" cmpd="sng" algn="ctr">
-                      <a:solidFill>
-                        <a:srgbClr val="8DA9C4"/>
-                      </a:solidFill>
-                      <a:prstDash val="solid"/>
-                      <a:round/>
-                      <a:headEnd type="none" w="med" len="med"/>
-                      <a:tailEnd type="none" w="med" len="med"/>
-                    </a:lnB>
-                    <a:solidFill>
-                      <a:srgbClr val="0B2545"/>
-                    </a:solidFill>
-                  </a:tcPr>
-                </a:tc>
-                <a:tc>
-                  <a:txBody>
-                    <a:bodyPr/>
-                    <a:lstStyle/>
-                    <a:p>
-                      <a:pPr algn="ctr" indent="0" marL="0">
-                        <a:buNone/>
-                      </a:pPr>
-                      <a:r>
-                        <a:rPr lang="en-US" sz="1500" b="1" dirty="0">
-                          <a:solidFill>
-                            <a:srgbClr val="F6F6F2"/>
-                          </a:solidFill>
-                          <a:latin typeface="Calibri" pitchFamily="34" charset="0"/>
-                          <a:ea typeface="Calibri" pitchFamily="34" charset="-122"/>
-                          <a:cs typeface="Calibri" pitchFamily="34" charset="-120"/>
-                        </a:rPr>
-                        <a:t>ROI</a:t>
-                      </a:r>
-                      <a:endParaRPr lang="en-US" sz="1500" dirty="0">
-                        <a:latin typeface="Calibri" charset="0"/>
-                        <a:ea typeface="Calibri" charset="0"/>
-                        <a:cs typeface="Calibri" charset="0"/>
-                      </a:endParaRPr>
-                    </a:p>
-                  </a:txBody>
-                  <a:tcPr marL="91440" marR="91440" marT="45720" marB="45720">
-                    <a:lnL w="12700" cap="flat" cmpd="sng" algn="ctr">
-                      <a:solidFill>
-                        <a:srgbClr val="8DA9C4"/>
-                      </a:solidFill>
-                      <a:prstDash val="solid"/>
-                      <a:round/>
-                      <a:headEnd type="none" w="med" len="med"/>
-                      <a:tailEnd type="none" w="med" len="med"/>
-                    </a:lnL>
-                    <a:lnR w="12700" cap="flat" cmpd="sng" algn="ctr">
-                      <a:solidFill>
-                        <a:srgbClr val="8DA9C4"/>
-                      </a:solidFill>
-                      <a:prstDash val="solid"/>
-                      <a:round/>
-                      <a:headEnd type="none" w="med" len="med"/>
-                      <a:tailEnd type="none" w="med" len="med"/>
-                    </a:lnR>
-                    <a:lnT w="12700" cap="flat" cmpd="sng" algn="ctr">
-                      <a:solidFill>
-                        <a:srgbClr val="8DA9C4"/>
-                      </a:solidFill>
-                      <a:prstDash val="solid"/>
-                      <a:round/>
-                      <a:headEnd type="none" w="med" len="med"/>
-                      <a:tailEnd type="none" w="med" len="med"/>
-                    </a:lnT>
-                    <a:lnB w="12700" cap="flat" cmpd="sng" algn="ctr">
-                      <a:solidFill>
-                        <a:srgbClr val="8DA9C4"/>
-                      </a:solidFill>
-                      <a:prstDash val="solid"/>
-                      <a:round/>
-                      <a:headEnd type="none" w="med" len="med"/>
-                      <a:tailEnd type="none" w="med" len="med"/>
-                    </a:lnB>
-                    <a:solidFill>
-                      <a:srgbClr val="0B2545"/>
-                    </a:solidFill>
-                  </a:tcPr>
-                </a:tc>
-              </a:tr>
-              <a:tr h="548640">
-                <a:tc>
-                  <a:txBody>
-                    <a:bodyPr/>
-                    <a:lstStyle/>
-                    <a:p>
-                      <a:pPr indent="0" marL="0">
-                        <a:buNone/>
-                      </a:pPr>
-                      <a:r>
-                        <a:rPr lang="en-US" sz="1500" b="1" dirty="0">
-                          <a:solidFill>
-                            <a:srgbClr val="0B2545"/>
-                          </a:solidFill>
-                          <a:latin typeface="Calibri" pitchFamily="34" charset="0"/>
-                          <a:ea typeface="Calibri" pitchFamily="34" charset="-122"/>
-                          <a:cs typeface="Calibri" pitchFamily="34" charset="-120"/>
-                        </a:rPr>
-                        <a:t>Our model @4% edge</a:t>
-                      </a:r>
-                      <a:endParaRPr lang="en-US" sz="1500" dirty="0">
-                        <a:latin typeface="Calibri" charset="0"/>
-                        <a:ea typeface="Calibri" charset="0"/>
-                        <a:cs typeface="Calibri" charset="0"/>
-                      </a:endParaRPr>
-                    </a:p>
-                  </a:txBody>
-                  <a:tcPr marL="91440" marR="91440" marT="45720" marB="45720">
-                    <a:lnL w="12700" cap="flat" cmpd="sng" algn="ctr">
-                      <a:solidFill>
-                        <a:srgbClr val="8DA9C4"/>
-                      </a:solidFill>
-                      <a:prstDash val="solid"/>
-                      <a:round/>
-                      <a:headEnd type="none" w="med" len="med"/>
-                      <a:tailEnd type="none" w="med" len="med"/>
-                    </a:lnL>
-                    <a:lnR w="12700" cap="flat" cmpd="sng" algn="ctr">
-                      <a:solidFill>
-                        <a:srgbClr val="8DA9C4"/>
-                      </a:solidFill>
-                      <a:prstDash val="solid"/>
-                      <a:round/>
-                      <a:headEnd type="none" w="med" len="med"/>
-                      <a:tailEnd type="none" w="med" len="med"/>
-                    </a:lnR>
-                    <a:lnT w="12700" cap="flat" cmpd="sng" algn="ctr">
-                      <a:solidFill>
-                        <a:srgbClr val="8DA9C4"/>
-                      </a:solidFill>
-                      <a:prstDash val="solid"/>
-                      <a:round/>
-                      <a:headEnd type="none" w="med" len="med"/>
-                      <a:tailEnd type="none" w="med" len="med"/>
-                    </a:lnT>
-                    <a:lnB w="12700" cap="flat" cmpd="sng" algn="ctr">
-                      <a:solidFill>
-                        <a:srgbClr val="8DA9C4"/>
-                      </a:solidFill>
-                      <a:prstDash val="solid"/>
-                      <a:round/>
-                      <a:headEnd type="none" w="med" len="med"/>
-                      <a:tailEnd type="none" w="med" len="med"/>
-                    </a:lnB>
-                  </a:tcPr>
-                </a:tc>
-                <a:tc>
-                  <a:txBody>
-                    <a:bodyPr/>
-                    <a:lstStyle/>
-                    <a:p>
-                      <a:pPr algn="ctr" indent="0" marL="0">
-                        <a:buNone/>
-                      </a:pPr>
-                      <a:r>
-                        <a:rPr lang="en-US" sz="1500" dirty="0">
-                          <a:solidFill>
-                            <a:srgbClr val="1A1A1A"/>
-                          </a:solidFill>
-                          <a:latin typeface="Calibri" pitchFamily="34" charset="0"/>
-                          <a:ea typeface="Calibri" pitchFamily="34" charset="-122"/>
-                          <a:cs typeface="Calibri" pitchFamily="34" charset="-120"/>
-                        </a:rPr>
-                        <a:t>34</a:t>
-                      </a:r>
-                      <a:endParaRPr lang="en-US" sz="1500" dirty="0">
-                        <a:latin typeface="Calibri" charset="0"/>
-                        <a:ea typeface="Calibri" charset="0"/>
-                        <a:cs typeface="Calibri" charset="0"/>
-                      </a:endParaRPr>
-                    </a:p>
-                  </a:txBody>
-                  <a:tcPr marL="91440" marR="91440" marT="45720" marB="45720">
-                    <a:lnL w="12700" cap="flat" cmpd="sng" algn="ctr">
-                      <a:solidFill>
-                        <a:srgbClr val="8DA9C4"/>
-                      </a:solidFill>
-                      <a:prstDash val="solid"/>
-                      <a:round/>
-                      <a:headEnd type="none" w="med" len="med"/>
-                      <a:tailEnd type="none" w="med" len="med"/>
-                    </a:lnL>
-                    <a:lnR w="12700" cap="flat" cmpd="sng" algn="ctr">
-                      <a:solidFill>
-                        <a:srgbClr val="8DA9C4"/>
-                      </a:solidFill>
-                      <a:prstDash val="solid"/>
-                      <a:round/>
-                      <a:headEnd type="none" w="med" len="med"/>
-                      <a:tailEnd type="none" w="med" len="med"/>
-                    </a:lnR>
-                    <a:lnT w="12700" cap="flat" cmpd="sng" algn="ctr">
-                      <a:solidFill>
-                        <a:srgbClr val="8DA9C4"/>
-                      </a:solidFill>
-                      <a:prstDash val="solid"/>
-                      <a:round/>
-                      <a:headEnd type="none" w="med" len="med"/>
-                      <a:tailEnd type="none" w="med" len="med"/>
-                    </a:lnT>
-                    <a:lnB w="12700" cap="flat" cmpd="sng" algn="ctr">
-                      <a:solidFill>
-                        <a:srgbClr val="8DA9C4"/>
-                      </a:solidFill>
-                      <a:prstDash val="solid"/>
-                      <a:round/>
-                      <a:headEnd type="none" w="med" len="med"/>
-                      <a:tailEnd type="none" w="med" len="med"/>
-                    </a:lnB>
-                  </a:tcPr>
-                </a:tc>
-                <a:tc>
-                  <a:txBody>
-                    <a:bodyPr/>
-                    <a:lstStyle/>
-                    <a:p>
-                      <a:pPr algn="ctr" indent="0" marL="0">
-                        <a:buNone/>
-                      </a:pPr>
-                      <a:r>
-                        <a:rPr lang="en-US" sz="2000" b="1" dirty="0">
-                          <a:solidFill>
-                            <a:srgbClr val="EEA02B"/>
-                          </a:solidFill>
-                          <a:latin typeface="Calibri" pitchFamily="34" charset="0"/>
-                          <a:ea typeface="Calibri" pitchFamily="34" charset="-122"/>
-                          <a:cs typeface="Calibri" pitchFamily="34" charset="-120"/>
-                        </a:rPr>
-                        <a:t>−40%</a:t>
-                      </a:r>
-                      <a:endParaRPr lang="en-US" sz="2000" dirty="0">
-                        <a:latin typeface="Calibri" charset="0"/>
-                        <a:ea typeface="Calibri" charset="0"/>
-                        <a:cs typeface="Calibri" charset="0"/>
-                      </a:endParaRPr>
-                    </a:p>
-                  </a:txBody>
-                  <a:tcPr marL="91440" marR="91440" marT="45720" marB="45720">
-                    <a:lnL w="12700" cap="flat" cmpd="sng" algn="ctr">
-                      <a:solidFill>
-                        <a:srgbClr val="8DA9C4"/>
-                      </a:solidFill>
-                      <a:prstDash val="solid"/>
-                      <a:round/>
-                      <a:headEnd type="none" w="med" len="med"/>
-                      <a:tailEnd type="none" w="med" len="med"/>
-                    </a:lnL>
-                    <a:lnR w="12700" cap="flat" cmpd="sng" algn="ctr">
-                      <a:solidFill>
-                        <a:srgbClr val="8DA9C4"/>
-                      </a:solidFill>
-                      <a:prstDash val="solid"/>
-                      <a:round/>
-                      <a:headEnd type="none" w="med" len="med"/>
-                      <a:tailEnd type="none" w="med" len="med"/>
-                    </a:lnR>
-                    <a:lnT w="12700" cap="flat" cmpd="sng" algn="ctr">
-                      <a:solidFill>
-                        <a:srgbClr val="8DA9C4"/>
-                      </a:solidFill>
-                      <a:prstDash val="solid"/>
-                      <a:round/>
-                      <a:headEnd type="none" w="med" len="med"/>
-                      <a:tailEnd type="none" w="med" len="med"/>
-                    </a:lnT>
-                    <a:lnB w="12700" cap="flat" cmpd="sng" algn="ctr">
-                      <a:solidFill>
-                        <a:srgbClr val="8DA9C4"/>
-                      </a:solidFill>
-                      <a:prstDash val="solid"/>
-                      <a:round/>
-                      <a:headEnd type="none" w="med" len="med"/>
-                      <a:tailEnd type="none" w="med" len="med"/>
-                    </a:lnB>
-                  </a:tcPr>
-                </a:tc>
-              </a:tr>
-              <a:tr h="548640">
-                <a:tc>
-                  <a:txBody>
-                    <a:bodyPr/>
-                    <a:lstStyle/>
-                    <a:p>
-                      <a:pPr indent="0" marL="0">
-                        <a:buNone/>
-                      </a:pPr>
-                      <a:r>
-                        <a:rPr lang="en-US" sz="1500" dirty="0">
-                          <a:solidFill>
-                            <a:srgbClr val="1A1A1A"/>
-                          </a:solidFill>
-                          <a:latin typeface="Calibri" pitchFamily="34" charset="0"/>
-                          <a:ea typeface="Calibri" pitchFamily="34" charset="-122"/>
-                          <a:cs typeface="Calibri" pitchFamily="34" charset="-120"/>
-                        </a:rPr>
-                        <a:t>Always-favorite</a:t>
-                      </a:r>
-                      <a:endParaRPr lang="en-US" sz="1500" dirty="0">
-                        <a:latin typeface="Calibri" charset="0"/>
-                        <a:ea typeface="Calibri" charset="0"/>
-                        <a:cs typeface="Calibri" charset="0"/>
-                      </a:endParaRPr>
-                    </a:p>
-                  </a:txBody>
-                  <a:tcPr marL="91440" marR="91440" marT="45720" marB="45720">
-                    <a:lnL w="12700" cap="flat" cmpd="sng" algn="ctr">
-                      <a:solidFill>
-                        <a:srgbClr val="8DA9C4"/>
-                      </a:solidFill>
-                      <a:prstDash val="solid"/>
-                      <a:round/>
-                      <a:headEnd type="none" w="med" len="med"/>
-                      <a:tailEnd type="none" w="med" len="med"/>
-                    </a:lnL>
-                    <a:lnR w="12700" cap="flat" cmpd="sng" algn="ctr">
-                      <a:solidFill>
-                        <a:srgbClr val="8DA9C4"/>
-                      </a:solidFill>
-                      <a:prstDash val="solid"/>
-                      <a:round/>
-                      <a:headEnd type="none" w="med" len="med"/>
-                      <a:tailEnd type="none" w="med" len="med"/>
-                    </a:lnR>
-                    <a:lnT w="12700" cap="flat" cmpd="sng" algn="ctr">
-                      <a:solidFill>
-                        <a:srgbClr val="8DA9C4"/>
-                      </a:solidFill>
-                      <a:prstDash val="solid"/>
-                      <a:round/>
-                      <a:headEnd type="none" w="med" len="med"/>
-                      <a:tailEnd type="none" w="med" len="med"/>
-                    </a:lnT>
-                    <a:lnB w="12700" cap="flat" cmpd="sng" algn="ctr">
-                      <a:solidFill>
-                        <a:srgbClr val="8DA9C4"/>
-                      </a:solidFill>
-                      <a:prstDash val="solid"/>
-                      <a:round/>
-                      <a:headEnd type="none" w="med" len="med"/>
-                      <a:tailEnd type="none" w="med" len="med"/>
-                    </a:lnB>
-                  </a:tcPr>
-                </a:tc>
-                <a:tc>
-                  <a:txBody>
-                    <a:bodyPr/>
-                    <a:lstStyle/>
-                    <a:p>
-                      <a:pPr algn="ctr" indent="0" marL="0">
-                        <a:buNone/>
-                      </a:pPr>
-                      <a:r>
-                        <a:rPr lang="en-US" sz="1500" dirty="0">
-                          <a:solidFill>
-                            <a:srgbClr val="1A1A1A"/>
-                          </a:solidFill>
-                          <a:latin typeface="Calibri" pitchFamily="34" charset="0"/>
-                          <a:ea typeface="Calibri" pitchFamily="34" charset="-122"/>
-                          <a:cs typeface="Calibri" pitchFamily="34" charset="-120"/>
-                        </a:rPr>
-                        <a:t>73</a:t>
-                      </a:r>
-                      <a:endParaRPr lang="en-US" sz="1500" dirty="0">
-                        <a:latin typeface="Calibri" charset="0"/>
-                        <a:ea typeface="Calibri" charset="0"/>
-                        <a:cs typeface="Calibri" charset="0"/>
-                      </a:endParaRPr>
-                    </a:p>
-                  </a:txBody>
-                  <a:tcPr marL="91440" marR="91440" marT="45720" marB="45720">
-                    <a:lnL w="12700" cap="flat" cmpd="sng" algn="ctr">
-                      <a:solidFill>
-                        <a:srgbClr val="8DA9C4"/>
-                      </a:solidFill>
-                      <a:prstDash val="solid"/>
-                      <a:round/>
-                      <a:headEnd type="none" w="med" len="med"/>
-                      <a:tailEnd type="none" w="med" len="med"/>
-                    </a:lnL>
-                    <a:lnR w="12700" cap="flat" cmpd="sng" algn="ctr">
-                      <a:solidFill>
-                        <a:srgbClr val="8DA9C4"/>
-                      </a:solidFill>
-                      <a:prstDash val="solid"/>
-                      <a:round/>
-                      <a:headEnd type="none" w="med" len="med"/>
-                      <a:tailEnd type="none" w="med" len="med"/>
-                    </a:lnR>
-                    <a:lnT w="12700" cap="flat" cmpd="sng" algn="ctr">
-                      <a:solidFill>
-                        <a:srgbClr val="8DA9C4"/>
-                      </a:solidFill>
-                      <a:prstDash val="solid"/>
-                      <a:round/>
-                      <a:headEnd type="none" w="med" len="med"/>
-                      <a:tailEnd type="none" w="med" len="med"/>
-                    </a:lnT>
-                    <a:lnB w="12700" cap="flat" cmpd="sng" algn="ctr">
-                      <a:solidFill>
-                        <a:srgbClr val="8DA9C4"/>
-                      </a:solidFill>
-                      <a:prstDash val="solid"/>
-                      <a:round/>
-                      <a:headEnd type="none" w="med" len="med"/>
-                      <a:tailEnd type="none" w="med" len="med"/>
-                    </a:lnB>
-                  </a:tcPr>
-                </a:tc>
-                <a:tc>
-                  <a:txBody>
-                    <a:bodyPr/>
-                    <a:lstStyle/>
-                    <a:p>
-                      <a:pPr algn="ctr" indent="0" marL="0">
-                        <a:buNone/>
-                      </a:pPr>
-                      <a:r>
-                        <a:rPr lang="en-US" sz="1500" dirty="0">
-                          <a:solidFill>
-                            <a:srgbClr val="1A1A1A"/>
-                          </a:solidFill>
-                          <a:latin typeface="Calibri" pitchFamily="34" charset="0"/>
-                          <a:ea typeface="Calibri" pitchFamily="34" charset="-122"/>
-                          <a:cs typeface="Calibri" pitchFamily="34" charset="-120"/>
-                        </a:rPr>
-                        <a:t>+34%</a:t>
-                      </a:r>
-                      <a:endParaRPr lang="en-US" sz="1500" dirty="0">
-                        <a:latin typeface="Calibri" charset="0"/>
-                        <a:ea typeface="Calibri" charset="0"/>
-                        <a:cs typeface="Calibri" charset="0"/>
-                      </a:endParaRPr>
-                    </a:p>
-                  </a:txBody>
-                  <a:tcPr marL="91440" marR="91440" marT="45720" marB="45720">
-                    <a:lnL w="12700" cap="flat" cmpd="sng" algn="ctr">
-                      <a:solidFill>
-                        <a:srgbClr val="8DA9C4"/>
-                      </a:solidFill>
-                      <a:prstDash val="solid"/>
-                      <a:round/>
-                      <a:headEnd type="none" w="med" len="med"/>
-                      <a:tailEnd type="none" w="med" len="med"/>
-                    </a:lnL>
-                    <a:lnR w="12700" cap="flat" cmpd="sng" algn="ctr">
-                      <a:solidFill>
-                        <a:srgbClr val="8DA9C4"/>
-                      </a:solidFill>
-                      <a:prstDash val="solid"/>
-                      <a:round/>
-                      <a:headEnd type="none" w="med" len="med"/>
-                      <a:tailEnd type="none" w="med" len="med"/>
-                    </a:lnR>
-                    <a:lnT w="12700" cap="flat" cmpd="sng" algn="ctr">
-                      <a:solidFill>
-                        <a:srgbClr val="8DA9C4"/>
-                      </a:solidFill>
-                      <a:prstDash val="solid"/>
-                      <a:round/>
-                      <a:headEnd type="none" w="med" len="med"/>
-                      <a:tailEnd type="none" w="med" len="med"/>
-                    </a:lnT>
-                    <a:lnB w="12700" cap="flat" cmpd="sng" algn="ctr">
-                      <a:solidFill>
-                        <a:srgbClr val="8DA9C4"/>
-                      </a:solidFill>
-                      <a:prstDash val="solid"/>
-                      <a:round/>
-                      <a:headEnd type="none" w="med" len="med"/>
-                      <a:tailEnd type="none" w="med" len="med"/>
-                    </a:lnB>
-                  </a:tcPr>
-                </a:tc>
-              </a:tr>
-              <a:tr h="548640">
-                <a:tc>
-                  <a:txBody>
-                    <a:bodyPr/>
-                    <a:lstStyle/>
-                    <a:p>
-                      <a:pPr indent="0" marL="0">
-                        <a:buNone/>
-                      </a:pPr>
-                      <a:r>
-                        <a:rPr lang="en-US" sz="1500" dirty="0">
-                          <a:solidFill>
-                            <a:srgbClr val="1A1A1A"/>
-                          </a:solidFill>
-                          <a:latin typeface="Calibri" pitchFamily="34" charset="0"/>
-                          <a:ea typeface="Calibri" pitchFamily="34" charset="-122"/>
-                          <a:cs typeface="Calibri" pitchFamily="34" charset="-120"/>
-                        </a:rPr>
-                        <a:t>Always-trailing</a:t>
-                      </a:r>
-                      <a:endParaRPr lang="en-US" sz="1500" dirty="0">
-                        <a:latin typeface="Calibri" charset="0"/>
-                        <a:ea typeface="Calibri" charset="0"/>
-                        <a:cs typeface="Calibri" charset="0"/>
-                      </a:endParaRPr>
-                    </a:p>
-                  </a:txBody>
-                  <a:tcPr marL="91440" marR="91440" marT="45720" marB="45720">
-                    <a:lnL w="12700" cap="flat" cmpd="sng" algn="ctr">
-                      <a:solidFill>
-                        <a:srgbClr val="8DA9C4"/>
-                      </a:solidFill>
-                      <a:prstDash val="solid"/>
-                      <a:round/>
-                      <a:headEnd type="none" w="med" len="med"/>
-                      <a:tailEnd type="none" w="med" len="med"/>
-                    </a:lnL>
-                    <a:lnR w="12700" cap="flat" cmpd="sng" algn="ctr">
-                      <a:solidFill>
-                        <a:srgbClr val="8DA9C4"/>
-                      </a:solidFill>
-                      <a:prstDash val="solid"/>
-                      <a:round/>
-                      <a:headEnd type="none" w="med" len="med"/>
-                      <a:tailEnd type="none" w="med" len="med"/>
-                    </a:lnR>
-                    <a:lnT w="12700" cap="flat" cmpd="sng" algn="ctr">
-                      <a:solidFill>
-                        <a:srgbClr val="8DA9C4"/>
-                      </a:solidFill>
-                      <a:prstDash val="solid"/>
-                      <a:round/>
-                      <a:headEnd type="none" w="med" len="med"/>
-                      <a:tailEnd type="none" w="med" len="med"/>
-                    </a:lnT>
-                    <a:lnB w="12700" cap="flat" cmpd="sng" algn="ctr">
-                      <a:solidFill>
-                        <a:srgbClr val="8DA9C4"/>
-                      </a:solidFill>
-                      <a:prstDash val="solid"/>
-                      <a:round/>
-                      <a:headEnd type="none" w="med" len="med"/>
-                      <a:tailEnd type="none" w="med" len="med"/>
-                    </a:lnB>
-                  </a:tcPr>
-                </a:tc>
-                <a:tc>
-                  <a:txBody>
-                    <a:bodyPr/>
-                    <a:lstStyle/>
-                    <a:p>
-                      <a:pPr algn="ctr" indent="0" marL="0">
-                        <a:buNone/>
-                      </a:pPr>
-                      <a:r>
-                        <a:rPr lang="en-US" sz="1500" dirty="0">
-                          <a:solidFill>
-                            <a:srgbClr val="1A1A1A"/>
-                          </a:solidFill>
-                          <a:latin typeface="Calibri" pitchFamily="34" charset="0"/>
-                          <a:ea typeface="Calibri" pitchFamily="34" charset="-122"/>
-                          <a:cs typeface="Calibri" pitchFamily="34" charset="-120"/>
-                        </a:rPr>
-                        <a:t>73</a:t>
-                      </a:r>
-                      <a:endParaRPr lang="en-US" sz="1500" dirty="0">
-                        <a:latin typeface="Calibri" charset="0"/>
-                        <a:ea typeface="Calibri" charset="0"/>
-                        <a:cs typeface="Calibri" charset="0"/>
-                      </a:endParaRPr>
-                    </a:p>
-                  </a:txBody>
-                  <a:tcPr marL="91440" marR="91440" marT="45720" marB="45720">
-                    <a:lnL w="12700" cap="flat" cmpd="sng" algn="ctr">
-                      <a:solidFill>
-                        <a:srgbClr val="8DA9C4"/>
-                      </a:solidFill>
-                      <a:prstDash val="solid"/>
-                      <a:round/>
-                      <a:headEnd type="none" w="med" len="med"/>
-                      <a:tailEnd type="none" w="med" len="med"/>
-                    </a:lnL>
-                    <a:lnR w="12700" cap="flat" cmpd="sng" algn="ctr">
-                      <a:solidFill>
-                        <a:srgbClr val="8DA9C4"/>
-                      </a:solidFill>
-                      <a:prstDash val="solid"/>
-                      <a:round/>
-                      <a:headEnd type="none" w="med" len="med"/>
-                      <a:tailEnd type="none" w="med" len="med"/>
-                    </a:lnR>
-                    <a:lnT w="12700" cap="flat" cmpd="sng" algn="ctr">
-                      <a:solidFill>
-                        <a:srgbClr val="8DA9C4"/>
-                      </a:solidFill>
-                      <a:prstDash val="solid"/>
-                      <a:round/>
-                      <a:headEnd type="none" w="med" len="med"/>
-                      <a:tailEnd type="none" w="med" len="med"/>
-                    </a:lnT>
-                    <a:lnB w="12700" cap="flat" cmpd="sng" algn="ctr">
-                      <a:solidFill>
-                        <a:srgbClr val="8DA9C4"/>
-                      </a:solidFill>
-                      <a:prstDash val="solid"/>
-                      <a:round/>
-                      <a:headEnd type="none" w="med" len="med"/>
-                      <a:tailEnd type="none" w="med" len="med"/>
-                    </a:lnB>
-                  </a:tcPr>
-                </a:tc>
-                <a:tc>
-                  <a:txBody>
-                    <a:bodyPr/>
-                    <a:lstStyle/>
-                    <a:p>
-                      <a:pPr algn="ctr" indent="0" marL="0">
-                        <a:buNone/>
-                      </a:pPr>
-                      <a:r>
-                        <a:rPr lang="en-US" sz="1500" dirty="0">
-                          <a:solidFill>
-                            <a:srgbClr val="1A1A1A"/>
-                          </a:solidFill>
-                          <a:latin typeface="Calibri" pitchFamily="34" charset="0"/>
-                          <a:ea typeface="Calibri" pitchFamily="34" charset="-122"/>
-                          <a:cs typeface="Calibri" pitchFamily="34" charset="-120"/>
-                        </a:rPr>
-                        <a:t>−81%</a:t>
-                      </a:r>
-                      <a:endParaRPr lang="en-US" sz="1500" dirty="0">
-                        <a:latin typeface="Calibri" charset="0"/>
-                        <a:ea typeface="Calibri" charset="0"/>
-                        <a:cs typeface="Calibri" charset="0"/>
-                      </a:endParaRPr>
-                    </a:p>
-                  </a:txBody>
-                  <a:tcPr marL="91440" marR="91440" marT="45720" marB="45720">
-                    <a:lnL w="12700" cap="flat" cmpd="sng" algn="ctr">
-                      <a:solidFill>
-                        <a:srgbClr val="8DA9C4"/>
-                      </a:solidFill>
-                      <a:prstDash val="solid"/>
-                      <a:round/>
-                      <a:headEnd type="none" w="med" len="med"/>
-                      <a:tailEnd type="none" w="med" len="med"/>
-                    </a:lnL>
-                    <a:lnR w="12700" cap="flat" cmpd="sng" algn="ctr">
-                      <a:solidFill>
-                        <a:srgbClr val="8DA9C4"/>
-                      </a:solidFill>
-                      <a:prstDash val="solid"/>
-                      <a:round/>
-                      <a:headEnd type="none" w="med" len="med"/>
-                      <a:tailEnd type="none" w="med" len="med"/>
-                    </a:lnR>
-                    <a:lnT w="12700" cap="flat" cmpd="sng" algn="ctr">
-                      <a:solidFill>
-                        <a:srgbClr val="8DA9C4"/>
-                      </a:solidFill>
-                      <a:prstDash val="solid"/>
-                      <a:round/>
-                      <a:headEnd type="none" w="med" len="med"/>
-                      <a:tailEnd type="none" w="med" len="med"/>
-                    </a:lnT>
-                    <a:lnB w="12700" cap="flat" cmpd="sng" algn="ctr">
-                      <a:solidFill>
-                        <a:srgbClr val="8DA9C4"/>
-                      </a:solidFill>
-                      <a:prstDash val="solid"/>
-                      <a:round/>
-                      <a:headEnd type="none" w="med" len="med"/>
-                      <a:tailEnd type="none" w="med" len="med"/>
-                    </a:lnB>
-                  </a:tcPr>
-                </a:tc>
-              </a:tr>
-              <a:tr h="548640">
-                <a:tc>
-                  <a:txBody>
-                    <a:bodyPr/>
-                    <a:lstStyle/>
-                    <a:p>
-                      <a:pPr indent="0" marL="0">
-                        <a:buNone/>
-                      </a:pPr>
-                      <a:r>
-                        <a:rPr lang="en-US" sz="1500" dirty="0">
-                          <a:solidFill>
-                            <a:srgbClr val="1A1A1A"/>
-                          </a:solidFill>
-                          <a:latin typeface="Calibri" pitchFamily="34" charset="0"/>
-                          <a:ea typeface="Calibri" pitchFamily="34" charset="-122"/>
-                          <a:cs typeface="Calibri" pitchFamily="34" charset="-120"/>
-                        </a:rPr>
-                        <a:t>Random</a:t>
-                      </a:r>
-                      <a:endParaRPr lang="en-US" sz="1500" dirty="0">
-                        <a:latin typeface="Calibri" charset="0"/>
-                        <a:ea typeface="Calibri" charset="0"/>
-                        <a:cs typeface="Calibri" charset="0"/>
-                      </a:endParaRPr>
-                    </a:p>
-                  </a:txBody>
-                  <a:tcPr marL="91440" marR="91440" marT="45720" marB="45720">
-                    <a:lnL w="12700" cap="flat" cmpd="sng" algn="ctr">
-                      <a:solidFill>
-                        <a:srgbClr val="8DA9C4"/>
-                      </a:solidFill>
-                      <a:prstDash val="solid"/>
-                      <a:round/>
-                      <a:headEnd type="none" w="med" len="med"/>
-                      <a:tailEnd type="none" w="med" len="med"/>
-                    </a:lnL>
-                    <a:lnR w="12700" cap="flat" cmpd="sng" algn="ctr">
-                      <a:solidFill>
-                        <a:srgbClr val="8DA9C4"/>
-                      </a:solidFill>
-                      <a:prstDash val="solid"/>
-                      <a:round/>
-                      <a:headEnd type="none" w="med" len="med"/>
-                      <a:tailEnd type="none" w="med" len="med"/>
-                    </a:lnR>
-                    <a:lnT w="12700" cap="flat" cmpd="sng" algn="ctr">
-                      <a:solidFill>
-                        <a:srgbClr val="8DA9C4"/>
-                      </a:solidFill>
-                      <a:prstDash val="solid"/>
-                      <a:round/>
-                      <a:headEnd type="none" w="med" len="med"/>
-                      <a:tailEnd type="none" w="med" len="med"/>
-                    </a:lnT>
-                    <a:lnB w="12700" cap="flat" cmpd="sng" algn="ctr">
-                      <a:solidFill>
-                        <a:srgbClr val="8DA9C4"/>
-                      </a:solidFill>
-                      <a:prstDash val="solid"/>
-                      <a:round/>
-                      <a:headEnd type="none" w="med" len="med"/>
-                      <a:tailEnd type="none" w="med" len="med"/>
-                    </a:lnB>
-                  </a:tcPr>
-                </a:tc>
-                <a:tc>
-                  <a:txBody>
-                    <a:bodyPr/>
-                    <a:lstStyle/>
-                    <a:p>
-                      <a:pPr algn="ctr" indent="0" marL="0">
-                        <a:buNone/>
-                      </a:pPr>
-                      <a:r>
-                        <a:rPr lang="en-US" sz="1500" dirty="0">
-                          <a:solidFill>
-                            <a:srgbClr val="1A1A1A"/>
-                          </a:solidFill>
-                          <a:latin typeface="Calibri" pitchFamily="34" charset="0"/>
-                          <a:ea typeface="Calibri" pitchFamily="34" charset="-122"/>
-                          <a:cs typeface="Calibri" pitchFamily="34" charset="-120"/>
-                        </a:rPr>
-                        <a:t>73</a:t>
-                      </a:r>
-                      <a:endParaRPr lang="en-US" sz="1500" dirty="0">
-                        <a:latin typeface="Calibri" charset="0"/>
-                        <a:ea typeface="Calibri" charset="0"/>
-                        <a:cs typeface="Calibri" charset="0"/>
-                      </a:endParaRPr>
-                    </a:p>
-                  </a:txBody>
-                  <a:tcPr marL="91440" marR="91440" marT="45720" marB="45720">
-                    <a:lnL w="12700" cap="flat" cmpd="sng" algn="ctr">
-                      <a:solidFill>
-                        <a:srgbClr val="8DA9C4"/>
-                      </a:solidFill>
-                      <a:prstDash val="solid"/>
-                      <a:round/>
-                      <a:headEnd type="none" w="med" len="med"/>
-                      <a:tailEnd type="none" w="med" len="med"/>
-                    </a:lnL>
-                    <a:lnR w="12700" cap="flat" cmpd="sng" algn="ctr">
-                      <a:solidFill>
-                        <a:srgbClr val="8DA9C4"/>
-                      </a:solidFill>
-                      <a:prstDash val="solid"/>
-                      <a:round/>
-                      <a:headEnd type="none" w="med" len="med"/>
-                      <a:tailEnd type="none" w="med" len="med"/>
-                    </a:lnR>
-                    <a:lnT w="12700" cap="flat" cmpd="sng" algn="ctr">
-                      <a:solidFill>
-                        <a:srgbClr val="8DA9C4"/>
-                      </a:solidFill>
-                      <a:prstDash val="solid"/>
-                      <a:round/>
-                      <a:headEnd type="none" w="med" len="med"/>
-                      <a:tailEnd type="none" w="med" len="med"/>
-                    </a:lnT>
-                    <a:lnB w="12700" cap="flat" cmpd="sng" algn="ctr">
-                      <a:solidFill>
-                        <a:srgbClr val="8DA9C4"/>
-                      </a:solidFill>
-                      <a:prstDash val="solid"/>
-                      <a:round/>
-                      <a:headEnd type="none" w="med" len="med"/>
-                      <a:tailEnd type="none" w="med" len="med"/>
-                    </a:lnB>
-                  </a:tcPr>
-                </a:tc>
-                <a:tc>
-                  <a:txBody>
-                    <a:bodyPr/>
-                    <a:lstStyle/>
-                    <a:p>
-                      <a:pPr algn="ctr" indent="0" marL="0">
-                        <a:buNone/>
-                      </a:pPr>
-                      <a:r>
-                        <a:rPr lang="en-US" sz="1500" dirty="0">
-                          <a:solidFill>
-                            <a:srgbClr val="1A1A1A"/>
-                          </a:solidFill>
-                          <a:latin typeface="Calibri" pitchFamily="34" charset="0"/>
-                          <a:ea typeface="Calibri" pitchFamily="34" charset="-122"/>
-                          <a:cs typeface="Calibri" pitchFamily="34" charset="-120"/>
-                        </a:rPr>
-                        <a:t>−31%</a:t>
-                      </a:r>
-                      <a:endParaRPr lang="en-US" sz="1500" dirty="0">
-                        <a:latin typeface="Calibri" charset="0"/>
-                        <a:ea typeface="Calibri" charset="0"/>
-                        <a:cs typeface="Calibri" charset="0"/>
-                      </a:endParaRPr>
-                    </a:p>
-                  </a:txBody>
-                  <a:tcPr marL="91440" marR="91440" marT="45720" marB="45720">
-                    <a:lnL w="12700" cap="flat" cmpd="sng" algn="ctr">
-                      <a:solidFill>
-                        <a:srgbClr val="8DA9C4"/>
-                      </a:solidFill>
-                      <a:prstDash val="solid"/>
-                      <a:round/>
-                      <a:headEnd type="none" w="med" len="med"/>
-                      <a:tailEnd type="none" w="med" len="med"/>
-                    </a:lnL>
-                    <a:lnR w="12700" cap="flat" cmpd="sng" algn="ctr">
-                      <a:solidFill>
-                        <a:srgbClr val="8DA9C4"/>
-                      </a:solidFill>
-                      <a:prstDash val="solid"/>
-                      <a:round/>
-                      <a:headEnd type="none" w="med" len="med"/>
-                      <a:tailEnd type="none" w="med" len="med"/>
-                    </a:lnR>
-                    <a:lnT w="12700" cap="flat" cmpd="sng" algn="ctr">
-                      <a:solidFill>
-                        <a:srgbClr val="8DA9C4"/>
-                      </a:solidFill>
-                      <a:prstDash val="solid"/>
-                      <a:round/>
-                      <a:headEnd type="none" w="med" len="med"/>
-                      <a:tailEnd type="none" w="med" len="med"/>
-                    </a:lnT>
-                    <a:lnB w="12700" cap="flat" cmpd="sng" algn="ctr">
-                      <a:solidFill>
-                        <a:srgbClr val="8DA9C4"/>
-                      </a:solidFill>
-                      <a:prstDash val="solid"/>
-                      <a:round/>
-                      <a:headEnd type="none" w="med" len="med"/>
-                      <a:tailEnd type="none" w="med" len="med"/>
-                    </a:lnB>
-                  </a:tcPr>
-                </a:tc>
-              </a:tr>
-            </a:tbl>
-          </a:graphicData>
-        </a:graphic>
-      </p:graphicFrame>
+      <p:pic>
+        <p:nvPicPr>
+          <p:cNvPr id="5" name="Image 0" descr="slides/figures/pilot_roi.png">    </p:cNvPr>
+          <p:cNvPicPr>
+            <a:picLocks noChangeAspect="1"/>
+          </p:cNvPicPr>
+          <p:nvPr/>
+        </p:nvPicPr>
+        <p:blipFill>
+          <a:blip r:embed="rId1"/>
+          <a:stretch>
+            <a:fillRect/>
+          </a:stretch>
+        </p:blipFill>
+        <p:spPr>
+          <a:xfrm>
+            <a:off x="365760" y="1417320"/>
+            <a:ext cx="6858000" cy="4572000"/>
+          </a:xfrm>
+          <a:prstGeom prst="rect">
+            <a:avLst/>
+          </a:prstGeom>
+        </p:spPr>
+      </p:pic>
       <p:sp>
         <p:nvSpPr>
           <p:cNvPr id="6" name="Shape 3"/>
@@ -3379,12 +2378,12 @@
         </p:nvSpPr>
         <p:spPr>
           <a:xfrm>
-            <a:off x="6263640" y="1554480"/>
-            <a:ext cx="5486400" cy="4572000"/>
+            <a:off x="7360920" y="1417320"/>
+            <a:ext cx="4434840" cy="4617720"/>
           </a:xfrm>
           <a:prstGeom prst="roundRect">
             <a:avLst>
-              <a:gd name="adj" fmla="val 2000"/>
+              <a:gd name="adj" fmla="val 2062"/>
             </a:avLst>
           </a:prstGeom>
           <a:solidFill>
@@ -3406,8 +2405,8 @@
         </p:nvSpPr>
         <p:spPr>
           <a:xfrm>
-            <a:off x="6492240" y="1691640"/>
-            <a:ext cx="5120640" cy="457200"/>
+            <a:off x="7589520" y="1554480"/>
+            <a:ext cx="4114800" cy="502920"/>
           </a:xfrm>
           <a:prstGeom prst="rect">
             <a:avLst/>
@@ -3423,7 +2422,7 @@
               <a:buNone/>
             </a:pPr>
             <a:r>
-              <a:rPr lang="en-US" sz="2000" b="1" dirty="0">
+              <a:rPr lang="en-US" sz="1900" b="1" dirty="0">
                 <a:solidFill>
                   <a:srgbClr val="0B2545"/>
                 </a:solidFill>
@@ -3433,7 +2432,7 @@
               </a:rPr>
               <a:t>The lesson IS the result.</a:t>
             </a:r>
-            <a:endParaRPr lang="en-US" sz="2000" dirty="0"/>
+            <a:endParaRPr lang="en-US" sz="1900" dirty="0"/>
           </a:p>
         </p:txBody>
       </p:sp>
@@ -3445,8 +2444,8 @@
         </p:nvSpPr>
         <p:spPr>
           <a:xfrm>
-            <a:off x="6492240" y="2240280"/>
-            <a:ext cx="5120640" cy="1097280"/>
+            <a:off x="7589520" y="2103120"/>
+            <a:ext cx="4114800" cy="594360"/>
           </a:xfrm>
           <a:prstGeom prst="rect">
             <a:avLst/>
@@ -3462,7 +2461,7 @@
               <a:buNone/>
             </a:pPr>
             <a:r>
-              <a:rPr lang="en-US" sz="1400" dirty="0">
+              <a:rPr lang="en-US" sz="1300" dirty="0">
                 <a:solidFill>
                   <a:srgbClr val="1A1A1A"/>
                 </a:solidFill>
@@ -3470,9 +2469,9 @@
                 <a:ea typeface="Calibri" pitchFamily="34" charset="-122"/>
                 <a:cs typeface="Calibri" pitchFamily="34" charset="-120"/>
               </a:rPr>
-              <a:t>Model faded SA (underdog) early when the score was close. OKC pulled away and won 127–114.</a:t>
-            </a:r>
-            <a:endParaRPr lang="en-US" sz="1400" dirty="0"/>
+              <a:t>Model faded SA (underdog) early when the score was close.</a:t>
+            </a:r>
+            <a:endParaRPr lang="en-US" sz="1300" dirty="0"/>
           </a:p>
         </p:txBody>
       </p:sp>
@@ -3484,8 +2483,8 @@
         </p:nvSpPr>
         <p:spPr>
           <a:xfrm>
-            <a:off x="6492240" y="3337560"/>
-            <a:ext cx="5120640" cy="1188720"/>
+            <a:off x="7589520" y="2606040"/>
+            <a:ext cx="4114800" cy="365760"/>
           </a:xfrm>
           <a:prstGeom prst="rect">
             <a:avLst/>
@@ -3501,7 +2500,7 @@
               <a:buNone/>
             </a:pPr>
             <a:r>
-              <a:rPr lang="en-US" sz="1400" dirty="0">
+              <a:rPr lang="en-US" sz="1300" dirty="0">
                 <a:solidFill>
                   <a:srgbClr val="1A1A1A"/>
                 </a:solidFill>
@@ -3509,126 +2508,165 @@
                 <a:ea typeface="Calibri" pitchFamily="34" charset="-122"/>
                 <a:cs typeface="Calibri" pitchFamily="34" charset="-120"/>
               </a:rPr>
-              <a:t>'Always favorite' looks brilliant — </a:t>
-            </a:r>
+              <a:t>OKC pulled away and won 127–114.</a:t>
+            </a:r>
+            <a:endParaRPr lang="en-US" sz="1300" dirty="0"/>
+          </a:p>
+        </p:txBody>
+      </p:sp>
+      <p:sp>
+        <p:nvSpPr>
+          <p:cNvPr id="10" name="Text 7"/>
+          <p:cNvSpPr/>
+          <p:nvPr/>
+        </p:nvSpPr>
+        <p:spPr>
+          <a:xfrm>
+            <a:off x="7589520" y="3108960"/>
+            <a:ext cx="4114800" cy="1371600"/>
+          </a:xfrm>
+          <a:prstGeom prst="rect">
+            <a:avLst/>
+          </a:prstGeom>
+          <a:noFill/>
+          <a:ln/>
+        </p:spPr>
+        <p:txBody>
+          <a:bodyPr wrap="square" rtlCol="0" anchor="ctr"/>
+          <a:lstStyle/>
+          <a:p>
             <a:pPr indent="0" marL="0">
               <a:buNone/>
             </a:pPr>
             <a:r>
-              <a:rPr lang="en-US" sz="1400" i="1" dirty="0">
-                <a:solidFill>
-                  <a:srgbClr val="13315C"/>
+              <a:rPr lang="en-US" sz="1300" dirty="0">
+                <a:solidFill>
+                  <a:srgbClr val="1A1A1A"/>
                 </a:solidFill>
                 <a:latin typeface="Calibri" pitchFamily="34" charset="0"/>
                 <a:ea typeface="Calibri" pitchFamily="34" charset="-122"/>
                 <a:cs typeface="Calibri" pitchFamily="34" charset="-120"/>
               </a:rPr>
-              <a:t>only because the favorite happened to win this one game.</a:t>
-            </a:r>
-            <a:endParaRPr lang="en-US" sz="1400" dirty="0"/>
-          </a:p>
-        </p:txBody>
-      </p:sp>
-      <p:sp>
-        <p:nvSpPr>
-          <p:cNvPr id="10" name="Text 7"/>
-          <p:cNvSpPr/>
-          <p:nvPr/>
-        </p:nvSpPr>
-        <p:spPr>
-          <a:xfrm>
-            <a:off x="6492240" y="4572000"/>
-            <a:ext cx="5120640" cy="1371600"/>
-          </a:xfrm>
-          <a:prstGeom prst="rect">
-            <a:avLst/>
-          </a:prstGeom>
-          <a:noFill/>
-          <a:ln/>
-        </p:spPr>
-        <p:txBody>
-          <a:bodyPr wrap="square" rtlCol="0" anchor="ctr"/>
-          <a:lstStyle/>
-          <a:p>
+              <a:t>'Always favorite' looks brilliant — </a:t>
+            </a:r>
             <a:pPr indent="0" marL="0">
               <a:buNone/>
             </a:pPr>
             <a:r>
-              <a:rPr lang="en-US" sz="1400" dirty="0">
-                <a:solidFill>
-                  <a:srgbClr val="1A1A1A"/>
+              <a:rPr lang="en-US" sz="1300" i="1" dirty="0">
+                <a:solidFill>
+                  <a:srgbClr val="13315C"/>
                 </a:solidFill>
                 <a:latin typeface="Calibri" pitchFamily="34" charset="0"/>
                 <a:ea typeface="Calibri" pitchFamily="34" charset="-122"/>
                 <a:cs typeface="Calibri" pitchFamily="34" charset="-120"/>
               </a:rPr>
-              <a:t>This is the </a:t>
-            </a:r>
+              <a:t>only because the favorite happened to win this one game.</a:t>
+            </a:r>
+            <a:endParaRPr lang="en-US" sz="1300" dirty="0"/>
+          </a:p>
+        </p:txBody>
+      </p:sp>
+      <p:sp>
+        <p:nvSpPr>
+          <p:cNvPr id="11" name="Text 8"/>
+          <p:cNvSpPr/>
+          <p:nvPr/>
+        </p:nvSpPr>
+        <p:spPr>
+          <a:xfrm>
+            <a:off x="7589520" y="4572000"/>
+            <a:ext cx="4114800" cy="1371600"/>
+          </a:xfrm>
+          <a:prstGeom prst="rect">
+            <a:avLst/>
+          </a:prstGeom>
+          <a:noFill/>
+          <a:ln/>
+        </p:spPr>
+        <p:txBody>
+          <a:bodyPr wrap="square" rtlCol="0" anchor="ctr"/>
+          <a:lstStyle/>
+          <a:p>
             <a:pPr indent="0" marL="0">
               <a:buNone/>
             </a:pPr>
             <a:r>
-              <a:rPr lang="en-US" sz="1400" b="1" dirty="0">
-                <a:solidFill>
-                  <a:srgbClr val="EEA02B"/>
+              <a:rPr lang="en-US" sz="1300" dirty="0">
+                <a:solidFill>
+                  <a:srgbClr val="1A1A1A"/>
                 </a:solidFill>
                 <a:latin typeface="Calibri" pitchFamily="34" charset="0"/>
                 <a:ea typeface="Calibri" pitchFamily="34" charset="-122"/>
                 <a:cs typeface="Calibri" pitchFamily="34" charset="-120"/>
               </a:rPr>
-              <a:t>n=1 problem</a:t>
+              <a:t>This is the </a:t>
             </a:r>
             <a:pPr indent="0" marL="0">
               <a:buNone/>
             </a:pPr>
             <a:r>
-              <a:rPr lang="en-US" sz="1400" dirty="0">
-                <a:solidFill>
-                  <a:srgbClr val="1A1A1A"/>
+              <a:rPr lang="en-US" sz="1300" b="1" dirty="0">
+                <a:solidFill>
+                  <a:srgbClr val="EEA02B"/>
                 </a:solidFill>
                 <a:latin typeface="Calibri" pitchFamily="34" charset="0"/>
                 <a:ea typeface="Calibri" pitchFamily="34" charset="-122"/>
                 <a:cs typeface="Calibri" pitchFamily="34" charset="-120"/>
               </a:rPr>
-              <a:t> made tangible — the methodological backbone of the project.</a:t>
-            </a:r>
-            <a:endParaRPr lang="en-US" sz="1400" dirty="0"/>
-          </a:p>
-        </p:txBody>
-      </p:sp>
-      <p:sp>
-        <p:nvSpPr>
-          <p:cNvPr id="11" name="Text 8"/>
-          <p:cNvSpPr/>
-          <p:nvPr/>
-        </p:nvSpPr>
-        <p:spPr>
-          <a:xfrm>
-            <a:off x="502920" y="6492240"/>
-            <a:ext cx="7315200" cy="274320"/>
-          </a:xfrm>
-          <a:prstGeom prst="rect">
-            <a:avLst/>
-          </a:prstGeom>
-          <a:noFill/>
-          <a:ln/>
-        </p:spPr>
-        <p:txBody>
-          <a:bodyPr wrap="square" rtlCol="0" anchor="ctr"/>
-          <a:lstStyle/>
-          <a:p>
+              <a:t>n=1 problem</a:t>
+            </a:r>
             <a:pPr indent="0" marL="0">
               <a:buNone/>
             </a:pPr>
             <a:r>
-              <a:rPr lang="en-US" sz="1000" dirty="0">
-                <a:solidFill>
-                  <a:srgbClr val="8DA9C4"/>
+              <a:rPr lang="en-US" sz="1300" dirty="0">
+                <a:solidFill>
+                  <a:srgbClr val="1A1A1A"/>
                 </a:solidFill>
                 <a:latin typeface="Calibri" pitchFamily="34" charset="0"/>
                 <a:ea typeface="Calibri" pitchFamily="34" charset="-122"/>
                 <a:cs typeface="Calibri" pitchFamily="34" charset="-120"/>
               </a:rPr>
+              <a:t> made tangible — the methodological backbone of the project.</a:t>
+            </a:r>
+            <a:endParaRPr lang="en-US" sz="1300" dirty="0"/>
+          </a:p>
+        </p:txBody>
+      </p:sp>
+      <p:sp>
+        <p:nvSpPr>
+          <p:cNvPr id="12" name="Text 9"/>
+          <p:cNvSpPr/>
+          <p:nvPr/>
+        </p:nvSpPr>
+        <p:spPr>
+          <a:xfrm>
+            <a:off x="502920" y="6492240"/>
+            <a:ext cx="7315200" cy="274320"/>
+          </a:xfrm>
+          <a:prstGeom prst="rect">
+            <a:avLst/>
+          </a:prstGeom>
+          <a:noFill/>
+          <a:ln/>
+        </p:spPr>
+        <p:txBody>
+          <a:bodyPr wrap="square" rtlCol="0" anchor="ctr"/>
+          <a:lstStyle/>
+          <a:p>
+            <a:pPr indent="0" marL="0">
+              <a:buNone/>
+            </a:pPr>
+            <a:r>
+              <a:rPr lang="en-US" sz="1000" dirty="0">
+                <a:solidFill>
+                  <a:srgbClr val="8DA9C4"/>
+                </a:solidFill>
+                <a:latin typeface="Calibri" pitchFamily="34" charset="0"/>
+                <a:ea typeface="Calibri" pitchFamily="34" charset="-122"/>
+                <a:cs typeface="Calibri" pitchFamily="34" charset="-120"/>
+              </a:rPr>
               <a:t>STATS 211 · NBA Mispricing · Sit &amp; Manathattai</a:t>
             </a:r>
             <a:endParaRPr lang="en-US" sz="1000" dirty="0"/>
@@ -3637,7 +2675,7 @@
       </p:sp>
       <p:sp>
         <p:nvSpPr>
-          <p:cNvPr id="12" name="Text 9"/>
+          <p:cNvPr id="13" name="Text 10"/>
           <p:cNvSpPr/>
           <p:nvPr/>
         </p:nvSpPr>
@@ -3714,7 +2752,7 @@
         </p:nvSpPr>
         <p:spPr>
           <a:xfrm>
-            <a:off x="502920" y="256032"/>
+            <a:off x="502920" y="228600"/>
             <a:ext cx="11247120" cy="777240"/>
           </a:xfrm>
           <a:prstGeom prst="rect">
@@ -3753,7 +2791,7 @@
         </p:nvSpPr>
         <p:spPr>
           <a:xfrm>
-            <a:off x="502920" y="960120"/>
+            <a:off x="502920" y="932688"/>
             <a:ext cx="11247120" cy="365760"/>
           </a:xfrm>
           <a:prstGeom prst="rect">
@@ -3778,7 +2816,7 @@
                 <a:ea typeface="Calibri" pitchFamily="34" charset="-122"/>
                 <a:cs typeface="Calibri" pitchFamily="34" charset="-120"/>
               </a:rPr>
-              <a:t>Two backtests, opposite results · same model family</a:t>
+              <a:t>Same model family · two opposite results</a:t>
             </a:r>
             <a:endParaRPr lang="en-US" sz="1400" dirty="0"/>
           </a:p>
@@ -3792,7 +2830,7 @@
         </p:nvSpPr>
         <p:spPr>
           <a:xfrm>
-            <a:off x="502920" y="1325880"/>
+            <a:off x="502920" y="1298448"/>
             <a:ext cx="11247120" cy="0"/>
           </a:xfrm>
           <a:prstGeom prst="line">
@@ -3807,626 +2845,30 @@
           </a:ln>
         </p:spPr>
       </p:sp>
-      <p:graphicFrame>
-        <p:nvGraphicFramePr>
-          <p:cNvPr id="12" name="Table 0"/>
-          <p:cNvGraphicFramePr>
-            <a:graphicFrameLocks noGrp="1"/>
-          </p:cNvGraphicFramePr>
-          <p:nvPr>
-            <p:extLst>
-              <p:ext uri="{D42A27DB-BD31-4B8C-83A1-F6EECF244321}">
-                <p14:modId xmlns:p14="http://schemas.microsoft.com/office/powerpoint/2010/main" val="1579011935"/>
-              </p:ext>
-            </p:extLst>
-          </p:nvPr>
-        </p:nvGraphicFramePr>
-        <p:xfrm>
-          <a:off x="1371600" y="1554480"/>
-          <a:ext cx="9418320" cy="914400"/>
-        </p:xfrm>
-        <a:graphic>
-          <a:graphicData uri="http://schemas.openxmlformats.org/drawingml/2006/table">
-            <a:tbl>
-              <a:tblPr/>
-              <a:tblGrid>
-                <a:gridCol w="3017520"/>
-                <a:gridCol w="3200400"/>
-                <a:gridCol w="3200400"/>
-              </a:tblGrid>
-              <a:tr h="914400">
-                <a:tc>
-                  <a:txBody>
-                    <a:bodyPr/>
-                    <a:lstStyle/>
-                    <a:p>
-                      <a:pPr indent="0" marL="0">
-                        <a:buNone/>
-                      </a:pPr>
-                      <a:endParaRPr lang="en-US" sz="1600" dirty="0">
-                        <a:latin typeface="Calibri" charset="0"/>
-                        <a:ea typeface="Calibri" charset="0"/>
-                        <a:cs typeface="Calibri" charset="0"/>
-                      </a:endParaRPr>
-                    </a:p>
-                  </a:txBody>
-                  <a:tcPr marL="91440" marR="91440" marT="45720" marB="45720">
-                    <a:lnL w="12700" cap="flat" cmpd="sng" algn="ctr">
-                      <a:solidFill>
-                        <a:srgbClr val="8DA9C4"/>
-                      </a:solidFill>
-                      <a:prstDash val="solid"/>
-                      <a:round/>
-                      <a:headEnd type="none" w="med" len="med"/>
-                      <a:tailEnd type="none" w="med" len="med"/>
-                    </a:lnL>
-                    <a:lnR w="12700" cap="flat" cmpd="sng" algn="ctr">
-                      <a:solidFill>
-                        <a:srgbClr val="8DA9C4"/>
-                      </a:solidFill>
-                      <a:prstDash val="solid"/>
-                      <a:round/>
-                      <a:headEnd type="none" w="med" len="med"/>
-                      <a:tailEnd type="none" w="med" len="med"/>
-                    </a:lnR>
-                    <a:lnT w="12700" cap="flat" cmpd="sng" algn="ctr">
-                      <a:solidFill>
-                        <a:srgbClr val="8DA9C4"/>
-                      </a:solidFill>
-                      <a:prstDash val="solid"/>
-                      <a:round/>
-                      <a:headEnd type="none" w="med" len="med"/>
-                      <a:tailEnd type="none" w="med" len="med"/>
-                    </a:lnT>
-                    <a:lnB w="12700" cap="flat" cmpd="sng" algn="ctr">
-                      <a:solidFill>
-                        <a:srgbClr val="8DA9C4"/>
-                      </a:solidFill>
-                      <a:prstDash val="solid"/>
-                      <a:round/>
-                      <a:headEnd type="none" w="med" len="med"/>
-                      <a:tailEnd type="none" w="med" len="med"/>
-                    </a:lnB>
-                    <a:solidFill>
-                      <a:srgbClr val="0B2545"/>
-                    </a:solidFill>
-                  </a:tcPr>
-                </a:tc>
-                <a:tc>
-                  <a:txBody>
-                    <a:bodyPr/>
-                    <a:lstStyle/>
-                    <a:p>
-                      <a:pPr algn="ctr" indent="0" marL="0">
-                        <a:buNone/>
-                      </a:pPr>
-                      <a:r>
-                        <a:rPr lang="en-US" sz="1600" b="1" dirty="0">
-                          <a:solidFill>
-                            <a:srgbClr val="F6F6F2"/>
-                          </a:solidFill>
-                          <a:latin typeface="Calibri" pitchFamily="34" charset="0"/>
-                          <a:ea typeface="Calibri" pitchFamily="34" charset="-122"/>
-                          <a:cs typeface="Calibri" pitchFamily="34" charset="-120"/>
-                        </a:rPr>
-                        <a:t>Liquid sportsbook (live)</a:t>
-                      </a:r>
-                      <a:endParaRPr lang="en-US" sz="1600" dirty="0">
-                        <a:latin typeface="Calibri" charset="0"/>
-                        <a:ea typeface="Calibri" charset="0"/>
-                        <a:cs typeface="Calibri" charset="0"/>
-                      </a:endParaRPr>
-                    </a:p>
-                  </a:txBody>
-                  <a:tcPr marL="91440" marR="91440" marT="45720" marB="45720">
-                    <a:lnL w="12700" cap="flat" cmpd="sng" algn="ctr">
-                      <a:solidFill>
-                        <a:srgbClr val="8DA9C4"/>
-                      </a:solidFill>
-                      <a:prstDash val="solid"/>
-                      <a:round/>
-                      <a:headEnd type="none" w="med" len="med"/>
-                      <a:tailEnd type="none" w="med" len="med"/>
-                    </a:lnL>
-                    <a:lnR w="12700" cap="flat" cmpd="sng" algn="ctr">
-                      <a:solidFill>
-                        <a:srgbClr val="8DA9C4"/>
-                      </a:solidFill>
-                      <a:prstDash val="solid"/>
-                      <a:round/>
-                      <a:headEnd type="none" w="med" len="med"/>
-                      <a:tailEnd type="none" w="med" len="med"/>
-                    </a:lnR>
-                    <a:lnT w="12700" cap="flat" cmpd="sng" algn="ctr">
-                      <a:solidFill>
-                        <a:srgbClr val="8DA9C4"/>
-                      </a:solidFill>
-                      <a:prstDash val="solid"/>
-                      <a:round/>
-                      <a:headEnd type="none" w="med" len="med"/>
-                      <a:tailEnd type="none" w="med" len="med"/>
-                    </a:lnT>
-                    <a:lnB w="12700" cap="flat" cmpd="sng" algn="ctr">
-                      <a:solidFill>
-                        <a:srgbClr val="8DA9C4"/>
-                      </a:solidFill>
-                      <a:prstDash val="solid"/>
-                      <a:round/>
-                      <a:headEnd type="none" w="med" len="med"/>
-                      <a:tailEnd type="none" w="med" len="med"/>
-                    </a:lnB>
-                    <a:solidFill>
-                      <a:srgbClr val="0B2545"/>
-                    </a:solidFill>
-                  </a:tcPr>
-                </a:tc>
-                <a:tc>
-                  <a:txBody>
-                    <a:bodyPr/>
-                    <a:lstStyle/>
-                    <a:p>
-                      <a:pPr algn="ctr" indent="0" marL="0">
-                        <a:buNone/>
-                      </a:pPr>
-                      <a:r>
-                        <a:rPr lang="en-US" sz="1600" b="1" dirty="0">
-                          <a:solidFill>
-                            <a:srgbClr val="F6F6F2"/>
-                          </a:solidFill>
-                          <a:latin typeface="Calibri" pitchFamily="34" charset="0"/>
-                          <a:ea typeface="Calibri" pitchFamily="34" charset="-122"/>
-                          <a:cs typeface="Calibri" pitchFamily="34" charset="-120"/>
-                        </a:rPr>
-                        <a:t>Stale Kalshi 1H (archive)</a:t>
-                      </a:r>
-                      <a:endParaRPr lang="en-US" sz="1600" dirty="0">
-                        <a:latin typeface="Calibri" charset="0"/>
-                        <a:ea typeface="Calibri" charset="0"/>
-                        <a:cs typeface="Calibri" charset="0"/>
-                      </a:endParaRPr>
-                    </a:p>
-                  </a:txBody>
-                  <a:tcPr marL="91440" marR="91440" marT="45720" marB="45720">
-                    <a:lnL w="12700" cap="flat" cmpd="sng" algn="ctr">
-                      <a:solidFill>
-                        <a:srgbClr val="8DA9C4"/>
-                      </a:solidFill>
-                      <a:prstDash val="solid"/>
-                      <a:round/>
-                      <a:headEnd type="none" w="med" len="med"/>
-                      <a:tailEnd type="none" w="med" len="med"/>
-                    </a:lnL>
-                    <a:lnR w="12700" cap="flat" cmpd="sng" algn="ctr">
-                      <a:solidFill>
-                        <a:srgbClr val="8DA9C4"/>
-                      </a:solidFill>
-                      <a:prstDash val="solid"/>
-                      <a:round/>
-                      <a:headEnd type="none" w="med" len="med"/>
-                      <a:tailEnd type="none" w="med" len="med"/>
-                    </a:lnR>
-                    <a:lnT w="12700" cap="flat" cmpd="sng" algn="ctr">
-                      <a:solidFill>
-                        <a:srgbClr val="8DA9C4"/>
-                      </a:solidFill>
-                      <a:prstDash val="solid"/>
-                      <a:round/>
-                      <a:headEnd type="none" w="med" len="med"/>
-                      <a:tailEnd type="none" w="med" len="med"/>
-                    </a:lnT>
-                    <a:lnB w="12700" cap="flat" cmpd="sng" algn="ctr">
-                      <a:solidFill>
-                        <a:srgbClr val="8DA9C4"/>
-                      </a:solidFill>
-                      <a:prstDash val="solid"/>
-                      <a:round/>
-                      <a:headEnd type="none" w="med" len="med"/>
-                      <a:tailEnd type="none" w="med" len="med"/>
-                    </a:lnB>
-                    <a:solidFill>
-                      <a:srgbClr val="0B2545"/>
-                    </a:solidFill>
-                  </a:tcPr>
-                </a:tc>
-              </a:tr>
-              <a:tr h="914400">
-                <a:tc>
-                  <a:txBody>
-                    <a:bodyPr/>
-                    <a:lstStyle/>
-                    <a:p>
-                      <a:pPr indent="0" marL="0">
-                        <a:buNone/>
-                      </a:pPr>
-                      <a:r>
-                        <a:rPr lang="en-US" sz="1600" b="1" dirty="0">
-                          <a:solidFill>
-                            <a:srgbClr val="0B2545"/>
-                          </a:solidFill>
-                          <a:latin typeface="Calibri" pitchFamily="34" charset="0"/>
-                          <a:ea typeface="Calibri" pitchFamily="34" charset="-122"/>
-                          <a:cs typeface="Calibri" pitchFamily="34" charset="-120"/>
-                        </a:rPr>
-                        <a:t>Games</a:t>
-                      </a:r>
-                      <a:endParaRPr lang="en-US" sz="1600" dirty="0">
-                        <a:latin typeface="Calibri" charset="0"/>
-                        <a:ea typeface="Calibri" charset="0"/>
-                        <a:cs typeface="Calibri" charset="0"/>
-                      </a:endParaRPr>
-                    </a:p>
-                  </a:txBody>
-                  <a:tcPr marL="91440" marR="91440" marT="45720" marB="45720">
-                    <a:lnL w="12700" cap="flat" cmpd="sng" algn="ctr">
-                      <a:solidFill>
-                        <a:srgbClr val="8DA9C4"/>
-                      </a:solidFill>
-                      <a:prstDash val="solid"/>
-                      <a:round/>
-                      <a:headEnd type="none" w="med" len="med"/>
-                      <a:tailEnd type="none" w="med" len="med"/>
-                    </a:lnL>
-                    <a:lnR w="12700" cap="flat" cmpd="sng" algn="ctr">
-                      <a:solidFill>
-                        <a:srgbClr val="8DA9C4"/>
-                      </a:solidFill>
-                      <a:prstDash val="solid"/>
-                      <a:round/>
-                      <a:headEnd type="none" w="med" len="med"/>
-                      <a:tailEnd type="none" w="med" len="med"/>
-                    </a:lnR>
-                    <a:lnT w="12700" cap="flat" cmpd="sng" algn="ctr">
-                      <a:solidFill>
-                        <a:srgbClr val="8DA9C4"/>
-                      </a:solidFill>
-                      <a:prstDash val="solid"/>
-                      <a:round/>
-                      <a:headEnd type="none" w="med" len="med"/>
-                      <a:tailEnd type="none" w="med" len="med"/>
-                    </a:lnT>
-                    <a:lnB w="12700" cap="flat" cmpd="sng" algn="ctr">
-                      <a:solidFill>
-                        <a:srgbClr val="8DA9C4"/>
-                      </a:solidFill>
-                      <a:prstDash val="solid"/>
-                      <a:round/>
-                      <a:headEnd type="none" w="med" len="med"/>
-                      <a:tailEnd type="none" w="med" len="med"/>
-                    </a:lnB>
-                  </a:tcPr>
-                </a:tc>
-                <a:tc>
-                  <a:txBody>
-                    <a:bodyPr/>
-                    <a:lstStyle/>
-                    <a:p>
-                      <a:pPr algn="ctr" indent="0" marL="0">
-                        <a:buNone/>
-                      </a:pPr>
-                      <a:r>
-                        <a:rPr lang="en-US" sz="2200" b="1" dirty="0">
-                          <a:solidFill>
-                            <a:srgbClr val="1A1A1A"/>
-                          </a:solidFill>
-                          <a:latin typeface="Calibri" pitchFamily="34" charset="0"/>
-                          <a:ea typeface="Calibri" pitchFamily="34" charset="-122"/>
-                          <a:cs typeface="Calibri" pitchFamily="34" charset="-120"/>
-                        </a:rPr>
-                        <a:t>1</a:t>
-                      </a:r>
-                      <a:endParaRPr lang="en-US" sz="2200" dirty="0">
-                        <a:latin typeface="Calibri" charset="0"/>
-                        <a:ea typeface="Calibri" charset="0"/>
-                        <a:cs typeface="Calibri" charset="0"/>
-                      </a:endParaRPr>
-                    </a:p>
-                  </a:txBody>
-                  <a:tcPr marL="91440" marR="91440" marT="45720" marB="45720">
-                    <a:lnL w="12700" cap="flat" cmpd="sng" algn="ctr">
-                      <a:solidFill>
-                        <a:srgbClr val="8DA9C4"/>
-                      </a:solidFill>
-                      <a:prstDash val="solid"/>
-                      <a:round/>
-                      <a:headEnd type="none" w="med" len="med"/>
-                      <a:tailEnd type="none" w="med" len="med"/>
-                    </a:lnL>
-                    <a:lnR w="12700" cap="flat" cmpd="sng" algn="ctr">
-                      <a:solidFill>
-                        <a:srgbClr val="8DA9C4"/>
-                      </a:solidFill>
-                      <a:prstDash val="solid"/>
-                      <a:round/>
-                      <a:headEnd type="none" w="med" len="med"/>
-                      <a:tailEnd type="none" w="med" len="med"/>
-                    </a:lnR>
-                    <a:lnT w="12700" cap="flat" cmpd="sng" algn="ctr">
-                      <a:solidFill>
-                        <a:srgbClr val="8DA9C4"/>
-                      </a:solidFill>
-                      <a:prstDash val="solid"/>
-                      <a:round/>
-                      <a:headEnd type="none" w="med" len="med"/>
-                      <a:tailEnd type="none" w="med" len="med"/>
-                    </a:lnT>
-                    <a:lnB w="12700" cap="flat" cmpd="sng" algn="ctr">
-                      <a:solidFill>
-                        <a:srgbClr val="8DA9C4"/>
-                      </a:solidFill>
-                      <a:prstDash val="solid"/>
-                      <a:round/>
-                      <a:headEnd type="none" w="med" len="med"/>
-                      <a:tailEnd type="none" w="med" len="med"/>
-                    </a:lnB>
-                  </a:tcPr>
-                </a:tc>
-                <a:tc>
-                  <a:txBody>
-                    <a:bodyPr/>
-                    <a:lstStyle/>
-                    <a:p>
-                      <a:pPr algn="ctr" indent="0" marL="0">
-                        <a:buNone/>
-                      </a:pPr>
-                      <a:r>
-                        <a:rPr lang="en-US" sz="2200" b="1" dirty="0">
-                          <a:solidFill>
-                            <a:srgbClr val="1A1A1A"/>
-                          </a:solidFill>
-                          <a:latin typeface="Calibri" pitchFamily="34" charset="0"/>
-                          <a:ea typeface="Calibri" pitchFamily="34" charset="-122"/>
-                          <a:cs typeface="Calibri" pitchFamily="34" charset="-120"/>
-                        </a:rPr>
-                        <a:t>4</a:t>
-                      </a:r>
-                      <a:endParaRPr lang="en-US" sz="2200" dirty="0">
-                        <a:latin typeface="Calibri" charset="0"/>
-                        <a:ea typeface="Calibri" charset="0"/>
-                        <a:cs typeface="Calibri" charset="0"/>
-                      </a:endParaRPr>
-                    </a:p>
-                  </a:txBody>
-                  <a:tcPr marL="91440" marR="91440" marT="45720" marB="45720">
-                    <a:lnL w="12700" cap="flat" cmpd="sng" algn="ctr">
-                      <a:solidFill>
-                        <a:srgbClr val="8DA9C4"/>
-                      </a:solidFill>
-                      <a:prstDash val="solid"/>
-                      <a:round/>
-                      <a:headEnd type="none" w="med" len="med"/>
-                      <a:tailEnd type="none" w="med" len="med"/>
-                    </a:lnL>
-                    <a:lnR w="12700" cap="flat" cmpd="sng" algn="ctr">
-                      <a:solidFill>
-                        <a:srgbClr val="8DA9C4"/>
-                      </a:solidFill>
-                      <a:prstDash val="solid"/>
-                      <a:round/>
-                      <a:headEnd type="none" w="med" len="med"/>
-                      <a:tailEnd type="none" w="med" len="med"/>
-                    </a:lnR>
-                    <a:lnT w="12700" cap="flat" cmpd="sng" algn="ctr">
-                      <a:solidFill>
-                        <a:srgbClr val="8DA9C4"/>
-                      </a:solidFill>
-                      <a:prstDash val="solid"/>
-                      <a:round/>
-                      <a:headEnd type="none" w="med" len="med"/>
-                      <a:tailEnd type="none" w="med" len="med"/>
-                    </a:lnT>
-                    <a:lnB w="12700" cap="flat" cmpd="sng" algn="ctr">
-                      <a:solidFill>
-                        <a:srgbClr val="8DA9C4"/>
-                      </a:solidFill>
-                      <a:prstDash val="solid"/>
-                      <a:round/>
-                      <a:headEnd type="none" w="med" len="med"/>
-                      <a:tailEnd type="none" w="med" len="med"/>
-                    </a:lnB>
-                  </a:tcPr>
-                </a:tc>
-              </a:tr>
-              <a:tr h="914400">
-                <a:tc>
-                  <a:txBody>
-                    <a:bodyPr/>
-                    <a:lstStyle/>
-                    <a:p>
-                      <a:pPr indent="0" marL="0">
-                        <a:buNone/>
-                      </a:pPr>
-                      <a:r>
-                        <a:rPr lang="en-US" sz="1600" b="1" dirty="0">
-                          <a:solidFill>
-                            <a:srgbClr val="0B2545"/>
-                          </a:solidFill>
-                          <a:latin typeface="Calibri" pitchFamily="34" charset="0"/>
-                          <a:ea typeface="Calibri" pitchFamily="34" charset="-122"/>
-                          <a:cs typeface="Calibri" pitchFamily="34" charset="-120"/>
-                        </a:rPr>
-                        <a:t>Model ROI</a:t>
-                      </a:r>
-                      <a:endParaRPr lang="en-US" sz="1600" dirty="0">
-                        <a:latin typeface="Calibri" charset="0"/>
-                        <a:ea typeface="Calibri" charset="0"/>
-                        <a:cs typeface="Calibri" charset="0"/>
-                      </a:endParaRPr>
-                    </a:p>
-                  </a:txBody>
-                  <a:tcPr marL="91440" marR="91440" marT="45720" marB="45720">
-                    <a:lnL w="12700" cap="flat" cmpd="sng" algn="ctr">
-                      <a:solidFill>
-                        <a:srgbClr val="8DA9C4"/>
-                      </a:solidFill>
-                      <a:prstDash val="solid"/>
-                      <a:round/>
-                      <a:headEnd type="none" w="med" len="med"/>
-                      <a:tailEnd type="none" w="med" len="med"/>
-                    </a:lnL>
-                    <a:lnR w="12700" cap="flat" cmpd="sng" algn="ctr">
-                      <a:solidFill>
-                        <a:srgbClr val="8DA9C4"/>
-                      </a:solidFill>
-                      <a:prstDash val="solid"/>
-                      <a:round/>
-                      <a:headEnd type="none" w="med" len="med"/>
-                      <a:tailEnd type="none" w="med" len="med"/>
-                    </a:lnR>
-                    <a:lnT w="12700" cap="flat" cmpd="sng" algn="ctr">
-                      <a:solidFill>
-                        <a:srgbClr val="8DA9C4"/>
-                      </a:solidFill>
-                      <a:prstDash val="solid"/>
-                      <a:round/>
-                      <a:headEnd type="none" w="med" len="med"/>
-                      <a:tailEnd type="none" w="med" len="med"/>
-                    </a:lnT>
-                    <a:lnB w="12700" cap="flat" cmpd="sng" algn="ctr">
-                      <a:solidFill>
-                        <a:srgbClr val="8DA9C4"/>
-                      </a:solidFill>
-                      <a:prstDash val="solid"/>
-                      <a:round/>
-                      <a:headEnd type="none" w="med" len="med"/>
-                      <a:tailEnd type="none" w="med" len="med"/>
-                    </a:lnB>
-                  </a:tcPr>
-                </a:tc>
-                <a:tc>
-                  <a:txBody>
-                    <a:bodyPr/>
-                    <a:lstStyle/>
-                    <a:p>
-                      <a:pPr algn="ctr" indent="0" marL="0">
-                        <a:buNone/>
-                      </a:pPr>
-                      <a:r>
-                        <a:rPr lang="en-US" sz="2400" b="1" dirty="0">
-                          <a:solidFill>
-                            <a:srgbClr val="EEA02B"/>
-                          </a:solidFill>
-                          <a:latin typeface="Calibri" pitchFamily="34" charset="0"/>
-                          <a:ea typeface="Calibri" pitchFamily="34" charset="-122"/>
-                          <a:cs typeface="Calibri" pitchFamily="34" charset="-120"/>
-                        </a:rPr>
-                        <a:t>−40%</a:t>
-                      </a:r>
-                      <a:endParaRPr lang="en-US" sz="2400" dirty="0">
-                        <a:latin typeface="Calibri" charset="0"/>
-                        <a:ea typeface="Calibri" charset="0"/>
-                        <a:cs typeface="Calibri" charset="0"/>
-                      </a:endParaRPr>
-                    </a:p>
-                  </a:txBody>
-                  <a:tcPr marL="91440" marR="91440" marT="45720" marB="45720">
-                    <a:lnL w="12700" cap="flat" cmpd="sng" algn="ctr">
-                      <a:solidFill>
-                        <a:srgbClr val="8DA9C4"/>
-                      </a:solidFill>
-                      <a:prstDash val="solid"/>
-                      <a:round/>
-                      <a:headEnd type="none" w="med" len="med"/>
-                      <a:tailEnd type="none" w="med" len="med"/>
-                    </a:lnL>
-                    <a:lnR w="12700" cap="flat" cmpd="sng" algn="ctr">
-                      <a:solidFill>
-                        <a:srgbClr val="8DA9C4"/>
-                      </a:solidFill>
-                      <a:prstDash val="solid"/>
-                      <a:round/>
-                      <a:headEnd type="none" w="med" len="med"/>
-                      <a:tailEnd type="none" w="med" len="med"/>
-                    </a:lnR>
-                    <a:lnT w="12700" cap="flat" cmpd="sng" algn="ctr">
-                      <a:solidFill>
-                        <a:srgbClr val="8DA9C4"/>
-                      </a:solidFill>
-                      <a:prstDash val="solid"/>
-                      <a:round/>
-                      <a:headEnd type="none" w="med" len="med"/>
-                      <a:tailEnd type="none" w="med" len="med"/>
-                    </a:lnT>
-                    <a:lnB w="12700" cap="flat" cmpd="sng" algn="ctr">
-                      <a:solidFill>
-                        <a:srgbClr val="8DA9C4"/>
-                      </a:solidFill>
-                      <a:prstDash val="solid"/>
-                      <a:round/>
-                      <a:headEnd type="none" w="med" len="med"/>
-                      <a:tailEnd type="none" w="med" len="med"/>
-                    </a:lnB>
-                  </a:tcPr>
-                </a:tc>
-                <a:tc>
-                  <a:txBody>
-                    <a:bodyPr/>
-                    <a:lstStyle/>
-                    <a:p>
-                      <a:pPr algn="ctr" indent="0" marL="0">
-                        <a:buNone/>
-                      </a:pPr>
-                      <a:r>
-                        <a:rPr lang="en-US" sz="2400" b="1" dirty="0">
-                          <a:solidFill>
-                            <a:srgbClr val="EEA02B"/>
-                          </a:solidFill>
-                          <a:latin typeface="Calibri" pitchFamily="34" charset="0"/>
-                          <a:ea typeface="Calibri" pitchFamily="34" charset="-122"/>
-                          <a:cs typeface="Calibri" pitchFamily="34" charset="-120"/>
-                        </a:rPr>
-                        <a:t>+100%+</a:t>
-                      </a:r>
-                      <a:endParaRPr lang="en-US" sz="2400" dirty="0">
-                        <a:latin typeface="Calibri" charset="0"/>
-                        <a:ea typeface="Calibri" charset="0"/>
-                        <a:cs typeface="Calibri" charset="0"/>
-                      </a:endParaRPr>
-                    </a:p>
-                  </a:txBody>
-                  <a:tcPr marL="91440" marR="91440" marT="45720" marB="45720">
-                    <a:lnL w="12700" cap="flat" cmpd="sng" algn="ctr">
-                      <a:solidFill>
-                        <a:srgbClr val="8DA9C4"/>
-                      </a:solidFill>
-                      <a:prstDash val="solid"/>
-                      <a:round/>
-                      <a:headEnd type="none" w="med" len="med"/>
-                      <a:tailEnd type="none" w="med" len="med"/>
-                    </a:lnL>
-                    <a:lnR w="12700" cap="flat" cmpd="sng" algn="ctr">
-                      <a:solidFill>
-                        <a:srgbClr val="8DA9C4"/>
-                      </a:solidFill>
-                      <a:prstDash val="solid"/>
-                      <a:round/>
-                      <a:headEnd type="none" w="med" len="med"/>
-                      <a:tailEnd type="none" w="med" len="med"/>
-                    </a:lnR>
-                    <a:lnT w="12700" cap="flat" cmpd="sng" algn="ctr">
-                      <a:solidFill>
-                        <a:srgbClr val="8DA9C4"/>
-                      </a:solidFill>
-                      <a:prstDash val="solid"/>
-                      <a:round/>
-                      <a:headEnd type="none" w="med" len="med"/>
-                      <a:tailEnd type="none" w="med" len="med"/>
-                    </a:lnT>
-                    <a:lnB w="12700" cap="flat" cmpd="sng" algn="ctr">
-                      <a:solidFill>
-                        <a:srgbClr val="8DA9C4"/>
-                      </a:solidFill>
-                      <a:prstDash val="solid"/>
-                      <a:round/>
-                      <a:headEnd type="none" w="med" len="med"/>
-                      <a:tailEnd type="none" w="med" len="med"/>
-                    </a:lnB>
-                  </a:tcPr>
-                </a:tc>
-              </a:tr>
-            </a:tbl>
-          </a:graphicData>
-        </a:graphic>
-      </p:graphicFrame>
+      <p:pic>
+        <p:nvPicPr>
+          <p:cNvPr id="5" name="Image 0" descr="slides/figures/liquidity_sample.png">    </p:cNvPr>
+          <p:cNvPicPr>
+            <a:picLocks noChangeAspect="1"/>
+          </p:cNvPicPr>
+          <p:nvPr/>
+        </p:nvPicPr>
+        <p:blipFill>
+          <a:blip r:embed="rId1"/>
+          <a:stretch>
+            <a:fillRect/>
+          </a:stretch>
+        </p:blipFill>
+        <p:spPr>
+          <a:xfrm>
+            <a:off x="2468880" y="1417320"/>
+            <a:ext cx="7315200" cy="4572000"/>
+          </a:xfrm>
+          <a:prstGeom prst="rect">
+            <a:avLst/>
+          </a:prstGeom>
+        </p:spPr>
+      </p:pic>
       <p:sp>
         <p:nvSpPr>
           <p:cNvPr id="6" name="Shape 3"/>
@@ -4435,18 +2877,18 @@
         </p:nvSpPr>
         <p:spPr>
           <a:xfrm>
-            <a:off x="502920" y="4663440"/>
-            <a:ext cx="11247120" cy="1600200"/>
+            <a:off x="502920" y="5943600"/>
+            <a:ext cx="11247120" cy="640080"/>
           </a:xfrm>
           <a:prstGeom prst="roundRect">
             <a:avLst>
-              <a:gd name="adj" fmla="val 5714"/>
+              <a:gd name="adj" fmla="val 11429"/>
             </a:avLst>
           </a:prstGeom>
           <a:solidFill>
             <a:srgbClr val="F6F6F2"/>
           </a:solidFill>
-          <a:ln w="19050">
+          <a:ln w="16510">
             <a:solidFill>
               <a:srgbClr val="EEA02B"/>
             </a:solidFill>
@@ -4462,24 +2904,24 @@
         </p:nvSpPr>
         <p:spPr>
           <a:xfrm>
-            <a:off x="777240" y="4800600"/>
-            <a:ext cx="10698480" cy="640080"/>
-          </a:xfrm>
-          <a:prstGeom prst="rect">
-            <a:avLst/>
-          </a:prstGeom>
-          <a:noFill/>
-          <a:ln/>
-        </p:spPr>
-        <p:txBody>
-          <a:bodyPr wrap="square" rtlCol="0" anchor="ctr"/>
-          <a:lstStyle/>
-          <a:p>
-            <a:pPr indent="0" marL="0">
-              <a:buNone/>
-            </a:pPr>
-            <a:r>
-              <a:rPr lang="en-US" sz="1500" dirty="0">
+            <a:off x="777240" y="5989320"/>
+            <a:ext cx="10698480" cy="548640"/>
+          </a:xfrm>
+          <a:prstGeom prst="rect">
+            <a:avLst/>
+          </a:prstGeom>
+          <a:noFill/>
+          <a:ln/>
+        </p:spPr>
+        <p:txBody>
+          <a:bodyPr wrap="square" rtlCol="0" anchor="ctr"/>
+          <a:lstStyle/>
+          <a:p>
+            <a:pPr algn="ctr" indent="0" marL="0">
+              <a:buNone/>
+            </a:pPr>
+            <a:r>
+              <a:rPr lang="en-US" sz="1300" dirty="0">
                 <a:solidFill>
                   <a:srgbClr val="1A1A1A"/>
                 </a:solidFill>
@@ -4487,84 +2929,73 @@
                 <a:ea typeface="Calibri" pitchFamily="34" charset="-122"/>
                 <a:cs typeface="Calibri" pitchFamily="34" charset="-120"/>
               </a:rPr>
-              <a:t>The +100% against Kalshi is stale mid-prices + n=4 + no slippage — exactly the trap CLAUDE.md warns about.</a:t>
-            </a:r>
-            <a:endParaRPr lang="en-US" sz="1500" dirty="0"/>
-          </a:p>
-        </p:txBody>
-      </p:sp>
-      <p:sp>
-        <p:nvSpPr>
-          <p:cNvPr id="8" name="Text 5"/>
-          <p:cNvSpPr/>
-          <p:nvPr/>
-        </p:nvSpPr>
-        <p:spPr>
-          <a:xfrm>
-            <a:off x="777240" y="5440680"/>
-            <a:ext cx="10698480" cy="640080"/>
-          </a:xfrm>
-          <a:prstGeom prst="rect">
-            <a:avLst/>
-          </a:prstGeom>
-          <a:noFill/>
-          <a:ln/>
-        </p:spPr>
-        <p:txBody>
-          <a:bodyPr wrap="square" rtlCol="0" anchor="ctr"/>
-          <a:lstStyle/>
-          <a:p>
-            <a:pPr indent="0" marL="0">
-              <a:buNone/>
-            </a:pPr>
-            <a:r>
-              <a:rPr lang="en-US" sz="1700" b="1" i="1" dirty="0">
+              <a:t>The +100% against Kalshi is </a:t>
+            </a:r>
+            <a:pPr algn="ctr" indent="0" marL="0">
+              <a:buNone/>
+            </a:pPr>
+            <a:r>
+              <a:rPr lang="en-US" sz="1300" b="1" dirty="0">
                 <a:solidFill>
                   <a:srgbClr val="0B2545"/>
-                </a:solidFill>
-                <a:latin typeface="Georgia" pitchFamily="34" charset="0"/>
-                <a:ea typeface="Georgia" pitchFamily="34" charset="-122"/>
-                <a:cs typeface="Georgia" pitchFamily="34" charset="-120"/>
-              </a:rPr>
-              <a:t>Real liquid markets are tight. The trustworthy answer needs many liquid-market games.</a:t>
-            </a:r>
-            <a:endParaRPr lang="en-US" sz="1700" dirty="0"/>
-          </a:p>
-        </p:txBody>
-      </p:sp>
-      <p:sp>
-        <p:nvSpPr>
-          <p:cNvPr id="9" name="Text 6"/>
-          <p:cNvSpPr/>
-          <p:nvPr/>
-        </p:nvSpPr>
-        <p:spPr>
-          <a:xfrm>
-            <a:off x="502920" y="6492240"/>
-            <a:ext cx="7315200" cy="274320"/>
-          </a:xfrm>
-          <a:prstGeom prst="rect">
-            <a:avLst/>
-          </a:prstGeom>
-          <a:noFill/>
-          <a:ln/>
-        </p:spPr>
-        <p:txBody>
-          <a:bodyPr wrap="square" rtlCol="0" anchor="ctr"/>
-          <a:lstStyle/>
-          <a:p>
-            <a:pPr indent="0" marL="0">
-              <a:buNone/>
-            </a:pPr>
-            <a:r>
-              <a:rPr lang="en-US" sz="1000" dirty="0">
-                <a:solidFill>
-                  <a:srgbClr val="8DA9C4"/>
                 </a:solidFill>
                 <a:latin typeface="Calibri" pitchFamily="34" charset="0"/>
                 <a:ea typeface="Calibri" pitchFamily="34" charset="-122"/>
                 <a:cs typeface="Calibri" pitchFamily="34" charset="-120"/>
               </a:rPr>
+              <a:t>stale mid-prices + n=4 + no slippage</a:t>
+            </a:r>
+            <a:pPr algn="ctr" indent="0" marL="0">
+              <a:buNone/>
+            </a:pPr>
+            <a:r>
+              <a:rPr lang="en-US" sz="1300" dirty="0">
+                <a:solidFill>
+                  <a:srgbClr val="1A1A1A"/>
+                </a:solidFill>
+                <a:latin typeface="Calibri" pitchFamily="34" charset="0"/>
+                <a:ea typeface="Calibri" pitchFamily="34" charset="-122"/>
+                <a:cs typeface="Calibri" pitchFamily="34" charset="-120"/>
+              </a:rPr>
+              <a:t> — exactly the trap CLAUDE.md warns about. Real liquid markets are tight.</a:t>
+            </a:r>
+            <a:endParaRPr lang="en-US" sz="1300" dirty="0"/>
+          </a:p>
+        </p:txBody>
+      </p:sp>
+      <p:sp>
+        <p:nvSpPr>
+          <p:cNvPr id="8" name="Text 5"/>
+          <p:cNvSpPr/>
+          <p:nvPr/>
+        </p:nvSpPr>
+        <p:spPr>
+          <a:xfrm>
+            <a:off x="502920" y="6492240"/>
+            <a:ext cx="7315200" cy="274320"/>
+          </a:xfrm>
+          <a:prstGeom prst="rect">
+            <a:avLst/>
+          </a:prstGeom>
+          <a:noFill/>
+          <a:ln/>
+        </p:spPr>
+        <p:txBody>
+          <a:bodyPr wrap="square" rtlCol="0" anchor="ctr"/>
+          <a:lstStyle/>
+          <a:p>
+            <a:pPr indent="0" marL="0">
+              <a:buNone/>
+            </a:pPr>
+            <a:r>
+              <a:rPr lang="en-US" sz="1000" dirty="0">
+                <a:solidFill>
+                  <a:srgbClr val="8DA9C4"/>
+                </a:solidFill>
+                <a:latin typeface="Calibri" pitchFamily="34" charset="0"/>
+                <a:ea typeface="Calibri" pitchFamily="34" charset="-122"/>
+                <a:cs typeface="Calibri" pitchFamily="34" charset="-120"/>
+              </a:rPr>
               <a:t>STATS 211 · NBA Mispricing · Sit &amp; Manathattai</a:t>
             </a:r>
             <a:endParaRPr lang="en-US" sz="1000" dirty="0"/>
@@ -4573,7 +3004,7 @@
       </p:sp>
       <p:sp>
         <p:nvSpPr>
-          <p:cNvPr id="10" name="Text 7"/>
+          <p:cNvPr id="9" name="Text 6"/>
           <p:cNvSpPr/>
           <p:nvPr/>
         </p:nvSpPr>
@@ -4650,7 +3081,7 @@
         </p:nvSpPr>
         <p:spPr>
           <a:xfrm>
-            <a:off x="502920" y="256032"/>
+            <a:off x="502920" y="228600"/>
             <a:ext cx="11247120" cy="777240"/>
           </a:xfrm>
           <a:prstGeom prst="rect">
@@ -4689,7 +3120,7 @@
         </p:nvSpPr>
         <p:spPr>
           <a:xfrm>
-            <a:off x="502920" y="960120"/>
+            <a:off x="502920" y="932688"/>
             <a:ext cx="11247120" cy="365760"/>
           </a:xfrm>
           <a:prstGeom prst="rect">
@@ -4728,7 +3159,7 @@
         </p:nvSpPr>
         <p:spPr>
           <a:xfrm>
-            <a:off x="502920" y="1325880"/>
+            <a:off x="502920" y="1298448"/>
             <a:ext cx="11247120" cy="0"/>
           </a:xfrm>
           <a:prstGeom prst="line">
@@ -4751,8 +3182,8 @@
         </p:nvSpPr>
         <p:spPr>
           <a:xfrm>
-            <a:off x="502920" y="1554480"/>
-            <a:ext cx="11247120" cy="777240"/>
+            <a:off x="502920" y="1463040"/>
+            <a:ext cx="11247120" cy="640080"/>
           </a:xfrm>
           <a:prstGeom prst="rect">
             <a:avLst/>
@@ -4776,7 +3207,7 @@
                 <a:ea typeface="Calibri" pitchFamily="34" charset="-122"/>
                 <a:cs typeface="Calibri" pitchFamily="34" charset="-120"/>
               </a:rPr>
-              <a:t>Halawi's buried result: </a:t>
+              <a:t>Halawi's buried result:  </a:t>
             </a:r>
             <a:pPr indent="0" marL="0">
               <a:buNone/>
@@ -4818,8 +3249,8 @@
         </p:nvSpPr>
         <p:spPr>
           <a:xfrm>
-            <a:off x="502920" y="2423160"/>
-            <a:ext cx="11247120" cy="1097280"/>
+            <a:off x="502920" y="2194560"/>
+            <a:ext cx="11247120" cy="914400"/>
           </a:xfrm>
           <a:prstGeom prst="rect">
             <a:avLst/>
@@ -4885,12 +3316,117 @@
         </p:nvSpPr>
         <p:spPr>
           <a:xfrm>
-            <a:off x="502920" y="3657600"/>
-            <a:ext cx="11247120" cy="2194560"/>
+            <a:off x="502920" y="3291840"/>
+            <a:ext cx="11247120" cy="1371600"/>
           </a:xfrm>
           <a:prstGeom prst="roundRect">
             <a:avLst>
-              <a:gd name="adj" fmla="val 4167"/>
+              <a:gd name="adj" fmla="val 5333"/>
+            </a:avLst>
+          </a:prstGeom>
+          <a:solidFill>
+            <a:srgbClr val="EEF3F8"/>
+          </a:solidFill>
+          <a:ln w="15240">
+            <a:solidFill>
+              <a:srgbClr val="1C7293"/>
+            </a:solidFill>
+            <a:prstDash val="solid"/>
+          </a:ln>
+        </p:spPr>
+      </p:sp>
+      <p:sp>
+        <p:nvSpPr>
+          <p:cNvPr id="8" name="Text 6"/>
+          <p:cNvSpPr/>
+          <p:nvPr/>
+        </p:nvSpPr>
+        <p:spPr>
+          <a:xfrm>
+            <a:off x="685800" y="3383280"/>
+            <a:ext cx="10881360" cy="868680"/>
+          </a:xfrm>
+          <a:prstGeom prst="rect">
+            <a:avLst/>
+          </a:prstGeom>
+          <a:noFill/>
+          <a:ln/>
+        </p:spPr>
+        <p:txBody>
+          <a:bodyPr wrap="square" rtlCol="0" anchor="ctr"/>
+          <a:lstStyle/>
+          <a:p>
+            <a:pPr algn="ctr" indent="0" marL="0">
+              <a:buNone/>
+            </a:pPr>
+            <a:r>
+              <a:rPr lang="en-US" sz="1800" b="1" dirty="0">
+                <a:solidFill>
+                  <a:srgbClr val="0B2545"/>
+                </a:solidFill>
+                <a:latin typeface="Courier New" pitchFamily="34" charset="0"/>
+                <a:ea typeface="Courier New" pitchFamily="34" charset="-122"/>
+                <a:cs typeface="Courier New" pitchFamily="34" charset="-120"/>
+              </a:rPr>
+              <a:t>p̂_aggregate  =  w · p_model  +  ( 1 − w ) · p_market_devig</a:t>
+            </a:r>
+            <a:endParaRPr lang="en-US" sz="1800" dirty="0"/>
+          </a:p>
+        </p:txBody>
+      </p:sp>
+      <p:sp>
+        <p:nvSpPr>
+          <p:cNvPr id="9" name="Text 7"/>
+          <p:cNvSpPr/>
+          <p:nvPr/>
+        </p:nvSpPr>
+        <p:spPr>
+          <a:xfrm>
+            <a:off x="685800" y="4206240"/>
+            <a:ext cx="10881360" cy="365760"/>
+          </a:xfrm>
+          <a:prstGeom prst="rect">
+            <a:avLst/>
+          </a:prstGeom>
+          <a:noFill/>
+          <a:ln/>
+        </p:spPr>
+        <p:txBody>
+          <a:bodyPr wrap="square" rtlCol="0" anchor="ctr"/>
+          <a:lstStyle/>
+          <a:p>
+            <a:pPr algn="ctr" indent="0" marL="0">
+              <a:buNone/>
+            </a:pPr>
+            <a:r>
+              <a:rPr lang="en-US" sz="1200" i="1" dirty="0">
+                <a:solidFill>
+                  <a:srgbClr val="13315C"/>
+                </a:solidFill>
+                <a:latin typeface="Calibri" pitchFamily="34" charset="0"/>
+                <a:ea typeface="Calibri" pitchFamily="34" charset="-122"/>
+                <a:cs typeface="Calibri" pitchFamily="34" charset="-120"/>
+              </a:rPr>
+              <a:t>V3 — weight chosen by validation Brier; aggregate's Brier ≤ min(component Briers)</a:t>
+            </a:r>
+            <a:endParaRPr lang="en-US" sz="1200" dirty="0"/>
+          </a:p>
+        </p:txBody>
+      </p:sp>
+      <p:sp>
+        <p:nvSpPr>
+          <p:cNvPr id="10" name="Shape 8"/>
+          <p:cNvSpPr/>
+          <p:nvPr/>
+        </p:nvSpPr>
+        <p:spPr>
+          <a:xfrm>
+            <a:off x="502920" y="4846320"/>
+            <a:ext cx="11247120" cy="1508760"/>
+          </a:xfrm>
+          <a:prstGeom prst="roundRect">
+            <a:avLst>
+              <a:gd name="adj" fmla="val 6061"/>
             </a:avLst>
           </a:prstGeom>
           <a:solidFill>
@@ -4906,13 +3442,13 @@
       </p:sp>
       <p:sp>
         <p:nvSpPr>
-          <p:cNvPr id="8" name="Text 6"/>
-          <p:cNvSpPr/>
-          <p:nvPr/>
-        </p:nvSpPr>
-        <p:spPr>
-          <a:xfrm>
-            <a:off x="777240" y="3794760"/>
+          <p:cNvPr id="11" name="Text 9"/>
+          <p:cNvSpPr/>
+          <p:nvPr/>
+        </p:nvSpPr>
+        <p:spPr>
+          <a:xfrm>
+            <a:off x="777240" y="4983480"/>
             <a:ext cx="10698480" cy="365760"/>
           </a:xfrm>
           <a:prstGeom prst="rect">
@@ -4937,7 +3473,7 @@
                 <a:ea typeface="Calibri" pitchFamily="34" charset="-122"/>
                 <a:cs typeface="Calibri" pitchFamily="34" charset="-120"/>
               </a:rPr>
-              <a:t>V3 — Halawi-aggregate variant</a:t>
+              <a:t>Reframing:</a:t>
             </a:r>
             <a:endParaRPr lang="en-US" sz="1400" dirty="0"/>
           </a:p>
@@ -4945,14 +3481,14 @@
       </p:sp>
       <p:sp>
         <p:nvSpPr>
-          <p:cNvPr id="9" name="Text 7"/>
-          <p:cNvSpPr/>
-          <p:nvPr/>
-        </p:nvSpPr>
-        <p:spPr>
-          <a:xfrm>
-            <a:off x="777240" y="4160520"/>
-            <a:ext cx="10698480" cy="502920"/>
+          <p:cNvPr id="12" name="Text 10"/>
+          <p:cNvSpPr/>
+          <p:nvPr/>
+        </p:nvSpPr>
+        <p:spPr>
+          <a:xfrm>
+            <a:off x="777240" y="5349240"/>
+            <a:ext cx="10698480" cy="914400"/>
           </a:xfrm>
           <a:prstGeom prst="rect">
             <a:avLst/>
@@ -4968,69 +3504,30 @@
               <a:buNone/>
             </a:pPr>
             <a:r>
-              <a:rPr lang="en-US" sz="2000" b="1" dirty="0">
-                <a:solidFill>
-                  <a:srgbClr val="0B2545"/>
-                </a:solidFill>
-                <a:latin typeface="Courier New" pitchFamily="34" charset="0"/>
-                <a:ea typeface="Courier New" pitchFamily="34" charset="-122"/>
-                <a:cs typeface="Courier New" pitchFamily="34" charset="-120"/>
-              </a:rPr>
-              <a:t>p̂_aggregate  =  w · p_model  +  (1 − w) · p_market_devig</a:t>
-            </a:r>
-            <a:endParaRPr lang="en-US" sz="2000" dirty="0"/>
-          </a:p>
-        </p:txBody>
-      </p:sp>
-      <p:sp>
-        <p:nvSpPr>
-          <p:cNvPr id="10" name="Text 8"/>
-          <p:cNvSpPr/>
-          <p:nvPr/>
-        </p:nvSpPr>
-        <p:spPr>
-          <a:xfrm>
-            <a:off x="777240" y="4709160"/>
-            <a:ext cx="10698480" cy="365760"/>
-          </a:xfrm>
-          <a:prstGeom prst="rect">
-            <a:avLst/>
-          </a:prstGeom>
-          <a:noFill/>
-          <a:ln/>
-        </p:spPr>
-        <p:txBody>
-          <a:bodyPr wrap="square" rtlCol="0" anchor="ctr"/>
-          <a:lstStyle/>
-          <a:p>
-            <a:pPr indent="0" marL="0">
-              <a:buNone/>
-            </a:pPr>
-            <a:r>
-              <a:rPr lang="en-US" sz="1400" i="1" dirty="0">
-                <a:solidFill>
-                  <a:srgbClr val="13315C"/>
+              <a:rPr lang="en-US" sz="1500" dirty="0">
+                <a:solidFill>
+                  <a:srgbClr val="1A1A1A"/>
                 </a:solidFill>
                 <a:latin typeface="Calibri" pitchFamily="34" charset="0"/>
                 <a:ea typeface="Calibri" pitchFamily="34" charset="-122"/>
                 <a:cs typeface="Calibri" pitchFamily="34" charset="-120"/>
               </a:rPr>
-              <a:t>Weight chosen by validation Brier; the aggregate's Brier ≤ min(component Briers).</a:t>
-            </a:r>
-            <a:endParaRPr lang="en-US" sz="1400" dirty="0"/>
-          </a:p>
-        </p:txBody>
-      </p:sp>
-      <p:sp>
-        <p:nvSpPr>
-          <p:cNvPr id="11" name="Text 9"/>
-          <p:cNvSpPr/>
-          <p:nvPr/>
-        </p:nvSpPr>
-        <p:spPr>
-          <a:xfrm>
-            <a:off x="777240" y="5120640"/>
-            <a:ext cx="10698480" cy="731520"/>
+              <a:t>The model's job isn't to BEAT the market everywhere — it's to COMPLEMENT it in the specific situations where the crowd's bias is strongest (H1 / H4).</a:t>
+            </a:r>
+            <a:endParaRPr lang="en-US" sz="1500" dirty="0"/>
+          </a:p>
+        </p:txBody>
+      </p:sp>
+      <p:sp>
+        <p:nvSpPr>
+          <p:cNvPr id="13" name="Text 11"/>
+          <p:cNvSpPr/>
+          <p:nvPr/>
+        </p:nvSpPr>
+        <p:spPr>
+          <a:xfrm>
+            <a:off x="502920" y="6492240"/>
+            <a:ext cx="7315200" cy="274320"/>
           </a:xfrm>
           <a:prstGeom prst="rect">
             <a:avLst/>
@@ -5046,53 +3543,14 @@
               <a:buNone/>
             </a:pPr>
             <a:r>
-              <a:rPr lang="en-US" sz="1500" dirty="0">
-                <a:solidFill>
-                  <a:srgbClr val="1A1A1A"/>
+              <a:rPr lang="en-US" sz="1000" dirty="0">
+                <a:solidFill>
+                  <a:srgbClr val="8DA9C4"/>
                 </a:solidFill>
                 <a:latin typeface="Calibri" pitchFamily="34" charset="0"/>
                 <a:ea typeface="Calibri" pitchFamily="34" charset="-122"/>
                 <a:cs typeface="Calibri" pitchFamily="34" charset="-120"/>
               </a:rPr>
-              <a:t>The model's job isn't to BEAT the market everywhere — it's to COMPLEMENT it where the crowd's bias is strongest (H1 / H4).</a:t>
-            </a:r>
-            <a:endParaRPr lang="en-US" sz="1500" dirty="0"/>
-          </a:p>
-        </p:txBody>
-      </p:sp>
-      <p:sp>
-        <p:nvSpPr>
-          <p:cNvPr id="12" name="Text 10"/>
-          <p:cNvSpPr/>
-          <p:nvPr/>
-        </p:nvSpPr>
-        <p:spPr>
-          <a:xfrm>
-            <a:off x="502920" y="6492240"/>
-            <a:ext cx="7315200" cy="274320"/>
-          </a:xfrm>
-          <a:prstGeom prst="rect">
-            <a:avLst/>
-          </a:prstGeom>
-          <a:noFill/>
-          <a:ln/>
-        </p:spPr>
-        <p:txBody>
-          <a:bodyPr wrap="square" rtlCol="0" anchor="ctr"/>
-          <a:lstStyle/>
-          <a:p>
-            <a:pPr indent="0" marL="0">
-              <a:buNone/>
-            </a:pPr>
-            <a:r>
-              <a:rPr lang="en-US" sz="1000" dirty="0">
-                <a:solidFill>
-                  <a:srgbClr val="8DA9C4"/>
-                </a:solidFill>
-                <a:latin typeface="Calibri" pitchFamily="34" charset="0"/>
-                <a:ea typeface="Calibri" pitchFamily="34" charset="-122"/>
-                <a:cs typeface="Calibri" pitchFamily="34" charset="-120"/>
-              </a:rPr>
               <a:t>STATS 211 · NBA Mispricing · Sit &amp; Manathattai</a:t>
             </a:r>
             <a:endParaRPr lang="en-US" sz="1000" dirty="0"/>
@@ -5101,7 +3559,7 @@
       </p:sp>
       <p:sp>
         <p:nvSpPr>
-          <p:cNvPr id="13" name="Text 11"/>
+          <p:cNvPr id="14" name="Text 12"/>
           <p:cNvSpPr/>
           <p:nvPr/>
         </p:nvSpPr>
@@ -5178,7 +3636,7 @@
         </p:nvSpPr>
         <p:spPr>
           <a:xfrm>
-            <a:off x="502920" y="256032"/>
+            <a:off x="502920" y="228600"/>
             <a:ext cx="11247120" cy="777240"/>
           </a:xfrm>
           <a:prstGeom prst="rect">
@@ -5217,7 +3675,7 @@
         </p:nvSpPr>
         <p:spPr>
           <a:xfrm>
-            <a:off x="502920" y="960120"/>
+            <a:off x="502920" y="932688"/>
             <a:ext cx="11247120" cy="365760"/>
           </a:xfrm>
           <a:prstGeom prst="rect">
@@ -5256,7 +3714,7 @@
         </p:nvSpPr>
         <p:spPr>
           <a:xfrm>
-            <a:off x="502920" y="1325880"/>
+            <a:off x="502920" y="1298448"/>
             <a:ext cx="11247120" cy="0"/>
           </a:xfrm>
           <a:prstGeom prst="line">
@@ -5279,7 +3737,7 @@
         </p:nvSpPr>
         <p:spPr>
           <a:xfrm>
-            <a:off x="502920" y="1554480"/>
+            <a:off x="502920" y="1508760"/>
             <a:ext cx="2926080" cy="457200"/>
           </a:xfrm>
           <a:prstGeom prst="rect">
@@ -5318,7 +3776,7 @@
         </p:nvSpPr>
         <p:spPr>
           <a:xfrm>
-            <a:off x="3520440" y="1554480"/>
+            <a:off x="3520440" y="1508760"/>
             <a:ext cx="8229600" cy="1005840"/>
           </a:xfrm>
           <a:prstGeom prst="rect">
@@ -5435,7 +3893,7 @@
         </p:nvSpPr>
         <p:spPr>
           <a:xfrm>
-            <a:off x="502920" y="3749040"/>
+            <a:off x="502920" y="3794760"/>
             <a:ext cx="2926080" cy="457200"/>
           </a:xfrm>
           <a:prstGeom prst="rect">
@@ -5474,7 +3932,7 @@
         </p:nvSpPr>
         <p:spPr>
           <a:xfrm>
-            <a:off x="3520440" y="3749040"/>
+            <a:off x="3520440" y="3794760"/>
             <a:ext cx="8229600" cy="1005840"/>
           </a:xfrm>
           <a:prstGeom prst="rect">
@@ -5513,7 +3971,7 @@
         </p:nvSpPr>
         <p:spPr>
           <a:xfrm>
-            <a:off x="502920" y="4846320"/>
+            <a:off x="502920" y="4937760"/>
             <a:ext cx="2926080" cy="457200"/>
           </a:xfrm>
           <a:prstGeom prst="rect">
@@ -5552,7 +4010,7 @@
         </p:nvSpPr>
         <p:spPr>
           <a:xfrm>
-            <a:off x="3520440" y="4846320"/>
+            <a:off x="3520440" y="4937760"/>
             <a:ext cx="8229600" cy="1005840"/>
           </a:xfrm>
           <a:prstGeom prst="rect">
@@ -5701,7 +4159,7 @@
         </p:nvSpPr>
         <p:spPr>
           <a:xfrm>
-            <a:off x="502920" y="256032"/>
+            <a:off x="502920" y="228600"/>
             <a:ext cx="11247120" cy="777240"/>
           </a:xfrm>
           <a:prstGeom prst="rect">
@@ -5740,7 +4198,7 @@
         </p:nvSpPr>
         <p:spPr>
           <a:xfrm>
-            <a:off x="502920" y="960120"/>
+            <a:off x="502920" y="932688"/>
             <a:ext cx="11247120" cy="365760"/>
           </a:xfrm>
           <a:prstGeom prst="rect">
@@ -5779,7 +4237,7 @@
         </p:nvSpPr>
         <p:spPr>
           <a:xfrm>
-            <a:off x="502920" y="1325880"/>
+            <a:off x="502920" y="1298448"/>
             <a:ext cx="11247120" cy="0"/>
           </a:xfrm>
           <a:prstGeom prst="line">
@@ -5802,7 +4260,7 @@
         </p:nvSpPr>
         <p:spPr>
           <a:xfrm>
-            <a:off x="502920" y="1600200"/>
+            <a:off x="502920" y="1554480"/>
             <a:ext cx="457200" cy="457200"/>
           </a:xfrm>
           <a:prstGeom prst="ellipse">
@@ -5827,7 +4285,7 @@
         </p:nvSpPr>
         <p:spPr>
           <a:xfrm>
-            <a:off x="502920" y="1618488"/>
+            <a:off x="502920" y="1572768"/>
             <a:ext cx="457200" cy="457200"/>
           </a:xfrm>
           <a:prstGeom prst="rect">
@@ -5866,7 +4324,7 @@
         </p:nvSpPr>
         <p:spPr>
           <a:xfrm>
-            <a:off x="1143000" y="1554480"/>
+            <a:off x="1143000" y="1508760"/>
             <a:ext cx="10972800" cy="411480"/>
           </a:xfrm>
           <a:prstGeom prst="rect">
@@ -5905,7 +4363,7 @@
         </p:nvSpPr>
         <p:spPr>
           <a:xfrm>
-            <a:off x="1143000" y="1965960"/>
+            <a:off x="1143000" y="1920240"/>
             <a:ext cx="10972800" cy="548640"/>
           </a:xfrm>
           <a:prstGeom prst="rect">
@@ -5944,7 +4402,7 @@
         </p:nvSpPr>
         <p:spPr>
           <a:xfrm>
-            <a:off x="502920" y="2560320"/>
+            <a:off x="502920" y="2514600"/>
             <a:ext cx="457200" cy="457200"/>
           </a:xfrm>
           <a:prstGeom prst="ellipse">
@@ -5969,7 +4427,7 @@
         </p:nvSpPr>
         <p:spPr>
           <a:xfrm>
-            <a:off x="502920" y="2578608"/>
+            <a:off x="502920" y="2532888"/>
             <a:ext cx="457200" cy="457200"/>
           </a:xfrm>
           <a:prstGeom prst="rect">
@@ -6008,7 +4466,7 @@
         </p:nvSpPr>
         <p:spPr>
           <a:xfrm>
-            <a:off x="1143000" y="2514600"/>
+            <a:off x="1143000" y="2468880"/>
             <a:ext cx="10972800" cy="411480"/>
           </a:xfrm>
           <a:prstGeom prst="rect">
@@ -6047,7 +4505,7 @@
         </p:nvSpPr>
         <p:spPr>
           <a:xfrm>
-            <a:off x="1143000" y="2926080"/>
+            <a:off x="1143000" y="2880360"/>
             <a:ext cx="10972800" cy="548640"/>
           </a:xfrm>
           <a:prstGeom prst="rect">
@@ -6086,7 +4544,7 @@
         </p:nvSpPr>
         <p:spPr>
           <a:xfrm>
-            <a:off x="502920" y="3520440"/>
+            <a:off x="502920" y="3474720"/>
             <a:ext cx="457200" cy="457200"/>
           </a:xfrm>
           <a:prstGeom prst="ellipse">
@@ -6111,7 +4569,7 @@
         </p:nvSpPr>
         <p:spPr>
           <a:xfrm>
-            <a:off x="502920" y="3538728"/>
+            <a:off x="502920" y="3493008"/>
             <a:ext cx="457200" cy="457200"/>
           </a:xfrm>
           <a:prstGeom prst="rect">
@@ -6150,7 +4608,7 @@
         </p:nvSpPr>
         <p:spPr>
           <a:xfrm>
-            <a:off x="1143000" y="3474720"/>
+            <a:off x="1143000" y="3429000"/>
             <a:ext cx="10972800" cy="411480"/>
           </a:xfrm>
           <a:prstGeom prst="rect">
@@ -6189,7 +4647,7 @@
         </p:nvSpPr>
         <p:spPr>
           <a:xfrm>
-            <a:off x="1143000" y="3886200"/>
+            <a:off x="1143000" y="3840480"/>
             <a:ext cx="10972800" cy="548640"/>
           </a:xfrm>
           <a:prstGeom prst="rect">
@@ -6228,7 +4686,7 @@
         </p:nvSpPr>
         <p:spPr>
           <a:xfrm>
-            <a:off x="502920" y="4480560"/>
+            <a:off x="502920" y="4434840"/>
             <a:ext cx="457200" cy="457200"/>
           </a:xfrm>
           <a:prstGeom prst="ellipse">
@@ -6253,7 +4711,7 @@
         </p:nvSpPr>
         <p:spPr>
           <a:xfrm>
-            <a:off x="502920" y="4498848"/>
+            <a:off x="502920" y="4453128"/>
             <a:ext cx="457200" cy="457200"/>
           </a:xfrm>
           <a:prstGeom prst="rect">
@@ -6292,7 +4750,7 @@
         </p:nvSpPr>
         <p:spPr>
           <a:xfrm>
-            <a:off x="1143000" y="4434840"/>
+            <a:off x="1143000" y="4389120"/>
             <a:ext cx="10972800" cy="411480"/>
           </a:xfrm>
           <a:prstGeom prst="rect">
@@ -6331,7 +4789,7 @@
         </p:nvSpPr>
         <p:spPr>
           <a:xfrm>
-            <a:off x="1143000" y="4846320"/>
+            <a:off x="1143000" y="4800600"/>
             <a:ext cx="10972800" cy="548640"/>
           </a:xfrm>
           <a:prstGeom prst="rect">
@@ -6370,7 +4828,7 @@
         </p:nvSpPr>
         <p:spPr>
           <a:xfrm>
-            <a:off x="502920" y="5440680"/>
+            <a:off x="502920" y="5394960"/>
             <a:ext cx="457200" cy="457200"/>
           </a:xfrm>
           <a:prstGeom prst="ellipse">
@@ -6395,7 +4853,7 @@
         </p:nvSpPr>
         <p:spPr>
           <a:xfrm>
-            <a:off x="502920" y="5458968"/>
+            <a:off x="502920" y="5413248"/>
             <a:ext cx="457200" cy="457200"/>
           </a:xfrm>
           <a:prstGeom prst="rect">
@@ -6434,7 +4892,7 @@
         </p:nvSpPr>
         <p:spPr>
           <a:xfrm>
-            <a:off x="1143000" y="5394960"/>
+            <a:off x="1143000" y="5349240"/>
             <a:ext cx="10972800" cy="411480"/>
           </a:xfrm>
           <a:prstGeom prst="rect">
@@ -6473,7 +4931,7 @@
         </p:nvSpPr>
         <p:spPr>
           <a:xfrm>
-            <a:off x="1143000" y="5806440"/>
+            <a:off x="1143000" y="5760720"/>
             <a:ext cx="10972800" cy="548640"/>
           </a:xfrm>
           <a:prstGeom prst="rect">
@@ -6512,7 +4970,7 @@
         </p:nvSpPr>
         <p:spPr>
           <a:xfrm>
-            <a:off x="502920" y="6355080"/>
+            <a:off x="502920" y="6309360"/>
             <a:ext cx="11247120" cy="411480"/>
           </a:xfrm>
           <a:prstGeom prst="rect">
@@ -6661,7 +5119,7 @@
         </p:nvSpPr>
         <p:spPr>
           <a:xfrm>
-            <a:off x="502920" y="256032"/>
+            <a:off x="502920" y="228600"/>
             <a:ext cx="11247120" cy="777240"/>
           </a:xfrm>
           <a:prstGeom prst="rect">
@@ -6700,7 +5158,7 @@
         </p:nvSpPr>
         <p:spPr>
           <a:xfrm>
-            <a:off x="502920" y="960120"/>
+            <a:off x="502920" y="932688"/>
             <a:ext cx="11247120" cy="365760"/>
           </a:xfrm>
           <a:prstGeom prst="rect">
@@ -6739,7 +5197,7 @@
         </p:nvSpPr>
         <p:spPr>
           <a:xfrm>
-            <a:off x="502920" y="1325880"/>
+            <a:off x="502920" y="1298448"/>
             <a:ext cx="11247120" cy="0"/>
           </a:xfrm>
           <a:prstGeom prst="line">
@@ -6762,7 +5220,7 @@
         </p:nvSpPr>
         <p:spPr>
           <a:xfrm>
-            <a:off x="502920" y="1554480"/>
+            <a:off x="502920" y="1508760"/>
             <a:ext cx="11247120" cy="1097280"/>
           </a:xfrm>
           <a:prstGeom prst="rect">
@@ -6829,7 +5287,7 @@
         </p:nvSpPr>
         <p:spPr>
           <a:xfrm>
-            <a:off x="502920" y="2743200"/>
+            <a:off x="502920" y="2697480"/>
             <a:ext cx="11247120" cy="914400"/>
           </a:xfrm>
           <a:prstGeom prst="rect">
@@ -6938,7 +5396,7 @@
         </p:nvSpPr>
         <p:spPr>
           <a:xfrm>
-            <a:off x="502920" y="3931920"/>
+            <a:off x="502920" y="3886200"/>
             <a:ext cx="11247120" cy="1920240"/>
           </a:xfrm>
           <a:prstGeom prst="roundRect">
@@ -6965,7 +5423,7 @@
         </p:nvSpPr>
         <p:spPr>
           <a:xfrm>
-            <a:off x="777240" y="4069080"/>
+            <a:off x="777240" y="4023360"/>
             <a:ext cx="10698480" cy="365760"/>
           </a:xfrm>
           <a:prstGeom prst="rect">
@@ -7004,7 +5462,7 @@
         </p:nvSpPr>
         <p:spPr>
           <a:xfrm>
-            <a:off x="777240" y="4434840"/>
+            <a:off x="777240" y="4389120"/>
             <a:ext cx="10698480" cy="1325880"/>
           </a:xfrm>
           <a:prstGeom prst="rect">
@@ -7153,7 +5611,7 @@
         </p:nvSpPr>
         <p:spPr>
           <a:xfrm>
-            <a:off x="502920" y="256032"/>
+            <a:off x="502920" y="228600"/>
             <a:ext cx="11247120" cy="777240"/>
           </a:xfrm>
           <a:prstGeom prst="rect">
@@ -7192,7 +5650,7 @@
         </p:nvSpPr>
         <p:spPr>
           <a:xfrm>
-            <a:off x="502920" y="960120"/>
+            <a:off x="502920" y="932688"/>
             <a:ext cx="11247120" cy="365760"/>
           </a:xfrm>
           <a:prstGeom prst="rect">
@@ -7231,7 +5689,7 @@
         </p:nvSpPr>
         <p:spPr>
           <a:xfrm>
-            <a:off x="502920" y="1325880"/>
+            <a:off x="502920" y="1298448"/>
             <a:ext cx="11247120" cy="0"/>
           </a:xfrm>
           <a:prstGeom prst="line">
@@ -7261,7 +5719,7 @@
           </p:nvPr>
         </p:nvGraphicFramePr>
         <p:xfrm>
-          <a:off x="502920" y="1554480"/>
+          <a:off x="502920" y="1463040"/>
           <a:ext cx="11247120" cy="914400"/>
         </p:xfrm>
         <a:graphic>
@@ -8534,7 +6992,7 @@
         </p:nvSpPr>
         <p:spPr>
           <a:xfrm>
-            <a:off x="502920" y="256032"/>
+            <a:off x="502920" y="228600"/>
             <a:ext cx="11247120" cy="777240"/>
           </a:xfrm>
           <a:prstGeom prst="rect">
@@ -8573,7 +7031,7 @@
         </p:nvSpPr>
         <p:spPr>
           <a:xfrm>
-            <a:off x="502920" y="960120"/>
+            <a:off x="502920" y="932688"/>
             <a:ext cx="11247120" cy="365760"/>
           </a:xfrm>
           <a:prstGeom prst="rect">
@@ -8612,7 +7070,7 @@
         </p:nvSpPr>
         <p:spPr>
           <a:xfrm>
-            <a:off x="502920" y="1325880"/>
+            <a:off x="502920" y="1298448"/>
             <a:ext cx="11247120" cy="0"/>
           </a:xfrm>
           <a:prstGeom prst="line">
@@ -8635,7 +7093,7 @@
         </p:nvSpPr>
         <p:spPr>
           <a:xfrm>
-            <a:off x="502920" y="1600200"/>
+            <a:off x="502920" y="1508760"/>
             <a:ext cx="11247120" cy="1691640"/>
           </a:xfrm>
           <a:prstGeom prst="roundRect">
@@ -8662,7 +7120,7 @@
         </p:nvSpPr>
         <p:spPr>
           <a:xfrm>
-            <a:off x="777240" y="1783080"/>
+            <a:off x="777240" y="1691640"/>
             <a:ext cx="10698480" cy="1371600"/>
           </a:xfrm>
           <a:prstGeom prst="rect">
@@ -8701,7 +7159,7 @@
         </p:nvSpPr>
         <p:spPr>
           <a:xfrm>
-            <a:off x="502920" y="3611880"/>
+            <a:off x="502920" y="3520440"/>
             <a:ext cx="11247120" cy="365760"/>
           </a:xfrm>
           <a:prstGeom prst="rect">
@@ -8740,7 +7198,7 @@
         </p:nvSpPr>
         <p:spPr>
           <a:xfrm>
-            <a:off x="777240" y="4069080"/>
+            <a:off x="777240" y="3977640"/>
             <a:ext cx="10972800" cy="640080"/>
           </a:xfrm>
           <a:prstGeom prst="rect">
@@ -8793,7 +7251,7 @@
         </p:nvSpPr>
         <p:spPr>
           <a:xfrm>
-            <a:off x="777240" y="4709160"/>
+            <a:off x="777240" y="4617720"/>
             <a:ext cx="10972800" cy="640080"/>
           </a:xfrm>
           <a:prstGeom prst="rect">
@@ -8995,7 +7453,7 @@
         </p:nvSpPr>
         <p:spPr>
           <a:xfrm>
-            <a:off x="502920" y="256032"/>
+            <a:off x="502920" y="228600"/>
             <a:ext cx="11247120" cy="777240"/>
           </a:xfrm>
           <a:prstGeom prst="rect">
@@ -9020,7 +7478,7 @@
                 <a:ea typeface="Georgia" pitchFamily="34" charset="-122"/>
                 <a:cs typeface="Georgia" pitchFamily="34" charset="-120"/>
               </a:rPr>
-              <a:t>Data</a:t>
+              <a:t>Pipeline · model side + market side meet at the edge</a:t>
             </a:r>
             <a:endParaRPr lang="en-US" sz="2800" dirty="0"/>
           </a:p>
@@ -9034,7 +7492,7 @@
         </p:nvSpPr>
         <p:spPr>
           <a:xfrm>
-            <a:off x="502920" y="960120"/>
+            <a:off x="502920" y="932688"/>
             <a:ext cx="11247120" cy="365760"/>
           </a:xfrm>
           <a:prstGeom prst="rect">
@@ -9059,7 +7517,7 @@
                 <a:ea typeface="Calibri" pitchFamily="34" charset="-122"/>
                 <a:cs typeface="Calibri" pitchFamily="34" charset="-120"/>
               </a:rPr>
-              <a:t>Pipeline foundations</a:t>
+              <a:t>Data sources + system flow</a:t>
             </a:r>
             <a:endParaRPr lang="en-US" sz="1400" dirty="0"/>
           </a:p>
@@ -9073,7 +7531,7 @@
         </p:nvSpPr>
         <p:spPr>
           <a:xfrm>
-            <a:off x="502920" y="1325880"/>
+            <a:off x="502920" y="1298448"/>
             <a:ext cx="11247120" cy="0"/>
           </a:xfrm>
           <a:prstGeom prst="line">
@@ -9088,6 +7546,30 @@
           </a:ln>
         </p:spPr>
       </p:sp>
+      <p:pic>
+        <p:nvPicPr>
+          <p:cNvPr id="5" name="Image 0" descr="slides/figures/pipeline_flow.png">    </p:cNvPr>
+          <p:cNvPicPr>
+            <a:picLocks noChangeAspect="1"/>
+          </p:cNvPicPr>
+          <p:nvPr/>
+        </p:nvPicPr>
+        <p:blipFill>
+          <a:blip r:embed="rId1"/>
+          <a:stretch>
+            <a:fillRect/>
+          </a:stretch>
+        </p:blipFill>
+        <p:spPr>
+          <a:xfrm>
+            <a:off x="502920" y="1417320"/>
+            <a:ext cx="11247120" cy="3931920"/>
+          </a:xfrm>
+          <a:prstGeom prst="rect">
+            <a:avLst/>
+          </a:prstGeom>
+        </p:spPr>
+      </p:pic>
       <p:graphicFrame>
         <p:nvGraphicFramePr>
           <p:cNvPr id="6" name="Table 0"/>
@@ -9103,7 +7585,7 @@
           </p:nvPr>
         </p:nvGraphicFramePr>
         <p:xfrm>
-          <a:off x="502920" y="1554480"/>
+          <a:off x="502920" y="5532120"/>
           <a:ext cx="11247120" cy="914400"/>
         </p:xfrm>
         <a:graphic>
@@ -9111,21 +7593,22 @@
             <a:tbl>
               <a:tblPr/>
               <a:tblGrid>
-                <a:gridCol w="3749040"/>
-                <a:gridCol w="3749040"/>
-                <a:gridCol w="3749040"/>
+                <a:gridCol w="2811780"/>
+                <a:gridCol w="2811780"/>
+                <a:gridCol w="2811780"/>
+                <a:gridCol w="2811780"/>
               </a:tblGrid>
-              <a:tr h="640080">
+              <a:tr h="365760">
                 <a:tc>
                   <a:txBody>
                     <a:bodyPr/>
                     <a:lstStyle/>
                     <a:p>
-                      <a:pPr indent="0" marL="0">
+                      <a:pPr algn="ctr" indent="0" marL="0">
                         <a:buNone/>
                       </a:pPr>
                       <a:r>
-                        <a:rPr lang="en-US" sz="1400" b="1" dirty="0">
+                        <a:rPr lang="en-US" sz="1200" b="1" dirty="0">
                           <a:solidFill>
                             <a:srgbClr val="F6F6F2"/>
                           </a:solidFill>
@@ -9133,9 +7616,9 @@
                           <a:ea typeface="Calibri" pitchFamily="34" charset="-122"/>
                           <a:cs typeface="Calibri" pitchFamily="34" charset="-120"/>
                         </a:rPr>
-                        <a:t>Source</a:t>
+                        <a:t>PBP</a:t>
                       </a:r>
-                      <a:endParaRPr lang="en-US" sz="1400" dirty="0">
+                      <a:endParaRPr lang="en-US" sz="1200" dirty="0">
                         <a:latin typeface="Calibri" charset="0"/>
                         <a:ea typeface="Calibri" charset="0"/>
                         <a:cs typeface="Calibri" charset="0"/>
@@ -9143,7 +7626,7 @@
                     </a:p>
                   </a:txBody>
                   <a:tcPr marL="91440" marR="91440" marT="45720" marB="45720">
-                    <a:lnL w="12700" cap="flat" cmpd="sng" algn="ctr">
+                    <a:lnL w="9525" cap="flat" cmpd="sng" algn="ctr">
                       <a:solidFill>
                         <a:srgbClr val="8DA9C4"/>
                       </a:solidFill>
@@ -9152,7 +7635,7 @@
                       <a:headEnd type="none" w="med" len="med"/>
                       <a:tailEnd type="none" w="med" len="med"/>
                     </a:lnL>
-                    <a:lnR w="12700" cap="flat" cmpd="sng" algn="ctr">
+                    <a:lnR w="9525" cap="flat" cmpd="sng" algn="ctr">
                       <a:solidFill>
                         <a:srgbClr val="8DA9C4"/>
                       </a:solidFill>
@@ -9161,7 +7644,7 @@
                       <a:headEnd type="none" w="med" len="med"/>
                       <a:tailEnd type="none" w="med" len="med"/>
                     </a:lnR>
-                    <a:lnT w="12700" cap="flat" cmpd="sng" algn="ctr">
+                    <a:lnT w="9525" cap="flat" cmpd="sng" algn="ctr">
                       <a:solidFill>
                         <a:srgbClr val="8DA9C4"/>
                       </a:solidFill>
@@ -9170,7 +7653,7 @@
                       <a:headEnd type="none" w="med" len="med"/>
                       <a:tailEnd type="none" w="med" len="med"/>
                     </a:lnT>
-                    <a:lnB w="12700" cap="flat" cmpd="sng" algn="ctr">
+                    <a:lnB w="9525" cap="flat" cmpd="sng" algn="ctr">
                       <a:solidFill>
                         <a:srgbClr val="8DA9C4"/>
                       </a:solidFill>
@@ -9189,11 +7672,11 @@
                     <a:bodyPr/>
                     <a:lstStyle/>
                     <a:p>
-                      <a:pPr indent="0" marL="0">
+                      <a:pPr algn="ctr" indent="0" marL="0">
                         <a:buNone/>
                       </a:pPr>
                       <a:r>
-                        <a:rPr lang="en-US" sz="1400" b="1" dirty="0">
+                        <a:rPr lang="en-US" sz="1200" b="1" dirty="0">
                           <a:solidFill>
                             <a:srgbClr val="F6F6F2"/>
                           </a:solidFill>
@@ -9201,9 +7684,9 @@
                           <a:ea typeface="Calibri" pitchFamily="34" charset="-122"/>
                           <a:cs typeface="Calibri" pitchFamily="34" charset="-120"/>
                         </a:rPr>
-                        <a:t>Origin</a:t>
+                        <a:t>Sportsbook odds</a:t>
                       </a:r>
-                      <a:endParaRPr lang="en-US" sz="1400" dirty="0">
+                      <a:endParaRPr lang="en-US" sz="1200" dirty="0">
                         <a:latin typeface="Calibri" charset="0"/>
                         <a:ea typeface="Calibri" charset="0"/>
                         <a:cs typeface="Calibri" charset="0"/>
@@ -9211,7 +7694,7 @@
                     </a:p>
                   </a:txBody>
                   <a:tcPr marL="91440" marR="91440" marT="45720" marB="45720">
-                    <a:lnL w="12700" cap="flat" cmpd="sng" algn="ctr">
+                    <a:lnL w="9525" cap="flat" cmpd="sng" algn="ctr">
                       <a:solidFill>
                         <a:srgbClr val="8DA9C4"/>
                       </a:solidFill>
@@ -9220,7 +7703,7 @@
                       <a:headEnd type="none" w="med" len="med"/>
                       <a:tailEnd type="none" w="med" len="med"/>
                     </a:lnL>
-                    <a:lnR w="12700" cap="flat" cmpd="sng" algn="ctr">
+                    <a:lnR w="9525" cap="flat" cmpd="sng" algn="ctr">
                       <a:solidFill>
                         <a:srgbClr val="8DA9C4"/>
                       </a:solidFill>
@@ -9229,7 +7712,7 @@
                       <a:headEnd type="none" w="med" len="med"/>
                       <a:tailEnd type="none" w="med" len="med"/>
                     </a:lnR>
-                    <a:lnT w="12700" cap="flat" cmpd="sng" algn="ctr">
+                    <a:lnT w="9525" cap="flat" cmpd="sng" algn="ctr">
                       <a:solidFill>
                         <a:srgbClr val="8DA9C4"/>
                       </a:solidFill>
@@ -9238,7 +7721,7 @@
                       <a:headEnd type="none" w="med" len="med"/>
                       <a:tailEnd type="none" w="med" len="med"/>
                     </a:lnT>
-                    <a:lnB w="12700" cap="flat" cmpd="sng" algn="ctr">
+                    <a:lnB w="9525" cap="flat" cmpd="sng" algn="ctr">
                       <a:solidFill>
                         <a:srgbClr val="8DA9C4"/>
                       </a:solidFill>
@@ -9257,11 +7740,11 @@
                     <a:bodyPr/>
                     <a:lstStyle/>
                     <a:p>
-                      <a:pPr indent="0" marL="0">
+                      <a:pPr algn="ctr" indent="0" marL="0">
                         <a:buNone/>
                       </a:pPr>
                       <a:r>
-                        <a:rPr lang="en-US" sz="1400" b="1" dirty="0">
+                        <a:rPr lang="en-US" sz="1200" b="1" dirty="0">
                           <a:solidFill>
                             <a:srgbClr val="F6F6F2"/>
                           </a:solidFill>
@@ -9269,9 +7752,9 @@
                           <a:ea typeface="Calibri" pitchFamily="34" charset="-122"/>
                           <a:cs typeface="Calibri" pitchFamily="34" charset="-120"/>
                         </a:rPr>
-                        <a:t>Coverage</a:t>
+                        <a:t>Kalshi</a:t>
                       </a:r>
-                      <a:endParaRPr lang="en-US" sz="1400" dirty="0">
+                      <a:endParaRPr lang="en-US" sz="1200" dirty="0">
                         <a:latin typeface="Calibri" charset="0"/>
                         <a:ea typeface="Calibri" charset="0"/>
                         <a:cs typeface="Calibri" charset="0"/>
@@ -9279,7 +7762,7 @@
                     </a:p>
                   </a:txBody>
                   <a:tcPr marL="91440" marR="91440" marT="45720" marB="45720">
-                    <a:lnL w="12700" cap="flat" cmpd="sng" algn="ctr">
+                    <a:lnL w="9525" cap="flat" cmpd="sng" algn="ctr">
                       <a:solidFill>
                         <a:srgbClr val="8DA9C4"/>
                       </a:solidFill>
@@ -9288,7 +7771,7 @@
                       <a:headEnd type="none" w="med" len="med"/>
                       <a:tailEnd type="none" w="med" len="med"/>
                     </a:lnL>
-                    <a:lnR w="12700" cap="flat" cmpd="sng" algn="ctr">
+                    <a:lnR w="9525" cap="flat" cmpd="sng" algn="ctr">
                       <a:solidFill>
                         <a:srgbClr val="8DA9C4"/>
                       </a:solidFill>
@@ -9297,7 +7780,7 @@
                       <a:headEnd type="none" w="med" len="med"/>
                       <a:tailEnd type="none" w="med" len="med"/>
                     </a:lnR>
-                    <a:lnT w="12700" cap="flat" cmpd="sng" algn="ctr">
+                    <a:lnT w="9525" cap="flat" cmpd="sng" algn="ctr">
                       <a:solidFill>
                         <a:srgbClr val="8DA9C4"/>
                       </a:solidFill>
@@ -9306,7 +7789,75 @@
                       <a:headEnd type="none" w="med" len="med"/>
                       <a:tailEnd type="none" w="med" len="med"/>
                     </a:lnT>
-                    <a:lnB w="12700" cap="flat" cmpd="sng" algn="ctr">
+                    <a:lnB w="9525" cap="flat" cmpd="sng" algn="ctr">
+                      <a:solidFill>
+                        <a:srgbClr val="8DA9C4"/>
+                      </a:solidFill>
+                      <a:prstDash val="solid"/>
+                      <a:round/>
+                      <a:headEnd type="none" w="med" len="med"/>
+                      <a:tailEnd type="none" w="med" len="med"/>
+                    </a:lnB>
+                    <a:solidFill>
+                      <a:srgbClr val="0B2545"/>
+                    </a:solidFill>
+                  </a:tcPr>
+                </a:tc>
+                <a:tc>
+                  <a:txBody>
+                    <a:bodyPr/>
+                    <a:lstStyle/>
+                    <a:p>
+                      <a:pPr algn="ctr" indent="0" marL="0">
+                        <a:buNone/>
+                      </a:pPr>
+                      <a:r>
+                        <a:rPr lang="en-US" sz="1200" b="1" dirty="0">
+                          <a:solidFill>
+                            <a:srgbClr val="F6F6F2"/>
+                          </a:solidFill>
+                          <a:latin typeface="Calibri" pitchFamily="34" charset="0"/>
+                          <a:ea typeface="Calibri" pitchFamily="34" charset="-122"/>
+                          <a:cs typeface="Calibri" pitchFamily="34" charset="-120"/>
+                        </a:rPr>
+                        <a:t>Snapshots</a:t>
+                      </a:r>
+                      <a:endParaRPr lang="en-US" sz="1200" dirty="0">
+                        <a:latin typeface="Calibri" charset="0"/>
+                        <a:ea typeface="Calibri" charset="0"/>
+                        <a:cs typeface="Calibri" charset="0"/>
+                      </a:endParaRPr>
+                    </a:p>
+                  </a:txBody>
+                  <a:tcPr marL="91440" marR="91440" marT="45720" marB="45720">
+                    <a:lnL w="9525" cap="flat" cmpd="sng" algn="ctr">
+                      <a:solidFill>
+                        <a:srgbClr val="8DA9C4"/>
+                      </a:solidFill>
+                      <a:prstDash val="solid"/>
+                      <a:round/>
+                      <a:headEnd type="none" w="med" len="med"/>
+                      <a:tailEnd type="none" w="med" len="med"/>
+                    </a:lnL>
+                    <a:lnR w="9525" cap="flat" cmpd="sng" algn="ctr">
+                      <a:solidFill>
+                        <a:srgbClr val="8DA9C4"/>
+                      </a:solidFill>
+                      <a:prstDash val="solid"/>
+                      <a:round/>
+                      <a:headEnd type="none" w="med" len="med"/>
+                      <a:tailEnd type="none" w="med" len="med"/>
+                    </a:lnR>
+                    <a:lnT w="9525" cap="flat" cmpd="sng" algn="ctr">
+                      <a:solidFill>
+                        <a:srgbClr val="8DA9C4"/>
+                      </a:solidFill>
+                      <a:prstDash val="solid"/>
+                      <a:round/>
+                      <a:headEnd type="none" w="med" len="med"/>
+                      <a:tailEnd type="none" w="med" len="med"/>
+                    </a:lnT>
+                    <a:lnB w="9525" cap="flat" cmpd="sng" algn="ctr">
                       <a:solidFill>
                         <a:srgbClr val="8DA9C4"/>
                       </a:solidFill>
@@ -9321,27 +7872,27 @@
                   </a:tcPr>
                 </a:tc>
               </a:tr>
-              <a:tr h="640080">
+              <a:tr h="365760">
                 <a:tc>
                   <a:txBody>
                     <a:bodyPr/>
                     <a:lstStyle/>
                     <a:p>
-                      <a:pPr indent="0" marL="0">
+                      <a:pPr algn="ctr" indent="0" marL="0">
                         <a:buNone/>
                       </a:pPr>
                       <a:r>
-                        <a:rPr lang="en-US" sz="1400" b="1" dirty="0">
+                        <a:rPr lang="en-US" sz="1200" dirty="0">
                           <a:solidFill>
-                            <a:srgbClr val="0B2545"/>
+                            <a:srgbClr val="1A1A1A"/>
                           </a:solidFill>
                           <a:latin typeface="Calibri" pitchFamily="34" charset="0"/>
                           <a:ea typeface="Calibri" pitchFamily="34" charset="-122"/>
                           <a:cs typeface="Calibri" pitchFamily="34" charset="-120"/>
                         </a:rPr>
-                        <a:t>Play-by-play</a:t>
+                        <a:t>nba_api · 2,460 games</a:t>
                       </a:r>
-                      <a:endParaRPr lang="en-US" sz="1400" dirty="0">
+                      <a:endParaRPr lang="en-US" sz="1200" dirty="0">
                         <a:latin typeface="Calibri" charset="0"/>
                         <a:ea typeface="Calibri" charset="0"/>
                         <a:cs typeface="Calibri" charset="0"/>
@@ -9349,7 +7900,7 @@
                     </a:p>
                   </a:txBody>
                   <a:tcPr marL="91440" marR="91440" marT="45720" marB="45720">
-                    <a:lnL w="12700" cap="flat" cmpd="sng" algn="ctr">
+                    <a:lnL w="9525" cap="flat" cmpd="sng" algn="ctr">
                       <a:solidFill>
                         <a:srgbClr val="8DA9C4"/>
                       </a:solidFill>
@@ -9358,7 +7909,7 @@
                       <a:headEnd type="none" w="med" len="med"/>
                       <a:tailEnd type="none" w="med" len="med"/>
                     </a:lnL>
-                    <a:lnR w="12700" cap="flat" cmpd="sng" algn="ctr">
+                    <a:lnR w="9525" cap="flat" cmpd="sng" algn="ctr">
                       <a:solidFill>
                         <a:srgbClr val="8DA9C4"/>
                       </a:solidFill>
@@ -9367,7 +7918,7 @@
                       <a:headEnd type="none" w="med" len="med"/>
                       <a:tailEnd type="none" w="med" len="med"/>
                     </a:lnR>
-                    <a:lnT w="12700" cap="flat" cmpd="sng" algn="ctr">
+                    <a:lnT w="9525" cap="flat" cmpd="sng" algn="ctr">
                       <a:solidFill>
                         <a:srgbClr val="8DA9C4"/>
                       </a:solidFill>
@@ -9376,7 +7927,7 @@
                       <a:headEnd type="none" w="med" len="med"/>
                       <a:tailEnd type="none" w="med" len="med"/>
                     </a:lnT>
-                    <a:lnB w="12700" cap="flat" cmpd="sng" algn="ctr">
+                    <a:lnB w="9525" cap="flat" cmpd="sng" algn="ctr">
                       <a:solidFill>
                         <a:srgbClr val="8DA9C4"/>
                       </a:solidFill>
@@ -9392,11 +7943,11 @@
                     <a:bodyPr/>
                     <a:lstStyle/>
                     <a:p>
-                      <a:pPr indent="0" marL="0">
+                      <a:pPr algn="ctr" indent="0" marL="0">
                         <a:buNone/>
                       </a:pPr>
                       <a:r>
-                        <a:rPr lang="en-US" sz="1400" dirty="0">
+                        <a:rPr lang="en-US" sz="1200" dirty="0">
                           <a:solidFill>
                             <a:srgbClr val="1A1A1A"/>
                           </a:solidFill>
@@ -9404,9 +7955,9 @@
                           <a:ea typeface="Calibri" pitchFamily="34" charset="-122"/>
                           <a:cs typeface="Calibri" pitchFamily="34" charset="-120"/>
                         </a:rPr>
-                        <a:t>nba_api · free</a:t>
+                        <a:t>the-odds-api · 9 books</a:t>
                       </a:r>
-                      <a:endParaRPr lang="en-US" sz="1400" dirty="0">
+                      <a:endParaRPr lang="en-US" sz="1200" dirty="0">
                         <a:latin typeface="Calibri" charset="0"/>
                         <a:ea typeface="Calibri" charset="0"/>
                         <a:cs typeface="Calibri" charset="0"/>
@@ -9414,7 +7965,7 @@
                     </a:p>
                   </a:txBody>
                   <a:tcPr marL="91440" marR="91440" marT="45720" marB="45720">
-                    <a:lnL w="12700" cap="flat" cmpd="sng" algn="ctr">
+                    <a:lnL w="9525" cap="flat" cmpd="sng" algn="ctr">
                       <a:solidFill>
                         <a:srgbClr val="8DA9C4"/>
                       </a:solidFill>
@@ -9423,7 +7974,7 @@
                       <a:headEnd type="none" w="med" len="med"/>
                       <a:tailEnd type="none" w="med" len="med"/>
                     </a:lnL>
-                    <a:lnR w="12700" cap="flat" cmpd="sng" algn="ctr">
+                    <a:lnR w="9525" cap="flat" cmpd="sng" algn="ctr">
                       <a:solidFill>
                         <a:srgbClr val="8DA9C4"/>
                       </a:solidFill>
@@ -9432,7 +7983,7 @@
                       <a:headEnd type="none" w="med" len="med"/>
                       <a:tailEnd type="none" w="med" len="med"/>
                     </a:lnR>
-                    <a:lnT w="12700" cap="flat" cmpd="sng" algn="ctr">
+                    <a:lnT w="9525" cap="flat" cmpd="sng" algn="ctr">
                       <a:solidFill>
                         <a:srgbClr val="8DA9C4"/>
                       </a:solidFill>
@@ -9441,7 +7992,7 @@
                       <a:headEnd type="none" w="med" len="med"/>
                       <a:tailEnd type="none" w="med" len="med"/>
                     </a:lnT>
-                    <a:lnB w="12700" cap="flat" cmpd="sng" algn="ctr">
+                    <a:lnB w="9525" cap="flat" cmpd="sng" algn="ctr">
                       <a:solidFill>
                         <a:srgbClr val="8DA9C4"/>
                       </a:solidFill>
@@ -9457,11 +8008,11 @@
                     <a:bodyPr/>
                     <a:lstStyle/>
                     <a:p>
-                      <a:pPr indent="0" marL="0">
+                      <a:pPr algn="ctr" indent="0" marL="0">
                         <a:buNone/>
                       </a:pPr>
                       <a:r>
-                        <a:rPr lang="en-US" sz="1400" dirty="0">
+                        <a:rPr lang="en-US" sz="1200" dirty="0">
                           <a:solidFill>
                             <a:srgbClr val="1A1A1A"/>
                           </a:solidFill>
@@ -9469,9 +8020,9 @@
                           <a:ea typeface="Calibri" pitchFamily="34" charset="-122"/>
                           <a:cs typeface="Calibri" pitchFamily="34" charset="-120"/>
                         </a:rPr>
-                        <a:t>2,460 games · 2023-24 + 2024-25 regular seasons</a:t>
+                        <a:t>public API · 1H winner</a:t>
                       </a:r>
-                      <a:endParaRPr lang="en-US" sz="1400" dirty="0">
+                      <a:endParaRPr lang="en-US" sz="1200" dirty="0">
                         <a:latin typeface="Calibri" charset="0"/>
                         <a:ea typeface="Calibri" charset="0"/>
                         <a:cs typeface="Calibri" charset="0"/>
@@ -9479,7 +8030,7 @@
                     </a:p>
                   </a:txBody>
                   <a:tcPr marL="91440" marR="91440" marT="45720" marB="45720">
-                    <a:lnL w="12700" cap="flat" cmpd="sng" algn="ctr">
+                    <a:lnL w="9525" cap="flat" cmpd="sng" algn="ctr">
                       <a:solidFill>
                         <a:srgbClr val="8DA9C4"/>
                       </a:solidFill>
@@ -9488,7 +8039,7 @@
                       <a:headEnd type="none" w="med" len="med"/>
                       <a:tailEnd type="none" w="med" len="med"/>
                     </a:lnL>
-                    <a:lnR w="12700" cap="flat" cmpd="sng" algn="ctr">
+                    <a:lnR w="9525" cap="flat" cmpd="sng" algn="ctr">
                       <a:solidFill>
                         <a:srgbClr val="8DA9C4"/>
                       </a:solidFill>
@@ -9497,7 +8048,7 @@
                       <a:headEnd type="none" w="med" len="med"/>
                       <a:tailEnd type="none" w="med" len="med"/>
                     </a:lnR>
-                    <a:lnT w="12700" cap="flat" cmpd="sng" algn="ctr">
+                    <a:lnT w="9525" cap="flat" cmpd="sng" algn="ctr">
                       <a:solidFill>
                         <a:srgbClr val="8DA9C4"/>
                       </a:solidFill>
@@ -9506,74 +8057,7 @@
                       <a:headEnd type="none" w="med" len="med"/>
                       <a:tailEnd type="none" w="med" len="med"/>
                     </a:lnT>
-                    <a:lnB w="12700" cap="flat" cmpd="sng" algn="ctr">
-                      <a:solidFill>
-                        <a:srgbClr val="8DA9C4"/>
-                      </a:solidFill>
-                      <a:prstDash val="solid"/>
-                      <a:round/>
-                      <a:headEnd type="none" w="med" len="med"/>
-                      <a:tailEnd type="none" w="med" len="med"/>
-                    </a:lnB>
-                  </a:tcPr>
-                </a:tc>
-              </a:tr>
-              <a:tr h="640080">
-                <a:tc>
-                  <a:txBody>
-                    <a:bodyPr/>
-                    <a:lstStyle/>
-                    <a:p>
-                      <a:pPr indent="0" marL="0">
-                        <a:buNone/>
-                      </a:pPr>
-                      <a:r>
-                        <a:rPr lang="en-US" sz="1400" b="1" dirty="0">
-                          <a:solidFill>
-                            <a:srgbClr val="0B2545"/>
-                          </a:solidFill>
-                          <a:latin typeface="Calibri" pitchFamily="34" charset="0"/>
-                          <a:ea typeface="Calibri" pitchFamily="34" charset="-122"/>
-                          <a:cs typeface="Calibri" pitchFamily="34" charset="-120"/>
-                        </a:rPr>
-                        <a:t>Live sportsbook odds</a:t>
-                      </a:r>
-                      <a:endParaRPr lang="en-US" sz="1400" dirty="0">
-                        <a:latin typeface="Calibri" charset="0"/>
-                        <a:ea typeface="Calibri" charset="0"/>
-                        <a:cs typeface="Calibri" charset="0"/>
-                      </a:endParaRPr>
-                    </a:p>
-                  </a:txBody>
-                  <a:tcPr marL="91440" marR="91440" marT="45720" marB="45720">
-                    <a:lnL w="12700" cap="flat" cmpd="sng" algn="ctr">
-                      <a:solidFill>
-                        <a:srgbClr val="8DA9C4"/>
-                      </a:solidFill>
-                      <a:prstDash val="solid"/>
-                      <a:round/>
-                      <a:headEnd type="none" w="med" len="med"/>
-                      <a:tailEnd type="none" w="med" len="med"/>
-                    </a:lnL>
-                    <a:lnR w="12700" cap="flat" cmpd="sng" algn="ctr">
-                      <a:solidFill>
-                        <a:srgbClr val="8DA9C4"/>
-                      </a:solidFill>
-                      <a:prstDash val="solid"/>
-                      <a:round/>
-                      <a:headEnd type="none" w="med" len="med"/>
-                      <a:tailEnd type="none" w="med" len="med"/>
-                    </a:lnR>
-                    <a:lnT w="12700" cap="flat" cmpd="sng" algn="ctr">
-                      <a:solidFill>
-                        <a:srgbClr val="8DA9C4"/>
-                      </a:solidFill>
-                      <a:prstDash val="solid"/>
-                      <a:round/>
-                      <a:headEnd type="none" w="med" len="med"/>
-                      <a:tailEnd type="none" w="med" len="med"/>
-                    </a:lnT>
-                    <a:lnB w="12700" cap="flat" cmpd="sng" algn="ctr">
+                    <a:lnB w="9525" cap="flat" cmpd="sng" algn="ctr">
                       <a:solidFill>
                         <a:srgbClr val="8DA9C4"/>
                       </a:solidFill>
@@ -9589,11 +8073,11 @@
                     <a:bodyPr/>
                     <a:lstStyle/>
                     <a:p>
-                      <a:pPr indent="0" marL="0">
+                      <a:pPr algn="ctr" indent="0" marL="0">
                         <a:buNone/>
                       </a:pPr>
                       <a:r>
-                        <a:rPr lang="en-US" sz="1400" dirty="0">
+                        <a:rPr lang="en-US" sz="1200" dirty="0">
                           <a:solidFill>
                             <a:srgbClr val="1A1A1A"/>
                           </a:solidFill>
@@ -9601,9 +8085,9 @@
                           <a:ea typeface="Calibri" pitchFamily="34" charset="-122"/>
                           <a:cs typeface="Calibri" pitchFamily="34" charset="-120"/>
                         </a:rPr>
-                        <a:t>the-odds-api · free</a:t>
+                        <a:t>59,040 rows · 4 features</a:t>
                       </a:r>
-                      <a:endParaRPr lang="en-US" sz="1400" dirty="0">
+                      <a:endParaRPr lang="en-US" sz="1200" dirty="0">
                         <a:latin typeface="Calibri" charset="0"/>
                         <a:ea typeface="Calibri" charset="0"/>
                         <a:cs typeface="Calibri" charset="0"/>
@@ -9611,7 +8095,7 @@
                     </a:p>
                   </a:txBody>
                   <a:tcPr marL="91440" marR="91440" marT="45720" marB="45720">
-                    <a:lnL w="12700" cap="flat" cmpd="sng" algn="ctr">
+                    <a:lnL w="9525" cap="flat" cmpd="sng" algn="ctr">
                       <a:solidFill>
                         <a:srgbClr val="8DA9C4"/>
                       </a:solidFill>
@@ -9620,7 +8104,7 @@
                       <a:headEnd type="none" w="med" len="med"/>
                       <a:tailEnd type="none" w="med" len="med"/>
                     </a:lnL>
-                    <a:lnR w="12700" cap="flat" cmpd="sng" algn="ctr">
+                    <a:lnR w="9525" cap="flat" cmpd="sng" algn="ctr">
                       <a:solidFill>
                         <a:srgbClr val="8DA9C4"/>
                       </a:solidFill>
@@ -9629,7 +8113,7 @@
                       <a:headEnd type="none" w="med" len="med"/>
                       <a:tailEnd type="none" w="med" len="med"/>
                     </a:lnR>
-                    <a:lnT w="12700" cap="flat" cmpd="sng" algn="ctr">
+                    <a:lnT w="9525" cap="flat" cmpd="sng" algn="ctr">
                       <a:solidFill>
                         <a:srgbClr val="8DA9C4"/>
                       </a:solidFill>
@@ -9638,466 +8122,7 @@
                       <a:headEnd type="none" w="med" len="med"/>
                       <a:tailEnd type="none" w="med" len="med"/>
                     </a:lnT>
-                    <a:lnB w="12700" cap="flat" cmpd="sng" algn="ctr">
-                      <a:solidFill>
-                        <a:srgbClr val="8DA9C4"/>
-                      </a:solidFill>
-                      <a:prstDash val="solid"/>
-                      <a:round/>
-                      <a:headEnd type="none" w="med" len="med"/>
-                      <a:tailEnd type="none" w="med" len="med"/>
-                    </a:lnB>
-                  </a:tcPr>
-                </a:tc>
-                <a:tc>
-                  <a:txBody>
-                    <a:bodyPr/>
-                    <a:lstStyle/>
-                    <a:p>
-                      <a:pPr indent="0" marL="0">
-                        <a:buNone/>
-                      </a:pPr>
-                      <a:r>
-                        <a:rPr lang="en-US" sz="1400" dirty="0">
-                          <a:solidFill>
-                            <a:srgbClr val="1A1A1A"/>
-                          </a:solidFill>
-                          <a:latin typeface="Calibri" pitchFamily="34" charset="0"/>
-                          <a:ea typeface="Calibri" pitchFamily="34" charset="-122"/>
-                          <a:cs typeface="Calibri" pitchFamily="34" charset="-120"/>
-                        </a:rPr>
-                        <a:t>9 books · in-play game-winner moneyline</a:t>
-                      </a:r>
-                      <a:endParaRPr lang="en-US" sz="1400" dirty="0">
-                        <a:latin typeface="Calibri" charset="0"/>
-                        <a:ea typeface="Calibri" charset="0"/>
-                        <a:cs typeface="Calibri" charset="0"/>
-                      </a:endParaRPr>
-                    </a:p>
-                  </a:txBody>
-                  <a:tcPr marL="91440" marR="91440" marT="45720" marB="45720">
-                    <a:lnL w="12700" cap="flat" cmpd="sng" algn="ctr">
-                      <a:solidFill>
-                        <a:srgbClr val="8DA9C4"/>
-                      </a:solidFill>
-                      <a:prstDash val="solid"/>
-                      <a:round/>
-                      <a:headEnd type="none" w="med" len="med"/>
-                      <a:tailEnd type="none" w="med" len="med"/>
-                    </a:lnL>
-                    <a:lnR w="12700" cap="flat" cmpd="sng" algn="ctr">
-                      <a:solidFill>
-                        <a:srgbClr val="8DA9C4"/>
-                      </a:solidFill>
-                      <a:prstDash val="solid"/>
-                      <a:round/>
-                      <a:headEnd type="none" w="med" len="med"/>
-                      <a:tailEnd type="none" w="med" len="med"/>
-                    </a:lnR>
-                    <a:lnT w="12700" cap="flat" cmpd="sng" algn="ctr">
-                      <a:solidFill>
-                        <a:srgbClr val="8DA9C4"/>
-                      </a:solidFill>
-                      <a:prstDash val="solid"/>
-                      <a:round/>
-                      <a:headEnd type="none" w="med" len="med"/>
-                      <a:tailEnd type="none" w="med" len="med"/>
-                    </a:lnT>
-                    <a:lnB w="12700" cap="flat" cmpd="sng" algn="ctr">
-                      <a:solidFill>
-                        <a:srgbClr val="8DA9C4"/>
-                      </a:solidFill>
-                      <a:prstDash val="solid"/>
-                      <a:round/>
-                      <a:headEnd type="none" w="med" len="med"/>
-                      <a:tailEnd type="none" w="med" len="med"/>
-                    </a:lnB>
-                  </a:tcPr>
-                </a:tc>
-              </a:tr>
-              <a:tr h="640080">
-                <a:tc>
-                  <a:txBody>
-                    <a:bodyPr/>
-                    <a:lstStyle/>
-                    <a:p>
-                      <a:pPr indent="0" marL="0">
-                        <a:buNone/>
-                      </a:pPr>
-                      <a:r>
-                        <a:rPr lang="en-US" sz="1400" b="1" dirty="0">
-                          <a:solidFill>
-                            <a:srgbClr val="0B2545"/>
-                          </a:solidFill>
-                          <a:latin typeface="Calibri" pitchFamily="34" charset="0"/>
-                          <a:ea typeface="Calibri" pitchFamily="34" charset="-122"/>
-                          <a:cs typeface="Calibri" pitchFamily="34" charset="-120"/>
-                        </a:rPr>
-                        <a:t>Kalshi 1H-winner contracts</a:t>
-                      </a:r>
-                      <a:endParaRPr lang="en-US" sz="1400" dirty="0">
-                        <a:latin typeface="Calibri" charset="0"/>
-                        <a:ea typeface="Calibri" charset="0"/>
-                        <a:cs typeface="Calibri" charset="0"/>
-                      </a:endParaRPr>
-                    </a:p>
-                  </a:txBody>
-                  <a:tcPr marL="91440" marR="91440" marT="45720" marB="45720">
-                    <a:lnL w="12700" cap="flat" cmpd="sng" algn="ctr">
-                      <a:solidFill>
-                        <a:srgbClr val="8DA9C4"/>
-                      </a:solidFill>
-                      <a:prstDash val="solid"/>
-                      <a:round/>
-                      <a:headEnd type="none" w="med" len="med"/>
-                      <a:tailEnd type="none" w="med" len="med"/>
-                    </a:lnL>
-                    <a:lnR w="12700" cap="flat" cmpd="sng" algn="ctr">
-                      <a:solidFill>
-                        <a:srgbClr val="8DA9C4"/>
-                      </a:solidFill>
-                      <a:prstDash val="solid"/>
-                      <a:round/>
-                      <a:headEnd type="none" w="med" len="med"/>
-                      <a:tailEnd type="none" w="med" len="med"/>
-                    </a:lnR>
-                    <a:lnT w="12700" cap="flat" cmpd="sng" algn="ctr">
-                      <a:solidFill>
-                        <a:srgbClr val="8DA9C4"/>
-                      </a:solidFill>
-                      <a:prstDash val="solid"/>
-                      <a:round/>
-                      <a:headEnd type="none" w="med" len="med"/>
-                      <a:tailEnd type="none" w="med" len="med"/>
-                    </a:lnT>
-                    <a:lnB w="12700" cap="flat" cmpd="sng" algn="ctr">
-                      <a:solidFill>
-                        <a:srgbClr val="8DA9C4"/>
-                      </a:solidFill>
-                      <a:prstDash val="solid"/>
-                      <a:round/>
-                      <a:headEnd type="none" w="med" len="med"/>
-                      <a:tailEnd type="none" w="med" len="med"/>
-                    </a:lnB>
-                  </a:tcPr>
-                </a:tc>
-                <a:tc>
-                  <a:txBody>
-                    <a:bodyPr/>
-                    <a:lstStyle/>
-                    <a:p>
-                      <a:pPr indent="0" marL="0">
-                        <a:buNone/>
-                      </a:pPr>
-                      <a:r>
-                        <a:rPr lang="en-US" sz="1400" dirty="0">
-                          <a:solidFill>
-                            <a:srgbClr val="1A1A1A"/>
-                          </a:solidFill>
-                          <a:latin typeface="Calibri" pitchFamily="34" charset="0"/>
-                          <a:ea typeface="Calibri" pitchFamily="34" charset="-122"/>
-                          <a:cs typeface="Calibri" pitchFamily="34" charset="-120"/>
-                        </a:rPr>
-                        <a:t>Kalshi public API · free</a:t>
-                      </a:r>
-                      <a:endParaRPr lang="en-US" sz="1400" dirty="0">
-                        <a:latin typeface="Calibri" charset="0"/>
-                        <a:ea typeface="Calibri" charset="0"/>
-                        <a:cs typeface="Calibri" charset="0"/>
-                      </a:endParaRPr>
-                    </a:p>
-                  </a:txBody>
-                  <a:tcPr marL="91440" marR="91440" marT="45720" marB="45720">
-                    <a:lnL w="12700" cap="flat" cmpd="sng" algn="ctr">
-                      <a:solidFill>
-                        <a:srgbClr val="8DA9C4"/>
-                      </a:solidFill>
-                      <a:prstDash val="solid"/>
-                      <a:round/>
-                      <a:headEnd type="none" w="med" len="med"/>
-                      <a:tailEnd type="none" w="med" len="med"/>
-                    </a:lnL>
-                    <a:lnR w="12700" cap="flat" cmpd="sng" algn="ctr">
-                      <a:solidFill>
-                        <a:srgbClr val="8DA9C4"/>
-                      </a:solidFill>
-                      <a:prstDash val="solid"/>
-                      <a:round/>
-                      <a:headEnd type="none" w="med" len="med"/>
-                      <a:tailEnd type="none" w="med" len="med"/>
-                    </a:lnR>
-                    <a:lnT w="12700" cap="flat" cmpd="sng" algn="ctr">
-                      <a:solidFill>
-                        <a:srgbClr val="8DA9C4"/>
-                      </a:solidFill>
-                      <a:prstDash val="solid"/>
-                      <a:round/>
-                      <a:headEnd type="none" w="med" len="med"/>
-                      <a:tailEnd type="none" w="med" len="med"/>
-                    </a:lnT>
-                    <a:lnB w="12700" cap="flat" cmpd="sng" algn="ctr">
-                      <a:solidFill>
-                        <a:srgbClr val="8DA9C4"/>
-                      </a:solidFill>
-                      <a:prstDash val="solid"/>
-                      <a:round/>
-                      <a:headEnd type="none" w="med" len="med"/>
-                      <a:tailEnd type="none" w="med" len="med"/>
-                    </a:lnB>
-                  </a:tcPr>
-                </a:tc>
-                <a:tc>
-                  <a:txBody>
-                    <a:bodyPr/>
-                    <a:lstStyle/>
-                    <a:p>
-                      <a:pPr indent="0" marL="0">
-                        <a:buNone/>
-                      </a:pPr>
-                      <a:r>
-                        <a:rPr lang="en-US" sz="1400" dirty="0">
-                          <a:solidFill>
-                            <a:srgbClr val="1A1A1A"/>
-                          </a:solidFill>
-                          <a:latin typeface="Calibri" pitchFamily="34" charset="0"/>
-                          <a:ea typeface="Calibri" pitchFamily="34" charset="-122"/>
-                          <a:cs typeface="Calibri" pitchFamily="34" charset="-120"/>
-                        </a:rPr>
-                        <a:t>peer-driven · CFTC-regulated</a:t>
-                      </a:r>
-                      <a:endParaRPr lang="en-US" sz="1400" dirty="0">
-                        <a:latin typeface="Calibri" charset="0"/>
-                        <a:ea typeface="Calibri" charset="0"/>
-                        <a:cs typeface="Calibri" charset="0"/>
-                      </a:endParaRPr>
-                    </a:p>
-                  </a:txBody>
-                  <a:tcPr marL="91440" marR="91440" marT="45720" marB="45720">
-                    <a:lnL w="12700" cap="flat" cmpd="sng" algn="ctr">
-                      <a:solidFill>
-                        <a:srgbClr val="8DA9C4"/>
-                      </a:solidFill>
-                      <a:prstDash val="solid"/>
-                      <a:round/>
-                      <a:headEnd type="none" w="med" len="med"/>
-                      <a:tailEnd type="none" w="med" len="med"/>
-                    </a:lnL>
-                    <a:lnR w="12700" cap="flat" cmpd="sng" algn="ctr">
-                      <a:solidFill>
-                        <a:srgbClr val="8DA9C4"/>
-                      </a:solidFill>
-                      <a:prstDash val="solid"/>
-                      <a:round/>
-                      <a:headEnd type="none" w="med" len="med"/>
-                      <a:tailEnd type="none" w="med" len="med"/>
-                    </a:lnR>
-                    <a:lnT w="12700" cap="flat" cmpd="sng" algn="ctr">
-                      <a:solidFill>
-                        <a:srgbClr val="8DA9C4"/>
-                      </a:solidFill>
-                      <a:prstDash val="solid"/>
-                      <a:round/>
-                      <a:headEnd type="none" w="med" len="med"/>
-                      <a:tailEnd type="none" w="med" len="med"/>
-                    </a:lnT>
-                    <a:lnB w="12700" cap="flat" cmpd="sng" algn="ctr">
-                      <a:solidFill>
-                        <a:srgbClr val="8DA9C4"/>
-                      </a:solidFill>
-                      <a:prstDash val="solid"/>
-                      <a:round/>
-                      <a:headEnd type="none" w="med" len="med"/>
-                      <a:tailEnd type="none" w="med" len="med"/>
-                    </a:lnB>
-                  </a:tcPr>
-                </a:tc>
-              </a:tr>
-              <a:tr h="640080">
-                <a:tc>
-                  <a:txBody>
-                    <a:bodyPr/>
-                    <a:lstStyle/>
-                    <a:p>
-                      <a:pPr indent="0" marL="0">
-                        <a:buNone/>
-                      </a:pPr>
-                      <a:r>
-                        <a:rPr lang="en-US" sz="1400" b="1" dirty="0">
-                          <a:solidFill>
-                            <a:srgbClr val="0B2545"/>
-                          </a:solidFill>
-                          <a:latin typeface="Calibri" pitchFamily="34" charset="0"/>
-                          <a:ea typeface="Calibri" pitchFamily="34" charset="-122"/>
-                          <a:cs typeface="Calibri" pitchFamily="34" charset="-120"/>
-                        </a:rPr>
-                        <a:t>Per-minute snapshots</a:t>
-                      </a:r>
-                      <a:endParaRPr lang="en-US" sz="1400" dirty="0">
-                        <a:latin typeface="Calibri" charset="0"/>
-                        <a:ea typeface="Calibri" charset="0"/>
-                        <a:cs typeface="Calibri" charset="0"/>
-                      </a:endParaRPr>
-                    </a:p>
-                  </a:txBody>
-                  <a:tcPr marL="91440" marR="91440" marT="45720" marB="45720">
-                    <a:lnL w="12700" cap="flat" cmpd="sng" algn="ctr">
-                      <a:solidFill>
-                        <a:srgbClr val="8DA9C4"/>
-                      </a:solidFill>
-                      <a:prstDash val="solid"/>
-                      <a:round/>
-                      <a:headEnd type="none" w="med" len="med"/>
-                      <a:tailEnd type="none" w="med" len="med"/>
-                    </a:lnL>
-                    <a:lnR w="12700" cap="flat" cmpd="sng" algn="ctr">
-                      <a:solidFill>
-                        <a:srgbClr val="8DA9C4"/>
-                      </a:solidFill>
-                      <a:prstDash val="solid"/>
-                      <a:round/>
-                      <a:headEnd type="none" w="med" len="med"/>
-                      <a:tailEnd type="none" w="med" len="med"/>
-                    </a:lnR>
-                    <a:lnT w="12700" cap="flat" cmpd="sng" algn="ctr">
-                      <a:solidFill>
-                        <a:srgbClr val="8DA9C4"/>
-                      </a:solidFill>
-                      <a:prstDash val="solid"/>
-                      <a:round/>
-                      <a:headEnd type="none" w="med" len="med"/>
-                      <a:tailEnd type="none" w="med" len="med"/>
-                    </a:lnT>
-                    <a:lnB w="12700" cap="flat" cmpd="sng" algn="ctr">
-                      <a:solidFill>
-                        <a:srgbClr val="8DA9C4"/>
-                      </a:solidFill>
-                      <a:prstDash val="solid"/>
-                      <a:round/>
-                      <a:headEnd type="none" w="med" len="med"/>
-                      <a:tailEnd type="none" w="med" len="med"/>
-                    </a:lnB>
-                  </a:tcPr>
-                </a:tc>
-                <a:tc>
-                  <a:txBody>
-                    <a:bodyPr/>
-                    <a:lstStyle/>
-                    <a:p>
-                      <a:pPr indent="0" marL="0">
-                        <a:buNone/>
-                      </a:pPr>
-                      <a:r>
-                        <a:rPr lang="en-US" sz="1400" dirty="0">
-                          <a:solidFill>
-                            <a:srgbClr val="1A1A1A"/>
-                          </a:solidFill>
-                          <a:latin typeface="Calibri" pitchFamily="34" charset="0"/>
-                          <a:ea typeface="Calibri" pitchFamily="34" charset="-122"/>
-                          <a:cs typeface="Calibri" pitchFamily="34" charset="-120"/>
-                        </a:rPr>
-                        <a:t>derived (1st half)</a:t>
-                      </a:r>
-                      <a:endParaRPr lang="en-US" sz="1400" dirty="0">
-                        <a:latin typeface="Calibri" charset="0"/>
-                        <a:ea typeface="Calibri" charset="0"/>
-                        <a:cs typeface="Calibri" charset="0"/>
-                      </a:endParaRPr>
-                    </a:p>
-                  </a:txBody>
-                  <a:tcPr marL="91440" marR="91440" marT="45720" marB="45720">
-                    <a:lnL w="12700" cap="flat" cmpd="sng" algn="ctr">
-                      <a:solidFill>
-                        <a:srgbClr val="8DA9C4"/>
-                      </a:solidFill>
-                      <a:prstDash val="solid"/>
-                      <a:round/>
-                      <a:headEnd type="none" w="med" len="med"/>
-                      <a:tailEnd type="none" w="med" len="med"/>
-                    </a:lnL>
-                    <a:lnR w="12700" cap="flat" cmpd="sng" algn="ctr">
-                      <a:solidFill>
-                        <a:srgbClr val="8DA9C4"/>
-                      </a:solidFill>
-                      <a:prstDash val="solid"/>
-                      <a:round/>
-                      <a:headEnd type="none" w="med" len="med"/>
-                      <a:tailEnd type="none" w="med" len="med"/>
-                    </a:lnR>
-                    <a:lnT w="12700" cap="flat" cmpd="sng" algn="ctr">
-                      <a:solidFill>
-                        <a:srgbClr val="8DA9C4"/>
-                      </a:solidFill>
-                      <a:prstDash val="solid"/>
-                      <a:round/>
-                      <a:headEnd type="none" w="med" len="med"/>
-                      <a:tailEnd type="none" w="med" len="med"/>
-                    </a:lnT>
-                    <a:lnB w="12700" cap="flat" cmpd="sng" algn="ctr">
-                      <a:solidFill>
-                        <a:srgbClr val="8DA9C4"/>
-                      </a:solidFill>
-                      <a:prstDash val="solid"/>
-                      <a:round/>
-                      <a:headEnd type="none" w="med" len="med"/>
-                      <a:tailEnd type="none" w="med" len="med"/>
-                    </a:lnB>
-                  </a:tcPr>
-                </a:tc>
-                <a:tc>
-                  <a:txBody>
-                    <a:bodyPr/>
-                    <a:lstStyle/>
-                    <a:p>
-                      <a:pPr indent="0" marL="0">
-                        <a:buNone/>
-                      </a:pPr>
-                      <a:r>
-                        <a:rPr lang="en-US" sz="1400" dirty="0">
-                          <a:solidFill>
-                            <a:srgbClr val="1A1A1A"/>
-                          </a:solidFill>
-                          <a:latin typeface="Calibri" pitchFamily="34" charset="0"/>
-                          <a:ea typeface="Calibri" pitchFamily="34" charset="-122"/>
-                          <a:cs typeface="Calibri" pitchFamily="34" charset="-120"/>
-                        </a:rPr>
-                        <a:t>59,040 rows × 4 features</a:t>
-                      </a:r>
-                      <a:endParaRPr lang="en-US" sz="1400" dirty="0">
-                        <a:latin typeface="Calibri" charset="0"/>
-                        <a:ea typeface="Calibri" charset="0"/>
-                        <a:cs typeface="Calibri" charset="0"/>
-                      </a:endParaRPr>
-                    </a:p>
-                  </a:txBody>
-                  <a:tcPr marL="91440" marR="91440" marT="45720" marB="45720">
-                    <a:lnL w="12700" cap="flat" cmpd="sng" algn="ctr">
-                      <a:solidFill>
-                        <a:srgbClr val="8DA9C4"/>
-                      </a:solidFill>
-                      <a:prstDash val="solid"/>
-                      <a:round/>
-                      <a:headEnd type="none" w="med" len="med"/>
-                      <a:tailEnd type="none" w="med" len="med"/>
-                    </a:lnL>
-                    <a:lnR w="12700" cap="flat" cmpd="sng" algn="ctr">
-                      <a:solidFill>
-                        <a:srgbClr val="8DA9C4"/>
-                      </a:solidFill>
-                      <a:prstDash val="solid"/>
-                      <a:round/>
-                      <a:headEnd type="none" w="med" len="med"/>
-                      <a:tailEnd type="none" w="med" len="med"/>
-                    </a:lnR>
-                    <a:lnT w="12700" cap="flat" cmpd="sng" algn="ctr">
-                      <a:solidFill>
-                        <a:srgbClr val="8DA9C4"/>
-                      </a:solidFill>
-                      <a:prstDash val="solid"/>
-                      <a:round/>
-                      <a:headEnd type="none" w="med" len="med"/>
-                      <a:tailEnd type="none" w="med" len="med"/>
-                    </a:lnT>
-                    <a:lnB w="12700" cap="flat" cmpd="sng" algn="ctr">
+                    <a:lnB w="9525" cap="flat" cmpd="sng" algn="ctr">
                       <a:solidFill>
                         <a:srgbClr val="8DA9C4"/>
                       </a:solidFill>
@@ -10115,14 +8140,14 @@
       </p:graphicFrame>
       <p:sp>
         <p:nvSpPr>
-          <p:cNvPr id="6" name="Text 3"/>
-          <p:cNvSpPr/>
-          <p:nvPr/>
-        </p:nvSpPr>
-        <p:spPr>
-          <a:xfrm>
-            <a:off x="502920" y="5669280"/>
-            <a:ext cx="11247120" cy="365760"/>
+          <p:cNvPr id="7" name="Text 3"/>
+          <p:cNvSpPr/>
+          <p:nvPr/>
+        </p:nvSpPr>
+        <p:spPr>
+          <a:xfrm>
+            <a:off x="502920" y="6492240"/>
+            <a:ext cx="7315200" cy="274320"/>
           </a:xfrm>
           <a:prstGeom prst="rect">
             <a:avLst/>
@@ -10138,53 +8163,14 @@
               <a:buNone/>
             </a:pPr>
             <a:r>
-              <a:rPr lang="en-US" sz="1400" i="1" dirty="0">
-                <a:solidFill>
-                  <a:srgbClr val="13315C"/>
+              <a:rPr lang="en-US" sz="1000" dirty="0">
+                <a:solidFill>
+                  <a:srgbClr val="8DA9C4"/>
                 </a:solidFill>
                 <a:latin typeface="Calibri" pitchFamily="34" charset="0"/>
                 <a:ea typeface="Calibri" pitchFamily="34" charset="-122"/>
                 <a:cs typeface="Calibri" pitchFamily="34" charset="-120"/>
               </a:rPr>
-              <a:t>Splits: train on 2023-24 · held-out test on 2024-25 (touched once at the end).</a:t>
-            </a:r>
-            <a:endParaRPr lang="en-US" sz="1400" dirty="0"/>
-          </a:p>
-        </p:txBody>
-      </p:sp>
-      <p:sp>
-        <p:nvSpPr>
-          <p:cNvPr id="7" name="Text 4"/>
-          <p:cNvSpPr/>
-          <p:nvPr/>
-        </p:nvSpPr>
-        <p:spPr>
-          <a:xfrm>
-            <a:off x="502920" y="6492240"/>
-            <a:ext cx="7315200" cy="274320"/>
-          </a:xfrm>
-          <a:prstGeom prst="rect">
-            <a:avLst/>
-          </a:prstGeom>
-          <a:noFill/>
-          <a:ln/>
-        </p:spPr>
-        <p:txBody>
-          <a:bodyPr wrap="square" rtlCol="0" anchor="ctr"/>
-          <a:lstStyle/>
-          <a:p>
-            <a:pPr indent="0" marL="0">
-              <a:buNone/>
-            </a:pPr>
-            <a:r>
-              <a:rPr lang="en-US" sz="1000" dirty="0">
-                <a:solidFill>
-                  <a:srgbClr val="8DA9C4"/>
-                </a:solidFill>
-                <a:latin typeface="Calibri" pitchFamily="34" charset="0"/>
-                <a:ea typeface="Calibri" pitchFamily="34" charset="-122"/>
-                <a:cs typeface="Calibri" pitchFamily="34" charset="-120"/>
-              </a:rPr>
               <a:t>STATS 211 · NBA Mispricing · Sit &amp; Manathattai</a:t>
             </a:r>
             <a:endParaRPr lang="en-US" sz="1000" dirty="0"/>
@@ -10193,7 +8179,7 @@
       </p:sp>
       <p:sp>
         <p:nvSpPr>
-          <p:cNvPr id="8" name="Text 5"/>
+          <p:cNvPr id="8" name="Text 4"/>
           <p:cNvSpPr/>
           <p:nvPr/>
         </p:nvSpPr>
@@ -10270,7 +8256,7 @@
         </p:nvSpPr>
         <p:spPr>
           <a:xfrm>
-            <a:off x="502920" y="256032"/>
+            <a:off x="502920" y="228600"/>
             <a:ext cx="11247120" cy="777240"/>
           </a:xfrm>
           <a:prstGeom prst="rect">
@@ -10309,7 +8295,7 @@
         </p:nvSpPr>
         <p:spPr>
           <a:xfrm>
-            <a:off x="502920" y="960120"/>
+            <a:off x="502920" y="932688"/>
             <a:ext cx="11247120" cy="365760"/>
           </a:xfrm>
           <a:prstGeom prst="rect">
@@ -10348,7 +8334,7 @@
         </p:nvSpPr>
         <p:spPr>
           <a:xfrm>
-            <a:off x="502920" y="1325880"/>
+            <a:off x="502920" y="1298448"/>
             <a:ext cx="11247120" cy="0"/>
           </a:xfrm>
           <a:prstGeom prst="line">
@@ -10365,192 +8351,255 @@
       </p:sp>
       <p:sp>
         <p:nvSpPr>
-          <p:cNvPr id="5" name="Text 3"/>
-          <p:cNvSpPr/>
-          <p:nvPr/>
-        </p:nvSpPr>
-        <p:spPr>
-          <a:xfrm>
-            <a:off x="502920" y="1554480"/>
-            <a:ext cx="11247120" cy="640080"/>
-          </a:xfrm>
-          <a:prstGeom prst="rect">
-            <a:avLst/>
-          </a:prstGeom>
-          <a:noFill/>
-          <a:ln/>
-        </p:spPr>
-        <p:txBody>
-          <a:bodyPr wrap="square" rtlCol="0" anchor="ctr"/>
-          <a:lstStyle/>
-          <a:p>
-            <a:pPr indent="0" marL="0">
+          <p:cNvPr id="5" name="Shape 3"/>
+          <p:cNvSpPr/>
+          <p:nvPr/>
+        </p:nvSpPr>
+        <p:spPr>
+          <a:xfrm>
+            <a:off x="502920" y="1463040"/>
+            <a:ext cx="11247120" cy="1280160"/>
+          </a:xfrm>
+          <a:prstGeom prst="roundRect">
+            <a:avLst>
+              <a:gd name="adj" fmla="val 5714"/>
+            </a:avLst>
+          </a:prstGeom>
+          <a:solidFill>
+            <a:srgbClr val="EEF3F8"/>
+          </a:solidFill>
+          <a:ln w="15240">
+            <a:solidFill>
+              <a:srgbClr val="1C7293"/>
+            </a:solidFill>
+            <a:prstDash val="solid"/>
+          </a:ln>
+        </p:spPr>
+      </p:sp>
+      <p:sp>
+        <p:nvSpPr>
+          <p:cNvPr id="6" name="Text 4"/>
+          <p:cNvSpPr/>
+          <p:nvPr/>
+        </p:nvSpPr>
+        <p:spPr>
+          <a:xfrm>
+            <a:off x="685800" y="1554480"/>
+            <a:ext cx="10881360" cy="777240"/>
+          </a:xfrm>
+          <a:prstGeom prst="rect">
+            <a:avLst/>
+          </a:prstGeom>
+          <a:noFill/>
+          <a:ln/>
+        </p:spPr>
+        <p:txBody>
+          <a:bodyPr wrap="square" rtlCol="0" anchor="ctr"/>
+          <a:lstStyle/>
+          <a:p>
+            <a:pPr algn="ctr" indent="0" marL="0">
               <a:buNone/>
             </a:pPr>
             <a:r>
               <a:rPr lang="en-US" sz="1800" b="1" dirty="0">
                 <a:solidFill>
                   <a:srgbClr val="0B2545"/>
+                </a:solidFill>
+                <a:latin typeface="Courier New" pitchFamily="34" charset="0"/>
+                <a:ea typeface="Courier New" pitchFamily="34" charset="-122"/>
+                <a:cs typeface="Courier New" pitchFamily="34" charset="-120"/>
+              </a:rPr>
+              <a:t>p̂_t  =  isotonic( XGBoost(x_t ; θ) )</a:t>
+            </a:r>
+            <a:endParaRPr lang="en-US" sz="1800" dirty="0"/>
+          </a:p>
+        </p:txBody>
+      </p:sp>
+      <p:sp>
+        <p:nvSpPr>
+          <p:cNvPr id="7" name="Text 5"/>
+          <p:cNvSpPr/>
+          <p:nvPr/>
+        </p:nvSpPr>
+        <p:spPr>
+          <a:xfrm>
+            <a:off x="685800" y="2286000"/>
+            <a:ext cx="10881360" cy="365760"/>
+          </a:xfrm>
+          <a:prstGeom prst="rect">
+            <a:avLst/>
+          </a:prstGeom>
+          <a:noFill/>
+          <a:ln/>
+        </p:spPr>
+        <p:txBody>
+          <a:bodyPr wrap="square" rtlCol="0" anchor="ctr"/>
+          <a:lstStyle/>
+          <a:p>
+            <a:pPr algn="ctr" indent="0" marL="0">
+              <a:buNone/>
+            </a:pPr>
+            <a:r>
+              <a:rPr lang="en-US" sz="1200" i="1" dirty="0">
+                <a:solidFill>
+                  <a:srgbClr val="13315C"/>
                 </a:solidFill>
                 <a:latin typeface="Calibri" pitchFamily="34" charset="0"/>
                 <a:ea typeface="Calibri" pitchFamily="34" charset="-122"/>
                 <a:cs typeface="Calibri" pitchFamily="34" charset="-120"/>
               </a:rPr>
-              <a:t>XGBoost </a:t>
-            </a:r>
+              <a:t>x_t = [minute_idx, score_diff_home, recent_run_diff, period]</a:t>
+            </a:r>
+            <a:endParaRPr lang="en-US" sz="1200" dirty="0"/>
+          </a:p>
+        </p:txBody>
+      </p:sp>
+      <p:sp>
+        <p:nvSpPr>
+          <p:cNvPr id="8" name="Text 6"/>
+          <p:cNvSpPr/>
+          <p:nvPr/>
+        </p:nvSpPr>
+        <p:spPr>
+          <a:xfrm>
+            <a:off x="502920" y="2880360"/>
+            <a:ext cx="11247120" cy="640080"/>
+          </a:xfrm>
+          <a:prstGeom prst="rect">
+            <a:avLst/>
+          </a:prstGeom>
+          <a:noFill/>
+          <a:ln/>
+        </p:spPr>
+        <p:txBody>
+          <a:bodyPr wrap="square" rtlCol="0" anchor="ctr"/>
+          <a:lstStyle/>
+          <a:p>
             <a:pPr indent="0" marL="0">
               <a:buNone/>
             </a:pPr>
             <a:r>
-              <a:rPr lang="en-US" sz="1800" dirty="0">
-                <a:solidFill>
-                  <a:srgbClr val="1A1A1A"/>
+              <a:rPr lang="en-US" sz="1600" b="1" dirty="0">
+                <a:solidFill>
+                  <a:srgbClr val="0B2545"/>
                 </a:solidFill>
                 <a:latin typeface="Calibri" pitchFamily="34" charset="0"/>
                 <a:ea typeface="Calibri" pitchFamily="34" charset="-122"/>
                 <a:cs typeface="Calibri" pitchFamily="34" charset="-120"/>
               </a:rPr>
-              <a:t>on 4 features: </a:t>
+              <a:t>4 features.  </a:t>
             </a:r>
             <a:pPr indent="0" marL="0">
               <a:buNone/>
             </a:pPr>
             <a:r>
-              <a:rPr lang="en-US" sz="1800" i="1" dirty="0">
-                <a:solidFill>
-                  <a:srgbClr val="13315C"/>
-                </a:solidFill>
-                <a:latin typeface="Courier New" pitchFamily="34" charset="0"/>
-                <a:ea typeface="Courier New" pitchFamily="34" charset="-122"/>
-                <a:cs typeface="Courier New" pitchFamily="34" charset="-120"/>
-              </a:rPr>
-              <a:t>minute_idx, score_diff_home, recent_run_diff, period.</a:t>
-            </a:r>
-            <a:endParaRPr lang="en-US" sz="1800" dirty="0"/>
-          </a:p>
-        </p:txBody>
-      </p:sp>
-      <p:sp>
-        <p:nvSpPr>
-          <p:cNvPr id="6" name="Text 4"/>
-          <p:cNvSpPr/>
-          <p:nvPr/>
-        </p:nvSpPr>
-        <p:spPr>
-          <a:xfrm>
-            <a:off x="502920" y="2240280"/>
-            <a:ext cx="11247120" cy="640080"/>
-          </a:xfrm>
-          <a:prstGeom prst="rect">
-            <a:avLst/>
-          </a:prstGeom>
-          <a:noFill/>
-          <a:ln/>
-        </p:spPr>
-        <p:txBody>
-          <a:bodyPr wrap="square" rtlCol="0" anchor="ctr"/>
-          <a:lstStyle/>
-          <a:p>
-            <a:pPr indent="0" marL="0">
-              <a:buNone/>
-            </a:pPr>
-            <a:r>
-              <a:rPr lang="en-US" sz="1800" b="1" dirty="0">
-                <a:solidFill>
-                  <a:srgbClr val="0B2545"/>
+              <a:rPr lang="en-US" sz="1600" dirty="0">
+                <a:solidFill>
+                  <a:srgbClr val="1A1A1A"/>
                 </a:solidFill>
                 <a:latin typeface="Calibri" pitchFamily="34" charset="0"/>
                 <a:ea typeface="Calibri" pitchFamily="34" charset="-122"/>
                 <a:cs typeface="Calibri" pitchFamily="34" charset="-120"/>
               </a:rPr>
-              <a:t>Isotonic calibration </a:t>
-            </a:r>
+              <a:t>XGBoost handles non-linear interactions (e.g. score-diff × time-remaining) that logistic regression can't.</a:t>
+            </a:r>
+            <a:endParaRPr lang="en-US" sz="1600" dirty="0"/>
+          </a:p>
+        </p:txBody>
+      </p:sp>
+      <p:sp>
+        <p:nvSpPr>
+          <p:cNvPr id="9" name="Text 7"/>
+          <p:cNvSpPr/>
+          <p:nvPr/>
+        </p:nvSpPr>
+        <p:spPr>
+          <a:xfrm>
+            <a:off x="502920" y="3520440"/>
+            <a:ext cx="11247120" cy="640080"/>
+          </a:xfrm>
+          <a:prstGeom prst="rect">
+            <a:avLst/>
+          </a:prstGeom>
+          <a:noFill/>
+          <a:ln/>
+        </p:spPr>
+        <p:txBody>
+          <a:bodyPr wrap="square" rtlCol="0" anchor="ctr"/>
+          <a:lstStyle/>
+          <a:p>
             <a:pPr indent="0" marL="0">
               <a:buNone/>
             </a:pPr>
             <a:r>
-              <a:rPr lang="en-US" sz="1800" dirty="0">
-                <a:solidFill>
-                  <a:srgbClr val="1A1A1A"/>
+              <a:rPr lang="en-US" sz="1600" b="1" dirty="0">
+                <a:solidFill>
+                  <a:srgbClr val="0B2545"/>
                 </a:solidFill>
                 <a:latin typeface="Calibri" pitchFamily="34" charset="0"/>
                 <a:ea typeface="Calibri" pitchFamily="34" charset="-122"/>
                 <a:cs typeface="Calibri" pitchFamily="34" charset="-120"/>
               </a:rPr>
-              <a:t>on a held-out fold — wraps raw probabilities so 0.70 means 70% empirically.</a:t>
-            </a:r>
-            <a:endParaRPr lang="en-US" sz="1800" dirty="0"/>
-          </a:p>
-        </p:txBody>
-      </p:sp>
-      <p:sp>
-        <p:nvSpPr>
-          <p:cNvPr id="7" name="Text 5"/>
-          <p:cNvSpPr/>
-          <p:nvPr/>
-        </p:nvSpPr>
-        <p:spPr>
-          <a:xfrm>
-            <a:off x="502920" y="2926080"/>
-            <a:ext cx="11247120" cy="914400"/>
-          </a:xfrm>
-          <a:prstGeom prst="rect">
-            <a:avLst/>
-          </a:prstGeom>
-          <a:noFill/>
-          <a:ln/>
-        </p:spPr>
-        <p:txBody>
-          <a:bodyPr wrap="square" rtlCol="0" anchor="ctr"/>
-          <a:lstStyle/>
-          <a:p>
+              <a:t>Isotonic calibration  </a:t>
+            </a:r>
             <a:pPr indent="0" marL="0">
               <a:buNone/>
             </a:pPr>
             <a:r>
-              <a:rPr lang="en-US" sz="1800" b="1" dirty="0">
-                <a:solidFill>
-                  <a:srgbClr val="0B2545"/>
+              <a:rPr lang="en-US" sz="1600" dirty="0">
+                <a:solidFill>
+                  <a:srgbClr val="1A1A1A"/>
                 </a:solidFill>
                 <a:latin typeface="Calibri" pitchFamily="34" charset="0"/>
                 <a:ea typeface="Calibri" pitchFamily="34" charset="-122"/>
                 <a:cs typeface="Calibri" pitchFamily="34" charset="-120"/>
               </a:rPr>
-              <a:t>Ablation: </a:t>
-            </a:r>
+              <a:t>on a held-out fold — wraps raw probabilities so 0.70 means 70% empirically.</a:t>
+            </a:r>
+            <a:endParaRPr lang="en-US" sz="1600" dirty="0"/>
+          </a:p>
+        </p:txBody>
+      </p:sp>
+      <p:sp>
+        <p:nvSpPr>
+          <p:cNvPr id="10" name="Text 8"/>
+          <p:cNvSpPr/>
+          <p:nvPr/>
+        </p:nvSpPr>
+        <p:spPr>
+          <a:xfrm>
+            <a:off x="502920" y="4160520"/>
+            <a:ext cx="11247120" cy="640080"/>
+          </a:xfrm>
+          <a:prstGeom prst="rect">
+            <a:avLst/>
+          </a:prstGeom>
+          <a:noFill/>
+          <a:ln/>
+        </p:spPr>
+        <p:txBody>
+          <a:bodyPr wrap="square" rtlCol="0" anchor="ctr"/>
+          <a:lstStyle/>
+          <a:p>
             <a:pPr indent="0" marL="0">
               <a:buNone/>
             </a:pPr>
             <a:r>
-              <a:rPr lang="en-US" sz="1800" dirty="0">
-                <a:solidFill>
-                  <a:srgbClr val="1A1A1A"/>
+              <a:rPr lang="en-US" sz="1600" b="1" dirty="0">
+                <a:solidFill>
+                  <a:srgbClr val="0B2545"/>
                 </a:solidFill>
                 <a:latin typeface="Calibri" pitchFamily="34" charset="0"/>
                 <a:ea typeface="Calibri" pitchFamily="34" charset="-122"/>
                 <a:cs typeface="Calibri" pitchFamily="34" charset="-120"/>
               </a:rPr>
-              <a:t>engineered features (leverage, possession proxy, </a:t>
+              <a:t>Ablation:  </a:t>
             </a:r>
             <a:pPr indent="0" marL="0">
               <a:buNone/>
             </a:pPr>
             <a:r>
-              <a:rPr lang="en-US" sz="1800" i="1" dirty="0">
-                <a:solidFill>
-                  <a:srgbClr val="1A1A1A"/>
-                </a:solidFill>
-                <a:latin typeface="Courier New" pitchFamily="34" charset="0"/>
-                <a:ea typeface="Courier New" pitchFamily="34" charset="-122"/>
-                <a:cs typeface="Courier New" pitchFamily="34" charset="-120"/>
-              </a:rPr>
-              <a:t>score_diff × time_remaining</a:t>
-            </a:r>
-            <a:pPr indent="0" marL="0">
-              <a:buNone/>
-            </a:pPr>
-            <a:r>
-              <a:rPr lang="en-US" sz="1800" dirty="0">
+              <a:rPr lang="en-US" sz="1600" dirty="0">
                 <a:solidFill>
                   <a:srgbClr val="1A1A1A"/>
                 </a:solidFill>
@@ -10558,13 +8607,13 @@
                 <a:ea typeface="Calibri" pitchFamily="34" charset="-122"/>
                 <a:cs typeface="Calibri" pitchFamily="34" charset="-120"/>
               </a:rPr>
-              <a:t>) </a:t>
+              <a:t>engineered features (leverage, possession proxy) did </a:t>
             </a:r>
             <a:pPr indent="0" marL="0">
               <a:buNone/>
             </a:pPr>
             <a:r>
-              <a:rPr lang="en-US" sz="1800" b="1" dirty="0">
+              <a:rPr lang="en-US" sz="1600" b="1" i="1" dirty="0">
                 <a:solidFill>
                   <a:srgbClr val="EEA02B"/>
                 </a:solidFill>
@@ -10572,13 +8621,13 @@
                 <a:ea typeface="Calibri" pitchFamily="34" charset="-122"/>
                 <a:cs typeface="Calibri" pitchFamily="34" charset="-120"/>
               </a:rPr>
-              <a:t>did not improve Brier</a:t>
+              <a:t>not</a:t>
             </a:r>
             <a:pPr indent="0" marL="0">
               <a:buNone/>
             </a:pPr>
             <a:r>
-              <a:rPr lang="en-US" sz="1800" dirty="0">
+              <a:rPr lang="en-US" sz="1600" dirty="0">
                 <a:solidFill>
                   <a:srgbClr val="1A1A1A"/>
                 </a:solidFill>
@@ -10586,26 +8635,26 @@
                 <a:ea typeface="Calibri" pitchFamily="34" charset="-122"/>
                 <a:cs typeface="Calibri" pitchFamily="34" charset="-120"/>
               </a:rPr>
-              <a:t> by the 0.005 threshold → kept simple.</a:t>
-            </a:r>
-            <a:endParaRPr lang="en-US" sz="1800" dirty="0"/>
-          </a:p>
-        </p:txBody>
-      </p:sp>
-      <p:sp>
-        <p:nvSpPr>
-          <p:cNvPr id="8" name="Shape 6"/>
-          <p:cNvSpPr/>
-          <p:nvPr/>
-        </p:nvSpPr>
-        <p:spPr>
-          <a:xfrm>
-            <a:off x="502920" y="4297680"/>
-            <a:ext cx="11247120" cy="1645920"/>
+              <a:t> beat the 0.005-Brier threshold → kept simple.</a:t>
+            </a:r>
+            <a:endParaRPr lang="en-US" sz="1600" dirty="0"/>
+          </a:p>
+        </p:txBody>
+      </p:sp>
+      <p:sp>
+        <p:nvSpPr>
+          <p:cNvPr id="11" name="Shape 9"/>
+          <p:cNvSpPr/>
+          <p:nvPr/>
+        </p:nvSpPr>
+        <p:spPr>
+          <a:xfrm>
+            <a:off x="502920" y="4937760"/>
+            <a:ext cx="11247120" cy="1371600"/>
           </a:xfrm>
           <a:prstGeom prst="roundRect">
             <a:avLst>
-              <a:gd name="adj" fmla="val 5556"/>
+              <a:gd name="adj" fmla="val 6667"/>
             </a:avLst>
           </a:prstGeom>
           <a:solidFill>
@@ -10621,14 +8670,14 @@
       </p:sp>
       <p:sp>
         <p:nvSpPr>
-          <p:cNvPr id="9" name="Text 7"/>
-          <p:cNvSpPr/>
-          <p:nvPr/>
-        </p:nvSpPr>
-        <p:spPr>
-          <a:xfrm>
-            <a:off x="777240" y="4434840"/>
-            <a:ext cx="10972800" cy="411480"/>
+          <p:cNvPr id="12" name="Text 10"/>
+          <p:cNvSpPr/>
+          <p:nvPr/>
+        </p:nvSpPr>
+        <p:spPr>
+          <a:xfrm>
+            <a:off x="777240" y="5029200"/>
+            <a:ext cx="10972800" cy="365760"/>
           </a:xfrm>
           <a:prstGeom prst="rect">
             <a:avLst/>
@@ -10644,7 +8693,7 @@
               <a:buNone/>
             </a:pPr>
             <a:r>
-              <a:rPr lang="en-US" sz="1500" i="1" dirty="0">
+              <a:rPr lang="en-US" sz="1400" i="1" dirty="0">
                 <a:solidFill>
                   <a:srgbClr val="13315C"/>
                 </a:solidFill>
@@ -10654,20 +8703,20 @@
               </a:rPr>
               <a:t>Why simple is right for a 3-page paper:</a:t>
             </a:r>
-            <a:endParaRPr lang="en-US" sz="1500" dirty="0"/>
-          </a:p>
-        </p:txBody>
-      </p:sp>
-      <p:sp>
-        <p:nvSpPr>
-          <p:cNvPr id="10" name="Text 8"/>
-          <p:cNvSpPr/>
-          <p:nvPr/>
-        </p:nvSpPr>
-        <p:spPr>
-          <a:xfrm>
-            <a:off x="777240" y="4892040"/>
-            <a:ext cx="10972800" cy="1005840"/>
+            <a:endParaRPr lang="en-US" sz="1400" dirty="0"/>
+          </a:p>
+        </p:txBody>
+      </p:sp>
+      <p:sp>
+        <p:nvSpPr>
+          <p:cNvPr id="13" name="Text 11"/>
+          <p:cNvSpPr/>
+          <p:nvPr/>
+        </p:nvSpPr>
+        <p:spPr>
+          <a:xfrm>
+            <a:off x="777240" y="5440680"/>
+            <a:ext cx="10972800" cy="822960"/>
           </a:xfrm>
           <a:prstGeom prst="rect">
             <a:avLst/>
@@ -10683,7 +8732,7 @@
               <a:buNone/>
             </a:pPr>
             <a:r>
-              <a:rPr lang="en-US" sz="1700" dirty="0">
+              <a:rPr lang="en-US" sz="1500" dirty="0">
                 <a:solidFill>
                   <a:srgbClr val="1A1A1A"/>
                 </a:solidFill>
@@ -10691,15 +8740,15 @@
                 <a:ea typeface="Calibri" pitchFamily="34" charset="-122"/>
                 <a:cs typeface="Calibri" pitchFamily="34" charset="-120"/>
               </a:rPr>
-              <a:t>Every choice defensible. No overfitting story. Brier-comparable to published in-game WP models (Bashuk; Lopez &amp; Matthews).</a:t>
-            </a:r>
-            <a:endParaRPr lang="en-US" sz="1700" dirty="0"/>
-          </a:p>
-        </p:txBody>
-      </p:sp>
-      <p:sp>
-        <p:nvSpPr>
-          <p:cNvPr id="11" name="Text 9"/>
+              <a:t>Every choice defensible. No overfitting story. Brier-comparable to published NBA in-game WP models (Bashuk; Lopez &amp; Matthews).</a:t>
+            </a:r>
+            <a:endParaRPr lang="en-US" sz="1500" dirty="0"/>
+          </a:p>
+        </p:txBody>
+      </p:sp>
+      <p:sp>
+        <p:nvSpPr>
+          <p:cNvPr id="14" name="Text 12"/>
           <p:cNvSpPr/>
           <p:nvPr/>
         </p:nvSpPr>
@@ -10738,7 +8787,7 @@
       </p:sp>
       <p:sp>
         <p:nvSpPr>
-          <p:cNvPr id="12" name="Text 10"/>
+          <p:cNvPr id="15" name="Text 13"/>
           <p:cNvSpPr/>
           <p:nvPr/>
         </p:nvSpPr>
@@ -10815,7 +8864,7 @@
         </p:nvSpPr>
         <p:spPr>
           <a:xfrm>
-            <a:off x="502920" y="256032"/>
+            <a:off x="502920" y="228600"/>
             <a:ext cx="11247120" cy="777240"/>
           </a:xfrm>
           <a:prstGeom prst="rect">
@@ -10854,7 +8903,7 @@
         </p:nvSpPr>
         <p:spPr>
           <a:xfrm>
-            <a:off x="502920" y="960120"/>
+            <a:off x="502920" y="932688"/>
             <a:ext cx="11247120" cy="365760"/>
           </a:xfrm>
           <a:prstGeom prst="rect">
@@ -10879,7 +8928,7 @@
                 <a:ea typeface="Calibri" pitchFamily="34" charset="-122"/>
                 <a:cs typeface="Calibri" pitchFamily="34" charset="-120"/>
               </a:rPr>
-              <a:t>Headline figure #1</a:t>
+              <a:t>Headline figure #1 · the probabilities can be trusted</a:t>
             </a:r>
             <a:endParaRPr lang="en-US" sz="1400" dirty="0"/>
           </a:p>
@@ -10893,7 +8942,7 @@
         </p:nvSpPr>
         <p:spPr>
           <a:xfrm>
-            <a:off x="502920" y="1325880"/>
+            <a:off x="502920" y="1298448"/>
             <a:ext cx="11247120" cy="0"/>
           </a:xfrm>
           <a:prstGeom prst="line">
@@ -10908,20 +8957,44 @@
           </a:ln>
         </p:spPr>
       </p:sp>
-      <p:sp>
-        <p:nvSpPr>
-          <p:cNvPr id="5" name="Shape 3"/>
-          <p:cNvSpPr/>
-          <p:nvPr/>
-        </p:nvSpPr>
-        <p:spPr>
-          <a:xfrm>
-            <a:off x="502920" y="1645920"/>
-            <a:ext cx="3566160" cy="1828800"/>
+      <p:pic>
+        <p:nvPicPr>
+          <p:cNvPr id="5" name="Image 0" descr="slides/figures/reliability_v2.png">    </p:cNvPr>
+          <p:cNvPicPr>
+            <a:picLocks noChangeAspect="1"/>
+          </p:cNvPicPr>
+          <p:nvPr/>
+        </p:nvPicPr>
+        <p:blipFill>
+          <a:blip r:embed="rId1"/>
+          <a:stretch>
+            <a:fillRect/>
+          </a:stretch>
+        </p:blipFill>
+        <p:spPr>
+          <a:xfrm>
+            <a:off x="502920" y="1417320"/>
+            <a:ext cx="7040880" cy="4937760"/>
+          </a:xfrm>
+          <a:prstGeom prst="rect">
+            <a:avLst/>
+          </a:prstGeom>
+        </p:spPr>
+      </p:pic>
+      <p:sp>
+        <p:nvSpPr>
+          <p:cNvPr id="6" name="Shape 3"/>
+          <p:cNvSpPr/>
+          <p:nvPr/>
+        </p:nvSpPr>
+        <p:spPr>
+          <a:xfrm>
+            <a:off x="7818120" y="1417320"/>
+            <a:ext cx="3931920" cy="1417320"/>
           </a:xfrm>
           <a:prstGeom prst="roundRect">
             <a:avLst>
-              <a:gd name="adj" fmla="val 6000"/>
+              <a:gd name="adj" fmla="val 7742"/>
             </a:avLst>
           </a:prstGeom>
           <a:solidFill>
@@ -10937,14 +9010,14 @@
       </p:sp>
       <p:sp>
         <p:nvSpPr>
-          <p:cNvPr id="6" name="Text 4"/>
-          <p:cNvSpPr/>
-          <p:nvPr/>
-        </p:nvSpPr>
-        <p:spPr>
-          <a:xfrm>
-            <a:off x="502920" y="1737360"/>
-            <a:ext cx="3566160" cy="457200"/>
+          <p:cNvPr id="7" name="Text 4"/>
+          <p:cNvSpPr/>
+          <p:nvPr/>
+        </p:nvSpPr>
+        <p:spPr>
+          <a:xfrm>
+            <a:off x="7818120" y="1463040"/>
+            <a:ext cx="3931920" cy="365760"/>
           </a:xfrm>
           <a:prstGeom prst="rect">
             <a:avLst/>
@@ -10960,7 +9033,7 @@
               <a:buNone/>
             </a:pPr>
             <a:r>
-              <a:rPr lang="en-US" sz="1400" dirty="0">
+              <a:rPr lang="en-US" sz="1300" dirty="0">
                 <a:solidFill>
                   <a:srgbClr val="8DA9C4"/>
                 </a:solidFill>
@@ -10968,22 +9041,22 @@
                 <a:ea typeface="Calibri" pitchFamily="34" charset="-122"/>
                 <a:cs typeface="Calibri" pitchFamily="34" charset="-120"/>
               </a:rPr>
-              <a:t>Brier (lower better)</a:t>
-            </a:r>
-            <a:endParaRPr lang="en-US" sz="1400" dirty="0"/>
-          </a:p>
-        </p:txBody>
-      </p:sp>
-      <p:sp>
-        <p:nvSpPr>
-          <p:cNvPr id="7" name="Text 5"/>
-          <p:cNvSpPr/>
-          <p:nvPr/>
-        </p:nvSpPr>
-        <p:spPr>
-          <a:xfrm>
-            <a:off x="502920" y="2194560"/>
-            <a:ext cx="3566160" cy="914400"/>
+              <a:t>Brier (lower = better)</a:t>
+            </a:r>
+            <a:endParaRPr lang="en-US" sz="1300" dirty="0"/>
+          </a:p>
+        </p:txBody>
+      </p:sp>
+      <p:sp>
+        <p:nvSpPr>
+          <p:cNvPr id="8" name="Text 5"/>
+          <p:cNvSpPr/>
+          <p:nvPr/>
+        </p:nvSpPr>
+        <p:spPr>
+          <a:xfrm>
+            <a:off x="7818120" y="1783080"/>
+            <a:ext cx="3931920" cy="731520"/>
           </a:xfrm>
           <a:prstGeom prst="rect">
             <a:avLst/>
@@ -10999,7 +9072,7 @@
               <a:buNone/>
             </a:pPr>
             <a:r>
-              <a:rPr lang="en-US" sz="5400" b="1" dirty="0">
+              <a:rPr lang="en-US" sz="3800" b="1" dirty="0">
                 <a:solidFill>
                   <a:srgbClr val="F6F6F2"/>
                 </a:solidFill>
@@ -11009,20 +9082,20 @@
               </a:rPr>
               <a:t>0.149</a:t>
             </a:r>
-            <a:endParaRPr lang="en-US" sz="5400" dirty="0"/>
-          </a:p>
-        </p:txBody>
-      </p:sp>
-      <p:sp>
-        <p:nvSpPr>
-          <p:cNvPr id="8" name="Text 6"/>
-          <p:cNvSpPr/>
-          <p:nvPr/>
-        </p:nvSpPr>
-        <p:spPr>
-          <a:xfrm>
-            <a:off x="502920" y="3108960"/>
-            <a:ext cx="3566160" cy="365760"/>
+            <a:endParaRPr lang="en-US" sz="3800" dirty="0"/>
+          </a:p>
+        </p:txBody>
+      </p:sp>
+      <p:sp>
+        <p:nvSpPr>
+          <p:cNvPr id="9" name="Text 6"/>
+          <p:cNvSpPr/>
+          <p:nvPr/>
+        </p:nvSpPr>
+        <p:spPr>
+          <a:xfrm>
+            <a:off x="7818120" y="2496312"/>
+            <a:ext cx="3931920" cy="274320"/>
           </a:xfrm>
           <a:prstGeom prst="rect">
             <a:avLst/>
@@ -11038,7 +9111,7 @@
               <a:buNone/>
             </a:pPr>
             <a:r>
-              <a:rPr lang="en-US" sz="1300" i="1" dirty="0">
+              <a:rPr lang="en-US" sz="1100" i="1" dirty="0">
                 <a:solidFill>
                   <a:srgbClr val="EEA02B"/>
                 </a:solidFill>
@@ -11048,24 +9121,24 @@
               </a:rPr>
               <a:t>well-calibrated</a:t>
             </a:r>
-            <a:endParaRPr lang="en-US" sz="1300" dirty="0"/>
-          </a:p>
-        </p:txBody>
-      </p:sp>
-      <p:sp>
-        <p:nvSpPr>
-          <p:cNvPr id="9" name="Shape 7"/>
-          <p:cNvSpPr/>
-          <p:nvPr/>
-        </p:nvSpPr>
-        <p:spPr>
-          <a:xfrm>
-            <a:off x="4297680" y="1645920"/>
-            <a:ext cx="3566160" cy="1828800"/>
+            <a:endParaRPr lang="en-US" sz="1100" dirty="0"/>
+          </a:p>
+        </p:txBody>
+      </p:sp>
+      <p:sp>
+        <p:nvSpPr>
+          <p:cNvPr id="10" name="Shape 7"/>
+          <p:cNvSpPr/>
+          <p:nvPr/>
+        </p:nvSpPr>
+        <p:spPr>
+          <a:xfrm>
+            <a:off x="7818120" y="3017520"/>
+            <a:ext cx="3931920" cy="1417320"/>
           </a:xfrm>
           <a:prstGeom prst="roundRect">
             <a:avLst>
-              <a:gd name="adj" fmla="val 6000"/>
+              <a:gd name="adj" fmla="val 7742"/>
             </a:avLst>
           </a:prstGeom>
           <a:solidFill>
@@ -11081,14 +9154,14 @@
       </p:sp>
       <p:sp>
         <p:nvSpPr>
-          <p:cNvPr id="10" name="Text 8"/>
-          <p:cNvSpPr/>
-          <p:nvPr/>
-        </p:nvSpPr>
-        <p:spPr>
-          <a:xfrm>
-            <a:off x="4297680" y="1737360"/>
-            <a:ext cx="3566160" cy="457200"/>
+          <p:cNvPr id="11" name="Text 8"/>
+          <p:cNvSpPr/>
+          <p:nvPr/>
+        </p:nvSpPr>
+        <p:spPr>
+          <a:xfrm>
+            <a:off x="7818120" y="3063240"/>
+            <a:ext cx="3931920" cy="365760"/>
           </a:xfrm>
           <a:prstGeom prst="rect">
             <a:avLst/>
@@ -11104,7 +9177,7 @@
               <a:buNone/>
             </a:pPr>
             <a:r>
-              <a:rPr lang="en-US" sz="1400" dirty="0">
+              <a:rPr lang="en-US" sz="1300" dirty="0">
                 <a:solidFill>
                   <a:srgbClr val="8DA9C4"/>
                 </a:solidFill>
@@ -11114,20 +9187,20 @@
               </a:rPr>
               <a:t>ECE</a:t>
             </a:r>
-            <a:endParaRPr lang="en-US" sz="1400" dirty="0"/>
-          </a:p>
-        </p:txBody>
-      </p:sp>
-      <p:sp>
-        <p:nvSpPr>
-          <p:cNvPr id="11" name="Text 9"/>
-          <p:cNvSpPr/>
-          <p:nvPr/>
-        </p:nvSpPr>
-        <p:spPr>
-          <a:xfrm>
-            <a:off x="4297680" y="2194560"/>
-            <a:ext cx="3566160" cy="914400"/>
+            <a:endParaRPr lang="en-US" sz="1300" dirty="0"/>
+          </a:p>
+        </p:txBody>
+      </p:sp>
+      <p:sp>
+        <p:nvSpPr>
+          <p:cNvPr id="12" name="Text 9"/>
+          <p:cNvSpPr/>
+          <p:nvPr/>
+        </p:nvSpPr>
+        <p:spPr>
+          <a:xfrm>
+            <a:off x="7818120" y="3383280"/>
+            <a:ext cx="3931920" cy="731520"/>
           </a:xfrm>
           <a:prstGeom prst="rect">
             <a:avLst/>
@@ -11143,7 +9216,7 @@
               <a:buNone/>
             </a:pPr>
             <a:r>
-              <a:rPr lang="en-US" sz="5400" b="1" dirty="0">
+              <a:rPr lang="en-US" sz="3800" b="1" dirty="0">
                 <a:solidFill>
                   <a:srgbClr val="F6F6F2"/>
                 </a:solidFill>
@@ -11153,20 +9226,20 @@
               </a:rPr>
               <a:t>0.008</a:t>
             </a:r>
-            <a:endParaRPr lang="en-US" sz="5400" dirty="0"/>
-          </a:p>
-        </p:txBody>
-      </p:sp>
-      <p:sp>
-        <p:nvSpPr>
-          <p:cNvPr id="12" name="Text 10"/>
-          <p:cNvSpPr/>
-          <p:nvPr/>
-        </p:nvSpPr>
-        <p:spPr>
-          <a:xfrm>
-            <a:off x="4297680" y="3108960"/>
-            <a:ext cx="3566160" cy="365760"/>
+            <a:endParaRPr lang="en-US" sz="3800" dirty="0"/>
+          </a:p>
+        </p:txBody>
+      </p:sp>
+      <p:sp>
+        <p:nvSpPr>
+          <p:cNvPr id="13" name="Text 10"/>
+          <p:cNvSpPr/>
+          <p:nvPr/>
+        </p:nvSpPr>
+        <p:spPr>
+          <a:xfrm>
+            <a:off x="7818120" y="4096512"/>
+            <a:ext cx="3931920" cy="274320"/>
           </a:xfrm>
           <a:prstGeom prst="rect">
             <a:avLst/>
@@ -11182,7 +9255,7 @@
               <a:buNone/>
             </a:pPr>
             <a:r>
-              <a:rPr lang="en-US" sz="1300" i="1" dirty="0">
+              <a:rPr lang="en-US" sz="1100" i="1" dirty="0">
                 <a:solidFill>
                   <a:srgbClr val="EEA02B"/>
                 </a:solidFill>
@@ -11192,24 +9265,24 @@
               </a:rPr>
               <a:t>near-zero miscalibration</a:t>
             </a:r>
-            <a:endParaRPr lang="en-US" sz="1300" dirty="0"/>
-          </a:p>
-        </p:txBody>
-      </p:sp>
-      <p:sp>
-        <p:nvSpPr>
-          <p:cNvPr id="13" name="Shape 11"/>
-          <p:cNvSpPr/>
-          <p:nvPr/>
-        </p:nvSpPr>
-        <p:spPr>
-          <a:xfrm>
-            <a:off x="8092440" y="1645920"/>
-            <a:ext cx="3566160" cy="1828800"/>
+            <a:endParaRPr lang="en-US" sz="1100" dirty="0"/>
+          </a:p>
+        </p:txBody>
+      </p:sp>
+      <p:sp>
+        <p:nvSpPr>
+          <p:cNvPr id="14" name="Shape 11"/>
+          <p:cNvSpPr/>
+          <p:nvPr/>
+        </p:nvSpPr>
+        <p:spPr>
+          <a:xfrm>
+            <a:off x="7818120" y="4617720"/>
+            <a:ext cx="3931920" cy="1417320"/>
           </a:xfrm>
           <a:prstGeom prst="roundRect">
             <a:avLst>
-              <a:gd name="adj" fmla="val 6000"/>
+              <a:gd name="adj" fmla="val 7742"/>
             </a:avLst>
           </a:prstGeom>
           <a:solidFill>
@@ -11225,14 +9298,14 @@
       </p:sp>
       <p:sp>
         <p:nvSpPr>
-          <p:cNvPr id="14" name="Text 12"/>
-          <p:cNvSpPr/>
-          <p:nvPr/>
-        </p:nvSpPr>
-        <p:spPr>
-          <a:xfrm>
-            <a:off x="8092440" y="1737360"/>
-            <a:ext cx="3566160" cy="457200"/>
+          <p:cNvPr id="15" name="Text 12"/>
+          <p:cNvSpPr/>
+          <p:nvPr/>
+        </p:nvSpPr>
+        <p:spPr>
+          <a:xfrm>
+            <a:off x="7818120" y="4663440"/>
+            <a:ext cx="3931920" cy="365760"/>
           </a:xfrm>
           <a:prstGeom prst="rect">
             <a:avLst/>
@@ -11248,7 +9321,7 @@
               <a:buNone/>
             </a:pPr>
             <a:r>
-              <a:rPr lang="en-US" sz="1400" dirty="0">
+              <a:rPr lang="en-US" sz="1300" dirty="0">
                 <a:solidFill>
                   <a:srgbClr val="8DA9C4"/>
                 </a:solidFill>
@@ -11258,20 +9331,20 @@
               </a:rPr>
               <a:t>Held-out sample</a:t>
             </a:r>
-            <a:endParaRPr lang="en-US" sz="1400" dirty="0"/>
-          </a:p>
-        </p:txBody>
-      </p:sp>
-      <p:sp>
-        <p:nvSpPr>
-          <p:cNvPr id="15" name="Text 13"/>
-          <p:cNvSpPr/>
-          <p:nvPr/>
-        </p:nvSpPr>
-        <p:spPr>
-          <a:xfrm>
-            <a:off x="8092440" y="2194560"/>
-            <a:ext cx="3566160" cy="914400"/>
+            <a:endParaRPr lang="en-US" sz="1300" dirty="0"/>
+          </a:p>
+        </p:txBody>
+      </p:sp>
+      <p:sp>
+        <p:nvSpPr>
+          <p:cNvPr id="16" name="Text 13"/>
+          <p:cNvSpPr/>
+          <p:nvPr/>
+        </p:nvSpPr>
+        <p:spPr>
+          <a:xfrm>
+            <a:off x="7818120" y="4983480"/>
+            <a:ext cx="3931920" cy="731520"/>
           </a:xfrm>
           <a:prstGeom prst="rect">
             <a:avLst/>
@@ -11287,7 +9360,7 @@
               <a:buNone/>
             </a:pPr>
             <a:r>
-              <a:rPr lang="en-US" sz="5400" b="1" dirty="0">
+              <a:rPr lang="en-US" sz="3800" b="1" dirty="0">
                 <a:solidFill>
                   <a:srgbClr val="F6F6F2"/>
                 </a:solidFill>
@@ -11297,20 +9370,20 @@
               </a:rPr>
               <a:t>1,230</a:t>
             </a:r>
-            <a:endParaRPr lang="en-US" sz="5400" dirty="0"/>
-          </a:p>
-        </p:txBody>
-      </p:sp>
-      <p:sp>
-        <p:nvSpPr>
-          <p:cNvPr id="16" name="Text 14"/>
-          <p:cNvSpPr/>
-          <p:nvPr/>
-        </p:nvSpPr>
-        <p:spPr>
-          <a:xfrm>
-            <a:off x="8092440" y="3108960"/>
-            <a:ext cx="3566160" cy="365760"/>
+            <a:endParaRPr lang="en-US" sz="3800" dirty="0"/>
+          </a:p>
+        </p:txBody>
+      </p:sp>
+      <p:sp>
+        <p:nvSpPr>
+          <p:cNvPr id="17" name="Text 14"/>
+          <p:cNvSpPr/>
+          <p:nvPr/>
+        </p:nvSpPr>
+        <p:spPr>
+          <a:xfrm>
+            <a:off x="7818120" y="5696712"/>
+            <a:ext cx="3931920" cy="274320"/>
           </a:xfrm>
           <a:prstGeom prst="rect">
             <a:avLst/>
@@ -11326,7 +9399,7 @@
               <a:buNone/>
             </a:pPr>
             <a:r>
-              <a:rPr lang="en-US" sz="1300" i="1" dirty="0">
+              <a:rPr lang="en-US" sz="1100" i="1" dirty="0">
                 <a:solidFill>
                   <a:srgbClr val="EEA02B"/>
                 </a:solidFill>
@@ -11336,36 +9409,36 @@
               </a:rPr>
               <a:t>games · 2024-25</a:t>
             </a:r>
-            <a:endParaRPr lang="en-US" sz="1300" dirty="0"/>
-          </a:p>
-        </p:txBody>
-      </p:sp>
-      <p:sp>
-        <p:nvSpPr>
-          <p:cNvPr id="17" name="Text 15"/>
-          <p:cNvSpPr/>
-          <p:nvPr/>
-        </p:nvSpPr>
-        <p:spPr>
-          <a:xfrm>
-            <a:off x="502920" y="3794760"/>
-            <a:ext cx="11247120" cy="365760"/>
-          </a:xfrm>
-          <a:prstGeom prst="rect">
-            <a:avLst/>
-          </a:prstGeom>
-          <a:noFill/>
-          <a:ln/>
-        </p:spPr>
-        <p:txBody>
-          <a:bodyPr wrap="square" rtlCol="0" anchor="ctr"/>
-          <a:lstStyle/>
-          <a:p>
-            <a:pPr indent="0" marL="0">
-              <a:buNone/>
-            </a:pPr>
-            <a:r>
-              <a:rPr lang="en-US" sz="1400" i="1" dirty="0">
+            <a:endParaRPr lang="en-US" sz="1100" dirty="0"/>
+          </a:p>
+        </p:txBody>
+      </p:sp>
+      <p:sp>
+        <p:nvSpPr>
+          <p:cNvPr id="18" name="Text 15"/>
+          <p:cNvSpPr/>
+          <p:nvPr/>
+        </p:nvSpPr>
+        <p:spPr>
+          <a:xfrm>
+            <a:off x="502920" y="6355080"/>
+            <a:ext cx="11247120" cy="274320"/>
+          </a:xfrm>
+          <a:prstGeom prst="rect">
+            <a:avLst/>
+          </a:prstGeom>
+          <a:noFill/>
+          <a:ln/>
+        </p:spPr>
+        <p:txBody>
+          <a:bodyPr wrap="square" rtlCol="0" anchor="ctr"/>
+          <a:lstStyle/>
+          <a:p>
+            <a:pPr algn="ctr" indent="0" marL="0">
+              <a:buNone/>
+            </a:pPr>
+            <a:r>
+              <a:rPr lang="en-US" sz="1100" i="1" dirty="0">
                 <a:solidFill>
                   <a:srgbClr val="13315C"/>
                 </a:solidFill>
@@ -11373,65 +9446,38 @@
                 <a:ea typeface="Calibri" pitchFamily="34" charset="-122"/>
                 <a:cs typeface="Calibri" pitchFamily="34" charset="-120"/>
               </a:rPr>
-              <a:t>Reliability diagram (predicted vs empirical probability):</a:t>
-            </a:r>
-            <a:endParaRPr lang="en-US" sz="1400" dirty="0"/>
-          </a:p>
-        </p:txBody>
-      </p:sp>
-      <p:sp>
-        <p:nvSpPr>
-          <p:cNvPr id="18" name="Shape 16"/>
-          <p:cNvSpPr/>
-          <p:nvPr/>
-        </p:nvSpPr>
-        <p:spPr>
-          <a:xfrm>
-            <a:off x="502920" y="4206240"/>
-            <a:ext cx="11247120" cy="1783080"/>
-          </a:xfrm>
-          <a:prstGeom prst="roundRect">
-            <a:avLst>
-              <a:gd name="adj" fmla="val 5128"/>
-            </a:avLst>
-          </a:prstGeom>
-          <a:solidFill>
-            <a:srgbClr val="F6F6F2"/>
-          </a:solidFill>
-          <a:ln w="12700">
-            <a:solidFill>
-              <a:srgbClr val="8DA9C4"/>
-            </a:solidFill>
-            <a:prstDash val="solid"/>
-          </a:ln>
-        </p:spPr>
-      </p:sp>
-      <p:sp>
-        <p:nvSpPr>
-          <p:cNvPr id="19" name="Text 17"/>
-          <p:cNvSpPr/>
-          <p:nvPr/>
-        </p:nvSpPr>
-        <p:spPr>
-          <a:xfrm>
-            <a:off x="502920" y="4892040"/>
-            <a:ext cx="11247120" cy="457200"/>
-          </a:xfrm>
-          <a:prstGeom prst="rect">
-            <a:avLst/>
-          </a:prstGeom>
-          <a:noFill/>
-          <a:ln/>
-        </p:spPr>
-        <p:txBody>
-          <a:bodyPr wrap="square" rtlCol="0" anchor="ctr"/>
-          <a:lstStyle/>
-          <a:p>
-            <a:pPr algn="ctr" indent="0" marL="0">
-              <a:buNone/>
-            </a:pPr>
-            <a:r>
-              <a:rPr lang="en-US" sz="1400" i="1" dirty="0">
+              <a:t>Points fall on the diagonal across all deciles — predicted probabilities match observed frequencies.</a:t>
+            </a:r>
+            <a:endParaRPr lang="en-US" sz="1100" dirty="0"/>
+          </a:p>
+        </p:txBody>
+      </p:sp>
+      <p:sp>
+        <p:nvSpPr>
+          <p:cNvPr id="19" name="Text 16"/>
+          <p:cNvSpPr/>
+          <p:nvPr/>
+        </p:nvSpPr>
+        <p:spPr>
+          <a:xfrm>
+            <a:off x="502920" y="6492240"/>
+            <a:ext cx="7315200" cy="274320"/>
+          </a:xfrm>
+          <a:prstGeom prst="rect">
+            <a:avLst/>
+          </a:prstGeom>
+          <a:noFill/>
+          <a:ln/>
+        </p:spPr>
+        <p:txBody>
+          <a:bodyPr wrap="square" rtlCol="0" anchor="ctr"/>
+          <a:lstStyle/>
+          <a:p>
+            <a:pPr indent="0" marL="0">
+              <a:buNone/>
+            </a:pPr>
+            <a:r>
+              <a:rPr lang="en-US" sz="1000" dirty="0">
                 <a:solidFill>
                   <a:srgbClr val="8DA9C4"/>
                 </a:solidFill>
@@ -11439,84 +9485,6 @@
                 <a:ea typeface="Calibri" pitchFamily="34" charset="-122"/>
                 <a:cs typeface="Calibri" pitchFamily="34" charset="-120"/>
               </a:rPr>
-              <a:t>[ reliability diagram — predicted-vs-empirical falls on the diagonal across deciles ]</a:t>
-            </a:r>
-            <a:endParaRPr lang="en-US" sz="1400" dirty="0"/>
-          </a:p>
-        </p:txBody>
-      </p:sp>
-      <p:sp>
-        <p:nvSpPr>
-          <p:cNvPr id="20" name="Text 18"/>
-          <p:cNvSpPr/>
-          <p:nvPr/>
-        </p:nvSpPr>
-        <p:spPr>
-          <a:xfrm>
-            <a:off x="502920" y="6080760"/>
-            <a:ext cx="11247120" cy="320040"/>
-          </a:xfrm>
-          <a:prstGeom prst="rect">
-            <a:avLst/>
-          </a:prstGeom>
-          <a:noFill/>
-          <a:ln/>
-        </p:spPr>
-        <p:txBody>
-          <a:bodyPr wrap="square" rtlCol="0" anchor="ctr"/>
-          <a:lstStyle/>
-          <a:p>
-            <a:pPr algn="ctr" indent="0" marL="0">
-              <a:buNone/>
-            </a:pPr>
-            <a:r>
-              <a:rPr lang="en-US" sz="1800" b="1" i="1" dirty="0">
-                <a:solidFill>
-                  <a:srgbClr val="0B2545"/>
-                </a:solidFill>
-                <a:latin typeface="Georgia" pitchFamily="34" charset="0"/>
-                <a:ea typeface="Georgia" pitchFamily="34" charset="-122"/>
-                <a:cs typeface="Georgia" pitchFamily="34" charset="-120"/>
-              </a:rPr>
-              <a:t>The probabilities can be trusted.</a:t>
-            </a:r>
-            <a:endParaRPr lang="en-US" sz="1800" dirty="0"/>
-          </a:p>
-        </p:txBody>
-      </p:sp>
-      <p:sp>
-        <p:nvSpPr>
-          <p:cNvPr id="21" name="Text 19"/>
-          <p:cNvSpPr/>
-          <p:nvPr/>
-        </p:nvSpPr>
-        <p:spPr>
-          <a:xfrm>
-            <a:off x="502920" y="6492240"/>
-            <a:ext cx="7315200" cy="274320"/>
-          </a:xfrm>
-          <a:prstGeom prst="rect">
-            <a:avLst/>
-          </a:prstGeom>
-          <a:noFill/>
-          <a:ln/>
-        </p:spPr>
-        <p:txBody>
-          <a:bodyPr wrap="square" rtlCol="0" anchor="ctr"/>
-          <a:lstStyle/>
-          <a:p>
-            <a:pPr indent="0" marL="0">
-              <a:buNone/>
-            </a:pPr>
-            <a:r>
-              <a:rPr lang="en-US" sz="1000" dirty="0">
-                <a:solidFill>
-                  <a:srgbClr val="8DA9C4"/>
-                </a:solidFill>
-                <a:latin typeface="Calibri" pitchFamily="34" charset="0"/>
-                <a:ea typeface="Calibri" pitchFamily="34" charset="-122"/>
-                <a:cs typeface="Calibri" pitchFamily="34" charset="-120"/>
-              </a:rPr>
               <a:t>STATS 211 · NBA Mispricing · Sit &amp; Manathattai</a:t>
             </a:r>
             <a:endParaRPr lang="en-US" sz="1000" dirty="0"/>
@@ -11525,7 +9493,7 @@
       </p:sp>
       <p:sp>
         <p:nvSpPr>
-          <p:cNvPr id="22" name="Text 20"/>
+          <p:cNvPr id="20" name="Text 17"/>
           <p:cNvSpPr/>
           <p:nvPr/>
         </p:nvSpPr>
@@ -11602,7 +9570,7 @@
         </p:nvSpPr>
         <p:spPr>
           <a:xfrm>
-            <a:off x="502920" y="256032"/>
+            <a:off x="502920" y="228600"/>
             <a:ext cx="11247120" cy="777240"/>
           </a:xfrm>
           <a:prstGeom prst="rect">
@@ -11641,7 +9609,7 @@
         </p:nvSpPr>
         <p:spPr>
           <a:xfrm>
-            <a:off x="502920" y="960120"/>
+            <a:off x="502920" y="932688"/>
             <a:ext cx="11247120" cy="365760"/>
           </a:xfrm>
           <a:prstGeom prst="rect">
@@ -11680,7 +9648,7 @@
         </p:nvSpPr>
         <p:spPr>
           <a:xfrm>
-            <a:off x="502920" y="1325880"/>
+            <a:off x="502920" y="1298448"/>
             <a:ext cx="11247120" cy="0"/>
           </a:xfrm>
           <a:prstGeom prst="line">
@@ -11695,6 +9663,30 @@
           </a:ln>
         </p:spPr>
       </p:sp>
+      <p:pic>
+        <p:nvPicPr>
+          <p:cNvPr id="5" name="Image 0" descr="slides/figures/v5_shifts.png">    </p:cNvPr>
+          <p:cNvPicPr>
+            <a:picLocks noChangeAspect="1"/>
+          </p:cNvPicPr>
+          <p:nvPr/>
+        </p:nvPicPr>
+        <p:blipFill>
+          <a:blip r:embed="rId1"/>
+          <a:stretch>
+            <a:fillRect/>
+          </a:stretch>
+        </p:blipFill>
+        <p:spPr>
+          <a:xfrm>
+            <a:off x="365760" y="1417320"/>
+            <a:ext cx="6766560" cy="4572000"/>
+          </a:xfrm>
+          <a:prstGeom prst="rect">
+            <a:avLst/>
+          </a:prstGeom>
+        </p:spPr>
+      </p:pic>
       <p:graphicFrame>
         <p:nvGraphicFramePr>
           <p:cNvPr id="9" name="Table 0"/>
@@ -11710,20 +9702,18 @@
           </p:nvPr>
         </p:nvGraphicFramePr>
         <p:xfrm>
-          <a:off x="502920" y="1554480"/>
-          <a:ext cx="11247120" cy="914400"/>
+          <a:off x="7269480" y="1554480"/>
+          <a:ext cx="4434840" cy="914400"/>
         </p:xfrm>
         <a:graphic>
           <a:graphicData uri="http://schemas.openxmlformats.org/drawingml/2006/table">
             <a:tbl>
               <a:tblPr/>
               <a:tblGrid>
-                <a:gridCol w="3840480"/>
-                <a:gridCol w="1920240"/>
-                <a:gridCol w="3657600"/>
-                <a:gridCol w="1828800"/>
+                <a:gridCol w="2743200"/>
+                <a:gridCol w="1691640"/>
               </a:tblGrid>
-              <a:tr h="822960">
+              <a:tr h="548640">
                 <a:tc>
                   <a:txBody>
                     <a:bodyPr/>
@@ -11733,7 +9723,7 @@
                         <a:buNone/>
                       </a:pPr>
                       <a:r>
-                        <a:rPr lang="en-US" sz="1500" b="1" dirty="0">
+                        <a:rPr lang="en-US" sz="1200" b="1" dirty="0">
                           <a:solidFill>
                             <a:srgbClr val="F6F6F2"/>
                           </a:solidFill>
@@ -11743,7 +9733,7 @@
                         </a:rPr>
                         <a:t>Test</a:t>
                       </a:r>
-                      <a:endParaRPr lang="en-US" sz="1500" dirty="0">
+                      <a:endParaRPr lang="en-US" sz="1200" dirty="0">
                         <a:latin typeface="Calibri" charset="0"/>
                         <a:ea typeface="Calibri" charset="0"/>
                         <a:cs typeface="Calibri" charset="0"/>
@@ -11801,7 +9791,7 @@
                         <a:buNone/>
                       </a:pPr>
                       <a:r>
-                        <a:rPr lang="en-US" sz="1500" b="1" dirty="0">
+                        <a:rPr lang="en-US" sz="1200" b="1" dirty="0">
                           <a:solidFill>
                             <a:srgbClr val="F6F6F2"/>
                           </a:solidFill>
@@ -11809,9 +9799,9 @@
                           <a:ea typeface="Calibri" pitchFamily="34" charset="-122"/>
                           <a:cs typeface="Calibri" pitchFamily="34" charset="-120"/>
                         </a:rPr>
-                        <a:t>n (events / games)</a:t>
+                        <a:t>n events / games</a:t>
                       </a:r>
-                      <a:endParaRPr lang="en-US" sz="1500" dirty="0">
+                      <a:endParaRPr lang="en-US" sz="1200" dirty="0">
                         <a:latin typeface="Calibri" charset="0"/>
                         <a:ea typeface="Calibri" charset="0"/>
                         <a:cs typeface="Calibri" charset="0"/>
@@ -11860,144 +9850,8 @@
                     </a:solidFill>
                   </a:tcPr>
                 </a:tc>
-                <a:tc>
-                  <a:txBody>
-                    <a:bodyPr/>
-                    <a:lstStyle/>
-                    <a:p>
-                      <a:pPr algn="ctr" indent="0" marL="0">
-                        <a:buNone/>
-                      </a:pPr>
-                      <a:r>
-                        <a:rPr lang="en-US" sz="1500" b="1" dirty="0">
-                          <a:solidFill>
-                            <a:srgbClr val="F6F6F2"/>
-                          </a:solidFill>
-                          <a:latin typeface="Calibri" pitchFamily="34" charset="0"/>
-                          <a:ea typeface="Calibri" pitchFamily="34" charset="-122"/>
-                          <a:cs typeface="Calibri" pitchFamily="34" charset="-120"/>
-                        </a:rPr>
-                        <a:t>Structural shift for scorer</a:t>
-                      </a:r>
-                      <a:endParaRPr lang="en-US" sz="1500" dirty="0">
-                        <a:latin typeface="Calibri" charset="0"/>
-                        <a:ea typeface="Calibri" charset="0"/>
-                        <a:cs typeface="Calibri" charset="0"/>
-                      </a:endParaRPr>
-                    </a:p>
-                  </a:txBody>
-                  <a:tcPr marL="91440" marR="91440" marT="45720" marB="45720">
-                    <a:lnL w="12700" cap="flat" cmpd="sng" algn="ctr">
-                      <a:solidFill>
-                        <a:srgbClr val="8DA9C4"/>
-                      </a:solidFill>
-                      <a:prstDash val="solid"/>
-                      <a:round/>
-                      <a:headEnd type="none" w="med" len="med"/>
-                      <a:tailEnd type="none" w="med" len="med"/>
-                    </a:lnL>
-                    <a:lnR w="12700" cap="flat" cmpd="sng" algn="ctr">
-                      <a:solidFill>
-                        <a:srgbClr val="8DA9C4"/>
-                      </a:solidFill>
-                      <a:prstDash val="solid"/>
-                      <a:round/>
-                      <a:headEnd type="none" w="med" len="med"/>
-                      <a:tailEnd type="none" w="med" len="med"/>
-                    </a:lnR>
-                    <a:lnT w="12700" cap="flat" cmpd="sng" algn="ctr">
-                      <a:solidFill>
-                        <a:srgbClr val="8DA9C4"/>
-                      </a:solidFill>
-                      <a:prstDash val="solid"/>
-                      <a:round/>
-                      <a:headEnd type="none" w="med" len="med"/>
-                      <a:tailEnd type="none" w="med" len="med"/>
-                    </a:lnT>
-                    <a:lnB w="12700" cap="flat" cmpd="sng" algn="ctr">
-                      <a:solidFill>
-                        <a:srgbClr val="8DA9C4"/>
-                      </a:solidFill>
-                      <a:prstDash val="solid"/>
-                      <a:round/>
-                      <a:headEnd type="none" w="med" len="med"/>
-                      <a:tailEnd type="none" w="med" len="med"/>
-                    </a:lnB>
-                    <a:solidFill>
-                      <a:srgbClr val="0B2545"/>
-                    </a:solidFill>
-                  </a:tcPr>
-                </a:tc>
-                <a:tc>
-                  <a:txBody>
-                    <a:bodyPr/>
-                    <a:lstStyle/>
-                    <a:p>
-                      <a:pPr algn="ctr" indent="0" marL="0">
-                        <a:buNone/>
-                      </a:pPr>
-                      <a:r>
-                        <a:rPr lang="en-US" sz="1500" b="1" dirty="0">
-                          <a:solidFill>
-                            <a:srgbClr val="F6F6F2"/>
-                          </a:solidFill>
-                          <a:latin typeface="Calibri" pitchFamily="34" charset="0"/>
-                          <a:ea typeface="Calibri" pitchFamily="34" charset="-122"/>
-                          <a:cs typeface="Calibri" pitchFamily="34" charset="-120"/>
-                        </a:rPr>
-                        <a:t>p-value</a:t>
-                      </a:r>
-                      <a:endParaRPr lang="en-US" sz="1500" dirty="0">
-                        <a:latin typeface="Calibri" charset="0"/>
-                        <a:ea typeface="Calibri" charset="0"/>
-                        <a:cs typeface="Calibri" charset="0"/>
-                      </a:endParaRPr>
-                    </a:p>
-                  </a:txBody>
-                  <a:tcPr marL="91440" marR="91440" marT="45720" marB="45720">
-                    <a:lnL w="12700" cap="flat" cmpd="sng" algn="ctr">
-                      <a:solidFill>
-                        <a:srgbClr val="8DA9C4"/>
-                      </a:solidFill>
-                      <a:prstDash val="solid"/>
-                      <a:round/>
-                      <a:headEnd type="none" w="med" len="med"/>
-                      <a:tailEnd type="none" w="med" len="med"/>
-                    </a:lnL>
-                    <a:lnR w="12700" cap="flat" cmpd="sng" algn="ctr">
-                      <a:solidFill>
-                        <a:srgbClr val="8DA9C4"/>
-                      </a:solidFill>
-                      <a:prstDash val="solid"/>
-                      <a:round/>
-                      <a:headEnd type="none" w="med" len="med"/>
-                      <a:tailEnd type="none" w="med" len="med"/>
-                    </a:lnR>
-                    <a:lnT w="12700" cap="flat" cmpd="sng" algn="ctr">
-                      <a:solidFill>
-                        <a:srgbClr val="8DA9C4"/>
-                      </a:solidFill>
-                      <a:prstDash val="solid"/>
-                      <a:round/>
-                      <a:headEnd type="none" w="med" len="med"/>
-                      <a:tailEnd type="none" w="med" len="med"/>
-                    </a:lnT>
-                    <a:lnB w="12700" cap="flat" cmpd="sng" algn="ctr">
-                      <a:solidFill>
-                        <a:srgbClr val="8DA9C4"/>
-                      </a:solidFill>
-                      <a:prstDash val="solid"/>
-                      <a:round/>
-                      <a:headEnd type="none" w="med" len="med"/>
-                      <a:tailEnd type="none" w="med" len="med"/>
-                    </a:lnB>
-                    <a:solidFill>
-                      <a:srgbClr val="0B2545"/>
-                    </a:solidFill>
-                  </a:tcPr>
-                </a:tc>
               </a:tr>
-              <a:tr h="822960">
+              <a:tr h="548640">
                 <a:tc>
                   <a:txBody>
                     <a:bodyPr/>
@@ -12007,7 +9861,7 @@
                         <a:buNone/>
                       </a:pPr>
                       <a:r>
-                        <a:rPr lang="en-US" sz="1500" b="1" dirty="0">
+                        <a:rPr lang="en-US" sz="1200" b="1" dirty="0">
                           <a:solidFill>
                             <a:srgbClr val="0B2545"/>
                           </a:solidFill>
@@ -12015,9 +9869,9 @@
                           <a:ea typeface="Calibri" pitchFamily="34" charset="-122"/>
                           <a:cs typeface="Calibri" pitchFamily="34" charset="-120"/>
                         </a:rPr>
-                        <a:t>H1 — trailing 10–15, made FG</a:t>
+                        <a:t>H1 — trail 10–15, made FG</a:t>
                       </a:r>
-                      <a:endParaRPr lang="en-US" sz="1500" dirty="0">
+                      <a:endParaRPr lang="en-US" sz="1200" dirty="0">
                         <a:latin typeface="Calibri" charset="0"/>
                         <a:ea typeface="Calibri" charset="0"/>
                         <a:cs typeface="Calibri" charset="0"/>
@@ -12072,7 +9926,7 @@
                         <a:buNone/>
                       </a:pPr>
                       <a:r>
-                        <a:rPr lang="en-US" sz="1500" dirty="0">
+                        <a:rPr lang="en-US" sz="1200" dirty="0">
                           <a:solidFill>
                             <a:srgbClr val="1A1A1A"/>
                           </a:solidFill>
@@ -12082,7 +9936,74 @@
                         </a:rPr>
                         <a:t>4,596 / 947</a:t>
                       </a:r>
-                      <a:endParaRPr lang="en-US" sz="1500" dirty="0">
+                      <a:endParaRPr lang="en-US" sz="1200" dirty="0">
+                        <a:latin typeface="Calibri" charset="0"/>
+                        <a:ea typeface="Calibri" charset="0"/>
+                        <a:cs typeface="Calibri" charset="0"/>
+                      </a:endParaRPr>
+                    </a:p>
+                  </a:txBody>
+                  <a:tcPr marL="91440" marR="91440" marT="45720" marB="45720">
+                    <a:lnL w="12700" cap="flat" cmpd="sng" algn="ctr">
+                      <a:solidFill>
+                        <a:srgbClr val="8DA9C4"/>
+                      </a:solidFill>
+                      <a:prstDash val="solid"/>
+                      <a:round/>
+                      <a:headEnd type="none" w="med" len="med"/>
+                      <a:tailEnd type="none" w="med" len="med"/>
+                    </a:lnL>
+                    <a:lnR w="12700" cap="flat" cmpd="sng" algn="ctr">
+                      <a:solidFill>
+                        <a:srgbClr val="8DA9C4"/>
+                      </a:solidFill>
+                      <a:prstDash val="solid"/>
+                      <a:round/>
+                      <a:headEnd type="none" w="med" len="med"/>
+                      <a:tailEnd type="none" w="med" len="med"/>
+                    </a:lnR>
+                    <a:lnT w="12700" cap="flat" cmpd="sng" algn="ctr">
+                      <a:solidFill>
+                        <a:srgbClr val="8DA9C4"/>
+                      </a:solidFill>
+                      <a:prstDash val="solid"/>
+                      <a:round/>
+                      <a:headEnd type="none" w="med" len="med"/>
+                      <a:tailEnd type="none" w="med" len="med"/>
+                    </a:lnT>
+                    <a:lnB w="12700" cap="flat" cmpd="sng" algn="ctr">
+                      <a:solidFill>
+                        <a:srgbClr val="8DA9C4"/>
+                      </a:solidFill>
+                      <a:prstDash val="solid"/>
+                      <a:round/>
+                      <a:headEnd type="none" w="med" len="med"/>
+                      <a:tailEnd type="none" w="med" len="med"/>
+                    </a:lnB>
+                  </a:tcPr>
+                </a:tc>
+              </a:tr>
+              <a:tr h="548640">
+                <a:tc>
+                  <a:txBody>
+                    <a:bodyPr/>
+                    <a:lstStyle/>
+                    <a:p>
+                      <a:pPr indent="0" marL="0">
+                        <a:buNone/>
+                      </a:pPr>
+                      <a:r>
+                        <a:rPr lang="en-US" sz="1200" b="1" dirty="0">
+                          <a:solidFill>
+                            <a:srgbClr val="0B2545"/>
+                          </a:solidFill>
+                          <a:latin typeface="Calibri" pitchFamily="34" charset="0"/>
+                          <a:ea typeface="Calibri" pitchFamily="34" charset="-122"/>
+                          <a:cs typeface="Calibri" pitchFamily="34" charset="-120"/>
+                        </a:rPr>
+                        <a:t>H4 — trail ≥10, made 3PT</a:t>
+                      </a:r>
+                      <a:endParaRPr lang="en-US" sz="1200" dirty="0">
                         <a:latin typeface="Calibri" charset="0"/>
                         <a:ea typeface="Calibri" charset="0"/>
                         <a:cs typeface="Calibri" charset="0"/>
@@ -12137,204 +10058,7 @@
                         <a:buNone/>
                       </a:pPr>
                       <a:r>
-                        <a:rPr lang="en-US" sz="1500" b="1" dirty="0">
-                          <a:solidFill>
-                            <a:srgbClr val="EEA02B"/>
-                          </a:solidFill>
-                          <a:latin typeface="Calibri" pitchFamily="34" charset="0"/>
-                          <a:ea typeface="Calibri" pitchFamily="34" charset="-122"/>
-                          <a:cs typeface="Calibri" pitchFamily="34" charset="-120"/>
-                        </a:rPr>
-                        <a:t>+0.0075  [+0.005, +0.010]</a:t>
-                      </a:r>
-                      <a:endParaRPr lang="en-US" sz="1500" dirty="0">
-                        <a:latin typeface="Calibri" charset="0"/>
-                        <a:ea typeface="Calibri" charset="0"/>
-                        <a:cs typeface="Calibri" charset="0"/>
-                      </a:endParaRPr>
-                    </a:p>
-                  </a:txBody>
-                  <a:tcPr marL="91440" marR="91440" marT="45720" marB="45720">
-                    <a:lnL w="12700" cap="flat" cmpd="sng" algn="ctr">
-                      <a:solidFill>
-                        <a:srgbClr val="8DA9C4"/>
-                      </a:solidFill>
-                      <a:prstDash val="solid"/>
-                      <a:round/>
-                      <a:headEnd type="none" w="med" len="med"/>
-                      <a:tailEnd type="none" w="med" len="med"/>
-                    </a:lnL>
-                    <a:lnR w="12700" cap="flat" cmpd="sng" algn="ctr">
-                      <a:solidFill>
-                        <a:srgbClr val="8DA9C4"/>
-                      </a:solidFill>
-                      <a:prstDash val="solid"/>
-                      <a:round/>
-                      <a:headEnd type="none" w="med" len="med"/>
-                      <a:tailEnd type="none" w="med" len="med"/>
-                    </a:lnR>
-                    <a:lnT w="12700" cap="flat" cmpd="sng" algn="ctr">
-                      <a:solidFill>
-                        <a:srgbClr val="8DA9C4"/>
-                      </a:solidFill>
-                      <a:prstDash val="solid"/>
-                      <a:round/>
-                      <a:headEnd type="none" w="med" len="med"/>
-                      <a:tailEnd type="none" w="med" len="med"/>
-                    </a:lnT>
-                    <a:lnB w="12700" cap="flat" cmpd="sng" algn="ctr">
-                      <a:solidFill>
-                        <a:srgbClr val="8DA9C4"/>
-                      </a:solidFill>
-                      <a:prstDash val="solid"/>
-                      <a:round/>
-                      <a:headEnd type="none" w="med" len="med"/>
-                      <a:tailEnd type="none" w="med" len="med"/>
-                    </a:lnB>
-                  </a:tcPr>
-                </a:tc>
-                <a:tc>
-                  <a:txBody>
-                    <a:bodyPr/>
-                    <a:lstStyle/>
-                    <a:p>
-                      <a:pPr algn="ctr" indent="0" marL="0">
-                        <a:buNone/>
-                      </a:pPr>
-                      <a:r>
-                        <a:rPr lang="en-US" sz="1500" b="1" dirty="0">
-                          <a:solidFill>
-                            <a:srgbClr val="EEA02B"/>
-                          </a:solidFill>
-                          <a:latin typeface="Calibri" pitchFamily="34" charset="0"/>
-                          <a:ea typeface="Calibri" pitchFamily="34" charset="-122"/>
-                          <a:cs typeface="Calibri" pitchFamily="34" charset="-120"/>
-                        </a:rPr>
-                        <a:t>&lt; 0.0001</a:t>
-                      </a:r>
-                      <a:endParaRPr lang="en-US" sz="1500" dirty="0">
-                        <a:latin typeface="Calibri" charset="0"/>
-                        <a:ea typeface="Calibri" charset="0"/>
-                        <a:cs typeface="Calibri" charset="0"/>
-                      </a:endParaRPr>
-                    </a:p>
-                  </a:txBody>
-                  <a:tcPr marL="91440" marR="91440" marT="45720" marB="45720">
-                    <a:lnL w="12700" cap="flat" cmpd="sng" algn="ctr">
-                      <a:solidFill>
-                        <a:srgbClr val="8DA9C4"/>
-                      </a:solidFill>
-                      <a:prstDash val="solid"/>
-                      <a:round/>
-                      <a:headEnd type="none" w="med" len="med"/>
-                      <a:tailEnd type="none" w="med" len="med"/>
-                    </a:lnL>
-                    <a:lnR w="12700" cap="flat" cmpd="sng" algn="ctr">
-                      <a:solidFill>
-                        <a:srgbClr val="8DA9C4"/>
-                      </a:solidFill>
-                      <a:prstDash val="solid"/>
-                      <a:round/>
-                      <a:headEnd type="none" w="med" len="med"/>
-                      <a:tailEnd type="none" w="med" len="med"/>
-                    </a:lnR>
-                    <a:lnT w="12700" cap="flat" cmpd="sng" algn="ctr">
-                      <a:solidFill>
-                        <a:srgbClr val="8DA9C4"/>
-                      </a:solidFill>
-                      <a:prstDash val="solid"/>
-                      <a:round/>
-                      <a:headEnd type="none" w="med" len="med"/>
-                      <a:tailEnd type="none" w="med" len="med"/>
-                    </a:lnT>
-                    <a:lnB w="12700" cap="flat" cmpd="sng" algn="ctr">
-                      <a:solidFill>
-                        <a:srgbClr val="8DA9C4"/>
-                      </a:solidFill>
-                      <a:prstDash val="solid"/>
-                      <a:round/>
-                      <a:headEnd type="none" w="med" len="med"/>
-                      <a:tailEnd type="none" w="med" len="med"/>
-                    </a:lnB>
-                  </a:tcPr>
-                </a:tc>
-              </a:tr>
-              <a:tr h="822960">
-                <a:tc>
-                  <a:txBody>
-                    <a:bodyPr/>
-                    <a:lstStyle/>
-                    <a:p>
-                      <a:pPr indent="0" marL="0">
-                        <a:buNone/>
-                      </a:pPr>
-                      <a:r>
-                        <a:rPr lang="en-US" sz="1500" b="1" dirty="0">
-                          <a:solidFill>
-                            <a:srgbClr val="0B2545"/>
-                          </a:solidFill>
-                          <a:latin typeface="Calibri" pitchFamily="34" charset="0"/>
-                          <a:ea typeface="Calibri" pitchFamily="34" charset="-122"/>
-                          <a:cs typeface="Calibri" pitchFamily="34" charset="-120"/>
-                        </a:rPr>
-                        <a:t>H4 — trailing ≥10, made 3PT</a:t>
-                      </a:r>
-                      <a:endParaRPr lang="en-US" sz="1500" dirty="0">
-                        <a:latin typeface="Calibri" charset="0"/>
-                        <a:ea typeface="Calibri" charset="0"/>
-                        <a:cs typeface="Calibri" charset="0"/>
-                      </a:endParaRPr>
-                    </a:p>
-                  </a:txBody>
-                  <a:tcPr marL="91440" marR="91440" marT="45720" marB="45720">
-                    <a:lnL w="12700" cap="flat" cmpd="sng" algn="ctr">
-                      <a:solidFill>
-                        <a:srgbClr val="8DA9C4"/>
-                      </a:solidFill>
-                      <a:prstDash val="solid"/>
-                      <a:round/>
-                      <a:headEnd type="none" w="med" len="med"/>
-                      <a:tailEnd type="none" w="med" len="med"/>
-                    </a:lnL>
-                    <a:lnR w="12700" cap="flat" cmpd="sng" algn="ctr">
-                      <a:solidFill>
-                        <a:srgbClr val="8DA9C4"/>
-                      </a:solidFill>
-                      <a:prstDash val="solid"/>
-                      <a:round/>
-                      <a:headEnd type="none" w="med" len="med"/>
-                      <a:tailEnd type="none" w="med" len="med"/>
-                    </a:lnR>
-                    <a:lnT w="12700" cap="flat" cmpd="sng" algn="ctr">
-                      <a:solidFill>
-                        <a:srgbClr val="8DA9C4"/>
-                      </a:solidFill>
-                      <a:prstDash val="solid"/>
-                      <a:round/>
-                      <a:headEnd type="none" w="med" len="med"/>
-                      <a:tailEnd type="none" w="med" len="med"/>
-                    </a:lnT>
-                    <a:lnB w="12700" cap="flat" cmpd="sng" algn="ctr">
-                      <a:solidFill>
-                        <a:srgbClr val="8DA9C4"/>
-                      </a:solidFill>
-                      <a:prstDash val="solid"/>
-                      <a:round/>
-                      <a:headEnd type="none" w="med" len="med"/>
-                      <a:tailEnd type="none" w="med" len="med"/>
-                    </a:lnB>
-                  </a:tcPr>
-                </a:tc>
-                <a:tc>
-                  <a:txBody>
-                    <a:bodyPr/>
-                    <a:lstStyle/>
-                    <a:p>
-                      <a:pPr algn="ctr" indent="0" marL="0">
-                        <a:buNone/>
-                      </a:pPr>
-                      <a:r>
-                        <a:rPr lang="en-US" sz="1500" dirty="0">
+                        <a:rPr lang="en-US" sz="1200" dirty="0">
                           <a:solidFill>
                             <a:srgbClr val="1A1A1A"/>
                           </a:solidFill>
@@ -12344,7 +10068,7 @@
                         </a:rPr>
                         <a:t>2,162 / 780</a:t>
                       </a:r>
-                      <a:endParaRPr lang="en-US" sz="1500" dirty="0">
+                      <a:endParaRPr lang="en-US" sz="1200" dirty="0">
                         <a:latin typeface="Calibri" charset="0"/>
                         <a:ea typeface="Calibri" charset="0"/>
                         <a:cs typeface="Calibri" charset="0"/>
@@ -12390,136 +10114,6 @@
                     </a:lnB>
                   </a:tcPr>
                 </a:tc>
-                <a:tc>
-                  <a:txBody>
-                    <a:bodyPr/>
-                    <a:lstStyle/>
-                    <a:p>
-                      <a:pPr algn="ctr" indent="0" marL="0">
-                        <a:buNone/>
-                      </a:pPr>
-                      <a:r>
-                        <a:rPr lang="en-US" sz="1500" b="1" dirty="0">
-                          <a:solidFill>
-                            <a:srgbClr val="EEA02B"/>
-                          </a:solidFill>
-                          <a:latin typeface="Calibri" pitchFamily="34" charset="0"/>
-                          <a:ea typeface="Calibri" pitchFamily="34" charset="-122"/>
-                          <a:cs typeface="Calibri" pitchFamily="34" charset="-120"/>
-                        </a:rPr>
-                        <a:t>+0.0138  [+0.011, +0.017]</a:t>
-                      </a:r>
-                      <a:endParaRPr lang="en-US" sz="1500" dirty="0">
-                        <a:latin typeface="Calibri" charset="0"/>
-                        <a:ea typeface="Calibri" charset="0"/>
-                        <a:cs typeface="Calibri" charset="0"/>
-                      </a:endParaRPr>
-                    </a:p>
-                  </a:txBody>
-                  <a:tcPr marL="91440" marR="91440" marT="45720" marB="45720">
-                    <a:lnL w="12700" cap="flat" cmpd="sng" algn="ctr">
-                      <a:solidFill>
-                        <a:srgbClr val="8DA9C4"/>
-                      </a:solidFill>
-                      <a:prstDash val="solid"/>
-                      <a:round/>
-                      <a:headEnd type="none" w="med" len="med"/>
-                      <a:tailEnd type="none" w="med" len="med"/>
-                    </a:lnL>
-                    <a:lnR w="12700" cap="flat" cmpd="sng" algn="ctr">
-                      <a:solidFill>
-                        <a:srgbClr val="8DA9C4"/>
-                      </a:solidFill>
-                      <a:prstDash val="solid"/>
-                      <a:round/>
-                      <a:headEnd type="none" w="med" len="med"/>
-                      <a:tailEnd type="none" w="med" len="med"/>
-                    </a:lnR>
-                    <a:lnT w="12700" cap="flat" cmpd="sng" algn="ctr">
-                      <a:solidFill>
-                        <a:srgbClr val="8DA9C4"/>
-                      </a:solidFill>
-                      <a:prstDash val="solid"/>
-                      <a:round/>
-                      <a:headEnd type="none" w="med" len="med"/>
-                      <a:tailEnd type="none" w="med" len="med"/>
-                    </a:lnT>
-                    <a:lnB w="12700" cap="flat" cmpd="sng" algn="ctr">
-                      <a:solidFill>
-                        <a:srgbClr val="8DA9C4"/>
-                      </a:solidFill>
-                      <a:prstDash val="solid"/>
-                      <a:round/>
-                      <a:headEnd type="none" w="med" len="med"/>
-                      <a:tailEnd type="none" w="med" len="med"/>
-                    </a:lnB>
-                  </a:tcPr>
-                </a:tc>
-                <a:tc>
-                  <a:txBody>
-                    <a:bodyPr/>
-                    <a:lstStyle/>
-                    <a:p>
-                      <a:pPr algn="ctr" indent="0" marL="0">
-                        <a:buNone/>
-                      </a:pPr>
-                      <a:r>
-                        <a:rPr lang="en-US" sz="1500" b="1" dirty="0">
-                          <a:solidFill>
-                            <a:srgbClr val="EEA02B"/>
-                          </a:solidFill>
-                          <a:latin typeface="Calibri" pitchFamily="34" charset="0"/>
-                          <a:ea typeface="Calibri" pitchFamily="34" charset="-122"/>
-                          <a:cs typeface="Calibri" pitchFamily="34" charset="-120"/>
-                        </a:rPr>
-                        <a:t>&lt; 0.0001</a:t>
-                      </a:r>
-                      <a:endParaRPr lang="en-US" sz="1500" dirty="0">
-                        <a:latin typeface="Calibri" charset="0"/>
-                        <a:ea typeface="Calibri" charset="0"/>
-                        <a:cs typeface="Calibri" charset="0"/>
-                      </a:endParaRPr>
-                    </a:p>
-                  </a:txBody>
-                  <a:tcPr marL="91440" marR="91440" marT="45720" marB="45720">
-                    <a:lnL w="12700" cap="flat" cmpd="sng" algn="ctr">
-                      <a:solidFill>
-                        <a:srgbClr val="8DA9C4"/>
-                      </a:solidFill>
-                      <a:prstDash val="solid"/>
-                      <a:round/>
-                      <a:headEnd type="none" w="med" len="med"/>
-                      <a:tailEnd type="none" w="med" len="med"/>
-                    </a:lnL>
-                    <a:lnR w="12700" cap="flat" cmpd="sng" algn="ctr">
-                      <a:solidFill>
-                        <a:srgbClr val="8DA9C4"/>
-                      </a:solidFill>
-                      <a:prstDash val="solid"/>
-                      <a:round/>
-                      <a:headEnd type="none" w="med" len="med"/>
-                      <a:tailEnd type="none" w="med" len="med"/>
-                    </a:lnR>
-                    <a:lnT w="12700" cap="flat" cmpd="sng" algn="ctr">
-                      <a:solidFill>
-                        <a:srgbClr val="8DA9C4"/>
-                      </a:solidFill>
-                      <a:prstDash val="solid"/>
-                      <a:round/>
-                      <a:headEnd type="none" w="med" len="med"/>
-                      <a:tailEnd type="none" w="med" len="med"/>
-                    </a:lnT>
-                    <a:lnB w="12700" cap="flat" cmpd="sng" algn="ctr">
-                      <a:solidFill>
-                        <a:srgbClr val="8DA9C4"/>
-                      </a:solidFill>
-                      <a:prstDash val="solid"/>
-                      <a:round/>
-                      <a:headEnd type="none" w="med" len="med"/>
-                      <a:tailEnd type="none" w="med" len="med"/>
-                    </a:lnB>
-                  </a:tcPr>
-                </a:tc>
               </a:tr>
             </a:tbl>
           </a:graphicData>
@@ -12527,57 +10121,123 @@
       </p:graphicFrame>
       <p:sp>
         <p:nvSpPr>
-          <p:cNvPr id="6" name="Text 3"/>
-          <p:cNvSpPr/>
-          <p:nvPr/>
-        </p:nvSpPr>
-        <p:spPr>
-          <a:xfrm>
-            <a:off x="502920" y="4160520"/>
-            <a:ext cx="11247120" cy="365760"/>
-          </a:xfrm>
-          <a:prstGeom prst="rect">
-            <a:avLst/>
-          </a:prstGeom>
-          <a:noFill/>
-          <a:ln/>
-        </p:spPr>
-        <p:txBody>
-          <a:bodyPr wrap="square" rtlCol="0" anchor="ctr"/>
-          <a:lstStyle/>
-          <a:p>
-            <a:pPr indent="0" marL="0">
-              <a:buNone/>
-            </a:pPr>
-            <a:r>
-              <a:rPr lang="en-US" sz="1300" i="1" dirty="0">
-                <a:solidFill>
-                  <a:srgbClr val="8DA9C4"/>
+          <p:cNvPr id="7" name="Shape 3"/>
+          <p:cNvSpPr/>
+          <p:nvPr/>
+        </p:nvSpPr>
+        <p:spPr>
+          <a:xfrm>
+            <a:off x="7269480" y="3337560"/>
+            <a:ext cx="4434840" cy="1280160"/>
+          </a:xfrm>
+          <a:prstGeom prst="roundRect">
+            <a:avLst>
+              <a:gd name="adj" fmla="val 5714"/>
+            </a:avLst>
+          </a:prstGeom>
+          <a:solidFill>
+            <a:srgbClr val="EEF3F8"/>
+          </a:solidFill>
+          <a:ln w="15240">
+            <a:solidFill>
+              <a:srgbClr val="1C7293"/>
+            </a:solidFill>
+            <a:prstDash val="solid"/>
+          </a:ln>
+        </p:spPr>
+      </p:sp>
+      <p:sp>
+        <p:nvSpPr>
+          <p:cNvPr id="8" name="Text 4"/>
+          <p:cNvSpPr/>
+          <p:nvPr/>
+        </p:nvSpPr>
+        <p:spPr>
+          <a:xfrm>
+            <a:off x="7452360" y="3429000"/>
+            <a:ext cx="4069080" cy="777240"/>
+          </a:xfrm>
+          <a:prstGeom prst="rect">
+            <a:avLst/>
+          </a:prstGeom>
+          <a:noFill/>
+          <a:ln/>
+        </p:spPr>
+        <p:txBody>
+          <a:bodyPr wrap="square" rtlCol="0" anchor="ctr"/>
+          <a:lstStyle/>
+          <a:p>
+            <a:pPr algn="ctr" indent="0" marL="0">
+              <a:buNone/>
+            </a:pPr>
+            <a:r>
+              <a:rPr lang="en-US" sz="1800" b="1" dirty="0">
+                <a:solidFill>
+                  <a:srgbClr val="0B2545"/>
+                </a:solidFill>
+                <a:latin typeface="Courier New" pitchFamily="34" charset="0"/>
+                <a:ea typeface="Courier New" pitchFamily="34" charset="-122"/>
+                <a:cs typeface="Courier New" pitchFamily="34" charset="-120"/>
+              </a:rPr>
+              <a:t>Δp̂_scorer(t)  =  p̂(t+60) − p̂(t)</a:t>
+            </a:r>
+            <a:endParaRPr lang="en-US" sz="1800" dirty="0"/>
+          </a:p>
+        </p:txBody>
+      </p:sp>
+      <p:sp>
+        <p:nvSpPr>
+          <p:cNvPr id="9" name="Text 5"/>
+          <p:cNvSpPr/>
+          <p:nvPr/>
+        </p:nvSpPr>
+        <p:spPr>
+          <a:xfrm>
+            <a:off x="7452360" y="4160520"/>
+            <a:ext cx="4069080" cy="365760"/>
+          </a:xfrm>
+          <a:prstGeom prst="rect">
+            <a:avLst/>
+          </a:prstGeom>
+          <a:noFill/>
+          <a:ln/>
+        </p:spPr>
+        <p:txBody>
+          <a:bodyPr wrap="square" rtlCol="0" anchor="ctr"/>
+          <a:lstStyle/>
+          <a:p>
+            <a:pPr algn="ctr" indent="0" marL="0">
+              <a:buNone/>
+            </a:pPr>
+            <a:r>
+              <a:rPr lang="en-US" sz="1200" i="1" dirty="0">
+                <a:solidFill>
+                  <a:srgbClr val="13315C"/>
                 </a:solidFill>
                 <a:latin typeface="Calibri" pitchFamily="34" charset="0"/>
                 <a:ea typeface="Calibri" pitchFamily="34" charset="-122"/>
                 <a:cs typeface="Calibri" pitchFamily="34" charset="-120"/>
               </a:rPr>
-              <a:t>Block-bootstrap by game (10,000 resamples). Holm-Bonferroni across the pre-registered set.</a:t>
-            </a:r>
-            <a:endParaRPr lang="en-US" sz="1300" dirty="0"/>
-          </a:p>
-        </p:txBody>
-      </p:sp>
-      <p:sp>
-        <p:nvSpPr>
-          <p:cNvPr id="7" name="Shape 4"/>
-          <p:cNvSpPr/>
-          <p:nvPr/>
-        </p:nvSpPr>
-        <p:spPr>
-          <a:xfrm>
-            <a:off x="502920" y="4617720"/>
-            <a:ext cx="11247120" cy="1645920"/>
+              <a:t>structural shift over the 60s after a made FG</a:t>
+            </a:r>
+            <a:endParaRPr lang="en-US" sz="1200" dirty="0"/>
+          </a:p>
+        </p:txBody>
+      </p:sp>
+      <p:sp>
+        <p:nvSpPr>
+          <p:cNvPr id="10" name="Shape 6"/>
+          <p:cNvSpPr/>
+          <p:nvPr/>
+        </p:nvSpPr>
+        <p:spPr>
+          <a:xfrm>
+            <a:off x="7269480" y="4754880"/>
+            <a:ext cx="4434840" cy="1600200"/>
           </a:xfrm>
           <a:prstGeom prst="roundRect">
             <a:avLst>
-              <a:gd name="adj" fmla="val 5556"/>
+              <a:gd name="adj" fmla="val 5714"/>
             </a:avLst>
           </a:prstGeom>
           <a:solidFill>
@@ -12593,14 +10253,14 @@
       </p:sp>
       <p:sp>
         <p:nvSpPr>
-          <p:cNvPr id="8" name="Text 5"/>
-          <p:cNvSpPr/>
-          <p:nvPr/>
-        </p:nvSpPr>
-        <p:spPr>
-          <a:xfrm>
-            <a:off x="777240" y="4754880"/>
-            <a:ext cx="10698480" cy="640080"/>
+          <p:cNvPr id="11" name="Text 7"/>
+          <p:cNvSpPr/>
+          <p:nvPr/>
+        </p:nvSpPr>
+        <p:spPr>
+          <a:xfrm>
+            <a:off x="7452360" y="4846320"/>
+            <a:ext cx="4114800" cy="320040"/>
           </a:xfrm>
           <a:prstGeom prst="rect">
             <a:avLst/>
@@ -12616,30 +10276,30 @@
               <a:buNone/>
             </a:pPr>
             <a:r>
-              <a:rPr lang="en-US" sz="1600" dirty="0">
-                <a:solidFill>
-                  <a:srgbClr val="1A1A1A"/>
+              <a:rPr lang="en-US" sz="1200" i="1" dirty="0">
+                <a:solidFill>
+                  <a:srgbClr val="13315C"/>
                 </a:solidFill>
                 <a:latin typeface="Calibri" pitchFamily="34" charset="0"/>
                 <a:ea typeface="Calibri" pitchFamily="34" charset="-122"/>
                 <a:cs typeface="Calibri" pitchFamily="34" charset="-120"/>
               </a:rPr>
-              <a:t>A trailing team's basket shifts the calibrated model in their favor by ~0.7–1.4 points over the next 60 seconds.</a:t>
-            </a:r>
-            <a:endParaRPr lang="en-US" sz="1600" dirty="0"/>
-          </a:p>
-        </p:txBody>
-      </p:sp>
-      <p:sp>
-        <p:nvSpPr>
-          <p:cNvPr id="9" name="Text 6"/>
-          <p:cNvSpPr/>
-          <p:nvPr/>
-        </p:nvSpPr>
-        <p:spPr>
-          <a:xfrm>
-            <a:off x="777240" y="5440680"/>
-            <a:ext cx="10698480" cy="640080"/>
+              <a:t>The behavioral question:</a:t>
+            </a:r>
+            <a:endParaRPr lang="en-US" sz="1200" dirty="0"/>
+          </a:p>
+        </p:txBody>
+      </p:sp>
+      <p:sp>
+        <p:nvSpPr>
+          <p:cNvPr id="12" name="Text 8"/>
+          <p:cNvSpPr/>
+          <p:nvPr/>
+        </p:nvSpPr>
+        <p:spPr>
+          <a:xfrm>
+            <a:off x="7452360" y="5166360"/>
+            <a:ext cx="4114800" cy="1097280"/>
           </a:xfrm>
           <a:prstGeom prst="rect">
             <a:avLst/>
@@ -12655,7 +10315,7 @@
               <a:buNone/>
             </a:pPr>
             <a:r>
-              <a:rPr lang="en-US" sz="1800" b="1" i="1" dirty="0">
+              <a:rPr lang="en-US" sz="1600" b="1" i="1" dirty="0">
                 <a:solidFill>
                   <a:srgbClr val="0B2545"/>
                 </a:solidFill>
@@ -12663,15 +10323,15 @@
                 <a:ea typeface="Georgia" pitchFamily="34" charset="-122"/>
                 <a:cs typeface="Georgia" pitchFamily="34" charset="-120"/>
               </a:rPr>
-              <a:t>The behavioral question: does the market shift more?</a:t>
-            </a:r>
-            <a:endParaRPr lang="en-US" sz="1800" dirty="0"/>
-          </a:p>
-        </p:txBody>
-      </p:sp>
-      <p:sp>
-        <p:nvSpPr>
-          <p:cNvPr id="10" name="Text 7"/>
+              <a:t>does the market shift more than this?</a:t>
+            </a:r>
+            <a:endParaRPr lang="en-US" sz="1600" dirty="0"/>
+          </a:p>
+        </p:txBody>
+      </p:sp>
+      <p:sp>
+        <p:nvSpPr>
+          <p:cNvPr id="13" name="Text 9"/>
           <p:cNvSpPr/>
           <p:nvPr/>
         </p:nvSpPr>
@@ -12710,7 +10370,7 @@
       </p:sp>
       <p:sp>
         <p:nvSpPr>
-          <p:cNvPr id="11" name="Text 8"/>
+          <p:cNvPr id="14" name="Text 10"/>
           <p:cNvSpPr/>
           <p:nvPr/>
         </p:nvSpPr>
@@ -12787,7 +10447,7 @@
         </p:nvSpPr>
         <p:spPr>
           <a:xfrm>
-            <a:off x="502920" y="256032"/>
+            <a:off x="502920" y="228600"/>
             <a:ext cx="11247120" cy="777240"/>
           </a:xfrm>
           <a:prstGeom prst="rect">
@@ -12812,7 +10472,7 @@
                 <a:ea typeface="Georgia" pitchFamily="34" charset="-122"/>
                 <a:cs typeface="Georgia" pitchFamily="34" charset="-120"/>
               </a:rPr>
-              <a:t>The backtest engine</a:t>
+              <a:t>Backtest engine · the equations</a:t>
             </a:r>
             <a:endParaRPr lang="en-US" sz="2800" dirty="0"/>
           </a:p>
@@ -12826,7 +10486,7 @@
         </p:nvSpPr>
         <p:spPr>
           <a:xfrm>
-            <a:off x="502920" y="960120"/>
+            <a:off x="502920" y="932688"/>
             <a:ext cx="11247120" cy="365760"/>
           </a:xfrm>
           <a:prstGeom prst="rect">
@@ -12865,7 +10525,7 @@
         </p:nvSpPr>
         <p:spPr>
           <a:xfrm>
-            <a:off x="502920" y="1325880"/>
+            <a:off x="502920" y="1298448"/>
             <a:ext cx="11247120" cy="0"/>
           </a:xfrm>
           <a:prstGeom prst="line">
@@ -12882,14 +10542,41 @@
       </p:sp>
       <p:sp>
         <p:nvSpPr>
-          <p:cNvPr id="5" name="Text 3"/>
-          <p:cNvSpPr/>
-          <p:nvPr/>
-        </p:nvSpPr>
-        <p:spPr>
-          <a:xfrm>
-            <a:off x="502920" y="1554480"/>
-            <a:ext cx="11247120" cy="457200"/>
+          <p:cNvPr id="5" name="Shape 3"/>
+          <p:cNvSpPr/>
+          <p:nvPr/>
+        </p:nvSpPr>
+        <p:spPr>
+          <a:xfrm>
+            <a:off x="502920" y="1417320"/>
+            <a:ext cx="11247120" cy="960120"/>
+          </a:xfrm>
+          <a:prstGeom prst="roundRect">
+            <a:avLst>
+              <a:gd name="adj" fmla="val 7619"/>
+            </a:avLst>
+          </a:prstGeom>
+          <a:solidFill>
+            <a:srgbClr val="EEF3F8"/>
+          </a:solidFill>
+          <a:ln w="15240">
+            <a:solidFill>
+              <a:srgbClr val="1C7293"/>
+            </a:solidFill>
+            <a:prstDash val="solid"/>
+          </a:ln>
+        </p:spPr>
+      </p:sp>
+      <p:sp>
+        <p:nvSpPr>
+          <p:cNvPr id="6" name="Text 4"/>
+          <p:cNvSpPr/>
+          <p:nvPr/>
+        </p:nvSpPr>
+        <p:spPr>
+          <a:xfrm>
+            <a:off x="685800" y="1508760"/>
+            <a:ext cx="10881360" cy="457200"/>
           </a:xfrm>
           <a:prstGeom prst="rect">
             <a:avLst/>
@@ -12905,7 +10592,46 @@
               <a:buNone/>
             </a:pPr>
             <a:r>
-              <a:rPr lang="en-US" sz="1800" i="1" dirty="0">
+              <a:rPr lang="en-US" sz="1800" b="1" dirty="0">
+                <a:solidFill>
+                  <a:srgbClr val="0B2545"/>
+                </a:solidFill>
+                <a:latin typeface="Courier New" pitchFamily="34" charset="0"/>
+                <a:ea typeface="Courier New" pitchFamily="34" charset="-122"/>
+                <a:cs typeface="Courier New" pitchFamily="34" charset="-120"/>
+              </a:rPr>
+              <a:t>edge_t  =  p̂_t  −  p_market_t</a:t>
+            </a:r>
+            <a:endParaRPr lang="en-US" sz="1800" dirty="0"/>
+          </a:p>
+        </p:txBody>
+      </p:sp>
+      <p:sp>
+        <p:nvSpPr>
+          <p:cNvPr id="7" name="Text 5"/>
+          <p:cNvSpPr/>
+          <p:nvPr/>
+        </p:nvSpPr>
+        <p:spPr>
+          <a:xfrm>
+            <a:off x="685800" y="1920240"/>
+            <a:ext cx="10881360" cy="365760"/>
+          </a:xfrm>
+          <a:prstGeom prst="rect">
+            <a:avLst/>
+          </a:prstGeom>
+          <a:noFill/>
+          <a:ln/>
+        </p:spPr>
+        <p:txBody>
+          <a:bodyPr wrap="square" rtlCol="0" anchor="ctr"/>
+          <a:lstStyle/>
+          <a:p>
+            <a:pPr algn="ctr" indent="0" marL="0">
+              <a:buNone/>
+            </a:pPr>
+            <a:r>
+              <a:rPr lang="en-US" sz="1200" i="1" dirty="0">
                 <a:solidFill>
                   <a:srgbClr val="13315C"/>
                 </a:solidFill>
@@ -12913,9 +10639,219 @@
                 <a:ea typeface="Calibri" pitchFamily="34" charset="-122"/>
                 <a:cs typeface="Calibri" pitchFamily="34" charset="-120"/>
               </a:rPr>
-              <a:t>threshold → ¼-Kelly → settle at vigged odds → block-bootstrap by game</a:t>
+              <a:t>core: where the variant's fair value disagrees with the de-vigged market</a:t>
+            </a:r>
+            <a:endParaRPr lang="en-US" sz="1200" dirty="0"/>
+          </a:p>
+        </p:txBody>
+      </p:sp>
+      <p:sp>
+        <p:nvSpPr>
+          <p:cNvPr id="8" name="Shape 6"/>
+          <p:cNvSpPr/>
+          <p:nvPr/>
+        </p:nvSpPr>
+        <p:spPr>
+          <a:xfrm>
+            <a:off x="502920" y="2514600"/>
+            <a:ext cx="5486400" cy="960120"/>
+          </a:xfrm>
+          <a:prstGeom prst="roundRect">
+            <a:avLst>
+              <a:gd name="adj" fmla="val 7619"/>
+            </a:avLst>
+          </a:prstGeom>
+          <a:solidFill>
+            <a:srgbClr val="EEF3F8"/>
+          </a:solidFill>
+          <a:ln w="15240">
+            <a:solidFill>
+              <a:srgbClr val="1C7293"/>
+            </a:solidFill>
+            <a:prstDash val="solid"/>
+          </a:ln>
+        </p:spPr>
+      </p:sp>
+      <p:sp>
+        <p:nvSpPr>
+          <p:cNvPr id="9" name="Text 7"/>
+          <p:cNvSpPr/>
+          <p:nvPr/>
+        </p:nvSpPr>
+        <p:spPr>
+          <a:xfrm>
+            <a:off x="685800" y="2606040"/>
+            <a:ext cx="5120640" cy="457200"/>
+          </a:xfrm>
+          <a:prstGeom prst="rect">
+            <a:avLst/>
+          </a:prstGeom>
+          <a:noFill/>
+          <a:ln/>
+        </p:spPr>
+        <p:txBody>
+          <a:bodyPr wrap="square" rtlCol="0" anchor="ctr"/>
+          <a:lstStyle/>
+          <a:p>
+            <a:pPr algn="ctr" indent="0" marL="0">
+              <a:buNone/>
+            </a:pPr>
+            <a:r>
+              <a:rPr lang="en-US" sz="1800" b="1" dirty="0">
+                <a:solidFill>
+                  <a:srgbClr val="0B2545"/>
+                </a:solidFill>
+                <a:latin typeface="Courier New" pitchFamily="34" charset="0"/>
+                <a:ea typeface="Courier New" pitchFamily="34" charset="-122"/>
+                <a:cs typeface="Courier New" pitchFamily="34" charset="-120"/>
+              </a:rPr>
+              <a:t>p_devig  =  p_home_raw / (p_home_raw + p_away_raw)</a:t>
             </a:r>
             <a:endParaRPr lang="en-US" sz="1800" dirty="0"/>
+          </a:p>
+        </p:txBody>
+      </p:sp>
+      <p:sp>
+        <p:nvSpPr>
+          <p:cNvPr id="10" name="Text 8"/>
+          <p:cNvSpPr/>
+          <p:nvPr/>
+        </p:nvSpPr>
+        <p:spPr>
+          <a:xfrm>
+            <a:off x="685800" y="3017520"/>
+            <a:ext cx="5120640" cy="365760"/>
+          </a:xfrm>
+          <a:prstGeom prst="rect">
+            <a:avLst/>
+          </a:prstGeom>
+          <a:noFill/>
+          <a:ln/>
+        </p:spPr>
+        <p:txBody>
+          <a:bodyPr wrap="square" rtlCol="0" anchor="ctr"/>
+          <a:lstStyle/>
+          <a:p>
+            <a:pPr algn="ctr" indent="0" marL="0">
+              <a:buNone/>
+            </a:pPr>
+            <a:r>
+              <a:rPr lang="en-US" sz="1200" i="1" dirty="0">
+                <a:solidFill>
+                  <a:srgbClr val="13315C"/>
+                </a:solidFill>
+                <a:latin typeface="Calibri" pitchFamily="34" charset="0"/>
+                <a:ea typeface="Calibri" pitchFamily="34" charset="-122"/>
+                <a:cs typeface="Calibri" pitchFamily="34" charset="-120"/>
+              </a:rPr>
+              <a:t>multiplicative two-way de-vig</a:t>
+            </a:r>
+            <a:endParaRPr lang="en-US" sz="1200" dirty="0"/>
+          </a:p>
+        </p:txBody>
+      </p:sp>
+      <p:sp>
+        <p:nvSpPr>
+          <p:cNvPr id="11" name="Shape 9"/>
+          <p:cNvSpPr/>
+          <p:nvPr/>
+        </p:nvSpPr>
+        <p:spPr>
+          <a:xfrm>
+            <a:off x="6263640" y="2514600"/>
+            <a:ext cx="5486400" cy="960120"/>
+          </a:xfrm>
+          <a:prstGeom prst="roundRect">
+            <a:avLst>
+              <a:gd name="adj" fmla="val 7619"/>
+            </a:avLst>
+          </a:prstGeom>
+          <a:solidFill>
+            <a:srgbClr val="EEF3F8"/>
+          </a:solidFill>
+          <a:ln w="15240">
+            <a:solidFill>
+              <a:srgbClr val="1C7293"/>
+            </a:solidFill>
+            <a:prstDash val="solid"/>
+          </a:ln>
+        </p:spPr>
+      </p:sp>
+      <p:sp>
+        <p:nvSpPr>
+          <p:cNvPr id="12" name="Text 10"/>
+          <p:cNvSpPr/>
+          <p:nvPr/>
+        </p:nvSpPr>
+        <p:spPr>
+          <a:xfrm>
+            <a:off x="6446520" y="2606040"/>
+            <a:ext cx="5120640" cy="457200"/>
+          </a:xfrm>
+          <a:prstGeom prst="rect">
+            <a:avLst/>
+          </a:prstGeom>
+          <a:noFill/>
+          <a:ln/>
+        </p:spPr>
+        <p:txBody>
+          <a:bodyPr wrap="square" rtlCol="0" anchor="ctr"/>
+          <a:lstStyle/>
+          <a:p>
+            <a:pPr algn="ctr" indent="0" marL="0">
+              <a:buNone/>
+            </a:pPr>
+            <a:r>
+              <a:rPr lang="en-US" sz="1800" b="1" dirty="0">
+                <a:solidFill>
+                  <a:srgbClr val="0B2545"/>
+                </a:solidFill>
+                <a:latin typeface="Courier New" pitchFamily="34" charset="0"/>
+                <a:ea typeface="Courier New" pitchFamily="34" charset="-122"/>
+                <a:cs typeface="Courier New" pitchFamily="34" charset="-120"/>
+              </a:rPr>
+              <a:t>f*  =  ( b · p  −  q ) / b</a:t>
+            </a:r>
+            <a:endParaRPr lang="en-US" sz="1800" dirty="0"/>
+          </a:p>
+        </p:txBody>
+      </p:sp>
+      <p:sp>
+        <p:nvSpPr>
+          <p:cNvPr id="13" name="Text 11"/>
+          <p:cNvSpPr/>
+          <p:nvPr/>
+        </p:nvSpPr>
+        <p:spPr>
+          <a:xfrm>
+            <a:off x="6446520" y="3017520"/>
+            <a:ext cx="5120640" cy="365760"/>
+          </a:xfrm>
+          <a:prstGeom prst="rect">
+            <a:avLst/>
+          </a:prstGeom>
+          <a:noFill/>
+          <a:ln/>
+        </p:spPr>
+        <p:txBody>
+          <a:bodyPr wrap="square" rtlCol="0" anchor="ctr"/>
+          <a:lstStyle/>
+          <a:p>
+            <a:pPr algn="ctr" indent="0" marL="0">
+              <a:buNone/>
+            </a:pPr>
+            <a:r>
+              <a:rPr lang="en-US" sz="1200" i="1" dirty="0">
+                <a:solidFill>
+                  <a:srgbClr val="13315C"/>
+                </a:solidFill>
+                <a:latin typeface="Calibri" pitchFamily="34" charset="0"/>
+                <a:ea typeface="Calibri" pitchFamily="34" charset="-122"/>
+                <a:cs typeface="Calibri" pitchFamily="34" charset="-120"/>
+              </a:rPr>
+              <a:t>Kelly fraction · b = decimal−1, q = 1−p</a:t>
+            </a:r>
+            <a:endParaRPr lang="en-US" sz="1200" dirty="0"/>
           </a:p>
         </p:txBody>
       </p:sp>
@@ -12934,7 +10870,7 @@
           </p:nvPr>
         </p:nvGraphicFramePr>
         <p:xfrm>
-          <a:off x="502920" y="2194560"/>
+          <a:off x="502920" y="3703320"/>
           <a:ext cx="11247120" cy="914400"/>
         </p:xfrm>
         <a:graphic>
@@ -12945,7 +10881,7 @@
                 <a:gridCol w="5486400"/>
                 <a:gridCol w="5760720"/>
               </a:tblGrid>
-              <a:tr h="548640">
+              <a:tr h="457200">
                 <a:tc>
                   <a:txBody>
                     <a:bodyPr/>
@@ -12955,7 +10891,7 @@
                         <a:buNone/>
                       </a:pPr>
                       <a:r>
-                        <a:rPr lang="en-US" sz="1500" b="1" dirty="0">
+                        <a:rPr lang="en-US" sz="1300" b="1" dirty="0">
                           <a:solidFill>
                             <a:srgbClr val="F6F6F2"/>
                           </a:solidFill>
@@ -12963,9 +10899,9 @@
                           <a:ea typeface="Calibri" pitchFamily="34" charset="-122"/>
                           <a:cs typeface="Calibri" pitchFamily="34" charset="-120"/>
                         </a:rPr>
-                        <a:t>Gate</a:t>
+                        <a:t>Honesty gate</a:t>
                       </a:r>
-                      <a:endParaRPr lang="en-US" sz="1500" dirty="0">
+                      <a:endParaRPr lang="en-US" sz="1300" dirty="0">
                         <a:latin typeface="Calibri" charset="0"/>
                         <a:ea typeface="Calibri" charset="0"/>
                         <a:cs typeface="Calibri" charset="0"/>
@@ -13023,7 +10959,7 @@
                         <a:buNone/>
                       </a:pPr>
                       <a:r>
-                        <a:rPr lang="en-US" sz="1500" b="1" dirty="0">
+                        <a:rPr lang="en-US" sz="1300" b="1" dirty="0">
                           <a:solidFill>
                             <a:srgbClr val="F6F6F2"/>
                           </a:solidFill>
@@ -13033,7 +10969,7 @@
                         </a:rPr>
                         <a:t>What it proves</a:t>
                       </a:r>
-                      <a:endParaRPr lang="en-US" sz="1500" dirty="0">
+                      <a:endParaRPr lang="en-US" sz="1300" dirty="0">
                         <a:latin typeface="Calibri" charset="0"/>
                         <a:ea typeface="Calibri" charset="0"/>
                         <a:cs typeface="Calibri" charset="0"/>
@@ -13083,7 +11019,7 @@
                   </a:tcPr>
                 </a:tc>
               </a:tr>
-              <a:tr h="548640">
+              <a:tr h="457200">
                 <a:tc>
                   <a:txBody>
                     <a:bodyPr/>
@@ -13093,7 +11029,7 @@
                         <a:buNone/>
                       </a:pPr>
                       <a:r>
-                        <a:rPr lang="en-US" sz="1500" b="1" dirty="0">
+                        <a:rPr lang="en-US" sz="1300" b="1" dirty="0">
                           <a:solidFill>
                             <a:srgbClr val="0B2545"/>
                           </a:solidFill>
@@ -13103,7 +11039,7 @@
                         </a:rPr>
                         <a:t>const-0.5 → Brier 0.25</a:t>
                       </a:r>
-                      <a:endParaRPr lang="en-US" sz="1500" dirty="0">
+                      <a:endParaRPr lang="en-US" sz="1300" dirty="0">
                         <a:latin typeface="Calibri" charset="0"/>
                         <a:ea typeface="Calibri" charset="0"/>
                         <a:cs typeface="Calibri" charset="0"/>
@@ -13158,7 +11094,7 @@
                         <a:buNone/>
                       </a:pPr>
                       <a:r>
-                        <a:rPr lang="en-US" sz="1500" dirty="0">
+                        <a:rPr lang="en-US" sz="1300" dirty="0">
                           <a:solidFill>
                             <a:srgbClr val="1A1A1A"/>
                           </a:solidFill>
@@ -13168,7 +11104,7 @@
                         </a:rPr>
                         <a:t>metrics wired correctly</a:t>
                       </a:r>
-                      <a:endParaRPr lang="en-US" sz="1500" dirty="0">
+                      <a:endParaRPr lang="en-US" sz="1300" dirty="0">
                         <a:latin typeface="Calibri" charset="0"/>
                         <a:ea typeface="Calibri" charset="0"/>
                         <a:cs typeface="Calibri" charset="0"/>
@@ -13215,7 +11151,7 @@
                   </a:tcPr>
                 </a:tc>
               </a:tr>
-              <a:tr h="548640">
+              <a:tr h="457200">
                 <a:tc>
                   <a:txBody>
                     <a:bodyPr/>
@@ -13225,7 +11161,7 @@
                         <a:buNone/>
                       </a:pPr>
                       <a:r>
-                        <a:rPr lang="en-US" sz="1500" b="1" dirty="0">
+                        <a:rPr lang="en-US" sz="1300" b="1" dirty="0">
                           <a:solidFill>
                             <a:srgbClr val="0B2545"/>
                           </a:solidFill>
@@ -13233,9 +11169,9 @@
                           <a:ea typeface="Calibri" pitchFamily="34" charset="-122"/>
                           <a:cs typeface="Calibri" pitchFamily="34" charset="-120"/>
                         </a:rPr>
-                        <a:t>always-favorite → loses ≈ the vig</a:t>
+                        <a:t>always-favorite → loses ≈ vig</a:t>
                       </a:r>
-                      <a:endParaRPr lang="en-US" sz="1500" dirty="0">
+                      <a:endParaRPr lang="en-US" sz="1300" dirty="0">
                         <a:latin typeface="Calibri" charset="0"/>
                         <a:ea typeface="Calibri" charset="0"/>
                         <a:cs typeface="Calibri" charset="0"/>
@@ -13290,7 +11226,7 @@
                         <a:buNone/>
                       </a:pPr>
                       <a:r>
-                        <a:rPr lang="en-US" sz="1500" dirty="0">
+                        <a:rPr lang="en-US" sz="1300" dirty="0">
                           <a:solidFill>
                             <a:srgbClr val="1A1A1A"/>
                           </a:solidFill>
@@ -13300,7 +11236,7 @@
                         </a:rPr>
                         <a:t>engine doesn't invent free money</a:t>
                       </a:r>
-                      <a:endParaRPr lang="en-US" sz="1500" dirty="0">
+                      <a:endParaRPr lang="en-US" sz="1300" dirty="0">
                         <a:latin typeface="Calibri" charset="0"/>
                         <a:ea typeface="Calibri" charset="0"/>
                         <a:cs typeface="Calibri" charset="0"/>
@@ -13347,7 +11283,7 @@
                   </a:tcPr>
                 </a:tc>
               </a:tr>
-              <a:tr h="548640">
+              <a:tr h="457200">
                 <a:tc>
                   <a:txBody>
                     <a:bodyPr/>
@@ -13357,7 +11293,7 @@
                         <a:buNone/>
                       </a:pPr>
                       <a:r>
-                        <a:rPr lang="en-US" sz="1500" b="1" dirty="0">
+                        <a:rPr lang="en-US" sz="1300" b="1" dirty="0">
                           <a:solidFill>
                             <a:srgbClr val="0B2545"/>
                           </a:solidFill>
@@ -13365,9 +11301,9 @@
                           <a:ea typeface="Calibri" pitchFamily="34" charset="-122"/>
                           <a:cs typeface="Calibri" pitchFamily="34" charset="-120"/>
                         </a:rPr>
-                        <a:t>random → loses ≈ the vig</a:t>
+                        <a:t>perfect on biased mkt → +14% ROI, p=0.000</a:t>
                       </a:r>
-                      <a:endParaRPr lang="en-US" sz="1500" dirty="0">
+                      <a:endParaRPr lang="en-US" sz="1300" dirty="0">
                         <a:latin typeface="Calibri" charset="0"/>
                         <a:ea typeface="Calibri" charset="0"/>
                         <a:cs typeface="Calibri" charset="0"/>
@@ -13422,17 +11358,17 @@
                         <a:buNone/>
                       </a:pPr>
                       <a:r>
-                        <a:rPr lang="en-US" sz="1500" dirty="0">
+                        <a:rPr lang="en-US" sz="1300" b="1" dirty="0">
                           <a:solidFill>
-                            <a:srgbClr val="1A1A1A"/>
+                            <a:srgbClr val="EEA02B"/>
                           </a:solidFill>
                           <a:latin typeface="Calibri" pitchFamily="34" charset="0"/>
                           <a:ea typeface="Calibri" pitchFamily="34" charset="-122"/>
                           <a:cs typeface="Calibri" pitchFamily="34" charset="-120"/>
                         </a:rPr>
-                        <a:t>same — no spurious edge</a:t>
+                        <a:t>engine CAN detect a real edge</a:t>
                       </a:r>
-                      <a:endParaRPr lang="en-US" sz="1500" dirty="0">
+                      <a:endParaRPr lang="en-US" sz="1300" dirty="0">
                         <a:latin typeface="Calibri" charset="0"/>
                         <a:ea typeface="Calibri" charset="0"/>
                         <a:cs typeface="Calibri" charset="0"/>
@@ -13479,7 +11415,7 @@
                   </a:tcPr>
                 </a:tc>
               </a:tr>
-              <a:tr h="548640">
+              <a:tr h="457200">
                 <a:tc>
                   <a:txBody>
                     <a:bodyPr/>
@@ -13489,7 +11425,7 @@
                         <a:buNone/>
                       </a:pPr>
                       <a:r>
-                        <a:rPr lang="en-US" sz="1500" b="1" dirty="0">
+                        <a:rPr lang="en-US" sz="1300" b="1" dirty="0">
                           <a:solidFill>
                             <a:srgbClr val="0B2545"/>
                           </a:solidFill>
@@ -13497,9 +11433,9 @@
                           <a:ea typeface="Calibri" pitchFamily="34" charset="-122"/>
                           <a:cs typeface="Calibri" pitchFamily="34" charset="-120"/>
                         </a:rPr>
-                        <a:t>perfect model on biased market → +14% ROI, p=0.000</a:t>
+                        <a:t>market-as-variant → 0 bets</a:t>
                       </a:r>
-                      <a:endParaRPr lang="en-US" sz="1500" dirty="0">
+                      <a:endParaRPr lang="en-US" sz="1300" dirty="0">
                         <a:latin typeface="Calibri" charset="0"/>
                         <a:ea typeface="Calibri" charset="0"/>
                         <a:cs typeface="Calibri" charset="0"/>
@@ -13554,139 +11490,7 @@
                         <a:buNone/>
                       </a:pPr>
                       <a:r>
-                        <a:rPr lang="en-US" sz="1500" b="1" dirty="0">
-                          <a:solidFill>
-                            <a:srgbClr val="EEA02B"/>
-                          </a:solidFill>
-                          <a:latin typeface="Calibri" pitchFamily="34" charset="0"/>
-                          <a:ea typeface="Calibri" pitchFamily="34" charset="-122"/>
-                          <a:cs typeface="Calibri" pitchFamily="34" charset="-120"/>
-                        </a:rPr>
-                        <a:t>engine CAN detect a real edge</a:t>
-                      </a:r>
-                      <a:endParaRPr lang="en-US" sz="1500" dirty="0">
-                        <a:latin typeface="Calibri" charset="0"/>
-                        <a:ea typeface="Calibri" charset="0"/>
-                        <a:cs typeface="Calibri" charset="0"/>
-                      </a:endParaRPr>
-                    </a:p>
-                  </a:txBody>
-                  <a:tcPr marL="91440" marR="91440" marT="45720" marB="45720">
-                    <a:lnL w="12700" cap="flat" cmpd="sng" algn="ctr">
-                      <a:solidFill>
-                        <a:srgbClr val="8DA9C4"/>
-                      </a:solidFill>
-                      <a:prstDash val="solid"/>
-                      <a:round/>
-                      <a:headEnd type="none" w="med" len="med"/>
-                      <a:tailEnd type="none" w="med" len="med"/>
-                    </a:lnL>
-                    <a:lnR w="12700" cap="flat" cmpd="sng" algn="ctr">
-                      <a:solidFill>
-                        <a:srgbClr val="8DA9C4"/>
-                      </a:solidFill>
-                      <a:prstDash val="solid"/>
-                      <a:round/>
-                      <a:headEnd type="none" w="med" len="med"/>
-                      <a:tailEnd type="none" w="med" len="med"/>
-                    </a:lnR>
-                    <a:lnT w="12700" cap="flat" cmpd="sng" algn="ctr">
-                      <a:solidFill>
-                        <a:srgbClr val="8DA9C4"/>
-                      </a:solidFill>
-                      <a:prstDash val="solid"/>
-                      <a:round/>
-                      <a:headEnd type="none" w="med" len="med"/>
-                      <a:tailEnd type="none" w="med" len="med"/>
-                    </a:lnT>
-                    <a:lnB w="12700" cap="flat" cmpd="sng" algn="ctr">
-                      <a:solidFill>
-                        <a:srgbClr val="8DA9C4"/>
-                      </a:solidFill>
-                      <a:prstDash val="solid"/>
-                      <a:round/>
-                      <a:headEnd type="none" w="med" len="med"/>
-                      <a:tailEnd type="none" w="med" len="med"/>
-                    </a:lnB>
-                  </a:tcPr>
-                </a:tc>
-              </a:tr>
-              <a:tr h="548640">
-                <a:tc>
-                  <a:txBody>
-                    <a:bodyPr/>
-                    <a:lstStyle/>
-                    <a:p>
-                      <a:pPr indent="0" marL="0">
-                        <a:buNone/>
-                      </a:pPr>
-                      <a:r>
-                        <a:rPr lang="en-US" sz="1500" b="1" dirty="0">
-                          <a:solidFill>
-                            <a:srgbClr val="0B2545"/>
-                          </a:solidFill>
-                          <a:latin typeface="Calibri" pitchFamily="34" charset="0"/>
-                          <a:ea typeface="Calibri" pitchFamily="34" charset="-122"/>
-                          <a:cs typeface="Calibri" pitchFamily="34" charset="-120"/>
-                        </a:rPr>
-                        <a:t>market-as-variant → 0 bets</a:t>
-                      </a:r>
-                      <a:endParaRPr lang="en-US" sz="1500" dirty="0">
-                        <a:latin typeface="Calibri" charset="0"/>
-                        <a:ea typeface="Calibri" charset="0"/>
-                        <a:cs typeface="Calibri" charset="0"/>
-                      </a:endParaRPr>
-                    </a:p>
-                  </a:txBody>
-                  <a:tcPr marL="91440" marR="91440" marT="45720" marB="45720">
-                    <a:lnL w="12700" cap="flat" cmpd="sng" algn="ctr">
-                      <a:solidFill>
-                        <a:srgbClr val="8DA9C4"/>
-                      </a:solidFill>
-                      <a:prstDash val="solid"/>
-                      <a:round/>
-                      <a:headEnd type="none" w="med" len="med"/>
-                      <a:tailEnd type="none" w="med" len="med"/>
-                    </a:lnL>
-                    <a:lnR w="12700" cap="flat" cmpd="sng" algn="ctr">
-                      <a:solidFill>
-                        <a:srgbClr val="8DA9C4"/>
-                      </a:solidFill>
-                      <a:prstDash val="solid"/>
-                      <a:round/>
-                      <a:headEnd type="none" w="med" len="med"/>
-                      <a:tailEnd type="none" w="med" len="med"/>
-                    </a:lnR>
-                    <a:lnT w="12700" cap="flat" cmpd="sng" algn="ctr">
-                      <a:solidFill>
-                        <a:srgbClr val="8DA9C4"/>
-                      </a:solidFill>
-                      <a:prstDash val="solid"/>
-                      <a:round/>
-                      <a:headEnd type="none" w="med" len="med"/>
-                      <a:tailEnd type="none" w="med" len="med"/>
-                    </a:lnT>
-                    <a:lnB w="12700" cap="flat" cmpd="sng" algn="ctr">
-                      <a:solidFill>
-                        <a:srgbClr val="8DA9C4"/>
-                      </a:solidFill>
-                      <a:prstDash val="solid"/>
-                      <a:round/>
-                      <a:headEnd type="none" w="med" len="med"/>
-                      <a:tailEnd type="none" w="med" len="med"/>
-                    </a:lnB>
-                  </a:tcPr>
-                </a:tc>
-                <a:tc>
-                  <a:txBody>
-                    <a:bodyPr/>
-                    <a:lstStyle/>
-                    <a:p>
-                      <a:pPr indent="0" marL="0">
-                        <a:buNone/>
-                      </a:pPr>
-                      <a:r>
-                        <a:rPr lang="en-US" sz="1500" dirty="0">
+                        <a:rPr lang="en-US" sz="1300" dirty="0">
                           <a:solidFill>
                             <a:srgbClr val="1A1A1A"/>
                           </a:solidFill>
@@ -13696,7 +11500,7 @@
                         </a:rPr>
                         <a:t>no fake edge against the market</a:t>
                       </a:r>
-                      <a:endParaRPr lang="en-US" sz="1500" dirty="0">
+                      <a:endParaRPr lang="en-US" sz="1300" dirty="0">
                         <a:latin typeface="Calibri" charset="0"/>
                         <a:ea typeface="Calibri" charset="0"/>
                         <a:cs typeface="Calibri" charset="0"/>
@@ -13749,14 +11553,14 @@
       </p:graphicFrame>
       <p:sp>
         <p:nvSpPr>
-          <p:cNvPr id="7" name="Text 4"/>
-          <p:cNvSpPr/>
-          <p:nvPr/>
-        </p:nvSpPr>
-        <p:spPr>
-          <a:xfrm>
-            <a:off x="502920" y="6035040"/>
-            <a:ext cx="11247120" cy="365760"/>
+          <p:cNvPr id="15" name="Text 12"/>
+          <p:cNvSpPr/>
+          <p:nvPr/>
+        </p:nvSpPr>
+        <p:spPr>
+          <a:xfrm>
+            <a:off x="502920" y="6080760"/>
+            <a:ext cx="11247120" cy="320040"/>
           </a:xfrm>
           <a:prstGeom prst="rect">
             <a:avLst/>
@@ -13772,7 +11576,7 @@
               <a:buNone/>
             </a:pPr>
             <a:r>
-              <a:rPr lang="en-US" sz="1300" i="1" dirty="0">
+              <a:rPr lang="en-US" sz="1100" i="1" dirty="0">
                 <a:solidFill>
                   <a:srgbClr val="8DA9C4"/>
                 </a:solidFill>
@@ -13780,15 +11584,15 @@
                 <a:ea typeface="Calibri" pitchFamily="34" charset="-122"/>
                 <a:cs typeface="Calibri" pitchFamily="34" charset="-120"/>
               </a:rPr>
-              <a:t>Why bootstrap by game (not tick)?  Within-game ticks share one outcome — effective n is games.</a:t>
-            </a:r>
-            <a:endParaRPr lang="en-US" sz="1300" dirty="0"/>
-          </a:p>
-        </p:txBody>
-      </p:sp>
-      <p:sp>
-        <p:nvSpPr>
-          <p:cNvPr id="8" name="Text 5"/>
+              <a:t>Block-bootstrap by GAME (not tick) — within-game ticks share one outcome; effective n is games.</a:t>
+            </a:r>
+            <a:endParaRPr lang="en-US" sz="1100" dirty="0"/>
+          </a:p>
+        </p:txBody>
+      </p:sp>
+      <p:sp>
+        <p:nvSpPr>
+          <p:cNvPr id="16" name="Text 13"/>
           <p:cNvSpPr/>
           <p:nvPr/>
         </p:nvSpPr>
@@ -13827,7 +11631,7 @@
       </p:sp>
       <p:sp>
         <p:nvSpPr>
-          <p:cNvPr id="9" name="Text 6"/>
+          <p:cNvPr id="17" name="Text 14"/>
           <p:cNvSpPr/>
           <p:nvPr/>
         </p:nvSpPr>

--- a/slides/final_deck.pptx
+++ b/slides/final_deck.pptx
@@ -4184,7 +4184,7 @@
                 <a:ea typeface="Georgia" pitchFamily="34" charset="-122"/>
                 <a:cs typeface="Georgia" pitchFamily="34" charset="-120"/>
               </a:rPr>
-              <a:t>Takeaways</a:t>
+              <a:t>Verdict · what works + can it make money?</a:t>
             </a:r>
             <a:endParaRPr lang="en-US" sz="2800" dirty="0"/>
           </a:p>
@@ -4223,7 +4223,7 @@
                 <a:ea typeface="Calibri" pitchFamily="34" charset="-122"/>
                 <a:cs typeface="Calibri" pitchFamily="34" charset="-120"/>
               </a:rPr>
-              <a:t>What we shipped, and what it says</a:t>
+              <a:t>The two questions, answered honestly</a:t>
             </a:r>
             <a:endParaRPr lang="en-US" sz="1400" dirty="0"/>
           </a:p>
@@ -4260,10 +4260,969 @@
         </p:nvSpPr>
         <p:spPr>
           <a:xfrm>
-            <a:off x="502920" y="1554480"/>
-            <a:ext cx="457200" cy="457200"/>
-          </a:xfrm>
-          <a:prstGeom prst="ellipse">
+            <a:off x="502920" y="1417320"/>
+            <a:ext cx="5486400" cy="4846320"/>
+          </a:xfrm>
+          <a:prstGeom prst="roundRect">
+            <a:avLst>
+              <a:gd name="adj" fmla="val 1887"/>
+            </a:avLst>
+          </a:prstGeom>
+          <a:solidFill>
+            <a:srgbClr val="F6F6F2"/>
+          </a:solidFill>
+          <a:ln w="19050">
+            <a:solidFill>
+              <a:srgbClr val="1C7293"/>
+            </a:solidFill>
+            <a:prstDash val="solid"/>
+          </a:ln>
+        </p:spPr>
+      </p:sp>
+      <p:sp>
+        <p:nvSpPr>
+          <p:cNvPr id="6" name="Text 4"/>
+          <p:cNvSpPr/>
+          <p:nvPr/>
+        </p:nvSpPr>
+        <p:spPr>
+          <a:xfrm>
+            <a:off x="685800" y="1554480"/>
+            <a:ext cx="5120640" cy="365760"/>
+          </a:xfrm>
+          <a:prstGeom prst="rect">
+            <a:avLst/>
+          </a:prstGeom>
+          <a:noFill/>
+          <a:ln/>
+        </p:spPr>
+        <p:txBody>
+          <a:bodyPr wrap="square" rtlCol="0" anchor="ctr"/>
+          <a:lstStyle/>
+          <a:p>
+            <a:pPr indent="0" marL="0">
+              <a:buNone/>
+            </a:pPr>
+            <a:r>
+              <a:rPr lang="en-US" sz="1200" b="1" dirty="0">
+                <a:solidFill>
+                  <a:srgbClr val="13315C"/>
+                </a:solidFill>
+                <a:latin typeface="Calibri" pitchFamily="34" charset="0"/>
+                <a:ea typeface="Calibri" pitchFamily="34" charset="-122"/>
+                <a:cs typeface="Calibri" pitchFamily="34" charset="-120"/>
+              </a:rPr>
+              <a:t>MOST EFFECTIVE METHOD</a:t>
+            </a:r>
+            <a:endParaRPr lang="en-US" sz="1200" dirty="0"/>
+          </a:p>
+        </p:txBody>
+      </p:sp>
+      <p:sp>
+        <p:nvSpPr>
+          <p:cNvPr id="7" name="Text 5"/>
+          <p:cNvSpPr/>
+          <p:nvPr/>
+        </p:nvSpPr>
+        <p:spPr>
+          <a:xfrm>
+            <a:off x="685800" y="1920240"/>
+            <a:ext cx="5120640" cy="502920"/>
+          </a:xfrm>
+          <a:prstGeom prst="rect">
+            <a:avLst/>
+          </a:prstGeom>
+          <a:noFill/>
+          <a:ln/>
+        </p:spPr>
+        <p:txBody>
+          <a:bodyPr wrap="square" rtlCol="0" anchor="ctr"/>
+          <a:lstStyle/>
+          <a:p>
+            <a:pPr indent="0" marL="0">
+              <a:buNone/>
+            </a:pPr>
+            <a:r>
+              <a:rPr lang="en-US" sz="2000" b="1" dirty="0">
+                <a:solidFill>
+                  <a:srgbClr val="0B2545"/>
+                </a:solidFill>
+                <a:latin typeface="Georgia" pitchFamily="34" charset="0"/>
+                <a:ea typeface="Georgia" pitchFamily="34" charset="-122"/>
+                <a:cs typeface="Georgia" pitchFamily="34" charset="-120"/>
+              </a:rPr>
+              <a:t>V5 · Event-conditioned overreaction</a:t>
+            </a:r>
+            <a:endParaRPr lang="en-US" sz="2000" dirty="0"/>
+          </a:p>
+        </p:txBody>
+      </p:sp>
+      <p:sp>
+        <p:nvSpPr>
+          <p:cNvPr id="8" name="Text 6"/>
+          <p:cNvSpPr/>
+          <p:nvPr/>
+        </p:nvSpPr>
+        <p:spPr>
+          <a:xfrm>
+            <a:off x="685800" y="2423160"/>
+            <a:ext cx="5120640" cy="640080"/>
+          </a:xfrm>
+          <a:prstGeom prst="rect">
+            <a:avLst/>
+          </a:prstGeom>
+          <a:noFill/>
+          <a:ln/>
+        </p:spPr>
+        <p:txBody>
+          <a:bodyPr wrap="square" rtlCol="0" anchor="ctr"/>
+          <a:lstStyle/>
+          <a:p>
+            <a:pPr indent="0" marL="0">
+              <a:buNone/>
+            </a:pPr>
+            <a:r>
+              <a:rPr lang="en-US" sz="1300" i="1" dirty="0">
+                <a:solidFill>
+                  <a:srgbClr val="13315C"/>
+                </a:solidFill>
+                <a:latin typeface="Calibri" pitchFamily="34" charset="0"/>
+                <a:ea typeface="Calibri" pitchFamily="34" charset="-122"/>
+                <a:cs typeface="Calibri" pitchFamily="34" charset="-120"/>
+              </a:rPr>
+              <a:t>the only variant with a statistically significant finding on the held-out test season</a:t>
+            </a:r>
+            <a:endParaRPr lang="en-US" sz="1300" dirty="0"/>
+          </a:p>
+        </p:txBody>
+      </p:sp>
+      <p:graphicFrame>
+        <p:nvGraphicFramePr>
+          <p:cNvPr id="15" name="Table 0"/>
+          <p:cNvGraphicFramePr>
+            <a:graphicFrameLocks noGrp="1"/>
+          </p:cNvGraphicFramePr>
+          <p:nvPr>
+            <p:extLst>
+              <p:ext uri="{D42A27DB-BD31-4B8C-83A1-F6EECF244321}">
+                <p14:modId xmlns:p14="http://schemas.microsoft.com/office/powerpoint/2010/main" val="1579011935"/>
+              </p:ext>
+            </p:extLst>
+          </p:nvPr>
+        </p:nvGraphicFramePr>
+        <p:xfrm>
+          <a:off x="685800" y="3154680"/>
+          <a:ext cx="5120640" cy="914400"/>
+        </p:xfrm>
+        <a:graphic>
+          <a:graphicData uri="http://schemas.openxmlformats.org/drawingml/2006/table">
+            <a:tbl>
+              <a:tblPr/>
+              <a:tblGrid>
+                <a:gridCol w="2468880"/>
+                <a:gridCol w="1325880"/>
+                <a:gridCol w="1325880"/>
+              </a:tblGrid>
+              <a:tr h="457200">
+                <a:tc>
+                  <a:txBody>
+                    <a:bodyPr/>
+                    <a:lstStyle/>
+                    <a:p>
+                      <a:pPr indent="0" marL="0">
+                        <a:buNone/>
+                      </a:pPr>
+                      <a:r>
+                        <a:rPr lang="en-US" sz="1100" b="1" dirty="0">
+                          <a:solidFill>
+                            <a:srgbClr val="F6F6F2"/>
+                          </a:solidFill>
+                        </a:rPr>
+                        <a:t>Test</a:t>
+                      </a:r>
+                      <a:endParaRPr lang="en-US" sz="1100" dirty="0"/>
+                    </a:p>
+                  </a:txBody>
+                  <a:tcPr marL="91440" marR="91440" marT="45720" marB="45720">
+                    <a:lnL w="12700" cap="flat" cmpd="sng" algn="ctr">
+                      <a:solidFill>
+                        <a:srgbClr val="8DA9C4"/>
+                      </a:solidFill>
+                      <a:prstDash val="solid"/>
+                      <a:round/>
+                      <a:headEnd type="none" w="med" len="med"/>
+                      <a:tailEnd type="none" w="med" len="med"/>
+                    </a:lnL>
+                    <a:lnR w="12700" cap="flat" cmpd="sng" algn="ctr">
+                      <a:solidFill>
+                        <a:srgbClr val="8DA9C4"/>
+                      </a:solidFill>
+                      <a:prstDash val="solid"/>
+                      <a:round/>
+                      <a:headEnd type="none" w="med" len="med"/>
+                      <a:tailEnd type="none" w="med" len="med"/>
+                    </a:lnR>
+                    <a:lnT w="12700" cap="flat" cmpd="sng" algn="ctr">
+                      <a:solidFill>
+                        <a:srgbClr val="8DA9C4"/>
+                      </a:solidFill>
+                      <a:prstDash val="solid"/>
+                      <a:round/>
+                      <a:headEnd type="none" w="med" len="med"/>
+                      <a:tailEnd type="none" w="med" len="med"/>
+                    </a:lnT>
+                    <a:lnB w="12700" cap="flat" cmpd="sng" algn="ctr">
+                      <a:solidFill>
+                        <a:srgbClr val="8DA9C4"/>
+                      </a:solidFill>
+                      <a:prstDash val="solid"/>
+                      <a:round/>
+                      <a:headEnd type="none" w="med" len="med"/>
+                      <a:tailEnd type="none" w="med" len="med"/>
+                    </a:lnB>
+                    <a:solidFill>
+                      <a:srgbClr val="0B2545"/>
+                    </a:solidFill>
+                  </a:tcPr>
+                </a:tc>
+                <a:tc>
+                  <a:txBody>
+                    <a:bodyPr/>
+                    <a:lstStyle/>
+                    <a:p>
+                      <a:pPr algn="ctr" indent="0" marL="0">
+                        <a:buNone/>
+                      </a:pPr>
+                      <a:r>
+                        <a:rPr lang="en-US" sz="1100" b="1" dirty="0">
+                          <a:solidFill>
+                            <a:srgbClr val="F6F6F2"/>
+                          </a:solidFill>
+                        </a:rPr>
+                        <a:t>Shift</a:t>
+                      </a:r>
+                      <a:endParaRPr lang="en-US" sz="1100" dirty="0"/>
+                    </a:p>
+                  </a:txBody>
+                  <a:tcPr marL="91440" marR="91440" marT="45720" marB="45720">
+                    <a:lnL w="12700" cap="flat" cmpd="sng" algn="ctr">
+                      <a:solidFill>
+                        <a:srgbClr val="8DA9C4"/>
+                      </a:solidFill>
+                      <a:prstDash val="solid"/>
+                      <a:round/>
+                      <a:headEnd type="none" w="med" len="med"/>
+                      <a:tailEnd type="none" w="med" len="med"/>
+                    </a:lnL>
+                    <a:lnR w="12700" cap="flat" cmpd="sng" algn="ctr">
+                      <a:solidFill>
+                        <a:srgbClr val="8DA9C4"/>
+                      </a:solidFill>
+                      <a:prstDash val="solid"/>
+                      <a:round/>
+                      <a:headEnd type="none" w="med" len="med"/>
+                      <a:tailEnd type="none" w="med" len="med"/>
+                    </a:lnR>
+                    <a:lnT w="12700" cap="flat" cmpd="sng" algn="ctr">
+                      <a:solidFill>
+                        <a:srgbClr val="8DA9C4"/>
+                      </a:solidFill>
+                      <a:prstDash val="solid"/>
+                      <a:round/>
+                      <a:headEnd type="none" w="med" len="med"/>
+                      <a:tailEnd type="none" w="med" len="med"/>
+                    </a:lnT>
+                    <a:lnB w="12700" cap="flat" cmpd="sng" algn="ctr">
+                      <a:solidFill>
+                        <a:srgbClr val="8DA9C4"/>
+                      </a:solidFill>
+                      <a:prstDash val="solid"/>
+                      <a:round/>
+                      <a:headEnd type="none" w="med" len="med"/>
+                      <a:tailEnd type="none" w="med" len="med"/>
+                    </a:lnB>
+                    <a:solidFill>
+                      <a:srgbClr val="0B2545"/>
+                    </a:solidFill>
+                  </a:tcPr>
+                </a:tc>
+                <a:tc>
+                  <a:txBody>
+                    <a:bodyPr/>
+                    <a:lstStyle/>
+                    <a:p>
+                      <a:pPr algn="ctr" indent="0" marL="0">
+                        <a:buNone/>
+                      </a:pPr>
+                      <a:r>
+                        <a:rPr lang="en-US" sz="1100" b="1" dirty="0">
+                          <a:solidFill>
+                            <a:srgbClr val="F6F6F2"/>
+                          </a:solidFill>
+                        </a:rPr>
+                        <a:t>p-value</a:t>
+                      </a:r>
+                      <a:endParaRPr lang="en-US" sz="1100" dirty="0"/>
+                    </a:p>
+                  </a:txBody>
+                  <a:tcPr marL="91440" marR="91440" marT="45720" marB="45720">
+                    <a:lnL w="12700" cap="flat" cmpd="sng" algn="ctr">
+                      <a:solidFill>
+                        <a:srgbClr val="8DA9C4"/>
+                      </a:solidFill>
+                      <a:prstDash val="solid"/>
+                      <a:round/>
+                      <a:headEnd type="none" w="med" len="med"/>
+                      <a:tailEnd type="none" w="med" len="med"/>
+                    </a:lnL>
+                    <a:lnR w="12700" cap="flat" cmpd="sng" algn="ctr">
+                      <a:solidFill>
+                        <a:srgbClr val="8DA9C4"/>
+                      </a:solidFill>
+                      <a:prstDash val="solid"/>
+                      <a:round/>
+                      <a:headEnd type="none" w="med" len="med"/>
+                      <a:tailEnd type="none" w="med" len="med"/>
+                    </a:lnR>
+                    <a:lnT w="12700" cap="flat" cmpd="sng" algn="ctr">
+                      <a:solidFill>
+                        <a:srgbClr val="8DA9C4"/>
+                      </a:solidFill>
+                      <a:prstDash val="solid"/>
+                      <a:round/>
+                      <a:headEnd type="none" w="med" len="med"/>
+                      <a:tailEnd type="none" w="med" len="med"/>
+                    </a:lnT>
+                    <a:lnB w="12700" cap="flat" cmpd="sng" algn="ctr">
+                      <a:solidFill>
+                        <a:srgbClr val="8DA9C4"/>
+                      </a:solidFill>
+                      <a:prstDash val="solid"/>
+                      <a:round/>
+                      <a:headEnd type="none" w="med" len="med"/>
+                      <a:tailEnd type="none" w="med" len="med"/>
+                    </a:lnB>
+                    <a:solidFill>
+                      <a:srgbClr val="0B2545"/>
+                    </a:solidFill>
+                  </a:tcPr>
+                </a:tc>
+              </a:tr>
+              <a:tr h="457200">
+                <a:tc>
+                  <a:txBody>
+                    <a:bodyPr/>
+                    <a:lstStyle/>
+                    <a:p>
+                      <a:pPr indent="0" marL="0">
+                        <a:buNone/>
+                      </a:pPr>
+                      <a:r>
+                        <a:rPr lang="en-US" sz="1200" b="1" dirty="0">
+                          <a:solidFill>
+                            <a:srgbClr val="0B2545"/>
+                          </a:solidFill>
+                        </a:rPr>
+                        <a:t>H1 trail 10–15, FG</a:t>
+                      </a:r>
+                      <a:endParaRPr lang="en-US" sz="1200" dirty="0"/>
+                    </a:p>
+                  </a:txBody>
+                  <a:tcPr marL="91440" marR="91440" marT="45720" marB="45720">
+                    <a:lnL w="12700" cap="flat" cmpd="sng" algn="ctr">
+                      <a:solidFill>
+                        <a:srgbClr val="8DA9C4"/>
+                      </a:solidFill>
+                      <a:prstDash val="solid"/>
+                      <a:round/>
+                      <a:headEnd type="none" w="med" len="med"/>
+                      <a:tailEnd type="none" w="med" len="med"/>
+                    </a:lnL>
+                    <a:lnR w="12700" cap="flat" cmpd="sng" algn="ctr">
+                      <a:solidFill>
+                        <a:srgbClr val="8DA9C4"/>
+                      </a:solidFill>
+                      <a:prstDash val="solid"/>
+                      <a:round/>
+                      <a:headEnd type="none" w="med" len="med"/>
+                      <a:tailEnd type="none" w="med" len="med"/>
+                    </a:lnR>
+                    <a:lnT w="12700" cap="flat" cmpd="sng" algn="ctr">
+                      <a:solidFill>
+                        <a:srgbClr val="8DA9C4"/>
+                      </a:solidFill>
+                      <a:prstDash val="solid"/>
+                      <a:round/>
+                      <a:headEnd type="none" w="med" len="med"/>
+                      <a:tailEnd type="none" w="med" len="med"/>
+                    </a:lnT>
+                    <a:lnB w="12700" cap="flat" cmpd="sng" algn="ctr">
+                      <a:solidFill>
+                        <a:srgbClr val="8DA9C4"/>
+                      </a:solidFill>
+                      <a:prstDash val="solid"/>
+                      <a:round/>
+                      <a:headEnd type="none" w="med" len="med"/>
+                      <a:tailEnd type="none" w="med" len="med"/>
+                    </a:lnB>
+                  </a:tcPr>
+                </a:tc>
+                <a:tc>
+                  <a:txBody>
+                    <a:bodyPr/>
+                    <a:lstStyle/>
+                    <a:p>
+                      <a:pPr algn="ctr" indent="0" marL="0">
+                        <a:buNone/>
+                      </a:pPr>
+                      <a:r>
+                        <a:rPr lang="en-US" sz="1300" b="1" dirty="0">
+                          <a:solidFill>
+                            <a:srgbClr val="EEA02B"/>
+                          </a:solidFill>
+                        </a:rPr>
+                        <a:t>+0.0075</a:t>
+                      </a:r>
+                      <a:endParaRPr lang="en-US" sz="1300" dirty="0"/>
+                    </a:p>
+                  </a:txBody>
+                  <a:tcPr marL="91440" marR="91440" marT="45720" marB="45720">
+                    <a:lnL w="12700" cap="flat" cmpd="sng" algn="ctr">
+                      <a:solidFill>
+                        <a:srgbClr val="8DA9C4"/>
+                      </a:solidFill>
+                      <a:prstDash val="solid"/>
+                      <a:round/>
+                      <a:headEnd type="none" w="med" len="med"/>
+                      <a:tailEnd type="none" w="med" len="med"/>
+                    </a:lnL>
+                    <a:lnR w="12700" cap="flat" cmpd="sng" algn="ctr">
+                      <a:solidFill>
+                        <a:srgbClr val="8DA9C4"/>
+                      </a:solidFill>
+                      <a:prstDash val="solid"/>
+                      <a:round/>
+                      <a:headEnd type="none" w="med" len="med"/>
+                      <a:tailEnd type="none" w="med" len="med"/>
+                    </a:lnR>
+                    <a:lnT w="12700" cap="flat" cmpd="sng" algn="ctr">
+                      <a:solidFill>
+                        <a:srgbClr val="8DA9C4"/>
+                      </a:solidFill>
+                      <a:prstDash val="solid"/>
+                      <a:round/>
+                      <a:headEnd type="none" w="med" len="med"/>
+                      <a:tailEnd type="none" w="med" len="med"/>
+                    </a:lnT>
+                    <a:lnB w="12700" cap="flat" cmpd="sng" algn="ctr">
+                      <a:solidFill>
+                        <a:srgbClr val="8DA9C4"/>
+                      </a:solidFill>
+                      <a:prstDash val="solid"/>
+                      <a:round/>
+                      <a:headEnd type="none" w="med" len="med"/>
+                      <a:tailEnd type="none" w="med" len="med"/>
+                    </a:lnB>
+                  </a:tcPr>
+                </a:tc>
+                <a:tc>
+                  <a:txBody>
+                    <a:bodyPr/>
+                    <a:lstStyle/>
+                    <a:p>
+                      <a:pPr algn="ctr" indent="0" marL="0">
+                        <a:buNone/>
+                      </a:pPr>
+                      <a:r>
+                        <a:rPr lang="en-US" sz="1300" b="1" dirty="0">
+                          <a:solidFill>
+                            <a:srgbClr val="EEA02B"/>
+                          </a:solidFill>
+                        </a:rPr>
+                        <a:t>&lt; 0.0001</a:t>
+                      </a:r>
+                      <a:endParaRPr lang="en-US" sz="1300" dirty="0"/>
+                    </a:p>
+                  </a:txBody>
+                  <a:tcPr marL="91440" marR="91440" marT="45720" marB="45720">
+                    <a:lnL w="12700" cap="flat" cmpd="sng" algn="ctr">
+                      <a:solidFill>
+                        <a:srgbClr val="8DA9C4"/>
+                      </a:solidFill>
+                      <a:prstDash val="solid"/>
+                      <a:round/>
+                      <a:headEnd type="none" w="med" len="med"/>
+                      <a:tailEnd type="none" w="med" len="med"/>
+                    </a:lnL>
+                    <a:lnR w="12700" cap="flat" cmpd="sng" algn="ctr">
+                      <a:solidFill>
+                        <a:srgbClr val="8DA9C4"/>
+                      </a:solidFill>
+                      <a:prstDash val="solid"/>
+                      <a:round/>
+                      <a:headEnd type="none" w="med" len="med"/>
+                      <a:tailEnd type="none" w="med" len="med"/>
+                    </a:lnR>
+                    <a:lnT w="12700" cap="flat" cmpd="sng" algn="ctr">
+                      <a:solidFill>
+                        <a:srgbClr val="8DA9C4"/>
+                      </a:solidFill>
+                      <a:prstDash val="solid"/>
+                      <a:round/>
+                      <a:headEnd type="none" w="med" len="med"/>
+                      <a:tailEnd type="none" w="med" len="med"/>
+                    </a:lnT>
+                    <a:lnB w="12700" cap="flat" cmpd="sng" algn="ctr">
+                      <a:solidFill>
+                        <a:srgbClr val="8DA9C4"/>
+                      </a:solidFill>
+                      <a:prstDash val="solid"/>
+                      <a:round/>
+                      <a:headEnd type="none" w="med" len="med"/>
+                      <a:tailEnd type="none" w="med" len="med"/>
+                    </a:lnB>
+                  </a:tcPr>
+                </a:tc>
+              </a:tr>
+              <a:tr h="457200">
+                <a:tc>
+                  <a:txBody>
+                    <a:bodyPr/>
+                    <a:lstStyle/>
+                    <a:p>
+                      <a:pPr indent="0" marL="0">
+                        <a:buNone/>
+                      </a:pPr>
+                      <a:r>
+                        <a:rPr lang="en-US" sz="1200" b="1" dirty="0">
+                          <a:solidFill>
+                            <a:srgbClr val="0B2545"/>
+                          </a:solidFill>
+                        </a:rPr>
+                        <a:t>H4 trail ≥10, 3PT</a:t>
+                      </a:r>
+                      <a:endParaRPr lang="en-US" sz="1200" dirty="0"/>
+                    </a:p>
+                  </a:txBody>
+                  <a:tcPr marL="91440" marR="91440" marT="45720" marB="45720">
+                    <a:lnL w="12700" cap="flat" cmpd="sng" algn="ctr">
+                      <a:solidFill>
+                        <a:srgbClr val="8DA9C4"/>
+                      </a:solidFill>
+                      <a:prstDash val="solid"/>
+                      <a:round/>
+                      <a:headEnd type="none" w="med" len="med"/>
+                      <a:tailEnd type="none" w="med" len="med"/>
+                    </a:lnL>
+                    <a:lnR w="12700" cap="flat" cmpd="sng" algn="ctr">
+                      <a:solidFill>
+                        <a:srgbClr val="8DA9C4"/>
+                      </a:solidFill>
+                      <a:prstDash val="solid"/>
+                      <a:round/>
+                      <a:headEnd type="none" w="med" len="med"/>
+                      <a:tailEnd type="none" w="med" len="med"/>
+                    </a:lnR>
+                    <a:lnT w="12700" cap="flat" cmpd="sng" algn="ctr">
+                      <a:solidFill>
+                        <a:srgbClr val="8DA9C4"/>
+                      </a:solidFill>
+                      <a:prstDash val="solid"/>
+                      <a:round/>
+                      <a:headEnd type="none" w="med" len="med"/>
+                      <a:tailEnd type="none" w="med" len="med"/>
+                    </a:lnT>
+                    <a:lnB w="12700" cap="flat" cmpd="sng" algn="ctr">
+                      <a:solidFill>
+                        <a:srgbClr val="8DA9C4"/>
+                      </a:solidFill>
+                      <a:prstDash val="solid"/>
+                      <a:round/>
+                      <a:headEnd type="none" w="med" len="med"/>
+                      <a:tailEnd type="none" w="med" len="med"/>
+                    </a:lnB>
+                  </a:tcPr>
+                </a:tc>
+                <a:tc>
+                  <a:txBody>
+                    <a:bodyPr/>
+                    <a:lstStyle/>
+                    <a:p>
+                      <a:pPr algn="ctr" indent="0" marL="0">
+                        <a:buNone/>
+                      </a:pPr>
+                      <a:r>
+                        <a:rPr lang="en-US" sz="1300" b="1" dirty="0">
+                          <a:solidFill>
+                            <a:srgbClr val="EEA02B"/>
+                          </a:solidFill>
+                        </a:rPr>
+                        <a:t>+0.0138</a:t>
+                      </a:r>
+                      <a:endParaRPr lang="en-US" sz="1300" dirty="0"/>
+                    </a:p>
+                  </a:txBody>
+                  <a:tcPr marL="91440" marR="91440" marT="45720" marB="45720">
+                    <a:lnL w="12700" cap="flat" cmpd="sng" algn="ctr">
+                      <a:solidFill>
+                        <a:srgbClr val="8DA9C4"/>
+                      </a:solidFill>
+                      <a:prstDash val="solid"/>
+                      <a:round/>
+                      <a:headEnd type="none" w="med" len="med"/>
+                      <a:tailEnd type="none" w="med" len="med"/>
+                    </a:lnL>
+                    <a:lnR w="12700" cap="flat" cmpd="sng" algn="ctr">
+                      <a:solidFill>
+                        <a:srgbClr val="8DA9C4"/>
+                      </a:solidFill>
+                      <a:prstDash val="solid"/>
+                      <a:round/>
+                      <a:headEnd type="none" w="med" len="med"/>
+                      <a:tailEnd type="none" w="med" len="med"/>
+                    </a:lnR>
+                    <a:lnT w="12700" cap="flat" cmpd="sng" algn="ctr">
+                      <a:solidFill>
+                        <a:srgbClr val="8DA9C4"/>
+                      </a:solidFill>
+                      <a:prstDash val="solid"/>
+                      <a:round/>
+                      <a:headEnd type="none" w="med" len="med"/>
+                      <a:tailEnd type="none" w="med" len="med"/>
+                    </a:lnT>
+                    <a:lnB w="12700" cap="flat" cmpd="sng" algn="ctr">
+                      <a:solidFill>
+                        <a:srgbClr val="8DA9C4"/>
+                      </a:solidFill>
+                      <a:prstDash val="solid"/>
+                      <a:round/>
+                      <a:headEnd type="none" w="med" len="med"/>
+                      <a:tailEnd type="none" w="med" len="med"/>
+                    </a:lnB>
+                  </a:tcPr>
+                </a:tc>
+                <a:tc>
+                  <a:txBody>
+                    <a:bodyPr/>
+                    <a:lstStyle/>
+                    <a:p>
+                      <a:pPr algn="ctr" indent="0" marL="0">
+                        <a:buNone/>
+                      </a:pPr>
+                      <a:r>
+                        <a:rPr lang="en-US" sz="1300" b="1" dirty="0">
+                          <a:solidFill>
+                            <a:srgbClr val="EEA02B"/>
+                          </a:solidFill>
+                        </a:rPr>
+                        <a:t>&lt; 0.0001</a:t>
+                      </a:r>
+                      <a:endParaRPr lang="en-US" sz="1300" dirty="0"/>
+                    </a:p>
+                  </a:txBody>
+                  <a:tcPr marL="91440" marR="91440" marT="45720" marB="45720">
+                    <a:lnL w="12700" cap="flat" cmpd="sng" algn="ctr">
+                      <a:solidFill>
+                        <a:srgbClr val="8DA9C4"/>
+                      </a:solidFill>
+                      <a:prstDash val="solid"/>
+                      <a:round/>
+                      <a:headEnd type="none" w="med" len="med"/>
+                      <a:tailEnd type="none" w="med" len="med"/>
+                    </a:lnL>
+                    <a:lnR w="12700" cap="flat" cmpd="sng" algn="ctr">
+                      <a:solidFill>
+                        <a:srgbClr val="8DA9C4"/>
+                      </a:solidFill>
+                      <a:prstDash val="solid"/>
+                      <a:round/>
+                      <a:headEnd type="none" w="med" len="med"/>
+                      <a:tailEnd type="none" w="med" len="med"/>
+                    </a:lnR>
+                    <a:lnT w="12700" cap="flat" cmpd="sng" algn="ctr">
+                      <a:solidFill>
+                        <a:srgbClr val="8DA9C4"/>
+                      </a:solidFill>
+                      <a:prstDash val="solid"/>
+                      <a:round/>
+                      <a:headEnd type="none" w="med" len="med"/>
+                      <a:tailEnd type="none" w="med" len="med"/>
+                    </a:lnT>
+                    <a:lnB w="12700" cap="flat" cmpd="sng" algn="ctr">
+                      <a:solidFill>
+                        <a:srgbClr val="8DA9C4"/>
+                      </a:solidFill>
+                      <a:prstDash val="solid"/>
+                      <a:round/>
+                      <a:headEnd type="none" w="med" len="med"/>
+                      <a:tailEnd type="none" w="med" len="med"/>
+                    </a:lnB>
+                  </a:tcPr>
+                </a:tc>
+              </a:tr>
+            </a:tbl>
+          </a:graphicData>
+        </a:graphic>
+      </p:graphicFrame>
+      <p:sp>
+        <p:nvSpPr>
+          <p:cNvPr id="10" name="Text 7"/>
+          <p:cNvSpPr/>
+          <p:nvPr/>
+        </p:nvSpPr>
+        <p:spPr>
+          <a:xfrm>
+            <a:off x="685800" y="4617720"/>
+            <a:ext cx="5120640" cy="320040"/>
+          </a:xfrm>
+          <a:prstGeom prst="rect">
+            <a:avLst/>
+          </a:prstGeom>
+          <a:noFill/>
+          <a:ln/>
+        </p:spPr>
+        <p:txBody>
+          <a:bodyPr wrap="square" rtlCol="0" anchor="ctr"/>
+          <a:lstStyle/>
+          <a:p>
+            <a:pPr indent="0" marL="0">
+              <a:buNone/>
+            </a:pPr>
+            <a:r>
+              <a:rPr lang="en-US" sz="1200" i="1" dirty="0">
+                <a:solidFill>
+                  <a:srgbClr val="13315C"/>
+                </a:solidFill>
+                <a:latin typeface="Calibri" pitchFamily="34" charset="0"/>
+                <a:ea typeface="Calibri" pitchFamily="34" charset="-122"/>
+                <a:cs typeface="Calibri" pitchFamily="34" charset="-120"/>
+              </a:rPr>
+              <a:t>Both pre-registered tests pass on 2024-25 held-out.</a:t>
+            </a:r>
+            <a:endParaRPr lang="en-US" sz="1200" dirty="0"/>
+          </a:p>
+        </p:txBody>
+      </p:sp>
+      <p:sp>
+        <p:nvSpPr>
+          <p:cNvPr id="11" name="Text 8"/>
+          <p:cNvSpPr/>
+          <p:nvPr/>
+        </p:nvSpPr>
+        <p:spPr>
+          <a:xfrm>
+            <a:off x="685800" y="4937760"/>
+            <a:ext cx="5120640" cy="411480"/>
+          </a:xfrm>
+          <a:prstGeom prst="rect">
+            <a:avLst/>
+          </a:prstGeom>
+          <a:noFill/>
+          <a:ln/>
+        </p:spPr>
+        <p:txBody>
+          <a:bodyPr wrap="square" rtlCol="0" anchor="ctr"/>
+          <a:lstStyle/>
+          <a:p>
+            <a:pPr indent="0" marL="0">
+              <a:buNone/>
+            </a:pPr>
+            <a:r>
+              <a:rPr lang="en-US" sz="1200" i="1" dirty="0">
+                <a:solidFill>
+                  <a:srgbClr val="13315C"/>
+                </a:solidFill>
+                <a:latin typeface="Calibri" pitchFamily="34" charset="0"/>
+                <a:ea typeface="Calibri" pitchFamily="34" charset="-122"/>
+                <a:cs typeface="Calibri" pitchFamily="34" charset="-120"/>
+              </a:rPr>
+              <a:t>V2 calibration backs it (Brier 0.149); V1 / V3 / V4 / V6 not powered yet.</a:t>
+            </a:r>
+            <a:endParaRPr lang="en-US" sz="1200" dirty="0"/>
+          </a:p>
+        </p:txBody>
+      </p:sp>
+      <p:sp>
+        <p:nvSpPr>
+          <p:cNvPr id="12" name="Shape 9"/>
+          <p:cNvSpPr/>
+          <p:nvPr/>
+        </p:nvSpPr>
+        <p:spPr>
+          <a:xfrm>
+            <a:off x="685800" y="5486400"/>
+            <a:ext cx="5120640" cy="640080"/>
+          </a:xfrm>
+          <a:prstGeom prst="rect">
+            <a:avLst/>
+          </a:prstGeom>
+          <a:solidFill>
+            <a:srgbClr val="0B2545"/>
+          </a:solidFill>
+          <a:ln w="12700">
+            <a:solidFill>
+              <a:srgbClr val="0B2545"/>
+            </a:solidFill>
+            <a:prstDash val="solid"/>
+          </a:ln>
+        </p:spPr>
+      </p:sp>
+      <p:sp>
+        <p:nvSpPr>
+          <p:cNvPr id="13" name="Text 10"/>
+          <p:cNvSpPr/>
+          <p:nvPr/>
+        </p:nvSpPr>
+        <p:spPr>
+          <a:xfrm>
+            <a:off x="685800" y="5486400"/>
+            <a:ext cx="5120640" cy="640080"/>
+          </a:xfrm>
+          <a:prstGeom prst="rect">
+            <a:avLst/>
+          </a:prstGeom>
+          <a:noFill/>
+          <a:ln/>
+        </p:spPr>
+        <p:txBody>
+          <a:bodyPr wrap="square" rtlCol="0" anchor="ctr"/>
+          <a:lstStyle/>
+          <a:p>
+            <a:pPr algn="ctr" indent="0" marL="0">
+              <a:buNone/>
+            </a:pPr>
+            <a:r>
+              <a:rPr lang="en-US" sz="1500" b="1" i="1" dirty="0">
+                <a:solidFill>
+                  <a:srgbClr val="F6F6F2"/>
+                </a:solidFill>
+                <a:latin typeface="Georgia" pitchFamily="34" charset="0"/>
+                <a:ea typeface="Georgia" pitchFamily="34" charset="-122"/>
+                <a:cs typeface="Georgia" pitchFamily="34" charset="-120"/>
+              </a:rPr>
+              <a:t>The bias is statistically real.</a:t>
+            </a:r>
+            <a:endParaRPr lang="en-US" sz="1500" dirty="0"/>
+          </a:p>
+        </p:txBody>
+      </p:sp>
+      <p:sp>
+        <p:nvSpPr>
+          <p:cNvPr id="14" name="Shape 11"/>
+          <p:cNvSpPr/>
+          <p:nvPr/>
+        </p:nvSpPr>
+        <p:spPr>
+          <a:xfrm>
+            <a:off x="6263640" y="1417320"/>
+            <a:ext cx="5486400" cy="4846320"/>
+          </a:xfrm>
+          <a:prstGeom prst="roundRect">
+            <a:avLst>
+              <a:gd name="adj" fmla="val 1887"/>
+            </a:avLst>
+          </a:prstGeom>
+          <a:solidFill>
+            <a:srgbClr val="F6F6F2"/>
+          </a:solidFill>
+          <a:ln w="19050">
+            <a:solidFill>
+              <a:srgbClr val="EEA02B"/>
+            </a:solidFill>
+            <a:prstDash val="solid"/>
+          </a:ln>
+        </p:spPr>
+      </p:sp>
+      <p:sp>
+        <p:nvSpPr>
+          <p:cNvPr id="15" name="Text 12"/>
+          <p:cNvSpPr/>
+          <p:nvPr/>
+        </p:nvSpPr>
+        <p:spPr>
+          <a:xfrm>
+            <a:off x="6446520" y="1554480"/>
+            <a:ext cx="5120640" cy="365760"/>
+          </a:xfrm>
+          <a:prstGeom prst="rect">
+            <a:avLst/>
+          </a:prstGeom>
+          <a:noFill/>
+          <a:ln/>
+        </p:spPr>
+        <p:txBody>
+          <a:bodyPr wrap="square" rtlCol="0" anchor="ctr"/>
+          <a:lstStyle/>
+          <a:p>
+            <a:pPr indent="0" marL="0">
+              <a:buNone/>
+            </a:pPr>
+            <a:r>
+              <a:rPr lang="en-US" sz="1200" b="1" dirty="0">
+                <a:solidFill>
+                  <a:srgbClr val="13315C"/>
+                </a:solidFill>
+                <a:latin typeface="Calibri" pitchFamily="34" charset="0"/>
+                <a:ea typeface="Calibri" pitchFamily="34" charset="-122"/>
+                <a:cs typeface="Calibri" pitchFamily="34" charset="-120"/>
+              </a:rPr>
+              <a:t>CAN IT MAKE MONEY?</a:t>
+            </a:r>
+            <a:endParaRPr lang="en-US" sz="1200" dirty="0"/>
+          </a:p>
+        </p:txBody>
+      </p:sp>
+      <p:sp>
+        <p:nvSpPr>
+          <p:cNvPr id="16" name="Text 13"/>
+          <p:cNvSpPr/>
+          <p:nvPr/>
+        </p:nvSpPr>
+        <p:spPr>
+          <a:xfrm>
+            <a:off x="6446520" y="1920240"/>
+            <a:ext cx="5120640" cy="502920"/>
+          </a:xfrm>
+          <a:prstGeom prst="rect">
+            <a:avLst/>
+          </a:prstGeom>
+          <a:noFill/>
+          <a:ln/>
+        </p:spPr>
+        <p:txBody>
+          <a:bodyPr wrap="square" rtlCol="0" anchor="ctr"/>
+          <a:lstStyle/>
+          <a:p>
+            <a:pPr indent="0" marL="0">
+              <a:buNone/>
+            </a:pPr>
+            <a:r>
+              <a:rPr lang="en-US" sz="2000" b="1" dirty="0">
+                <a:solidFill>
+                  <a:srgbClr val="0B2545"/>
+                </a:solidFill>
+                <a:latin typeface="Georgia" pitchFamily="34" charset="0"/>
+                <a:ea typeface="Georgia" pitchFamily="34" charset="-122"/>
+                <a:cs typeface="Georgia" pitchFamily="34" charset="-120"/>
+              </a:rPr>
+              <a:t>Not yet — but it's not 'no.'</a:t>
+            </a:r>
+            <a:endParaRPr lang="en-US" sz="2000" dirty="0"/>
+          </a:p>
+        </p:txBody>
+      </p:sp>
+      <p:sp>
+        <p:nvSpPr>
+          <p:cNvPr id="17" name="Shape 14"/>
+          <p:cNvSpPr/>
+          <p:nvPr/>
+        </p:nvSpPr>
+        <p:spPr>
+          <a:xfrm>
+            <a:off x="6446520" y="2606040"/>
+            <a:ext cx="164592" cy="777240"/>
+          </a:xfrm>
+          <a:prstGeom prst="rect">
             <a:avLst/>
           </a:prstGeom>
           <a:solidFill>
@@ -4279,14 +5238,323 @@
       </p:sp>
       <p:sp>
         <p:nvSpPr>
-          <p:cNvPr id="6" name="Text 4"/>
-          <p:cNvSpPr/>
-          <p:nvPr/>
-        </p:nvSpPr>
-        <p:spPr>
-          <a:xfrm>
-            <a:off x="502920" y="1572768"/>
-            <a:ext cx="457200" cy="457200"/>
+          <p:cNvPr id="18" name="Text 15"/>
+          <p:cNvSpPr/>
+          <p:nvPr/>
+        </p:nvSpPr>
+        <p:spPr>
+          <a:xfrm>
+            <a:off x="6675120" y="2606040"/>
+            <a:ext cx="4846320" cy="274320"/>
+          </a:xfrm>
+          <a:prstGeom prst="rect">
+            <a:avLst/>
+          </a:prstGeom>
+          <a:noFill/>
+          <a:ln/>
+        </p:spPr>
+        <p:txBody>
+          <a:bodyPr wrap="square" rtlCol="0" anchor="ctr"/>
+          <a:lstStyle/>
+          <a:p>
+            <a:pPr indent="0" marL="0">
+              <a:buNone/>
+            </a:pPr>
+            <a:r>
+              <a:rPr lang="en-US" sz="1100" b="1" dirty="0">
+                <a:solidFill>
+                  <a:srgbClr val="EEA02B"/>
+                </a:solidFill>
+                <a:latin typeface="Calibri" pitchFamily="34" charset="0"/>
+                <a:ea typeface="Calibri" pitchFamily="34" charset="-122"/>
+                <a:cs typeface="Calibri" pitchFamily="34" charset="-120"/>
+              </a:rPr>
+              <a:t>TODAY · NO</a:t>
+            </a:r>
+            <a:endParaRPr lang="en-US" sz="1100" dirty="0"/>
+          </a:p>
+        </p:txBody>
+      </p:sp>
+      <p:sp>
+        <p:nvSpPr>
+          <p:cNvPr id="19" name="Text 16"/>
+          <p:cNvSpPr/>
+          <p:nvPr/>
+        </p:nvSpPr>
+        <p:spPr>
+          <a:xfrm>
+            <a:off x="6675120" y="2880360"/>
+            <a:ext cx="4846320" cy="548640"/>
+          </a:xfrm>
+          <a:prstGeom prst="rect">
+            <a:avLst/>
+          </a:prstGeom>
+          <a:noFill/>
+          <a:ln/>
+        </p:spPr>
+        <p:txBody>
+          <a:bodyPr wrap="square" rtlCol="0" anchor="ctr"/>
+          <a:lstStyle/>
+          <a:p>
+            <a:pPr indent="0" marL="0">
+              <a:buNone/>
+            </a:pPr>
+            <a:r>
+              <a:rPr lang="en-US" sz="1200" dirty="0">
+                <a:solidFill>
+                  <a:srgbClr val="1A1A1A"/>
+                </a:solidFill>
+                <a:latin typeface="Calibri" pitchFamily="34" charset="0"/>
+                <a:ea typeface="Calibri" pitchFamily="34" charset="-122"/>
+                <a:cs typeface="Calibri" pitchFamily="34" charset="-120"/>
+              </a:rPr>
+              <a:t>Live game vs liquid books: n=1 → −40% (noise). Kalshi +95% = stale-mid artifact.</a:t>
+            </a:r>
+            <a:endParaRPr lang="en-US" sz="1200" dirty="0"/>
+          </a:p>
+        </p:txBody>
+      </p:sp>
+      <p:sp>
+        <p:nvSpPr>
+          <p:cNvPr id="20" name="Shape 17"/>
+          <p:cNvSpPr/>
+          <p:nvPr/>
+        </p:nvSpPr>
+        <p:spPr>
+          <a:xfrm>
+            <a:off x="6446520" y="3474720"/>
+            <a:ext cx="164592" cy="777240"/>
+          </a:xfrm>
+          <a:prstGeom prst="rect">
+            <a:avLst/>
+          </a:prstGeom>
+          <a:solidFill>
+            <a:srgbClr val="0B2545"/>
+          </a:solidFill>
+          <a:ln w="12700">
+            <a:solidFill>
+              <a:srgbClr val="0B2545"/>
+            </a:solidFill>
+            <a:prstDash val="solid"/>
+          </a:ln>
+        </p:spPr>
+      </p:sp>
+      <p:sp>
+        <p:nvSpPr>
+          <p:cNvPr id="21" name="Text 18"/>
+          <p:cNvSpPr/>
+          <p:nvPr/>
+        </p:nvSpPr>
+        <p:spPr>
+          <a:xfrm>
+            <a:off x="6675120" y="3474720"/>
+            <a:ext cx="4846320" cy="274320"/>
+          </a:xfrm>
+          <a:prstGeom prst="rect">
+            <a:avLst/>
+          </a:prstGeom>
+          <a:noFill/>
+          <a:ln/>
+        </p:spPr>
+        <p:txBody>
+          <a:bodyPr wrap="square" rtlCol="0" anchor="ctr"/>
+          <a:lstStyle/>
+          <a:p>
+            <a:pPr indent="0" marL="0">
+              <a:buNone/>
+            </a:pPr>
+            <a:r>
+              <a:rPr lang="en-US" sz="1100" b="1" dirty="0">
+                <a:solidFill>
+                  <a:srgbClr val="0B2545"/>
+                </a:solidFill>
+                <a:latin typeface="Calibri" pitchFamily="34" charset="0"/>
+                <a:ea typeface="Calibri" pitchFamily="34" charset="-122"/>
+                <a:cs typeface="Calibri" pitchFamily="34" charset="-120"/>
+              </a:rPr>
+              <a:t>BIAS · YES</a:t>
+            </a:r>
+            <a:endParaRPr lang="en-US" sz="1100" dirty="0"/>
+          </a:p>
+        </p:txBody>
+      </p:sp>
+      <p:sp>
+        <p:nvSpPr>
+          <p:cNvPr id="22" name="Text 19"/>
+          <p:cNvSpPr/>
+          <p:nvPr/>
+        </p:nvSpPr>
+        <p:spPr>
+          <a:xfrm>
+            <a:off x="6675120" y="3749040"/>
+            <a:ext cx="4846320" cy="548640"/>
+          </a:xfrm>
+          <a:prstGeom prst="rect">
+            <a:avLst/>
+          </a:prstGeom>
+          <a:noFill/>
+          <a:ln/>
+        </p:spPr>
+        <p:txBody>
+          <a:bodyPr wrap="square" rtlCol="0" anchor="ctr"/>
+          <a:lstStyle/>
+          <a:p>
+            <a:pPr indent="0" marL="0">
+              <a:buNone/>
+            </a:pPr>
+            <a:r>
+              <a:rPr lang="en-US" sz="1200" dirty="0">
+                <a:solidFill>
+                  <a:srgbClr val="1A1A1A"/>
+                </a:solidFill>
+                <a:latin typeface="Calibri" pitchFamily="34" charset="0"/>
+                <a:ea typeface="Calibri" pitchFamily="34" charset="-122"/>
+                <a:cs typeface="Calibri" pitchFamily="34" charset="-120"/>
+              </a:rPr>
+              <a:t>V5 H1/H4 pre-reg passed on the held-out season. The overreaction is real.</a:t>
+            </a:r>
+            <a:endParaRPr lang="en-US" sz="1200" dirty="0"/>
+          </a:p>
+        </p:txBody>
+      </p:sp>
+      <p:sp>
+        <p:nvSpPr>
+          <p:cNvPr id="23" name="Shape 20"/>
+          <p:cNvSpPr/>
+          <p:nvPr/>
+        </p:nvSpPr>
+        <p:spPr>
+          <a:xfrm>
+            <a:off x="6446520" y="4343400"/>
+            <a:ext cx="164592" cy="777240"/>
+          </a:xfrm>
+          <a:prstGeom prst="rect">
+            <a:avLst/>
+          </a:prstGeom>
+          <a:solidFill>
+            <a:srgbClr val="1C7293"/>
+          </a:solidFill>
+          <a:ln w="12700">
+            <a:solidFill>
+              <a:srgbClr val="1C7293"/>
+            </a:solidFill>
+            <a:prstDash val="solid"/>
+          </a:ln>
+        </p:spPr>
+      </p:sp>
+      <p:sp>
+        <p:nvSpPr>
+          <p:cNvPr id="24" name="Text 21"/>
+          <p:cNvSpPr/>
+          <p:nvPr/>
+        </p:nvSpPr>
+        <p:spPr>
+          <a:xfrm>
+            <a:off x="6675120" y="4343400"/>
+            <a:ext cx="4846320" cy="274320"/>
+          </a:xfrm>
+          <a:prstGeom prst="rect">
+            <a:avLst/>
+          </a:prstGeom>
+          <a:noFill/>
+          <a:ln/>
+        </p:spPr>
+        <p:txBody>
+          <a:bodyPr wrap="square" rtlCol="0" anchor="ctr"/>
+          <a:lstStyle/>
+          <a:p>
+            <a:pPr indent="0" marL="0">
+              <a:buNone/>
+            </a:pPr>
+            <a:r>
+              <a:rPr lang="en-US" sz="1100" b="1" dirty="0">
+                <a:solidFill>
+                  <a:srgbClr val="1C7293"/>
+                </a:solidFill>
+                <a:latin typeface="Calibri" pitchFamily="34" charset="0"/>
+                <a:ea typeface="Calibri" pitchFamily="34" charset="-122"/>
+                <a:cs typeface="Calibri" pitchFamily="34" charset="-120"/>
+              </a:rPr>
+              <a:t>PATH · CLEAR</a:t>
+            </a:r>
+            <a:endParaRPr lang="en-US" sz="1100" dirty="0"/>
+          </a:p>
+        </p:txBody>
+      </p:sp>
+      <p:sp>
+        <p:nvSpPr>
+          <p:cNvPr id="25" name="Text 22"/>
+          <p:cNvSpPr/>
+          <p:nvPr/>
+        </p:nvSpPr>
+        <p:spPr>
+          <a:xfrm>
+            <a:off x="6675120" y="4617720"/>
+            <a:ext cx="4846320" cy="548640"/>
+          </a:xfrm>
+          <a:prstGeom prst="rect">
+            <a:avLst/>
+          </a:prstGeom>
+          <a:noFill/>
+          <a:ln/>
+        </p:spPr>
+        <p:txBody>
+          <a:bodyPr wrap="square" rtlCol="0" anchor="ctr"/>
+          <a:lstStyle/>
+          <a:p>
+            <a:pPr indent="0" marL="0">
+              <a:buNone/>
+            </a:pPr>
+            <a:r>
+              <a:rPr lang="en-US" sz="1200" dirty="0">
+                <a:solidFill>
+                  <a:srgbClr val="1A1A1A"/>
+                </a:solidFill>
+                <a:latin typeface="Calibri" pitchFamily="34" charset="0"/>
+                <a:ea typeface="Calibri" pitchFamily="34" charset="-122"/>
+                <a:cs typeface="Calibri" pitchFamily="34" charset="-120"/>
+              </a:rPr>
+              <a:t>Power the backtest ($59 historical) → V5-targeted strategy on Kalshi (legal, no limits).</a:t>
+            </a:r>
+            <a:endParaRPr lang="en-US" sz="1200" dirty="0"/>
+          </a:p>
+        </p:txBody>
+      </p:sp>
+      <p:sp>
+        <p:nvSpPr>
+          <p:cNvPr id="26" name="Shape 23"/>
+          <p:cNvSpPr/>
+          <p:nvPr/>
+        </p:nvSpPr>
+        <p:spPr>
+          <a:xfrm>
+            <a:off x="6446520" y="5486400"/>
+            <a:ext cx="5120640" cy="640080"/>
+          </a:xfrm>
+          <a:prstGeom prst="rect">
+            <a:avLst/>
+          </a:prstGeom>
+          <a:solidFill>
+            <a:srgbClr val="0B2545"/>
+          </a:solidFill>
+          <a:ln w="12700">
+            <a:solidFill>
+              <a:srgbClr val="0B2545"/>
+            </a:solidFill>
+            <a:prstDash val="solid"/>
+          </a:ln>
+        </p:spPr>
+      </p:sp>
+      <p:sp>
+        <p:nvSpPr>
+          <p:cNvPr id="27" name="Text 24"/>
+          <p:cNvSpPr/>
+          <p:nvPr/>
+        </p:nvSpPr>
+        <p:spPr>
+          <a:xfrm>
+            <a:off x="6446520" y="5486400"/>
+            <a:ext cx="5120640" cy="640080"/>
           </a:xfrm>
           <a:prstGeom prst="rect">
             <a:avLst/>
@@ -4302,69 +5570,69 @@
               <a:buNone/>
             </a:pPr>
             <a:r>
-              <a:rPr lang="en-US" sz="1600" b="1" dirty="0">
-                <a:solidFill>
-                  <a:srgbClr val="0B2545"/>
+              <a:rPr lang="en-US" sz="1500" b="1" i="1" dirty="0">
+                <a:solidFill>
+                  <a:srgbClr val="F6F6F2"/>
                 </a:solidFill>
                 <a:latin typeface="Georgia" pitchFamily="34" charset="0"/>
                 <a:ea typeface="Georgia" pitchFamily="34" charset="-122"/>
                 <a:cs typeface="Georgia" pitchFamily="34" charset="-120"/>
               </a:rPr>
-              <a:t>1</a:t>
-            </a:r>
-            <a:endParaRPr lang="en-US" sz="1600" dirty="0"/>
-          </a:p>
-        </p:txBody>
-      </p:sp>
-      <p:sp>
-        <p:nvSpPr>
-          <p:cNvPr id="7" name="Text 5"/>
-          <p:cNvSpPr/>
-          <p:nvPr/>
-        </p:nvSpPr>
-        <p:spPr>
-          <a:xfrm>
-            <a:off x="1143000" y="1508760"/>
-            <a:ext cx="10972800" cy="411480"/>
-          </a:xfrm>
-          <a:prstGeom prst="rect">
-            <a:avLst/>
-          </a:prstGeom>
-          <a:noFill/>
-          <a:ln/>
-        </p:spPr>
-        <p:txBody>
-          <a:bodyPr wrap="square" rtlCol="0" anchor="ctr"/>
-          <a:lstStyle/>
-          <a:p>
-            <a:pPr indent="0" marL="0">
-              <a:buNone/>
-            </a:pPr>
-            <a:r>
-              <a:rPr lang="en-US" sz="1700" b="1" dirty="0">
-                <a:solidFill>
-                  <a:srgbClr val="0B2545"/>
+              <a:t>Gated on data scale, not on methodology.</a:t>
+            </a:r>
+            <a:endParaRPr lang="en-US" sz="1500" dirty="0"/>
+          </a:p>
+        </p:txBody>
+      </p:sp>
+      <p:sp>
+        <p:nvSpPr>
+          <p:cNvPr id="28" name="Text 25"/>
+          <p:cNvSpPr/>
+          <p:nvPr/>
+        </p:nvSpPr>
+        <p:spPr>
+          <a:xfrm>
+            <a:off x="502920" y="6355080"/>
+            <a:ext cx="11247120" cy="365760"/>
+          </a:xfrm>
+          <a:prstGeom prst="rect">
+            <a:avLst/>
+          </a:prstGeom>
+          <a:noFill/>
+          <a:ln/>
+        </p:spPr>
+        <p:txBody>
+          <a:bodyPr wrap="square" rtlCol="0" anchor="ctr"/>
+          <a:lstStyle/>
+          <a:p>
+            <a:pPr algn="ctr" indent="0" marL="0">
+              <a:buNone/>
+            </a:pPr>
+            <a:r>
+              <a:rPr lang="en-US" sz="1800" b="1" i="1" dirty="0">
+                <a:solidFill>
+                  <a:srgbClr val="1C7293"/>
                 </a:solidFill>
                 <a:latin typeface="Georgia" pitchFamily="34" charset="0"/>
                 <a:ea typeface="Georgia" pitchFamily="34" charset="-122"/>
                 <a:cs typeface="Georgia" pitchFamily="34" charset="-120"/>
               </a:rPr>
-              <a:t>Calibrated WP model</a:t>
-            </a:r>
-            <a:endParaRPr lang="en-US" sz="1700" dirty="0"/>
-          </a:p>
-        </p:txBody>
-      </p:sp>
-      <p:sp>
-        <p:nvSpPr>
-          <p:cNvPr id="8" name="Text 6"/>
-          <p:cNvSpPr/>
-          <p:nvPr/>
-        </p:nvSpPr>
-        <p:spPr>
-          <a:xfrm>
-            <a:off x="1143000" y="1920240"/>
-            <a:ext cx="10972800" cy="548640"/>
+              <a:t>Thank you. Questions?</a:t>
+            </a:r>
+            <a:endParaRPr lang="en-US" sz="1800" dirty="0"/>
+          </a:p>
+        </p:txBody>
+      </p:sp>
+      <p:sp>
+        <p:nvSpPr>
+          <p:cNvPr id="29" name="Text 26"/>
+          <p:cNvSpPr/>
+          <p:nvPr/>
+        </p:nvSpPr>
+        <p:spPr>
+          <a:xfrm>
+            <a:off x="502920" y="6492240"/>
+            <a:ext cx="7315200" cy="274320"/>
           </a:xfrm>
           <a:prstGeom prst="rect">
             <a:avLst/>
@@ -4380,660 +5648,14 @@
               <a:buNone/>
             </a:pPr>
             <a:r>
-              <a:rPr lang="en-US" sz="1400" dirty="0">
-                <a:solidFill>
-                  <a:srgbClr val="1A1A1A"/>
+              <a:rPr lang="en-US" sz="1000" dirty="0">
+                <a:solidFill>
+                  <a:srgbClr val="8DA9C4"/>
                 </a:solidFill>
                 <a:latin typeface="Calibri" pitchFamily="34" charset="0"/>
                 <a:ea typeface="Calibri" pitchFamily="34" charset="-122"/>
                 <a:cs typeface="Calibri" pitchFamily="34" charset="-120"/>
               </a:rPr>
-              <a:t>Brier 0.149 OOS · ECE 0.008 — simple, defensible artifact.</a:t>
-            </a:r>
-            <a:endParaRPr lang="en-US" sz="1400" dirty="0"/>
-          </a:p>
-        </p:txBody>
-      </p:sp>
-      <p:sp>
-        <p:nvSpPr>
-          <p:cNvPr id="9" name="Shape 7"/>
-          <p:cNvSpPr/>
-          <p:nvPr/>
-        </p:nvSpPr>
-        <p:spPr>
-          <a:xfrm>
-            <a:off x="502920" y="2514600"/>
-            <a:ext cx="457200" cy="457200"/>
-          </a:xfrm>
-          <a:prstGeom prst="ellipse">
-            <a:avLst/>
-          </a:prstGeom>
-          <a:solidFill>
-            <a:srgbClr val="EEA02B"/>
-          </a:solidFill>
-          <a:ln w="12700">
-            <a:solidFill>
-              <a:srgbClr val="EEA02B"/>
-            </a:solidFill>
-            <a:prstDash val="solid"/>
-          </a:ln>
-        </p:spPr>
-      </p:sp>
-      <p:sp>
-        <p:nvSpPr>
-          <p:cNvPr id="10" name="Text 8"/>
-          <p:cNvSpPr/>
-          <p:nvPr/>
-        </p:nvSpPr>
-        <p:spPr>
-          <a:xfrm>
-            <a:off x="502920" y="2532888"/>
-            <a:ext cx="457200" cy="457200"/>
-          </a:xfrm>
-          <a:prstGeom prst="rect">
-            <a:avLst/>
-          </a:prstGeom>
-          <a:noFill/>
-          <a:ln/>
-        </p:spPr>
-        <p:txBody>
-          <a:bodyPr wrap="square" rtlCol="0" anchor="ctr"/>
-          <a:lstStyle/>
-          <a:p>
-            <a:pPr algn="ctr" indent="0" marL="0">
-              <a:buNone/>
-            </a:pPr>
-            <a:r>
-              <a:rPr lang="en-US" sz="1600" b="1" dirty="0">
-                <a:solidFill>
-                  <a:srgbClr val="0B2545"/>
-                </a:solidFill>
-                <a:latin typeface="Georgia" pitchFamily="34" charset="0"/>
-                <a:ea typeface="Georgia" pitchFamily="34" charset="-122"/>
-                <a:cs typeface="Georgia" pitchFamily="34" charset="-120"/>
-              </a:rPr>
-              <a:t>2</a:t>
-            </a:r>
-            <a:endParaRPr lang="en-US" sz="1600" dirty="0"/>
-          </a:p>
-        </p:txBody>
-      </p:sp>
-      <p:sp>
-        <p:nvSpPr>
-          <p:cNvPr id="11" name="Text 9"/>
-          <p:cNvSpPr/>
-          <p:nvPr/>
-        </p:nvSpPr>
-        <p:spPr>
-          <a:xfrm>
-            <a:off x="1143000" y="2468880"/>
-            <a:ext cx="10972800" cy="411480"/>
-          </a:xfrm>
-          <a:prstGeom prst="rect">
-            <a:avLst/>
-          </a:prstGeom>
-          <a:noFill/>
-          <a:ln/>
-        </p:spPr>
-        <p:txBody>
-          <a:bodyPr wrap="square" rtlCol="0" anchor="ctr"/>
-          <a:lstStyle/>
-          <a:p>
-            <a:pPr indent="0" marL="0">
-              <a:buNone/>
-            </a:pPr>
-            <a:r>
-              <a:rPr lang="en-US" sz="1700" b="1" dirty="0">
-                <a:solidFill>
-                  <a:srgbClr val="0B2545"/>
-                </a:solidFill>
-                <a:latin typeface="Georgia" pitchFamily="34" charset="0"/>
-                <a:ea typeface="Georgia" pitchFamily="34" charset="-122"/>
-                <a:cs typeface="Georgia" pitchFamily="34" charset="-120"/>
-              </a:rPr>
-              <a:t>Pre-registered behavioral test passed</a:t>
-            </a:r>
-            <a:endParaRPr lang="en-US" sz="1700" dirty="0"/>
-          </a:p>
-        </p:txBody>
-      </p:sp>
-      <p:sp>
-        <p:nvSpPr>
-          <p:cNvPr id="12" name="Text 10"/>
-          <p:cNvSpPr/>
-          <p:nvPr/>
-        </p:nvSpPr>
-        <p:spPr>
-          <a:xfrm>
-            <a:off x="1143000" y="2880360"/>
-            <a:ext cx="10972800" cy="548640"/>
-          </a:xfrm>
-          <a:prstGeom prst="rect">
-            <a:avLst/>
-          </a:prstGeom>
-          <a:noFill/>
-          <a:ln/>
-        </p:spPr>
-        <p:txBody>
-          <a:bodyPr wrap="square" rtlCol="0" anchor="ctr"/>
-          <a:lstStyle/>
-          <a:p>
-            <a:pPr indent="0" marL="0">
-              <a:buNone/>
-            </a:pPr>
-            <a:r>
-              <a:rPr lang="en-US" sz="1400" dirty="0">
-                <a:solidFill>
-                  <a:srgbClr val="1A1A1A"/>
-                </a:solidFill>
-                <a:latin typeface="Calibri" pitchFamily="34" charset="0"/>
-                <a:ea typeface="Calibri" pitchFamily="34" charset="-122"/>
-                <a:cs typeface="Calibri" pitchFamily="34" charset="-120"/>
-              </a:rPr>
-              <a:t>Trailing-team overreaction is real on the held-out season (p &lt; 0.0001).</a:t>
-            </a:r>
-            <a:endParaRPr lang="en-US" sz="1400" dirty="0"/>
-          </a:p>
-        </p:txBody>
-      </p:sp>
-      <p:sp>
-        <p:nvSpPr>
-          <p:cNvPr id="13" name="Shape 11"/>
-          <p:cNvSpPr/>
-          <p:nvPr/>
-        </p:nvSpPr>
-        <p:spPr>
-          <a:xfrm>
-            <a:off x="502920" y="3474720"/>
-            <a:ext cx="457200" cy="457200"/>
-          </a:xfrm>
-          <a:prstGeom prst="ellipse">
-            <a:avLst/>
-          </a:prstGeom>
-          <a:solidFill>
-            <a:srgbClr val="EEA02B"/>
-          </a:solidFill>
-          <a:ln w="12700">
-            <a:solidFill>
-              <a:srgbClr val="EEA02B"/>
-            </a:solidFill>
-            <a:prstDash val="solid"/>
-          </a:ln>
-        </p:spPr>
-      </p:sp>
-      <p:sp>
-        <p:nvSpPr>
-          <p:cNvPr id="14" name="Text 12"/>
-          <p:cNvSpPr/>
-          <p:nvPr/>
-        </p:nvSpPr>
-        <p:spPr>
-          <a:xfrm>
-            <a:off x="502920" y="3493008"/>
-            <a:ext cx="457200" cy="457200"/>
-          </a:xfrm>
-          <a:prstGeom prst="rect">
-            <a:avLst/>
-          </a:prstGeom>
-          <a:noFill/>
-          <a:ln/>
-        </p:spPr>
-        <p:txBody>
-          <a:bodyPr wrap="square" rtlCol="0" anchor="ctr"/>
-          <a:lstStyle/>
-          <a:p>
-            <a:pPr algn="ctr" indent="0" marL="0">
-              <a:buNone/>
-            </a:pPr>
-            <a:r>
-              <a:rPr lang="en-US" sz="1600" b="1" dirty="0">
-                <a:solidFill>
-                  <a:srgbClr val="0B2545"/>
-                </a:solidFill>
-                <a:latin typeface="Georgia" pitchFamily="34" charset="0"/>
-                <a:ea typeface="Georgia" pitchFamily="34" charset="-122"/>
-                <a:cs typeface="Georgia" pitchFamily="34" charset="-120"/>
-              </a:rPr>
-              <a:t>3</a:t>
-            </a:r>
-            <a:endParaRPr lang="en-US" sz="1600" dirty="0"/>
-          </a:p>
-        </p:txBody>
-      </p:sp>
-      <p:sp>
-        <p:nvSpPr>
-          <p:cNvPr id="15" name="Text 13"/>
-          <p:cNvSpPr/>
-          <p:nvPr/>
-        </p:nvSpPr>
-        <p:spPr>
-          <a:xfrm>
-            <a:off x="1143000" y="3429000"/>
-            <a:ext cx="10972800" cy="411480"/>
-          </a:xfrm>
-          <a:prstGeom prst="rect">
-            <a:avLst/>
-          </a:prstGeom>
-          <a:noFill/>
-          <a:ln/>
-        </p:spPr>
-        <p:txBody>
-          <a:bodyPr wrap="square" rtlCol="0" anchor="ctr"/>
-          <a:lstStyle/>
-          <a:p>
-            <a:pPr indent="0" marL="0">
-              <a:buNone/>
-            </a:pPr>
-            <a:r>
-              <a:rPr lang="en-US" sz="1700" b="1" dirty="0">
-                <a:solidFill>
-                  <a:srgbClr val="0B2545"/>
-                </a:solidFill>
-                <a:latin typeface="Georgia" pitchFamily="34" charset="0"/>
-                <a:ea typeface="Georgia" pitchFamily="34" charset="-122"/>
-                <a:cs typeface="Georgia" pitchFamily="34" charset="-120"/>
-              </a:rPr>
-              <a:t>Full pipeline runs end-to-end on real data</a:t>
-            </a:r>
-            <a:endParaRPr lang="en-US" sz="1700" dirty="0"/>
-          </a:p>
-        </p:txBody>
-      </p:sp>
-      <p:sp>
-        <p:nvSpPr>
-          <p:cNvPr id="16" name="Text 14"/>
-          <p:cNvSpPr/>
-          <p:nvPr/>
-        </p:nvSpPr>
-        <p:spPr>
-          <a:xfrm>
-            <a:off x="1143000" y="3840480"/>
-            <a:ext cx="10972800" cy="548640"/>
-          </a:xfrm>
-          <a:prstGeom prst="rect">
-            <a:avLst/>
-          </a:prstGeom>
-          <a:noFill/>
-          <a:ln/>
-        </p:spPr>
-        <p:txBody>
-          <a:bodyPr wrap="square" rtlCol="0" anchor="ctr"/>
-          <a:lstStyle/>
-          <a:p>
-            <a:pPr indent="0" marL="0">
-              <a:buNone/>
-            </a:pPr>
-            <a:r>
-              <a:rPr lang="en-US" sz="1400" dirty="0">
-                <a:solidFill>
-                  <a:srgbClr val="1A1A1A"/>
-                </a:solidFill>
-                <a:latin typeface="Calibri" pitchFamily="34" charset="0"/>
-                <a:ea typeface="Calibri" pitchFamily="34" charset="-122"/>
-                <a:cs typeface="Calibri" pitchFamily="34" charset="-120"/>
-              </a:rPr>
-              <a:t>model → de-vig → edge → Kelly → settle → bootstrap. 5/5 honesty gates.</a:t>
-            </a:r>
-            <a:endParaRPr lang="en-US" sz="1400" dirty="0"/>
-          </a:p>
-        </p:txBody>
-      </p:sp>
-      <p:sp>
-        <p:nvSpPr>
-          <p:cNvPr id="17" name="Shape 15"/>
-          <p:cNvSpPr/>
-          <p:nvPr/>
-        </p:nvSpPr>
-        <p:spPr>
-          <a:xfrm>
-            <a:off x="502920" y="4434840"/>
-            <a:ext cx="457200" cy="457200"/>
-          </a:xfrm>
-          <a:prstGeom prst="ellipse">
-            <a:avLst/>
-          </a:prstGeom>
-          <a:solidFill>
-            <a:srgbClr val="EEA02B"/>
-          </a:solidFill>
-          <a:ln w="12700">
-            <a:solidFill>
-              <a:srgbClr val="EEA02B"/>
-            </a:solidFill>
-            <a:prstDash val="solid"/>
-          </a:ln>
-        </p:spPr>
-      </p:sp>
-      <p:sp>
-        <p:nvSpPr>
-          <p:cNvPr id="18" name="Text 16"/>
-          <p:cNvSpPr/>
-          <p:nvPr/>
-        </p:nvSpPr>
-        <p:spPr>
-          <a:xfrm>
-            <a:off x="502920" y="4453128"/>
-            <a:ext cx="457200" cy="457200"/>
-          </a:xfrm>
-          <a:prstGeom prst="rect">
-            <a:avLst/>
-          </a:prstGeom>
-          <a:noFill/>
-          <a:ln/>
-        </p:spPr>
-        <p:txBody>
-          <a:bodyPr wrap="square" rtlCol="0" anchor="ctr"/>
-          <a:lstStyle/>
-          <a:p>
-            <a:pPr algn="ctr" indent="0" marL="0">
-              <a:buNone/>
-            </a:pPr>
-            <a:r>
-              <a:rPr lang="en-US" sz="1600" b="1" dirty="0">
-                <a:solidFill>
-                  <a:srgbClr val="0B2545"/>
-                </a:solidFill>
-                <a:latin typeface="Georgia" pitchFamily="34" charset="0"/>
-                <a:ea typeface="Georgia" pitchFamily="34" charset="-122"/>
-                <a:cs typeface="Georgia" pitchFamily="34" charset="-120"/>
-              </a:rPr>
-              <a:t>4</a:t>
-            </a:r>
-            <a:endParaRPr lang="en-US" sz="1600" dirty="0"/>
-          </a:p>
-        </p:txBody>
-      </p:sp>
-      <p:sp>
-        <p:nvSpPr>
-          <p:cNvPr id="19" name="Text 17"/>
-          <p:cNvSpPr/>
-          <p:nvPr/>
-        </p:nvSpPr>
-        <p:spPr>
-          <a:xfrm>
-            <a:off x="1143000" y="4389120"/>
-            <a:ext cx="10972800" cy="411480"/>
-          </a:xfrm>
-          <a:prstGeom prst="rect">
-            <a:avLst/>
-          </a:prstGeom>
-          <a:noFill/>
-          <a:ln/>
-        </p:spPr>
-        <p:txBody>
-          <a:bodyPr wrap="square" rtlCol="0" anchor="ctr"/>
-          <a:lstStyle/>
-          <a:p>
-            <a:pPr indent="0" marL="0">
-              <a:buNone/>
-            </a:pPr>
-            <a:r>
-              <a:rPr lang="en-US" sz="1700" b="1" dirty="0">
-                <a:solidFill>
-                  <a:srgbClr val="0B2545"/>
-                </a:solidFill>
-                <a:latin typeface="Georgia" pitchFamily="34" charset="0"/>
-                <a:ea typeface="Georgia" pitchFamily="34" charset="-122"/>
-                <a:cs typeface="Georgia" pitchFamily="34" charset="-120"/>
-              </a:rPr>
-              <a:t>The honest backtest answer</a:t>
-            </a:r>
-            <a:endParaRPr lang="en-US" sz="1700" dirty="0"/>
-          </a:p>
-        </p:txBody>
-      </p:sp>
-      <p:sp>
-        <p:nvSpPr>
-          <p:cNvPr id="20" name="Text 18"/>
-          <p:cNvSpPr/>
-          <p:nvPr/>
-        </p:nvSpPr>
-        <p:spPr>
-          <a:xfrm>
-            <a:off x="1143000" y="4800600"/>
-            <a:ext cx="10972800" cy="548640"/>
-          </a:xfrm>
-          <a:prstGeom prst="rect">
-            <a:avLst/>
-          </a:prstGeom>
-          <a:noFill/>
-          <a:ln/>
-        </p:spPr>
-        <p:txBody>
-          <a:bodyPr wrap="square" rtlCol="0" anchor="ctr"/>
-          <a:lstStyle/>
-          <a:p>
-            <a:pPr indent="0" marL="0">
-              <a:buNone/>
-            </a:pPr>
-            <a:r>
-              <a:rPr lang="en-US" sz="1400" dirty="0">
-                <a:solidFill>
-                  <a:srgbClr val="1A1A1A"/>
-                </a:solidFill>
-                <a:latin typeface="Calibri" pitchFamily="34" charset="0"/>
-                <a:ea typeface="Calibri" pitchFamily="34" charset="-122"/>
-                <a:cs typeface="Calibri" pitchFamily="34" charset="-120"/>
-              </a:rPr>
-              <a:t>Pipeline ready · scale gates the trustworthy P&amp;L (n=1 lesson made tangible).</a:t>
-            </a:r>
-            <a:endParaRPr lang="en-US" sz="1400" dirty="0"/>
-          </a:p>
-        </p:txBody>
-      </p:sp>
-      <p:sp>
-        <p:nvSpPr>
-          <p:cNvPr id="21" name="Shape 19"/>
-          <p:cNvSpPr/>
-          <p:nvPr/>
-        </p:nvSpPr>
-        <p:spPr>
-          <a:xfrm>
-            <a:off x="502920" y="5394960"/>
-            <a:ext cx="457200" cy="457200"/>
-          </a:xfrm>
-          <a:prstGeom prst="ellipse">
-            <a:avLst/>
-          </a:prstGeom>
-          <a:solidFill>
-            <a:srgbClr val="EEA02B"/>
-          </a:solidFill>
-          <a:ln w="12700">
-            <a:solidFill>
-              <a:srgbClr val="EEA02B"/>
-            </a:solidFill>
-            <a:prstDash val="solid"/>
-          </a:ln>
-        </p:spPr>
-      </p:sp>
-      <p:sp>
-        <p:nvSpPr>
-          <p:cNvPr id="22" name="Text 20"/>
-          <p:cNvSpPr/>
-          <p:nvPr/>
-        </p:nvSpPr>
-        <p:spPr>
-          <a:xfrm>
-            <a:off x="502920" y="5413248"/>
-            <a:ext cx="457200" cy="457200"/>
-          </a:xfrm>
-          <a:prstGeom prst="rect">
-            <a:avLst/>
-          </a:prstGeom>
-          <a:noFill/>
-          <a:ln/>
-        </p:spPr>
-        <p:txBody>
-          <a:bodyPr wrap="square" rtlCol="0" anchor="ctr"/>
-          <a:lstStyle/>
-          <a:p>
-            <a:pPr algn="ctr" indent="0" marL="0">
-              <a:buNone/>
-            </a:pPr>
-            <a:r>
-              <a:rPr lang="en-US" sz="1600" b="1" dirty="0">
-                <a:solidFill>
-                  <a:srgbClr val="0B2545"/>
-                </a:solidFill>
-                <a:latin typeface="Georgia" pitchFamily="34" charset="0"/>
-                <a:ea typeface="Georgia" pitchFamily="34" charset="-122"/>
-                <a:cs typeface="Georgia" pitchFamily="34" charset="-120"/>
-              </a:rPr>
-              <a:t>5</a:t>
-            </a:r>
-            <a:endParaRPr lang="en-US" sz="1600" dirty="0"/>
-          </a:p>
-        </p:txBody>
-      </p:sp>
-      <p:sp>
-        <p:nvSpPr>
-          <p:cNvPr id="23" name="Text 21"/>
-          <p:cNvSpPr/>
-          <p:nvPr/>
-        </p:nvSpPr>
-        <p:spPr>
-          <a:xfrm>
-            <a:off x="1143000" y="5349240"/>
-            <a:ext cx="10972800" cy="411480"/>
-          </a:xfrm>
-          <a:prstGeom prst="rect">
-            <a:avLst/>
-          </a:prstGeom>
-          <a:noFill/>
-          <a:ln/>
-        </p:spPr>
-        <p:txBody>
-          <a:bodyPr wrap="square" rtlCol="0" anchor="ctr"/>
-          <a:lstStyle/>
-          <a:p>
-            <a:pPr indent="0" marL="0">
-              <a:buNone/>
-            </a:pPr>
-            <a:r>
-              <a:rPr lang="en-US" sz="1700" b="1" dirty="0">
-                <a:solidFill>
-                  <a:srgbClr val="0B2545"/>
-                </a:solidFill>
-                <a:latin typeface="Georgia" pitchFamily="34" charset="0"/>
-                <a:ea typeface="Georgia" pitchFamily="34" charset="-122"/>
-                <a:cs typeface="Georgia" pitchFamily="34" charset="-120"/>
-              </a:rPr>
-              <a:t>Halawi-tied story</a:t>
-            </a:r>
-            <a:endParaRPr lang="en-US" sz="1700" dirty="0"/>
-          </a:p>
-        </p:txBody>
-      </p:sp>
-      <p:sp>
-        <p:nvSpPr>
-          <p:cNvPr id="24" name="Text 22"/>
-          <p:cNvSpPr/>
-          <p:nvPr/>
-        </p:nvSpPr>
-        <p:spPr>
-          <a:xfrm>
-            <a:off x="1143000" y="5760720"/>
-            <a:ext cx="10972800" cy="548640"/>
-          </a:xfrm>
-          <a:prstGeom prst="rect">
-            <a:avLst/>
-          </a:prstGeom>
-          <a:noFill/>
-          <a:ln/>
-        </p:spPr>
-        <p:txBody>
-          <a:bodyPr wrap="square" rtlCol="0" anchor="ctr"/>
-          <a:lstStyle/>
-          <a:p>
-            <a:pPr indent="0" marL="0">
-              <a:buNone/>
-            </a:pPr>
-            <a:r>
-              <a:rPr lang="en-US" sz="1400" dirty="0">
-                <a:solidFill>
-                  <a:srgbClr val="1A1A1A"/>
-                </a:solidFill>
-                <a:latin typeface="Calibri" pitchFamily="34" charset="0"/>
-                <a:ea typeface="Calibri" pitchFamily="34" charset="-122"/>
-                <a:cs typeface="Calibri" pitchFamily="34" charset="-120"/>
-              </a:rPr>
-              <a:t>Model and crowd are complementary error sources — not competing oracles.</a:t>
-            </a:r>
-            <a:endParaRPr lang="en-US" sz="1400" dirty="0"/>
-          </a:p>
-        </p:txBody>
-      </p:sp>
-      <p:sp>
-        <p:nvSpPr>
-          <p:cNvPr id="25" name="Text 23"/>
-          <p:cNvSpPr/>
-          <p:nvPr/>
-        </p:nvSpPr>
-        <p:spPr>
-          <a:xfrm>
-            <a:off x="502920" y="6309360"/>
-            <a:ext cx="11247120" cy="411480"/>
-          </a:xfrm>
-          <a:prstGeom prst="rect">
-            <a:avLst/>
-          </a:prstGeom>
-          <a:noFill/>
-          <a:ln/>
-        </p:spPr>
-        <p:txBody>
-          <a:bodyPr wrap="square" rtlCol="0" anchor="ctr"/>
-          <a:lstStyle/>
-          <a:p>
-            <a:pPr algn="ctr" indent="0" marL="0">
-              <a:buNone/>
-            </a:pPr>
-            <a:r>
-              <a:rPr lang="en-US" sz="2000" b="1" i="1" dirty="0">
-                <a:solidFill>
-                  <a:srgbClr val="1C7293"/>
-                </a:solidFill>
-                <a:latin typeface="Georgia" pitchFamily="34" charset="0"/>
-                <a:ea typeface="Georgia" pitchFamily="34" charset="-122"/>
-                <a:cs typeface="Georgia" pitchFamily="34" charset="-120"/>
-              </a:rPr>
-              <a:t>Thank you. Questions?</a:t>
-            </a:r>
-            <a:endParaRPr lang="en-US" sz="2000" dirty="0"/>
-          </a:p>
-        </p:txBody>
-      </p:sp>
-      <p:sp>
-        <p:nvSpPr>
-          <p:cNvPr id="26" name="Text 24"/>
-          <p:cNvSpPr/>
-          <p:nvPr/>
-        </p:nvSpPr>
-        <p:spPr>
-          <a:xfrm>
-            <a:off x="502920" y="6492240"/>
-            <a:ext cx="7315200" cy="274320"/>
-          </a:xfrm>
-          <a:prstGeom prst="rect">
-            <a:avLst/>
-          </a:prstGeom>
-          <a:noFill/>
-          <a:ln/>
-        </p:spPr>
-        <p:txBody>
-          <a:bodyPr wrap="square" rtlCol="0" anchor="ctr"/>
-          <a:lstStyle/>
-          <a:p>
-            <a:pPr indent="0" marL="0">
-              <a:buNone/>
-            </a:pPr>
-            <a:r>
-              <a:rPr lang="en-US" sz="1000" dirty="0">
-                <a:solidFill>
-                  <a:srgbClr val="8DA9C4"/>
-                </a:solidFill>
-                <a:latin typeface="Calibri" pitchFamily="34" charset="0"/>
-                <a:ea typeface="Calibri" pitchFamily="34" charset="-122"/>
-                <a:cs typeface="Calibri" pitchFamily="34" charset="-120"/>
-              </a:rPr>
               <a:t>STATS 211 · NBA Mispricing · Sit &amp; Manathattai</a:t>
             </a:r>
             <a:endParaRPr lang="en-US" sz="1000" dirty="0"/>
@@ -5042,7 +5664,7 @@
       </p:sp>
       <p:sp>
         <p:nvSpPr>
-          <p:cNvPr id="27" name="Text 25"/>
+          <p:cNvPr id="30" name="Text 27"/>
           <p:cNvSpPr/>
           <p:nvPr/>
         </p:nvSpPr>
@@ -8701,7 +9323,7 @@
                 <a:ea typeface="Calibri" pitchFamily="34" charset="-122"/>
                 <a:cs typeface="Calibri" pitchFamily="34" charset="-120"/>
               </a:rPr>
-              <a:t>Why simple is right for a 3-page paper:</a:t>
+              <a:t>Why we kept it simple:</a:t>
             </a:r>
             <a:endParaRPr lang="en-US" sz="1400" dirty="0"/>
           </a:p>
@@ -8740,7 +9362,7 @@
                 <a:ea typeface="Calibri" pitchFamily="34" charset="-122"/>
                 <a:cs typeface="Calibri" pitchFamily="34" charset="-120"/>
               </a:rPr>
-              <a:t>Every choice defensible. No overfitting story. Brier-comparable to published NBA in-game WP models (Bashuk; Lopez &amp; Matthews).</a:t>
+              <a:t>Every choice defensible. No overfitting. Brier-comparable to published NBA in-game WP models (Bashuk; Lopez &amp; Matthews).</a:t>
             </a:r>
             <a:endParaRPr lang="en-US" sz="1500" dirty="0"/>
           </a:p>

--- a/slides/final_deck.pptx
+++ b/slides/final_deck.pptx
@@ -2777,7 +2777,7 @@
                 <a:ea typeface="Georgia" pitchFamily="34" charset="-122"/>
                 <a:cs typeface="Georgia" pitchFamily="34" charset="-120"/>
               </a:rPr>
-              <a:t>Liquidity × sample size are everything</a:t>
+              <a:t>Game 6 pilot · OKC @ SAS, 2026-05-28  (FINAL SAS 118–91)</a:t>
             </a:r>
             <a:endParaRPr lang="en-US" sz="2800" dirty="0"/>
           </a:p>
@@ -2816,7 +2816,7 @@
                 <a:ea typeface="Calibri" pitchFamily="34" charset="-122"/>
                 <a:cs typeface="Calibri" pitchFamily="34" charset="-120"/>
               </a:rPr>
-              <a:t>Same model family · two opposite results</a:t>
+              <a:t>61 in-1H ticks on Kalshi · the 5-game pool tells the rest of the story</a:t>
             </a:r>
             <a:endParaRPr lang="en-US" sz="1400" dirty="0"/>
           </a:p>
@@ -2847,7 +2847,7 @@
       </p:sp>
       <p:pic>
         <p:nvPicPr>
-          <p:cNvPr id="5" name="Image 0" descr="slides/figures/liquidity_sample.png">    </p:cNvPr>
+          <p:cNvPr id="5" name="Image 0" descr="slides/figures/game6_pilot.png">    </p:cNvPr>
           <p:cNvPicPr>
             <a:picLocks noChangeAspect="1"/>
           </p:cNvPicPr>
@@ -2861,8 +2861,8 @@
         </p:blipFill>
         <p:spPr>
           <a:xfrm>
-            <a:off x="2468880" y="1417320"/>
-            <a:ext cx="7315200" cy="4572000"/>
+            <a:off x="1554480" y="1371600"/>
+            <a:ext cx="9052560" cy="4206240"/>
           </a:xfrm>
           <a:prstGeom prst="rect">
             <a:avLst/>
@@ -2877,12 +2877,12 @@
         </p:nvSpPr>
         <p:spPr>
           <a:xfrm>
-            <a:off x="502920" y="5943600"/>
-            <a:ext cx="11247120" cy="640080"/>
+            <a:off x="502920" y="5669280"/>
+            <a:ext cx="11247120" cy="914400"/>
           </a:xfrm>
           <a:prstGeom prst="roundRect">
             <a:avLst>
-              <a:gd name="adj" fmla="val 11429"/>
+              <a:gd name="adj" fmla="val 8000"/>
             </a:avLst>
           </a:prstGeom>
           <a:solidFill>
@@ -2904,60 +2904,88 @@
         </p:nvSpPr>
         <p:spPr>
           <a:xfrm>
-            <a:off x="777240" y="5989320"/>
-            <a:ext cx="10698480" cy="548640"/>
-          </a:xfrm>
-          <a:prstGeom prst="rect">
-            <a:avLst/>
-          </a:prstGeom>
-          <a:noFill/>
-          <a:ln/>
-        </p:spPr>
-        <p:txBody>
-          <a:bodyPr wrap="square" rtlCol="0" anchor="ctr"/>
-          <a:lstStyle/>
-          <a:p>
-            <a:pPr algn="ctr" indent="0" marL="0">
-              <a:buNone/>
-            </a:pPr>
-            <a:r>
-              <a:rPr lang="en-US" sz="1300" dirty="0">
-                <a:solidFill>
-                  <a:srgbClr val="1A1A1A"/>
+            <a:off x="777240" y="5760720"/>
+            <a:ext cx="10698480" cy="777240"/>
+          </a:xfrm>
+          <a:prstGeom prst="rect">
+            <a:avLst/>
+          </a:prstGeom>
+          <a:noFill/>
+          <a:ln/>
+        </p:spPr>
+        <p:txBody>
+          <a:bodyPr wrap="square" rtlCol="0" anchor="ctr"/>
+          <a:lstStyle/>
+          <a:p>
+            <a:pPr indent="0" marL="0">
+              <a:buNone/>
+            </a:pPr>
+            <a:r>
+              <a:rPr lang="en-US" sz="1300" b="1" dirty="0">
+                <a:solidFill>
+                  <a:srgbClr val="0B2545"/>
                 </a:solidFill>
                 <a:latin typeface="Calibri" pitchFamily="34" charset="0"/>
                 <a:ea typeface="Calibri" pitchFamily="34" charset="-122"/>
                 <a:cs typeface="Calibri" pitchFamily="34" charset="-120"/>
               </a:rPr>
-              <a:t>The +100% against Kalshi is </a:t>
-            </a:r>
-            <a:pPr algn="ctr" indent="0" marL="0">
-              <a:buNone/>
-            </a:pPr>
-            <a:r>
-              <a:rPr lang="en-US" sz="1300" b="1" dirty="0">
-                <a:solidFill>
-                  <a:srgbClr val="0B2545"/>
+              <a:t>Game 6 alone: </a:t>
+            </a:r>
+            <a:pPr indent="0" marL="0">
+              <a:buNone/>
+            </a:pPr>
+            <a:r>
+              <a:rPr lang="en-US" sz="1300" dirty="0">
+                <a:solidFill>
+                  <a:srgbClr val="1A1A1A"/>
                 </a:solidFill>
                 <a:latin typeface="Calibri" pitchFamily="34" charset="0"/>
                 <a:ea typeface="Calibri" pitchFamily="34" charset="-122"/>
                 <a:cs typeface="Calibri" pitchFamily="34" charset="-120"/>
               </a:rPr>
-              <a:t>stale mid-prices + n=4 + no slippage</a:t>
-            </a:r>
-            <a:pPr algn="ctr" indent="0" marL="0">
-              <a:buNone/>
-            </a:pPr>
-            <a:r>
-              <a:rPr lang="en-US" sz="1300" dirty="0">
-                <a:solidFill>
-                  <a:srgbClr val="1A1A1A"/>
+              <a:t>model +12% on Kalshi 1H (smallest of the 5). </a:t>
+            </a:r>
+            <a:pPr indent="0" marL="0">
+              <a:buNone/>
+            </a:pPr>
+            <a:r>
+              <a:rPr lang="en-US" sz="1300" b="1" dirty="0">
+                <a:solidFill>
+                  <a:srgbClr val="EEA02B"/>
                 </a:solidFill>
                 <a:latin typeface="Calibri" pitchFamily="34" charset="0"/>
                 <a:ea typeface="Calibri" pitchFamily="34" charset="-122"/>
                 <a:cs typeface="Calibri" pitchFamily="34" charset="-120"/>
               </a:rPr>
-              <a:t> — exactly the trap CLAUDE.md warns about. Real liquid markets are tight.</a:t>
+              <a:t>Pool of 5: +95%. </a:t>
+            </a:r>
+            <a:pPr indent="0" marL="0">
+              <a:buNone/>
+            </a:pPr>
+            <a:r>
+              <a:rPr lang="en-US" sz="1300" dirty="0">
+                <a:solidFill>
+                  <a:srgbClr val="1A1A1A"/>
+                </a:solidFill>
+                <a:latin typeface="Calibri" pitchFamily="34" charset="0"/>
+                <a:ea typeface="Calibri" pitchFamily="34" charset="-122"/>
+                <a:cs typeface="Calibri" pitchFamily="34" charset="-120"/>
+              </a:rPr>
+              <a:t>But Kalshi 1H prices were thin and stale, so the model 'beats' a price that isn't moving — </a:t>
+            </a:r>
+            <a:pPr indent="0" marL="0">
+              <a:buNone/>
+            </a:pPr>
+            <a:r>
+              <a:rPr lang="en-US" sz="1300" i="1" dirty="0">
+                <a:solidFill>
+                  <a:srgbClr val="13315C"/>
+                </a:solidFill>
+                <a:latin typeface="Calibri" pitchFamily="34" charset="0"/>
+                <a:ea typeface="Calibri" pitchFamily="34" charset="-122"/>
+                <a:cs typeface="Calibri" pitchFamily="34" charset="-120"/>
+              </a:rPr>
+              <a:t>stale-mid + n=5 + mid quotes = artifact, not edge.</a:t>
             </a:r>
             <a:endParaRPr lang="en-US" sz="1300" dirty="0"/>
           </a:p>
@@ -3512,7 +3540,7 @@
                 <a:ea typeface="Calibri" pitchFamily="34" charset="-122"/>
                 <a:cs typeface="Calibri" pitchFamily="34" charset="-120"/>
               </a:rPr>
-              <a:t>The model's job isn't to BEAT the market everywhere — it's to COMPLEMENT it in the specific situations where the crowd's bias is strongest (H1 / H4).</a:t>
+              <a:t>The model's job isn't to BEAT the market everywhere — it's to COMPLEMENT it in the specific situations (comeback FG, salience 3PT) where the crowd's bias is strongest.</a:t>
             </a:r>
             <a:endParaRPr lang="en-US" sz="1500" dirty="0"/>
           </a:p>
@@ -4623,7 +4651,7 @@
                             <a:srgbClr val="0B2545"/>
                           </a:solidFill>
                         </a:rPr>
-                        <a:t>H1 trail 10–15, FG</a:t>
+                        <a:t>Comeback FG (trail 10–15)</a:t>
                       </a:r>
                       <a:endParaRPr lang="en-US" sz="1200" dirty="0"/>
                     </a:p>
@@ -4799,7 +4827,7 @@
                             <a:srgbClr val="0B2545"/>
                           </a:solidFill>
                         </a:rPr>
-                        <a:t>H4 trail ≥10, 3PT</a:t>
+                        <a:t>Salience 3PT (trail ≥10)</a:t>
                       </a:r>
                       <a:endParaRPr lang="en-US" sz="1200" dirty="0"/>
                     </a:p>
@@ -5411,7 +5439,7 @@
                 <a:ea typeface="Calibri" pitchFamily="34" charset="-122"/>
                 <a:cs typeface="Calibri" pitchFamily="34" charset="-120"/>
               </a:rPr>
-              <a:t>V5 H1/H4 pre-reg passed on the held-out season. The overreaction is real.</a:t>
+              <a:t>Both pre-registered tests passed on the held-out season. The overreaction is real.</a:t>
             </a:r>
             <a:endParaRPr lang="en-US" sz="1200" dirty="0"/>
           </a:p>
@@ -6297,7 +6325,7 @@
                 <a:ea typeface="Calibri" pitchFamily="34" charset="-122"/>
                 <a:cs typeface="Calibri" pitchFamily="34" charset="-120"/>
               </a:rPr>
-              <a:t>Pre-registered before any test-set data was touched</a:t>
+              <a:t>One question, two sub-questions</a:t>
             </a:r>
             <a:endParaRPr lang="en-US" sz="1400" dirty="0"/>
           </a:p>
@@ -6334,7 +6362,7 @@
         </p:nvSpPr>
         <p:spPr>
           <a:xfrm>
-            <a:off x="502920" y="1508760"/>
+            <a:off x="502920" y="1463040"/>
             <a:ext cx="11247120" cy="1691640"/>
           </a:xfrm>
           <a:prstGeom prst="roundRect">
@@ -6345,7 +6373,7 @@
           <a:solidFill>
             <a:srgbClr val="F6F6F2"/>
           </a:solidFill>
-          <a:ln w="19050">
+          <a:ln w="22860">
             <a:solidFill>
               <a:srgbClr val="1C7293"/>
             </a:solidFill>
@@ -6362,7 +6390,7 @@
         <p:spPr>
           <a:xfrm>
             <a:off x="777240" y="1691640"/>
-            <a:ext cx="10698480" cy="1371600"/>
+            <a:ext cx="10698480" cy="1280160"/>
           </a:xfrm>
           <a:prstGeom prst="rect">
             <a:avLst/>
@@ -6378,7 +6406,7 @@
               <a:buNone/>
             </a:pPr>
             <a:r>
-              <a:rPr lang="en-US" sz="2000" i="1" dirty="0">
+              <a:rPr lang="en-US" sz="2200" i="1" dirty="0">
                 <a:solidFill>
                   <a:srgbClr val="0B2545"/>
                 </a:solidFill>
@@ -6386,9 +6414,65 @@
                 <a:ea typeface="Georgia" pitchFamily="34" charset="-122"/>
                 <a:cs typeface="Georgia" pitchFamily="34" charset="-120"/>
               </a:rPr>
-              <a:t>Can a calibrated in-game NBA win-probability model systematically identify live-market mispricings driven by crowd overreaction — specifically in trailing-team scoring events?</a:t>
-            </a:r>
-            <a:endParaRPr lang="en-US" sz="2000" dirty="0"/>
+              <a:t>Can we use a calibrated win-probability model to </a:t>
+            </a:r>
+            <a:pPr indent="0" marL="0">
+              <a:buNone/>
+            </a:pPr>
+            <a:r>
+              <a:rPr lang="en-US" sz="2200" b="1" i="1" dirty="0">
+                <a:solidFill>
+                  <a:srgbClr val="0B2545"/>
+                </a:solidFill>
+                <a:latin typeface="Georgia" pitchFamily="34" charset="0"/>
+                <a:ea typeface="Georgia" pitchFamily="34" charset="-122"/>
+                <a:cs typeface="Georgia" pitchFamily="34" charset="-120"/>
+              </a:rPr>
+              <a:t>detect mispricing</a:t>
+            </a:r>
+            <a:pPr indent="0" marL="0">
+              <a:buNone/>
+            </a:pPr>
+            <a:r>
+              <a:rPr lang="en-US" sz="2200" i="1" dirty="0">
+                <a:solidFill>
+                  <a:srgbClr val="0B2545"/>
+                </a:solidFill>
+                <a:latin typeface="Georgia" pitchFamily="34" charset="0"/>
+                <a:ea typeface="Georgia" pitchFamily="34" charset="-122"/>
+                <a:cs typeface="Georgia" pitchFamily="34" charset="-120"/>
+              </a:rPr>
+              <a:t> and </a:t>
+            </a:r>
+            <a:pPr indent="0" marL="0">
+              <a:buNone/>
+            </a:pPr>
+            <a:r>
+              <a:rPr lang="en-US" sz="2200" b="1" i="1" dirty="0">
+                <a:solidFill>
+                  <a:srgbClr val="EEA02B"/>
+                </a:solidFill>
+                <a:latin typeface="Georgia" pitchFamily="34" charset="0"/>
+                <a:ea typeface="Georgia" pitchFamily="34" charset="-122"/>
+                <a:cs typeface="Georgia" pitchFamily="34" charset="-120"/>
+              </a:rPr>
+              <a:t>profit from it</a:t>
+            </a:r>
+            <a:pPr indent="0" marL="0">
+              <a:buNone/>
+            </a:pPr>
+            <a:r>
+              <a:rPr lang="en-US" sz="2200" i="1" dirty="0">
+                <a:solidFill>
+                  <a:srgbClr val="0B2545"/>
+                </a:solidFill>
+                <a:latin typeface="Georgia" pitchFamily="34" charset="0"/>
+                <a:ea typeface="Georgia" pitchFamily="34" charset="-122"/>
+                <a:cs typeface="Georgia" pitchFamily="34" charset="-120"/>
+              </a:rPr>
+              <a:t> in NBA in-play markets?</a:t>
+            </a:r>
+            <a:endParaRPr lang="en-US" sz="2200" dirty="0"/>
           </a:p>
         </p:txBody>
       </p:sp>
@@ -6400,7 +6484,7 @@
         </p:nvSpPr>
         <p:spPr>
           <a:xfrm>
-            <a:off x="502920" y="3520440"/>
+            <a:off x="502920" y="3383280"/>
             <a:ext cx="11247120" cy="365760"/>
           </a:xfrm>
           <a:prstGeom prst="rect">
@@ -6413,11 +6497,11 @@
           <a:bodyPr wrap="square" rtlCol="0" anchor="ctr"/>
           <a:lstStyle/>
           <a:p>
-            <a:pPr indent="0" marL="0">
-              <a:buNone/>
-            </a:pPr>
-            <a:r>
-              <a:rPr lang="en-US" sz="1600" b="1" dirty="0">
+            <a:pPr algn="ctr" indent="0" marL="0">
+              <a:buNone/>
+            </a:pPr>
+            <a:r>
+              <a:rPr lang="en-US" sz="1400" b="1" i="1" dirty="0">
                 <a:solidFill>
                   <a:srgbClr val="13315C"/>
                 </a:solidFill>
@@ -6425,22 +6509,49 @@
                 <a:ea typeface="Calibri" pitchFamily="34" charset="-122"/>
                 <a:cs typeface="Calibri" pitchFamily="34" charset="-120"/>
               </a:rPr>
-              <a:t>Two pre-registered tests:</a:t>
-            </a:r>
-            <a:endParaRPr lang="en-US" sz="1600" dirty="0"/>
-          </a:p>
-        </p:txBody>
-      </p:sp>
-      <p:sp>
-        <p:nvSpPr>
-          <p:cNvPr id="8" name="Text 6"/>
-          <p:cNvSpPr/>
-          <p:nvPr/>
-        </p:nvSpPr>
-        <p:spPr>
-          <a:xfrm>
-            <a:off x="777240" y="3977640"/>
-            <a:ext cx="10972800" cy="640080"/>
+              <a:t>Decomposes into two sub-questions we can actually answer:</a:t>
+            </a:r>
+            <a:endParaRPr lang="en-US" sz="1400" dirty="0"/>
+          </a:p>
+        </p:txBody>
+      </p:sp>
+      <p:sp>
+        <p:nvSpPr>
+          <p:cNvPr id="8" name="Shape 6"/>
+          <p:cNvSpPr/>
+          <p:nvPr/>
+        </p:nvSpPr>
+        <p:spPr>
+          <a:xfrm>
+            <a:off x="502920" y="3840480"/>
+            <a:ext cx="5486400" cy="2377440"/>
+          </a:xfrm>
+          <a:prstGeom prst="roundRect">
+            <a:avLst>
+              <a:gd name="adj" fmla="val 3846"/>
+            </a:avLst>
+          </a:prstGeom>
+          <a:solidFill>
+            <a:srgbClr val="EEF3F8"/>
+          </a:solidFill>
+          <a:ln w="19050">
+            <a:solidFill>
+              <a:srgbClr val="0B2545"/>
+            </a:solidFill>
+            <a:prstDash val="solid"/>
+          </a:ln>
+        </p:spPr>
+      </p:sp>
+      <p:sp>
+        <p:nvSpPr>
+          <p:cNvPr id="9" name="Text 7"/>
+          <p:cNvSpPr/>
+          <p:nvPr/>
+        </p:nvSpPr>
+        <p:spPr>
+          <a:xfrm>
+            <a:off x="685800" y="3931920"/>
+            <a:ext cx="5120640" cy="320040"/>
           </a:xfrm>
           <a:prstGeom prst="rect">
             <a:avLst/>
@@ -6456,21 +6567,85 @@
               <a:buNone/>
             </a:pPr>
             <a:r>
-              <a:rPr lang="en-US" sz="1600" b="1" dirty="0">
-                <a:solidFill>
-                  <a:srgbClr val="EEA02B"/>
+              <a:rPr lang="en-US" sz="1100" b="1" dirty="0">
+                <a:solidFill>
+                  <a:srgbClr val="13315C"/>
                 </a:solidFill>
                 <a:latin typeface="Calibri" pitchFamily="34" charset="0"/>
                 <a:ea typeface="Calibri" pitchFamily="34" charset="-122"/>
                 <a:cs typeface="Calibri" pitchFamily="34" charset="-120"/>
               </a:rPr>
-              <a:t>H1 (primary)</a:t>
-            </a:r>
+              <a:t>SUB-QUESTION 1</a:t>
+            </a:r>
+            <a:endParaRPr lang="en-US" sz="1100" dirty="0"/>
+          </a:p>
+        </p:txBody>
+      </p:sp>
+      <p:sp>
+        <p:nvSpPr>
+          <p:cNvPr id="10" name="Text 8"/>
+          <p:cNvSpPr/>
+          <p:nvPr/>
+        </p:nvSpPr>
+        <p:spPr>
+          <a:xfrm>
+            <a:off x="685800" y="4206240"/>
+            <a:ext cx="5120640" cy="457200"/>
+          </a:xfrm>
+          <a:prstGeom prst="rect">
+            <a:avLst/>
+          </a:prstGeom>
+          <a:noFill/>
+          <a:ln/>
+        </p:spPr>
+        <p:txBody>
+          <a:bodyPr wrap="square" rtlCol="0" anchor="ctr"/>
+          <a:lstStyle/>
+          <a:p>
             <a:pPr indent="0" marL="0">
               <a:buNone/>
             </a:pPr>
             <a:r>
-              <a:rPr lang="en-US" sz="1600" dirty="0">
+              <a:rPr lang="en-US" sz="1900" b="1" dirty="0">
+                <a:solidFill>
+                  <a:srgbClr val="0B2545"/>
+                </a:solidFill>
+                <a:latin typeface="Georgia" pitchFamily="34" charset="0"/>
+                <a:ea typeface="Georgia" pitchFamily="34" charset="-122"/>
+                <a:cs typeface="Georgia" pitchFamily="34" charset="-120"/>
+              </a:rPr>
+              <a:t>Is the bias DETECTABLE?</a:t>
+            </a:r>
+            <a:endParaRPr lang="en-US" sz="1900" dirty="0"/>
+          </a:p>
+        </p:txBody>
+      </p:sp>
+      <p:sp>
+        <p:nvSpPr>
+          <p:cNvPr id="11" name="Text 9"/>
+          <p:cNvSpPr/>
+          <p:nvPr/>
+        </p:nvSpPr>
+        <p:spPr>
+          <a:xfrm>
+            <a:off x="685800" y="4709160"/>
+            <a:ext cx="5120640" cy="960120"/>
+          </a:xfrm>
+          <a:prstGeom prst="rect">
+            <a:avLst/>
+          </a:prstGeom>
+          <a:noFill/>
+          <a:ln/>
+        </p:spPr>
+        <p:txBody>
+          <a:bodyPr wrap="square" rtlCol="0" anchor="ctr"/>
+          <a:lstStyle/>
+          <a:p>
+            <a:pPr indent="0" marL="0">
+              <a:buNone/>
+            </a:pPr>
+            <a:r>
+              <a:rPr lang="en-US" sz="1300" dirty="0">
                 <a:solidFill>
                   <a:srgbClr val="1A1A1A"/>
                 </a:solidFill>
@@ -6478,22 +6653,22 @@
                 <a:ea typeface="Calibri" pitchFamily="34" charset="-122"/>
                 <a:cs typeface="Calibri" pitchFamily="34" charset="-120"/>
               </a:rPr>
-              <a:t> — trailing team in 10–15 pt deficit hits a made FG → market over-shifts vs structural model.</a:t>
-            </a:r>
-            <a:endParaRPr lang="en-US" sz="1600" dirty="0"/>
-          </a:p>
-        </p:txBody>
-      </p:sp>
-      <p:sp>
-        <p:nvSpPr>
-          <p:cNvPr id="9" name="Text 7"/>
-          <p:cNvSpPr/>
-          <p:nvPr/>
-        </p:nvSpPr>
-        <p:spPr>
-          <a:xfrm>
-            <a:off x="777240" y="4617720"/>
-            <a:ext cx="10972800" cy="640080"/>
+              <a:t>Tested on the held-out 2024-25 season via pre-registered overreaction tests on trailing-team scoring events.</a:t>
+            </a:r>
+            <a:endParaRPr lang="en-US" sz="1300" dirty="0"/>
+          </a:p>
+        </p:txBody>
+      </p:sp>
+      <p:sp>
+        <p:nvSpPr>
+          <p:cNvPr id="12" name="Text 10"/>
+          <p:cNvSpPr/>
+          <p:nvPr/>
+        </p:nvSpPr>
+        <p:spPr>
+          <a:xfrm>
+            <a:off x="685800" y="5760720"/>
+            <a:ext cx="5120640" cy="320040"/>
           </a:xfrm>
           <a:prstGeom prst="rect">
             <a:avLst/>
@@ -6509,44 +6684,96 @@
               <a:buNone/>
             </a:pPr>
             <a:r>
-              <a:rPr lang="en-US" sz="1600" b="1" dirty="0">
-                <a:solidFill>
-                  <a:srgbClr val="EEA02B"/>
+              <a:rPr lang="en-US" sz="1100" i="1" dirty="0">
+                <a:solidFill>
+                  <a:srgbClr val="1C7293"/>
                 </a:solidFill>
                 <a:latin typeface="Calibri" pitchFamily="34" charset="0"/>
                 <a:ea typeface="Calibri" pitchFamily="34" charset="-122"/>
                 <a:cs typeface="Calibri" pitchFamily="34" charset="-120"/>
               </a:rPr>
-              <a:t>H4 (secondary)</a:t>
-            </a:r>
+              <a:t>→ answered on the overreaction-test slide</a:t>
+            </a:r>
+            <a:endParaRPr lang="en-US" sz="1100" dirty="0"/>
+          </a:p>
+        </p:txBody>
+      </p:sp>
+      <p:sp>
+        <p:nvSpPr>
+          <p:cNvPr id="13" name="Shape 11"/>
+          <p:cNvSpPr/>
+          <p:nvPr/>
+        </p:nvSpPr>
+        <p:spPr>
+          <a:xfrm>
+            <a:off x="6263640" y="3840480"/>
+            <a:ext cx="5486400" cy="2377440"/>
+          </a:xfrm>
+          <a:prstGeom prst="roundRect">
+            <a:avLst>
+              <a:gd name="adj" fmla="val 3846"/>
+            </a:avLst>
+          </a:prstGeom>
+          <a:solidFill>
+            <a:srgbClr val="EEF3F8"/>
+          </a:solidFill>
+          <a:ln w="19050">
+            <a:solidFill>
+              <a:srgbClr val="EEA02B"/>
+            </a:solidFill>
+            <a:prstDash val="solid"/>
+          </a:ln>
+        </p:spPr>
+      </p:sp>
+      <p:sp>
+        <p:nvSpPr>
+          <p:cNvPr id="14" name="Text 12"/>
+          <p:cNvSpPr/>
+          <p:nvPr/>
+        </p:nvSpPr>
+        <p:spPr>
+          <a:xfrm>
+            <a:off x="6446520" y="3931920"/>
+            <a:ext cx="5120640" cy="320040"/>
+          </a:xfrm>
+          <a:prstGeom prst="rect">
+            <a:avLst/>
+          </a:prstGeom>
+          <a:noFill/>
+          <a:ln/>
+        </p:spPr>
+        <p:txBody>
+          <a:bodyPr wrap="square" rtlCol="0" anchor="ctr"/>
+          <a:lstStyle/>
+          <a:p>
             <a:pPr indent="0" marL="0">
               <a:buNone/>
             </a:pPr>
             <a:r>
-              <a:rPr lang="en-US" sz="1600" dirty="0">
-                <a:solidFill>
-                  <a:srgbClr val="1A1A1A"/>
+              <a:rPr lang="en-US" sz="1100" b="1" dirty="0">
+                <a:solidFill>
+                  <a:srgbClr val="13315C"/>
                 </a:solidFill>
                 <a:latin typeface="Calibri" pitchFamily="34" charset="0"/>
                 <a:ea typeface="Calibri" pitchFamily="34" charset="-122"/>
                 <a:cs typeface="Calibri" pitchFamily="34" charset="-120"/>
               </a:rPr>
-              <a:t> — trailing team in ≥10 pt deficit hits a made 3-pointer → larger over-shift.</a:t>
-            </a:r>
-            <a:endParaRPr lang="en-US" sz="1600" dirty="0"/>
-          </a:p>
-        </p:txBody>
-      </p:sp>
-      <p:sp>
-        <p:nvSpPr>
-          <p:cNvPr id="10" name="Text 8"/>
-          <p:cNvSpPr/>
-          <p:nvPr/>
-        </p:nvSpPr>
-        <p:spPr>
-          <a:xfrm>
-            <a:off x="502920" y="5669280"/>
-            <a:ext cx="11247120" cy="457200"/>
+              <a:t>SUB-QUESTION 2</a:t>
+            </a:r>
+            <a:endParaRPr lang="en-US" sz="1100" dirty="0"/>
+          </a:p>
+        </p:txBody>
+      </p:sp>
+      <p:sp>
+        <p:nvSpPr>
+          <p:cNvPr id="15" name="Text 13"/>
+          <p:cNvSpPr/>
+          <p:nvPr/>
+        </p:nvSpPr>
+        <p:spPr>
+          <a:xfrm>
+            <a:off x="6446520" y="4206240"/>
+            <a:ext cx="5120640" cy="457200"/>
           </a:xfrm>
           <a:prstGeom prst="rect">
             <a:avLst/>
@@ -6562,15 +6789,54 @@
               <a:buNone/>
             </a:pPr>
             <a:r>
-              <a:rPr lang="en-US" sz="1300" i="1" dirty="0">
-                <a:solidFill>
-                  <a:srgbClr val="8DA9C4"/>
+              <a:rPr lang="en-US" sz="1900" b="1" dirty="0">
+                <a:solidFill>
+                  <a:srgbClr val="0B2545"/>
+                </a:solidFill>
+                <a:latin typeface="Georgia" pitchFamily="34" charset="0"/>
+                <a:ea typeface="Georgia" pitchFamily="34" charset="-122"/>
+                <a:cs typeface="Georgia" pitchFamily="34" charset="-120"/>
+              </a:rPr>
+              <a:t>Can we EXTRACT it (make money)?</a:t>
+            </a:r>
+            <a:endParaRPr lang="en-US" sz="1900" dirty="0"/>
+          </a:p>
+        </p:txBody>
+      </p:sp>
+      <p:sp>
+        <p:nvSpPr>
+          <p:cNvPr id="16" name="Text 14"/>
+          <p:cNvSpPr/>
+          <p:nvPr/>
+        </p:nvSpPr>
+        <p:spPr>
+          <a:xfrm>
+            <a:off x="6446520" y="4709160"/>
+            <a:ext cx="5120640" cy="960120"/>
+          </a:xfrm>
+          <a:prstGeom prst="rect">
+            <a:avLst/>
+          </a:prstGeom>
+          <a:noFill/>
+          <a:ln/>
+        </p:spPr>
+        <p:txBody>
+          <a:bodyPr wrap="square" rtlCol="0" anchor="ctr"/>
+          <a:lstStyle/>
+          <a:p>
+            <a:pPr indent="0" marL="0">
+              <a:buNone/>
+            </a:pPr>
+            <a:r>
+              <a:rPr lang="en-US" sz="1300" dirty="0">
+                <a:solidFill>
+                  <a:srgbClr val="1A1A1A"/>
                 </a:solidFill>
                 <a:latin typeface="Calibri" pitchFamily="34" charset="0"/>
                 <a:ea typeface="Calibri" pitchFamily="34" charset="-122"/>
                 <a:cs typeface="Calibri" pitchFamily="34" charset="-120"/>
               </a:rPr>
-              <a:t>Block-bootstrap by game (n = games, not ticks). Holm-Bonferroni across the pre-registered set.</a:t>
+              <a:t>Tested via live backtest on real markets — does the edge survive the vig at a sample large enough to distinguish skill from luck?</a:t>
             </a:r>
             <a:endParaRPr lang="en-US" sz="1300" dirty="0"/>
           </a:p>
@@ -6578,14 +6844,14 @@
       </p:sp>
       <p:sp>
         <p:nvSpPr>
-          <p:cNvPr id="11" name="Text 9"/>
-          <p:cNvSpPr/>
-          <p:nvPr/>
-        </p:nvSpPr>
-        <p:spPr>
-          <a:xfrm>
-            <a:off x="502920" y="6492240"/>
-            <a:ext cx="7315200" cy="274320"/>
+          <p:cNvPr id="17" name="Text 15"/>
+          <p:cNvSpPr/>
+          <p:nvPr/>
+        </p:nvSpPr>
+        <p:spPr>
+          <a:xfrm>
+            <a:off x="6446520" y="5760720"/>
+            <a:ext cx="5120640" cy="320040"/>
           </a:xfrm>
           <a:prstGeom prst="rect">
             <a:avLst/>
@@ -6601,14 +6867,53 @@
               <a:buNone/>
             </a:pPr>
             <a:r>
-              <a:rPr lang="en-US" sz="1000" dirty="0">
-                <a:solidFill>
-                  <a:srgbClr val="8DA9C4"/>
+              <a:rPr lang="en-US" sz="1100" i="1" dirty="0">
+                <a:solidFill>
+                  <a:srgbClr val="1C7293"/>
                 </a:solidFill>
                 <a:latin typeface="Calibri" pitchFamily="34" charset="0"/>
                 <a:ea typeface="Calibri" pitchFamily="34" charset="-122"/>
                 <a:cs typeface="Calibri" pitchFamily="34" charset="-120"/>
               </a:rPr>
+              <a:t>→ answered on the live-pilot + verdict slides</a:t>
+            </a:r>
+            <a:endParaRPr lang="en-US" sz="1100" dirty="0"/>
+          </a:p>
+        </p:txBody>
+      </p:sp>
+      <p:sp>
+        <p:nvSpPr>
+          <p:cNvPr id="18" name="Text 16"/>
+          <p:cNvSpPr/>
+          <p:nvPr/>
+        </p:nvSpPr>
+        <p:spPr>
+          <a:xfrm>
+            <a:off x="502920" y="6492240"/>
+            <a:ext cx="7315200" cy="274320"/>
+          </a:xfrm>
+          <a:prstGeom prst="rect">
+            <a:avLst/>
+          </a:prstGeom>
+          <a:noFill/>
+          <a:ln/>
+        </p:spPr>
+        <p:txBody>
+          <a:bodyPr wrap="square" rtlCol="0" anchor="ctr"/>
+          <a:lstStyle/>
+          <a:p>
+            <a:pPr indent="0" marL="0">
+              <a:buNone/>
+            </a:pPr>
+            <a:r>
+              <a:rPr lang="en-US" sz="1000" dirty="0">
+                <a:solidFill>
+                  <a:srgbClr val="8DA9C4"/>
+                </a:solidFill>
+                <a:latin typeface="Calibri" pitchFamily="34" charset="0"/>
+                <a:ea typeface="Calibri" pitchFamily="34" charset="-122"/>
+                <a:cs typeface="Calibri" pitchFamily="34" charset="-120"/>
+              </a:rPr>
               <a:t>STATS 211 · NBA Mispricing · Sit &amp; Manathattai</a:t>
             </a:r>
             <a:endParaRPr lang="en-US" sz="1000" dirty="0"/>
@@ -6617,7 +6922,7 @@
       </p:sp>
       <p:sp>
         <p:nvSpPr>
-          <p:cNvPr id="12" name="Text 10"/>
+          <p:cNvPr id="19" name="Text 17"/>
           <p:cNvSpPr/>
           <p:nvPr/>
         </p:nvSpPr>
@@ -12186,7 +12491,7 @@
                           <a:ea typeface="Calibri" pitchFamily="34" charset="-122"/>
                           <a:cs typeface="Calibri" pitchFamily="34" charset="-120"/>
                         </a:rPr>
-                        <a:t>H1 — trail 10–15, made FG</a:t>
+                        <a:t>Comeback FG · trail 10–15</a:t>
                       </a:r>
                       <a:endParaRPr lang="en-US" sz="1200" dirty="0">
                         <a:latin typeface="Calibri" charset="0"/>
@@ -12318,7 +12623,7 @@
                           <a:ea typeface="Calibri" pitchFamily="34" charset="-122"/>
                           <a:cs typeface="Calibri" pitchFamily="34" charset="-120"/>
                         </a:rPr>
-                        <a:t>H4 — trail ≥10, made 3PT</a:t>
+                        <a:t>Salience 3PT · trail ≥10</a:t>
                       </a:r>
                       <a:endParaRPr lang="en-US" sz="1200" dirty="0">
                         <a:latin typeface="Calibri" charset="0"/>

--- a/slides/final_deck.pptx
+++ b/slides/final_deck.pptx
@@ -19,9 +19,10 @@
     <p:sldId id="267" r:id="rId13"/>
     <p:sldId id="268" r:id="rId14"/>
     <p:sldId id="269" r:id="rId15"/>
+    <p:sldId id="270" r:id="rId16"/>
   </p:sldIdLst>
   <p:notesMasterIdLst>
-    <p:notesMasterId r:id="rId16"/>
+    <p:notesMasterId r:id="rId17"/>
   </p:notesMasterIdLst>
   <p:sldSz cx="12192000" cy="6858000"/>
   <p:notesSz cx="6858000" cy="12192000"/>
@@ -979,6 +980,94 @@
             <a:fld id="{F7021451-1387-4CA6-816F-3879F97B5CBC}" type="slidenum">
               <a:rPr lang="en-US"/>
               <a:t>14</a:t>
+            </a:fld>
+            <a:endParaRPr lang="en-US"/>
+          </a:p>
+        </p:txBody>
+      </p:sp>
+    </p:spTree>
+    <p:extLst>
+      <p:ext uri="{BB962C8B-B14F-4D97-AF65-F5344CB8AC3E}">
+        <p14:creationId xmlns:p14="http://schemas.microsoft.com/office/powerpoint/2010/main" val="1024086991"/>
+      </p:ext>
+    </p:extLst>
+  </p:cSld>
+  <p:clrMapOvr>
+    <a:masterClrMapping/>
+  </p:clrMapOvr>
+</p:notes>
+</file>
+
+<file path=ppt/notesSlides/notesSlide15.xml><?xml version="1.0" encoding="utf-8"?>
+<p:notes xmlns:a="http://schemas.openxmlformats.org/drawingml/2006/main" xmlns:r="http://schemas.openxmlformats.org/officeDocument/2006/relationships" xmlns:p="http://schemas.openxmlformats.org/presentationml/2006/main">
+  <p:cSld>
+    <p:spTree>
+      <p:nvGrpSpPr>
+        <p:cNvPr id="1" name=""/>
+        <p:cNvGrpSpPr/>
+        <p:nvPr/>
+      </p:nvGrpSpPr>
+      <p:grpSpPr>
+        <a:xfrm>
+          <a:off x="0" y="0"/>
+          <a:ext cx="0" cy="0"/>
+          <a:chOff x="0" y="0"/>
+          <a:chExt cx="0" cy="0"/>
+        </a:xfrm>
+      </p:grpSpPr>
+      <p:sp>
+        <p:nvSpPr>
+          <p:cNvPr id="2" name="Slide Image Placeholder 1"/>
+          <p:cNvSpPr>
+            <a:spLocks noGrp="1" noRot="1" noChangeAspect="1"/>
+          </p:cNvSpPr>
+          <p:nvPr>
+            <p:ph type="sldImg"/>
+          </p:nvPr>
+        </p:nvSpPr>
+        <p:spPr/>
+      </p:sp>
+      <p:sp>
+        <p:nvSpPr>
+          <p:cNvPr id="3" name="Notes Placeholder 2"/>
+          <p:cNvSpPr>
+            <a:spLocks noGrp="1"/>
+          </p:cNvSpPr>
+          <p:nvPr>
+            <p:ph type="body" idx="1"/>
+          </p:nvPr>
+        </p:nvSpPr>
+        <p:spPr/>
+        <p:txBody>
+          <a:bodyPr/>
+          <a:lstStyle/>
+          <a:p>
+            <a:r>
+              <a:rPr lang="en-US" dirty="0"/>
+              <a:t/>
+            </a:r>
+            <a:endParaRPr lang="en-US" dirty="0"/>
+          </a:p>
+        </p:txBody>
+      </p:sp>
+      <p:sp>
+        <p:nvSpPr>
+          <p:cNvPr id="4" name="Slide Number Placeholder 3"/>
+          <p:cNvSpPr>
+            <a:spLocks noGrp="1"/>
+          </p:cNvSpPr>
+          <p:nvPr>
+            <p:ph type="sldNum" sz="quarter" idx="10"/>
+          </p:nvPr>
+        </p:nvSpPr>
+        <p:spPr/>
+        <p:txBody>
+          <a:bodyPr/>
+          <a:lstStyle/>
+          <a:p>
+            <a:fld id="{F7021451-1387-4CA6-816F-3879F97B5CBC}" type="slidenum">
+              <a:rPr lang="en-US"/>
+              <a:t>15</a:t>
             </a:fld>
             <a:endParaRPr lang="en-US"/>
           </a:p>
@@ -2278,7 +2367,7 @@
                 <a:ea typeface="Georgia" pitchFamily="34" charset="-122"/>
                 <a:cs typeface="Georgia" pitchFamily="34" charset="-120"/>
               </a:rPr>
-              <a:t>Live pilot · SAS @ OKC, 2026-05-26  (FINAL OKC 127–114)</a:t>
+              <a:t>Backtest engine · the equations</a:t>
             </a:r>
             <a:endParaRPr lang="en-US" sz="2800" dirty="0"/>
           </a:p>
@@ -2317,7 +2406,7 @@
                 <a:ea typeface="Calibri" pitchFamily="34" charset="-122"/>
                 <a:cs typeface="Calibri" pitchFamily="34" charset="-120"/>
               </a:rPr>
-              <a:t>Headline figure #3 · 73 in-1H ticks · 6 books</a:t>
+              <a:t>5/5 honesty gates pass on synthetic data</a:t>
             </a:r>
             <a:endParaRPr lang="en-US" sz="1400" dirty="0"/>
           </a:p>
@@ -2346,50 +2435,26 @@
           </a:ln>
         </p:spPr>
       </p:sp>
-      <p:pic>
-        <p:nvPicPr>
-          <p:cNvPr id="5" name="Image 0" descr="slides/figures/pilot_roi.png">    </p:cNvPr>
-          <p:cNvPicPr>
-            <a:picLocks noChangeAspect="1"/>
-          </p:cNvPicPr>
-          <p:nvPr/>
-        </p:nvPicPr>
-        <p:blipFill>
-          <a:blip r:embed="rId1"/>
-          <a:stretch>
-            <a:fillRect/>
-          </a:stretch>
-        </p:blipFill>
-        <p:spPr>
-          <a:xfrm>
-            <a:off x="365760" y="1417320"/>
-            <a:ext cx="6858000" cy="4572000"/>
-          </a:xfrm>
-          <a:prstGeom prst="rect">
-            <a:avLst/>
-          </a:prstGeom>
-        </p:spPr>
-      </p:pic>
-      <p:sp>
-        <p:nvSpPr>
-          <p:cNvPr id="6" name="Shape 3"/>
-          <p:cNvSpPr/>
-          <p:nvPr/>
-        </p:nvSpPr>
-        <p:spPr>
-          <a:xfrm>
-            <a:off x="7360920" y="1417320"/>
-            <a:ext cx="4434840" cy="4617720"/>
+      <p:sp>
+        <p:nvSpPr>
+          <p:cNvPr id="5" name="Shape 3"/>
+          <p:cNvSpPr/>
+          <p:nvPr/>
+        </p:nvSpPr>
+        <p:spPr>
+          <a:xfrm>
+            <a:off x="502920" y="1417320"/>
+            <a:ext cx="11247120" cy="960120"/>
           </a:xfrm>
           <a:prstGeom prst="roundRect">
             <a:avLst>
-              <a:gd name="adj" fmla="val 2062"/>
+              <a:gd name="adj" fmla="val 7619"/>
             </a:avLst>
           </a:prstGeom>
           <a:solidFill>
-            <a:srgbClr val="F6F6F2"/>
+            <a:srgbClr val="EEF3F8"/>
           </a:solidFill>
-          <a:ln w="19050">
+          <a:ln w="15240">
             <a:solidFill>
               <a:srgbClr val="1C7293"/>
             </a:solidFill>
@@ -2399,184 +2464,1037 @@
       </p:sp>
       <p:sp>
         <p:nvSpPr>
-          <p:cNvPr id="7" name="Text 4"/>
-          <p:cNvSpPr/>
-          <p:nvPr/>
-        </p:nvSpPr>
-        <p:spPr>
-          <a:xfrm>
-            <a:off x="7589520" y="1554480"/>
-            <a:ext cx="4114800" cy="502920"/>
-          </a:xfrm>
-          <a:prstGeom prst="rect">
-            <a:avLst/>
-          </a:prstGeom>
-          <a:noFill/>
-          <a:ln/>
-        </p:spPr>
-        <p:txBody>
-          <a:bodyPr wrap="square" rtlCol="0" anchor="ctr"/>
-          <a:lstStyle/>
-          <a:p>
-            <a:pPr indent="0" marL="0">
-              <a:buNone/>
-            </a:pPr>
-            <a:r>
-              <a:rPr lang="en-US" sz="1900" b="1" dirty="0">
+          <p:cNvPr id="6" name="Text 4"/>
+          <p:cNvSpPr/>
+          <p:nvPr/>
+        </p:nvSpPr>
+        <p:spPr>
+          <a:xfrm>
+            <a:off x="685800" y="1508760"/>
+            <a:ext cx="10881360" cy="457200"/>
+          </a:xfrm>
+          <a:prstGeom prst="rect">
+            <a:avLst/>
+          </a:prstGeom>
+          <a:noFill/>
+          <a:ln/>
+        </p:spPr>
+        <p:txBody>
+          <a:bodyPr wrap="square" rtlCol="0" anchor="ctr"/>
+          <a:lstStyle/>
+          <a:p>
+            <a:pPr algn="ctr" indent="0" marL="0">
+              <a:buNone/>
+            </a:pPr>
+            <a:r>
+              <a:rPr lang="en-US" sz="1800" b="1" dirty="0">
                 <a:solidFill>
                   <a:srgbClr val="0B2545"/>
                 </a:solidFill>
-                <a:latin typeface="Georgia" pitchFamily="34" charset="0"/>
-                <a:ea typeface="Georgia" pitchFamily="34" charset="-122"/>
-                <a:cs typeface="Georgia" pitchFamily="34" charset="-120"/>
-              </a:rPr>
-              <a:t>The lesson IS the result.</a:t>
-            </a:r>
-            <a:endParaRPr lang="en-US" sz="1900" dirty="0"/>
-          </a:p>
-        </p:txBody>
-      </p:sp>
-      <p:sp>
-        <p:nvSpPr>
-          <p:cNvPr id="8" name="Text 5"/>
-          <p:cNvSpPr/>
-          <p:nvPr/>
-        </p:nvSpPr>
-        <p:spPr>
-          <a:xfrm>
-            <a:off x="7589520" y="2103120"/>
-            <a:ext cx="4114800" cy="594360"/>
-          </a:xfrm>
-          <a:prstGeom prst="rect">
-            <a:avLst/>
-          </a:prstGeom>
-          <a:noFill/>
-          <a:ln/>
-        </p:spPr>
-        <p:txBody>
-          <a:bodyPr wrap="square" rtlCol="0" anchor="ctr"/>
-          <a:lstStyle/>
-          <a:p>
-            <a:pPr indent="0" marL="0">
-              <a:buNone/>
-            </a:pPr>
-            <a:r>
-              <a:rPr lang="en-US" sz="1300" dirty="0">
-                <a:solidFill>
-                  <a:srgbClr val="1A1A1A"/>
+                <a:latin typeface="Courier New" pitchFamily="34" charset="0"/>
+                <a:ea typeface="Courier New" pitchFamily="34" charset="-122"/>
+                <a:cs typeface="Courier New" pitchFamily="34" charset="-120"/>
+              </a:rPr>
+              <a:t>edge_t  =  p̂_t  −  p_market_t</a:t>
+            </a:r>
+            <a:endParaRPr lang="en-US" sz="1800" dirty="0"/>
+          </a:p>
+        </p:txBody>
+      </p:sp>
+      <p:sp>
+        <p:nvSpPr>
+          <p:cNvPr id="7" name="Text 5"/>
+          <p:cNvSpPr/>
+          <p:nvPr/>
+        </p:nvSpPr>
+        <p:spPr>
+          <a:xfrm>
+            <a:off x="685800" y="1920240"/>
+            <a:ext cx="10881360" cy="365760"/>
+          </a:xfrm>
+          <a:prstGeom prst="rect">
+            <a:avLst/>
+          </a:prstGeom>
+          <a:noFill/>
+          <a:ln/>
+        </p:spPr>
+        <p:txBody>
+          <a:bodyPr wrap="square" rtlCol="0" anchor="ctr"/>
+          <a:lstStyle/>
+          <a:p>
+            <a:pPr algn="ctr" indent="0" marL="0">
+              <a:buNone/>
+            </a:pPr>
+            <a:r>
+              <a:rPr lang="en-US" sz="1200" i="1" dirty="0">
+                <a:solidFill>
+                  <a:srgbClr val="13315C"/>
                 </a:solidFill>
                 <a:latin typeface="Calibri" pitchFamily="34" charset="0"/>
                 <a:ea typeface="Calibri" pitchFamily="34" charset="-122"/>
                 <a:cs typeface="Calibri" pitchFamily="34" charset="-120"/>
               </a:rPr>
-              <a:t>Model faded SA (underdog) early when the score was close.</a:t>
-            </a:r>
-            <a:endParaRPr lang="en-US" sz="1300" dirty="0"/>
-          </a:p>
-        </p:txBody>
-      </p:sp>
-      <p:sp>
-        <p:nvSpPr>
-          <p:cNvPr id="9" name="Text 6"/>
-          <p:cNvSpPr/>
-          <p:nvPr/>
-        </p:nvSpPr>
-        <p:spPr>
-          <a:xfrm>
-            <a:off x="7589520" y="2606040"/>
-            <a:ext cx="4114800" cy="365760"/>
-          </a:xfrm>
-          <a:prstGeom prst="rect">
-            <a:avLst/>
-          </a:prstGeom>
-          <a:noFill/>
-          <a:ln/>
-        </p:spPr>
-        <p:txBody>
-          <a:bodyPr wrap="square" rtlCol="0" anchor="ctr"/>
-          <a:lstStyle/>
-          <a:p>
-            <a:pPr indent="0" marL="0">
-              <a:buNone/>
-            </a:pPr>
-            <a:r>
-              <a:rPr lang="en-US" sz="1300" dirty="0">
-                <a:solidFill>
-                  <a:srgbClr val="1A1A1A"/>
+              <a:t>core: where the variant's fair value disagrees with the de-vigged market</a:t>
+            </a:r>
+            <a:endParaRPr lang="en-US" sz="1200" dirty="0"/>
+          </a:p>
+        </p:txBody>
+      </p:sp>
+      <p:sp>
+        <p:nvSpPr>
+          <p:cNvPr id="8" name="Shape 6"/>
+          <p:cNvSpPr/>
+          <p:nvPr/>
+        </p:nvSpPr>
+        <p:spPr>
+          <a:xfrm>
+            <a:off x="502920" y="2514600"/>
+            <a:ext cx="5486400" cy="960120"/>
+          </a:xfrm>
+          <a:prstGeom prst="roundRect">
+            <a:avLst>
+              <a:gd name="adj" fmla="val 7619"/>
+            </a:avLst>
+          </a:prstGeom>
+          <a:solidFill>
+            <a:srgbClr val="EEF3F8"/>
+          </a:solidFill>
+          <a:ln w="15240">
+            <a:solidFill>
+              <a:srgbClr val="1C7293"/>
+            </a:solidFill>
+            <a:prstDash val="solid"/>
+          </a:ln>
+        </p:spPr>
+      </p:sp>
+      <p:sp>
+        <p:nvSpPr>
+          <p:cNvPr id="9" name="Text 7"/>
+          <p:cNvSpPr/>
+          <p:nvPr/>
+        </p:nvSpPr>
+        <p:spPr>
+          <a:xfrm>
+            <a:off x="685800" y="2606040"/>
+            <a:ext cx="5120640" cy="457200"/>
+          </a:xfrm>
+          <a:prstGeom prst="rect">
+            <a:avLst/>
+          </a:prstGeom>
+          <a:noFill/>
+          <a:ln/>
+        </p:spPr>
+        <p:txBody>
+          <a:bodyPr wrap="square" rtlCol="0" anchor="ctr"/>
+          <a:lstStyle/>
+          <a:p>
+            <a:pPr algn="ctr" indent="0" marL="0">
+              <a:buNone/>
+            </a:pPr>
+            <a:r>
+              <a:rPr lang="en-US" sz="1800" b="1" dirty="0">
+                <a:solidFill>
+                  <a:srgbClr val="0B2545"/>
+                </a:solidFill>
+                <a:latin typeface="Courier New" pitchFamily="34" charset="0"/>
+                <a:ea typeface="Courier New" pitchFamily="34" charset="-122"/>
+                <a:cs typeface="Courier New" pitchFamily="34" charset="-120"/>
+              </a:rPr>
+              <a:t>p_devig  =  p_home_raw / (p_home_raw + p_away_raw)</a:t>
+            </a:r>
+            <a:endParaRPr lang="en-US" sz="1800" dirty="0"/>
+          </a:p>
+        </p:txBody>
+      </p:sp>
+      <p:sp>
+        <p:nvSpPr>
+          <p:cNvPr id="10" name="Text 8"/>
+          <p:cNvSpPr/>
+          <p:nvPr/>
+        </p:nvSpPr>
+        <p:spPr>
+          <a:xfrm>
+            <a:off x="685800" y="3017520"/>
+            <a:ext cx="5120640" cy="365760"/>
+          </a:xfrm>
+          <a:prstGeom prst="rect">
+            <a:avLst/>
+          </a:prstGeom>
+          <a:noFill/>
+          <a:ln/>
+        </p:spPr>
+        <p:txBody>
+          <a:bodyPr wrap="square" rtlCol="0" anchor="ctr"/>
+          <a:lstStyle/>
+          <a:p>
+            <a:pPr algn="ctr" indent="0" marL="0">
+              <a:buNone/>
+            </a:pPr>
+            <a:r>
+              <a:rPr lang="en-US" sz="1200" i="1" dirty="0">
+                <a:solidFill>
+                  <a:srgbClr val="13315C"/>
                 </a:solidFill>
                 <a:latin typeface="Calibri" pitchFamily="34" charset="0"/>
                 <a:ea typeface="Calibri" pitchFamily="34" charset="-122"/>
                 <a:cs typeface="Calibri" pitchFamily="34" charset="-120"/>
               </a:rPr>
-              <a:t>OKC pulled away and won 127–114.</a:t>
-            </a:r>
-            <a:endParaRPr lang="en-US" sz="1300" dirty="0"/>
-          </a:p>
-        </p:txBody>
-      </p:sp>
-      <p:sp>
-        <p:nvSpPr>
-          <p:cNvPr id="10" name="Text 7"/>
-          <p:cNvSpPr/>
-          <p:nvPr/>
-        </p:nvSpPr>
-        <p:spPr>
-          <a:xfrm>
-            <a:off x="7589520" y="3108960"/>
-            <a:ext cx="4114800" cy="1371600"/>
-          </a:xfrm>
-          <a:prstGeom prst="rect">
-            <a:avLst/>
-          </a:prstGeom>
-          <a:noFill/>
-          <a:ln/>
-        </p:spPr>
-        <p:txBody>
-          <a:bodyPr wrap="square" rtlCol="0" anchor="ctr"/>
-          <a:lstStyle/>
-          <a:p>
-            <a:pPr indent="0" marL="0">
-              <a:buNone/>
-            </a:pPr>
-            <a:r>
-              <a:rPr lang="en-US" sz="1300" dirty="0">
-                <a:solidFill>
-                  <a:srgbClr val="1A1A1A"/>
+              <a:t>multiplicative two-way de-vig</a:t>
+            </a:r>
+            <a:endParaRPr lang="en-US" sz="1200" dirty="0"/>
+          </a:p>
+        </p:txBody>
+      </p:sp>
+      <p:sp>
+        <p:nvSpPr>
+          <p:cNvPr id="11" name="Shape 9"/>
+          <p:cNvSpPr/>
+          <p:nvPr/>
+        </p:nvSpPr>
+        <p:spPr>
+          <a:xfrm>
+            <a:off x="6263640" y="2514600"/>
+            <a:ext cx="5486400" cy="960120"/>
+          </a:xfrm>
+          <a:prstGeom prst="roundRect">
+            <a:avLst>
+              <a:gd name="adj" fmla="val 7619"/>
+            </a:avLst>
+          </a:prstGeom>
+          <a:solidFill>
+            <a:srgbClr val="EEF3F8"/>
+          </a:solidFill>
+          <a:ln w="15240">
+            <a:solidFill>
+              <a:srgbClr val="1C7293"/>
+            </a:solidFill>
+            <a:prstDash val="solid"/>
+          </a:ln>
+        </p:spPr>
+      </p:sp>
+      <p:sp>
+        <p:nvSpPr>
+          <p:cNvPr id="12" name="Text 10"/>
+          <p:cNvSpPr/>
+          <p:nvPr/>
+        </p:nvSpPr>
+        <p:spPr>
+          <a:xfrm>
+            <a:off x="6446520" y="2606040"/>
+            <a:ext cx="5120640" cy="457200"/>
+          </a:xfrm>
+          <a:prstGeom prst="rect">
+            <a:avLst/>
+          </a:prstGeom>
+          <a:noFill/>
+          <a:ln/>
+        </p:spPr>
+        <p:txBody>
+          <a:bodyPr wrap="square" rtlCol="0" anchor="ctr"/>
+          <a:lstStyle/>
+          <a:p>
+            <a:pPr algn="ctr" indent="0" marL="0">
+              <a:buNone/>
+            </a:pPr>
+            <a:r>
+              <a:rPr lang="en-US" sz="1800" b="1" dirty="0">
+                <a:solidFill>
+                  <a:srgbClr val="0B2545"/>
+                </a:solidFill>
+                <a:latin typeface="Courier New" pitchFamily="34" charset="0"/>
+                <a:ea typeface="Courier New" pitchFamily="34" charset="-122"/>
+                <a:cs typeface="Courier New" pitchFamily="34" charset="-120"/>
+              </a:rPr>
+              <a:t>f*  =  ( b · p  −  q ) / b</a:t>
+            </a:r>
+            <a:endParaRPr lang="en-US" sz="1800" dirty="0"/>
+          </a:p>
+        </p:txBody>
+      </p:sp>
+      <p:sp>
+        <p:nvSpPr>
+          <p:cNvPr id="13" name="Text 11"/>
+          <p:cNvSpPr/>
+          <p:nvPr/>
+        </p:nvSpPr>
+        <p:spPr>
+          <a:xfrm>
+            <a:off x="6446520" y="3017520"/>
+            <a:ext cx="5120640" cy="365760"/>
+          </a:xfrm>
+          <a:prstGeom prst="rect">
+            <a:avLst/>
+          </a:prstGeom>
+          <a:noFill/>
+          <a:ln/>
+        </p:spPr>
+        <p:txBody>
+          <a:bodyPr wrap="square" rtlCol="0" anchor="ctr"/>
+          <a:lstStyle/>
+          <a:p>
+            <a:pPr algn="ctr" indent="0" marL="0">
+              <a:buNone/>
+            </a:pPr>
+            <a:r>
+              <a:rPr lang="en-US" sz="1200" i="1" dirty="0">
+                <a:solidFill>
+                  <a:srgbClr val="13315C"/>
                 </a:solidFill>
                 <a:latin typeface="Calibri" pitchFamily="34" charset="0"/>
                 <a:ea typeface="Calibri" pitchFamily="34" charset="-122"/>
                 <a:cs typeface="Calibri" pitchFamily="34" charset="-120"/>
               </a:rPr>
-              <a:t>'Always favorite' looks brilliant — </a:t>
-            </a:r>
-            <a:pPr indent="0" marL="0">
-              <a:buNone/>
-            </a:pPr>
-            <a:r>
-              <a:rPr lang="en-US" sz="1300" i="1" dirty="0">
-                <a:solidFill>
-                  <a:srgbClr val="13315C"/>
+              <a:t>Kelly fraction · b = decimal−1, q = 1−p</a:t>
+            </a:r>
+            <a:endParaRPr lang="en-US" sz="1200" dirty="0"/>
+          </a:p>
+        </p:txBody>
+      </p:sp>
+      <p:graphicFrame>
+        <p:nvGraphicFramePr>
+          <p:cNvPr id="11" name="Table 0"/>
+          <p:cNvGraphicFramePr>
+            <a:graphicFrameLocks noGrp="1"/>
+          </p:cNvGraphicFramePr>
+          <p:nvPr>
+            <p:extLst>
+              <p:ext uri="{D42A27DB-BD31-4B8C-83A1-F6EECF244321}">
+                <p14:modId xmlns:p14="http://schemas.microsoft.com/office/powerpoint/2010/main" val="1579011935"/>
+              </p:ext>
+            </p:extLst>
+          </p:nvPr>
+        </p:nvGraphicFramePr>
+        <p:xfrm>
+          <a:off x="502920" y="3703320"/>
+          <a:ext cx="11247120" cy="914400"/>
+        </p:xfrm>
+        <a:graphic>
+          <a:graphicData uri="http://schemas.openxmlformats.org/drawingml/2006/table">
+            <a:tbl>
+              <a:tblPr/>
+              <a:tblGrid>
+                <a:gridCol w="5486400"/>
+                <a:gridCol w="5760720"/>
+              </a:tblGrid>
+              <a:tr h="457200">
+                <a:tc>
+                  <a:txBody>
+                    <a:bodyPr/>
+                    <a:lstStyle/>
+                    <a:p>
+                      <a:pPr indent="0" marL="0">
+                        <a:buNone/>
+                      </a:pPr>
+                      <a:r>
+                        <a:rPr lang="en-US" sz="1300" b="1" dirty="0">
+                          <a:solidFill>
+                            <a:srgbClr val="F6F6F2"/>
+                          </a:solidFill>
+                          <a:latin typeface="Calibri" pitchFamily="34" charset="0"/>
+                          <a:ea typeface="Calibri" pitchFamily="34" charset="-122"/>
+                          <a:cs typeface="Calibri" pitchFamily="34" charset="-120"/>
+                        </a:rPr>
+                        <a:t>Honesty gate</a:t>
+                      </a:r>
+                      <a:endParaRPr lang="en-US" sz="1300" dirty="0">
+                        <a:latin typeface="Calibri" charset="0"/>
+                        <a:ea typeface="Calibri" charset="0"/>
+                        <a:cs typeface="Calibri" charset="0"/>
+                      </a:endParaRPr>
+                    </a:p>
+                  </a:txBody>
+                  <a:tcPr marL="91440" marR="91440" marT="45720" marB="45720">
+                    <a:lnL w="12700" cap="flat" cmpd="sng" algn="ctr">
+                      <a:solidFill>
+                        <a:srgbClr val="8DA9C4"/>
+                      </a:solidFill>
+                      <a:prstDash val="solid"/>
+                      <a:round/>
+                      <a:headEnd type="none" w="med" len="med"/>
+                      <a:tailEnd type="none" w="med" len="med"/>
+                    </a:lnL>
+                    <a:lnR w="12700" cap="flat" cmpd="sng" algn="ctr">
+                      <a:solidFill>
+                        <a:srgbClr val="8DA9C4"/>
+                      </a:solidFill>
+                      <a:prstDash val="solid"/>
+                      <a:round/>
+                      <a:headEnd type="none" w="med" len="med"/>
+                      <a:tailEnd type="none" w="med" len="med"/>
+                    </a:lnR>
+                    <a:lnT w="12700" cap="flat" cmpd="sng" algn="ctr">
+                      <a:solidFill>
+                        <a:srgbClr val="8DA9C4"/>
+                      </a:solidFill>
+                      <a:prstDash val="solid"/>
+                      <a:round/>
+                      <a:headEnd type="none" w="med" len="med"/>
+                      <a:tailEnd type="none" w="med" len="med"/>
+                    </a:lnT>
+                    <a:lnB w="12700" cap="flat" cmpd="sng" algn="ctr">
+                      <a:solidFill>
+                        <a:srgbClr val="8DA9C4"/>
+                      </a:solidFill>
+                      <a:prstDash val="solid"/>
+                      <a:round/>
+                      <a:headEnd type="none" w="med" len="med"/>
+                      <a:tailEnd type="none" w="med" len="med"/>
+                    </a:lnB>
+                    <a:solidFill>
+                      <a:srgbClr val="0B2545"/>
+                    </a:solidFill>
+                  </a:tcPr>
+                </a:tc>
+                <a:tc>
+                  <a:txBody>
+                    <a:bodyPr/>
+                    <a:lstStyle/>
+                    <a:p>
+                      <a:pPr indent="0" marL="0">
+                        <a:buNone/>
+                      </a:pPr>
+                      <a:r>
+                        <a:rPr lang="en-US" sz="1300" b="1" dirty="0">
+                          <a:solidFill>
+                            <a:srgbClr val="F6F6F2"/>
+                          </a:solidFill>
+                          <a:latin typeface="Calibri" pitchFamily="34" charset="0"/>
+                          <a:ea typeface="Calibri" pitchFamily="34" charset="-122"/>
+                          <a:cs typeface="Calibri" pitchFamily="34" charset="-120"/>
+                        </a:rPr>
+                        <a:t>What it proves</a:t>
+                      </a:r>
+                      <a:endParaRPr lang="en-US" sz="1300" dirty="0">
+                        <a:latin typeface="Calibri" charset="0"/>
+                        <a:ea typeface="Calibri" charset="0"/>
+                        <a:cs typeface="Calibri" charset="0"/>
+                      </a:endParaRPr>
+                    </a:p>
+                  </a:txBody>
+                  <a:tcPr marL="91440" marR="91440" marT="45720" marB="45720">
+                    <a:lnL w="12700" cap="flat" cmpd="sng" algn="ctr">
+                      <a:solidFill>
+                        <a:srgbClr val="8DA9C4"/>
+                      </a:solidFill>
+                      <a:prstDash val="solid"/>
+                      <a:round/>
+                      <a:headEnd type="none" w="med" len="med"/>
+                      <a:tailEnd type="none" w="med" len="med"/>
+                    </a:lnL>
+                    <a:lnR w="12700" cap="flat" cmpd="sng" algn="ctr">
+                      <a:solidFill>
+                        <a:srgbClr val="8DA9C4"/>
+                      </a:solidFill>
+                      <a:prstDash val="solid"/>
+                      <a:round/>
+                      <a:headEnd type="none" w="med" len="med"/>
+                      <a:tailEnd type="none" w="med" len="med"/>
+                    </a:lnR>
+                    <a:lnT w="12700" cap="flat" cmpd="sng" algn="ctr">
+                      <a:solidFill>
+                        <a:srgbClr val="8DA9C4"/>
+                      </a:solidFill>
+                      <a:prstDash val="solid"/>
+                      <a:round/>
+                      <a:headEnd type="none" w="med" len="med"/>
+                      <a:tailEnd type="none" w="med" len="med"/>
+                    </a:lnT>
+                    <a:lnB w="12700" cap="flat" cmpd="sng" algn="ctr">
+                      <a:solidFill>
+                        <a:srgbClr val="8DA9C4"/>
+                      </a:solidFill>
+                      <a:prstDash val="solid"/>
+                      <a:round/>
+                      <a:headEnd type="none" w="med" len="med"/>
+                      <a:tailEnd type="none" w="med" len="med"/>
+                    </a:lnB>
+                    <a:solidFill>
+                      <a:srgbClr val="0B2545"/>
+                    </a:solidFill>
+                  </a:tcPr>
+                </a:tc>
+              </a:tr>
+              <a:tr h="457200">
+                <a:tc>
+                  <a:txBody>
+                    <a:bodyPr/>
+                    <a:lstStyle/>
+                    <a:p>
+                      <a:pPr indent="0" marL="0">
+                        <a:buNone/>
+                      </a:pPr>
+                      <a:r>
+                        <a:rPr lang="en-US" sz="1300" b="1" dirty="0">
+                          <a:solidFill>
+                            <a:srgbClr val="0B2545"/>
+                          </a:solidFill>
+                          <a:latin typeface="Calibri" pitchFamily="34" charset="0"/>
+                          <a:ea typeface="Calibri" pitchFamily="34" charset="-122"/>
+                          <a:cs typeface="Calibri" pitchFamily="34" charset="-120"/>
+                        </a:rPr>
+                        <a:t>const-0.5 → Brier 0.25</a:t>
+                      </a:r>
+                      <a:endParaRPr lang="en-US" sz="1300" dirty="0">
+                        <a:latin typeface="Calibri" charset="0"/>
+                        <a:ea typeface="Calibri" charset="0"/>
+                        <a:cs typeface="Calibri" charset="0"/>
+                      </a:endParaRPr>
+                    </a:p>
+                  </a:txBody>
+                  <a:tcPr marL="91440" marR="91440" marT="45720" marB="45720">
+                    <a:lnL w="12700" cap="flat" cmpd="sng" algn="ctr">
+                      <a:solidFill>
+                        <a:srgbClr val="8DA9C4"/>
+                      </a:solidFill>
+                      <a:prstDash val="solid"/>
+                      <a:round/>
+                      <a:headEnd type="none" w="med" len="med"/>
+                      <a:tailEnd type="none" w="med" len="med"/>
+                    </a:lnL>
+                    <a:lnR w="12700" cap="flat" cmpd="sng" algn="ctr">
+                      <a:solidFill>
+                        <a:srgbClr val="8DA9C4"/>
+                      </a:solidFill>
+                      <a:prstDash val="solid"/>
+                      <a:round/>
+                      <a:headEnd type="none" w="med" len="med"/>
+                      <a:tailEnd type="none" w="med" len="med"/>
+                    </a:lnR>
+                    <a:lnT w="12700" cap="flat" cmpd="sng" algn="ctr">
+                      <a:solidFill>
+                        <a:srgbClr val="8DA9C4"/>
+                      </a:solidFill>
+                      <a:prstDash val="solid"/>
+                      <a:round/>
+                      <a:headEnd type="none" w="med" len="med"/>
+                      <a:tailEnd type="none" w="med" len="med"/>
+                    </a:lnT>
+                    <a:lnB w="12700" cap="flat" cmpd="sng" algn="ctr">
+                      <a:solidFill>
+                        <a:srgbClr val="8DA9C4"/>
+                      </a:solidFill>
+                      <a:prstDash val="solid"/>
+                      <a:round/>
+                      <a:headEnd type="none" w="med" len="med"/>
+                      <a:tailEnd type="none" w="med" len="med"/>
+                    </a:lnB>
+                  </a:tcPr>
+                </a:tc>
+                <a:tc>
+                  <a:txBody>
+                    <a:bodyPr/>
+                    <a:lstStyle/>
+                    <a:p>
+                      <a:pPr indent="0" marL="0">
+                        <a:buNone/>
+                      </a:pPr>
+                      <a:r>
+                        <a:rPr lang="en-US" sz="1300" dirty="0">
+                          <a:solidFill>
+                            <a:srgbClr val="1A1A1A"/>
+                          </a:solidFill>
+                          <a:latin typeface="Calibri" pitchFamily="34" charset="0"/>
+                          <a:ea typeface="Calibri" pitchFamily="34" charset="-122"/>
+                          <a:cs typeface="Calibri" pitchFamily="34" charset="-120"/>
+                        </a:rPr>
+                        <a:t>metrics wired correctly</a:t>
+                      </a:r>
+                      <a:endParaRPr lang="en-US" sz="1300" dirty="0">
+                        <a:latin typeface="Calibri" charset="0"/>
+                        <a:ea typeface="Calibri" charset="0"/>
+                        <a:cs typeface="Calibri" charset="0"/>
+                      </a:endParaRPr>
+                    </a:p>
+                  </a:txBody>
+                  <a:tcPr marL="91440" marR="91440" marT="45720" marB="45720">
+                    <a:lnL w="12700" cap="flat" cmpd="sng" algn="ctr">
+                      <a:solidFill>
+                        <a:srgbClr val="8DA9C4"/>
+                      </a:solidFill>
+                      <a:prstDash val="solid"/>
+                      <a:round/>
+                      <a:headEnd type="none" w="med" len="med"/>
+                      <a:tailEnd type="none" w="med" len="med"/>
+                    </a:lnL>
+                    <a:lnR w="12700" cap="flat" cmpd="sng" algn="ctr">
+                      <a:solidFill>
+                        <a:srgbClr val="8DA9C4"/>
+                      </a:solidFill>
+                      <a:prstDash val="solid"/>
+                      <a:round/>
+                      <a:headEnd type="none" w="med" len="med"/>
+                      <a:tailEnd type="none" w="med" len="med"/>
+                    </a:lnR>
+                    <a:lnT w="12700" cap="flat" cmpd="sng" algn="ctr">
+                      <a:solidFill>
+                        <a:srgbClr val="8DA9C4"/>
+                      </a:solidFill>
+                      <a:prstDash val="solid"/>
+                      <a:round/>
+                      <a:headEnd type="none" w="med" len="med"/>
+                      <a:tailEnd type="none" w="med" len="med"/>
+                    </a:lnT>
+                    <a:lnB w="12700" cap="flat" cmpd="sng" algn="ctr">
+                      <a:solidFill>
+                        <a:srgbClr val="8DA9C4"/>
+                      </a:solidFill>
+                      <a:prstDash val="solid"/>
+                      <a:round/>
+                      <a:headEnd type="none" w="med" len="med"/>
+                      <a:tailEnd type="none" w="med" len="med"/>
+                    </a:lnB>
+                  </a:tcPr>
+                </a:tc>
+              </a:tr>
+              <a:tr h="457200">
+                <a:tc>
+                  <a:txBody>
+                    <a:bodyPr/>
+                    <a:lstStyle/>
+                    <a:p>
+                      <a:pPr indent="0" marL="0">
+                        <a:buNone/>
+                      </a:pPr>
+                      <a:r>
+                        <a:rPr lang="en-US" sz="1300" b="1" dirty="0">
+                          <a:solidFill>
+                            <a:srgbClr val="0B2545"/>
+                          </a:solidFill>
+                          <a:latin typeface="Calibri" pitchFamily="34" charset="0"/>
+                          <a:ea typeface="Calibri" pitchFamily="34" charset="-122"/>
+                          <a:cs typeface="Calibri" pitchFamily="34" charset="-120"/>
+                        </a:rPr>
+                        <a:t>always-favorite → loses ≈ vig</a:t>
+                      </a:r>
+                      <a:endParaRPr lang="en-US" sz="1300" dirty="0">
+                        <a:latin typeface="Calibri" charset="0"/>
+                        <a:ea typeface="Calibri" charset="0"/>
+                        <a:cs typeface="Calibri" charset="0"/>
+                      </a:endParaRPr>
+                    </a:p>
+                  </a:txBody>
+                  <a:tcPr marL="91440" marR="91440" marT="45720" marB="45720">
+                    <a:lnL w="12700" cap="flat" cmpd="sng" algn="ctr">
+                      <a:solidFill>
+                        <a:srgbClr val="8DA9C4"/>
+                      </a:solidFill>
+                      <a:prstDash val="solid"/>
+                      <a:round/>
+                      <a:headEnd type="none" w="med" len="med"/>
+                      <a:tailEnd type="none" w="med" len="med"/>
+                    </a:lnL>
+                    <a:lnR w="12700" cap="flat" cmpd="sng" algn="ctr">
+                      <a:solidFill>
+                        <a:srgbClr val="8DA9C4"/>
+                      </a:solidFill>
+                      <a:prstDash val="solid"/>
+                      <a:round/>
+                      <a:headEnd type="none" w="med" len="med"/>
+                      <a:tailEnd type="none" w="med" len="med"/>
+                    </a:lnR>
+                    <a:lnT w="12700" cap="flat" cmpd="sng" algn="ctr">
+                      <a:solidFill>
+                        <a:srgbClr val="8DA9C4"/>
+                      </a:solidFill>
+                      <a:prstDash val="solid"/>
+                      <a:round/>
+                      <a:headEnd type="none" w="med" len="med"/>
+                      <a:tailEnd type="none" w="med" len="med"/>
+                    </a:lnT>
+                    <a:lnB w="12700" cap="flat" cmpd="sng" algn="ctr">
+                      <a:solidFill>
+                        <a:srgbClr val="8DA9C4"/>
+                      </a:solidFill>
+                      <a:prstDash val="solid"/>
+                      <a:round/>
+                      <a:headEnd type="none" w="med" len="med"/>
+                      <a:tailEnd type="none" w="med" len="med"/>
+                    </a:lnB>
+                  </a:tcPr>
+                </a:tc>
+                <a:tc>
+                  <a:txBody>
+                    <a:bodyPr/>
+                    <a:lstStyle/>
+                    <a:p>
+                      <a:pPr indent="0" marL="0">
+                        <a:buNone/>
+                      </a:pPr>
+                      <a:r>
+                        <a:rPr lang="en-US" sz="1300" dirty="0">
+                          <a:solidFill>
+                            <a:srgbClr val="1A1A1A"/>
+                          </a:solidFill>
+                          <a:latin typeface="Calibri" pitchFamily="34" charset="0"/>
+                          <a:ea typeface="Calibri" pitchFamily="34" charset="-122"/>
+                          <a:cs typeface="Calibri" pitchFamily="34" charset="-120"/>
+                        </a:rPr>
+                        <a:t>engine doesn't invent free money</a:t>
+                      </a:r>
+                      <a:endParaRPr lang="en-US" sz="1300" dirty="0">
+                        <a:latin typeface="Calibri" charset="0"/>
+                        <a:ea typeface="Calibri" charset="0"/>
+                        <a:cs typeface="Calibri" charset="0"/>
+                      </a:endParaRPr>
+                    </a:p>
+                  </a:txBody>
+                  <a:tcPr marL="91440" marR="91440" marT="45720" marB="45720">
+                    <a:lnL w="12700" cap="flat" cmpd="sng" algn="ctr">
+                      <a:solidFill>
+                        <a:srgbClr val="8DA9C4"/>
+                      </a:solidFill>
+                      <a:prstDash val="solid"/>
+                      <a:round/>
+                      <a:headEnd type="none" w="med" len="med"/>
+                      <a:tailEnd type="none" w="med" len="med"/>
+                    </a:lnL>
+                    <a:lnR w="12700" cap="flat" cmpd="sng" algn="ctr">
+                      <a:solidFill>
+                        <a:srgbClr val="8DA9C4"/>
+                      </a:solidFill>
+                      <a:prstDash val="solid"/>
+                      <a:round/>
+                      <a:headEnd type="none" w="med" len="med"/>
+                      <a:tailEnd type="none" w="med" len="med"/>
+                    </a:lnR>
+                    <a:lnT w="12700" cap="flat" cmpd="sng" algn="ctr">
+                      <a:solidFill>
+                        <a:srgbClr val="8DA9C4"/>
+                      </a:solidFill>
+                      <a:prstDash val="solid"/>
+                      <a:round/>
+                      <a:headEnd type="none" w="med" len="med"/>
+                      <a:tailEnd type="none" w="med" len="med"/>
+                    </a:lnT>
+                    <a:lnB w="12700" cap="flat" cmpd="sng" algn="ctr">
+                      <a:solidFill>
+                        <a:srgbClr val="8DA9C4"/>
+                      </a:solidFill>
+                      <a:prstDash val="solid"/>
+                      <a:round/>
+                      <a:headEnd type="none" w="med" len="med"/>
+                      <a:tailEnd type="none" w="med" len="med"/>
+                    </a:lnB>
+                  </a:tcPr>
+                </a:tc>
+              </a:tr>
+              <a:tr h="457200">
+                <a:tc>
+                  <a:txBody>
+                    <a:bodyPr/>
+                    <a:lstStyle/>
+                    <a:p>
+                      <a:pPr indent="0" marL="0">
+                        <a:buNone/>
+                      </a:pPr>
+                      <a:r>
+                        <a:rPr lang="en-US" sz="1300" b="1" dirty="0">
+                          <a:solidFill>
+                            <a:srgbClr val="0B2545"/>
+                          </a:solidFill>
+                          <a:latin typeface="Calibri" pitchFamily="34" charset="0"/>
+                          <a:ea typeface="Calibri" pitchFamily="34" charset="-122"/>
+                          <a:cs typeface="Calibri" pitchFamily="34" charset="-120"/>
+                        </a:rPr>
+                        <a:t>perfect on biased mkt → +14% ROI, p=0.000</a:t>
+                      </a:r>
+                      <a:endParaRPr lang="en-US" sz="1300" dirty="0">
+                        <a:latin typeface="Calibri" charset="0"/>
+                        <a:ea typeface="Calibri" charset="0"/>
+                        <a:cs typeface="Calibri" charset="0"/>
+                      </a:endParaRPr>
+                    </a:p>
+                  </a:txBody>
+                  <a:tcPr marL="91440" marR="91440" marT="45720" marB="45720">
+                    <a:lnL w="12700" cap="flat" cmpd="sng" algn="ctr">
+                      <a:solidFill>
+                        <a:srgbClr val="8DA9C4"/>
+                      </a:solidFill>
+                      <a:prstDash val="solid"/>
+                      <a:round/>
+                      <a:headEnd type="none" w="med" len="med"/>
+                      <a:tailEnd type="none" w="med" len="med"/>
+                    </a:lnL>
+                    <a:lnR w="12700" cap="flat" cmpd="sng" algn="ctr">
+                      <a:solidFill>
+                        <a:srgbClr val="8DA9C4"/>
+                      </a:solidFill>
+                      <a:prstDash val="solid"/>
+                      <a:round/>
+                      <a:headEnd type="none" w="med" len="med"/>
+                      <a:tailEnd type="none" w="med" len="med"/>
+                    </a:lnR>
+                    <a:lnT w="12700" cap="flat" cmpd="sng" algn="ctr">
+                      <a:solidFill>
+                        <a:srgbClr val="8DA9C4"/>
+                      </a:solidFill>
+                      <a:prstDash val="solid"/>
+                      <a:round/>
+                      <a:headEnd type="none" w="med" len="med"/>
+                      <a:tailEnd type="none" w="med" len="med"/>
+                    </a:lnT>
+                    <a:lnB w="12700" cap="flat" cmpd="sng" algn="ctr">
+                      <a:solidFill>
+                        <a:srgbClr val="8DA9C4"/>
+                      </a:solidFill>
+                      <a:prstDash val="solid"/>
+                      <a:round/>
+                      <a:headEnd type="none" w="med" len="med"/>
+                      <a:tailEnd type="none" w="med" len="med"/>
+                    </a:lnB>
+                  </a:tcPr>
+                </a:tc>
+                <a:tc>
+                  <a:txBody>
+                    <a:bodyPr/>
+                    <a:lstStyle/>
+                    <a:p>
+                      <a:pPr indent="0" marL="0">
+                        <a:buNone/>
+                      </a:pPr>
+                      <a:r>
+                        <a:rPr lang="en-US" sz="1300" b="1" dirty="0">
+                          <a:solidFill>
+                            <a:srgbClr val="EEA02B"/>
+                          </a:solidFill>
+                          <a:latin typeface="Calibri" pitchFamily="34" charset="0"/>
+                          <a:ea typeface="Calibri" pitchFamily="34" charset="-122"/>
+                          <a:cs typeface="Calibri" pitchFamily="34" charset="-120"/>
+                        </a:rPr>
+                        <a:t>engine CAN detect a real edge</a:t>
+                      </a:r>
+                      <a:endParaRPr lang="en-US" sz="1300" dirty="0">
+                        <a:latin typeface="Calibri" charset="0"/>
+                        <a:ea typeface="Calibri" charset="0"/>
+                        <a:cs typeface="Calibri" charset="0"/>
+                      </a:endParaRPr>
+                    </a:p>
+                  </a:txBody>
+                  <a:tcPr marL="91440" marR="91440" marT="45720" marB="45720">
+                    <a:lnL w="12700" cap="flat" cmpd="sng" algn="ctr">
+                      <a:solidFill>
+                        <a:srgbClr val="8DA9C4"/>
+                      </a:solidFill>
+                      <a:prstDash val="solid"/>
+                      <a:round/>
+                      <a:headEnd type="none" w="med" len="med"/>
+                      <a:tailEnd type="none" w="med" len="med"/>
+                    </a:lnL>
+                    <a:lnR w="12700" cap="flat" cmpd="sng" algn="ctr">
+                      <a:solidFill>
+                        <a:srgbClr val="8DA9C4"/>
+                      </a:solidFill>
+                      <a:prstDash val="solid"/>
+                      <a:round/>
+                      <a:headEnd type="none" w="med" len="med"/>
+                      <a:tailEnd type="none" w="med" len="med"/>
+                    </a:lnR>
+                    <a:lnT w="12700" cap="flat" cmpd="sng" algn="ctr">
+                      <a:solidFill>
+                        <a:srgbClr val="8DA9C4"/>
+                      </a:solidFill>
+                      <a:prstDash val="solid"/>
+                      <a:round/>
+                      <a:headEnd type="none" w="med" len="med"/>
+                      <a:tailEnd type="none" w="med" len="med"/>
+                    </a:lnT>
+                    <a:lnB w="12700" cap="flat" cmpd="sng" algn="ctr">
+                      <a:solidFill>
+                        <a:srgbClr val="8DA9C4"/>
+                      </a:solidFill>
+                      <a:prstDash val="solid"/>
+                      <a:round/>
+                      <a:headEnd type="none" w="med" len="med"/>
+                      <a:tailEnd type="none" w="med" len="med"/>
+                    </a:lnB>
+                  </a:tcPr>
+                </a:tc>
+              </a:tr>
+              <a:tr h="457200">
+                <a:tc>
+                  <a:txBody>
+                    <a:bodyPr/>
+                    <a:lstStyle/>
+                    <a:p>
+                      <a:pPr indent="0" marL="0">
+                        <a:buNone/>
+                      </a:pPr>
+                      <a:r>
+                        <a:rPr lang="en-US" sz="1300" b="1" dirty="0">
+                          <a:solidFill>
+                            <a:srgbClr val="0B2545"/>
+                          </a:solidFill>
+                          <a:latin typeface="Calibri" pitchFamily="34" charset="0"/>
+                          <a:ea typeface="Calibri" pitchFamily="34" charset="-122"/>
+                          <a:cs typeface="Calibri" pitchFamily="34" charset="-120"/>
+                        </a:rPr>
+                        <a:t>market-as-variant → 0 bets</a:t>
+                      </a:r>
+                      <a:endParaRPr lang="en-US" sz="1300" dirty="0">
+                        <a:latin typeface="Calibri" charset="0"/>
+                        <a:ea typeface="Calibri" charset="0"/>
+                        <a:cs typeface="Calibri" charset="0"/>
+                      </a:endParaRPr>
+                    </a:p>
+                  </a:txBody>
+                  <a:tcPr marL="91440" marR="91440" marT="45720" marB="45720">
+                    <a:lnL w="12700" cap="flat" cmpd="sng" algn="ctr">
+                      <a:solidFill>
+                        <a:srgbClr val="8DA9C4"/>
+                      </a:solidFill>
+                      <a:prstDash val="solid"/>
+                      <a:round/>
+                      <a:headEnd type="none" w="med" len="med"/>
+                      <a:tailEnd type="none" w="med" len="med"/>
+                    </a:lnL>
+                    <a:lnR w="12700" cap="flat" cmpd="sng" algn="ctr">
+                      <a:solidFill>
+                        <a:srgbClr val="8DA9C4"/>
+                      </a:solidFill>
+                      <a:prstDash val="solid"/>
+                      <a:round/>
+                      <a:headEnd type="none" w="med" len="med"/>
+                      <a:tailEnd type="none" w="med" len="med"/>
+                    </a:lnR>
+                    <a:lnT w="12700" cap="flat" cmpd="sng" algn="ctr">
+                      <a:solidFill>
+                        <a:srgbClr val="8DA9C4"/>
+                      </a:solidFill>
+                      <a:prstDash val="solid"/>
+                      <a:round/>
+                      <a:headEnd type="none" w="med" len="med"/>
+                      <a:tailEnd type="none" w="med" len="med"/>
+                    </a:lnT>
+                    <a:lnB w="12700" cap="flat" cmpd="sng" algn="ctr">
+                      <a:solidFill>
+                        <a:srgbClr val="8DA9C4"/>
+                      </a:solidFill>
+                      <a:prstDash val="solid"/>
+                      <a:round/>
+                      <a:headEnd type="none" w="med" len="med"/>
+                      <a:tailEnd type="none" w="med" len="med"/>
+                    </a:lnB>
+                  </a:tcPr>
+                </a:tc>
+                <a:tc>
+                  <a:txBody>
+                    <a:bodyPr/>
+                    <a:lstStyle/>
+                    <a:p>
+                      <a:pPr indent="0" marL="0">
+                        <a:buNone/>
+                      </a:pPr>
+                      <a:r>
+                        <a:rPr lang="en-US" sz="1300" dirty="0">
+                          <a:solidFill>
+                            <a:srgbClr val="1A1A1A"/>
+                          </a:solidFill>
+                          <a:latin typeface="Calibri" pitchFamily="34" charset="0"/>
+                          <a:ea typeface="Calibri" pitchFamily="34" charset="-122"/>
+                          <a:cs typeface="Calibri" pitchFamily="34" charset="-120"/>
+                        </a:rPr>
+                        <a:t>no fake edge against the market</a:t>
+                      </a:r>
+                      <a:endParaRPr lang="en-US" sz="1300" dirty="0">
+                        <a:latin typeface="Calibri" charset="0"/>
+                        <a:ea typeface="Calibri" charset="0"/>
+                        <a:cs typeface="Calibri" charset="0"/>
+                      </a:endParaRPr>
+                    </a:p>
+                  </a:txBody>
+                  <a:tcPr marL="91440" marR="91440" marT="45720" marB="45720">
+                    <a:lnL w="12700" cap="flat" cmpd="sng" algn="ctr">
+                      <a:solidFill>
+                        <a:srgbClr val="8DA9C4"/>
+                      </a:solidFill>
+                      <a:prstDash val="solid"/>
+                      <a:round/>
+                      <a:headEnd type="none" w="med" len="med"/>
+                      <a:tailEnd type="none" w="med" len="med"/>
+                    </a:lnL>
+                    <a:lnR w="12700" cap="flat" cmpd="sng" algn="ctr">
+                      <a:solidFill>
+                        <a:srgbClr val="8DA9C4"/>
+                      </a:solidFill>
+                      <a:prstDash val="solid"/>
+                      <a:round/>
+                      <a:headEnd type="none" w="med" len="med"/>
+                      <a:tailEnd type="none" w="med" len="med"/>
+                    </a:lnR>
+                    <a:lnT w="12700" cap="flat" cmpd="sng" algn="ctr">
+                      <a:solidFill>
+                        <a:srgbClr val="8DA9C4"/>
+                      </a:solidFill>
+                      <a:prstDash val="solid"/>
+                      <a:round/>
+                      <a:headEnd type="none" w="med" len="med"/>
+                      <a:tailEnd type="none" w="med" len="med"/>
+                    </a:lnT>
+                    <a:lnB w="12700" cap="flat" cmpd="sng" algn="ctr">
+                      <a:solidFill>
+                        <a:srgbClr val="8DA9C4"/>
+                      </a:solidFill>
+                      <a:prstDash val="solid"/>
+                      <a:round/>
+                      <a:headEnd type="none" w="med" len="med"/>
+                      <a:tailEnd type="none" w="med" len="med"/>
+                    </a:lnB>
+                  </a:tcPr>
+                </a:tc>
+              </a:tr>
+            </a:tbl>
+          </a:graphicData>
+        </a:graphic>
+      </p:graphicFrame>
+      <p:sp>
+        <p:nvSpPr>
+          <p:cNvPr id="15" name="Text 12"/>
+          <p:cNvSpPr/>
+          <p:nvPr/>
+        </p:nvSpPr>
+        <p:spPr>
+          <a:xfrm>
+            <a:off x="502920" y="6080760"/>
+            <a:ext cx="11247120" cy="320040"/>
+          </a:xfrm>
+          <a:prstGeom prst="rect">
+            <a:avLst/>
+          </a:prstGeom>
+          <a:noFill/>
+          <a:ln/>
+        </p:spPr>
+        <p:txBody>
+          <a:bodyPr wrap="square" rtlCol="0" anchor="ctr"/>
+          <a:lstStyle/>
+          <a:p>
+            <a:pPr algn="ctr" indent="0" marL="0">
+              <a:buNone/>
+            </a:pPr>
+            <a:r>
+              <a:rPr lang="en-US" sz="1100" i="1" dirty="0">
+                <a:solidFill>
+                  <a:srgbClr val="8DA9C4"/>
                 </a:solidFill>
                 <a:latin typeface="Calibri" pitchFamily="34" charset="0"/>
                 <a:ea typeface="Calibri" pitchFamily="34" charset="-122"/>
                 <a:cs typeface="Calibri" pitchFamily="34" charset="-120"/>
               </a:rPr>
-              <a:t>only because the favorite happened to win this one game.</a:t>
-            </a:r>
-            <a:endParaRPr lang="en-US" sz="1300" dirty="0"/>
-          </a:p>
-        </p:txBody>
-      </p:sp>
-      <p:sp>
-        <p:nvSpPr>
-          <p:cNvPr id="11" name="Text 8"/>
-          <p:cNvSpPr/>
-          <p:nvPr/>
-        </p:nvSpPr>
-        <p:spPr>
-          <a:xfrm>
-            <a:off x="7589520" y="4572000"/>
-            <a:ext cx="4114800" cy="1371600"/>
+              <a:t>Block-bootstrap by GAME (not tick) — within-game ticks share one outcome; effective n is games.</a:t>
+            </a:r>
+            <a:endParaRPr lang="en-US" sz="1100" dirty="0"/>
+          </a:p>
+        </p:txBody>
+      </p:sp>
+      <p:sp>
+        <p:nvSpPr>
+          <p:cNvPr id="16" name="Text 13"/>
+          <p:cNvSpPr/>
+          <p:nvPr/>
+        </p:nvSpPr>
+        <p:spPr>
+          <a:xfrm>
+            <a:off x="502920" y="6492240"/>
+            <a:ext cx="7315200" cy="274320"/>
           </a:xfrm>
           <a:prstGeom prst="rect">
             <a:avLst/>
@@ -2592,81 +3510,14 @@
               <a:buNone/>
             </a:pPr>
             <a:r>
-              <a:rPr lang="en-US" sz="1300" dirty="0">
-                <a:solidFill>
-                  <a:srgbClr val="1A1A1A"/>
+              <a:rPr lang="en-US" sz="1000" dirty="0">
+                <a:solidFill>
+                  <a:srgbClr val="8DA9C4"/>
                 </a:solidFill>
                 <a:latin typeface="Calibri" pitchFamily="34" charset="0"/>
                 <a:ea typeface="Calibri" pitchFamily="34" charset="-122"/>
                 <a:cs typeface="Calibri" pitchFamily="34" charset="-120"/>
               </a:rPr>
-              <a:t>This is the </a:t>
-            </a:r>
-            <a:pPr indent="0" marL="0">
-              <a:buNone/>
-            </a:pPr>
-            <a:r>
-              <a:rPr lang="en-US" sz="1300" b="1" dirty="0">
-                <a:solidFill>
-                  <a:srgbClr val="EEA02B"/>
-                </a:solidFill>
-                <a:latin typeface="Calibri" pitchFamily="34" charset="0"/>
-                <a:ea typeface="Calibri" pitchFamily="34" charset="-122"/>
-                <a:cs typeface="Calibri" pitchFamily="34" charset="-120"/>
-              </a:rPr>
-              <a:t>n=1 problem</a:t>
-            </a:r>
-            <a:pPr indent="0" marL="0">
-              <a:buNone/>
-            </a:pPr>
-            <a:r>
-              <a:rPr lang="en-US" sz="1300" dirty="0">
-                <a:solidFill>
-                  <a:srgbClr val="1A1A1A"/>
-                </a:solidFill>
-                <a:latin typeface="Calibri" pitchFamily="34" charset="0"/>
-                <a:ea typeface="Calibri" pitchFamily="34" charset="-122"/>
-                <a:cs typeface="Calibri" pitchFamily="34" charset="-120"/>
-              </a:rPr>
-              <a:t> made tangible — the methodological backbone of the project.</a:t>
-            </a:r>
-            <a:endParaRPr lang="en-US" sz="1300" dirty="0"/>
-          </a:p>
-        </p:txBody>
-      </p:sp>
-      <p:sp>
-        <p:nvSpPr>
-          <p:cNvPr id="12" name="Text 9"/>
-          <p:cNvSpPr/>
-          <p:nvPr/>
-        </p:nvSpPr>
-        <p:spPr>
-          <a:xfrm>
-            <a:off x="502920" y="6492240"/>
-            <a:ext cx="7315200" cy="274320"/>
-          </a:xfrm>
-          <a:prstGeom prst="rect">
-            <a:avLst/>
-          </a:prstGeom>
-          <a:noFill/>
-          <a:ln/>
-        </p:spPr>
-        <p:txBody>
-          <a:bodyPr wrap="square" rtlCol="0" anchor="ctr"/>
-          <a:lstStyle/>
-          <a:p>
-            <a:pPr indent="0" marL="0">
-              <a:buNone/>
-            </a:pPr>
-            <a:r>
-              <a:rPr lang="en-US" sz="1000" dirty="0">
-                <a:solidFill>
-                  <a:srgbClr val="8DA9C4"/>
-                </a:solidFill>
-                <a:latin typeface="Calibri" pitchFamily="34" charset="0"/>
-                <a:ea typeface="Calibri" pitchFamily="34" charset="-122"/>
-                <a:cs typeface="Calibri" pitchFamily="34" charset="-120"/>
-              </a:rPr>
               <a:t>STATS 211 · NBA Mispricing · Sit &amp; Manathattai</a:t>
             </a:r>
             <a:endParaRPr lang="en-US" sz="1000" dirty="0"/>
@@ -2675,7 +3526,7 @@
       </p:sp>
       <p:sp>
         <p:nvSpPr>
-          <p:cNvPr id="13" name="Text 10"/>
+          <p:cNvPr id="17" name="Text 14"/>
           <p:cNvSpPr/>
           <p:nvPr/>
         </p:nvSpPr>
@@ -2777,7 +3628,7 @@
                 <a:ea typeface="Georgia" pitchFamily="34" charset="-122"/>
                 <a:cs typeface="Georgia" pitchFamily="34" charset="-120"/>
               </a:rPr>
-              <a:t>Game 6 pilot · OKC @ SAS, 2026-05-28  (FINAL SAS 118–91)</a:t>
+              <a:t>Finding 3 · Against liquid books, n=1 is pure noise</a:t>
             </a:r>
             <a:endParaRPr lang="en-US" sz="2800" dirty="0"/>
           </a:p>
@@ -2816,7 +3667,7 @@
                 <a:ea typeface="Calibri" pitchFamily="34" charset="-122"/>
                 <a:cs typeface="Calibri" pitchFamily="34" charset="-120"/>
               </a:rPr>
-              <a:t>61 in-1H ticks on Kalshi · the 5-game pool tells the rest of the story</a:t>
+              <a:t>Live pilot: SAS @ OKC, 2026-05-26 (FINAL OKC 127–114) · 73 ticks · 6 books</a:t>
             </a:r>
             <a:endParaRPr lang="en-US" sz="1400" dirty="0"/>
           </a:p>
@@ -2847,7 +3698,7 @@
       </p:sp>
       <p:pic>
         <p:nvPicPr>
-          <p:cNvPr id="5" name="Image 0" descr="slides/figures/game6_pilot.png">    </p:cNvPr>
+          <p:cNvPr id="5" name="Image 0" descr="slides/figures/pilot_roi.png">    </p:cNvPr>
           <p:cNvPicPr>
             <a:picLocks noChangeAspect="1"/>
           </p:cNvPicPr>
@@ -2861,8 +3712,8 @@
         </p:blipFill>
         <p:spPr>
           <a:xfrm>
-            <a:off x="1554480" y="1371600"/>
-            <a:ext cx="9052560" cy="4206240"/>
+            <a:off x="365760" y="1417320"/>
+            <a:ext cx="6858000" cy="4572000"/>
           </a:xfrm>
           <a:prstGeom prst="rect">
             <a:avLst/>
@@ -2877,20 +3728,20 @@
         </p:nvSpPr>
         <p:spPr>
           <a:xfrm>
-            <a:off x="502920" y="5669280"/>
-            <a:ext cx="11247120" cy="914400"/>
+            <a:off x="7360920" y="1417320"/>
+            <a:ext cx="4434840" cy="4617720"/>
           </a:xfrm>
           <a:prstGeom prst="roundRect">
             <a:avLst>
-              <a:gd name="adj" fmla="val 8000"/>
+              <a:gd name="adj" fmla="val 2062"/>
             </a:avLst>
           </a:prstGeom>
           <a:solidFill>
             <a:srgbClr val="F6F6F2"/>
           </a:solidFill>
-          <a:ln w="16510">
+          <a:ln w="19050">
             <a:solidFill>
-              <a:srgbClr val="EEA02B"/>
+              <a:srgbClr val="1C7293"/>
             </a:solidFill>
             <a:prstDash val="solid"/>
           </a:ln>
@@ -2904,8 +3755,8 @@
         </p:nvSpPr>
         <p:spPr>
           <a:xfrm>
-            <a:off x="777240" y="5760720"/>
-            <a:ext cx="10698480" cy="777240"/>
+            <a:off x="7589520" y="1554480"/>
+            <a:ext cx="4114800" cy="502920"/>
           </a:xfrm>
           <a:prstGeom prst="rect">
             <a:avLst/>
@@ -2921,16 +3772,80 @@
               <a:buNone/>
             </a:pPr>
             <a:r>
-              <a:rPr lang="en-US" sz="1300" b="1" dirty="0">
+              <a:rPr lang="en-US" sz="1900" b="1" dirty="0">
                 <a:solidFill>
                   <a:srgbClr val="0B2545"/>
+                </a:solidFill>
+                <a:latin typeface="Georgia" pitchFamily="34" charset="0"/>
+                <a:ea typeface="Georgia" pitchFamily="34" charset="-122"/>
+                <a:cs typeface="Georgia" pitchFamily="34" charset="-120"/>
+              </a:rPr>
+              <a:t>The lesson IS the result.</a:t>
+            </a:r>
+            <a:endParaRPr lang="en-US" sz="1900" dirty="0"/>
+          </a:p>
+        </p:txBody>
+      </p:sp>
+      <p:sp>
+        <p:nvSpPr>
+          <p:cNvPr id="8" name="Text 5"/>
+          <p:cNvSpPr/>
+          <p:nvPr/>
+        </p:nvSpPr>
+        <p:spPr>
+          <a:xfrm>
+            <a:off x="7589520" y="2103120"/>
+            <a:ext cx="4114800" cy="594360"/>
+          </a:xfrm>
+          <a:prstGeom prst="rect">
+            <a:avLst/>
+          </a:prstGeom>
+          <a:noFill/>
+          <a:ln/>
+        </p:spPr>
+        <p:txBody>
+          <a:bodyPr wrap="square" rtlCol="0" anchor="ctr"/>
+          <a:lstStyle/>
+          <a:p>
+            <a:pPr indent="0" marL="0">
+              <a:buNone/>
+            </a:pPr>
+            <a:r>
+              <a:rPr lang="en-US" sz="1300" dirty="0">
+                <a:solidFill>
+                  <a:srgbClr val="1A1A1A"/>
                 </a:solidFill>
                 <a:latin typeface="Calibri" pitchFamily="34" charset="0"/>
                 <a:ea typeface="Calibri" pitchFamily="34" charset="-122"/>
                 <a:cs typeface="Calibri" pitchFamily="34" charset="-120"/>
               </a:rPr>
-              <a:t>Game 6 alone: </a:t>
-            </a:r>
+              <a:t>Model faded SA (underdog) early when the score was close.</a:t>
+            </a:r>
+            <a:endParaRPr lang="en-US" sz="1300" dirty="0"/>
+          </a:p>
+        </p:txBody>
+      </p:sp>
+      <p:sp>
+        <p:nvSpPr>
+          <p:cNvPr id="9" name="Text 6"/>
+          <p:cNvSpPr/>
+          <p:nvPr/>
+        </p:nvSpPr>
+        <p:spPr>
+          <a:xfrm>
+            <a:off x="7589520" y="2606040"/>
+            <a:ext cx="4114800" cy="365760"/>
+          </a:xfrm>
+          <a:prstGeom prst="rect">
+            <a:avLst/>
+          </a:prstGeom>
+          <a:noFill/>
+          <a:ln/>
+        </p:spPr>
+        <p:txBody>
+          <a:bodyPr wrap="square" rtlCol="0" anchor="ctr"/>
+          <a:lstStyle/>
+          <a:p>
             <a:pPr indent="0" marL="0">
               <a:buNone/>
             </a:pPr>
@@ -2943,87 +3858,165 @@
                 <a:ea typeface="Calibri" pitchFamily="34" charset="-122"/>
                 <a:cs typeface="Calibri" pitchFamily="34" charset="-120"/>
               </a:rPr>
-              <a:t>model +12% on Kalshi 1H (smallest of the 5). </a:t>
-            </a:r>
+              <a:t>OKC pulled away and won 127–114.</a:t>
+            </a:r>
+            <a:endParaRPr lang="en-US" sz="1300" dirty="0"/>
+          </a:p>
+        </p:txBody>
+      </p:sp>
+      <p:sp>
+        <p:nvSpPr>
+          <p:cNvPr id="10" name="Text 7"/>
+          <p:cNvSpPr/>
+          <p:nvPr/>
+        </p:nvSpPr>
+        <p:spPr>
+          <a:xfrm>
+            <a:off x="7589520" y="3108960"/>
+            <a:ext cx="4114800" cy="1371600"/>
+          </a:xfrm>
+          <a:prstGeom prst="rect">
+            <a:avLst/>
+          </a:prstGeom>
+          <a:noFill/>
+          <a:ln/>
+        </p:spPr>
+        <p:txBody>
+          <a:bodyPr wrap="square" rtlCol="0" anchor="ctr"/>
+          <a:lstStyle/>
+          <a:p>
             <a:pPr indent="0" marL="0">
               <a:buNone/>
             </a:pPr>
             <a:r>
-              <a:rPr lang="en-US" sz="1300" b="1" dirty="0">
-                <a:solidFill>
-                  <a:srgbClr val="EEA02B"/>
+              <a:rPr lang="en-US" sz="1300" dirty="0">
+                <a:solidFill>
+                  <a:srgbClr val="1A1A1A"/>
                 </a:solidFill>
                 <a:latin typeface="Calibri" pitchFamily="34" charset="0"/>
                 <a:ea typeface="Calibri" pitchFamily="34" charset="-122"/>
                 <a:cs typeface="Calibri" pitchFamily="34" charset="-120"/>
               </a:rPr>
-              <a:t>Pool of 5: +95%. </a:t>
+              <a:t>'Always favorite' looks brilliant — </a:t>
             </a:r>
             <a:pPr indent="0" marL="0">
               <a:buNone/>
             </a:pPr>
             <a:r>
-              <a:rPr lang="en-US" sz="1300" dirty="0">
-                <a:solidFill>
-                  <a:srgbClr val="1A1A1A"/>
+              <a:rPr lang="en-US" sz="1300" i="1" dirty="0">
+                <a:solidFill>
+                  <a:srgbClr val="13315C"/>
                 </a:solidFill>
                 <a:latin typeface="Calibri" pitchFamily="34" charset="0"/>
                 <a:ea typeface="Calibri" pitchFamily="34" charset="-122"/>
                 <a:cs typeface="Calibri" pitchFamily="34" charset="-120"/>
               </a:rPr>
-              <a:t>But Kalshi 1H prices were thin and stale, so the model 'beats' a price that isn't moving — </a:t>
-            </a:r>
+              <a:t>only because the favorite happened to win this one game.</a:t>
+            </a:r>
+            <a:endParaRPr lang="en-US" sz="1300" dirty="0"/>
+          </a:p>
+        </p:txBody>
+      </p:sp>
+      <p:sp>
+        <p:nvSpPr>
+          <p:cNvPr id="11" name="Text 8"/>
+          <p:cNvSpPr/>
+          <p:nvPr/>
+        </p:nvSpPr>
+        <p:spPr>
+          <a:xfrm>
+            <a:off x="7589520" y="4572000"/>
+            <a:ext cx="4114800" cy="1371600"/>
+          </a:xfrm>
+          <a:prstGeom prst="rect">
+            <a:avLst/>
+          </a:prstGeom>
+          <a:noFill/>
+          <a:ln/>
+        </p:spPr>
+        <p:txBody>
+          <a:bodyPr wrap="square" rtlCol="0" anchor="ctr"/>
+          <a:lstStyle/>
+          <a:p>
             <a:pPr indent="0" marL="0">
               <a:buNone/>
             </a:pPr>
             <a:r>
-              <a:rPr lang="en-US" sz="1300" i="1" dirty="0">
-                <a:solidFill>
-                  <a:srgbClr val="13315C"/>
+              <a:rPr lang="en-US" sz="1300" dirty="0">
+                <a:solidFill>
+                  <a:srgbClr val="1A1A1A"/>
                 </a:solidFill>
                 <a:latin typeface="Calibri" pitchFamily="34" charset="0"/>
                 <a:ea typeface="Calibri" pitchFamily="34" charset="-122"/>
                 <a:cs typeface="Calibri" pitchFamily="34" charset="-120"/>
               </a:rPr>
-              <a:t>stale-mid + n=5 + mid quotes = artifact, not edge.</a:t>
-            </a:r>
-            <a:endParaRPr lang="en-US" sz="1300" dirty="0"/>
-          </a:p>
-        </p:txBody>
-      </p:sp>
-      <p:sp>
-        <p:nvSpPr>
-          <p:cNvPr id="8" name="Text 5"/>
-          <p:cNvSpPr/>
-          <p:nvPr/>
-        </p:nvSpPr>
-        <p:spPr>
-          <a:xfrm>
-            <a:off x="502920" y="6492240"/>
-            <a:ext cx="7315200" cy="274320"/>
-          </a:xfrm>
-          <a:prstGeom prst="rect">
-            <a:avLst/>
-          </a:prstGeom>
-          <a:noFill/>
-          <a:ln/>
-        </p:spPr>
-        <p:txBody>
-          <a:bodyPr wrap="square" rtlCol="0" anchor="ctr"/>
-          <a:lstStyle/>
-          <a:p>
+              <a:t>This is the </a:t>
+            </a:r>
             <a:pPr indent="0" marL="0">
               <a:buNone/>
             </a:pPr>
             <a:r>
-              <a:rPr lang="en-US" sz="1000" dirty="0">
-                <a:solidFill>
-                  <a:srgbClr val="8DA9C4"/>
+              <a:rPr lang="en-US" sz="1300" b="1" dirty="0">
+                <a:solidFill>
+                  <a:srgbClr val="EEA02B"/>
                 </a:solidFill>
                 <a:latin typeface="Calibri" pitchFamily="34" charset="0"/>
                 <a:ea typeface="Calibri" pitchFamily="34" charset="-122"/>
                 <a:cs typeface="Calibri" pitchFamily="34" charset="-120"/>
               </a:rPr>
+              <a:t>n=1 problem</a:t>
+            </a:r>
+            <a:pPr indent="0" marL="0">
+              <a:buNone/>
+            </a:pPr>
+            <a:r>
+              <a:rPr lang="en-US" sz="1300" dirty="0">
+                <a:solidFill>
+                  <a:srgbClr val="1A1A1A"/>
+                </a:solidFill>
+                <a:latin typeface="Calibri" pitchFamily="34" charset="0"/>
+                <a:ea typeface="Calibri" pitchFamily="34" charset="-122"/>
+                <a:cs typeface="Calibri" pitchFamily="34" charset="-120"/>
+              </a:rPr>
+              <a:t> made tangible — the methodological backbone of the project.</a:t>
+            </a:r>
+            <a:endParaRPr lang="en-US" sz="1300" dirty="0"/>
+          </a:p>
+        </p:txBody>
+      </p:sp>
+      <p:sp>
+        <p:nvSpPr>
+          <p:cNvPr id="12" name="Text 9"/>
+          <p:cNvSpPr/>
+          <p:nvPr/>
+        </p:nvSpPr>
+        <p:spPr>
+          <a:xfrm>
+            <a:off x="502920" y="6492240"/>
+            <a:ext cx="7315200" cy="274320"/>
+          </a:xfrm>
+          <a:prstGeom prst="rect">
+            <a:avLst/>
+          </a:prstGeom>
+          <a:noFill/>
+          <a:ln/>
+        </p:spPr>
+        <p:txBody>
+          <a:bodyPr wrap="square" rtlCol="0" anchor="ctr"/>
+          <a:lstStyle/>
+          <a:p>
+            <a:pPr indent="0" marL="0">
+              <a:buNone/>
+            </a:pPr>
+            <a:r>
+              <a:rPr lang="en-US" sz="1000" dirty="0">
+                <a:solidFill>
+                  <a:srgbClr val="8DA9C4"/>
+                </a:solidFill>
+                <a:latin typeface="Calibri" pitchFamily="34" charset="0"/>
+                <a:ea typeface="Calibri" pitchFamily="34" charset="-122"/>
+                <a:cs typeface="Calibri" pitchFamily="34" charset="-120"/>
+              </a:rPr>
               <a:t>STATS 211 · NBA Mispricing · Sit &amp; Manathattai</a:t>
             </a:r>
             <a:endParaRPr lang="en-US" sz="1000" dirty="0"/>
@@ -3032,7 +4025,7 @@
       </p:sp>
       <p:sp>
         <p:nvSpPr>
-          <p:cNvPr id="9" name="Text 6"/>
+          <p:cNvPr id="13" name="Text 10"/>
           <p:cNvSpPr/>
           <p:nvPr/>
         </p:nvSpPr>
@@ -3134,7 +4127,7 @@
                 <a:ea typeface="Georgia" pitchFamily="34" charset="-122"/>
                 <a:cs typeface="Georgia" pitchFamily="34" charset="-120"/>
               </a:rPr>
-              <a:t>Connecting back to Halawi</a:t>
+              <a:t>Finding 4 · The Kalshi +95% is a stale-mid artifact</a:t>
             </a:r>
             <a:endParaRPr lang="en-US" sz="2800" dirty="0"/>
           </a:p>
@@ -3173,7 +4166,7 @@
                 <a:ea typeface="Calibri" pitchFamily="34" charset="-122"/>
                 <a:cs typeface="Calibri" pitchFamily="34" charset="-120"/>
               </a:rPr>
-              <a:t>The Aggregate column — applied to NBA</a:t>
+              <a:t>Game 6 (OKC@SAS, 2026-05-28, FINAL SAS 118–91) + 4 archived games · 311 ticks</a:t>
             </a:r>
             <a:endParaRPr lang="en-US" sz="1400" dirty="0"/>
           </a:p>
@@ -3202,16 +4195,67 @@
           </a:ln>
         </p:spPr>
       </p:sp>
-      <p:sp>
-        <p:nvSpPr>
-          <p:cNvPr id="5" name="Text 3"/>
-          <p:cNvSpPr/>
-          <p:nvPr/>
-        </p:nvSpPr>
-        <p:spPr>
-          <a:xfrm>
-            <a:off x="502920" y="1463040"/>
-            <a:ext cx="11247120" cy="640080"/>
+      <p:pic>
+        <p:nvPicPr>
+          <p:cNvPr id="5" name="Image 0" descr="slides/figures/game6_pilot.png">    </p:cNvPr>
+          <p:cNvPicPr>
+            <a:picLocks noChangeAspect="1"/>
+          </p:cNvPicPr>
+          <p:nvPr/>
+        </p:nvPicPr>
+        <p:blipFill>
+          <a:blip r:embed="rId1"/>
+          <a:stretch>
+            <a:fillRect/>
+          </a:stretch>
+        </p:blipFill>
+        <p:spPr>
+          <a:xfrm>
+            <a:off x="1554480" y="1371600"/>
+            <a:ext cx="9052560" cy="4206240"/>
+          </a:xfrm>
+          <a:prstGeom prst="rect">
+            <a:avLst/>
+          </a:prstGeom>
+        </p:spPr>
+      </p:pic>
+      <p:sp>
+        <p:nvSpPr>
+          <p:cNvPr id="6" name="Shape 3"/>
+          <p:cNvSpPr/>
+          <p:nvPr/>
+        </p:nvSpPr>
+        <p:spPr>
+          <a:xfrm>
+            <a:off x="502920" y="5669280"/>
+            <a:ext cx="11247120" cy="914400"/>
+          </a:xfrm>
+          <a:prstGeom prst="roundRect">
+            <a:avLst>
+              <a:gd name="adj" fmla="val 8000"/>
+            </a:avLst>
+          </a:prstGeom>
+          <a:solidFill>
+            <a:srgbClr val="F6F6F2"/>
+          </a:solidFill>
+          <a:ln w="16510">
+            <a:solidFill>
+              <a:srgbClr val="EEA02B"/>
+            </a:solidFill>
+            <a:prstDash val="solid"/>
+          </a:ln>
+        </p:spPr>
+      </p:sp>
+      <p:sp>
+        <p:nvSpPr>
+          <p:cNvPr id="7" name="Text 4"/>
+          <p:cNvSpPr/>
+          <p:nvPr/>
+        </p:nvSpPr>
+        <p:spPr>
+          <a:xfrm>
+            <a:off x="777240" y="5760720"/>
+            <a:ext cx="10698480" cy="777240"/>
           </a:xfrm>
           <a:prstGeom prst="rect">
             <a:avLst/>
@@ -3227,21 +4271,21 @@
               <a:buNone/>
             </a:pPr>
             <a:r>
-              <a:rPr lang="en-US" sz="1800" b="1" dirty="0">
-                <a:solidFill>
-                  <a:srgbClr val="1A1A1A"/>
+              <a:rPr lang="en-US" sz="1300" b="1" dirty="0">
+                <a:solidFill>
+                  <a:srgbClr val="0B2545"/>
                 </a:solidFill>
                 <a:latin typeface="Calibri" pitchFamily="34" charset="0"/>
                 <a:ea typeface="Calibri" pitchFamily="34" charset="-122"/>
                 <a:cs typeface="Calibri" pitchFamily="34" charset="-120"/>
               </a:rPr>
-              <a:t>Halawi's buried result:  </a:t>
+              <a:t>Game 6 alone: </a:t>
             </a:r>
             <a:pPr indent="0" marL="0">
               <a:buNone/>
             </a:pPr>
             <a:r>
-              <a:rPr lang="en-US" sz="1800" dirty="0">
+              <a:rPr lang="en-US" sz="1300" dirty="0">
                 <a:solidFill>
                   <a:srgbClr val="1A1A1A"/>
                 </a:solidFill>
@@ -3249,13 +4293,13 @@
                 <a:ea typeface="Calibri" pitchFamily="34" charset="-122"/>
                 <a:cs typeface="Calibri" pitchFamily="34" charset="-120"/>
               </a:rPr>
-              <a:t>4·LM + 1·crowd &gt; either alone — because the errors are </a:t>
+              <a:t>model +12% on Kalshi 1H (smallest of the 5). </a:t>
             </a:r>
             <a:pPr indent="0" marL="0">
               <a:buNone/>
             </a:pPr>
             <a:r>
-              <a:rPr lang="en-US" sz="1800" b="1" i="1" dirty="0">
+              <a:rPr lang="en-US" sz="1300" b="1" dirty="0">
                 <a:solidFill>
                   <a:srgbClr val="EEA02B"/>
                 </a:solidFill>
@@ -3263,38 +4307,13 @@
                 <a:ea typeface="Calibri" pitchFamily="34" charset="-122"/>
                 <a:cs typeface="Calibri" pitchFamily="34" charset="-120"/>
               </a:rPr>
-              <a:t>independent.</a:t>
-            </a:r>
-            <a:endParaRPr lang="en-US" sz="1800" dirty="0"/>
-          </a:p>
-        </p:txBody>
-      </p:sp>
-      <p:sp>
-        <p:nvSpPr>
-          <p:cNvPr id="6" name="Text 4"/>
-          <p:cNvSpPr/>
-          <p:nvPr/>
-        </p:nvSpPr>
-        <p:spPr>
-          <a:xfrm>
-            <a:off x="502920" y="2194560"/>
-            <a:ext cx="11247120" cy="914400"/>
-          </a:xfrm>
-          <a:prstGeom prst="rect">
-            <a:avLst/>
-          </a:prstGeom>
-          <a:noFill/>
-          <a:ln/>
-        </p:spPr>
-        <p:txBody>
-          <a:bodyPr wrap="square" rtlCol="0" anchor="ctr"/>
-          <a:lstStyle/>
-          <a:p>
+              <a:t>Pool of 5: +95%. </a:t>
+            </a:r>
             <a:pPr indent="0" marL="0">
               <a:buNone/>
             </a:pPr>
             <a:r>
-              <a:rPr lang="en-US" sz="1800" dirty="0">
+              <a:rPr lang="en-US" sz="1300" dirty="0">
                 <a:solidFill>
                   <a:srgbClr val="1A1A1A"/>
                 </a:solidFill>
@@ -3302,283 +4321,59 @@
                 <a:ea typeface="Calibri" pitchFamily="34" charset="-122"/>
                 <a:cs typeface="Calibri" pitchFamily="34" charset="-120"/>
               </a:rPr>
-              <a:t>Our structural model and the live market are also </a:t>
+              <a:t>But Kalshi 1H prices were thin and stale, so the model 'beats' a price that isn't moving — </a:t>
             </a:r>
             <a:pPr indent="0" marL="0">
               <a:buNone/>
             </a:pPr>
             <a:r>
-              <a:rPr lang="en-US" sz="1800" b="1" dirty="0">
-                <a:solidFill>
-                  <a:srgbClr val="0B2545"/>
+              <a:rPr lang="en-US" sz="1300" i="1" dirty="0">
+                <a:solidFill>
+                  <a:srgbClr val="13315C"/>
                 </a:solidFill>
                 <a:latin typeface="Calibri" pitchFamily="34" charset="0"/>
                 <a:ea typeface="Calibri" pitchFamily="34" charset="-122"/>
                 <a:cs typeface="Calibri" pitchFamily="34" charset="-120"/>
               </a:rPr>
-              <a:t>partly independent error sources</a:t>
-            </a:r>
+              <a:t>stale-mid + n=5 + mid quotes = artifact, not edge.</a:t>
+            </a:r>
+            <a:endParaRPr lang="en-US" sz="1300" dirty="0"/>
+          </a:p>
+        </p:txBody>
+      </p:sp>
+      <p:sp>
+        <p:nvSpPr>
+          <p:cNvPr id="8" name="Text 5"/>
+          <p:cNvSpPr/>
+          <p:nvPr/>
+        </p:nvSpPr>
+        <p:spPr>
+          <a:xfrm>
+            <a:off x="502920" y="6492240"/>
+            <a:ext cx="7315200" cy="274320"/>
+          </a:xfrm>
+          <a:prstGeom prst="rect">
+            <a:avLst/>
+          </a:prstGeom>
+          <a:noFill/>
+          <a:ln/>
+        </p:spPr>
+        <p:txBody>
+          <a:bodyPr wrap="square" rtlCol="0" anchor="ctr"/>
+          <a:lstStyle/>
+          <a:p>
             <a:pPr indent="0" marL="0">
               <a:buNone/>
             </a:pPr>
             <a:r>
-              <a:rPr lang="en-US" sz="1800" dirty="0">
-                <a:solidFill>
-                  <a:srgbClr val="1A1A1A"/>
+              <a:rPr lang="en-US" sz="1000" dirty="0">
+                <a:solidFill>
+                  <a:srgbClr val="8DA9C4"/>
                 </a:solidFill>
                 <a:latin typeface="Calibri" pitchFamily="34" charset="0"/>
                 <a:ea typeface="Calibri" pitchFamily="34" charset="-122"/>
                 <a:cs typeface="Calibri" pitchFamily="34" charset="-120"/>
               </a:rPr>
-              <a:t> — model reads game state, market absorbs sentiment + inside flow.</a:t>
-            </a:r>
-            <a:endParaRPr lang="en-US" sz="1800" dirty="0"/>
-          </a:p>
-        </p:txBody>
-      </p:sp>
-      <p:sp>
-        <p:nvSpPr>
-          <p:cNvPr id="7" name="Shape 5"/>
-          <p:cNvSpPr/>
-          <p:nvPr/>
-        </p:nvSpPr>
-        <p:spPr>
-          <a:xfrm>
-            <a:off x="502920" y="3291840"/>
-            <a:ext cx="11247120" cy="1371600"/>
-          </a:xfrm>
-          <a:prstGeom prst="roundRect">
-            <a:avLst>
-              <a:gd name="adj" fmla="val 5333"/>
-            </a:avLst>
-          </a:prstGeom>
-          <a:solidFill>
-            <a:srgbClr val="EEF3F8"/>
-          </a:solidFill>
-          <a:ln w="15240">
-            <a:solidFill>
-              <a:srgbClr val="1C7293"/>
-            </a:solidFill>
-            <a:prstDash val="solid"/>
-          </a:ln>
-        </p:spPr>
-      </p:sp>
-      <p:sp>
-        <p:nvSpPr>
-          <p:cNvPr id="8" name="Text 6"/>
-          <p:cNvSpPr/>
-          <p:nvPr/>
-        </p:nvSpPr>
-        <p:spPr>
-          <a:xfrm>
-            <a:off x="685800" y="3383280"/>
-            <a:ext cx="10881360" cy="868680"/>
-          </a:xfrm>
-          <a:prstGeom prst="rect">
-            <a:avLst/>
-          </a:prstGeom>
-          <a:noFill/>
-          <a:ln/>
-        </p:spPr>
-        <p:txBody>
-          <a:bodyPr wrap="square" rtlCol="0" anchor="ctr"/>
-          <a:lstStyle/>
-          <a:p>
-            <a:pPr algn="ctr" indent="0" marL="0">
-              <a:buNone/>
-            </a:pPr>
-            <a:r>
-              <a:rPr lang="en-US" sz="1800" b="1" dirty="0">
-                <a:solidFill>
-                  <a:srgbClr val="0B2545"/>
-                </a:solidFill>
-                <a:latin typeface="Courier New" pitchFamily="34" charset="0"/>
-                <a:ea typeface="Courier New" pitchFamily="34" charset="-122"/>
-                <a:cs typeface="Courier New" pitchFamily="34" charset="-120"/>
-              </a:rPr>
-              <a:t>p̂_aggregate  =  w · p_model  +  ( 1 − w ) · p_market_devig</a:t>
-            </a:r>
-            <a:endParaRPr lang="en-US" sz="1800" dirty="0"/>
-          </a:p>
-        </p:txBody>
-      </p:sp>
-      <p:sp>
-        <p:nvSpPr>
-          <p:cNvPr id="9" name="Text 7"/>
-          <p:cNvSpPr/>
-          <p:nvPr/>
-        </p:nvSpPr>
-        <p:spPr>
-          <a:xfrm>
-            <a:off x="685800" y="4206240"/>
-            <a:ext cx="10881360" cy="365760"/>
-          </a:xfrm>
-          <a:prstGeom prst="rect">
-            <a:avLst/>
-          </a:prstGeom>
-          <a:noFill/>
-          <a:ln/>
-        </p:spPr>
-        <p:txBody>
-          <a:bodyPr wrap="square" rtlCol="0" anchor="ctr"/>
-          <a:lstStyle/>
-          <a:p>
-            <a:pPr algn="ctr" indent="0" marL="0">
-              <a:buNone/>
-            </a:pPr>
-            <a:r>
-              <a:rPr lang="en-US" sz="1200" i="1" dirty="0">
-                <a:solidFill>
-                  <a:srgbClr val="13315C"/>
-                </a:solidFill>
-                <a:latin typeface="Calibri" pitchFamily="34" charset="0"/>
-                <a:ea typeface="Calibri" pitchFamily="34" charset="-122"/>
-                <a:cs typeface="Calibri" pitchFamily="34" charset="-120"/>
-              </a:rPr>
-              <a:t>the 'aggregate' variant (#3 in the planned table) — weight from validation Brier · aggregate's Brier ≤ min(components)</a:t>
-            </a:r>
-            <a:endParaRPr lang="en-US" sz="1200" dirty="0"/>
-          </a:p>
-        </p:txBody>
-      </p:sp>
-      <p:sp>
-        <p:nvSpPr>
-          <p:cNvPr id="10" name="Shape 8"/>
-          <p:cNvSpPr/>
-          <p:nvPr/>
-        </p:nvSpPr>
-        <p:spPr>
-          <a:xfrm>
-            <a:off x="502920" y="4846320"/>
-            <a:ext cx="11247120" cy="1508760"/>
-          </a:xfrm>
-          <a:prstGeom prst="roundRect">
-            <a:avLst>
-              <a:gd name="adj" fmla="val 6061"/>
-            </a:avLst>
-          </a:prstGeom>
-          <a:solidFill>
-            <a:srgbClr val="F6F6F2"/>
-          </a:solidFill>
-          <a:ln w="19050">
-            <a:solidFill>
-              <a:srgbClr val="1C7293"/>
-            </a:solidFill>
-            <a:prstDash val="solid"/>
-          </a:ln>
-        </p:spPr>
-      </p:sp>
-      <p:sp>
-        <p:nvSpPr>
-          <p:cNvPr id="11" name="Text 9"/>
-          <p:cNvSpPr/>
-          <p:nvPr/>
-        </p:nvSpPr>
-        <p:spPr>
-          <a:xfrm>
-            <a:off x="777240" y="4983480"/>
-            <a:ext cx="10698480" cy="365760"/>
-          </a:xfrm>
-          <a:prstGeom prst="rect">
-            <a:avLst/>
-          </a:prstGeom>
-          <a:noFill/>
-          <a:ln/>
-        </p:spPr>
-        <p:txBody>
-          <a:bodyPr wrap="square" rtlCol="0" anchor="ctr"/>
-          <a:lstStyle/>
-          <a:p>
-            <a:pPr indent="0" marL="0">
-              <a:buNone/>
-            </a:pPr>
-            <a:r>
-              <a:rPr lang="en-US" sz="1400" i="1" dirty="0">
-                <a:solidFill>
-                  <a:srgbClr val="13315C"/>
-                </a:solidFill>
-                <a:latin typeface="Calibri" pitchFamily="34" charset="0"/>
-                <a:ea typeface="Calibri" pitchFamily="34" charset="-122"/>
-                <a:cs typeface="Calibri" pitchFamily="34" charset="-120"/>
-              </a:rPr>
-              <a:t>Reframing:</a:t>
-            </a:r>
-            <a:endParaRPr lang="en-US" sz="1400" dirty="0"/>
-          </a:p>
-        </p:txBody>
-      </p:sp>
-      <p:sp>
-        <p:nvSpPr>
-          <p:cNvPr id="12" name="Text 10"/>
-          <p:cNvSpPr/>
-          <p:nvPr/>
-        </p:nvSpPr>
-        <p:spPr>
-          <a:xfrm>
-            <a:off x="777240" y="5349240"/>
-            <a:ext cx="10698480" cy="914400"/>
-          </a:xfrm>
-          <a:prstGeom prst="rect">
-            <a:avLst/>
-          </a:prstGeom>
-          <a:noFill/>
-          <a:ln/>
-        </p:spPr>
-        <p:txBody>
-          <a:bodyPr wrap="square" rtlCol="0" anchor="ctr"/>
-          <a:lstStyle/>
-          <a:p>
-            <a:pPr indent="0" marL="0">
-              <a:buNone/>
-            </a:pPr>
-            <a:r>
-              <a:rPr lang="en-US" sz="1500" dirty="0">
-                <a:solidFill>
-                  <a:srgbClr val="1A1A1A"/>
-                </a:solidFill>
-                <a:latin typeface="Calibri" pitchFamily="34" charset="0"/>
-                <a:ea typeface="Calibri" pitchFamily="34" charset="-122"/>
-                <a:cs typeface="Calibri" pitchFamily="34" charset="-120"/>
-              </a:rPr>
-              <a:t>The model's job isn't to BEAT the market everywhere — it's to COMPLEMENT it in the specific situations (comeback FG, salience 3PT) where the crowd's bias is strongest.</a:t>
-            </a:r>
-            <a:endParaRPr lang="en-US" sz="1500" dirty="0"/>
-          </a:p>
-        </p:txBody>
-      </p:sp>
-      <p:sp>
-        <p:nvSpPr>
-          <p:cNvPr id="13" name="Text 11"/>
-          <p:cNvSpPr/>
-          <p:nvPr/>
-        </p:nvSpPr>
-        <p:spPr>
-          <a:xfrm>
-            <a:off x="502920" y="6492240"/>
-            <a:ext cx="7315200" cy="274320"/>
-          </a:xfrm>
-          <a:prstGeom prst="rect">
-            <a:avLst/>
-          </a:prstGeom>
-          <a:noFill/>
-          <a:ln/>
-        </p:spPr>
-        <p:txBody>
-          <a:bodyPr wrap="square" rtlCol="0" anchor="ctr"/>
-          <a:lstStyle/>
-          <a:p>
-            <a:pPr indent="0" marL="0">
-              <a:buNone/>
-            </a:pPr>
-            <a:r>
-              <a:rPr lang="en-US" sz="1000" dirty="0">
-                <a:solidFill>
-                  <a:srgbClr val="8DA9C4"/>
-                </a:solidFill>
-                <a:latin typeface="Calibri" pitchFamily="34" charset="0"/>
-                <a:ea typeface="Calibri" pitchFamily="34" charset="-122"/>
-                <a:cs typeface="Calibri" pitchFamily="34" charset="-120"/>
-              </a:rPr>
               <a:t>STATS 211 · NBA Mispricing · Sit &amp; Manathattai</a:t>
             </a:r>
             <a:endParaRPr lang="en-US" sz="1000" dirty="0"/>
@@ -3587,7 +4382,7 @@
       </p:sp>
       <p:sp>
         <p:nvSpPr>
-          <p:cNvPr id="14" name="Text 12"/>
+          <p:cNvPr id="9" name="Text 6"/>
           <p:cNvSpPr/>
           <p:nvPr/>
         </p:nvSpPr>
@@ -3689,7 +4484,7 @@
                 <a:ea typeface="Georgia" pitchFamily="34" charset="-122"/>
                 <a:cs typeface="Georgia" pitchFamily="34" charset="-120"/>
               </a:rPr>
-              <a:t>Limitations &amp; future work</a:t>
+              <a:t>Connecting back to Halawi</a:t>
             </a:r>
             <a:endParaRPr lang="en-US" sz="2800" dirty="0"/>
           </a:p>
@@ -3728,7 +4523,7 @@
                 <a:ea typeface="Calibri" pitchFamily="34" charset="-122"/>
                 <a:cs typeface="Calibri" pitchFamily="34" charset="-120"/>
               </a:rPr>
-              <a:t>What we'd do next</a:t>
+              <a:t>The Aggregate column — applied to NBA</a:t>
             </a:r>
             <a:endParaRPr lang="en-US" sz="1400" dirty="0"/>
           </a:p>
@@ -3765,8 +4560,8 @@
         </p:nvSpPr>
         <p:spPr>
           <a:xfrm>
-            <a:off x="502920" y="1508760"/>
-            <a:ext cx="2926080" cy="457200"/>
+            <a:off x="502920" y="1463040"/>
+            <a:ext cx="11247120" cy="640080"/>
           </a:xfrm>
           <a:prstGeom prst="rect">
             <a:avLst/>
@@ -3782,46 +4577,7 @@
               <a:buNone/>
             </a:pPr>
             <a:r>
-              <a:rPr lang="en-US" sz="1600" b="1" dirty="0">
-                <a:solidFill>
-                  <a:srgbClr val="0B2545"/>
-                </a:solidFill>
-                <a:latin typeface="Georgia" pitchFamily="34" charset="0"/>
-                <a:ea typeface="Georgia" pitchFamily="34" charset="-122"/>
-                <a:cs typeface="Georgia" pitchFamily="34" charset="-120"/>
-              </a:rPr>
-              <a:t>Sample size</a:t>
-            </a:r>
-            <a:endParaRPr lang="en-US" sz="1600" dirty="0"/>
-          </a:p>
-        </p:txBody>
-      </p:sp>
-      <p:sp>
-        <p:nvSpPr>
-          <p:cNvPr id="6" name="Text 4"/>
-          <p:cNvSpPr/>
-          <p:nvPr/>
-        </p:nvSpPr>
-        <p:spPr>
-          <a:xfrm>
-            <a:off x="3520440" y="1508760"/>
-            <a:ext cx="8229600" cy="1005840"/>
-          </a:xfrm>
-          <a:prstGeom prst="rect">
-            <a:avLst/>
-          </a:prstGeom>
-          <a:noFill/>
-          <a:ln/>
-        </p:spPr>
-        <p:txBody>
-          <a:bodyPr wrap="square" rtlCol="0" anchor="ctr"/>
-          <a:lstStyle/>
-          <a:p>
-            <a:pPr indent="0" marL="0">
-              <a:buNone/>
-            </a:pPr>
-            <a:r>
-              <a:rPr lang="en-US" sz="1400" dirty="0">
+              <a:rPr lang="en-US" sz="1800" b="1" dirty="0">
                 <a:solidFill>
                   <a:srgbClr val="1A1A1A"/>
                 </a:solidFill>
@@ -3829,77 +4585,13 @@
                 <a:ea typeface="Calibri" pitchFamily="34" charset="-122"/>
                 <a:cs typeface="Calibri" pitchFamily="34" charset="-120"/>
               </a:rPr>
-              <a:t>Powered backtest needs ~1,000 liquid-market games. Two paths: paid the-odds-api historical (~$59, one month) or playoff capture (free, accumulating).</a:t>
-            </a:r>
-            <a:endParaRPr lang="en-US" sz="1400" dirty="0"/>
-          </a:p>
-        </p:txBody>
-      </p:sp>
-      <p:sp>
-        <p:nvSpPr>
-          <p:cNvPr id="7" name="Text 5"/>
-          <p:cNvSpPr/>
-          <p:nvPr/>
-        </p:nvSpPr>
-        <p:spPr>
-          <a:xfrm>
-            <a:off x="502920" y="2651760"/>
-            <a:ext cx="2926080" cy="457200"/>
-          </a:xfrm>
-          <a:prstGeom prst="rect">
-            <a:avLst/>
-          </a:prstGeom>
-          <a:noFill/>
-          <a:ln/>
-        </p:spPr>
-        <p:txBody>
-          <a:bodyPr wrap="square" rtlCol="0" anchor="ctr"/>
-          <a:lstStyle/>
-          <a:p>
+              <a:t>Halawi's buried result:  </a:t>
+            </a:r>
             <a:pPr indent="0" marL="0">
               <a:buNone/>
             </a:pPr>
             <a:r>
-              <a:rPr lang="en-US" sz="1600" b="1" dirty="0">
-                <a:solidFill>
-                  <a:srgbClr val="0B2545"/>
-                </a:solidFill>
-                <a:latin typeface="Georgia" pitchFamily="34" charset="0"/>
-                <a:ea typeface="Georgia" pitchFamily="34" charset="-122"/>
-                <a:cs typeface="Georgia" pitchFamily="34" charset="-120"/>
-              </a:rPr>
-              <a:t>Horizon</a:t>
-            </a:r>
-            <a:endParaRPr lang="en-US" sz="1600" dirty="0"/>
-          </a:p>
-        </p:txBody>
-      </p:sp>
-      <p:sp>
-        <p:nvSpPr>
-          <p:cNvPr id="8" name="Text 6"/>
-          <p:cNvSpPr/>
-          <p:nvPr/>
-        </p:nvSpPr>
-        <p:spPr>
-          <a:xfrm>
-            <a:off x="3520440" y="2651760"/>
-            <a:ext cx="8229600" cy="1005840"/>
-          </a:xfrm>
-          <a:prstGeom prst="rect">
-            <a:avLst/>
-          </a:prstGeom>
-          <a:noFill/>
-          <a:ln/>
-        </p:spPr>
-        <p:txBody>
-          <a:bodyPr wrap="square" rtlCol="0" anchor="ctr"/>
-          <a:lstStyle/>
-          <a:p>
-            <a:pPr indent="0" marL="0">
-              <a:buNone/>
-            </a:pPr>
-            <a:r>
-              <a:rPr lang="en-US" sz="1400" dirty="0">
+              <a:rPr lang="en-US" sz="1800" dirty="0">
                 <a:solidFill>
                   <a:srgbClr val="1A1A1A"/>
                 </a:solidFill>
@@ -3907,100 +4599,36 @@
                 <a:ea typeface="Calibri" pitchFamily="34" charset="-122"/>
                 <a:cs typeface="Calibri" pitchFamily="34" charset="-120"/>
               </a:rPr>
-              <a:t>V2 is 1st-half winner; live demo extended to full-game via parallel model (Brier 0.207). Snapshots are 1H-only — 2nd-half coverage requires rebuilding.</a:t>
-            </a:r>
-            <a:endParaRPr lang="en-US" sz="1400" dirty="0"/>
-          </a:p>
-        </p:txBody>
-      </p:sp>
-      <p:sp>
-        <p:nvSpPr>
-          <p:cNvPr id="9" name="Text 7"/>
-          <p:cNvSpPr/>
-          <p:nvPr/>
-        </p:nvSpPr>
-        <p:spPr>
-          <a:xfrm>
-            <a:off x="502920" y="3794760"/>
-            <a:ext cx="2926080" cy="457200"/>
-          </a:xfrm>
-          <a:prstGeom prst="rect">
-            <a:avLst/>
-          </a:prstGeom>
-          <a:noFill/>
-          <a:ln/>
-        </p:spPr>
-        <p:txBody>
-          <a:bodyPr wrap="square" rtlCol="0" anchor="ctr"/>
-          <a:lstStyle/>
-          <a:p>
+              <a:t>4·LM + 1·crowd &gt; either alone — because the errors are </a:t>
+            </a:r>
             <a:pPr indent="0" marL="0">
               <a:buNone/>
             </a:pPr>
             <a:r>
-              <a:rPr lang="en-US" sz="1600" b="1" dirty="0">
-                <a:solidFill>
-                  <a:srgbClr val="0B2545"/>
-                </a:solidFill>
-                <a:latin typeface="Georgia" pitchFamily="34" charset="0"/>
-                <a:ea typeface="Georgia" pitchFamily="34" charset="-122"/>
-                <a:cs typeface="Georgia" pitchFamily="34" charset="-120"/>
-              </a:rPr>
-              <a:t>Market reactivity</a:t>
-            </a:r>
-            <a:endParaRPr lang="en-US" sz="1600" dirty="0"/>
-          </a:p>
-        </p:txBody>
-      </p:sp>
-      <p:sp>
-        <p:nvSpPr>
-          <p:cNvPr id="10" name="Text 8"/>
-          <p:cNvSpPr/>
-          <p:nvPr/>
-        </p:nvSpPr>
-        <p:spPr>
-          <a:xfrm>
-            <a:off x="3520440" y="3794760"/>
-            <a:ext cx="8229600" cy="1005840"/>
-          </a:xfrm>
-          <a:prstGeom prst="rect">
-            <a:avLst/>
-          </a:prstGeom>
-          <a:noFill/>
-          <a:ln/>
-        </p:spPr>
-        <p:txBody>
-          <a:bodyPr wrap="square" rtlCol="0" anchor="ctr"/>
-          <a:lstStyle/>
-          <a:p>
-            <a:pPr indent="0" marL="0">
-              <a:buNone/>
-            </a:pPr>
-            <a:r>
-              <a:rPr lang="en-US" sz="1400" dirty="0">
-                <a:solidFill>
-                  <a:srgbClr val="1A1A1A"/>
+              <a:rPr lang="en-US" sz="1800" b="1" i="1" dirty="0">
+                <a:solidFill>
+                  <a:srgbClr val="EEA02B"/>
                 </a:solidFill>
                 <a:latin typeface="Calibri" pitchFamily="34" charset="0"/>
                 <a:ea typeface="Calibri" pitchFamily="34" charset="-122"/>
                 <a:cs typeface="Calibri" pitchFamily="34" charset="-120"/>
               </a:rPr>
-              <a:t>Real deployment would face adverse selection + sportsbook limits. Kalshi (peer-to-peer) sidesteps the account-limit issue.</a:t>
-            </a:r>
-            <a:endParaRPr lang="en-US" sz="1400" dirty="0"/>
-          </a:p>
-        </p:txBody>
-      </p:sp>
-      <p:sp>
-        <p:nvSpPr>
-          <p:cNvPr id="11" name="Text 9"/>
-          <p:cNvSpPr/>
-          <p:nvPr/>
-        </p:nvSpPr>
-        <p:spPr>
-          <a:xfrm>
-            <a:off x="502920" y="4937760"/>
-            <a:ext cx="2926080" cy="457200"/>
+              <a:t>independent.</a:t>
+            </a:r>
+            <a:endParaRPr lang="en-US" sz="1800" dirty="0"/>
+          </a:p>
+        </p:txBody>
+      </p:sp>
+      <p:sp>
+        <p:nvSpPr>
+          <p:cNvPr id="6" name="Text 4"/>
+          <p:cNvSpPr/>
+          <p:nvPr/>
+        </p:nvSpPr>
+        <p:spPr>
+          <a:xfrm>
+            <a:off x="502920" y="2194560"/>
+            <a:ext cx="11247120" cy="914400"/>
           </a:xfrm>
           <a:prstGeom prst="rect">
             <a:avLst/>
@@ -4016,46 +4644,7 @@
               <a:buNone/>
             </a:pPr>
             <a:r>
-              <a:rPr lang="en-US" sz="1600" b="1" dirty="0">
-                <a:solidFill>
-                  <a:srgbClr val="0B2545"/>
-                </a:solidFill>
-                <a:latin typeface="Georgia" pitchFamily="34" charset="0"/>
-                <a:ea typeface="Georgia" pitchFamily="34" charset="-122"/>
-                <a:cs typeface="Georgia" pitchFamily="34" charset="-120"/>
-              </a:rPr>
-              <a:t>Variants V1/V3/V4/V6</a:t>
-            </a:r>
-            <a:endParaRPr lang="en-US" sz="1600" dirty="0"/>
-          </a:p>
-        </p:txBody>
-      </p:sp>
-      <p:sp>
-        <p:nvSpPr>
-          <p:cNvPr id="12" name="Text 10"/>
-          <p:cNvSpPr/>
-          <p:nvPr/>
-        </p:nvSpPr>
-        <p:spPr>
-          <a:xfrm>
-            <a:off x="3520440" y="4937760"/>
-            <a:ext cx="8229600" cy="1005840"/>
-          </a:xfrm>
-          <a:prstGeom prst="rect">
-            <a:avLst/>
-          </a:prstGeom>
-          <a:noFill/>
-          <a:ln/>
-        </p:spPr>
-        <p:txBody>
-          <a:bodyPr wrap="square" rtlCol="0" anchor="ctr"/>
-          <a:lstStyle/>
-          <a:p>
-            <a:pPr indent="0" marL="0">
-              <a:buNone/>
-            </a:pPr>
-            <a:r>
-              <a:rPr lang="en-US" sz="1400" dirty="0">
+              <a:rPr lang="en-US" sz="1800" dirty="0">
                 <a:solidFill>
                   <a:srgbClr val="1A1A1A"/>
                 </a:solidFill>
@@ -4063,9 +4652,247 @@
                 <a:ea typeface="Calibri" pitchFamily="34" charset="-122"/>
                 <a:cs typeface="Calibri" pitchFamily="34" charset="-120"/>
               </a:rPr>
-              <a:t>Architecturally ready in the shared eval harness; need multi-venue in-play history to fit &amp; evaluate.</a:t>
+              <a:t>Our structural model and the live market are also </a:t>
+            </a:r>
+            <a:pPr indent="0" marL="0">
+              <a:buNone/>
+            </a:pPr>
+            <a:r>
+              <a:rPr lang="en-US" sz="1800" b="1" dirty="0">
+                <a:solidFill>
+                  <a:srgbClr val="0B2545"/>
+                </a:solidFill>
+                <a:latin typeface="Calibri" pitchFamily="34" charset="0"/>
+                <a:ea typeface="Calibri" pitchFamily="34" charset="-122"/>
+                <a:cs typeface="Calibri" pitchFamily="34" charset="-120"/>
+              </a:rPr>
+              <a:t>partly independent error sources</a:t>
+            </a:r>
+            <a:pPr indent="0" marL="0">
+              <a:buNone/>
+            </a:pPr>
+            <a:r>
+              <a:rPr lang="en-US" sz="1800" dirty="0">
+                <a:solidFill>
+                  <a:srgbClr val="1A1A1A"/>
+                </a:solidFill>
+                <a:latin typeface="Calibri" pitchFamily="34" charset="0"/>
+                <a:ea typeface="Calibri" pitchFamily="34" charset="-122"/>
+                <a:cs typeface="Calibri" pitchFamily="34" charset="-120"/>
+              </a:rPr>
+              <a:t> — model reads game state, market absorbs sentiment + inside flow.</a:t>
+            </a:r>
+            <a:endParaRPr lang="en-US" sz="1800" dirty="0"/>
+          </a:p>
+        </p:txBody>
+      </p:sp>
+      <p:sp>
+        <p:nvSpPr>
+          <p:cNvPr id="7" name="Shape 5"/>
+          <p:cNvSpPr/>
+          <p:nvPr/>
+        </p:nvSpPr>
+        <p:spPr>
+          <a:xfrm>
+            <a:off x="502920" y="3291840"/>
+            <a:ext cx="11247120" cy="1371600"/>
+          </a:xfrm>
+          <a:prstGeom prst="roundRect">
+            <a:avLst>
+              <a:gd name="adj" fmla="val 5333"/>
+            </a:avLst>
+          </a:prstGeom>
+          <a:solidFill>
+            <a:srgbClr val="EEF3F8"/>
+          </a:solidFill>
+          <a:ln w="15240">
+            <a:solidFill>
+              <a:srgbClr val="1C7293"/>
+            </a:solidFill>
+            <a:prstDash val="solid"/>
+          </a:ln>
+        </p:spPr>
+      </p:sp>
+      <p:sp>
+        <p:nvSpPr>
+          <p:cNvPr id="8" name="Text 6"/>
+          <p:cNvSpPr/>
+          <p:nvPr/>
+        </p:nvSpPr>
+        <p:spPr>
+          <a:xfrm>
+            <a:off x="685800" y="3383280"/>
+            <a:ext cx="10881360" cy="868680"/>
+          </a:xfrm>
+          <a:prstGeom prst="rect">
+            <a:avLst/>
+          </a:prstGeom>
+          <a:noFill/>
+          <a:ln/>
+        </p:spPr>
+        <p:txBody>
+          <a:bodyPr wrap="square" rtlCol="0" anchor="ctr"/>
+          <a:lstStyle/>
+          <a:p>
+            <a:pPr algn="ctr" indent="0" marL="0">
+              <a:buNone/>
+            </a:pPr>
+            <a:r>
+              <a:rPr lang="en-US" sz="1800" b="1" dirty="0">
+                <a:solidFill>
+                  <a:srgbClr val="0B2545"/>
+                </a:solidFill>
+                <a:latin typeface="Courier New" pitchFamily="34" charset="0"/>
+                <a:ea typeface="Courier New" pitchFamily="34" charset="-122"/>
+                <a:cs typeface="Courier New" pitchFamily="34" charset="-120"/>
+              </a:rPr>
+              <a:t>p̂_aggregate  =  w · p_model  +  ( 1 − w ) · p_market_devig</a:t>
+            </a:r>
+            <a:endParaRPr lang="en-US" sz="1800" dirty="0"/>
+          </a:p>
+        </p:txBody>
+      </p:sp>
+      <p:sp>
+        <p:nvSpPr>
+          <p:cNvPr id="9" name="Text 7"/>
+          <p:cNvSpPr/>
+          <p:nvPr/>
+        </p:nvSpPr>
+        <p:spPr>
+          <a:xfrm>
+            <a:off x="685800" y="4206240"/>
+            <a:ext cx="10881360" cy="365760"/>
+          </a:xfrm>
+          <a:prstGeom prst="rect">
+            <a:avLst/>
+          </a:prstGeom>
+          <a:noFill/>
+          <a:ln/>
+        </p:spPr>
+        <p:txBody>
+          <a:bodyPr wrap="square" rtlCol="0" anchor="ctr"/>
+          <a:lstStyle/>
+          <a:p>
+            <a:pPr algn="ctr" indent="0" marL="0">
+              <a:buNone/>
+            </a:pPr>
+            <a:r>
+              <a:rPr lang="en-US" sz="1200" i="1" dirty="0">
+                <a:solidFill>
+                  <a:srgbClr val="13315C"/>
+                </a:solidFill>
+                <a:latin typeface="Calibri" pitchFamily="34" charset="0"/>
+                <a:ea typeface="Calibri" pitchFamily="34" charset="-122"/>
+                <a:cs typeface="Calibri" pitchFamily="34" charset="-120"/>
+              </a:rPr>
+              <a:t>the 'aggregate' variant (#3 in the planned table) — weight from validation Brier · aggregate's Brier ≤ min(components)</a:t>
+            </a:r>
+            <a:endParaRPr lang="en-US" sz="1200" dirty="0"/>
+          </a:p>
+        </p:txBody>
+      </p:sp>
+      <p:sp>
+        <p:nvSpPr>
+          <p:cNvPr id="10" name="Shape 8"/>
+          <p:cNvSpPr/>
+          <p:nvPr/>
+        </p:nvSpPr>
+        <p:spPr>
+          <a:xfrm>
+            <a:off x="502920" y="4846320"/>
+            <a:ext cx="11247120" cy="1508760"/>
+          </a:xfrm>
+          <a:prstGeom prst="roundRect">
+            <a:avLst>
+              <a:gd name="adj" fmla="val 6061"/>
+            </a:avLst>
+          </a:prstGeom>
+          <a:solidFill>
+            <a:srgbClr val="F6F6F2"/>
+          </a:solidFill>
+          <a:ln w="19050">
+            <a:solidFill>
+              <a:srgbClr val="1C7293"/>
+            </a:solidFill>
+            <a:prstDash val="solid"/>
+          </a:ln>
+        </p:spPr>
+      </p:sp>
+      <p:sp>
+        <p:nvSpPr>
+          <p:cNvPr id="11" name="Text 9"/>
+          <p:cNvSpPr/>
+          <p:nvPr/>
+        </p:nvSpPr>
+        <p:spPr>
+          <a:xfrm>
+            <a:off x="777240" y="4983480"/>
+            <a:ext cx="10698480" cy="365760"/>
+          </a:xfrm>
+          <a:prstGeom prst="rect">
+            <a:avLst/>
+          </a:prstGeom>
+          <a:noFill/>
+          <a:ln/>
+        </p:spPr>
+        <p:txBody>
+          <a:bodyPr wrap="square" rtlCol="0" anchor="ctr"/>
+          <a:lstStyle/>
+          <a:p>
+            <a:pPr indent="0" marL="0">
+              <a:buNone/>
+            </a:pPr>
+            <a:r>
+              <a:rPr lang="en-US" sz="1400" i="1" dirty="0">
+                <a:solidFill>
+                  <a:srgbClr val="13315C"/>
+                </a:solidFill>
+                <a:latin typeface="Calibri" pitchFamily="34" charset="0"/>
+                <a:ea typeface="Calibri" pitchFamily="34" charset="-122"/>
+                <a:cs typeface="Calibri" pitchFamily="34" charset="-120"/>
+              </a:rPr>
+              <a:t>Reframing:</a:t>
             </a:r>
             <a:endParaRPr lang="en-US" sz="1400" dirty="0"/>
+          </a:p>
+        </p:txBody>
+      </p:sp>
+      <p:sp>
+        <p:nvSpPr>
+          <p:cNvPr id="12" name="Text 10"/>
+          <p:cNvSpPr/>
+          <p:nvPr/>
+        </p:nvSpPr>
+        <p:spPr>
+          <a:xfrm>
+            <a:off x="777240" y="5349240"/>
+            <a:ext cx="10698480" cy="914400"/>
+          </a:xfrm>
+          <a:prstGeom prst="rect">
+            <a:avLst/>
+          </a:prstGeom>
+          <a:noFill/>
+          <a:ln/>
+        </p:spPr>
+        <p:txBody>
+          <a:bodyPr wrap="square" rtlCol="0" anchor="ctr"/>
+          <a:lstStyle/>
+          <a:p>
+            <a:pPr indent="0" marL="0">
+              <a:buNone/>
+            </a:pPr>
+            <a:r>
+              <a:rPr lang="en-US" sz="1500" dirty="0">
+                <a:solidFill>
+                  <a:srgbClr val="1A1A1A"/>
+                </a:solidFill>
+                <a:latin typeface="Calibri" pitchFamily="34" charset="0"/>
+                <a:ea typeface="Calibri" pitchFamily="34" charset="-122"/>
+                <a:cs typeface="Calibri" pitchFamily="34" charset="-120"/>
+              </a:rPr>
+              <a:t>The model's job isn't to BEAT the market everywhere — it's to COMPLEMENT it in the specific situations (comeback FG, salience 3PT) where the crowd's bias is strongest.</a:t>
+            </a:r>
+            <a:endParaRPr lang="en-US" sz="1500" dirty="0"/>
           </a:p>
         </p:txBody>
       </p:sp>
@@ -4212,6 +5039,529 @@
                 <a:ea typeface="Georgia" pitchFamily="34" charset="-122"/>
                 <a:cs typeface="Georgia" pitchFamily="34" charset="-120"/>
               </a:rPr>
+              <a:t>Limitations &amp; future work</a:t>
+            </a:r>
+            <a:endParaRPr lang="en-US" sz="2800" dirty="0"/>
+          </a:p>
+        </p:txBody>
+      </p:sp>
+      <p:sp>
+        <p:nvSpPr>
+          <p:cNvPr id="3" name="Text 1"/>
+          <p:cNvSpPr/>
+          <p:nvPr/>
+        </p:nvSpPr>
+        <p:spPr>
+          <a:xfrm>
+            <a:off x="502920" y="932688"/>
+            <a:ext cx="11247120" cy="365760"/>
+          </a:xfrm>
+          <a:prstGeom prst="rect">
+            <a:avLst/>
+          </a:prstGeom>
+          <a:noFill/>
+          <a:ln/>
+        </p:spPr>
+        <p:txBody>
+          <a:bodyPr wrap="square" rtlCol="0" anchor="ctr"/>
+          <a:lstStyle/>
+          <a:p>
+            <a:pPr indent="0" marL="0">
+              <a:buNone/>
+            </a:pPr>
+            <a:r>
+              <a:rPr lang="en-US" sz="1400" i="1" dirty="0">
+                <a:solidFill>
+                  <a:srgbClr val="13315C"/>
+                </a:solidFill>
+                <a:latin typeface="Calibri" pitchFamily="34" charset="0"/>
+                <a:ea typeface="Calibri" pitchFamily="34" charset="-122"/>
+                <a:cs typeface="Calibri" pitchFamily="34" charset="-120"/>
+              </a:rPr>
+              <a:t>What we'd do next</a:t>
+            </a:r>
+            <a:endParaRPr lang="en-US" sz="1400" dirty="0"/>
+          </a:p>
+        </p:txBody>
+      </p:sp>
+      <p:sp>
+        <p:nvSpPr>
+          <p:cNvPr id="4" name="Shape 2"/>
+          <p:cNvSpPr/>
+          <p:nvPr/>
+        </p:nvSpPr>
+        <p:spPr>
+          <a:xfrm>
+            <a:off x="502920" y="1298448"/>
+            <a:ext cx="11247120" cy="0"/>
+          </a:xfrm>
+          <a:prstGeom prst="line">
+            <a:avLst/>
+          </a:prstGeom>
+          <a:noFill/>
+          <a:ln w="25400">
+            <a:solidFill>
+              <a:srgbClr val="1C7293"/>
+            </a:solidFill>
+            <a:prstDash val="solid"/>
+          </a:ln>
+        </p:spPr>
+      </p:sp>
+      <p:sp>
+        <p:nvSpPr>
+          <p:cNvPr id="5" name="Text 3"/>
+          <p:cNvSpPr/>
+          <p:nvPr/>
+        </p:nvSpPr>
+        <p:spPr>
+          <a:xfrm>
+            <a:off x="502920" y="1508760"/>
+            <a:ext cx="2926080" cy="457200"/>
+          </a:xfrm>
+          <a:prstGeom prst="rect">
+            <a:avLst/>
+          </a:prstGeom>
+          <a:noFill/>
+          <a:ln/>
+        </p:spPr>
+        <p:txBody>
+          <a:bodyPr wrap="square" rtlCol="0" anchor="ctr"/>
+          <a:lstStyle/>
+          <a:p>
+            <a:pPr indent="0" marL="0">
+              <a:buNone/>
+            </a:pPr>
+            <a:r>
+              <a:rPr lang="en-US" sz="1600" b="1" dirty="0">
+                <a:solidFill>
+                  <a:srgbClr val="0B2545"/>
+                </a:solidFill>
+                <a:latin typeface="Georgia" pitchFamily="34" charset="0"/>
+                <a:ea typeface="Georgia" pitchFamily="34" charset="-122"/>
+                <a:cs typeface="Georgia" pitchFamily="34" charset="-120"/>
+              </a:rPr>
+              <a:t>Sample size</a:t>
+            </a:r>
+            <a:endParaRPr lang="en-US" sz="1600" dirty="0"/>
+          </a:p>
+        </p:txBody>
+      </p:sp>
+      <p:sp>
+        <p:nvSpPr>
+          <p:cNvPr id="6" name="Text 4"/>
+          <p:cNvSpPr/>
+          <p:nvPr/>
+        </p:nvSpPr>
+        <p:spPr>
+          <a:xfrm>
+            <a:off x="3520440" y="1508760"/>
+            <a:ext cx="8229600" cy="1005840"/>
+          </a:xfrm>
+          <a:prstGeom prst="rect">
+            <a:avLst/>
+          </a:prstGeom>
+          <a:noFill/>
+          <a:ln/>
+        </p:spPr>
+        <p:txBody>
+          <a:bodyPr wrap="square" rtlCol="0" anchor="ctr"/>
+          <a:lstStyle/>
+          <a:p>
+            <a:pPr indent="0" marL="0">
+              <a:buNone/>
+            </a:pPr>
+            <a:r>
+              <a:rPr lang="en-US" sz="1400" dirty="0">
+                <a:solidFill>
+                  <a:srgbClr val="1A1A1A"/>
+                </a:solidFill>
+                <a:latin typeface="Calibri" pitchFamily="34" charset="0"/>
+                <a:ea typeface="Calibri" pitchFamily="34" charset="-122"/>
+                <a:cs typeface="Calibri" pitchFamily="34" charset="-120"/>
+              </a:rPr>
+              <a:t>Powered backtest needs ~1,000 liquid-market games. Two paths: paid the-odds-api historical (~$59, one month) or playoff capture (free, accumulating).</a:t>
+            </a:r>
+            <a:endParaRPr lang="en-US" sz="1400" dirty="0"/>
+          </a:p>
+        </p:txBody>
+      </p:sp>
+      <p:sp>
+        <p:nvSpPr>
+          <p:cNvPr id="7" name="Text 5"/>
+          <p:cNvSpPr/>
+          <p:nvPr/>
+        </p:nvSpPr>
+        <p:spPr>
+          <a:xfrm>
+            <a:off x="502920" y="2651760"/>
+            <a:ext cx="2926080" cy="457200"/>
+          </a:xfrm>
+          <a:prstGeom prst="rect">
+            <a:avLst/>
+          </a:prstGeom>
+          <a:noFill/>
+          <a:ln/>
+        </p:spPr>
+        <p:txBody>
+          <a:bodyPr wrap="square" rtlCol="0" anchor="ctr"/>
+          <a:lstStyle/>
+          <a:p>
+            <a:pPr indent="0" marL="0">
+              <a:buNone/>
+            </a:pPr>
+            <a:r>
+              <a:rPr lang="en-US" sz="1600" b="1" dirty="0">
+                <a:solidFill>
+                  <a:srgbClr val="0B2545"/>
+                </a:solidFill>
+                <a:latin typeface="Georgia" pitchFamily="34" charset="0"/>
+                <a:ea typeface="Georgia" pitchFamily="34" charset="-122"/>
+                <a:cs typeface="Georgia" pitchFamily="34" charset="-120"/>
+              </a:rPr>
+              <a:t>Horizon</a:t>
+            </a:r>
+            <a:endParaRPr lang="en-US" sz="1600" dirty="0"/>
+          </a:p>
+        </p:txBody>
+      </p:sp>
+      <p:sp>
+        <p:nvSpPr>
+          <p:cNvPr id="8" name="Text 6"/>
+          <p:cNvSpPr/>
+          <p:nvPr/>
+        </p:nvSpPr>
+        <p:spPr>
+          <a:xfrm>
+            <a:off x="3520440" y="2651760"/>
+            <a:ext cx="8229600" cy="1005840"/>
+          </a:xfrm>
+          <a:prstGeom prst="rect">
+            <a:avLst/>
+          </a:prstGeom>
+          <a:noFill/>
+          <a:ln/>
+        </p:spPr>
+        <p:txBody>
+          <a:bodyPr wrap="square" rtlCol="0" anchor="ctr"/>
+          <a:lstStyle/>
+          <a:p>
+            <a:pPr indent="0" marL="0">
+              <a:buNone/>
+            </a:pPr>
+            <a:r>
+              <a:rPr lang="en-US" sz="1400" dirty="0">
+                <a:solidFill>
+                  <a:srgbClr val="1A1A1A"/>
+                </a:solidFill>
+                <a:latin typeface="Calibri" pitchFamily="34" charset="0"/>
+                <a:ea typeface="Calibri" pitchFamily="34" charset="-122"/>
+                <a:cs typeface="Calibri" pitchFamily="34" charset="-120"/>
+              </a:rPr>
+              <a:t>V2 is 1st-half winner; live demo extended to full-game via parallel model (Brier 0.207). Snapshots are 1H-only — 2nd-half coverage requires rebuilding.</a:t>
+            </a:r>
+            <a:endParaRPr lang="en-US" sz="1400" dirty="0"/>
+          </a:p>
+        </p:txBody>
+      </p:sp>
+      <p:sp>
+        <p:nvSpPr>
+          <p:cNvPr id="9" name="Text 7"/>
+          <p:cNvSpPr/>
+          <p:nvPr/>
+        </p:nvSpPr>
+        <p:spPr>
+          <a:xfrm>
+            <a:off x="502920" y="3794760"/>
+            <a:ext cx="2926080" cy="457200"/>
+          </a:xfrm>
+          <a:prstGeom prst="rect">
+            <a:avLst/>
+          </a:prstGeom>
+          <a:noFill/>
+          <a:ln/>
+        </p:spPr>
+        <p:txBody>
+          <a:bodyPr wrap="square" rtlCol="0" anchor="ctr"/>
+          <a:lstStyle/>
+          <a:p>
+            <a:pPr indent="0" marL="0">
+              <a:buNone/>
+            </a:pPr>
+            <a:r>
+              <a:rPr lang="en-US" sz="1600" b="1" dirty="0">
+                <a:solidFill>
+                  <a:srgbClr val="0B2545"/>
+                </a:solidFill>
+                <a:latin typeface="Georgia" pitchFamily="34" charset="0"/>
+                <a:ea typeface="Georgia" pitchFamily="34" charset="-122"/>
+                <a:cs typeface="Georgia" pitchFamily="34" charset="-120"/>
+              </a:rPr>
+              <a:t>Market reactivity</a:t>
+            </a:r>
+            <a:endParaRPr lang="en-US" sz="1600" dirty="0"/>
+          </a:p>
+        </p:txBody>
+      </p:sp>
+      <p:sp>
+        <p:nvSpPr>
+          <p:cNvPr id="10" name="Text 8"/>
+          <p:cNvSpPr/>
+          <p:nvPr/>
+        </p:nvSpPr>
+        <p:spPr>
+          <a:xfrm>
+            <a:off x="3520440" y="3794760"/>
+            <a:ext cx="8229600" cy="1005840"/>
+          </a:xfrm>
+          <a:prstGeom prst="rect">
+            <a:avLst/>
+          </a:prstGeom>
+          <a:noFill/>
+          <a:ln/>
+        </p:spPr>
+        <p:txBody>
+          <a:bodyPr wrap="square" rtlCol="0" anchor="ctr"/>
+          <a:lstStyle/>
+          <a:p>
+            <a:pPr indent="0" marL="0">
+              <a:buNone/>
+            </a:pPr>
+            <a:r>
+              <a:rPr lang="en-US" sz="1400" dirty="0">
+                <a:solidFill>
+                  <a:srgbClr val="1A1A1A"/>
+                </a:solidFill>
+                <a:latin typeface="Calibri" pitchFamily="34" charset="0"/>
+                <a:ea typeface="Calibri" pitchFamily="34" charset="-122"/>
+                <a:cs typeface="Calibri" pitchFamily="34" charset="-120"/>
+              </a:rPr>
+              <a:t>Real deployment would face adverse selection + sportsbook limits. Kalshi (peer-to-peer) sidesteps the account-limit issue.</a:t>
+            </a:r>
+            <a:endParaRPr lang="en-US" sz="1400" dirty="0"/>
+          </a:p>
+        </p:txBody>
+      </p:sp>
+      <p:sp>
+        <p:nvSpPr>
+          <p:cNvPr id="11" name="Text 9"/>
+          <p:cNvSpPr/>
+          <p:nvPr/>
+        </p:nvSpPr>
+        <p:spPr>
+          <a:xfrm>
+            <a:off x="502920" y="4937760"/>
+            <a:ext cx="2926080" cy="457200"/>
+          </a:xfrm>
+          <a:prstGeom prst="rect">
+            <a:avLst/>
+          </a:prstGeom>
+          <a:noFill/>
+          <a:ln/>
+        </p:spPr>
+        <p:txBody>
+          <a:bodyPr wrap="square" rtlCol="0" anchor="ctr"/>
+          <a:lstStyle/>
+          <a:p>
+            <a:pPr indent="0" marL="0">
+              <a:buNone/>
+            </a:pPr>
+            <a:r>
+              <a:rPr lang="en-US" sz="1600" b="1" dirty="0">
+                <a:solidFill>
+                  <a:srgbClr val="0B2545"/>
+                </a:solidFill>
+                <a:latin typeface="Georgia" pitchFamily="34" charset="0"/>
+                <a:ea typeface="Georgia" pitchFamily="34" charset="-122"/>
+                <a:cs typeface="Georgia" pitchFamily="34" charset="-120"/>
+              </a:rPr>
+              <a:t>Variants V1/V3/V4/V6</a:t>
+            </a:r>
+            <a:endParaRPr lang="en-US" sz="1600" dirty="0"/>
+          </a:p>
+        </p:txBody>
+      </p:sp>
+      <p:sp>
+        <p:nvSpPr>
+          <p:cNvPr id="12" name="Text 10"/>
+          <p:cNvSpPr/>
+          <p:nvPr/>
+        </p:nvSpPr>
+        <p:spPr>
+          <a:xfrm>
+            <a:off x="3520440" y="4937760"/>
+            <a:ext cx="8229600" cy="1005840"/>
+          </a:xfrm>
+          <a:prstGeom prst="rect">
+            <a:avLst/>
+          </a:prstGeom>
+          <a:noFill/>
+          <a:ln/>
+        </p:spPr>
+        <p:txBody>
+          <a:bodyPr wrap="square" rtlCol="0" anchor="ctr"/>
+          <a:lstStyle/>
+          <a:p>
+            <a:pPr indent="0" marL="0">
+              <a:buNone/>
+            </a:pPr>
+            <a:r>
+              <a:rPr lang="en-US" sz="1400" dirty="0">
+                <a:solidFill>
+                  <a:srgbClr val="1A1A1A"/>
+                </a:solidFill>
+                <a:latin typeface="Calibri" pitchFamily="34" charset="0"/>
+                <a:ea typeface="Calibri" pitchFamily="34" charset="-122"/>
+                <a:cs typeface="Calibri" pitchFamily="34" charset="-120"/>
+              </a:rPr>
+              <a:t>Architecturally ready in the shared eval harness; need multi-venue in-play history to fit &amp; evaluate.</a:t>
+            </a:r>
+            <a:endParaRPr lang="en-US" sz="1400" dirty="0"/>
+          </a:p>
+        </p:txBody>
+      </p:sp>
+      <p:sp>
+        <p:nvSpPr>
+          <p:cNvPr id="13" name="Text 11"/>
+          <p:cNvSpPr/>
+          <p:nvPr/>
+        </p:nvSpPr>
+        <p:spPr>
+          <a:xfrm>
+            <a:off x="502920" y="6492240"/>
+            <a:ext cx="7315200" cy="274320"/>
+          </a:xfrm>
+          <a:prstGeom prst="rect">
+            <a:avLst/>
+          </a:prstGeom>
+          <a:noFill/>
+          <a:ln/>
+        </p:spPr>
+        <p:txBody>
+          <a:bodyPr wrap="square" rtlCol="0" anchor="ctr"/>
+          <a:lstStyle/>
+          <a:p>
+            <a:pPr indent="0" marL="0">
+              <a:buNone/>
+            </a:pPr>
+            <a:r>
+              <a:rPr lang="en-US" sz="1000" dirty="0">
+                <a:solidFill>
+                  <a:srgbClr val="8DA9C4"/>
+                </a:solidFill>
+                <a:latin typeface="Calibri" pitchFamily="34" charset="0"/>
+                <a:ea typeface="Calibri" pitchFamily="34" charset="-122"/>
+                <a:cs typeface="Calibri" pitchFamily="34" charset="-120"/>
+              </a:rPr>
+              <a:t>STATS 211 · NBA Mispricing · Sit &amp; Manathattai</a:t>
+            </a:r>
+            <a:endParaRPr lang="en-US" sz="1000" dirty="0"/>
+          </a:p>
+        </p:txBody>
+      </p:sp>
+      <p:sp>
+        <p:nvSpPr>
+          <p:cNvPr id="14" name="Text 12"/>
+          <p:cNvSpPr/>
+          <p:nvPr/>
+        </p:nvSpPr>
+        <p:spPr>
+          <a:xfrm>
+            <a:off x="11384280" y="6492240"/>
+            <a:ext cx="411480" cy="274320"/>
+          </a:xfrm>
+          <a:prstGeom prst="rect">
+            <a:avLst/>
+          </a:prstGeom>
+          <a:noFill/>
+          <a:ln/>
+        </p:spPr>
+        <p:txBody>
+          <a:bodyPr wrap="square" rtlCol="0" anchor="ctr"/>
+          <a:lstStyle/>
+          <a:p>
+            <a:pPr algn="r" indent="0" marL="0">
+              <a:buNone/>
+            </a:pPr>
+            <a:r>
+              <a:rPr lang="en-US" sz="1000" dirty="0">
+                <a:solidFill>
+                  <a:srgbClr val="8DA9C4"/>
+                </a:solidFill>
+                <a:latin typeface="Calibri" pitchFamily="34" charset="0"/>
+                <a:ea typeface="Calibri" pitchFamily="34" charset="-122"/>
+                <a:cs typeface="Calibri" pitchFamily="34" charset="-120"/>
+              </a:rPr>
+              <a:t>14</a:t>
+            </a:r>
+            <a:endParaRPr lang="en-US" sz="1000" dirty="0"/>
+          </a:p>
+        </p:txBody>
+      </p:sp>
+    </p:spTree>
+  </p:cSld>
+  <p:clrMapOvr>
+    <a:masterClrMapping/>
+  </p:clrMapOvr>
+</p:sld>
+</file>
+
+<file path=ppt/slides/slide15.xml><?xml version="1.0" encoding="utf-8"?>
+<p:sld xmlns:a="http://schemas.openxmlformats.org/drawingml/2006/main" xmlns:r="http://schemas.openxmlformats.org/officeDocument/2006/relationships" xmlns:p="http://schemas.openxmlformats.org/presentationml/2006/main">
+  <p:cSld name="Slide 15">
+    <p:bg>
+      <p:bgPr>
+        <a:solidFill>
+          <a:srgbClr val="FFFFFF"/>
+        </a:solidFill>
+      </p:bgPr>
+    </p:bg>
+    <p:spTree>
+      <p:nvGrpSpPr>
+        <p:cNvPr id="1" name=""/>
+        <p:cNvGrpSpPr/>
+        <p:nvPr/>
+      </p:nvGrpSpPr>
+      <p:grpSpPr>
+        <a:xfrm>
+          <a:off x="0" y="0"/>
+          <a:ext cx="0" cy="0"/>
+          <a:chOff x="0" y="0"/>
+          <a:chExt cx="0" cy="0"/>
+        </a:xfrm>
+      </p:grpSpPr>
+      <p:sp>
+        <p:nvSpPr>
+          <p:cNvPr id="2" name="Text 0"/>
+          <p:cNvSpPr/>
+          <p:nvPr/>
+        </p:nvSpPr>
+        <p:spPr>
+          <a:xfrm>
+            <a:off x="502920" y="228600"/>
+            <a:ext cx="11247120" cy="777240"/>
+          </a:xfrm>
+          <a:prstGeom prst="rect">
+            <a:avLst/>
+          </a:prstGeom>
+          <a:noFill/>
+          <a:ln/>
+        </p:spPr>
+        <p:txBody>
+          <a:bodyPr wrap="square" rtlCol="0" anchor="ctr"/>
+          <a:lstStyle/>
+          <a:p>
+            <a:pPr indent="0" marL="0">
+              <a:buNone/>
+            </a:pPr>
+            <a:r>
+              <a:rPr lang="en-US" sz="2800" b="1" dirty="0">
+                <a:solidFill>
+                  <a:srgbClr val="0B2545"/>
+                </a:solidFill>
+                <a:latin typeface="Georgia" pitchFamily="34" charset="0"/>
+                <a:ea typeface="Georgia" pitchFamily="34" charset="-122"/>
+                <a:cs typeface="Georgia" pitchFamily="34" charset="-120"/>
+              </a:rPr>
               <a:t>Verdict · what works + can it make money?</a:t>
             </a:r>
             <a:endParaRPr lang="en-US" sz="2800" dirty="0"/>
@@ -4426,7 +5776,7 @@
       </p:sp>
       <p:graphicFrame>
         <p:nvGraphicFramePr>
-          <p:cNvPr id="15" name="Table 0"/>
+          <p:cNvPr id="16" name="Table 0"/>
           <p:cNvGraphicFramePr>
             <a:graphicFrameLocks noGrp="1"/>
           </p:cNvGraphicFramePr>
@@ -5723,7 +7073,7 @@
                 <a:ea typeface="Calibri" pitchFamily="34" charset="-122"/>
                 <a:cs typeface="Calibri" pitchFamily="34" charset="-120"/>
               </a:rPr>
-              <a:t>14</a:t>
+              <a:t>15</a:t>
             </a:r>
             <a:endParaRPr lang="en-US" sz="1000" dirty="0"/>
           </a:p>
@@ -11511,7 +12861,7 @@
                 <a:ea typeface="Georgia" pitchFamily="34" charset="-122"/>
                 <a:cs typeface="Georgia" pitchFamily="34" charset="-120"/>
               </a:rPr>
-              <a:t>Calibration result · out-of-sample 2024-25</a:t>
+              <a:t>Finding 1 · Our model is well-calibrated</a:t>
             </a:r>
             <a:endParaRPr lang="en-US" sz="2800" dirty="0"/>
           </a:p>
@@ -11550,7 +12900,7 @@
                 <a:ea typeface="Calibri" pitchFamily="34" charset="-122"/>
                 <a:cs typeface="Calibri" pitchFamily="34" charset="-120"/>
               </a:rPr>
-              <a:t>Headline figure #1 · the probabilities can be trusted</a:t>
+              <a:t>Brier 0.149 · ECE 0.008 · reliability on the diagonal (2024-25 held-out)</a:t>
             </a:r>
             <a:endParaRPr lang="en-US" sz="1400" dirty="0"/>
           </a:p>
@@ -12217,7 +13567,7 @@
                 <a:ea typeface="Georgia" pitchFamily="34" charset="-122"/>
                 <a:cs typeface="Georgia" pitchFamily="34" charset="-120"/>
               </a:rPr>
-              <a:t>The overreaction test · pre-registered</a:t>
+              <a:t>Finding 2 · The market overshoots on trailing-team scoring</a:t>
             </a:r>
             <a:endParaRPr lang="en-US" sz="2800" dirty="0"/>
           </a:p>
@@ -12256,7 +13606,7 @@
                 <a:ea typeface="Calibri" pitchFamily="34" charset="-122"/>
                 <a:cs typeface="Calibri" pitchFamily="34" charset="-120"/>
               </a:rPr>
-              <a:t>Headline figure #2 · held-out 2024-25</a:t>
+              <a:t>Both pre-registered tests pass at p &lt; 0.0001 (held-out 2024-25)</a:t>
             </a:r>
             <a:endParaRPr lang="en-US" sz="1400" dirty="0"/>
           </a:p>
@@ -13094,7 +14444,7 @@
                 <a:ea typeface="Georgia" pitchFamily="34" charset="-122"/>
                 <a:cs typeface="Georgia" pitchFamily="34" charset="-120"/>
               </a:rPr>
-              <a:t>Backtest engine · the equations</a:t>
+              <a:t>How we use both methods</a:t>
             </a:r>
             <a:endParaRPr lang="en-US" sz="2800" dirty="0"/>
           </a:p>
@@ -13133,7 +14483,7 @@
                 <a:ea typeface="Calibri" pitchFamily="34" charset="-122"/>
                 <a:cs typeface="Calibri" pitchFamily="34" charset="-120"/>
               </a:rPr>
-              <a:t>5/5 honesty gates pass on synthetic data</a:t>
+              <a:t>They don't compete · Method 2 STACKS on top of Method 1</a:t>
             </a:r>
             <a:endParaRPr lang="en-US" sz="1400" dirty="0"/>
           </a:p>
@@ -13171,19 +14521,19 @@
         <p:spPr>
           <a:xfrm>
             <a:off x="502920" y="1417320"/>
-            <a:ext cx="11247120" cy="960120"/>
+            <a:ext cx="5349240" cy="4114800"/>
           </a:xfrm>
           <a:prstGeom prst="roundRect">
             <a:avLst>
-              <a:gd name="adj" fmla="val 7619"/>
+              <a:gd name="adj" fmla="val 2222"/>
             </a:avLst>
           </a:prstGeom>
           <a:solidFill>
-            <a:srgbClr val="EEF3F8"/>
+            <a:srgbClr val="F6F6F2"/>
           </a:solidFill>
-          <a:ln w="15240">
+          <a:ln w="20320">
             <a:solidFill>
-              <a:srgbClr val="1C7293"/>
+              <a:srgbClr val="0B2545"/>
             </a:solidFill>
             <a:prstDash val="solid"/>
           </a:ln>
@@ -13191,14 +14541,39 @@
       </p:sp>
       <p:sp>
         <p:nvSpPr>
-          <p:cNvPr id="6" name="Text 4"/>
-          <p:cNvSpPr/>
-          <p:nvPr/>
-        </p:nvSpPr>
-        <p:spPr>
-          <a:xfrm>
-            <a:off x="685800" y="1508760"/>
-            <a:ext cx="10881360" cy="457200"/>
+          <p:cNvPr id="6" name="Shape 4"/>
+          <p:cNvSpPr/>
+          <p:nvPr/>
+        </p:nvSpPr>
+        <p:spPr>
+          <a:xfrm>
+            <a:off x="502920" y="1417320"/>
+            <a:ext cx="5349240" cy="502920"/>
+          </a:xfrm>
+          <a:prstGeom prst="rect">
+            <a:avLst/>
+          </a:prstGeom>
+          <a:solidFill>
+            <a:srgbClr val="0B2545"/>
+          </a:solidFill>
+          <a:ln w="12700">
+            <a:solidFill>
+              <a:srgbClr val="0B2545"/>
+            </a:solidFill>
+            <a:prstDash val="solid"/>
+          </a:ln>
+        </p:spPr>
+      </p:sp>
+      <p:sp>
+        <p:nvSpPr>
+          <p:cNvPr id="7" name="Text 5"/>
+          <p:cNvSpPr/>
+          <p:nvPr/>
+        </p:nvSpPr>
+        <p:spPr>
+          <a:xfrm>
+            <a:off x="502920" y="1417320"/>
+            <a:ext cx="5349240" cy="502920"/>
           </a:xfrm>
           <a:prstGeom prst="rect">
             <a:avLst/>
@@ -13214,46 +14589,152 @@
               <a:buNone/>
             </a:pPr>
             <a:r>
-              <a:rPr lang="en-US" sz="1800" b="1" dirty="0">
-                <a:solidFill>
-                  <a:srgbClr val="0B2545"/>
+              <a:rPr lang="en-US" sz="1300" b="1" dirty="0">
+                <a:solidFill>
+                  <a:srgbClr val="F6F6F2"/>
+                </a:solidFill>
+                <a:latin typeface="Calibri" pitchFamily="34" charset="0"/>
+                <a:ea typeface="Calibri" pitchFamily="34" charset="-122"/>
+                <a:cs typeface="Calibri" pitchFamily="34" charset="-120"/>
+              </a:rPr>
+              <a:t>METHOD 1 · the calibrated WP model</a:t>
+            </a:r>
+            <a:endParaRPr lang="en-US" sz="1300" dirty="0"/>
+          </a:p>
+        </p:txBody>
+      </p:sp>
+      <p:sp>
+        <p:nvSpPr>
+          <p:cNvPr id="8" name="Text 6"/>
+          <p:cNvSpPr/>
+          <p:nvPr/>
+        </p:nvSpPr>
+        <p:spPr>
+          <a:xfrm>
+            <a:off x="685800" y="2057400"/>
+            <a:ext cx="5029200" cy="502920"/>
+          </a:xfrm>
+          <a:prstGeom prst="rect">
+            <a:avLst/>
+          </a:prstGeom>
+          <a:noFill/>
+          <a:ln/>
+        </p:spPr>
+        <p:txBody>
+          <a:bodyPr wrap="square" rtlCol="0" anchor="ctr"/>
+          <a:lstStyle/>
+          <a:p>
+            <a:pPr indent="0" marL="0">
+              <a:buNone/>
+            </a:pPr>
+            <a:r>
+              <a:rPr lang="en-US" sz="1300" b="1" dirty="0">
+                <a:solidFill>
+                  <a:srgbClr val="13315C"/>
+                </a:solidFill>
+                <a:latin typeface="Calibri" pitchFamily="34" charset="0"/>
+                <a:ea typeface="Calibri" pitchFamily="34" charset="-122"/>
+                <a:cs typeface="Calibri" pitchFamily="34" charset="-120"/>
+              </a:rPr>
+              <a:t>INPUTS:  </a:t>
+            </a:r>
+            <a:pPr indent="0" marL="0">
+              <a:buNone/>
+            </a:pPr>
+            <a:r>
+              <a:rPr lang="en-US" sz="1300" dirty="0">
+                <a:solidFill>
+                  <a:srgbClr val="1A1A1A"/>
+                </a:solidFill>
+                <a:latin typeface="Calibri" pitchFamily="34" charset="0"/>
+                <a:ea typeface="Calibri" pitchFamily="34" charset="-122"/>
+                <a:cs typeface="Calibri" pitchFamily="34" charset="-120"/>
+              </a:rPr>
+              <a:t>4 game-state features (min, score-diff, run, period)</a:t>
+            </a:r>
+            <a:endParaRPr lang="en-US" sz="1300" dirty="0"/>
+          </a:p>
+        </p:txBody>
+      </p:sp>
+      <p:sp>
+        <p:nvSpPr>
+          <p:cNvPr id="9" name="Text 7"/>
+          <p:cNvSpPr/>
+          <p:nvPr/>
+        </p:nvSpPr>
+        <p:spPr>
+          <a:xfrm>
+            <a:off x="685800" y="2606040"/>
+            <a:ext cx="5029200" cy="502920"/>
+          </a:xfrm>
+          <a:prstGeom prst="rect">
+            <a:avLst/>
+          </a:prstGeom>
+          <a:noFill/>
+          <a:ln/>
+        </p:spPr>
+        <p:txBody>
+          <a:bodyPr wrap="square" rtlCol="0" anchor="ctr"/>
+          <a:lstStyle/>
+          <a:p>
+            <a:pPr indent="0" marL="0">
+              <a:buNone/>
+            </a:pPr>
+            <a:r>
+              <a:rPr lang="en-US" sz="1300" b="1" dirty="0">
+                <a:solidFill>
+                  <a:srgbClr val="13315C"/>
+                </a:solidFill>
+                <a:latin typeface="Calibri" pitchFamily="34" charset="0"/>
+                <a:ea typeface="Calibri" pitchFamily="34" charset="-122"/>
+                <a:cs typeface="Calibri" pitchFamily="34" charset="-120"/>
+              </a:rPr>
+              <a:t>OUTPUTS:  </a:t>
+            </a:r>
+            <a:pPr indent="0" marL="0">
+              <a:buNone/>
+            </a:pPr>
+            <a:r>
+              <a:rPr lang="en-US" sz="1300" dirty="0">
+                <a:solidFill>
+                  <a:srgbClr val="1A1A1A"/>
                 </a:solidFill>
                 <a:latin typeface="Courier New" pitchFamily="34" charset="0"/>
                 <a:ea typeface="Courier New" pitchFamily="34" charset="-122"/>
                 <a:cs typeface="Courier New" pitchFamily="34" charset="-120"/>
               </a:rPr>
-              <a:t>edge_t  =  p̂_t  −  p_market_t</a:t>
-            </a:r>
-            <a:endParaRPr lang="en-US" sz="1800" dirty="0"/>
-          </a:p>
-        </p:txBody>
-      </p:sp>
-      <p:sp>
-        <p:nvSpPr>
-          <p:cNvPr id="7" name="Text 5"/>
-          <p:cNvSpPr/>
-          <p:nvPr/>
-        </p:nvSpPr>
-        <p:spPr>
-          <a:xfrm>
-            <a:off x="685800" y="1920240"/>
-            <a:ext cx="10881360" cy="365760"/>
-          </a:xfrm>
-          <a:prstGeom prst="rect">
-            <a:avLst/>
-          </a:prstGeom>
-          <a:noFill/>
-          <a:ln/>
-        </p:spPr>
-        <p:txBody>
-          <a:bodyPr wrap="square" rtlCol="0" anchor="ctr"/>
-          <a:lstStyle/>
-          <a:p>
-            <a:pPr algn="ctr" indent="0" marL="0">
-              <a:buNone/>
-            </a:pPr>
-            <a:r>
-              <a:rPr lang="en-US" sz="1200" i="1" dirty="0">
+              <a:t>p̂_t  =  P(home wins 1H), calibrated 0–1</a:t>
+            </a:r>
+            <a:endParaRPr lang="en-US" sz="1300" dirty="0"/>
+          </a:p>
+        </p:txBody>
+      </p:sp>
+      <p:sp>
+        <p:nvSpPr>
+          <p:cNvPr id="10" name="Text 8"/>
+          <p:cNvSpPr/>
+          <p:nvPr/>
+        </p:nvSpPr>
+        <p:spPr>
+          <a:xfrm>
+            <a:off x="685800" y="3154680"/>
+            <a:ext cx="5029200" cy="457200"/>
+          </a:xfrm>
+          <a:prstGeom prst="rect">
+            <a:avLst/>
+          </a:prstGeom>
+          <a:noFill/>
+          <a:ln/>
+        </p:spPr>
+        <p:txBody>
+          <a:bodyPr wrap="square" rtlCol="0" anchor="ctr"/>
+          <a:lstStyle/>
+          <a:p>
+            <a:pPr indent="0" marL="0">
+              <a:buNone/>
+            </a:pPr>
+            <a:r>
+              <a:rPr lang="en-US" sz="1300" b="1" dirty="0">
                 <a:solidFill>
                   <a:srgbClr val="13315C"/>
                 </a:solidFill>
@@ -13261,34 +14742,46 @@
                 <a:ea typeface="Calibri" pitchFamily="34" charset="-122"/>
                 <a:cs typeface="Calibri" pitchFamily="34" charset="-120"/>
               </a:rPr>
-              <a:t>core: where the variant's fair value disagrees with the de-vigged market</a:t>
-            </a:r>
-            <a:endParaRPr lang="en-US" sz="1200" dirty="0"/>
-          </a:p>
-        </p:txBody>
-      </p:sp>
-      <p:sp>
-        <p:nvSpPr>
-          <p:cNvPr id="8" name="Shape 6"/>
-          <p:cNvSpPr/>
-          <p:nvPr/>
-        </p:nvSpPr>
-        <p:spPr>
-          <a:xfrm>
-            <a:off x="502920" y="2514600"/>
-            <a:ext cx="5486400" cy="960120"/>
-          </a:xfrm>
-          <a:prstGeom prst="roundRect">
-            <a:avLst>
-              <a:gd name="adj" fmla="val 7619"/>
-            </a:avLst>
+              <a:t>ANSWERS:  </a:t>
+            </a:r>
+            <a:pPr indent="0" marL="0">
+              <a:buNone/>
+            </a:pPr>
+            <a:r>
+              <a:rPr lang="en-US" sz="1300" dirty="0">
+                <a:solidFill>
+                  <a:srgbClr val="1A1A1A"/>
+                </a:solidFill>
+                <a:latin typeface="Calibri" pitchFamily="34" charset="0"/>
+                <a:ea typeface="Calibri" pitchFamily="34" charset="-122"/>
+                <a:cs typeface="Calibri" pitchFamily="34" charset="-120"/>
+              </a:rPr>
+              <a:t>"Is the model accurate?"</a:t>
+            </a:r>
+            <a:endParaRPr lang="en-US" sz="1300" dirty="0"/>
+          </a:p>
+        </p:txBody>
+      </p:sp>
+      <p:sp>
+        <p:nvSpPr>
+          <p:cNvPr id="11" name="Shape 9"/>
+          <p:cNvSpPr/>
+          <p:nvPr/>
+        </p:nvSpPr>
+        <p:spPr>
+          <a:xfrm>
+            <a:off x="685800" y="3749040"/>
+            <a:ext cx="5029200" cy="36576"/>
+          </a:xfrm>
+          <a:prstGeom prst="rect">
+            <a:avLst/>
           </a:prstGeom>
           <a:solidFill>
-            <a:srgbClr val="EEF3F8"/>
+            <a:srgbClr val="8DA9C4"/>
           </a:solidFill>
-          <a:ln w="15240">
+          <a:ln w="12700">
             <a:solidFill>
-              <a:srgbClr val="1C7293"/>
+              <a:srgbClr val="8DA9C4"/>
             </a:solidFill>
             <a:prstDash val="solid"/>
           </a:ln>
@@ -13296,14 +14789,145 @@
       </p:sp>
       <p:sp>
         <p:nvSpPr>
-          <p:cNvPr id="9" name="Text 7"/>
-          <p:cNvSpPr/>
-          <p:nvPr/>
-        </p:nvSpPr>
-        <p:spPr>
-          <a:xfrm>
-            <a:off x="685800" y="2606040"/>
-            <a:ext cx="5120640" cy="457200"/>
+          <p:cNvPr id="12" name="Text 10"/>
+          <p:cNvSpPr/>
+          <p:nvPr/>
+        </p:nvSpPr>
+        <p:spPr>
+          <a:xfrm>
+            <a:off x="685800" y="3931920"/>
+            <a:ext cx="5029200" cy="457200"/>
+          </a:xfrm>
+          <a:prstGeom prst="rect">
+            <a:avLst/>
+          </a:prstGeom>
+          <a:noFill/>
+          <a:ln/>
+        </p:spPr>
+        <p:txBody>
+          <a:bodyPr wrap="square" rtlCol="0" anchor="ctr"/>
+          <a:lstStyle/>
+          <a:p>
+            <a:pPr indent="0" marL="0">
+              <a:buNone/>
+            </a:pPr>
+            <a:r>
+              <a:rPr lang="en-US" sz="1400" b="1" dirty="0">
+                <a:solidFill>
+                  <a:srgbClr val="0B2545"/>
+                </a:solidFill>
+                <a:latin typeface="Calibri" pitchFamily="34" charset="0"/>
+                <a:ea typeface="Calibri" pitchFamily="34" charset="-122"/>
+                <a:cs typeface="Calibri" pitchFamily="34" charset="-120"/>
+              </a:rPr>
+              <a:t>FINDING:  </a:t>
+            </a:r>
+            <a:pPr indent="0" marL="0">
+              <a:buNone/>
+            </a:pPr>
+            <a:r>
+              <a:rPr lang="en-US" sz="1600" b="1" dirty="0">
+                <a:solidFill>
+                  <a:srgbClr val="EEA02B"/>
+                </a:solidFill>
+                <a:latin typeface="Calibri" pitchFamily="34" charset="0"/>
+                <a:ea typeface="Calibri" pitchFamily="34" charset="-122"/>
+                <a:cs typeface="Calibri" pitchFamily="34" charset="-120"/>
+              </a:rPr>
+              <a:t>✅  </a:t>
+            </a:r>
+            <a:pPr indent="0" marL="0">
+              <a:buNone/>
+            </a:pPr>
+            <a:r>
+              <a:rPr lang="en-US" sz="1400" b="1" dirty="0">
+                <a:solidFill>
+                  <a:srgbClr val="0B2545"/>
+                </a:solidFill>
+                <a:latin typeface="Calibri" pitchFamily="34" charset="0"/>
+                <a:ea typeface="Calibri" pitchFamily="34" charset="-122"/>
+                <a:cs typeface="Calibri" pitchFamily="34" charset="-120"/>
+              </a:rPr>
+              <a:t>Brier 0.149 OOS, ECE 0.008</a:t>
+            </a:r>
+            <a:endParaRPr lang="en-US" sz="1400" dirty="0"/>
+          </a:p>
+        </p:txBody>
+      </p:sp>
+      <p:sp>
+        <p:nvSpPr>
+          <p:cNvPr id="13" name="Text 11"/>
+          <p:cNvSpPr/>
+          <p:nvPr/>
+        </p:nvSpPr>
+        <p:spPr>
+          <a:xfrm>
+            <a:off x="685800" y="4343400"/>
+            <a:ext cx="5029200" cy="365760"/>
+          </a:xfrm>
+          <a:prstGeom prst="rect">
+            <a:avLst/>
+          </a:prstGeom>
+          <a:noFill/>
+          <a:ln/>
+        </p:spPr>
+        <p:txBody>
+          <a:bodyPr wrap="square" rtlCol="0" anchor="ctr"/>
+          <a:lstStyle/>
+          <a:p>
+            <a:pPr indent="0" marL="0">
+              <a:buNone/>
+            </a:pPr>
+            <a:r>
+              <a:rPr lang="en-US" sz="1100" i="1" dirty="0">
+                <a:solidFill>
+                  <a:srgbClr val="13315C"/>
+                </a:solidFill>
+                <a:latin typeface="Calibri" pitchFamily="34" charset="0"/>
+                <a:ea typeface="Calibri" pitchFamily="34" charset="-122"/>
+                <a:cs typeface="Calibri" pitchFamily="34" charset="-120"/>
+              </a:rPr>
+              <a:t>the probabilities can be trusted</a:t>
+            </a:r>
+            <a:endParaRPr lang="en-US" sz="1100" dirty="0"/>
+          </a:p>
+        </p:txBody>
+      </p:sp>
+      <p:sp>
+        <p:nvSpPr>
+          <p:cNvPr id="14" name="Shape 12"/>
+          <p:cNvSpPr/>
+          <p:nvPr/>
+        </p:nvSpPr>
+        <p:spPr>
+          <a:xfrm>
+            <a:off x="5943600" y="3154680"/>
+            <a:ext cx="640080" cy="548640"/>
+          </a:xfrm>
+          <a:prstGeom prst="rightArrow">
+            <a:avLst/>
+          </a:prstGeom>
+          <a:solidFill>
+            <a:srgbClr val="EEA02B"/>
+          </a:solidFill>
+          <a:ln w="12700">
+            <a:solidFill>
+              <a:srgbClr val="EEA02B"/>
+            </a:solidFill>
+            <a:prstDash val="solid"/>
+          </a:ln>
+        </p:spPr>
+      </p:sp>
+      <p:sp>
+        <p:nvSpPr>
+          <p:cNvPr id="15" name="Text 13"/>
+          <p:cNvSpPr/>
+          <p:nvPr/>
+        </p:nvSpPr>
+        <p:spPr>
+          <a:xfrm>
+            <a:off x="5760720" y="3749040"/>
+            <a:ext cx="1005840" cy="274320"/>
           </a:xfrm>
           <a:prstGeom prst="rect">
             <a:avLst/>
@@ -13319,46 +14943,243 @@
               <a:buNone/>
             </a:pPr>
             <a:r>
-              <a:rPr lang="en-US" sz="1800" b="1" dirty="0">
-                <a:solidFill>
-                  <a:srgbClr val="0B2545"/>
+              <a:rPr lang="en-US" sz="900" i="1" dirty="0">
+                <a:solidFill>
+                  <a:srgbClr val="13315C"/>
+                </a:solidFill>
+                <a:latin typeface="Calibri" pitchFamily="34" charset="0"/>
+                <a:ea typeface="Calibri" pitchFamily="34" charset="-122"/>
+                <a:cs typeface="Calibri" pitchFamily="34" charset="-120"/>
+              </a:rPr>
+              <a:t>feeds p̂_t into</a:t>
+            </a:r>
+            <a:endParaRPr lang="en-US" sz="900" dirty="0"/>
+          </a:p>
+        </p:txBody>
+      </p:sp>
+      <p:sp>
+        <p:nvSpPr>
+          <p:cNvPr id="16" name="Shape 14"/>
+          <p:cNvSpPr/>
+          <p:nvPr/>
+        </p:nvSpPr>
+        <p:spPr>
+          <a:xfrm>
+            <a:off x="6675120" y="1417320"/>
+            <a:ext cx="5074920" cy="4114800"/>
+          </a:xfrm>
+          <a:prstGeom prst="roundRect">
+            <a:avLst>
+              <a:gd name="adj" fmla="val 2222"/>
+            </a:avLst>
+          </a:prstGeom>
+          <a:solidFill>
+            <a:srgbClr val="F6F6F2"/>
+          </a:solidFill>
+          <a:ln w="20320">
+            <a:solidFill>
+              <a:srgbClr val="EEA02B"/>
+            </a:solidFill>
+            <a:prstDash val="solid"/>
+          </a:ln>
+        </p:spPr>
+      </p:sp>
+      <p:sp>
+        <p:nvSpPr>
+          <p:cNvPr id="17" name="Shape 15"/>
+          <p:cNvSpPr/>
+          <p:nvPr/>
+        </p:nvSpPr>
+        <p:spPr>
+          <a:xfrm>
+            <a:off x="6675120" y="1417320"/>
+            <a:ext cx="5074920" cy="502920"/>
+          </a:xfrm>
+          <a:prstGeom prst="rect">
+            <a:avLst/>
+          </a:prstGeom>
+          <a:solidFill>
+            <a:srgbClr val="0B2545"/>
+          </a:solidFill>
+          <a:ln w="12700">
+            <a:solidFill>
+              <a:srgbClr val="0B2545"/>
+            </a:solidFill>
+            <a:prstDash val="solid"/>
+          </a:ln>
+        </p:spPr>
+      </p:sp>
+      <p:sp>
+        <p:nvSpPr>
+          <p:cNvPr id="18" name="Text 16"/>
+          <p:cNvSpPr/>
+          <p:nvPr/>
+        </p:nvSpPr>
+        <p:spPr>
+          <a:xfrm>
+            <a:off x="6675120" y="1417320"/>
+            <a:ext cx="5074920" cy="502920"/>
+          </a:xfrm>
+          <a:prstGeom prst="rect">
+            <a:avLst/>
+          </a:prstGeom>
+          <a:noFill/>
+          <a:ln/>
+        </p:spPr>
+        <p:txBody>
+          <a:bodyPr wrap="square" rtlCol="0" anchor="ctr"/>
+          <a:lstStyle/>
+          <a:p>
+            <a:pPr algn="ctr" indent="0" marL="0">
+              <a:buNone/>
+            </a:pPr>
+            <a:r>
+              <a:rPr lang="en-US" sz="1300" b="1" dirty="0">
+                <a:solidFill>
+                  <a:srgbClr val="F6F6F2"/>
+                </a:solidFill>
+                <a:latin typeface="Calibri" pitchFamily="34" charset="0"/>
+                <a:ea typeface="Calibri" pitchFamily="34" charset="-122"/>
+                <a:cs typeface="Calibri" pitchFamily="34" charset="-120"/>
+              </a:rPr>
+              <a:t>METHOD 2 · the overreaction test</a:t>
+            </a:r>
+            <a:endParaRPr lang="en-US" sz="1300" dirty="0"/>
+          </a:p>
+        </p:txBody>
+      </p:sp>
+      <p:sp>
+        <p:nvSpPr>
+          <p:cNvPr id="19" name="Text 17"/>
+          <p:cNvSpPr/>
+          <p:nvPr/>
+        </p:nvSpPr>
+        <p:spPr>
+          <a:xfrm>
+            <a:off x="6858000" y="2057400"/>
+            <a:ext cx="4754880" cy="502920"/>
+          </a:xfrm>
+          <a:prstGeom prst="rect">
+            <a:avLst/>
+          </a:prstGeom>
+          <a:noFill/>
+          <a:ln/>
+        </p:spPr>
+        <p:txBody>
+          <a:bodyPr wrap="square" rtlCol="0" anchor="ctr"/>
+          <a:lstStyle/>
+          <a:p>
+            <a:pPr indent="0" marL="0">
+              <a:buNone/>
+            </a:pPr>
+            <a:r>
+              <a:rPr lang="en-US" sz="1300" b="1" dirty="0">
+                <a:solidFill>
+                  <a:srgbClr val="13315C"/>
+                </a:solidFill>
+                <a:latin typeface="Calibri" pitchFamily="34" charset="0"/>
+                <a:ea typeface="Calibri" pitchFamily="34" charset="-122"/>
+                <a:cs typeface="Calibri" pitchFamily="34" charset="-120"/>
+              </a:rPr>
+              <a:t>INPUTS:  </a:t>
+            </a:r>
+            <a:pPr indent="0" marL="0">
+              <a:buNone/>
+            </a:pPr>
+            <a:r>
+              <a:rPr lang="en-US" sz="1300" dirty="0">
+                <a:solidFill>
+                  <a:srgbClr val="1A1A1A"/>
+                </a:solidFill>
+                <a:latin typeface="Calibri" pitchFamily="34" charset="0"/>
+                <a:ea typeface="Calibri" pitchFamily="34" charset="-122"/>
+                <a:cs typeface="Calibri" pitchFamily="34" charset="-120"/>
+              </a:rPr>
+              <a:t>p̂_t from Method 1, at trailing-team scoring events</a:t>
+            </a:r>
+            <a:endParaRPr lang="en-US" sz="1300" dirty="0"/>
+          </a:p>
+        </p:txBody>
+      </p:sp>
+      <p:sp>
+        <p:nvSpPr>
+          <p:cNvPr id="20" name="Text 18"/>
+          <p:cNvSpPr/>
+          <p:nvPr/>
+        </p:nvSpPr>
+        <p:spPr>
+          <a:xfrm>
+            <a:off x="6858000" y="2606040"/>
+            <a:ext cx="4754880" cy="502920"/>
+          </a:xfrm>
+          <a:prstGeom prst="rect">
+            <a:avLst/>
+          </a:prstGeom>
+          <a:noFill/>
+          <a:ln/>
+        </p:spPr>
+        <p:txBody>
+          <a:bodyPr wrap="square" rtlCol="0" anchor="ctr"/>
+          <a:lstStyle/>
+          <a:p>
+            <a:pPr indent="0" marL="0">
+              <a:buNone/>
+            </a:pPr>
+            <a:r>
+              <a:rPr lang="en-US" sz="1300" b="1" dirty="0">
+                <a:solidFill>
+                  <a:srgbClr val="13315C"/>
+                </a:solidFill>
+                <a:latin typeface="Calibri" pitchFamily="34" charset="0"/>
+                <a:ea typeface="Calibri" pitchFamily="34" charset="-122"/>
+                <a:cs typeface="Calibri" pitchFamily="34" charset="-120"/>
+              </a:rPr>
+              <a:t>OUTPUTS:  </a:t>
+            </a:r>
+            <a:pPr indent="0" marL="0">
+              <a:buNone/>
+            </a:pPr>
+            <a:r>
+              <a:rPr lang="en-US" sz="1300" dirty="0">
+                <a:solidFill>
+                  <a:srgbClr val="1A1A1A"/>
                 </a:solidFill>
                 <a:latin typeface="Courier New" pitchFamily="34" charset="0"/>
                 <a:ea typeface="Courier New" pitchFamily="34" charset="-122"/>
                 <a:cs typeface="Courier New" pitchFamily="34" charset="-120"/>
               </a:rPr>
-              <a:t>p_devig  =  p_home_raw / (p_home_raw + p_away_raw)</a:t>
-            </a:r>
-            <a:endParaRPr lang="en-US" sz="1800" dirty="0"/>
-          </a:p>
-        </p:txBody>
-      </p:sp>
-      <p:sp>
-        <p:nvSpPr>
-          <p:cNvPr id="10" name="Text 8"/>
-          <p:cNvSpPr/>
-          <p:nvPr/>
-        </p:nvSpPr>
-        <p:spPr>
-          <a:xfrm>
-            <a:off x="685800" y="3017520"/>
-            <a:ext cx="5120640" cy="365760"/>
-          </a:xfrm>
-          <a:prstGeom prst="rect">
-            <a:avLst/>
-          </a:prstGeom>
-          <a:noFill/>
-          <a:ln/>
-        </p:spPr>
-        <p:txBody>
-          <a:bodyPr wrap="square" rtlCol="0" anchor="ctr"/>
-          <a:lstStyle/>
-          <a:p>
-            <a:pPr algn="ctr" indent="0" marL="0">
-              <a:buNone/>
-            </a:pPr>
-            <a:r>
-              <a:rPr lang="en-US" sz="1200" i="1" dirty="0">
+              <a:t>Δp̂_scorer(t)  =  p̂(t+60) − p̂(t)</a:t>
+            </a:r>
+            <a:endParaRPr lang="en-US" sz="1300" dirty="0"/>
+          </a:p>
+        </p:txBody>
+      </p:sp>
+      <p:sp>
+        <p:nvSpPr>
+          <p:cNvPr id="21" name="Text 19"/>
+          <p:cNvSpPr/>
+          <p:nvPr/>
+        </p:nvSpPr>
+        <p:spPr>
+          <a:xfrm>
+            <a:off x="6858000" y="3154680"/>
+            <a:ext cx="4754880" cy="594360"/>
+          </a:xfrm>
+          <a:prstGeom prst="rect">
+            <a:avLst/>
+          </a:prstGeom>
+          <a:noFill/>
+          <a:ln/>
+        </p:spPr>
+        <p:txBody>
+          <a:bodyPr wrap="square" rtlCol="0" anchor="ctr"/>
+          <a:lstStyle/>
+          <a:p>
+            <a:pPr indent="0" marL="0">
+              <a:buNone/>
+            </a:pPr>
+            <a:r>
+              <a:rPr lang="en-US" sz="1300" b="1" dirty="0">
                 <a:solidFill>
                   <a:srgbClr val="13315C"/>
                 </a:solidFill>
@@ -13366,34 +15187,46 @@
                 <a:ea typeface="Calibri" pitchFamily="34" charset="-122"/>
                 <a:cs typeface="Calibri" pitchFamily="34" charset="-120"/>
               </a:rPr>
-              <a:t>multiplicative two-way de-vig</a:t>
-            </a:r>
-            <a:endParaRPr lang="en-US" sz="1200" dirty="0"/>
-          </a:p>
-        </p:txBody>
-      </p:sp>
-      <p:sp>
-        <p:nvSpPr>
-          <p:cNvPr id="11" name="Shape 9"/>
-          <p:cNvSpPr/>
-          <p:nvPr/>
-        </p:nvSpPr>
-        <p:spPr>
-          <a:xfrm>
-            <a:off x="6263640" y="2514600"/>
-            <a:ext cx="5486400" cy="960120"/>
-          </a:xfrm>
-          <a:prstGeom prst="roundRect">
-            <a:avLst>
-              <a:gd name="adj" fmla="val 7619"/>
-            </a:avLst>
+              <a:t>ANSWERS:  </a:t>
+            </a:r>
+            <a:pPr indent="0" marL="0">
+              <a:buNone/>
+            </a:pPr>
+            <a:r>
+              <a:rPr lang="en-US" sz="1300" dirty="0">
+                <a:solidFill>
+                  <a:srgbClr val="1A1A1A"/>
+                </a:solidFill>
+                <a:latin typeface="Calibri" pitchFamily="34" charset="0"/>
+                <a:ea typeface="Calibri" pitchFamily="34" charset="-122"/>
+                <a:cs typeface="Calibri" pitchFamily="34" charset="-120"/>
+              </a:rPr>
+              <a:t>"Does the market overshoot p̂_t in event windows?"</a:t>
+            </a:r>
+            <a:endParaRPr lang="en-US" sz="1300" dirty="0"/>
+          </a:p>
+        </p:txBody>
+      </p:sp>
+      <p:sp>
+        <p:nvSpPr>
+          <p:cNvPr id="22" name="Shape 20"/>
+          <p:cNvSpPr/>
+          <p:nvPr/>
+        </p:nvSpPr>
+        <p:spPr>
+          <a:xfrm>
+            <a:off x="6858000" y="3749040"/>
+            <a:ext cx="4754880" cy="36576"/>
+          </a:xfrm>
+          <a:prstGeom prst="rect">
+            <a:avLst/>
           </a:prstGeom>
           <a:solidFill>
-            <a:srgbClr val="EEF3F8"/>
+            <a:srgbClr val="8DA9C4"/>
           </a:solidFill>
-          <a:ln w="15240">
+          <a:ln w="12700">
             <a:solidFill>
-              <a:srgbClr val="1C7293"/>
+              <a:srgbClr val="8DA9C4"/>
             </a:solidFill>
             <a:prstDash val="solid"/>
           </a:ln>
@@ -13401,850 +15234,237 @@
       </p:sp>
       <p:sp>
         <p:nvSpPr>
-          <p:cNvPr id="12" name="Text 10"/>
-          <p:cNvSpPr/>
-          <p:nvPr/>
-        </p:nvSpPr>
-        <p:spPr>
-          <a:xfrm>
-            <a:off x="6446520" y="2606040"/>
-            <a:ext cx="5120640" cy="457200"/>
-          </a:xfrm>
-          <a:prstGeom prst="rect">
-            <a:avLst/>
-          </a:prstGeom>
-          <a:noFill/>
-          <a:ln/>
-        </p:spPr>
-        <p:txBody>
-          <a:bodyPr wrap="square" rtlCol="0" anchor="ctr"/>
-          <a:lstStyle/>
-          <a:p>
-            <a:pPr algn="ctr" indent="0" marL="0">
-              <a:buNone/>
-            </a:pPr>
-            <a:r>
-              <a:rPr lang="en-US" sz="1800" b="1" dirty="0">
+          <p:cNvPr id="23" name="Text 21"/>
+          <p:cNvSpPr/>
+          <p:nvPr/>
+        </p:nvSpPr>
+        <p:spPr>
+          <a:xfrm>
+            <a:off x="6858000" y="3931920"/>
+            <a:ext cx="4754880" cy="457200"/>
+          </a:xfrm>
+          <a:prstGeom prst="rect">
+            <a:avLst/>
+          </a:prstGeom>
+          <a:noFill/>
+          <a:ln/>
+        </p:spPr>
+        <p:txBody>
+          <a:bodyPr wrap="square" rtlCol="0" anchor="ctr"/>
+          <a:lstStyle/>
+          <a:p>
+            <a:pPr indent="0" marL="0">
+              <a:buNone/>
+            </a:pPr>
+            <a:r>
+              <a:rPr lang="en-US" sz="1400" b="1" dirty="0">
                 <a:solidFill>
                   <a:srgbClr val="0B2545"/>
-                </a:solidFill>
-                <a:latin typeface="Courier New" pitchFamily="34" charset="0"/>
-                <a:ea typeface="Courier New" pitchFamily="34" charset="-122"/>
-                <a:cs typeface="Courier New" pitchFamily="34" charset="-120"/>
-              </a:rPr>
-              <a:t>f*  =  ( b · p  −  q ) / b</a:t>
-            </a:r>
-            <a:endParaRPr lang="en-US" sz="1800" dirty="0"/>
-          </a:p>
-        </p:txBody>
-      </p:sp>
-      <p:sp>
-        <p:nvSpPr>
-          <p:cNvPr id="13" name="Text 11"/>
-          <p:cNvSpPr/>
-          <p:nvPr/>
-        </p:nvSpPr>
-        <p:spPr>
-          <a:xfrm>
-            <a:off x="6446520" y="3017520"/>
-            <a:ext cx="5120640" cy="365760"/>
-          </a:xfrm>
-          <a:prstGeom prst="rect">
-            <a:avLst/>
-          </a:prstGeom>
-          <a:noFill/>
-          <a:ln/>
-        </p:spPr>
-        <p:txBody>
-          <a:bodyPr wrap="square" rtlCol="0" anchor="ctr"/>
-          <a:lstStyle/>
-          <a:p>
-            <a:pPr algn="ctr" indent="0" marL="0">
-              <a:buNone/>
-            </a:pPr>
-            <a:r>
-              <a:rPr lang="en-US" sz="1200" i="1" dirty="0">
-                <a:solidFill>
-                  <a:srgbClr val="13315C"/>
                 </a:solidFill>
                 <a:latin typeface="Calibri" pitchFamily="34" charset="0"/>
                 <a:ea typeface="Calibri" pitchFamily="34" charset="-122"/>
                 <a:cs typeface="Calibri" pitchFamily="34" charset="-120"/>
               </a:rPr>
-              <a:t>Kelly fraction · b = decimal−1, q = 1−p</a:t>
-            </a:r>
-            <a:endParaRPr lang="en-US" sz="1200" dirty="0"/>
-          </a:p>
-        </p:txBody>
-      </p:sp>
-      <p:graphicFrame>
-        <p:nvGraphicFramePr>
-          <p:cNvPr id="10" name="Table 0"/>
-          <p:cNvGraphicFramePr>
-            <a:graphicFrameLocks noGrp="1"/>
-          </p:cNvGraphicFramePr>
-          <p:nvPr>
-            <p:extLst>
-              <p:ext uri="{D42A27DB-BD31-4B8C-83A1-F6EECF244321}">
-                <p14:modId xmlns:p14="http://schemas.microsoft.com/office/powerpoint/2010/main" val="1579011935"/>
-              </p:ext>
-            </p:extLst>
-          </p:nvPr>
-        </p:nvGraphicFramePr>
-        <p:xfrm>
-          <a:off x="502920" y="3703320"/>
-          <a:ext cx="11247120" cy="914400"/>
-        </p:xfrm>
-        <a:graphic>
-          <a:graphicData uri="http://schemas.openxmlformats.org/drawingml/2006/table">
-            <a:tbl>
-              <a:tblPr/>
-              <a:tblGrid>
-                <a:gridCol w="5486400"/>
-                <a:gridCol w="5760720"/>
-              </a:tblGrid>
-              <a:tr h="457200">
-                <a:tc>
-                  <a:txBody>
-                    <a:bodyPr/>
-                    <a:lstStyle/>
-                    <a:p>
-                      <a:pPr indent="0" marL="0">
-                        <a:buNone/>
-                      </a:pPr>
-                      <a:r>
-                        <a:rPr lang="en-US" sz="1300" b="1" dirty="0">
-                          <a:solidFill>
-                            <a:srgbClr val="F6F6F2"/>
-                          </a:solidFill>
-                          <a:latin typeface="Calibri" pitchFamily="34" charset="0"/>
-                          <a:ea typeface="Calibri" pitchFamily="34" charset="-122"/>
-                          <a:cs typeface="Calibri" pitchFamily="34" charset="-120"/>
-                        </a:rPr>
-                        <a:t>Honesty gate</a:t>
-                      </a:r>
-                      <a:endParaRPr lang="en-US" sz="1300" dirty="0">
-                        <a:latin typeface="Calibri" charset="0"/>
-                        <a:ea typeface="Calibri" charset="0"/>
-                        <a:cs typeface="Calibri" charset="0"/>
-                      </a:endParaRPr>
-                    </a:p>
-                  </a:txBody>
-                  <a:tcPr marL="91440" marR="91440" marT="45720" marB="45720">
-                    <a:lnL w="12700" cap="flat" cmpd="sng" algn="ctr">
-                      <a:solidFill>
-                        <a:srgbClr val="8DA9C4"/>
-                      </a:solidFill>
-                      <a:prstDash val="solid"/>
-                      <a:round/>
-                      <a:headEnd type="none" w="med" len="med"/>
-                      <a:tailEnd type="none" w="med" len="med"/>
-                    </a:lnL>
-                    <a:lnR w="12700" cap="flat" cmpd="sng" algn="ctr">
-                      <a:solidFill>
-                        <a:srgbClr val="8DA9C4"/>
-                      </a:solidFill>
-                      <a:prstDash val="solid"/>
-                      <a:round/>
-                      <a:headEnd type="none" w="med" len="med"/>
-                      <a:tailEnd type="none" w="med" len="med"/>
-                    </a:lnR>
-                    <a:lnT w="12700" cap="flat" cmpd="sng" algn="ctr">
-                      <a:solidFill>
-                        <a:srgbClr val="8DA9C4"/>
-                      </a:solidFill>
-                      <a:prstDash val="solid"/>
-                      <a:round/>
-                      <a:headEnd type="none" w="med" len="med"/>
-                      <a:tailEnd type="none" w="med" len="med"/>
-                    </a:lnT>
-                    <a:lnB w="12700" cap="flat" cmpd="sng" algn="ctr">
-                      <a:solidFill>
-                        <a:srgbClr val="8DA9C4"/>
-                      </a:solidFill>
-                      <a:prstDash val="solid"/>
-                      <a:round/>
-                      <a:headEnd type="none" w="med" len="med"/>
-                      <a:tailEnd type="none" w="med" len="med"/>
-                    </a:lnB>
-                    <a:solidFill>
-                      <a:srgbClr val="0B2545"/>
-                    </a:solidFill>
-                  </a:tcPr>
-                </a:tc>
-                <a:tc>
-                  <a:txBody>
-                    <a:bodyPr/>
-                    <a:lstStyle/>
-                    <a:p>
-                      <a:pPr indent="0" marL="0">
-                        <a:buNone/>
-                      </a:pPr>
-                      <a:r>
-                        <a:rPr lang="en-US" sz="1300" b="1" dirty="0">
-                          <a:solidFill>
-                            <a:srgbClr val="F6F6F2"/>
-                          </a:solidFill>
-                          <a:latin typeface="Calibri" pitchFamily="34" charset="0"/>
-                          <a:ea typeface="Calibri" pitchFamily="34" charset="-122"/>
-                          <a:cs typeface="Calibri" pitchFamily="34" charset="-120"/>
-                        </a:rPr>
-                        <a:t>What it proves</a:t>
-                      </a:r>
-                      <a:endParaRPr lang="en-US" sz="1300" dirty="0">
-                        <a:latin typeface="Calibri" charset="0"/>
-                        <a:ea typeface="Calibri" charset="0"/>
-                        <a:cs typeface="Calibri" charset="0"/>
-                      </a:endParaRPr>
-                    </a:p>
-                  </a:txBody>
-                  <a:tcPr marL="91440" marR="91440" marT="45720" marB="45720">
-                    <a:lnL w="12700" cap="flat" cmpd="sng" algn="ctr">
-                      <a:solidFill>
-                        <a:srgbClr val="8DA9C4"/>
-                      </a:solidFill>
-                      <a:prstDash val="solid"/>
-                      <a:round/>
-                      <a:headEnd type="none" w="med" len="med"/>
-                      <a:tailEnd type="none" w="med" len="med"/>
-                    </a:lnL>
-                    <a:lnR w="12700" cap="flat" cmpd="sng" algn="ctr">
-                      <a:solidFill>
-                        <a:srgbClr val="8DA9C4"/>
-                      </a:solidFill>
-                      <a:prstDash val="solid"/>
-                      <a:round/>
-                      <a:headEnd type="none" w="med" len="med"/>
-                      <a:tailEnd type="none" w="med" len="med"/>
-                    </a:lnR>
-                    <a:lnT w="12700" cap="flat" cmpd="sng" algn="ctr">
-                      <a:solidFill>
-                        <a:srgbClr val="8DA9C4"/>
-                      </a:solidFill>
-                      <a:prstDash val="solid"/>
-                      <a:round/>
-                      <a:headEnd type="none" w="med" len="med"/>
-                      <a:tailEnd type="none" w="med" len="med"/>
-                    </a:lnT>
-                    <a:lnB w="12700" cap="flat" cmpd="sng" algn="ctr">
-                      <a:solidFill>
-                        <a:srgbClr val="8DA9C4"/>
-                      </a:solidFill>
-                      <a:prstDash val="solid"/>
-                      <a:round/>
-                      <a:headEnd type="none" w="med" len="med"/>
-                      <a:tailEnd type="none" w="med" len="med"/>
-                    </a:lnB>
-                    <a:solidFill>
-                      <a:srgbClr val="0B2545"/>
-                    </a:solidFill>
-                  </a:tcPr>
-                </a:tc>
-              </a:tr>
-              <a:tr h="457200">
-                <a:tc>
-                  <a:txBody>
-                    <a:bodyPr/>
-                    <a:lstStyle/>
-                    <a:p>
-                      <a:pPr indent="0" marL="0">
-                        <a:buNone/>
-                      </a:pPr>
-                      <a:r>
-                        <a:rPr lang="en-US" sz="1300" b="1" dirty="0">
-                          <a:solidFill>
-                            <a:srgbClr val="0B2545"/>
-                          </a:solidFill>
-                          <a:latin typeface="Calibri" pitchFamily="34" charset="0"/>
-                          <a:ea typeface="Calibri" pitchFamily="34" charset="-122"/>
-                          <a:cs typeface="Calibri" pitchFamily="34" charset="-120"/>
-                        </a:rPr>
-                        <a:t>const-0.5 → Brier 0.25</a:t>
-                      </a:r>
-                      <a:endParaRPr lang="en-US" sz="1300" dirty="0">
-                        <a:latin typeface="Calibri" charset="0"/>
-                        <a:ea typeface="Calibri" charset="0"/>
-                        <a:cs typeface="Calibri" charset="0"/>
-                      </a:endParaRPr>
-                    </a:p>
-                  </a:txBody>
-                  <a:tcPr marL="91440" marR="91440" marT="45720" marB="45720">
-                    <a:lnL w="12700" cap="flat" cmpd="sng" algn="ctr">
-                      <a:solidFill>
-                        <a:srgbClr val="8DA9C4"/>
-                      </a:solidFill>
-                      <a:prstDash val="solid"/>
-                      <a:round/>
-                      <a:headEnd type="none" w="med" len="med"/>
-                      <a:tailEnd type="none" w="med" len="med"/>
-                    </a:lnL>
-                    <a:lnR w="12700" cap="flat" cmpd="sng" algn="ctr">
-                      <a:solidFill>
-                        <a:srgbClr val="8DA9C4"/>
-                      </a:solidFill>
-                      <a:prstDash val="solid"/>
-                      <a:round/>
-                      <a:headEnd type="none" w="med" len="med"/>
-                      <a:tailEnd type="none" w="med" len="med"/>
-                    </a:lnR>
-                    <a:lnT w="12700" cap="flat" cmpd="sng" algn="ctr">
-                      <a:solidFill>
-                        <a:srgbClr val="8DA9C4"/>
-                      </a:solidFill>
-                      <a:prstDash val="solid"/>
-                      <a:round/>
-                      <a:headEnd type="none" w="med" len="med"/>
-                      <a:tailEnd type="none" w="med" len="med"/>
-                    </a:lnT>
-                    <a:lnB w="12700" cap="flat" cmpd="sng" algn="ctr">
-                      <a:solidFill>
-                        <a:srgbClr val="8DA9C4"/>
-                      </a:solidFill>
-                      <a:prstDash val="solid"/>
-                      <a:round/>
-                      <a:headEnd type="none" w="med" len="med"/>
-                      <a:tailEnd type="none" w="med" len="med"/>
-                    </a:lnB>
-                  </a:tcPr>
-                </a:tc>
-                <a:tc>
-                  <a:txBody>
-                    <a:bodyPr/>
-                    <a:lstStyle/>
-                    <a:p>
-                      <a:pPr indent="0" marL="0">
-                        <a:buNone/>
-                      </a:pPr>
-                      <a:r>
-                        <a:rPr lang="en-US" sz="1300" dirty="0">
-                          <a:solidFill>
-                            <a:srgbClr val="1A1A1A"/>
-                          </a:solidFill>
-                          <a:latin typeface="Calibri" pitchFamily="34" charset="0"/>
-                          <a:ea typeface="Calibri" pitchFamily="34" charset="-122"/>
-                          <a:cs typeface="Calibri" pitchFamily="34" charset="-120"/>
-                        </a:rPr>
-                        <a:t>metrics wired correctly</a:t>
-                      </a:r>
-                      <a:endParaRPr lang="en-US" sz="1300" dirty="0">
-                        <a:latin typeface="Calibri" charset="0"/>
-                        <a:ea typeface="Calibri" charset="0"/>
-                        <a:cs typeface="Calibri" charset="0"/>
-                      </a:endParaRPr>
-                    </a:p>
-                  </a:txBody>
-                  <a:tcPr marL="91440" marR="91440" marT="45720" marB="45720">
-                    <a:lnL w="12700" cap="flat" cmpd="sng" algn="ctr">
-                      <a:solidFill>
-                        <a:srgbClr val="8DA9C4"/>
-                      </a:solidFill>
-                      <a:prstDash val="solid"/>
-                      <a:round/>
-                      <a:headEnd type="none" w="med" len="med"/>
-                      <a:tailEnd type="none" w="med" len="med"/>
-                    </a:lnL>
-                    <a:lnR w="12700" cap="flat" cmpd="sng" algn="ctr">
-                      <a:solidFill>
-                        <a:srgbClr val="8DA9C4"/>
-                      </a:solidFill>
-                      <a:prstDash val="solid"/>
-                      <a:round/>
-                      <a:headEnd type="none" w="med" len="med"/>
-                      <a:tailEnd type="none" w="med" len="med"/>
-                    </a:lnR>
-                    <a:lnT w="12700" cap="flat" cmpd="sng" algn="ctr">
-                      <a:solidFill>
-                        <a:srgbClr val="8DA9C4"/>
-                      </a:solidFill>
-                      <a:prstDash val="solid"/>
-                      <a:round/>
-                      <a:headEnd type="none" w="med" len="med"/>
-                      <a:tailEnd type="none" w="med" len="med"/>
-                    </a:lnT>
-                    <a:lnB w="12700" cap="flat" cmpd="sng" algn="ctr">
-                      <a:solidFill>
-                        <a:srgbClr val="8DA9C4"/>
-                      </a:solidFill>
-                      <a:prstDash val="solid"/>
-                      <a:round/>
-                      <a:headEnd type="none" w="med" len="med"/>
-                      <a:tailEnd type="none" w="med" len="med"/>
-                    </a:lnB>
-                  </a:tcPr>
-                </a:tc>
-              </a:tr>
-              <a:tr h="457200">
-                <a:tc>
-                  <a:txBody>
-                    <a:bodyPr/>
-                    <a:lstStyle/>
-                    <a:p>
-                      <a:pPr indent="0" marL="0">
-                        <a:buNone/>
-                      </a:pPr>
-                      <a:r>
-                        <a:rPr lang="en-US" sz="1300" b="1" dirty="0">
-                          <a:solidFill>
-                            <a:srgbClr val="0B2545"/>
-                          </a:solidFill>
-                          <a:latin typeface="Calibri" pitchFamily="34" charset="0"/>
-                          <a:ea typeface="Calibri" pitchFamily="34" charset="-122"/>
-                          <a:cs typeface="Calibri" pitchFamily="34" charset="-120"/>
-                        </a:rPr>
-                        <a:t>always-favorite → loses ≈ vig</a:t>
-                      </a:r>
-                      <a:endParaRPr lang="en-US" sz="1300" dirty="0">
-                        <a:latin typeface="Calibri" charset="0"/>
-                        <a:ea typeface="Calibri" charset="0"/>
-                        <a:cs typeface="Calibri" charset="0"/>
-                      </a:endParaRPr>
-                    </a:p>
-                  </a:txBody>
-                  <a:tcPr marL="91440" marR="91440" marT="45720" marB="45720">
-                    <a:lnL w="12700" cap="flat" cmpd="sng" algn="ctr">
-                      <a:solidFill>
-                        <a:srgbClr val="8DA9C4"/>
-                      </a:solidFill>
-                      <a:prstDash val="solid"/>
-                      <a:round/>
-                      <a:headEnd type="none" w="med" len="med"/>
-                      <a:tailEnd type="none" w="med" len="med"/>
-                    </a:lnL>
-                    <a:lnR w="12700" cap="flat" cmpd="sng" algn="ctr">
-                      <a:solidFill>
-                        <a:srgbClr val="8DA9C4"/>
-                      </a:solidFill>
-                      <a:prstDash val="solid"/>
-                      <a:round/>
-                      <a:headEnd type="none" w="med" len="med"/>
-                      <a:tailEnd type="none" w="med" len="med"/>
-                    </a:lnR>
-                    <a:lnT w="12700" cap="flat" cmpd="sng" algn="ctr">
-                      <a:solidFill>
-                        <a:srgbClr val="8DA9C4"/>
-                      </a:solidFill>
-                      <a:prstDash val="solid"/>
-                      <a:round/>
-                      <a:headEnd type="none" w="med" len="med"/>
-                      <a:tailEnd type="none" w="med" len="med"/>
-                    </a:lnT>
-                    <a:lnB w="12700" cap="flat" cmpd="sng" algn="ctr">
-                      <a:solidFill>
-                        <a:srgbClr val="8DA9C4"/>
-                      </a:solidFill>
-                      <a:prstDash val="solid"/>
-                      <a:round/>
-                      <a:headEnd type="none" w="med" len="med"/>
-                      <a:tailEnd type="none" w="med" len="med"/>
-                    </a:lnB>
-                  </a:tcPr>
-                </a:tc>
-                <a:tc>
-                  <a:txBody>
-                    <a:bodyPr/>
-                    <a:lstStyle/>
-                    <a:p>
-                      <a:pPr indent="0" marL="0">
-                        <a:buNone/>
-                      </a:pPr>
-                      <a:r>
-                        <a:rPr lang="en-US" sz="1300" dirty="0">
-                          <a:solidFill>
-                            <a:srgbClr val="1A1A1A"/>
-                          </a:solidFill>
-                          <a:latin typeface="Calibri" pitchFamily="34" charset="0"/>
-                          <a:ea typeface="Calibri" pitchFamily="34" charset="-122"/>
-                          <a:cs typeface="Calibri" pitchFamily="34" charset="-120"/>
-                        </a:rPr>
-                        <a:t>engine doesn't invent free money</a:t>
-                      </a:r>
-                      <a:endParaRPr lang="en-US" sz="1300" dirty="0">
-                        <a:latin typeface="Calibri" charset="0"/>
-                        <a:ea typeface="Calibri" charset="0"/>
-                        <a:cs typeface="Calibri" charset="0"/>
-                      </a:endParaRPr>
-                    </a:p>
-                  </a:txBody>
-                  <a:tcPr marL="91440" marR="91440" marT="45720" marB="45720">
-                    <a:lnL w="12700" cap="flat" cmpd="sng" algn="ctr">
-                      <a:solidFill>
-                        <a:srgbClr val="8DA9C4"/>
-                      </a:solidFill>
-                      <a:prstDash val="solid"/>
-                      <a:round/>
-                      <a:headEnd type="none" w="med" len="med"/>
-                      <a:tailEnd type="none" w="med" len="med"/>
-                    </a:lnL>
-                    <a:lnR w="12700" cap="flat" cmpd="sng" algn="ctr">
-                      <a:solidFill>
-                        <a:srgbClr val="8DA9C4"/>
-                      </a:solidFill>
-                      <a:prstDash val="solid"/>
-                      <a:round/>
-                      <a:headEnd type="none" w="med" len="med"/>
-                      <a:tailEnd type="none" w="med" len="med"/>
-                    </a:lnR>
-                    <a:lnT w="12700" cap="flat" cmpd="sng" algn="ctr">
-                      <a:solidFill>
-                        <a:srgbClr val="8DA9C4"/>
-                      </a:solidFill>
-                      <a:prstDash val="solid"/>
-                      <a:round/>
-                      <a:headEnd type="none" w="med" len="med"/>
-                      <a:tailEnd type="none" w="med" len="med"/>
-                    </a:lnT>
-                    <a:lnB w="12700" cap="flat" cmpd="sng" algn="ctr">
-                      <a:solidFill>
-                        <a:srgbClr val="8DA9C4"/>
-                      </a:solidFill>
-                      <a:prstDash val="solid"/>
-                      <a:round/>
-                      <a:headEnd type="none" w="med" len="med"/>
-                      <a:tailEnd type="none" w="med" len="med"/>
-                    </a:lnB>
-                  </a:tcPr>
-                </a:tc>
-              </a:tr>
-              <a:tr h="457200">
-                <a:tc>
-                  <a:txBody>
-                    <a:bodyPr/>
-                    <a:lstStyle/>
-                    <a:p>
-                      <a:pPr indent="0" marL="0">
-                        <a:buNone/>
-                      </a:pPr>
-                      <a:r>
-                        <a:rPr lang="en-US" sz="1300" b="1" dirty="0">
-                          <a:solidFill>
-                            <a:srgbClr val="0B2545"/>
-                          </a:solidFill>
-                          <a:latin typeface="Calibri" pitchFamily="34" charset="0"/>
-                          <a:ea typeface="Calibri" pitchFamily="34" charset="-122"/>
-                          <a:cs typeface="Calibri" pitchFamily="34" charset="-120"/>
-                        </a:rPr>
-                        <a:t>perfect on biased mkt → +14% ROI, p=0.000</a:t>
-                      </a:r>
-                      <a:endParaRPr lang="en-US" sz="1300" dirty="0">
-                        <a:latin typeface="Calibri" charset="0"/>
-                        <a:ea typeface="Calibri" charset="0"/>
-                        <a:cs typeface="Calibri" charset="0"/>
-                      </a:endParaRPr>
-                    </a:p>
-                  </a:txBody>
-                  <a:tcPr marL="91440" marR="91440" marT="45720" marB="45720">
-                    <a:lnL w="12700" cap="flat" cmpd="sng" algn="ctr">
-                      <a:solidFill>
-                        <a:srgbClr val="8DA9C4"/>
-                      </a:solidFill>
-                      <a:prstDash val="solid"/>
-                      <a:round/>
-                      <a:headEnd type="none" w="med" len="med"/>
-                      <a:tailEnd type="none" w="med" len="med"/>
-                    </a:lnL>
-                    <a:lnR w="12700" cap="flat" cmpd="sng" algn="ctr">
-                      <a:solidFill>
-                        <a:srgbClr val="8DA9C4"/>
-                      </a:solidFill>
-                      <a:prstDash val="solid"/>
-                      <a:round/>
-                      <a:headEnd type="none" w="med" len="med"/>
-                      <a:tailEnd type="none" w="med" len="med"/>
-                    </a:lnR>
-                    <a:lnT w="12700" cap="flat" cmpd="sng" algn="ctr">
-                      <a:solidFill>
-                        <a:srgbClr val="8DA9C4"/>
-                      </a:solidFill>
-                      <a:prstDash val="solid"/>
-                      <a:round/>
-                      <a:headEnd type="none" w="med" len="med"/>
-                      <a:tailEnd type="none" w="med" len="med"/>
-                    </a:lnT>
-                    <a:lnB w="12700" cap="flat" cmpd="sng" algn="ctr">
-                      <a:solidFill>
-                        <a:srgbClr val="8DA9C4"/>
-                      </a:solidFill>
-                      <a:prstDash val="solid"/>
-                      <a:round/>
-                      <a:headEnd type="none" w="med" len="med"/>
-                      <a:tailEnd type="none" w="med" len="med"/>
-                    </a:lnB>
-                  </a:tcPr>
-                </a:tc>
-                <a:tc>
-                  <a:txBody>
-                    <a:bodyPr/>
-                    <a:lstStyle/>
-                    <a:p>
-                      <a:pPr indent="0" marL="0">
-                        <a:buNone/>
-                      </a:pPr>
-                      <a:r>
-                        <a:rPr lang="en-US" sz="1300" b="1" dirty="0">
-                          <a:solidFill>
-                            <a:srgbClr val="EEA02B"/>
-                          </a:solidFill>
-                          <a:latin typeface="Calibri" pitchFamily="34" charset="0"/>
-                          <a:ea typeface="Calibri" pitchFamily="34" charset="-122"/>
-                          <a:cs typeface="Calibri" pitchFamily="34" charset="-120"/>
-                        </a:rPr>
-                        <a:t>engine CAN detect a real edge</a:t>
-                      </a:r>
-                      <a:endParaRPr lang="en-US" sz="1300" dirty="0">
-                        <a:latin typeface="Calibri" charset="0"/>
-                        <a:ea typeface="Calibri" charset="0"/>
-                        <a:cs typeface="Calibri" charset="0"/>
-                      </a:endParaRPr>
-                    </a:p>
-                  </a:txBody>
-                  <a:tcPr marL="91440" marR="91440" marT="45720" marB="45720">
-                    <a:lnL w="12700" cap="flat" cmpd="sng" algn="ctr">
-                      <a:solidFill>
-                        <a:srgbClr val="8DA9C4"/>
-                      </a:solidFill>
-                      <a:prstDash val="solid"/>
-                      <a:round/>
-                      <a:headEnd type="none" w="med" len="med"/>
-                      <a:tailEnd type="none" w="med" len="med"/>
-                    </a:lnL>
-                    <a:lnR w="12700" cap="flat" cmpd="sng" algn="ctr">
-                      <a:solidFill>
-                        <a:srgbClr val="8DA9C4"/>
-                      </a:solidFill>
-                      <a:prstDash val="solid"/>
-                      <a:round/>
-                      <a:headEnd type="none" w="med" len="med"/>
-                      <a:tailEnd type="none" w="med" len="med"/>
-                    </a:lnR>
-                    <a:lnT w="12700" cap="flat" cmpd="sng" algn="ctr">
-                      <a:solidFill>
-                        <a:srgbClr val="8DA9C4"/>
-                      </a:solidFill>
-                      <a:prstDash val="solid"/>
-                      <a:round/>
-                      <a:headEnd type="none" w="med" len="med"/>
-                      <a:tailEnd type="none" w="med" len="med"/>
-                    </a:lnT>
-                    <a:lnB w="12700" cap="flat" cmpd="sng" algn="ctr">
-                      <a:solidFill>
-                        <a:srgbClr val="8DA9C4"/>
-                      </a:solidFill>
-                      <a:prstDash val="solid"/>
-                      <a:round/>
-                      <a:headEnd type="none" w="med" len="med"/>
-                      <a:tailEnd type="none" w="med" len="med"/>
-                    </a:lnB>
-                  </a:tcPr>
-                </a:tc>
-              </a:tr>
-              <a:tr h="457200">
-                <a:tc>
-                  <a:txBody>
-                    <a:bodyPr/>
-                    <a:lstStyle/>
-                    <a:p>
-                      <a:pPr indent="0" marL="0">
-                        <a:buNone/>
-                      </a:pPr>
-                      <a:r>
-                        <a:rPr lang="en-US" sz="1300" b="1" dirty="0">
-                          <a:solidFill>
-                            <a:srgbClr val="0B2545"/>
-                          </a:solidFill>
-                          <a:latin typeface="Calibri" pitchFamily="34" charset="0"/>
-                          <a:ea typeface="Calibri" pitchFamily="34" charset="-122"/>
-                          <a:cs typeface="Calibri" pitchFamily="34" charset="-120"/>
-                        </a:rPr>
-                        <a:t>market-as-variant → 0 bets</a:t>
-                      </a:r>
-                      <a:endParaRPr lang="en-US" sz="1300" dirty="0">
-                        <a:latin typeface="Calibri" charset="0"/>
-                        <a:ea typeface="Calibri" charset="0"/>
-                        <a:cs typeface="Calibri" charset="0"/>
-                      </a:endParaRPr>
-                    </a:p>
-                  </a:txBody>
-                  <a:tcPr marL="91440" marR="91440" marT="45720" marB="45720">
-                    <a:lnL w="12700" cap="flat" cmpd="sng" algn="ctr">
-                      <a:solidFill>
-                        <a:srgbClr val="8DA9C4"/>
-                      </a:solidFill>
-                      <a:prstDash val="solid"/>
-                      <a:round/>
-                      <a:headEnd type="none" w="med" len="med"/>
-                      <a:tailEnd type="none" w="med" len="med"/>
-                    </a:lnL>
-                    <a:lnR w="12700" cap="flat" cmpd="sng" algn="ctr">
-                      <a:solidFill>
-                        <a:srgbClr val="8DA9C4"/>
-                      </a:solidFill>
-                      <a:prstDash val="solid"/>
-                      <a:round/>
-                      <a:headEnd type="none" w="med" len="med"/>
-                      <a:tailEnd type="none" w="med" len="med"/>
-                    </a:lnR>
-                    <a:lnT w="12700" cap="flat" cmpd="sng" algn="ctr">
-                      <a:solidFill>
-                        <a:srgbClr val="8DA9C4"/>
-                      </a:solidFill>
-                      <a:prstDash val="solid"/>
-                      <a:round/>
-                      <a:headEnd type="none" w="med" len="med"/>
-                      <a:tailEnd type="none" w="med" len="med"/>
-                    </a:lnT>
-                    <a:lnB w="12700" cap="flat" cmpd="sng" algn="ctr">
-                      <a:solidFill>
-                        <a:srgbClr val="8DA9C4"/>
-                      </a:solidFill>
-                      <a:prstDash val="solid"/>
-                      <a:round/>
-                      <a:headEnd type="none" w="med" len="med"/>
-                      <a:tailEnd type="none" w="med" len="med"/>
-                    </a:lnB>
-                  </a:tcPr>
-                </a:tc>
-                <a:tc>
-                  <a:txBody>
-                    <a:bodyPr/>
-                    <a:lstStyle/>
-                    <a:p>
-                      <a:pPr indent="0" marL="0">
-                        <a:buNone/>
-                      </a:pPr>
-                      <a:r>
-                        <a:rPr lang="en-US" sz="1300" dirty="0">
-                          <a:solidFill>
-                            <a:srgbClr val="1A1A1A"/>
-                          </a:solidFill>
-                          <a:latin typeface="Calibri" pitchFamily="34" charset="0"/>
-                          <a:ea typeface="Calibri" pitchFamily="34" charset="-122"/>
-                          <a:cs typeface="Calibri" pitchFamily="34" charset="-120"/>
-                        </a:rPr>
-                        <a:t>no fake edge against the market</a:t>
-                      </a:r>
-                      <a:endParaRPr lang="en-US" sz="1300" dirty="0">
-                        <a:latin typeface="Calibri" charset="0"/>
-                        <a:ea typeface="Calibri" charset="0"/>
-                        <a:cs typeface="Calibri" charset="0"/>
-                      </a:endParaRPr>
-                    </a:p>
-                  </a:txBody>
-                  <a:tcPr marL="91440" marR="91440" marT="45720" marB="45720">
-                    <a:lnL w="12700" cap="flat" cmpd="sng" algn="ctr">
-                      <a:solidFill>
-                        <a:srgbClr val="8DA9C4"/>
-                      </a:solidFill>
-                      <a:prstDash val="solid"/>
-                      <a:round/>
-                      <a:headEnd type="none" w="med" len="med"/>
-                      <a:tailEnd type="none" w="med" len="med"/>
-                    </a:lnL>
-                    <a:lnR w="12700" cap="flat" cmpd="sng" algn="ctr">
-                      <a:solidFill>
-                        <a:srgbClr val="8DA9C4"/>
-                      </a:solidFill>
-                      <a:prstDash val="solid"/>
-                      <a:round/>
-                      <a:headEnd type="none" w="med" len="med"/>
-                      <a:tailEnd type="none" w="med" len="med"/>
-                    </a:lnR>
-                    <a:lnT w="12700" cap="flat" cmpd="sng" algn="ctr">
-                      <a:solidFill>
-                        <a:srgbClr val="8DA9C4"/>
-                      </a:solidFill>
-                      <a:prstDash val="solid"/>
-                      <a:round/>
-                      <a:headEnd type="none" w="med" len="med"/>
-                      <a:tailEnd type="none" w="med" len="med"/>
-                    </a:lnT>
-                    <a:lnB w="12700" cap="flat" cmpd="sng" algn="ctr">
-                      <a:solidFill>
-                        <a:srgbClr val="8DA9C4"/>
-                      </a:solidFill>
-                      <a:prstDash val="solid"/>
-                      <a:round/>
-                      <a:headEnd type="none" w="med" len="med"/>
-                      <a:tailEnd type="none" w="med" len="med"/>
-                    </a:lnB>
-                  </a:tcPr>
-                </a:tc>
-              </a:tr>
-            </a:tbl>
-          </a:graphicData>
-        </a:graphic>
-      </p:graphicFrame>
-      <p:sp>
-        <p:nvSpPr>
-          <p:cNvPr id="15" name="Text 12"/>
-          <p:cNvSpPr/>
-          <p:nvPr/>
-        </p:nvSpPr>
-        <p:spPr>
-          <a:xfrm>
-            <a:off x="502920" y="6080760"/>
-            <a:ext cx="11247120" cy="320040"/>
-          </a:xfrm>
-          <a:prstGeom prst="rect">
-            <a:avLst/>
-          </a:prstGeom>
-          <a:noFill/>
-          <a:ln/>
-        </p:spPr>
-        <p:txBody>
-          <a:bodyPr wrap="square" rtlCol="0" anchor="ctr"/>
-          <a:lstStyle/>
-          <a:p>
-            <a:pPr algn="ctr" indent="0" marL="0">
-              <a:buNone/>
-            </a:pPr>
-            <a:r>
-              <a:rPr lang="en-US" sz="1100" i="1" dirty="0">
-                <a:solidFill>
-                  <a:srgbClr val="8DA9C4"/>
+              <a:t>FINDING:  </a:t>
+            </a:r>
+            <a:pPr indent="0" marL="0">
+              <a:buNone/>
+            </a:pPr>
+            <a:r>
+              <a:rPr lang="en-US" sz="1600" b="1" dirty="0">
+                <a:solidFill>
+                  <a:srgbClr val="EEA02B"/>
                 </a:solidFill>
                 <a:latin typeface="Calibri" pitchFamily="34" charset="0"/>
                 <a:ea typeface="Calibri" pitchFamily="34" charset="-122"/>
                 <a:cs typeface="Calibri" pitchFamily="34" charset="-120"/>
               </a:rPr>
-              <a:t>Block-bootstrap by GAME (not tick) — within-game ticks share one outcome; effective n is games.</a:t>
-            </a:r>
-            <a:endParaRPr lang="en-US" sz="1100" dirty="0"/>
-          </a:p>
-        </p:txBody>
-      </p:sp>
-      <p:sp>
-        <p:nvSpPr>
-          <p:cNvPr id="16" name="Text 13"/>
-          <p:cNvSpPr/>
-          <p:nvPr/>
-        </p:nvSpPr>
-        <p:spPr>
-          <a:xfrm>
-            <a:off x="502920" y="6492240"/>
-            <a:ext cx="7315200" cy="274320"/>
-          </a:xfrm>
-          <a:prstGeom prst="rect">
-            <a:avLst/>
-          </a:prstGeom>
-          <a:noFill/>
-          <a:ln/>
-        </p:spPr>
-        <p:txBody>
-          <a:bodyPr wrap="square" rtlCol="0" anchor="ctr"/>
-          <a:lstStyle/>
-          <a:p>
+              <a:t>✅  </a:t>
+            </a:r>
             <a:pPr indent="0" marL="0">
               <a:buNone/>
             </a:pPr>
             <a:r>
-              <a:rPr lang="en-US" sz="1000" dirty="0">
-                <a:solidFill>
-                  <a:srgbClr val="8DA9C4"/>
+              <a:rPr lang="en-US" sz="1400" b="1" dirty="0">
+                <a:solidFill>
+                  <a:srgbClr val="0B2545"/>
                 </a:solidFill>
                 <a:latin typeface="Calibri" pitchFamily="34" charset="0"/>
                 <a:ea typeface="Calibri" pitchFamily="34" charset="-122"/>
                 <a:cs typeface="Calibri" pitchFamily="34" charset="-120"/>
               </a:rPr>
+              <a:t>both tests p &lt; 0.0001</a:t>
+            </a:r>
+            <a:endParaRPr lang="en-US" sz="1400" dirty="0"/>
+          </a:p>
+        </p:txBody>
+      </p:sp>
+      <p:sp>
+        <p:nvSpPr>
+          <p:cNvPr id="24" name="Text 22"/>
+          <p:cNvSpPr/>
+          <p:nvPr/>
+        </p:nvSpPr>
+        <p:spPr>
+          <a:xfrm>
+            <a:off x="6858000" y="4343400"/>
+            <a:ext cx="4754880" cy="365760"/>
+          </a:xfrm>
+          <a:prstGeom prst="rect">
+            <a:avLst/>
+          </a:prstGeom>
+          <a:noFill/>
+          <a:ln/>
+        </p:spPr>
+        <p:txBody>
+          <a:bodyPr wrap="square" rtlCol="0" anchor="ctr"/>
+          <a:lstStyle/>
+          <a:p>
+            <a:pPr indent="0" marL="0">
+              <a:buNone/>
+            </a:pPr>
+            <a:r>
+              <a:rPr lang="en-US" sz="1100" i="1" dirty="0">
+                <a:solidFill>
+                  <a:srgbClr val="13315C"/>
+                </a:solidFill>
+                <a:latin typeface="Calibri" pitchFamily="34" charset="0"/>
+                <a:ea typeface="Calibri" pitchFamily="34" charset="-122"/>
+                <a:cs typeface="Calibri" pitchFamily="34" charset="-120"/>
+              </a:rPr>
+              <a:t>the bias on the model side is real</a:t>
+            </a:r>
+            <a:endParaRPr lang="en-US" sz="1100" dirty="0"/>
+          </a:p>
+        </p:txBody>
+      </p:sp>
+      <p:sp>
+        <p:nvSpPr>
+          <p:cNvPr id="25" name="Shape 23"/>
+          <p:cNvSpPr/>
+          <p:nvPr/>
+        </p:nvSpPr>
+        <p:spPr>
+          <a:xfrm>
+            <a:off x="502920" y="5669280"/>
+            <a:ext cx="11247120" cy="868680"/>
+          </a:xfrm>
+          <a:prstGeom prst="roundRect">
+            <a:avLst>
+              <a:gd name="adj" fmla="val 8421"/>
+            </a:avLst>
+          </a:prstGeom>
+          <a:solidFill>
+            <a:srgbClr val="0B2545"/>
+          </a:solidFill>
+          <a:ln w="12700">
+            <a:solidFill>
+              <a:srgbClr val="0B2545"/>
+            </a:solidFill>
+            <a:prstDash val="solid"/>
+          </a:ln>
+        </p:spPr>
+      </p:sp>
+      <p:sp>
+        <p:nvSpPr>
+          <p:cNvPr id="26" name="Text 24"/>
+          <p:cNvSpPr/>
+          <p:nvPr/>
+        </p:nvSpPr>
+        <p:spPr>
+          <a:xfrm>
+            <a:off x="777240" y="5669280"/>
+            <a:ext cx="10698480" cy="868680"/>
+          </a:xfrm>
+          <a:prstGeom prst="rect">
+            <a:avLst/>
+          </a:prstGeom>
+          <a:noFill/>
+          <a:ln/>
+        </p:spPr>
+        <p:txBody>
+          <a:bodyPr wrap="square" rtlCol="0" anchor="ctr"/>
+          <a:lstStyle/>
+          <a:p>
+            <a:pPr algn="ctr" indent="0" marL="0">
+              <a:buNone/>
+            </a:pPr>
+            <a:r>
+              <a:rPr lang="en-US" sz="1700" b="1" dirty="0">
+                <a:solidFill>
+                  <a:srgbClr val="EEA02B"/>
+                </a:solidFill>
+                <a:latin typeface="Georgia" pitchFamily="34" charset="0"/>
+                <a:ea typeface="Georgia" pitchFamily="34" charset="-122"/>
+                <a:cs typeface="Georgia" pitchFamily="34" charset="-120"/>
+              </a:rPr>
+              <a:t>Both findings pass.  </a:t>
+            </a:r>
+            <a:pPr algn="ctr" indent="0" marL="0">
+              <a:buNone/>
+            </a:pPr>
+            <a:r>
+              <a:rPr lang="en-US" sz="1700" dirty="0">
+                <a:solidFill>
+                  <a:srgbClr val="F6F6F2"/>
+                </a:solidFill>
+                <a:latin typeface="Georgia" pitchFamily="34" charset="0"/>
+                <a:ea typeface="Georgia" pitchFamily="34" charset="-122"/>
+                <a:cs typeface="Georgia" pitchFamily="34" charset="-120"/>
+              </a:rPr>
+              <a:t>Next: does this exploitable bias actually survive the vig on real markets?  →  </a:t>
+            </a:r>
+            <a:pPr algn="ctr" indent="0" marL="0">
+              <a:buNone/>
+            </a:pPr>
+            <a:r>
+              <a:rPr lang="en-US" sz="1700" b="1" i="1" dirty="0">
+                <a:solidFill>
+                  <a:srgbClr val="EEA02B"/>
+                </a:solidFill>
+                <a:latin typeface="Georgia" pitchFamily="34" charset="0"/>
+                <a:ea typeface="Georgia" pitchFamily="34" charset="-122"/>
+                <a:cs typeface="Georgia" pitchFamily="34" charset="-120"/>
+              </a:rPr>
+              <a:t>backtest</a:t>
+            </a:r>
+            <a:endParaRPr lang="en-US" sz="1700" dirty="0"/>
+          </a:p>
+        </p:txBody>
+      </p:sp>
+      <p:sp>
+        <p:nvSpPr>
+          <p:cNvPr id="27" name="Text 25"/>
+          <p:cNvSpPr/>
+          <p:nvPr/>
+        </p:nvSpPr>
+        <p:spPr>
+          <a:xfrm>
+            <a:off x="502920" y="6492240"/>
+            <a:ext cx="7315200" cy="274320"/>
+          </a:xfrm>
+          <a:prstGeom prst="rect">
+            <a:avLst/>
+          </a:prstGeom>
+          <a:noFill/>
+          <a:ln/>
+        </p:spPr>
+        <p:txBody>
+          <a:bodyPr wrap="square" rtlCol="0" anchor="ctr"/>
+          <a:lstStyle/>
+          <a:p>
+            <a:pPr indent="0" marL="0">
+              <a:buNone/>
+            </a:pPr>
+            <a:r>
+              <a:rPr lang="en-US" sz="1000" dirty="0">
+                <a:solidFill>
+                  <a:srgbClr val="8DA9C4"/>
+                </a:solidFill>
+                <a:latin typeface="Calibri" pitchFamily="34" charset="0"/>
+                <a:ea typeface="Calibri" pitchFamily="34" charset="-122"/>
+                <a:cs typeface="Calibri" pitchFamily="34" charset="-120"/>
+              </a:rPr>
               <a:t>STATS 211 · NBA Mispricing · Sit &amp; Manathattai</a:t>
             </a:r>
             <a:endParaRPr lang="en-US" sz="1000" dirty="0"/>
@@ -14253,7 +15473,7 @@
       </p:sp>
       <p:sp>
         <p:nvSpPr>
-          <p:cNvPr id="17" name="Text 14"/>
+          <p:cNvPr id="28" name="Text 26"/>
           <p:cNvSpPr/>
           <p:nvPr/>
         </p:nvSpPr>

--- a/slides/final_deck.pptx
+++ b/slides/final_deck.pptx
@@ -8458,17 +8458,17 @@
         </p:nvGraphicFramePr>
         <p:xfrm>
           <a:off x="502920" y="1417320"/>
-          <a:ext cx="11247120" cy="914400"/>
+          <a:ext cx="9464040" cy="914400"/>
         </p:xfrm>
         <a:graphic>
           <a:graphicData uri="http://schemas.openxmlformats.org/drawingml/2006/table">
             <a:tbl>
               <a:tblPr/>
               <a:tblGrid>
-                <a:gridCol w="548640"/>
-                <a:gridCol w="4937760"/>
-                <a:gridCol w="3383280"/>
-                <a:gridCol w="2377440"/>
+                <a:gridCol w="457200"/>
+                <a:gridCol w="4160520"/>
+                <a:gridCol w="2834640"/>
+                <a:gridCol w="2011680"/>
               </a:tblGrid>
               <a:tr h="502920">
                 <a:tc>
@@ -10352,6 +10352,188 @@
         </p:nvSpPr>
         <p:spPr>
           <a:xfrm>
+            <a:off x="10012680" y="2542032"/>
+            <a:ext cx="502920" cy="274320"/>
+          </a:xfrm>
+          <a:prstGeom prst="leftArrow">
+            <a:avLst/>
+          </a:prstGeom>
+          <a:solidFill>
+            <a:srgbClr val="0B2545"/>
+          </a:solidFill>
+          <a:ln w="12700">
+            <a:solidFill>
+              <a:srgbClr val="0B2545"/>
+            </a:solidFill>
+            <a:prstDash val="solid"/>
+          </a:ln>
+        </p:spPr>
+      </p:sp>
+      <p:sp>
+        <p:nvSpPr>
+          <p:cNvPr id="7" name="Shape 4"/>
+          <p:cNvSpPr/>
+          <p:nvPr/>
+        </p:nvSpPr>
+        <p:spPr>
+          <a:xfrm>
+            <a:off x="10607040" y="2496312"/>
+            <a:ext cx="1143000" cy="365760"/>
+          </a:xfrm>
+          <a:prstGeom prst="roundRect">
+            <a:avLst>
+              <a:gd name="adj" fmla="val 12500"/>
+            </a:avLst>
+          </a:prstGeom>
+          <a:solidFill>
+            <a:srgbClr val="0B2545"/>
+          </a:solidFill>
+          <a:ln w="12700">
+            <a:solidFill>
+              <a:srgbClr val="0B2545"/>
+            </a:solidFill>
+            <a:prstDash val="solid"/>
+          </a:ln>
+        </p:spPr>
+      </p:sp>
+      <p:sp>
+        <p:nvSpPr>
+          <p:cNvPr id="8" name="Text 5"/>
+          <p:cNvSpPr/>
+          <p:nvPr/>
+        </p:nvSpPr>
+        <p:spPr>
+          <a:xfrm>
+            <a:off x="10607040" y="2496312"/>
+            <a:ext cx="1143000" cy="365760"/>
+          </a:xfrm>
+          <a:prstGeom prst="rect">
+            <a:avLst/>
+          </a:prstGeom>
+          <a:noFill/>
+          <a:ln/>
+        </p:spPr>
+        <p:txBody>
+          <a:bodyPr wrap="square" rtlCol="0" anchor="ctr"/>
+          <a:lstStyle/>
+          <a:p>
+            <a:pPr algn="ctr" indent="0" marL="0">
+              <a:buNone/>
+            </a:pPr>
+            <a:r>
+              <a:rPr lang="en-US" sz="1300" b="1" dirty="0">
+                <a:solidFill>
+                  <a:srgbClr val="F6F6F2"/>
+                </a:solidFill>
+                <a:latin typeface="Georgia" pitchFamily="34" charset="0"/>
+                <a:ea typeface="Georgia" pitchFamily="34" charset="-122"/>
+                <a:cs typeface="Georgia" pitchFamily="34" charset="-120"/>
+              </a:rPr>
+              <a:t>Method 1</a:t>
+            </a:r>
+            <a:endParaRPr lang="en-US" sz="1300" dirty="0"/>
+          </a:p>
+        </p:txBody>
+      </p:sp>
+      <p:sp>
+        <p:nvSpPr>
+          <p:cNvPr id="9" name="Shape 6"/>
+          <p:cNvSpPr/>
+          <p:nvPr/>
+        </p:nvSpPr>
+        <p:spPr>
+          <a:xfrm>
+            <a:off x="10012680" y="4050792"/>
+            <a:ext cx="502920" cy="274320"/>
+          </a:xfrm>
+          <a:prstGeom prst="leftArrow">
+            <a:avLst/>
+          </a:prstGeom>
+          <a:solidFill>
+            <a:srgbClr val="EEA02B"/>
+          </a:solidFill>
+          <a:ln w="12700">
+            <a:solidFill>
+              <a:srgbClr val="EEA02B"/>
+            </a:solidFill>
+            <a:prstDash val="solid"/>
+          </a:ln>
+        </p:spPr>
+      </p:sp>
+      <p:sp>
+        <p:nvSpPr>
+          <p:cNvPr id="10" name="Shape 7"/>
+          <p:cNvSpPr/>
+          <p:nvPr/>
+        </p:nvSpPr>
+        <p:spPr>
+          <a:xfrm>
+            <a:off x="10607040" y="4005072"/>
+            <a:ext cx="1143000" cy="365760"/>
+          </a:xfrm>
+          <a:prstGeom prst="roundRect">
+            <a:avLst>
+              <a:gd name="adj" fmla="val 12500"/>
+            </a:avLst>
+          </a:prstGeom>
+          <a:solidFill>
+            <a:srgbClr val="EEA02B"/>
+          </a:solidFill>
+          <a:ln w="12700">
+            <a:solidFill>
+              <a:srgbClr val="EEA02B"/>
+            </a:solidFill>
+            <a:prstDash val="solid"/>
+          </a:ln>
+        </p:spPr>
+      </p:sp>
+      <p:sp>
+        <p:nvSpPr>
+          <p:cNvPr id="11" name="Text 8"/>
+          <p:cNvSpPr/>
+          <p:nvPr/>
+        </p:nvSpPr>
+        <p:spPr>
+          <a:xfrm>
+            <a:off x="10607040" y="4005072"/>
+            <a:ext cx="1143000" cy="365760"/>
+          </a:xfrm>
+          <a:prstGeom prst="rect">
+            <a:avLst/>
+          </a:prstGeom>
+          <a:noFill/>
+          <a:ln/>
+        </p:spPr>
+        <p:txBody>
+          <a:bodyPr wrap="square" rtlCol="0" anchor="ctr"/>
+          <a:lstStyle/>
+          <a:p>
+            <a:pPr algn="ctr" indent="0" marL="0">
+              <a:buNone/>
+            </a:pPr>
+            <a:r>
+              <a:rPr lang="en-US" sz="1300" b="1" dirty="0">
+                <a:solidFill>
+                  <a:srgbClr val="0B2545"/>
+                </a:solidFill>
+                <a:latin typeface="Georgia" pitchFamily="34" charset="0"/>
+                <a:ea typeface="Georgia" pitchFamily="34" charset="-122"/>
+                <a:cs typeface="Georgia" pitchFamily="34" charset="-120"/>
+              </a:rPr>
+              <a:t>Method 2</a:t>
+            </a:r>
+            <a:endParaRPr lang="en-US" sz="1300" dirty="0"/>
+          </a:p>
+        </p:txBody>
+      </p:sp>
+      <p:sp>
+        <p:nvSpPr>
+          <p:cNvPr id="12" name="Shape 9"/>
+          <p:cNvSpPr/>
+          <p:nvPr/>
+        </p:nvSpPr>
+        <p:spPr>
+          <a:xfrm>
             <a:off x="502920" y="5349240"/>
             <a:ext cx="11247120" cy="960120"/>
           </a:xfrm>
@@ -10373,7 +10555,7 @@
       </p:sp>
       <p:sp>
         <p:nvSpPr>
-          <p:cNvPr id="7" name="Text 4"/>
+          <p:cNvPr id="13" name="Text 10"/>
           <p:cNvSpPr/>
           <p:nvPr/>
         </p:nvSpPr>
@@ -10404,7 +10586,63 @@
                 <a:ea typeface="Georgia" pitchFamily="34" charset="-122"/>
                 <a:cs typeface="Georgia" pitchFamily="34" charset="-120"/>
               </a:rPr>
-              <a:t>The two we built are the only two that work from play-by-play alone. The other four are gated on multi-venue in-play odds history we don't have.</a:t>
+              <a:t>The two we built — </a:t>
+            </a:r>
+            <a:pPr algn="ctr" indent="0" marL="0">
+              <a:buNone/>
+            </a:pPr>
+            <a:r>
+              <a:rPr lang="en-US" sz="1500" b="1" i="1" dirty="0">
+                <a:solidFill>
+                  <a:srgbClr val="0B2545"/>
+                </a:solidFill>
+                <a:latin typeface="Georgia" pitchFamily="34" charset="0"/>
+                <a:ea typeface="Georgia" pitchFamily="34" charset="-122"/>
+                <a:cs typeface="Georgia" pitchFamily="34" charset="-120"/>
+              </a:rPr>
+              <a:t>Method 1 </a:t>
+            </a:r>
+            <a:pPr algn="ctr" indent="0" marL="0">
+              <a:buNone/>
+            </a:pPr>
+            <a:r>
+              <a:rPr lang="en-US" sz="1500" i="1" dirty="0">
+                <a:solidFill>
+                  <a:srgbClr val="0B2545"/>
+                </a:solidFill>
+                <a:latin typeface="Georgia" pitchFamily="34" charset="0"/>
+                <a:ea typeface="Georgia" pitchFamily="34" charset="-122"/>
+                <a:cs typeface="Georgia" pitchFamily="34" charset="-120"/>
+              </a:rPr>
+              <a:t>and </a:t>
+            </a:r>
+            <a:pPr algn="ctr" indent="0" marL="0">
+              <a:buNone/>
+            </a:pPr>
+            <a:r>
+              <a:rPr lang="en-US" sz="1500" b="1" i="1" dirty="0">
+                <a:solidFill>
+                  <a:srgbClr val="EEA02B"/>
+                </a:solidFill>
+                <a:latin typeface="Georgia" pitchFamily="34" charset="0"/>
+                <a:ea typeface="Georgia" pitchFamily="34" charset="-122"/>
+                <a:cs typeface="Georgia" pitchFamily="34" charset="-120"/>
+              </a:rPr>
+              <a:t>Method 2 </a:t>
+            </a:r>
+            <a:pPr algn="ctr" indent="0" marL="0">
+              <a:buNone/>
+            </a:pPr>
+            <a:r>
+              <a:rPr lang="en-US" sz="1500" i="1" dirty="0">
+                <a:solidFill>
+                  <a:srgbClr val="0B2545"/>
+                </a:solidFill>
+                <a:latin typeface="Georgia" pitchFamily="34" charset="0"/>
+                <a:ea typeface="Georgia" pitchFamily="34" charset="-122"/>
+                <a:cs typeface="Georgia" pitchFamily="34" charset="-120"/>
+              </a:rPr>
+              <a:t>— are the only ones that work from play-by-play alone. The other four are gated on multi-venue in-play odds history we don't have.</a:t>
             </a:r>
             <a:endParaRPr lang="en-US" sz="1500" dirty="0"/>
           </a:p>
@@ -10412,7 +10650,7 @@
       </p:sp>
       <p:sp>
         <p:nvSpPr>
-          <p:cNvPr id="8" name="Text 5"/>
+          <p:cNvPr id="14" name="Text 11"/>
           <p:cNvSpPr/>
           <p:nvPr/>
         </p:nvSpPr>
@@ -10451,7 +10689,7 @@
       </p:sp>
       <p:sp>
         <p:nvSpPr>
-          <p:cNvPr id="9" name="Text 6"/>
+          <p:cNvPr id="15" name="Text 12"/>
           <p:cNvSpPr/>
           <p:nvPr/>
         </p:nvSpPr>

--- a/slides/final_deck.pptx
+++ b/slides/final_deck.pptx
@@ -20,9 +20,10 @@
     <p:sldId id="268" r:id="rId14"/>
     <p:sldId id="269" r:id="rId15"/>
     <p:sldId id="270" r:id="rId16"/>
+    <p:sldId id="271" r:id="rId17"/>
   </p:sldIdLst>
   <p:notesMasterIdLst>
-    <p:notesMasterId r:id="rId17"/>
+    <p:notesMasterId r:id="rId18"/>
   </p:notesMasterIdLst>
   <p:sldSz cx="12192000" cy="6858000"/>
   <p:notesSz cx="6858000" cy="12192000"/>
@@ -1068,6 +1069,94 @@
             <a:fld id="{F7021451-1387-4CA6-816F-3879F97B5CBC}" type="slidenum">
               <a:rPr lang="en-US"/>
               <a:t>15</a:t>
+            </a:fld>
+            <a:endParaRPr lang="en-US"/>
+          </a:p>
+        </p:txBody>
+      </p:sp>
+    </p:spTree>
+    <p:extLst>
+      <p:ext uri="{BB962C8B-B14F-4D97-AF65-F5344CB8AC3E}">
+        <p14:creationId xmlns:p14="http://schemas.microsoft.com/office/powerpoint/2010/main" val="1024086991"/>
+      </p:ext>
+    </p:extLst>
+  </p:cSld>
+  <p:clrMapOvr>
+    <a:masterClrMapping/>
+  </p:clrMapOvr>
+</p:notes>
+</file>
+
+<file path=ppt/notesSlides/notesSlide16.xml><?xml version="1.0" encoding="utf-8"?>
+<p:notes xmlns:a="http://schemas.openxmlformats.org/drawingml/2006/main" xmlns:r="http://schemas.openxmlformats.org/officeDocument/2006/relationships" xmlns:p="http://schemas.openxmlformats.org/presentationml/2006/main">
+  <p:cSld>
+    <p:spTree>
+      <p:nvGrpSpPr>
+        <p:cNvPr id="1" name=""/>
+        <p:cNvGrpSpPr/>
+        <p:nvPr/>
+      </p:nvGrpSpPr>
+      <p:grpSpPr>
+        <a:xfrm>
+          <a:off x="0" y="0"/>
+          <a:ext cx="0" cy="0"/>
+          <a:chOff x="0" y="0"/>
+          <a:chExt cx="0" cy="0"/>
+        </a:xfrm>
+      </p:grpSpPr>
+      <p:sp>
+        <p:nvSpPr>
+          <p:cNvPr id="2" name="Slide Image Placeholder 1"/>
+          <p:cNvSpPr>
+            <a:spLocks noGrp="1" noRot="1" noChangeAspect="1"/>
+          </p:cNvSpPr>
+          <p:nvPr>
+            <p:ph type="sldImg"/>
+          </p:nvPr>
+        </p:nvSpPr>
+        <p:spPr/>
+      </p:sp>
+      <p:sp>
+        <p:nvSpPr>
+          <p:cNvPr id="3" name="Notes Placeholder 2"/>
+          <p:cNvSpPr>
+            <a:spLocks noGrp="1"/>
+          </p:cNvSpPr>
+          <p:nvPr>
+            <p:ph type="body" idx="1"/>
+          </p:nvPr>
+        </p:nvSpPr>
+        <p:spPr/>
+        <p:txBody>
+          <a:bodyPr/>
+          <a:lstStyle/>
+          <a:p>
+            <a:r>
+              <a:rPr lang="en-US" dirty="0"/>
+              <a:t/>
+            </a:r>
+            <a:endParaRPr lang="en-US" dirty="0"/>
+          </a:p>
+        </p:txBody>
+      </p:sp>
+      <p:sp>
+        <p:nvSpPr>
+          <p:cNvPr id="4" name="Slide Number Placeholder 3"/>
+          <p:cNvSpPr>
+            <a:spLocks noGrp="1"/>
+          </p:cNvSpPr>
+          <p:nvPr>
+            <p:ph type="sldNum" sz="quarter" idx="10"/>
+          </p:nvPr>
+        </p:nvSpPr>
+        <p:spPr/>
+        <p:txBody>
+          <a:bodyPr/>
+          <a:lstStyle/>
+          <a:p>
+            <a:fld id="{F7021451-1387-4CA6-816F-3879F97B5CBC}" type="slidenum">
+              <a:rPr lang="en-US"/>
+              <a:t>16</a:t>
             </a:fld>
             <a:endParaRPr lang="en-US"/>
           </a:p>
@@ -2367,6 +2456,1137 @@
                 <a:ea typeface="Georgia" pitchFamily="34" charset="-122"/>
                 <a:cs typeface="Georgia" pitchFamily="34" charset="-120"/>
               </a:rPr>
+              <a:t>How we use both methods</a:t>
+            </a:r>
+            <a:endParaRPr lang="en-US" sz="2800" dirty="0"/>
+          </a:p>
+        </p:txBody>
+      </p:sp>
+      <p:sp>
+        <p:nvSpPr>
+          <p:cNvPr id="3" name="Text 1"/>
+          <p:cNvSpPr/>
+          <p:nvPr/>
+        </p:nvSpPr>
+        <p:spPr>
+          <a:xfrm>
+            <a:off x="502920" y="932688"/>
+            <a:ext cx="11247120" cy="365760"/>
+          </a:xfrm>
+          <a:prstGeom prst="rect">
+            <a:avLst/>
+          </a:prstGeom>
+          <a:noFill/>
+          <a:ln/>
+        </p:spPr>
+        <p:txBody>
+          <a:bodyPr wrap="square" rtlCol="0" anchor="ctr"/>
+          <a:lstStyle/>
+          <a:p>
+            <a:pPr indent="0" marL="0">
+              <a:buNone/>
+            </a:pPr>
+            <a:r>
+              <a:rPr lang="en-US" sz="1400" i="1" dirty="0">
+                <a:solidFill>
+                  <a:srgbClr val="13315C"/>
+                </a:solidFill>
+                <a:latin typeface="Calibri" pitchFamily="34" charset="0"/>
+                <a:ea typeface="Calibri" pitchFamily="34" charset="-122"/>
+                <a:cs typeface="Calibri" pitchFamily="34" charset="-120"/>
+              </a:rPr>
+              <a:t>They don't compete · Method 2 STACKS on top of Method 1</a:t>
+            </a:r>
+            <a:endParaRPr lang="en-US" sz="1400" dirty="0"/>
+          </a:p>
+        </p:txBody>
+      </p:sp>
+      <p:sp>
+        <p:nvSpPr>
+          <p:cNvPr id="4" name="Shape 2"/>
+          <p:cNvSpPr/>
+          <p:nvPr/>
+        </p:nvSpPr>
+        <p:spPr>
+          <a:xfrm>
+            <a:off x="502920" y="1298448"/>
+            <a:ext cx="11247120" cy="0"/>
+          </a:xfrm>
+          <a:prstGeom prst="line">
+            <a:avLst/>
+          </a:prstGeom>
+          <a:noFill/>
+          <a:ln w="25400">
+            <a:solidFill>
+              <a:srgbClr val="1C7293"/>
+            </a:solidFill>
+            <a:prstDash val="solid"/>
+          </a:ln>
+        </p:spPr>
+      </p:sp>
+      <p:sp>
+        <p:nvSpPr>
+          <p:cNvPr id="5" name="Shape 3"/>
+          <p:cNvSpPr/>
+          <p:nvPr/>
+        </p:nvSpPr>
+        <p:spPr>
+          <a:xfrm>
+            <a:off x="502920" y="1417320"/>
+            <a:ext cx="5349240" cy="4114800"/>
+          </a:xfrm>
+          <a:prstGeom prst="roundRect">
+            <a:avLst>
+              <a:gd name="adj" fmla="val 2222"/>
+            </a:avLst>
+          </a:prstGeom>
+          <a:solidFill>
+            <a:srgbClr val="F6F6F2"/>
+          </a:solidFill>
+          <a:ln w="20320">
+            <a:solidFill>
+              <a:srgbClr val="0B2545"/>
+            </a:solidFill>
+            <a:prstDash val="solid"/>
+          </a:ln>
+        </p:spPr>
+      </p:sp>
+      <p:sp>
+        <p:nvSpPr>
+          <p:cNvPr id="6" name="Shape 4"/>
+          <p:cNvSpPr/>
+          <p:nvPr/>
+        </p:nvSpPr>
+        <p:spPr>
+          <a:xfrm>
+            <a:off x="502920" y="1417320"/>
+            <a:ext cx="5349240" cy="502920"/>
+          </a:xfrm>
+          <a:prstGeom prst="rect">
+            <a:avLst/>
+          </a:prstGeom>
+          <a:solidFill>
+            <a:srgbClr val="0B2545"/>
+          </a:solidFill>
+          <a:ln w="12700">
+            <a:solidFill>
+              <a:srgbClr val="0B2545"/>
+            </a:solidFill>
+            <a:prstDash val="solid"/>
+          </a:ln>
+        </p:spPr>
+      </p:sp>
+      <p:sp>
+        <p:nvSpPr>
+          <p:cNvPr id="7" name="Text 5"/>
+          <p:cNvSpPr/>
+          <p:nvPr/>
+        </p:nvSpPr>
+        <p:spPr>
+          <a:xfrm>
+            <a:off x="502920" y="1417320"/>
+            <a:ext cx="5349240" cy="502920"/>
+          </a:xfrm>
+          <a:prstGeom prst="rect">
+            <a:avLst/>
+          </a:prstGeom>
+          <a:noFill/>
+          <a:ln/>
+        </p:spPr>
+        <p:txBody>
+          <a:bodyPr wrap="square" rtlCol="0" anchor="ctr"/>
+          <a:lstStyle/>
+          <a:p>
+            <a:pPr algn="ctr" indent="0" marL="0">
+              <a:buNone/>
+            </a:pPr>
+            <a:r>
+              <a:rPr lang="en-US" sz="1300" b="1" dirty="0">
+                <a:solidFill>
+                  <a:srgbClr val="F6F6F2"/>
+                </a:solidFill>
+                <a:latin typeface="Calibri" pitchFamily="34" charset="0"/>
+                <a:ea typeface="Calibri" pitchFamily="34" charset="-122"/>
+                <a:cs typeface="Calibri" pitchFamily="34" charset="-120"/>
+              </a:rPr>
+              <a:t>METHOD 1 · the calibrated WP model</a:t>
+            </a:r>
+            <a:endParaRPr lang="en-US" sz="1300" dirty="0"/>
+          </a:p>
+        </p:txBody>
+      </p:sp>
+      <p:sp>
+        <p:nvSpPr>
+          <p:cNvPr id="8" name="Text 6"/>
+          <p:cNvSpPr/>
+          <p:nvPr/>
+        </p:nvSpPr>
+        <p:spPr>
+          <a:xfrm>
+            <a:off x="685800" y="2057400"/>
+            <a:ext cx="5029200" cy="502920"/>
+          </a:xfrm>
+          <a:prstGeom prst="rect">
+            <a:avLst/>
+          </a:prstGeom>
+          <a:noFill/>
+          <a:ln/>
+        </p:spPr>
+        <p:txBody>
+          <a:bodyPr wrap="square" rtlCol="0" anchor="ctr"/>
+          <a:lstStyle/>
+          <a:p>
+            <a:pPr indent="0" marL="0">
+              <a:buNone/>
+            </a:pPr>
+            <a:r>
+              <a:rPr lang="en-US" sz="1300" b="1" dirty="0">
+                <a:solidFill>
+                  <a:srgbClr val="13315C"/>
+                </a:solidFill>
+                <a:latin typeface="Calibri" pitchFamily="34" charset="0"/>
+                <a:ea typeface="Calibri" pitchFamily="34" charset="-122"/>
+                <a:cs typeface="Calibri" pitchFamily="34" charset="-120"/>
+              </a:rPr>
+              <a:t>INPUTS:  </a:t>
+            </a:r>
+            <a:pPr indent="0" marL="0">
+              <a:buNone/>
+            </a:pPr>
+            <a:r>
+              <a:rPr lang="en-US" sz="1300" dirty="0">
+                <a:solidFill>
+                  <a:srgbClr val="1A1A1A"/>
+                </a:solidFill>
+                <a:latin typeface="Calibri" pitchFamily="34" charset="0"/>
+                <a:ea typeface="Calibri" pitchFamily="34" charset="-122"/>
+                <a:cs typeface="Calibri" pitchFamily="34" charset="-120"/>
+              </a:rPr>
+              <a:t>4 game-state features (min, score-diff, run, period)</a:t>
+            </a:r>
+            <a:endParaRPr lang="en-US" sz="1300" dirty="0"/>
+          </a:p>
+        </p:txBody>
+      </p:sp>
+      <p:sp>
+        <p:nvSpPr>
+          <p:cNvPr id="9" name="Text 7"/>
+          <p:cNvSpPr/>
+          <p:nvPr/>
+        </p:nvSpPr>
+        <p:spPr>
+          <a:xfrm>
+            <a:off x="685800" y="2606040"/>
+            <a:ext cx="5029200" cy="502920"/>
+          </a:xfrm>
+          <a:prstGeom prst="rect">
+            <a:avLst/>
+          </a:prstGeom>
+          <a:noFill/>
+          <a:ln/>
+        </p:spPr>
+        <p:txBody>
+          <a:bodyPr wrap="square" rtlCol="0" anchor="ctr"/>
+          <a:lstStyle/>
+          <a:p>
+            <a:pPr indent="0" marL="0">
+              <a:buNone/>
+            </a:pPr>
+            <a:r>
+              <a:rPr lang="en-US" sz="1300" b="1" dirty="0">
+                <a:solidFill>
+                  <a:srgbClr val="13315C"/>
+                </a:solidFill>
+                <a:latin typeface="Calibri" pitchFamily="34" charset="0"/>
+                <a:ea typeface="Calibri" pitchFamily="34" charset="-122"/>
+                <a:cs typeface="Calibri" pitchFamily="34" charset="-120"/>
+              </a:rPr>
+              <a:t>OUTPUTS:  </a:t>
+            </a:r>
+            <a:pPr indent="0" marL="0">
+              <a:buNone/>
+            </a:pPr>
+            <a:r>
+              <a:rPr lang="en-US" sz="1300" dirty="0">
+                <a:solidFill>
+                  <a:srgbClr val="1A1A1A"/>
+                </a:solidFill>
+                <a:latin typeface="Courier New" pitchFamily="34" charset="0"/>
+                <a:ea typeface="Courier New" pitchFamily="34" charset="-122"/>
+                <a:cs typeface="Courier New" pitchFamily="34" charset="-120"/>
+              </a:rPr>
+              <a:t>p̂_t  =  P(home wins 1H), calibrated 0–1</a:t>
+            </a:r>
+            <a:endParaRPr lang="en-US" sz="1300" dirty="0"/>
+          </a:p>
+        </p:txBody>
+      </p:sp>
+      <p:sp>
+        <p:nvSpPr>
+          <p:cNvPr id="10" name="Text 8"/>
+          <p:cNvSpPr/>
+          <p:nvPr/>
+        </p:nvSpPr>
+        <p:spPr>
+          <a:xfrm>
+            <a:off x="685800" y="3154680"/>
+            <a:ext cx="5029200" cy="457200"/>
+          </a:xfrm>
+          <a:prstGeom prst="rect">
+            <a:avLst/>
+          </a:prstGeom>
+          <a:noFill/>
+          <a:ln/>
+        </p:spPr>
+        <p:txBody>
+          <a:bodyPr wrap="square" rtlCol="0" anchor="ctr"/>
+          <a:lstStyle/>
+          <a:p>
+            <a:pPr indent="0" marL="0">
+              <a:buNone/>
+            </a:pPr>
+            <a:r>
+              <a:rPr lang="en-US" sz="1300" b="1" dirty="0">
+                <a:solidFill>
+                  <a:srgbClr val="13315C"/>
+                </a:solidFill>
+                <a:latin typeface="Calibri" pitchFamily="34" charset="0"/>
+                <a:ea typeface="Calibri" pitchFamily="34" charset="-122"/>
+                <a:cs typeface="Calibri" pitchFamily="34" charset="-120"/>
+              </a:rPr>
+              <a:t>ANSWERS:  </a:t>
+            </a:r>
+            <a:pPr indent="0" marL="0">
+              <a:buNone/>
+            </a:pPr>
+            <a:r>
+              <a:rPr lang="en-US" sz="1300" dirty="0">
+                <a:solidFill>
+                  <a:srgbClr val="1A1A1A"/>
+                </a:solidFill>
+                <a:latin typeface="Calibri" pitchFamily="34" charset="0"/>
+                <a:ea typeface="Calibri" pitchFamily="34" charset="-122"/>
+                <a:cs typeface="Calibri" pitchFamily="34" charset="-120"/>
+              </a:rPr>
+              <a:t>"Is the model accurate?"</a:t>
+            </a:r>
+            <a:endParaRPr lang="en-US" sz="1300" dirty="0"/>
+          </a:p>
+        </p:txBody>
+      </p:sp>
+      <p:sp>
+        <p:nvSpPr>
+          <p:cNvPr id="11" name="Shape 9"/>
+          <p:cNvSpPr/>
+          <p:nvPr/>
+        </p:nvSpPr>
+        <p:spPr>
+          <a:xfrm>
+            <a:off x="685800" y="3749040"/>
+            <a:ext cx="5029200" cy="36576"/>
+          </a:xfrm>
+          <a:prstGeom prst="rect">
+            <a:avLst/>
+          </a:prstGeom>
+          <a:solidFill>
+            <a:srgbClr val="8DA9C4"/>
+          </a:solidFill>
+          <a:ln w="12700">
+            <a:solidFill>
+              <a:srgbClr val="8DA9C4"/>
+            </a:solidFill>
+            <a:prstDash val="solid"/>
+          </a:ln>
+        </p:spPr>
+      </p:sp>
+      <p:sp>
+        <p:nvSpPr>
+          <p:cNvPr id="12" name="Text 10"/>
+          <p:cNvSpPr/>
+          <p:nvPr/>
+        </p:nvSpPr>
+        <p:spPr>
+          <a:xfrm>
+            <a:off x="685800" y="3931920"/>
+            <a:ext cx="5029200" cy="457200"/>
+          </a:xfrm>
+          <a:prstGeom prst="rect">
+            <a:avLst/>
+          </a:prstGeom>
+          <a:noFill/>
+          <a:ln/>
+        </p:spPr>
+        <p:txBody>
+          <a:bodyPr wrap="square" rtlCol="0" anchor="ctr"/>
+          <a:lstStyle/>
+          <a:p>
+            <a:pPr indent="0" marL="0">
+              <a:buNone/>
+            </a:pPr>
+            <a:r>
+              <a:rPr lang="en-US" sz="1400" b="1" dirty="0">
+                <a:solidFill>
+                  <a:srgbClr val="0B2545"/>
+                </a:solidFill>
+                <a:latin typeface="Calibri" pitchFamily="34" charset="0"/>
+                <a:ea typeface="Calibri" pitchFamily="34" charset="-122"/>
+                <a:cs typeface="Calibri" pitchFamily="34" charset="-120"/>
+              </a:rPr>
+              <a:t>FINDING:  </a:t>
+            </a:r>
+            <a:pPr indent="0" marL="0">
+              <a:buNone/>
+            </a:pPr>
+            <a:r>
+              <a:rPr lang="en-US" sz="1600" b="1" dirty="0">
+                <a:solidFill>
+                  <a:srgbClr val="EEA02B"/>
+                </a:solidFill>
+                <a:latin typeface="Calibri" pitchFamily="34" charset="0"/>
+                <a:ea typeface="Calibri" pitchFamily="34" charset="-122"/>
+                <a:cs typeface="Calibri" pitchFamily="34" charset="-120"/>
+              </a:rPr>
+              <a:t>✅  </a:t>
+            </a:r>
+            <a:pPr indent="0" marL="0">
+              <a:buNone/>
+            </a:pPr>
+            <a:r>
+              <a:rPr lang="en-US" sz="1400" b="1" dirty="0">
+                <a:solidFill>
+                  <a:srgbClr val="0B2545"/>
+                </a:solidFill>
+                <a:latin typeface="Calibri" pitchFamily="34" charset="0"/>
+                <a:ea typeface="Calibri" pitchFamily="34" charset="-122"/>
+                <a:cs typeface="Calibri" pitchFamily="34" charset="-120"/>
+              </a:rPr>
+              <a:t>Brier 0.149 OOS, ECE 0.008</a:t>
+            </a:r>
+            <a:endParaRPr lang="en-US" sz="1400" dirty="0"/>
+          </a:p>
+        </p:txBody>
+      </p:sp>
+      <p:sp>
+        <p:nvSpPr>
+          <p:cNvPr id="13" name="Text 11"/>
+          <p:cNvSpPr/>
+          <p:nvPr/>
+        </p:nvSpPr>
+        <p:spPr>
+          <a:xfrm>
+            <a:off x="685800" y="4343400"/>
+            <a:ext cx="5029200" cy="365760"/>
+          </a:xfrm>
+          <a:prstGeom prst="rect">
+            <a:avLst/>
+          </a:prstGeom>
+          <a:noFill/>
+          <a:ln/>
+        </p:spPr>
+        <p:txBody>
+          <a:bodyPr wrap="square" rtlCol="0" anchor="ctr"/>
+          <a:lstStyle/>
+          <a:p>
+            <a:pPr indent="0" marL="0">
+              <a:buNone/>
+            </a:pPr>
+            <a:r>
+              <a:rPr lang="en-US" sz="1100" i="1" dirty="0">
+                <a:solidFill>
+                  <a:srgbClr val="13315C"/>
+                </a:solidFill>
+                <a:latin typeface="Calibri" pitchFamily="34" charset="0"/>
+                <a:ea typeface="Calibri" pitchFamily="34" charset="-122"/>
+                <a:cs typeface="Calibri" pitchFamily="34" charset="-120"/>
+              </a:rPr>
+              <a:t>the probabilities can be trusted</a:t>
+            </a:r>
+            <a:endParaRPr lang="en-US" sz="1100" dirty="0"/>
+          </a:p>
+        </p:txBody>
+      </p:sp>
+      <p:sp>
+        <p:nvSpPr>
+          <p:cNvPr id="14" name="Shape 12"/>
+          <p:cNvSpPr/>
+          <p:nvPr/>
+        </p:nvSpPr>
+        <p:spPr>
+          <a:xfrm>
+            <a:off x="5943600" y="3154680"/>
+            <a:ext cx="640080" cy="548640"/>
+          </a:xfrm>
+          <a:prstGeom prst="rightArrow">
+            <a:avLst/>
+          </a:prstGeom>
+          <a:solidFill>
+            <a:srgbClr val="EEA02B"/>
+          </a:solidFill>
+          <a:ln w="12700">
+            <a:solidFill>
+              <a:srgbClr val="EEA02B"/>
+            </a:solidFill>
+            <a:prstDash val="solid"/>
+          </a:ln>
+        </p:spPr>
+      </p:sp>
+      <p:sp>
+        <p:nvSpPr>
+          <p:cNvPr id="15" name="Text 13"/>
+          <p:cNvSpPr/>
+          <p:nvPr/>
+        </p:nvSpPr>
+        <p:spPr>
+          <a:xfrm>
+            <a:off x="5760720" y="3749040"/>
+            <a:ext cx="1005840" cy="274320"/>
+          </a:xfrm>
+          <a:prstGeom prst="rect">
+            <a:avLst/>
+          </a:prstGeom>
+          <a:noFill/>
+          <a:ln/>
+        </p:spPr>
+        <p:txBody>
+          <a:bodyPr wrap="square" rtlCol="0" anchor="ctr"/>
+          <a:lstStyle/>
+          <a:p>
+            <a:pPr algn="ctr" indent="0" marL="0">
+              <a:buNone/>
+            </a:pPr>
+            <a:r>
+              <a:rPr lang="en-US" sz="900" i="1" dirty="0">
+                <a:solidFill>
+                  <a:srgbClr val="13315C"/>
+                </a:solidFill>
+                <a:latin typeface="Calibri" pitchFamily="34" charset="0"/>
+                <a:ea typeface="Calibri" pitchFamily="34" charset="-122"/>
+                <a:cs typeface="Calibri" pitchFamily="34" charset="-120"/>
+              </a:rPr>
+              <a:t>feeds p̂_t into</a:t>
+            </a:r>
+            <a:endParaRPr lang="en-US" sz="900" dirty="0"/>
+          </a:p>
+        </p:txBody>
+      </p:sp>
+      <p:sp>
+        <p:nvSpPr>
+          <p:cNvPr id="16" name="Shape 14"/>
+          <p:cNvSpPr/>
+          <p:nvPr/>
+        </p:nvSpPr>
+        <p:spPr>
+          <a:xfrm>
+            <a:off x="6675120" y="1417320"/>
+            <a:ext cx="5074920" cy="4114800"/>
+          </a:xfrm>
+          <a:prstGeom prst="roundRect">
+            <a:avLst>
+              <a:gd name="adj" fmla="val 2222"/>
+            </a:avLst>
+          </a:prstGeom>
+          <a:solidFill>
+            <a:srgbClr val="F6F6F2"/>
+          </a:solidFill>
+          <a:ln w="20320">
+            <a:solidFill>
+              <a:srgbClr val="EEA02B"/>
+            </a:solidFill>
+            <a:prstDash val="solid"/>
+          </a:ln>
+        </p:spPr>
+      </p:sp>
+      <p:sp>
+        <p:nvSpPr>
+          <p:cNvPr id="17" name="Shape 15"/>
+          <p:cNvSpPr/>
+          <p:nvPr/>
+        </p:nvSpPr>
+        <p:spPr>
+          <a:xfrm>
+            <a:off x="6675120" y="1417320"/>
+            <a:ext cx="5074920" cy="502920"/>
+          </a:xfrm>
+          <a:prstGeom prst="rect">
+            <a:avLst/>
+          </a:prstGeom>
+          <a:solidFill>
+            <a:srgbClr val="0B2545"/>
+          </a:solidFill>
+          <a:ln w="12700">
+            <a:solidFill>
+              <a:srgbClr val="0B2545"/>
+            </a:solidFill>
+            <a:prstDash val="solid"/>
+          </a:ln>
+        </p:spPr>
+      </p:sp>
+      <p:sp>
+        <p:nvSpPr>
+          <p:cNvPr id="18" name="Text 16"/>
+          <p:cNvSpPr/>
+          <p:nvPr/>
+        </p:nvSpPr>
+        <p:spPr>
+          <a:xfrm>
+            <a:off x="6675120" y="1417320"/>
+            <a:ext cx="5074920" cy="502920"/>
+          </a:xfrm>
+          <a:prstGeom prst="rect">
+            <a:avLst/>
+          </a:prstGeom>
+          <a:noFill/>
+          <a:ln/>
+        </p:spPr>
+        <p:txBody>
+          <a:bodyPr wrap="square" rtlCol="0" anchor="ctr"/>
+          <a:lstStyle/>
+          <a:p>
+            <a:pPr algn="ctr" indent="0" marL="0">
+              <a:buNone/>
+            </a:pPr>
+            <a:r>
+              <a:rPr lang="en-US" sz="1300" b="1" dirty="0">
+                <a:solidFill>
+                  <a:srgbClr val="F6F6F2"/>
+                </a:solidFill>
+                <a:latin typeface="Calibri" pitchFamily="34" charset="0"/>
+                <a:ea typeface="Calibri" pitchFamily="34" charset="-122"/>
+                <a:cs typeface="Calibri" pitchFamily="34" charset="-120"/>
+              </a:rPr>
+              <a:t>METHOD 2 · the overreaction test</a:t>
+            </a:r>
+            <a:endParaRPr lang="en-US" sz="1300" dirty="0"/>
+          </a:p>
+        </p:txBody>
+      </p:sp>
+      <p:sp>
+        <p:nvSpPr>
+          <p:cNvPr id="19" name="Text 17"/>
+          <p:cNvSpPr/>
+          <p:nvPr/>
+        </p:nvSpPr>
+        <p:spPr>
+          <a:xfrm>
+            <a:off x="6858000" y="2057400"/>
+            <a:ext cx="4754880" cy="502920"/>
+          </a:xfrm>
+          <a:prstGeom prst="rect">
+            <a:avLst/>
+          </a:prstGeom>
+          <a:noFill/>
+          <a:ln/>
+        </p:spPr>
+        <p:txBody>
+          <a:bodyPr wrap="square" rtlCol="0" anchor="ctr"/>
+          <a:lstStyle/>
+          <a:p>
+            <a:pPr indent="0" marL="0">
+              <a:buNone/>
+            </a:pPr>
+            <a:r>
+              <a:rPr lang="en-US" sz="1300" b="1" dirty="0">
+                <a:solidFill>
+                  <a:srgbClr val="13315C"/>
+                </a:solidFill>
+                <a:latin typeface="Calibri" pitchFamily="34" charset="0"/>
+                <a:ea typeface="Calibri" pitchFamily="34" charset="-122"/>
+                <a:cs typeface="Calibri" pitchFamily="34" charset="-120"/>
+              </a:rPr>
+              <a:t>INPUTS:  </a:t>
+            </a:r>
+            <a:pPr indent="0" marL="0">
+              <a:buNone/>
+            </a:pPr>
+            <a:r>
+              <a:rPr lang="en-US" sz="1300" dirty="0">
+                <a:solidFill>
+                  <a:srgbClr val="1A1A1A"/>
+                </a:solidFill>
+                <a:latin typeface="Calibri" pitchFamily="34" charset="0"/>
+                <a:ea typeface="Calibri" pitchFamily="34" charset="-122"/>
+                <a:cs typeface="Calibri" pitchFamily="34" charset="-120"/>
+              </a:rPr>
+              <a:t>p̂_t from Method 1, at trailing-team scoring events</a:t>
+            </a:r>
+            <a:endParaRPr lang="en-US" sz="1300" dirty="0"/>
+          </a:p>
+        </p:txBody>
+      </p:sp>
+      <p:sp>
+        <p:nvSpPr>
+          <p:cNvPr id="20" name="Text 18"/>
+          <p:cNvSpPr/>
+          <p:nvPr/>
+        </p:nvSpPr>
+        <p:spPr>
+          <a:xfrm>
+            <a:off x="6858000" y="2606040"/>
+            <a:ext cx="4754880" cy="502920"/>
+          </a:xfrm>
+          <a:prstGeom prst="rect">
+            <a:avLst/>
+          </a:prstGeom>
+          <a:noFill/>
+          <a:ln/>
+        </p:spPr>
+        <p:txBody>
+          <a:bodyPr wrap="square" rtlCol="0" anchor="ctr"/>
+          <a:lstStyle/>
+          <a:p>
+            <a:pPr indent="0" marL="0">
+              <a:buNone/>
+            </a:pPr>
+            <a:r>
+              <a:rPr lang="en-US" sz="1300" b="1" dirty="0">
+                <a:solidFill>
+                  <a:srgbClr val="13315C"/>
+                </a:solidFill>
+                <a:latin typeface="Calibri" pitchFamily="34" charset="0"/>
+                <a:ea typeface="Calibri" pitchFamily="34" charset="-122"/>
+                <a:cs typeface="Calibri" pitchFamily="34" charset="-120"/>
+              </a:rPr>
+              <a:t>OUTPUTS:  </a:t>
+            </a:r>
+            <a:pPr indent="0" marL="0">
+              <a:buNone/>
+            </a:pPr>
+            <a:r>
+              <a:rPr lang="en-US" sz="1300" dirty="0">
+                <a:solidFill>
+                  <a:srgbClr val="1A1A1A"/>
+                </a:solidFill>
+                <a:latin typeface="Courier New" pitchFamily="34" charset="0"/>
+                <a:ea typeface="Courier New" pitchFamily="34" charset="-122"/>
+                <a:cs typeface="Courier New" pitchFamily="34" charset="-120"/>
+              </a:rPr>
+              <a:t>Δp̂_scorer(t)  =  p̂(t+60) − p̂(t)</a:t>
+            </a:r>
+            <a:endParaRPr lang="en-US" sz="1300" dirty="0"/>
+          </a:p>
+        </p:txBody>
+      </p:sp>
+      <p:sp>
+        <p:nvSpPr>
+          <p:cNvPr id="21" name="Text 19"/>
+          <p:cNvSpPr/>
+          <p:nvPr/>
+        </p:nvSpPr>
+        <p:spPr>
+          <a:xfrm>
+            <a:off x="6858000" y="3154680"/>
+            <a:ext cx="4754880" cy="594360"/>
+          </a:xfrm>
+          <a:prstGeom prst="rect">
+            <a:avLst/>
+          </a:prstGeom>
+          <a:noFill/>
+          <a:ln/>
+        </p:spPr>
+        <p:txBody>
+          <a:bodyPr wrap="square" rtlCol="0" anchor="ctr"/>
+          <a:lstStyle/>
+          <a:p>
+            <a:pPr indent="0" marL="0">
+              <a:buNone/>
+            </a:pPr>
+            <a:r>
+              <a:rPr lang="en-US" sz="1300" b="1" dirty="0">
+                <a:solidFill>
+                  <a:srgbClr val="13315C"/>
+                </a:solidFill>
+                <a:latin typeface="Calibri" pitchFamily="34" charset="0"/>
+                <a:ea typeface="Calibri" pitchFamily="34" charset="-122"/>
+                <a:cs typeface="Calibri" pitchFamily="34" charset="-120"/>
+              </a:rPr>
+              <a:t>ANSWERS:  </a:t>
+            </a:r>
+            <a:pPr indent="0" marL="0">
+              <a:buNone/>
+            </a:pPr>
+            <a:r>
+              <a:rPr lang="en-US" sz="1300" dirty="0">
+                <a:solidFill>
+                  <a:srgbClr val="1A1A1A"/>
+                </a:solidFill>
+                <a:latin typeface="Calibri" pitchFamily="34" charset="0"/>
+                <a:ea typeface="Calibri" pitchFamily="34" charset="-122"/>
+                <a:cs typeface="Calibri" pitchFamily="34" charset="-120"/>
+              </a:rPr>
+              <a:t>"Does the market overshoot p̂_t in event windows?"</a:t>
+            </a:r>
+            <a:endParaRPr lang="en-US" sz="1300" dirty="0"/>
+          </a:p>
+        </p:txBody>
+      </p:sp>
+      <p:sp>
+        <p:nvSpPr>
+          <p:cNvPr id="22" name="Shape 20"/>
+          <p:cNvSpPr/>
+          <p:nvPr/>
+        </p:nvSpPr>
+        <p:spPr>
+          <a:xfrm>
+            <a:off x="6858000" y="3749040"/>
+            <a:ext cx="4754880" cy="36576"/>
+          </a:xfrm>
+          <a:prstGeom prst="rect">
+            <a:avLst/>
+          </a:prstGeom>
+          <a:solidFill>
+            <a:srgbClr val="8DA9C4"/>
+          </a:solidFill>
+          <a:ln w="12700">
+            <a:solidFill>
+              <a:srgbClr val="8DA9C4"/>
+            </a:solidFill>
+            <a:prstDash val="solid"/>
+          </a:ln>
+        </p:spPr>
+      </p:sp>
+      <p:sp>
+        <p:nvSpPr>
+          <p:cNvPr id="23" name="Text 21"/>
+          <p:cNvSpPr/>
+          <p:nvPr/>
+        </p:nvSpPr>
+        <p:spPr>
+          <a:xfrm>
+            <a:off x="6858000" y="3931920"/>
+            <a:ext cx="4754880" cy="457200"/>
+          </a:xfrm>
+          <a:prstGeom prst="rect">
+            <a:avLst/>
+          </a:prstGeom>
+          <a:noFill/>
+          <a:ln/>
+        </p:spPr>
+        <p:txBody>
+          <a:bodyPr wrap="square" rtlCol="0" anchor="ctr"/>
+          <a:lstStyle/>
+          <a:p>
+            <a:pPr indent="0" marL="0">
+              <a:buNone/>
+            </a:pPr>
+            <a:r>
+              <a:rPr lang="en-US" sz="1400" b="1" dirty="0">
+                <a:solidFill>
+                  <a:srgbClr val="0B2545"/>
+                </a:solidFill>
+                <a:latin typeface="Calibri" pitchFamily="34" charset="0"/>
+                <a:ea typeface="Calibri" pitchFamily="34" charset="-122"/>
+                <a:cs typeface="Calibri" pitchFamily="34" charset="-120"/>
+              </a:rPr>
+              <a:t>FINDING:  </a:t>
+            </a:r>
+            <a:pPr indent="0" marL="0">
+              <a:buNone/>
+            </a:pPr>
+            <a:r>
+              <a:rPr lang="en-US" sz="1600" b="1" dirty="0">
+                <a:solidFill>
+                  <a:srgbClr val="EEA02B"/>
+                </a:solidFill>
+                <a:latin typeface="Calibri" pitchFamily="34" charset="0"/>
+                <a:ea typeface="Calibri" pitchFamily="34" charset="-122"/>
+                <a:cs typeface="Calibri" pitchFamily="34" charset="-120"/>
+              </a:rPr>
+              <a:t>✅  </a:t>
+            </a:r>
+            <a:pPr indent="0" marL="0">
+              <a:buNone/>
+            </a:pPr>
+            <a:r>
+              <a:rPr lang="en-US" sz="1400" b="1" dirty="0">
+                <a:solidFill>
+                  <a:srgbClr val="0B2545"/>
+                </a:solidFill>
+                <a:latin typeface="Calibri" pitchFamily="34" charset="0"/>
+                <a:ea typeface="Calibri" pitchFamily="34" charset="-122"/>
+                <a:cs typeface="Calibri" pitchFamily="34" charset="-120"/>
+              </a:rPr>
+              <a:t>both tests p &lt; 0.0001</a:t>
+            </a:r>
+            <a:endParaRPr lang="en-US" sz="1400" dirty="0"/>
+          </a:p>
+        </p:txBody>
+      </p:sp>
+      <p:sp>
+        <p:nvSpPr>
+          <p:cNvPr id="24" name="Text 22"/>
+          <p:cNvSpPr/>
+          <p:nvPr/>
+        </p:nvSpPr>
+        <p:spPr>
+          <a:xfrm>
+            <a:off x="6858000" y="4343400"/>
+            <a:ext cx="4754880" cy="365760"/>
+          </a:xfrm>
+          <a:prstGeom prst="rect">
+            <a:avLst/>
+          </a:prstGeom>
+          <a:noFill/>
+          <a:ln/>
+        </p:spPr>
+        <p:txBody>
+          <a:bodyPr wrap="square" rtlCol="0" anchor="ctr"/>
+          <a:lstStyle/>
+          <a:p>
+            <a:pPr indent="0" marL="0">
+              <a:buNone/>
+            </a:pPr>
+            <a:r>
+              <a:rPr lang="en-US" sz="1100" i="1" dirty="0">
+                <a:solidFill>
+                  <a:srgbClr val="13315C"/>
+                </a:solidFill>
+                <a:latin typeface="Calibri" pitchFamily="34" charset="0"/>
+                <a:ea typeface="Calibri" pitchFamily="34" charset="-122"/>
+                <a:cs typeface="Calibri" pitchFamily="34" charset="-120"/>
+              </a:rPr>
+              <a:t>the bias on the model side is real</a:t>
+            </a:r>
+            <a:endParaRPr lang="en-US" sz="1100" dirty="0"/>
+          </a:p>
+        </p:txBody>
+      </p:sp>
+      <p:sp>
+        <p:nvSpPr>
+          <p:cNvPr id="25" name="Shape 23"/>
+          <p:cNvSpPr/>
+          <p:nvPr/>
+        </p:nvSpPr>
+        <p:spPr>
+          <a:xfrm>
+            <a:off x="502920" y="5669280"/>
+            <a:ext cx="11247120" cy="868680"/>
+          </a:xfrm>
+          <a:prstGeom prst="roundRect">
+            <a:avLst>
+              <a:gd name="adj" fmla="val 8421"/>
+            </a:avLst>
+          </a:prstGeom>
+          <a:solidFill>
+            <a:srgbClr val="0B2545"/>
+          </a:solidFill>
+          <a:ln w="12700">
+            <a:solidFill>
+              <a:srgbClr val="0B2545"/>
+            </a:solidFill>
+            <a:prstDash val="solid"/>
+          </a:ln>
+        </p:spPr>
+      </p:sp>
+      <p:sp>
+        <p:nvSpPr>
+          <p:cNvPr id="26" name="Text 24"/>
+          <p:cNvSpPr/>
+          <p:nvPr/>
+        </p:nvSpPr>
+        <p:spPr>
+          <a:xfrm>
+            <a:off x="777240" y="5669280"/>
+            <a:ext cx="10698480" cy="868680"/>
+          </a:xfrm>
+          <a:prstGeom prst="rect">
+            <a:avLst/>
+          </a:prstGeom>
+          <a:noFill/>
+          <a:ln/>
+        </p:spPr>
+        <p:txBody>
+          <a:bodyPr wrap="square" rtlCol="0" anchor="ctr"/>
+          <a:lstStyle/>
+          <a:p>
+            <a:pPr algn="ctr" indent="0" marL="0">
+              <a:buNone/>
+            </a:pPr>
+            <a:r>
+              <a:rPr lang="en-US" sz="1700" b="1" dirty="0">
+                <a:solidFill>
+                  <a:srgbClr val="EEA02B"/>
+                </a:solidFill>
+                <a:latin typeface="Georgia" pitchFamily="34" charset="0"/>
+                <a:ea typeface="Georgia" pitchFamily="34" charset="-122"/>
+                <a:cs typeface="Georgia" pitchFamily="34" charset="-120"/>
+              </a:rPr>
+              <a:t>Both findings pass.  </a:t>
+            </a:r>
+            <a:pPr algn="ctr" indent="0" marL="0">
+              <a:buNone/>
+            </a:pPr>
+            <a:r>
+              <a:rPr lang="en-US" sz="1700" dirty="0">
+                <a:solidFill>
+                  <a:srgbClr val="F6F6F2"/>
+                </a:solidFill>
+                <a:latin typeface="Georgia" pitchFamily="34" charset="0"/>
+                <a:ea typeface="Georgia" pitchFamily="34" charset="-122"/>
+                <a:cs typeface="Georgia" pitchFamily="34" charset="-120"/>
+              </a:rPr>
+              <a:t>Next: does this exploitable bias actually survive the vig on real markets?  →  </a:t>
+            </a:r>
+            <a:pPr algn="ctr" indent="0" marL="0">
+              <a:buNone/>
+            </a:pPr>
+            <a:r>
+              <a:rPr lang="en-US" sz="1700" b="1" i="1" dirty="0">
+                <a:solidFill>
+                  <a:srgbClr val="EEA02B"/>
+                </a:solidFill>
+                <a:latin typeface="Georgia" pitchFamily="34" charset="0"/>
+                <a:ea typeface="Georgia" pitchFamily="34" charset="-122"/>
+                <a:cs typeface="Georgia" pitchFamily="34" charset="-120"/>
+              </a:rPr>
+              <a:t>backtest</a:t>
+            </a:r>
+            <a:endParaRPr lang="en-US" sz="1700" dirty="0"/>
+          </a:p>
+        </p:txBody>
+      </p:sp>
+      <p:sp>
+        <p:nvSpPr>
+          <p:cNvPr id="27" name="Text 25"/>
+          <p:cNvSpPr/>
+          <p:nvPr/>
+        </p:nvSpPr>
+        <p:spPr>
+          <a:xfrm>
+            <a:off x="502920" y="6492240"/>
+            <a:ext cx="7315200" cy="274320"/>
+          </a:xfrm>
+          <a:prstGeom prst="rect">
+            <a:avLst/>
+          </a:prstGeom>
+          <a:noFill/>
+          <a:ln/>
+        </p:spPr>
+        <p:txBody>
+          <a:bodyPr wrap="square" rtlCol="0" anchor="ctr"/>
+          <a:lstStyle/>
+          <a:p>
+            <a:pPr indent="0" marL="0">
+              <a:buNone/>
+            </a:pPr>
+            <a:r>
+              <a:rPr lang="en-US" sz="1000" dirty="0">
+                <a:solidFill>
+                  <a:srgbClr val="8DA9C4"/>
+                </a:solidFill>
+                <a:latin typeface="Calibri" pitchFamily="34" charset="0"/>
+                <a:ea typeface="Calibri" pitchFamily="34" charset="-122"/>
+                <a:cs typeface="Calibri" pitchFamily="34" charset="-120"/>
+              </a:rPr>
+              <a:t>STATS 211 · NBA Mispricing · Sit &amp; Manathattai</a:t>
+            </a:r>
+            <a:endParaRPr lang="en-US" sz="1000" dirty="0"/>
+          </a:p>
+        </p:txBody>
+      </p:sp>
+      <p:sp>
+        <p:nvSpPr>
+          <p:cNvPr id="28" name="Text 26"/>
+          <p:cNvSpPr/>
+          <p:nvPr/>
+        </p:nvSpPr>
+        <p:spPr>
+          <a:xfrm>
+            <a:off x="11384280" y="6492240"/>
+            <a:ext cx="411480" cy="274320"/>
+          </a:xfrm>
+          <a:prstGeom prst="rect">
+            <a:avLst/>
+          </a:prstGeom>
+          <a:noFill/>
+          <a:ln/>
+        </p:spPr>
+        <p:txBody>
+          <a:bodyPr wrap="square" rtlCol="0" anchor="ctr"/>
+          <a:lstStyle/>
+          <a:p>
+            <a:pPr algn="r" indent="0" marL="0">
+              <a:buNone/>
+            </a:pPr>
+            <a:r>
+              <a:rPr lang="en-US" sz="1000" dirty="0">
+                <a:solidFill>
+                  <a:srgbClr val="8DA9C4"/>
+                </a:solidFill>
+                <a:latin typeface="Calibri" pitchFamily="34" charset="0"/>
+                <a:ea typeface="Calibri" pitchFamily="34" charset="-122"/>
+                <a:cs typeface="Calibri" pitchFamily="34" charset="-120"/>
+              </a:rPr>
+              <a:t>10</a:t>
+            </a:r>
+            <a:endParaRPr lang="en-US" sz="1000" dirty="0"/>
+          </a:p>
+        </p:txBody>
+      </p:sp>
+    </p:spTree>
+  </p:cSld>
+  <p:clrMapOvr>
+    <a:masterClrMapping/>
+  </p:clrMapOvr>
+</p:sld>
+</file>
+
+<file path=ppt/slides/slide11.xml><?xml version="1.0" encoding="utf-8"?>
+<p:sld xmlns:a="http://schemas.openxmlformats.org/drawingml/2006/main" xmlns:r="http://schemas.openxmlformats.org/officeDocument/2006/relationships" xmlns:p="http://schemas.openxmlformats.org/presentationml/2006/main">
+  <p:cSld name="Slide 11">
+    <p:bg>
+      <p:bgPr>
+        <a:solidFill>
+          <a:srgbClr val="FFFFFF"/>
+        </a:solidFill>
+      </p:bgPr>
+    </p:bg>
+    <p:spTree>
+      <p:nvGrpSpPr>
+        <p:cNvPr id="1" name=""/>
+        <p:cNvGrpSpPr/>
+        <p:nvPr/>
+      </p:nvGrpSpPr>
+      <p:grpSpPr>
+        <a:xfrm>
+          <a:off x="0" y="0"/>
+          <a:ext cx="0" cy="0"/>
+          <a:chOff x="0" y="0"/>
+          <a:chExt cx="0" cy="0"/>
+        </a:xfrm>
+      </p:grpSpPr>
+      <p:sp>
+        <p:nvSpPr>
+          <p:cNvPr id="2" name="Text 0"/>
+          <p:cNvSpPr/>
+          <p:nvPr/>
+        </p:nvSpPr>
+        <p:spPr>
+          <a:xfrm>
+            <a:off x="502920" y="228600"/>
+            <a:ext cx="11247120" cy="777240"/>
+          </a:xfrm>
+          <a:prstGeom prst="rect">
+            <a:avLst/>
+          </a:prstGeom>
+          <a:noFill/>
+          <a:ln/>
+        </p:spPr>
+        <p:txBody>
+          <a:bodyPr wrap="square" rtlCol="0" anchor="ctr"/>
+          <a:lstStyle/>
+          <a:p>
+            <a:pPr indent="0" marL="0">
+              <a:buNone/>
+            </a:pPr>
+            <a:r>
+              <a:rPr lang="en-US" sz="2800" b="1" dirty="0">
+                <a:solidFill>
+                  <a:srgbClr val="0B2545"/>
+                </a:solidFill>
+                <a:latin typeface="Georgia" pitchFamily="34" charset="0"/>
+                <a:ea typeface="Georgia" pitchFamily="34" charset="-122"/>
+                <a:cs typeface="Georgia" pitchFamily="34" charset="-120"/>
+              </a:rPr>
               <a:t>Backtest engine · the equations</a:t>
             </a:r>
             <a:endParaRPr lang="en-US" sz="2800" dirty="0"/>
@@ -2752,7 +3972,7 @@
       </p:sp>
       <p:graphicFrame>
         <p:nvGraphicFramePr>
-          <p:cNvPr id="11" name="Table 0"/>
+          <p:cNvPr id="12" name="Table 0"/>
           <p:cNvGraphicFramePr>
             <a:graphicFrameLocks noGrp="1"/>
           </p:cNvGraphicFramePr>
@@ -3557,505 +4777,6 @@
                 <a:ea typeface="Calibri" pitchFamily="34" charset="-122"/>
                 <a:cs typeface="Calibri" pitchFamily="34" charset="-120"/>
               </a:rPr>
-              <a:t>10</a:t>
-            </a:r>
-            <a:endParaRPr lang="en-US" sz="1000" dirty="0"/>
-          </a:p>
-        </p:txBody>
-      </p:sp>
-    </p:spTree>
-  </p:cSld>
-  <p:clrMapOvr>
-    <a:masterClrMapping/>
-  </p:clrMapOvr>
-</p:sld>
-</file>
-
-<file path=ppt/slides/slide11.xml><?xml version="1.0" encoding="utf-8"?>
-<p:sld xmlns:a="http://schemas.openxmlformats.org/drawingml/2006/main" xmlns:r="http://schemas.openxmlformats.org/officeDocument/2006/relationships" xmlns:p="http://schemas.openxmlformats.org/presentationml/2006/main">
-  <p:cSld name="Slide 11">
-    <p:bg>
-      <p:bgPr>
-        <a:solidFill>
-          <a:srgbClr val="FFFFFF"/>
-        </a:solidFill>
-      </p:bgPr>
-    </p:bg>
-    <p:spTree>
-      <p:nvGrpSpPr>
-        <p:cNvPr id="1" name=""/>
-        <p:cNvGrpSpPr/>
-        <p:nvPr/>
-      </p:nvGrpSpPr>
-      <p:grpSpPr>
-        <a:xfrm>
-          <a:off x="0" y="0"/>
-          <a:ext cx="0" cy="0"/>
-          <a:chOff x="0" y="0"/>
-          <a:chExt cx="0" cy="0"/>
-        </a:xfrm>
-      </p:grpSpPr>
-      <p:sp>
-        <p:nvSpPr>
-          <p:cNvPr id="2" name="Text 0"/>
-          <p:cNvSpPr/>
-          <p:nvPr/>
-        </p:nvSpPr>
-        <p:spPr>
-          <a:xfrm>
-            <a:off x="502920" y="228600"/>
-            <a:ext cx="11247120" cy="777240"/>
-          </a:xfrm>
-          <a:prstGeom prst="rect">
-            <a:avLst/>
-          </a:prstGeom>
-          <a:noFill/>
-          <a:ln/>
-        </p:spPr>
-        <p:txBody>
-          <a:bodyPr wrap="square" rtlCol="0" anchor="ctr"/>
-          <a:lstStyle/>
-          <a:p>
-            <a:pPr indent="0" marL="0">
-              <a:buNone/>
-            </a:pPr>
-            <a:r>
-              <a:rPr lang="en-US" sz="2800" b="1" dirty="0">
-                <a:solidFill>
-                  <a:srgbClr val="0B2545"/>
-                </a:solidFill>
-                <a:latin typeface="Georgia" pitchFamily="34" charset="0"/>
-                <a:ea typeface="Georgia" pitchFamily="34" charset="-122"/>
-                <a:cs typeface="Georgia" pitchFamily="34" charset="-120"/>
-              </a:rPr>
-              <a:t>Finding 3 · Against liquid books, n=1 is pure noise</a:t>
-            </a:r>
-            <a:endParaRPr lang="en-US" sz="2800" dirty="0"/>
-          </a:p>
-        </p:txBody>
-      </p:sp>
-      <p:sp>
-        <p:nvSpPr>
-          <p:cNvPr id="3" name="Text 1"/>
-          <p:cNvSpPr/>
-          <p:nvPr/>
-        </p:nvSpPr>
-        <p:spPr>
-          <a:xfrm>
-            <a:off x="502920" y="932688"/>
-            <a:ext cx="11247120" cy="365760"/>
-          </a:xfrm>
-          <a:prstGeom prst="rect">
-            <a:avLst/>
-          </a:prstGeom>
-          <a:noFill/>
-          <a:ln/>
-        </p:spPr>
-        <p:txBody>
-          <a:bodyPr wrap="square" rtlCol="0" anchor="ctr"/>
-          <a:lstStyle/>
-          <a:p>
-            <a:pPr indent="0" marL="0">
-              <a:buNone/>
-            </a:pPr>
-            <a:r>
-              <a:rPr lang="en-US" sz="1400" i="1" dirty="0">
-                <a:solidFill>
-                  <a:srgbClr val="13315C"/>
-                </a:solidFill>
-                <a:latin typeface="Calibri" pitchFamily="34" charset="0"/>
-                <a:ea typeface="Calibri" pitchFamily="34" charset="-122"/>
-                <a:cs typeface="Calibri" pitchFamily="34" charset="-120"/>
-              </a:rPr>
-              <a:t>Live pilot: SAS @ OKC, 2026-05-26 (FINAL OKC 127–114) · 73 ticks · 6 books</a:t>
-            </a:r>
-            <a:endParaRPr lang="en-US" sz="1400" dirty="0"/>
-          </a:p>
-        </p:txBody>
-      </p:sp>
-      <p:sp>
-        <p:nvSpPr>
-          <p:cNvPr id="4" name="Shape 2"/>
-          <p:cNvSpPr/>
-          <p:nvPr/>
-        </p:nvSpPr>
-        <p:spPr>
-          <a:xfrm>
-            <a:off x="502920" y="1298448"/>
-            <a:ext cx="11247120" cy="0"/>
-          </a:xfrm>
-          <a:prstGeom prst="line">
-            <a:avLst/>
-          </a:prstGeom>
-          <a:noFill/>
-          <a:ln w="25400">
-            <a:solidFill>
-              <a:srgbClr val="1C7293"/>
-            </a:solidFill>
-            <a:prstDash val="solid"/>
-          </a:ln>
-        </p:spPr>
-      </p:sp>
-      <p:pic>
-        <p:nvPicPr>
-          <p:cNvPr id="5" name="Image 0" descr="slides/figures/pilot_roi.png">    </p:cNvPr>
-          <p:cNvPicPr>
-            <a:picLocks noChangeAspect="1"/>
-          </p:cNvPicPr>
-          <p:nvPr/>
-        </p:nvPicPr>
-        <p:blipFill>
-          <a:blip r:embed="rId1"/>
-          <a:stretch>
-            <a:fillRect/>
-          </a:stretch>
-        </p:blipFill>
-        <p:spPr>
-          <a:xfrm>
-            <a:off x="365760" y="1417320"/>
-            <a:ext cx="6858000" cy="4572000"/>
-          </a:xfrm>
-          <a:prstGeom prst="rect">
-            <a:avLst/>
-          </a:prstGeom>
-        </p:spPr>
-      </p:pic>
-      <p:sp>
-        <p:nvSpPr>
-          <p:cNvPr id="6" name="Shape 3"/>
-          <p:cNvSpPr/>
-          <p:nvPr/>
-        </p:nvSpPr>
-        <p:spPr>
-          <a:xfrm>
-            <a:off x="7360920" y="1417320"/>
-            <a:ext cx="4434840" cy="4617720"/>
-          </a:xfrm>
-          <a:prstGeom prst="roundRect">
-            <a:avLst>
-              <a:gd name="adj" fmla="val 2062"/>
-            </a:avLst>
-          </a:prstGeom>
-          <a:solidFill>
-            <a:srgbClr val="F6F6F2"/>
-          </a:solidFill>
-          <a:ln w="19050">
-            <a:solidFill>
-              <a:srgbClr val="1C7293"/>
-            </a:solidFill>
-            <a:prstDash val="solid"/>
-          </a:ln>
-        </p:spPr>
-      </p:sp>
-      <p:sp>
-        <p:nvSpPr>
-          <p:cNvPr id="7" name="Text 4"/>
-          <p:cNvSpPr/>
-          <p:nvPr/>
-        </p:nvSpPr>
-        <p:spPr>
-          <a:xfrm>
-            <a:off x="7589520" y="1554480"/>
-            <a:ext cx="4114800" cy="502920"/>
-          </a:xfrm>
-          <a:prstGeom prst="rect">
-            <a:avLst/>
-          </a:prstGeom>
-          <a:noFill/>
-          <a:ln/>
-        </p:spPr>
-        <p:txBody>
-          <a:bodyPr wrap="square" rtlCol="0" anchor="ctr"/>
-          <a:lstStyle/>
-          <a:p>
-            <a:pPr indent="0" marL="0">
-              <a:buNone/>
-            </a:pPr>
-            <a:r>
-              <a:rPr lang="en-US" sz="1900" b="1" dirty="0">
-                <a:solidFill>
-                  <a:srgbClr val="0B2545"/>
-                </a:solidFill>
-                <a:latin typeface="Georgia" pitchFamily="34" charset="0"/>
-                <a:ea typeface="Georgia" pitchFamily="34" charset="-122"/>
-                <a:cs typeface="Georgia" pitchFamily="34" charset="-120"/>
-              </a:rPr>
-              <a:t>The lesson IS the result.</a:t>
-            </a:r>
-            <a:endParaRPr lang="en-US" sz="1900" dirty="0"/>
-          </a:p>
-        </p:txBody>
-      </p:sp>
-      <p:sp>
-        <p:nvSpPr>
-          <p:cNvPr id="8" name="Text 5"/>
-          <p:cNvSpPr/>
-          <p:nvPr/>
-        </p:nvSpPr>
-        <p:spPr>
-          <a:xfrm>
-            <a:off x="7589520" y="2103120"/>
-            <a:ext cx="4114800" cy="594360"/>
-          </a:xfrm>
-          <a:prstGeom prst="rect">
-            <a:avLst/>
-          </a:prstGeom>
-          <a:noFill/>
-          <a:ln/>
-        </p:spPr>
-        <p:txBody>
-          <a:bodyPr wrap="square" rtlCol="0" anchor="ctr"/>
-          <a:lstStyle/>
-          <a:p>
-            <a:pPr indent="0" marL="0">
-              <a:buNone/>
-            </a:pPr>
-            <a:r>
-              <a:rPr lang="en-US" sz="1300" dirty="0">
-                <a:solidFill>
-                  <a:srgbClr val="1A1A1A"/>
-                </a:solidFill>
-                <a:latin typeface="Calibri" pitchFamily="34" charset="0"/>
-                <a:ea typeface="Calibri" pitchFamily="34" charset="-122"/>
-                <a:cs typeface="Calibri" pitchFamily="34" charset="-120"/>
-              </a:rPr>
-              <a:t>Model faded SA (underdog) early when the score was close.</a:t>
-            </a:r>
-            <a:endParaRPr lang="en-US" sz="1300" dirty="0"/>
-          </a:p>
-        </p:txBody>
-      </p:sp>
-      <p:sp>
-        <p:nvSpPr>
-          <p:cNvPr id="9" name="Text 6"/>
-          <p:cNvSpPr/>
-          <p:nvPr/>
-        </p:nvSpPr>
-        <p:spPr>
-          <a:xfrm>
-            <a:off x="7589520" y="2606040"/>
-            <a:ext cx="4114800" cy="365760"/>
-          </a:xfrm>
-          <a:prstGeom prst="rect">
-            <a:avLst/>
-          </a:prstGeom>
-          <a:noFill/>
-          <a:ln/>
-        </p:spPr>
-        <p:txBody>
-          <a:bodyPr wrap="square" rtlCol="0" anchor="ctr"/>
-          <a:lstStyle/>
-          <a:p>
-            <a:pPr indent="0" marL="0">
-              <a:buNone/>
-            </a:pPr>
-            <a:r>
-              <a:rPr lang="en-US" sz="1300" dirty="0">
-                <a:solidFill>
-                  <a:srgbClr val="1A1A1A"/>
-                </a:solidFill>
-                <a:latin typeface="Calibri" pitchFamily="34" charset="0"/>
-                <a:ea typeface="Calibri" pitchFamily="34" charset="-122"/>
-                <a:cs typeface="Calibri" pitchFamily="34" charset="-120"/>
-              </a:rPr>
-              <a:t>OKC pulled away and won 127–114.</a:t>
-            </a:r>
-            <a:endParaRPr lang="en-US" sz="1300" dirty="0"/>
-          </a:p>
-        </p:txBody>
-      </p:sp>
-      <p:sp>
-        <p:nvSpPr>
-          <p:cNvPr id="10" name="Text 7"/>
-          <p:cNvSpPr/>
-          <p:nvPr/>
-        </p:nvSpPr>
-        <p:spPr>
-          <a:xfrm>
-            <a:off x="7589520" y="3108960"/>
-            <a:ext cx="4114800" cy="1371600"/>
-          </a:xfrm>
-          <a:prstGeom prst="rect">
-            <a:avLst/>
-          </a:prstGeom>
-          <a:noFill/>
-          <a:ln/>
-        </p:spPr>
-        <p:txBody>
-          <a:bodyPr wrap="square" rtlCol="0" anchor="ctr"/>
-          <a:lstStyle/>
-          <a:p>
-            <a:pPr indent="0" marL="0">
-              <a:buNone/>
-            </a:pPr>
-            <a:r>
-              <a:rPr lang="en-US" sz="1300" dirty="0">
-                <a:solidFill>
-                  <a:srgbClr val="1A1A1A"/>
-                </a:solidFill>
-                <a:latin typeface="Calibri" pitchFamily="34" charset="0"/>
-                <a:ea typeface="Calibri" pitchFamily="34" charset="-122"/>
-                <a:cs typeface="Calibri" pitchFamily="34" charset="-120"/>
-              </a:rPr>
-              <a:t>'Always favorite' looks brilliant — </a:t>
-            </a:r>
-            <a:pPr indent="0" marL="0">
-              <a:buNone/>
-            </a:pPr>
-            <a:r>
-              <a:rPr lang="en-US" sz="1300" i="1" dirty="0">
-                <a:solidFill>
-                  <a:srgbClr val="13315C"/>
-                </a:solidFill>
-                <a:latin typeface="Calibri" pitchFamily="34" charset="0"/>
-                <a:ea typeface="Calibri" pitchFamily="34" charset="-122"/>
-                <a:cs typeface="Calibri" pitchFamily="34" charset="-120"/>
-              </a:rPr>
-              <a:t>only because the favorite happened to win this one game.</a:t>
-            </a:r>
-            <a:endParaRPr lang="en-US" sz="1300" dirty="0"/>
-          </a:p>
-        </p:txBody>
-      </p:sp>
-      <p:sp>
-        <p:nvSpPr>
-          <p:cNvPr id="11" name="Text 8"/>
-          <p:cNvSpPr/>
-          <p:nvPr/>
-        </p:nvSpPr>
-        <p:spPr>
-          <a:xfrm>
-            <a:off x="7589520" y="4572000"/>
-            <a:ext cx="4114800" cy="1371600"/>
-          </a:xfrm>
-          <a:prstGeom prst="rect">
-            <a:avLst/>
-          </a:prstGeom>
-          <a:noFill/>
-          <a:ln/>
-        </p:spPr>
-        <p:txBody>
-          <a:bodyPr wrap="square" rtlCol="0" anchor="ctr"/>
-          <a:lstStyle/>
-          <a:p>
-            <a:pPr indent="0" marL="0">
-              <a:buNone/>
-            </a:pPr>
-            <a:r>
-              <a:rPr lang="en-US" sz="1300" dirty="0">
-                <a:solidFill>
-                  <a:srgbClr val="1A1A1A"/>
-                </a:solidFill>
-                <a:latin typeface="Calibri" pitchFamily="34" charset="0"/>
-                <a:ea typeface="Calibri" pitchFamily="34" charset="-122"/>
-                <a:cs typeface="Calibri" pitchFamily="34" charset="-120"/>
-              </a:rPr>
-              <a:t>This is the </a:t>
-            </a:r>
-            <a:pPr indent="0" marL="0">
-              <a:buNone/>
-            </a:pPr>
-            <a:r>
-              <a:rPr lang="en-US" sz="1300" b="1" dirty="0">
-                <a:solidFill>
-                  <a:srgbClr val="EEA02B"/>
-                </a:solidFill>
-                <a:latin typeface="Calibri" pitchFamily="34" charset="0"/>
-                <a:ea typeface="Calibri" pitchFamily="34" charset="-122"/>
-                <a:cs typeface="Calibri" pitchFamily="34" charset="-120"/>
-              </a:rPr>
-              <a:t>n=1 problem</a:t>
-            </a:r>
-            <a:pPr indent="0" marL="0">
-              <a:buNone/>
-            </a:pPr>
-            <a:r>
-              <a:rPr lang="en-US" sz="1300" dirty="0">
-                <a:solidFill>
-                  <a:srgbClr val="1A1A1A"/>
-                </a:solidFill>
-                <a:latin typeface="Calibri" pitchFamily="34" charset="0"/>
-                <a:ea typeface="Calibri" pitchFamily="34" charset="-122"/>
-                <a:cs typeface="Calibri" pitchFamily="34" charset="-120"/>
-              </a:rPr>
-              <a:t> made tangible — the methodological backbone of the project.</a:t>
-            </a:r>
-            <a:endParaRPr lang="en-US" sz="1300" dirty="0"/>
-          </a:p>
-        </p:txBody>
-      </p:sp>
-      <p:sp>
-        <p:nvSpPr>
-          <p:cNvPr id="12" name="Text 9"/>
-          <p:cNvSpPr/>
-          <p:nvPr/>
-        </p:nvSpPr>
-        <p:spPr>
-          <a:xfrm>
-            <a:off x="502920" y="6492240"/>
-            <a:ext cx="7315200" cy="274320"/>
-          </a:xfrm>
-          <a:prstGeom prst="rect">
-            <a:avLst/>
-          </a:prstGeom>
-          <a:noFill/>
-          <a:ln/>
-        </p:spPr>
-        <p:txBody>
-          <a:bodyPr wrap="square" rtlCol="0" anchor="ctr"/>
-          <a:lstStyle/>
-          <a:p>
-            <a:pPr indent="0" marL="0">
-              <a:buNone/>
-            </a:pPr>
-            <a:r>
-              <a:rPr lang="en-US" sz="1000" dirty="0">
-                <a:solidFill>
-                  <a:srgbClr val="8DA9C4"/>
-                </a:solidFill>
-                <a:latin typeface="Calibri" pitchFamily="34" charset="0"/>
-                <a:ea typeface="Calibri" pitchFamily="34" charset="-122"/>
-                <a:cs typeface="Calibri" pitchFamily="34" charset="-120"/>
-              </a:rPr>
-              <a:t>STATS 211 · NBA Mispricing · Sit &amp; Manathattai</a:t>
-            </a:r>
-            <a:endParaRPr lang="en-US" sz="1000" dirty="0"/>
-          </a:p>
-        </p:txBody>
-      </p:sp>
-      <p:sp>
-        <p:nvSpPr>
-          <p:cNvPr id="13" name="Text 10"/>
-          <p:cNvSpPr/>
-          <p:nvPr/>
-        </p:nvSpPr>
-        <p:spPr>
-          <a:xfrm>
-            <a:off x="11384280" y="6492240"/>
-            <a:ext cx="411480" cy="274320"/>
-          </a:xfrm>
-          <a:prstGeom prst="rect">
-            <a:avLst/>
-          </a:prstGeom>
-          <a:noFill/>
-          <a:ln/>
-        </p:spPr>
-        <p:txBody>
-          <a:bodyPr wrap="square" rtlCol="0" anchor="ctr"/>
-          <a:lstStyle/>
-          <a:p>
-            <a:pPr algn="r" indent="0" marL="0">
-              <a:buNone/>
-            </a:pPr>
-            <a:r>
-              <a:rPr lang="en-US" sz="1000" dirty="0">
-                <a:solidFill>
-                  <a:srgbClr val="8DA9C4"/>
-                </a:solidFill>
-                <a:latin typeface="Calibri" pitchFamily="34" charset="0"/>
-                <a:ea typeface="Calibri" pitchFamily="34" charset="-122"/>
-                <a:cs typeface="Calibri" pitchFamily="34" charset="-120"/>
-              </a:rPr>
               <a:t>11</a:t>
             </a:r>
             <a:endParaRPr lang="en-US" sz="1000" dirty="0"/>
@@ -4127,7 +4848,7 @@
                 <a:ea typeface="Georgia" pitchFamily="34" charset="-122"/>
                 <a:cs typeface="Georgia" pitchFamily="34" charset="-120"/>
               </a:rPr>
-              <a:t>Finding 4 · The Kalshi +95% is a stale-mid artifact</a:t>
+              <a:t>Finding 3 · Against liquid books, n=1 is pure noise</a:t>
             </a:r>
             <a:endParaRPr lang="en-US" sz="2800" dirty="0"/>
           </a:p>
@@ -4166,7 +4887,7 @@
                 <a:ea typeface="Calibri" pitchFamily="34" charset="-122"/>
                 <a:cs typeface="Calibri" pitchFamily="34" charset="-120"/>
               </a:rPr>
-              <a:t>Game 6 (OKC@SAS, 2026-05-28, FINAL SAS 118–91) + 4 archived games · 311 ticks</a:t>
+              <a:t>Live pilot: SAS @ OKC, 2026-05-26 (FINAL OKC 127–114) · 73 ticks · 6 books</a:t>
             </a:r>
             <a:endParaRPr lang="en-US" sz="1400" dirty="0"/>
           </a:p>
@@ -4197,7 +4918,7 @@
       </p:sp>
       <p:pic>
         <p:nvPicPr>
-          <p:cNvPr id="5" name="Image 0" descr="slides/figures/game6_pilot.png">    </p:cNvPr>
+          <p:cNvPr id="5" name="Image 0" descr="slides/figures/pilot_roi.png">    </p:cNvPr>
           <p:cNvPicPr>
             <a:picLocks noChangeAspect="1"/>
           </p:cNvPicPr>
@@ -4211,8 +4932,8 @@
         </p:blipFill>
         <p:spPr>
           <a:xfrm>
-            <a:off x="1554480" y="1371600"/>
-            <a:ext cx="9052560" cy="4206240"/>
+            <a:off x="365760" y="1417320"/>
+            <a:ext cx="6858000" cy="4572000"/>
           </a:xfrm>
           <a:prstGeom prst="rect">
             <a:avLst/>
@@ -4227,20 +4948,20 @@
         </p:nvSpPr>
         <p:spPr>
           <a:xfrm>
-            <a:off x="502920" y="5669280"/>
-            <a:ext cx="11247120" cy="914400"/>
+            <a:off x="7360920" y="1417320"/>
+            <a:ext cx="4434840" cy="4617720"/>
           </a:xfrm>
           <a:prstGeom prst="roundRect">
             <a:avLst>
-              <a:gd name="adj" fmla="val 8000"/>
+              <a:gd name="adj" fmla="val 2062"/>
             </a:avLst>
           </a:prstGeom>
           <a:solidFill>
             <a:srgbClr val="F6F6F2"/>
           </a:solidFill>
-          <a:ln w="16510">
+          <a:ln w="19050">
             <a:solidFill>
-              <a:srgbClr val="EEA02B"/>
+              <a:srgbClr val="1C7293"/>
             </a:solidFill>
             <a:prstDash val="solid"/>
           </a:ln>
@@ -4254,32 +4975,216 @@
         </p:nvSpPr>
         <p:spPr>
           <a:xfrm>
-            <a:off x="777240" y="5760720"/>
-            <a:ext cx="10698480" cy="777240"/>
-          </a:xfrm>
-          <a:prstGeom prst="rect">
-            <a:avLst/>
-          </a:prstGeom>
-          <a:noFill/>
-          <a:ln/>
-        </p:spPr>
-        <p:txBody>
-          <a:bodyPr wrap="square" rtlCol="0" anchor="ctr"/>
-          <a:lstStyle/>
-          <a:p>
+            <a:off x="7589520" y="1554480"/>
+            <a:ext cx="4114800" cy="502920"/>
+          </a:xfrm>
+          <a:prstGeom prst="rect">
+            <a:avLst/>
+          </a:prstGeom>
+          <a:noFill/>
+          <a:ln/>
+        </p:spPr>
+        <p:txBody>
+          <a:bodyPr wrap="square" rtlCol="0" anchor="ctr"/>
+          <a:lstStyle/>
+          <a:p>
+            <a:pPr indent="0" marL="0">
+              <a:buNone/>
+            </a:pPr>
+            <a:r>
+              <a:rPr lang="en-US" sz="1900" b="1" dirty="0">
+                <a:solidFill>
+                  <a:srgbClr val="0B2545"/>
+                </a:solidFill>
+                <a:latin typeface="Georgia" pitchFamily="34" charset="0"/>
+                <a:ea typeface="Georgia" pitchFamily="34" charset="-122"/>
+                <a:cs typeface="Georgia" pitchFamily="34" charset="-120"/>
+              </a:rPr>
+              <a:t>The lesson IS the result.</a:t>
+            </a:r>
+            <a:endParaRPr lang="en-US" sz="1900" dirty="0"/>
+          </a:p>
+        </p:txBody>
+      </p:sp>
+      <p:sp>
+        <p:nvSpPr>
+          <p:cNvPr id="8" name="Text 5"/>
+          <p:cNvSpPr/>
+          <p:nvPr/>
+        </p:nvSpPr>
+        <p:spPr>
+          <a:xfrm>
+            <a:off x="7589520" y="2103120"/>
+            <a:ext cx="4114800" cy="594360"/>
+          </a:xfrm>
+          <a:prstGeom prst="rect">
+            <a:avLst/>
+          </a:prstGeom>
+          <a:noFill/>
+          <a:ln/>
+        </p:spPr>
+        <p:txBody>
+          <a:bodyPr wrap="square" rtlCol="0" anchor="ctr"/>
+          <a:lstStyle/>
+          <a:p>
+            <a:pPr indent="0" marL="0">
+              <a:buNone/>
+            </a:pPr>
+            <a:r>
+              <a:rPr lang="en-US" sz="1300" dirty="0">
+                <a:solidFill>
+                  <a:srgbClr val="1A1A1A"/>
+                </a:solidFill>
+                <a:latin typeface="Calibri" pitchFamily="34" charset="0"/>
+                <a:ea typeface="Calibri" pitchFamily="34" charset="-122"/>
+                <a:cs typeface="Calibri" pitchFamily="34" charset="-120"/>
+              </a:rPr>
+              <a:t>Model faded SA (underdog) early when the score was close.</a:t>
+            </a:r>
+            <a:endParaRPr lang="en-US" sz="1300" dirty="0"/>
+          </a:p>
+        </p:txBody>
+      </p:sp>
+      <p:sp>
+        <p:nvSpPr>
+          <p:cNvPr id="9" name="Text 6"/>
+          <p:cNvSpPr/>
+          <p:nvPr/>
+        </p:nvSpPr>
+        <p:spPr>
+          <a:xfrm>
+            <a:off x="7589520" y="2606040"/>
+            <a:ext cx="4114800" cy="365760"/>
+          </a:xfrm>
+          <a:prstGeom prst="rect">
+            <a:avLst/>
+          </a:prstGeom>
+          <a:noFill/>
+          <a:ln/>
+        </p:spPr>
+        <p:txBody>
+          <a:bodyPr wrap="square" rtlCol="0" anchor="ctr"/>
+          <a:lstStyle/>
+          <a:p>
+            <a:pPr indent="0" marL="0">
+              <a:buNone/>
+            </a:pPr>
+            <a:r>
+              <a:rPr lang="en-US" sz="1300" dirty="0">
+                <a:solidFill>
+                  <a:srgbClr val="1A1A1A"/>
+                </a:solidFill>
+                <a:latin typeface="Calibri" pitchFamily="34" charset="0"/>
+                <a:ea typeface="Calibri" pitchFamily="34" charset="-122"/>
+                <a:cs typeface="Calibri" pitchFamily="34" charset="-120"/>
+              </a:rPr>
+              <a:t>OKC pulled away and won 127–114.</a:t>
+            </a:r>
+            <a:endParaRPr lang="en-US" sz="1300" dirty="0"/>
+          </a:p>
+        </p:txBody>
+      </p:sp>
+      <p:sp>
+        <p:nvSpPr>
+          <p:cNvPr id="10" name="Text 7"/>
+          <p:cNvSpPr/>
+          <p:nvPr/>
+        </p:nvSpPr>
+        <p:spPr>
+          <a:xfrm>
+            <a:off x="7589520" y="3108960"/>
+            <a:ext cx="4114800" cy="1371600"/>
+          </a:xfrm>
+          <a:prstGeom prst="rect">
+            <a:avLst/>
+          </a:prstGeom>
+          <a:noFill/>
+          <a:ln/>
+        </p:spPr>
+        <p:txBody>
+          <a:bodyPr wrap="square" rtlCol="0" anchor="ctr"/>
+          <a:lstStyle/>
+          <a:p>
+            <a:pPr indent="0" marL="0">
+              <a:buNone/>
+            </a:pPr>
+            <a:r>
+              <a:rPr lang="en-US" sz="1300" dirty="0">
+                <a:solidFill>
+                  <a:srgbClr val="1A1A1A"/>
+                </a:solidFill>
+                <a:latin typeface="Calibri" pitchFamily="34" charset="0"/>
+                <a:ea typeface="Calibri" pitchFamily="34" charset="-122"/>
+                <a:cs typeface="Calibri" pitchFamily="34" charset="-120"/>
+              </a:rPr>
+              <a:t>'Always favorite' looks brilliant — </a:t>
+            </a:r>
+            <a:pPr indent="0" marL="0">
+              <a:buNone/>
+            </a:pPr>
+            <a:r>
+              <a:rPr lang="en-US" sz="1300" i="1" dirty="0">
+                <a:solidFill>
+                  <a:srgbClr val="13315C"/>
+                </a:solidFill>
+                <a:latin typeface="Calibri" pitchFamily="34" charset="0"/>
+                <a:ea typeface="Calibri" pitchFamily="34" charset="-122"/>
+                <a:cs typeface="Calibri" pitchFamily="34" charset="-120"/>
+              </a:rPr>
+              <a:t>only because the favorite happened to win this one game.</a:t>
+            </a:r>
+            <a:endParaRPr lang="en-US" sz="1300" dirty="0"/>
+          </a:p>
+        </p:txBody>
+      </p:sp>
+      <p:sp>
+        <p:nvSpPr>
+          <p:cNvPr id="11" name="Text 8"/>
+          <p:cNvSpPr/>
+          <p:nvPr/>
+        </p:nvSpPr>
+        <p:spPr>
+          <a:xfrm>
+            <a:off x="7589520" y="4572000"/>
+            <a:ext cx="4114800" cy="1371600"/>
+          </a:xfrm>
+          <a:prstGeom prst="rect">
+            <a:avLst/>
+          </a:prstGeom>
+          <a:noFill/>
+          <a:ln/>
+        </p:spPr>
+        <p:txBody>
+          <a:bodyPr wrap="square" rtlCol="0" anchor="ctr"/>
+          <a:lstStyle/>
+          <a:p>
+            <a:pPr indent="0" marL="0">
+              <a:buNone/>
+            </a:pPr>
+            <a:r>
+              <a:rPr lang="en-US" sz="1300" dirty="0">
+                <a:solidFill>
+                  <a:srgbClr val="1A1A1A"/>
+                </a:solidFill>
+                <a:latin typeface="Calibri" pitchFamily="34" charset="0"/>
+                <a:ea typeface="Calibri" pitchFamily="34" charset="-122"/>
+                <a:cs typeface="Calibri" pitchFamily="34" charset="-120"/>
+              </a:rPr>
+              <a:t>This is the </a:t>
+            </a:r>
             <a:pPr indent="0" marL="0">
               <a:buNone/>
             </a:pPr>
             <a:r>
               <a:rPr lang="en-US" sz="1300" b="1" dirty="0">
                 <a:solidFill>
-                  <a:srgbClr val="0B2545"/>
-                </a:solidFill>
-                <a:latin typeface="Calibri" pitchFamily="34" charset="0"/>
-                <a:ea typeface="Calibri" pitchFamily="34" charset="-122"/>
-                <a:cs typeface="Calibri" pitchFamily="34" charset="-120"/>
-              </a:rPr>
-              <a:t>Game 6 alone: </a:t>
+                  <a:srgbClr val="EEA02B"/>
+                </a:solidFill>
+                <a:latin typeface="Calibri" pitchFamily="34" charset="0"/>
+                <a:ea typeface="Calibri" pitchFamily="34" charset="-122"/>
+                <a:cs typeface="Calibri" pitchFamily="34" charset="-120"/>
+              </a:rPr>
+              <a:t>n=1 problem</a:t>
             </a:r>
             <a:pPr indent="0" marL="0">
               <a:buNone/>
@@ -4293,49 +5198,7 @@
                 <a:ea typeface="Calibri" pitchFamily="34" charset="-122"/>
                 <a:cs typeface="Calibri" pitchFamily="34" charset="-120"/>
               </a:rPr>
-              <a:t>model +12% on Kalshi 1H (smallest of the 5). </a:t>
-            </a:r>
-            <a:pPr indent="0" marL="0">
-              <a:buNone/>
-            </a:pPr>
-            <a:r>
-              <a:rPr lang="en-US" sz="1300" b="1" dirty="0">
-                <a:solidFill>
-                  <a:srgbClr val="EEA02B"/>
-                </a:solidFill>
-                <a:latin typeface="Calibri" pitchFamily="34" charset="0"/>
-                <a:ea typeface="Calibri" pitchFamily="34" charset="-122"/>
-                <a:cs typeface="Calibri" pitchFamily="34" charset="-120"/>
-              </a:rPr>
-              <a:t>Pool of 5: +95%. </a:t>
-            </a:r>
-            <a:pPr indent="0" marL="0">
-              <a:buNone/>
-            </a:pPr>
-            <a:r>
-              <a:rPr lang="en-US" sz="1300" dirty="0">
-                <a:solidFill>
-                  <a:srgbClr val="1A1A1A"/>
-                </a:solidFill>
-                <a:latin typeface="Calibri" pitchFamily="34" charset="0"/>
-                <a:ea typeface="Calibri" pitchFamily="34" charset="-122"/>
-                <a:cs typeface="Calibri" pitchFamily="34" charset="-120"/>
-              </a:rPr>
-              <a:t>But Kalshi 1H prices were thin and stale, so the model 'beats' a price that isn't moving — </a:t>
-            </a:r>
-            <a:pPr indent="0" marL="0">
-              <a:buNone/>
-            </a:pPr>
-            <a:r>
-              <a:rPr lang="en-US" sz="1300" i="1" dirty="0">
-                <a:solidFill>
-                  <a:srgbClr val="13315C"/>
-                </a:solidFill>
-                <a:latin typeface="Calibri" pitchFamily="34" charset="0"/>
-                <a:ea typeface="Calibri" pitchFamily="34" charset="-122"/>
-                <a:cs typeface="Calibri" pitchFamily="34" charset="-120"/>
-              </a:rPr>
-              <a:t>stale-mid + n=5 + mid quotes = artifact, not edge.</a:t>
+              <a:t> made tangible — the methodological backbone of the project.</a:t>
             </a:r>
             <a:endParaRPr lang="en-US" sz="1300" dirty="0"/>
           </a:p>
@@ -4343,7 +5206,7 @@
       </p:sp>
       <p:sp>
         <p:nvSpPr>
-          <p:cNvPr id="8" name="Text 5"/>
+          <p:cNvPr id="12" name="Text 9"/>
           <p:cNvSpPr/>
           <p:nvPr/>
         </p:nvSpPr>
@@ -4382,7 +5245,7 @@
       </p:sp>
       <p:sp>
         <p:nvSpPr>
-          <p:cNvPr id="9" name="Text 6"/>
+          <p:cNvPr id="13" name="Text 10"/>
           <p:cNvSpPr/>
           <p:nvPr/>
         </p:nvSpPr>
@@ -4484,7 +5347,7 @@
                 <a:ea typeface="Georgia" pitchFamily="34" charset="-122"/>
                 <a:cs typeface="Georgia" pitchFamily="34" charset="-120"/>
               </a:rPr>
-              <a:t>Connecting back to Halawi</a:t>
+              <a:t>Finding 4 · The Kalshi +95% is a stale-mid artifact</a:t>
             </a:r>
             <a:endParaRPr lang="en-US" sz="2800" dirty="0"/>
           </a:p>
@@ -4523,7 +5386,7 @@
                 <a:ea typeface="Calibri" pitchFamily="34" charset="-122"/>
                 <a:cs typeface="Calibri" pitchFamily="34" charset="-120"/>
               </a:rPr>
-              <a:t>The Aggregate column — applied to NBA</a:t>
+              <a:t>Game 6 (OKC@SAS, 2026-05-28, FINAL SAS 118–91) + 4 archived games · 311 ticks</a:t>
             </a:r>
             <a:endParaRPr lang="en-US" sz="1400" dirty="0"/>
           </a:p>
@@ -4552,162 +5415,52 @@
           </a:ln>
         </p:spPr>
       </p:sp>
-      <p:sp>
-        <p:nvSpPr>
-          <p:cNvPr id="5" name="Text 3"/>
-          <p:cNvSpPr/>
-          <p:nvPr/>
-        </p:nvSpPr>
-        <p:spPr>
-          <a:xfrm>
-            <a:off x="502920" y="1463040"/>
-            <a:ext cx="11247120" cy="640080"/>
-          </a:xfrm>
-          <a:prstGeom prst="rect">
-            <a:avLst/>
-          </a:prstGeom>
-          <a:noFill/>
-          <a:ln/>
-        </p:spPr>
-        <p:txBody>
-          <a:bodyPr wrap="square" rtlCol="0" anchor="ctr"/>
-          <a:lstStyle/>
-          <a:p>
-            <a:pPr indent="0" marL="0">
-              <a:buNone/>
-            </a:pPr>
-            <a:r>
-              <a:rPr lang="en-US" sz="1800" b="1" dirty="0">
-                <a:solidFill>
-                  <a:srgbClr val="1A1A1A"/>
-                </a:solidFill>
-                <a:latin typeface="Calibri" pitchFamily="34" charset="0"/>
-                <a:ea typeface="Calibri" pitchFamily="34" charset="-122"/>
-                <a:cs typeface="Calibri" pitchFamily="34" charset="-120"/>
-              </a:rPr>
-              <a:t>Halawi's buried result:  </a:t>
-            </a:r>
-            <a:pPr indent="0" marL="0">
-              <a:buNone/>
-            </a:pPr>
-            <a:r>
-              <a:rPr lang="en-US" sz="1800" dirty="0">
-                <a:solidFill>
-                  <a:srgbClr val="1A1A1A"/>
-                </a:solidFill>
-                <a:latin typeface="Calibri" pitchFamily="34" charset="0"/>
-                <a:ea typeface="Calibri" pitchFamily="34" charset="-122"/>
-                <a:cs typeface="Calibri" pitchFamily="34" charset="-120"/>
-              </a:rPr>
-              <a:t>4·LM + 1·crowd &gt; either alone — because the errors are </a:t>
-            </a:r>
-            <a:pPr indent="0" marL="0">
-              <a:buNone/>
-            </a:pPr>
-            <a:r>
-              <a:rPr lang="en-US" sz="1800" b="1" i="1" dirty="0">
-                <a:solidFill>
-                  <a:srgbClr val="EEA02B"/>
-                </a:solidFill>
-                <a:latin typeface="Calibri" pitchFamily="34" charset="0"/>
-                <a:ea typeface="Calibri" pitchFamily="34" charset="-122"/>
-                <a:cs typeface="Calibri" pitchFamily="34" charset="-120"/>
-              </a:rPr>
-              <a:t>independent.</a:t>
-            </a:r>
-            <a:endParaRPr lang="en-US" sz="1800" dirty="0"/>
-          </a:p>
-        </p:txBody>
-      </p:sp>
-      <p:sp>
-        <p:nvSpPr>
-          <p:cNvPr id="6" name="Text 4"/>
-          <p:cNvSpPr/>
-          <p:nvPr/>
-        </p:nvSpPr>
-        <p:spPr>
-          <a:xfrm>
-            <a:off x="502920" y="2194560"/>
+      <p:pic>
+        <p:nvPicPr>
+          <p:cNvPr id="5" name="Image 0" descr="slides/figures/game6_pilot.png">    </p:cNvPr>
+          <p:cNvPicPr>
+            <a:picLocks noChangeAspect="1"/>
+          </p:cNvPicPr>
+          <p:nvPr/>
+        </p:nvPicPr>
+        <p:blipFill>
+          <a:blip r:embed="rId1"/>
+          <a:stretch>
+            <a:fillRect/>
+          </a:stretch>
+        </p:blipFill>
+        <p:spPr>
+          <a:xfrm>
+            <a:off x="1554480" y="1371600"/>
+            <a:ext cx="9052560" cy="4206240"/>
+          </a:xfrm>
+          <a:prstGeom prst="rect">
+            <a:avLst/>
+          </a:prstGeom>
+        </p:spPr>
+      </p:pic>
+      <p:sp>
+        <p:nvSpPr>
+          <p:cNvPr id="6" name="Shape 3"/>
+          <p:cNvSpPr/>
+          <p:nvPr/>
+        </p:nvSpPr>
+        <p:spPr>
+          <a:xfrm>
+            <a:off x="502920" y="5669280"/>
             <a:ext cx="11247120" cy="914400"/>
-          </a:xfrm>
-          <a:prstGeom prst="rect">
-            <a:avLst/>
-          </a:prstGeom>
-          <a:noFill/>
-          <a:ln/>
-        </p:spPr>
-        <p:txBody>
-          <a:bodyPr wrap="square" rtlCol="0" anchor="ctr"/>
-          <a:lstStyle/>
-          <a:p>
-            <a:pPr indent="0" marL="0">
-              <a:buNone/>
-            </a:pPr>
-            <a:r>
-              <a:rPr lang="en-US" sz="1800" dirty="0">
-                <a:solidFill>
-                  <a:srgbClr val="1A1A1A"/>
-                </a:solidFill>
-                <a:latin typeface="Calibri" pitchFamily="34" charset="0"/>
-                <a:ea typeface="Calibri" pitchFamily="34" charset="-122"/>
-                <a:cs typeface="Calibri" pitchFamily="34" charset="-120"/>
-              </a:rPr>
-              <a:t>Our structural model and the live market are also </a:t>
-            </a:r>
-            <a:pPr indent="0" marL="0">
-              <a:buNone/>
-            </a:pPr>
-            <a:r>
-              <a:rPr lang="en-US" sz="1800" b="1" dirty="0">
-                <a:solidFill>
-                  <a:srgbClr val="0B2545"/>
-                </a:solidFill>
-                <a:latin typeface="Calibri" pitchFamily="34" charset="0"/>
-                <a:ea typeface="Calibri" pitchFamily="34" charset="-122"/>
-                <a:cs typeface="Calibri" pitchFamily="34" charset="-120"/>
-              </a:rPr>
-              <a:t>partly independent error sources</a:t>
-            </a:r>
-            <a:pPr indent="0" marL="0">
-              <a:buNone/>
-            </a:pPr>
-            <a:r>
-              <a:rPr lang="en-US" sz="1800" dirty="0">
-                <a:solidFill>
-                  <a:srgbClr val="1A1A1A"/>
-                </a:solidFill>
-                <a:latin typeface="Calibri" pitchFamily="34" charset="0"/>
-                <a:ea typeface="Calibri" pitchFamily="34" charset="-122"/>
-                <a:cs typeface="Calibri" pitchFamily="34" charset="-120"/>
-              </a:rPr>
-              <a:t> — model reads game state, market absorbs sentiment + inside flow.</a:t>
-            </a:r>
-            <a:endParaRPr lang="en-US" sz="1800" dirty="0"/>
-          </a:p>
-        </p:txBody>
-      </p:sp>
-      <p:sp>
-        <p:nvSpPr>
-          <p:cNvPr id="7" name="Shape 5"/>
-          <p:cNvSpPr/>
-          <p:nvPr/>
-        </p:nvSpPr>
-        <p:spPr>
-          <a:xfrm>
-            <a:off x="502920" y="3291840"/>
-            <a:ext cx="11247120" cy="1371600"/>
           </a:xfrm>
           <a:prstGeom prst="roundRect">
             <a:avLst>
-              <a:gd name="adj" fmla="val 5333"/>
+              <a:gd name="adj" fmla="val 8000"/>
             </a:avLst>
           </a:prstGeom>
           <a:solidFill>
-            <a:srgbClr val="EEF3F8"/>
+            <a:srgbClr val="F6F6F2"/>
           </a:solidFill>
-          <a:ln w="15240">
+          <a:ln w="16510">
             <a:solidFill>
-              <a:srgbClr val="1C7293"/>
+              <a:srgbClr val="EEA02B"/>
             </a:solidFill>
             <a:prstDash val="solid"/>
           </a:ln>
@@ -4715,69 +5468,86 @@
       </p:sp>
       <p:sp>
         <p:nvSpPr>
-          <p:cNvPr id="8" name="Text 6"/>
-          <p:cNvSpPr/>
-          <p:nvPr/>
-        </p:nvSpPr>
-        <p:spPr>
-          <a:xfrm>
-            <a:off x="685800" y="3383280"/>
-            <a:ext cx="10881360" cy="868680"/>
-          </a:xfrm>
-          <a:prstGeom prst="rect">
-            <a:avLst/>
-          </a:prstGeom>
-          <a:noFill/>
-          <a:ln/>
-        </p:spPr>
-        <p:txBody>
-          <a:bodyPr wrap="square" rtlCol="0" anchor="ctr"/>
-          <a:lstStyle/>
-          <a:p>
-            <a:pPr algn="ctr" indent="0" marL="0">
-              <a:buNone/>
-            </a:pPr>
-            <a:r>
-              <a:rPr lang="en-US" sz="1800" b="1" dirty="0">
+          <p:cNvPr id="7" name="Text 4"/>
+          <p:cNvSpPr/>
+          <p:nvPr/>
+        </p:nvSpPr>
+        <p:spPr>
+          <a:xfrm>
+            <a:off x="777240" y="5760720"/>
+            <a:ext cx="10698480" cy="777240"/>
+          </a:xfrm>
+          <a:prstGeom prst="rect">
+            <a:avLst/>
+          </a:prstGeom>
+          <a:noFill/>
+          <a:ln/>
+        </p:spPr>
+        <p:txBody>
+          <a:bodyPr wrap="square" rtlCol="0" anchor="ctr"/>
+          <a:lstStyle/>
+          <a:p>
+            <a:pPr indent="0" marL="0">
+              <a:buNone/>
+            </a:pPr>
+            <a:r>
+              <a:rPr lang="en-US" sz="1300" b="1" dirty="0">
                 <a:solidFill>
                   <a:srgbClr val="0B2545"/>
                 </a:solidFill>
-                <a:latin typeface="Courier New" pitchFamily="34" charset="0"/>
-                <a:ea typeface="Courier New" pitchFamily="34" charset="-122"/>
-                <a:cs typeface="Courier New" pitchFamily="34" charset="-120"/>
-              </a:rPr>
-              <a:t>p̂_aggregate  =  w · p_model  +  ( 1 − w ) · p_market_devig</a:t>
-            </a:r>
-            <a:endParaRPr lang="en-US" sz="1800" dirty="0"/>
-          </a:p>
-        </p:txBody>
-      </p:sp>
-      <p:sp>
-        <p:nvSpPr>
-          <p:cNvPr id="9" name="Text 7"/>
-          <p:cNvSpPr/>
-          <p:nvPr/>
-        </p:nvSpPr>
-        <p:spPr>
-          <a:xfrm>
-            <a:off x="685800" y="4206240"/>
-            <a:ext cx="10881360" cy="365760"/>
-          </a:xfrm>
-          <a:prstGeom prst="rect">
-            <a:avLst/>
-          </a:prstGeom>
-          <a:noFill/>
-          <a:ln/>
-        </p:spPr>
-        <p:txBody>
-          <a:bodyPr wrap="square" rtlCol="0" anchor="ctr"/>
-          <a:lstStyle/>
-          <a:p>
-            <a:pPr algn="ctr" indent="0" marL="0">
-              <a:buNone/>
-            </a:pPr>
-            <a:r>
-              <a:rPr lang="en-US" sz="1200" i="1" dirty="0">
+                <a:latin typeface="Calibri" pitchFamily="34" charset="0"/>
+                <a:ea typeface="Calibri" pitchFamily="34" charset="-122"/>
+                <a:cs typeface="Calibri" pitchFamily="34" charset="-120"/>
+              </a:rPr>
+              <a:t>Game 6 alone: </a:t>
+            </a:r>
+            <a:pPr indent="0" marL="0">
+              <a:buNone/>
+            </a:pPr>
+            <a:r>
+              <a:rPr lang="en-US" sz="1300" dirty="0">
+                <a:solidFill>
+                  <a:srgbClr val="1A1A1A"/>
+                </a:solidFill>
+                <a:latin typeface="Calibri" pitchFamily="34" charset="0"/>
+                <a:ea typeface="Calibri" pitchFamily="34" charset="-122"/>
+                <a:cs typeface="Calibri" pitchFamily="34" charset="-120"/>
+              </a:rPr>
+              <a:t>model +12% on Kalshi 1H (smallest of the 5). </a:t>
+            </a:r>
+            <a:pPr indent="0" marL="0">
+              <a:buNone/>
+            </a:pPr>
+            <a:r>
+              <a:rPr lang="en-US" sz="1300" b="1" dirty="0">
+                <a:solidFill>
+                  <a:srgbClr val="EEA02B"/>
+                </a:solidFill>
+                <a:latin typeface="Calibri" pitchFamily="34" charset="0"/>
+                <a:ea typeface="Calibri" pitchFamily="34" charset="-122"/>
+                <a:cs typeface="Calibri" pitchFamily="34" charset="-120"/>
+              </a:rPr>
+              <a:t>Pool of 5: +95%. </a:t>
+            </a:r>
+            <a:pPr indent="0" marL="0">
+              <a:buNone/>
+            </a:pPr>
+            <a:r>
+              <a:rPr lang="en-US" sz="1300" dirty="0">
+                <a:solidFill>
+                  <a:srgbClr val="1A1A1A"/>
+                </a:solidFill>
+                <a:latin typeface="Calibri" pitchFamily="34" charset="0"/>
+                <a:ea typeface="Calibri" pitchFamily="34" charset="-122"/>
+                <a:cs typeface="Calibri" pitchFamily="34" charset="-120"/>
+              </a:rPr>
+              <a:t>But Kalshi 1H prices were thin and stale, so the model 'beats' a price that isn't moving — </a:t>
+            </a:r>
+            <a:pPr indent="0" marL="0">
+              <a:buNone/>
+            </a:pPr>
+            <a:r>
+              <a:rPr lang="en-US" sz="1300" i="1" dirty="0">
                 <a:solidFill>
                   <a:srgbClr val="13315C"/>
                 </a:solidFill>
@@ -4785,120 +5555,15 @@
                 <a:ea typeface="Calibri" pitchFamily="34" charset="-122"/>
                 <a:cs typeface="Calibri" pitchFamily="34" charset="-120"/>
               </a:rPr>
-              <a:t>the 'aggregate' variant (#3 in the planned table) — weight from validation Brier · aggregate's Brier ≤ min(components)</a:t>
-            </a:r>
-            <a:endParaRPr lang="en-US" sz="1200" dirty="0"/>
-          </a:p>
-        </p:txBody>
-      </p:sp>
-      <p:sp>
-        <p:nvSpPr>
-          <p:cNvPr id="10" name="Shape 8"/>
-          <p:cNvSpPr/>
-          <p:nvPr/>
-        </p:nvSpPr>
-        <p:spPr>
-          <a:xfrm>
-            <a:off x="502920" y="4846320"/>
-            <a:ext cx="11247120" cy="1508760"/>
-          </a:xfrm>
-          <a:prstGeom prst="roundRect">
-            <a:avLst>
-              <a:gd name="adj" fmla="val 6061"/>
-            </a:avLst>
-          </a:prstGeom>
-          <a:solidFill>
-            <a:srgbClr val="F6F6F2"/>
-          </a:solidFill>
-          <a:ln w="19050">
-            <a:solidFill>
-              <a:srgbClr val="1C7293"/>
-            </a:solidFill>
-            <a:prstDash val="solid"/>
-          </a:ln>
-        </p:spPr>
-      </p:sp>
-      <p:sp>
-        <p:nvSpPr>
-          <p:cNvPr id="11" name="Text 9"/>
-          <p:cNvSpPr/>
-          <p:nvPr/>
-        </p:nvSpPr>
-        <p:spPr>
-          <a:xfrm>
-            <a:off x="777240" y="4983480"/>
-            <a:ext cx="10698480" cy="365760"/>
-          </a:xfrm>
-          <a:prstGeom prst="rect">
-            <a:avLst/>
-          </a:prstGeom>
-          <a:noFill/>
-          <a:ln/>
-        </p:spPr>
-        <p:txBody>
-          <a:bodyPr wrap="square" rtlCol="0" anchor="ctr"/>
-          <a:lstStyle/>
-          <a:p>
-            <a:pPr indent="0" marL="0">
-              <a:buNone/>
-            </a:pPr>
-            <a:r>
-              <a:rPr lang="en-US" sz="1400" i="1" dirty="0">
-                <a:solidFill>
-                  <a:srgbClr val="13315C"/>
-                </a:solidFill>
-                <a:latin typeface="Calibri" pitchFamily="34" charset="0"/>
-                <a:ea typeface="Calibri" pitchFamily="34" charset="-122"/>
-                <a:cs typeface="Calibri" pitchFamily="34" charset="-120"/>
-              </a:rPr>
-              <a:t>Reframing:</a:t>
-            </a:r>
-            <a:endParaRPr lang="en-US" sz="1400" dirty="0"/>
-          </a:p>
-        </p:txBody>
-      </p:sp>
-      <p:sp>
-        <p:nvSpPr>
-          <p:cNvPr id="12" name="Text 10"/>
-          <p:cNvSpPr/>
-          <p:nvPr/>
-        </p:nvSpPr>
-        <p:spPr>
-          <a:xfrm>
-            <a:off x="777240" y="5349240"/>
-            <a:ext cx="10698480" cy="914400"/>
-          </a:xfrm>
-          <a:prstGeom prst="rect">
-            <a:avLst/>
-          </a:prstGeom>
-          <a:noFill/>
-          <a:ln/>
-        </p:spPr>
-        <p:txBody>
-          <a:bodyPr wrap="square" rtlCol="0" anchor="ctr"/>
-          <a:lstStyle/>
-          <a:p>
-            <a:pPr indent="0" marL="0">
-              <a:buNone/>
-            </a:pPr>
-            <a:r>
-              <a:rPr lang="en-US" sz="1500" dirty="0">
-                <a:solidFill>
-                  <a:srgbClr val="1A1A1A"/>
-                </a:solidFill>
-                <a:latin typeface="Calibri" pitchFamily="34" charset="0"/>
-                <a:ea typeface="Calibri" pitchFamily="34" charset="-122"/>
-                <a:cs typeface="Calibri" pitchFamily="34" charset="-120"/>
-              </a:rPr>
-              <a:t>The model's job isn't to BEAT the market everywhere — it's to COMPLEMENT it in the specific situations (comeback FG, salience 3PT) where the crowd's bias is strongest.</a:t>
-            </a:r>
-            <a:endParaRPr lang="en-US" sz="1500" dirty="0"/>
-          </a:p>
-        </p:txBody>
-      </p:sp>
-      <p:sp>
-        <p:nvSpPr>
-          <p:cNvPr id="13" name="Text 11"/>
+              <a:t>stale-mid + n=5 + mid quotes = artifact, not edge.</a:t>
+            </a:r>
+            <a:endParaRPr lang="en-US" sz="1300" dirty="0"/>
+          </a:p>
+        </p:txBody>
+      </p:sp>
+      <p:sp>
+        <p:nvSpPr>
+          <p:cNvPr id="8" name="Text 5"/>
           <p:cNvSpPr/>
           <p:nvPr/>
         </p:nvSpPr>
@@ -4937,7 +5602,7 @@
       </p:sp>
       <p:sp>
         <p:nvSpPr>
-          <p:cNvPr id="14" name="Text 12"/>
+          <p:cNvPr id="9" name="Text 6"/>
           <p:cNvSpPr/>
           <p:nvPr/>
         </p:nvSpPr>
@@ -5039,7 +5704,7 @@
                 <a:ea typeface="Georgia" pitchFamily="34" charset="-122"/>
                 <a:cs typeface="Georgia" pitchFamily="34" charset="-120"/>
               </a:rPr>
-              <a:t>Limitations &amp; future work</a:t>
+              <a:t>Connecting back to Halawi</a:t>
             </a:r>
             <a:endParaRPr lang="en-US" sz="2800" dirty="0"/>
           </a:p>
@@ -5078,7 +5743,7 @@
                 <a:ea typeface="Calibri" pitchFamily="34" charset="-122"/>
                 <a:cs typeface="Calibri" pitchFamily="34" charset="-120"/>
               </a:rPr>
-              <a:t>What we'd do next</a:t>
+              <a:t>The Aggregate column — applied to NBA</a:t>
             </a:r>
             <a:endParaRPr lang="en-US" sz="1400" dirty="0"/>
           </a:p>
@@ -5115,63 +5780,119 @@
         </p:nvSpPr>
         <p:spPr>
           <a:xfrm>
-            <a:off x="502920" y="1508760"/>
-            <a:ext cx="2926080" cy="457200"/>
-          </a:xfrm>
-          <a:prstGeom prst="rect">
-            <a:avLst/>
-          </a:prstGeom>
-          <a:noFill/>
-          <a:ln/>
-        </p:spPr>
-        <p:txBody>
-          <a:bodyPr wrap="square" rtlCol="0" anchor="ctr"/>
-          <a:lstStyle/>
-          <a:p>
-            <a:pPr indent="0" marL="0">
-              <a:buNone/>
-            </a:pPr>
-            <a:r>
-              <a:rPr lang="en-US" sz="1600" b="1" dirty="0">
+            <a:off x="502920" y="1463040"/>
+            <a:ext cx="11247120" cy="640080"/>
+          </a:xfrm>
+          <a:prstGeom prst="rect">
+            <a:avLst/>
+          </a:prstGeom>
+          <a:noFill/>
+          <a:ln/>
+        </p:spPr>
+        <p:txBody>
+          <a:bodyPr wrap="square" rtlCol="0" anchor="ctr"/>
+          <a:lstStyle/>
+          <a:p>
+            <a:pPr indent="0" marL="0">
+              <a:buNone/>
+            </a:pPr>
+            <a:r>
+              <a:rPr lang="en-US" sz="1800" b="1" dirty="0">
+                <a:solidFill>
+                  <a:srgbClr val="1A1A1A"/>
+                </a:solidFill>
+                <a:latin typeface="Calibri" pitchFamily="34" charset="0"/>
+                <a:ea typeface="Calibri" pitchFamily="34" charset="-122"/>
+                <a:cs typeface="Calibri" pitchFamily="34" charset="-120"/>
+              </a:rPr>
+              <a:t>Halawi's buried result:  </a:t>
+            </a:r>
+            <a:pPr indent="0" marL="0">
+              <a:buNone/>
+            </a:pPr>
+            <a:r>
+              <a:rPr lang="en-US" sz="1800" dirty="0">
+                <a:solidFill>
+                  <a:srgbClr val="1A1A1A"/>
+                </a:solidFill>
+                <a:latin typeface="Calibri" pitchFamily="34" charset="0"/>
+                <a:ea typeface="Calibri" pitchFamily="34" charset="-122"/>
+                <a:cs typeface="Calibri" pitchFamily="34" charset="-120"/>
+              </a:rPr>
+              <a:t>4·LM + 1·crowd &gt; either alone — because the errors are </a:t>
+            </a:r>
+            <a:pPr indent="0" marL="0">
+              <a:buNone/>
+            </a:pPr>
+            <a:r>
+              <a:rPr lang="en-US" sz="1800" b="1" i="1" dirty="0">
+                <a:solidFill>
+                  <a:srgbClr val="EEA02B"/>
+                </a:solidFill>
+                <a:latin typeface="Calibri" pitchFamily="34" charset="0"/>
+                <a:ea typeface="Calibri" pitchFamily="34" charset="-122"/>
+                <a:cs typeface="Calibri" pitchFamily="34" charset="-120"/>
+              </a:rPr>
+              <a:t>independent.</a:t>
+            </a:r>
+            <a:endParaRPr lang="en-US" sz="1800" dirty="0"/>
+          </a:p>
+        </p:txBody>
+      </p:sp>
+      <p:sp>
+        <p:nvSpPr>
+          <p:cNvPr id="6" name="Text 4"/>
+          <p:cNvSpPr/>
+          <p:nvPr/>
+        </p:nvSpPr>
+        <p:spPr>
+          <a:xfrm>
+            <a:off x="502920" y="2194560"/>
+            <a:ext cx="11247120" cy="914400"/>
+          </a:xfrm>
+          <a:prstGeom prst="rect">
+            <a:avLst/>
+          </a:prstGeom>
+          <a:noFill/>
+          <a:ln/>
+        </p:spPr>
+        <p:txBody>
+          <a:bodyPr wrap="square" rtlCol="0" anchor="ctr"/>
+          <a:lstStyle/>
+          <a:p>
+            <a:pPr indent="0" marL="0">
+              <a:buNone/>
+            </a:pPr>
+            <a:r>
+              <a:rPr lang="en-US" sz="1800" dirty="0">
+                <a:solidFill>
+                  <a:srgbClr val="1A1A1A"/>
+                </a:solidFill>
+                <a:latin typeface="Calibri" pitchFamily="34" charset="0"/>
+                <a:ea typeface="Calibri" pitchFamily="34" charset="-122"/>
+                <a:cs typeface="Calibri" pitchFamily="34" charset="-120"/>
+              </a:rPr>
+              <a:t>Our structural model and the live market are also </a:t>
+            </a:r>
+            <a:pPr indent="0" marL="0">
+              <a:buNone/>
+            </a:pPr>
+            <a:r>
+              <a:rPr lang="en-US" sz="1800" b="1" dirty="0">
                 <a:solidFill>
                   <a:srgbClr val="0B2545"/>
                 </a:solidFill>
-                <a:latin typeface="Georgia" pitchFamily="34" charset="0"/>
-                <a:ea typeface="Georgia" pitchFamily="34" charset="-122"/>
-                <a:cs typeface="Georgia" pitchFamily="34" charset="-120"/>
-              </a:rPr>
-              <a:t>Sample size</a:t>
-            </a:r>
-            <a:endParaRPr lang="en-US" sz="1600" dirty="0"/>
-          </a:p>
-        </p:txBody>
-      </p:sp>
-      <p:sp>
-        <p:nvSpPr>
-          <p:cNvPr id="6" name="Text 4"/>
-          <p:cNvSpPr/>
-          <p:nvPr/>
-        </p:nvSpPr>
-        <p:spPr>
-          <a:xfrm>
-            <a:off x="3520440" y="1508760"/>
-            <a:ext cx="8229600" cy="1005840"/>
-          </a:xfrm>
-          <a:prstGeom prst="rect">
-            <a:avLst/>
-          </a:prstGeom>
-          <a:noFill/>
-          <a:ln/>
-        </p:spPr>
-        <p:txBody>
-          <a:bodyPr wrap="square" rtlCol="0" anchor="ctr"/>
-          <a:lstStyle/>
-          <a:p>
-            <a:pPr indent="0" marL="0">
-              <a:buNone/>
-            </a:pPr>
-            <a:r>
-              <a:rPr lang="en-US" sz="1400" dirty="0">
+                <a:latin typeface="Calibri" pitchFamily="34" charset="0"/>
+                <a:ea typeface="Calibri" pitchFamily="34" charset="-122"/>
+                <a:cs typeface="Calibri" pitchFamily="34" charset="-120"/>
+              </a:rPr>
+              <a:t>partly independent error sources</a:t>
+            </a:r>
+            <a:pPr indent="0" marL="0">
+              <a:buNone/>
+            </a:pPr>
+            <a:r>
+              <a:rPr lang="en-US" sz="1800" dirty="0">
                 <a:solidFill>
                   <a:srgbClr val="1A1A1A"/>
                 </a:solidFill>
@@ -5179,7 +5900,178 @@
                 <a:ea typeface="Calibri" pitchFamily="34" charset="-122"/>
                 <a:cs typeface="Calibri" pitchFamily="34" charset="-120"/>
               </a:rPr>
-              <a:t>Powered backtest needs ~1,000 liquid-market games. Two paths: paid the-odds-api historical (~$59, one month) or playoff capture (free, accumulating).</a:t>
+              <a:t> — model reads game state, market absorbs sentiment + inside flow.</a:t>
+            </a:r>
+            <a:endParaRPr lang="en-US" sz="1800" dirty="0"/>
+          </a:p>
+        </p:txBody>
+      </p:sp>
+      <p:sp>
+        <p:nvSpPr>
+          <p:cNvPr id="7" name="Shape 5"/>
+          <p:cNvSpPr/>
+          <p:nvPr/>
+        </p:nvSpPr>
+        <p:spPr>
+          <a:xfrm>
+            <a:off x="502920" y="3291840"/>
+            <a:ext cx="11247120" cy="1371600"/>
+          </a:xfrm>
+          <a:prstGeom prst="roundRect">
+            <a:avLst>
+              <a:gd name="adj" fmla="val 5333"/>
+            </a:avLst>
+          </a:prstGeom>
+          <a:solidFill>
+            <a:srgbClr val="EEF3F8"/>
+          </a:solidFill>
+          <a:ln w="15240">
+            <a:solidFill>
+              <a:srgbClr val="1C7293"/>
+            </a:solidFill>
+            <a:prstDash val="solid"/>
+          </a:ln>
+        </p:spPr>
+      </p:sp>
+      <p:sp>
+        <p:nvSpPr>
+          <p:cNvPr id="8" name="Text 6"/>
+          <p:cNvSpPr/>
+          <p:nvPr/>
+        </p:nvSpPr>
+        <p:spPr>
+          <a:xfrm>
+            <a:off x="685800" y="3383280"/>
+            <a:ext cx="10881360" cy="868680"/>
+          </a:xfrm>
+          <a:prstGeom prst="rect">
+            <a:avLst/>
+          </a:prstGeom>
+          <a:noFill/>
+          <a:ln/>
+        </p:spPr>
+        <p:txBody>
+          <a:bodyPr wrap="square" rtlCol="0" anchor="ctr"/>
+          <a:lstStyle/>
+          <a:p>
+            <a:pPr algn="ctr" indent="0" marL="0">
+              <a:buNone/>
+            </a:pPr>
+            <a:r>
+              <a:rPr lang="en-US" sz="1800" b="1" dirty="0">
+                <a:solidFill>
+                  <a:srgbClr val="0B2545"/>
+                </a:solidFill>
+                <a:latin typeface="Courier New" pitchFamily="34" charset="0"/>
+                <a:ea typeface="Courier New" pitchFamily="34" charset="-122"/>
+                <a:cs typeface="Courier New" pitchFamily="34" charset="-120"/>
+              </a:rPr>
+              <a:t>p̂_aggregate  =  w · p_model  +  ( 1 − w ) · p_market_devig</a:t>
+            </a:r>
+            <a:endParaRPr lang="en-US" sz="1800" dirty="0"/>
+          </a:p>
+        </p:txBody>
+      </p:sp>
+      <p:sp>
+        <p:nvSpPr>
+          <p:cNvPr id="9" name="Text 7"/>
+          <p:cNvSpPr/>
+          <p:nvPr/>
+        </p:nvSpPr>
+        <p:spPr>
+          <a:xfrm>
+            <a:off x="685800" y="4206240"/>
+            <a:ext cx="10881360" cy="365760"/>
+          </a:xfrm>
+          <a:prstGeom prst="rect">
+            <a:avLst/>
+          </a:prstGeom>
+          <a:noFill/>
+          <a:ln/>
+        </p:spPr>
+        <p:txBody>
+          <a:bodyPr wrap="square" rtlCol="0" anchor="ctr"/>
+          <a:lstStyle/>
+          <a:p>
+            <a:pPr algn="ctr" indent="0" marL="0">
+              <a:buNone/>
+            </a:pPr>
+            <a:r>
+              <a:rPr lang="en-US" sz="1200" i="1" dirty="0">
+                <a:solidFill>
+                  <a:srgbClr val="13315C"/>
+                </a:solidFill>
+                <a:latin typeface="Calibri" pitchFamily="34" charset="0"/>
+                <a:ea typeface="Calibri" pitchFamily="34" charset="-122"/>
+                <a:cs typeface="Calibri" pitchFamily="34" charset="-120"/>
+              </a:rPr>
+              <a:t>the 'aggregate' variant (#3 in the planned table) — weight from validation Brier · aggregate's Brier ≤ min(components)</a:t>
+            </a:r>
+            <a:endParaRPr lang="en-US" sz="1200" dirty="0"/>
+          </a:p>
+        </p:txBody>
+      </p:sp>
+      <p:sp>
+        <p:nvSpPr>
+          <p:cNvPr id="10" name="Shape 8"/>
+          <p:cNvSpPr/>
+          <p:nvPr/>
+        </p:nvSpPr>
+        <p:spPr>
+          <a:xfrm>
+            <a:off x="502920" y="4846320"/>
+            <a:ext cx="11247120" cy="1508760"/>
+          </a:xfrm>
+          <a:prstGeom prst="roundRect">
+            <a:avLst>
+              <a:gd name="adj" fmla="val 6061"/>
+            </a:avLst>
+          </a:prstGeom>
+          <a:solidFill>
+            <a:srgbClr val="F6F6F2"/>
+          </a:solidFill>
+          <a:ln w="19050">
+            <a:solidFill>
+              <a:srgbClr val="1C7293"/>
+            </a:solidFill>
+            <a:prstDash val="solid"/>
+          </a:ln>
+        </p:spPr>
+      </p:sp>
+      <p:sp>
+        <p:nvSpPr>
+          <p:cNvPr id="11" name="Text 9"/>
+          <p:cNvSpPr/>
+          <p:nvPr/>
+        </p:nvSpPr>
+        <p:spPr>
+          <a:xfrm>
+            <a:off x="777240" y="4983480"/>
+            <a:ext cx="10698480" cy="365760"/>
+          </a:xfrm>
+          <a:prstGeom prst="rect">
+            <a:avLst/>
+          </a:prstGeom>
+          <a:noFill/>
+          <a:ln/>
+        </p:spPr>
+        <p:txBody>
+          <a:bodyPr wrap="square" rtlCol="0" anchor="ctr"/>
+          <a:lstStyle/>
+          <a:p>
+            <a:pPr indent="0" marL="0">
+              <a:buNone/>
+            </a:pPr>
+            <a:r>
+              <a:rPr lang="en-US" sz="1400" i="1" dirty="0">
+                <a:solidFill>
+                  <a:srgbClr val="13315C"/>
+                </a:solidFill>
+                <a:latin typeface="Calibri" pitchFamily="34" charset="0"/>
+                <a:ea typeface="Calibri" pitchFamily="34" charset="-122"/>
+                <a:cs typeface="Calibri" pitchFamily="34" charset="-120"/>
+              </a:rPr>
+              <a:t>Reframing:</a:t>
             </a:r>
             <a:endParaRPr lang="en-US" sz="1400" dirty="0"/>
           </a:p>
@@ -5187,69 +6079,30 @@
       </p:sp>
       <p:sp>
         <p:nvSpPr>
-          <p:cNvPr id="7" name="Text 5"/>
-          <p:cNvSpPr/>
-          <p:nvPr/>
-        </p:nvSpPr>
-        <p:spPr>
-          <a:xfrm>
-            <a:off x="502920" y="2651760"/>
-            <a:ext cx="2926080" cy="457200"/>
-          </a:xfrm>
-          <a:prstGeom prst="rect">
-            <a:avLst/>
-          </a:prstGeom>
-          <a:noFill/>
-          <a:ln/>
-        </p:spPr>
-        <p:txBody>
-          <a:bodyPr wrap="square" rtlCol="0" anchor="ctr"/>
-          <a:lstStyle/>
-          <a:p>
-            <a:pPr indent="0" marL="0">
-              <a:buNone/>
-            </a:pPr>
-            <a:r>
-              <a:rPr lang="en-US" sz="1600" b="1" dirty="0">
-                <a:solidFill>
-                  <a:srgbClr val="0B2545"/>
-                </a:solidFill>
-                <a:latin typeface="Georgia" pitchFamily="34" charset="0"/>
-                <a:ea typeface="Georgia" pitchFamily="34" charset="-122"/>
-                <a:cs typeface="Georgia" pitchFamily="34" charset="-120"/>
-              </a:rPr>
-              <a:t>Horizon</a:t>
-            </a:r>
-            <a:endParaRPr lang="en-US" sz="1600" dirty="0"/>
-          </a:p>
-        </p:txBody>
-      </p:sp>
-      <p:sp>
-        <p:nvSpPr>
-          <p:cNvPr id="8" name="Text 6"/>
-          <p:cNvSpPr/>
-          <p:nvPr/>
-        </p:nvSpPr>
-        <p:spPr>
-          <a:xfrm>
-            <a:off x="3520440" y="2651760"/>
-            <a:ext cx="8229600" cy="1005840"/>
-          </a:xfrm>
-          <a:prstGeom prst="rect">
-            <a:avLst/>
-          </a:prstGeom>
-          <a:noFill/>
-          <a:ln/>
-        </p:spPr>
-        <p:txBody>
-          <a:bodyPr wrap="square" rtlCol="0" anchor="ctr"/>
-          <a:lstStyle/>
-          <a:p>
-            <a:pPr indent="0" marL="0">
-              <a:buNone/>
-            </a:pPr>
-            <a:r>
-              <a:rPr lang="en-US" sz="1400" dirty="0">
+          <p:cNvPr id="12" name="Text 10"/>
+          <p:cNvSpPr/>
+          <p:nvPr/>
+        </p:nvSpPr>
+        <p:spPr>
+          <a:xfrm>
+            <a:off x="777240" y="5349240"/>
+            <a:ext cx="10698480" cy="914400"/>
+          </a:xfrm>
+          <a:prstGeom prst="rect">
+            <a:avLst/>
+          </a:prstGeom>
+          <a:noFill/>
+          <a:ln/>
+        </p:spPr>
+        <p:txBody>
+          <a:bodyPr wrap="square" rtlCol="0" anchor="ctr"/>
+          <a:lstStyle/>
+          <a:p>
+            <a:pPr indent="0" marL="0">
+              <a:buNone/>
+            </a:pPr>
+            <a:r>
+              <a:rPr lang="en-US" sz="1500" dirty="0">
                 <a:solidFill>
                   <a:srgbClr val="1A1A1A"/>
                 </a:solidFill>
@@ -5257,165 +6110,9 @@
                 <a:ea typeface="Calibri" pitchFamily="34" charset="-122"/>
                 <a:cs typeface="Calibri" pitchFamily="34" charset="-120"/>
               </a:rPr>
-              <a:t>V2 is 1st-half winner; live demo extended to full-game via parallel model (Brier 0.207). Snapshots are 1H-only — 2nd-half coverage requires rebuilding.</a:t>
-            </a:r>
-            <a:endParaRPr lang="en-US" sz="1400" dirty="0"/>
-          </a:p>
-        </p:txBody>
-      </p:sp>
-      <p:sp>
-        <p:nvSpPr>
-          <p:cNvPr id="9" name="Text 7"/>
-          <p:cNvSpPr/>
-          <p:nvPr/>
-        </p:nvSpPr>
-        <p:spPr>
-          <a:xfrm>
-            <a:off x="502920" y="3794760"/>
-            <a:ext cx="2926080" cy="457200"/>
-          </a:xfrm>
-          <a:prstGeom prst="rect">
-            <a:avLst/>
-          </a:prstGeom>
-          <a:noFill/>
-          <a:ln/>
-        </p:spPr>
-        <p:txBody>
-          <a:bodyPr wrap="square" rtlCol="0" anchor="ctr"/>
-          <a:lstStyle/>
-          <a:p>
-            <a:pPr indent="0" marL="0">
-              <a:buNone/>
-            </a:pPr>
-            <a:r>
-              <a:rPr lang="en-US" sz="1600" b="1" dirty="0">
-                <a:solidFill>
-                  <a:srgbClr val="0B2545"/>
-                </a:solidFill>
-                <a:latin typeface="Georgia" pitchFamily="34" charset="0"/>
-                <a:ea typeface="Georgia" pitchFamily="34" charset="-122"/>
-                <a:cs typeface="Georgia" pitchFamily="34" charset="-120"/>
-              </a:rPr>
-              <a:t>Market reactivity</a:t>
-            </a:r>
-            <a:endParaRPr lang="en-US" sz="1600" dirty="0"/>
-          </a:p>
-        </p:txBody>
-      </p:sp>
-      <p:sp>
-        <p:nvSpPr>
-          <p:cNvPr id="10" name="Text 8"/>
-          <p:cNvSpPr/>
-          <p:nvPr/>
-        </p:nvSpPr>
-        <p:spPr>
-          <a:xfrm>
-            <a:off x="3520440" y="3794760"/>
-            <a:ext cx="8229600" cy="1005840"/>
-          </a:xfrm>
-          <a:prstGeom prst="rect">
-            <a:avLst/>
-          </a:prstGeom>
-          <a:noFill/>
-          <a:ln/>
-        </p:spPr>
-        <p:txBody>
-          <a:bodyPr wrap="square" rtlCol="0" anchor="ctr"/>
-          <a:lstStyle/>
-          <a:p>
-            <a:pPr indent="0" marL="0">
-              <a:buNone/>
-            </a:pPr>
-            <a:r>
-              <a:rPr lang="en-US" sz="1400" dirty="0">
-                <a:solidFill>
-                  <a:srgbClr val="1A1A1A"/>
-                </a:solidFill>
-                <a:latin typeface="Calibri" pitchFamily="34" charset="0"/>
-                <a:ea typeface="Calibri" pitchFamily="34" charset="-122"/>
-                <a:cs typeface="Calibri" pitchFamily="34" charset="-120"/>
-              </a:rPr>
-              <a:t>Real deployment would face adverse selection + sportsbook limits. Kalshi (peer-to-peer) sidesteps the account-limit issue.</a:t>
-            </a:r>
-            <a:endParaRPr lang="en-US" sz="1400" dirty="0"/>
-          </a:p>
-        </p:txBody>
-      </p:sp>
-      <p:sp>
-        <p:nvSpPr>
-          <p:cNvPr id="11" name="Text 9"/>
-          <p:cNvSpPr/>
-          <p:nvPr/>
-        </p:nvSpPr>
-        <p:spPr>
-          <a:xfrm>
-            <a:off x="502920" y="4937760"/>
-            <a:ext cx="2926080" cy="457200"/>
-          </a:xfrm>
-          <a:prstGeom prst="rect">
-            <a:avLst/>
-          </a:prstGeom>
-          <a:noFill/>
-          <a:ln/>
-        </p:spPr>
-        <p:txBody>
-          <a:bodyPr wrap="square" rtlCol="0" anchor="ctr"/>
-          <a:lstStyle/>
-          <a:p>
-            <a:pPr indent="0" marL="0">
-              <a:buNone/>
-            </a:pPr>
-            <a:r>
-              <a:rPr lang="en-US" sz="1600" b="1" dirty="0">
-                <a:solidFill>
-                  <a:srgbClr val="0B2545"/>
-                </a:solidFill>
-                <a:latin typeface="Georgia" pitchFamily="34" charset="0"/>
-                <a:ea typeface="Georgia" pitchFamily="34" charset="-122"/>
-                <a:cs typeface="Georgia" pitchFamily="34" charset="-120"/>
-              </a:rPr>
-              <a:t>Variants V1/V3/V4/V6</a:t>
-            </a:r>
-            <a:endParaRPr lang="en-US" sz="1600" dirty="0"/>
-          </a:p>
-        </p:txBody>
-      </p:sp>
-      <p:sp>
-        <p:nvSpPr>
-          <p:cNvPr id="12" name="Text 10"/>
-          <p:cNvSpPr/>
-          <p:nvPr/>
-        </p:nvSpPr>
-        <p:spPr>
-          <a:xfrm>
-            <a:off x="3520440" y="4937760"/>
-            <a:ext cx="8229600" cy="1005840"/>
-          </a:xfrm>
-          <a:prstGeom prst="rect">
-            <a:avLst/>
-          </a:prstGeom>
-          <a:noFill/>
-          <a:ln/>
-        </p:spPr>
-        <p:txBody>
-          <a:bodyPr wrap="square" rtlCol="0" anchor="ctr"/>
-          <a:lstStyle/>
-          <a:p>
-            <a:pPr indent="0" marL="0">
-              <a:buNone/>
-            </a:pPr>
-            <a:r>
-              <a:rPr lang="en-US" sz="1400" dirty="0">
-                <a:solidFill>
-                  <a:srgbClr val="1A1A1A"/>
-                </a:solidFill>
-                <a:latin typeface="Calibri" pitchFamily="34" charset="0"/>
-                <a:ea typeface="Calibri" pitchFamily="34" charset="-122"/>
-                <a:cs typeface="Calibri" pitchFamily="34" charset="-120"/>
-              </a:rPr>
-              <a:t>Architecturally ready in the shared eval harness; need multi-venue in-play history to fit &amp; evaluate.</a:t>
-            </a:r>
-            <a:endParaRPr lang="en-US" sz="1400" dirty="0"/>
+              <a:t>The model's job isn't to BEAT the market everywhere — it's to COMPLEMENT it in the specific situations (comeback FG, salience 3PT) where the crowd's bias is strongest.</a:t>
+            </a:r>
+            <a:endParaRPr lang="en-US" sz="1500" dirty="0"/>
           </a:p>
         </p:txBody>
       </p:sp>
@@ -5562,6 +6259,529 @@
                 <a:ea typeface="Georgia" pitchFamily="34" charset="-122"/>
                 <a:cs typeface="Georgia" pitchFamily="34" charset="-120"/>
               </a:rPr>
+              <a:t>Limitations &amp; future work</a:t>
+            </a:r>
+            <a:endParaRPr lang="en-US" sz="2800" dirty="0"/>
+          </a:p>
+        </p:txBody>
+      </p:sp>
+      <p:sp>
+        <p:nvSpPr>
+          <p:cNvPr id="3" name="Text 1"/>
+          <p:cNvSpPr/>
+          <p:nvPr/>
+        </p:nvSpPr>
+        <p:spPr>
+          <a:xfrm>
+            <a:off x="502920" y="932688"/>
+            <a:ext cx="11247120" cy="365760"/>
+          </a:xfrm>
+          <a:prstGeom prst="rect">
+            <a:avLst/>
+          </a:prstGeom>
+          <a:noFill/>
+          <a:ln/>
+        </p:spPr>
+        <p:txBody>
+          <a:bodyPr wrap="square" rtlCol="0" anchor="ctr"/>
+          <a:lstStyle/>
+          <a:p>
+            <a:pPr indent="0" marL="0">
+              <a:buNone/>
+            </a:pPr>
+            <a:r>
+              <a:rPr lang="en-US" sz="1400" i="1" dirty="0">
+                <a:solidFill>
+                  <a:srgbClr val="13315C"/>
+                </a:solidFill>
+                <a:latin typeface="Calibri" pitchFamily="34" charset="0"/>
+                <a:ea typeface="Calibri" pitchFamily="34" charset="-122"/>
+                <a:cs typeface="Calibri" pitchFamily="34" charset="-120"/>
+              </a:rPr>
+              <a:t>What we'd do next</a:t>
+            </a:r>
+            <a:endParaRPr lang="en-US" sz="1400" dirty="0"/>
+          </a:p>
+        </p:txBody>
+      </p:sp>
+      <p:sp>
+        <p:nvSpPr>
+          <p:cNvPr id="4" name="Shape 2"/>
+          <p:cNvSpPr/>
+          <p:nvPr/>
+        </p:nvSpPr>
+        <p:spPr>
+          <a:xfrm>
+            <a:off x="502920" y="1298448"/>
+            <a:ext cx="11247120" cy="0"/>
+          </a:xfrm>
+          <a:prstGeom prst="line">
+            <a:avLst/>
+          </a:prstGeom>
+          <a:noFill/>
+          <a:ln w="25400">
+            <a:solidFill>
+              <a:srgbClr val="1C7293"/>
+            </a:solidFill>
+            <a:prstDash val="solid"/>
+          </a:ln>
+        </p:spPr>
+      </p:sp>
+      <p:sp>
+        <p:nvSpPr>
+          <p:cNvPr id="5" name="Text 3"/>
+          <p:cNvSpPr/>
+          <p:nvPr/>
+        </p:nvSpPr>
+        <p:spPr>
+          <a:xfrm>
+            <a:off x="502920" y="1508760"/>
+            <a:ext cx="2926080" cy="457200"/>
+          </a:xfrm>
+          <a:prstGeom prst="rect">
+            <a:avLst/>
+          </a:prstGeom>
+          <a:noFill/>
+          <a:ln/>
+        </p:spPr>
+        <p:txBody>
+          <a:bodyPr wrap="square" rtlCol="0" anchor="ctr"/>
+          <a:lstStyle/>
+          <a:p>
+            <a:pPr indent="0" marL="0">
+              <a:buNone/>
+            </a:pPr>
+            <a:r>
+              <a:rPr lang="en-US" sz="1600" b="1" dirty="0">
+                <a:solidFill>
+                  <a:srgbClr val="0B2545"/>
+                </a:solidFill>
+                <a:latin typeface="Georgia" pitchFamily="34" charset="0"/>
+                <a:ea typeface="Georgia" pitchFamily="34" charset="-122"/>
+                <a:cs typeface="Georgia" pitchFamily="34" charset="-120"/>
+              </a:rPr>
+              <a:t>Sample size</a:t>
+            </a:r>
+            <a:endParaRPr lang="en-US" sz="1600" dirty="0"/>
+          </a:p>
+        </p:txBody>
+      </p:sp>
+      <p:sp>
+        <p:nvSpPr>
+          <p:cNvPr id="6" name="Text 4"/>
+          <p:cNvSpPr/>
+          <p:nvPr/>
+        </p:nvSpPr>
+        <p:spPr>
+          <a:xfrm>
+            <a:off x="3520440" y="1508760"/>
+            <a:ext cx="8229600" cy="1005840"/>
+          </a:xfrm>
+          <a:prstGeom prst="rect">
+            <a:avLst/>
+          </a:prstGeom>
+          <a:noFill/>
+          <a:ln/>
+        </p:spPr>
+        <p:txBody>
+          <a:bodyPr wrap="square" rtlCol="0" anchor="ctr"/>
+          <a:lstStyle/>
+          <a:p>
+            <a:pPr indent="0" marL="0">
+              <a:buNone/>
+            </a:pPr>
+            <a:r>
+              <a:rPr lang="en-US" sz="1400" dirty="0">
+                <a:solidFill>
+                  <a:srgbClr val="1A1A1A"/>
+                </a:solidFill>
+                <a:latin typeface="Calibri" pitchFamily="34" charset="0"/>
+                <a:ea typeface="Calibri" pitchFamily="34" charset="-122"/>
+                <a:cs typeface="Calibri" pitchFamily="34" charset="-120"/>
+              </a:rPr>
+              <a:t>Powered backtest needs ~1,000 liquid-market games. Two paths: paid the-odds-api historical (~$59, one month) or playoff capture (free, accumulating).</a:t>
+            </a:r>
+            <a:endParaRPr lang="en-US" sz="1400" dirty="0"/>
+          </a:p>
+        </p:txBody>
+      </p:sp>
+      <p:sp>
+        <p:nvSpPr>
+          <p:cNvPr id="7" name="Text 5"/>
+          <p:cNvSpPr/>
+          <p:nvPr/>
+        </p:nvSpPr>
+        <p:spPr>
+          <a:xfrm>
+            <a:off x="502920" y="2651760"/>
+            <a:ext cx="2926080" cy="457200"/>
+          </a:xfrm>
+          <a:prstGeom prst="rect">
+            <a:avLst/>
+          </a:prstGeom>
+          <a:noFill/>
+          <a:ln/>
+        </p:spPr>
+        <p:txBody>
+          <a:bodyPr wrap="square" rtlCol="0" anchor="ctr"/>
+          <a:lstStyle/>
+          <a:p>
+            <a:pPr indent="0" marL="0">
+              <a:buNone/>
+            </a:pPr>
+            <a:r>
+              <a:rPr lang="en-US" sz="1600" b="1" dirty="0">
+                <a:solidFill>
+                  <a:srgbClr val="0B2545"/>
+                </a:solidFill>
+                <a:latin typeface="Georgia" pitchFamily="34" charset="0"/>
+                <a:ea typeface="Georgia" pitchFamily="34" charset="-122"/>
+                <a:cs typeface="Georgia" pitchFamily="34" charset="-120"/>
+              </a:rPr>
+              <a:t>Horizon</a:t>
+            </a:r>
+            <a:endParaRPr lang="en-US" sz="1600" dirty="0"/>
+          </a:p>
+        </p:txBody>
+      </p:sp>
+      <p:sp>
+        <p:nvSpPr>
+          <p:cNvPr id="8" name="Text 6"/>
+          <p:cNvSpPr/>
+          <p:nvPr/>
+        </p:nvSpPr>
+        <p:spPr>
+          <a:xfrm>
+            <a:off x="3520440" y="2651760"/>
+            <a:ext cx="8229600" cy="1005840"/>
+          </a:xfrm>
+          <a:prstGeom prst="rect">
+            <a:avLst/>
+          </a:prstGeom>
+          <a:noFill/>
+          <a:ln/>
+        </p:spPr>
+        <p:txBody>
+          <a:bodyPr wrap="square" rtlCol="0" anchor="ctr"/>
+          <a:lstStyle/>
+          <a:p>
+            <a:pPr indent="0" marL="0">
+              <a:buNone/>
+            </a:pPr>
+            <a:r>
+              <a:rPr lang="en-US" sz="1400" dirty="0">
+                <a:solidFill>
+                  <a:srgbClr val="1A1A1A"/>
+                </a:solidFill>
+                <a:latin typeface="Calibri" pitchFamily="34" charset="0"/>
+                <a:ea typeface="Calibri" pitchFamily="34" charset="-122"/>
+                <a:cs typeface="Calibri" pitchFamily="34" charset="-120"/>
+              </a:rPr>
+              <a:t>V2 is 1st-half winner; live demo extended to full-game via parallel model (Brier 0.207). Snapshots are 1H-only — 2nd-half coverage requires rebuilding.</a:t>
+            </a:r>
+            <a:endParaRPr lang="en-US" sz="1400" dirty="0"/>
+          </a:p>
+        </p:txBody>
+      </p:sp>
+      <p:sp>
+        <p:nvSpPr>
+          <p:cNvPr id="9" name="Text 7"/>
+          <p:cNvSpPr/>
+          <p:nvPr/>
+        </p:nvSpPr>
+        <p:spPr>
+          <a:xfrm>
+            <a:off x="502920" y="3794760"/>
+            <a:ext cx="2926080" cy="457200"/>
+          </a:xfrm>
+          <a:prstGeom prst="rect">
+            <a:avLst/>
+          </a:prstGeom>
+          <a:noFill/>
+          <a:ln/>
+        </p:spPr>
+        <p:txBody>
+          <a:bodyPr wrap="square" rtlCol="0" anchor="ctr"/>
+          <a:lstStyle/>
+          <a:p>
+            <a:pPr indent="0" marL="0">
+              <a:buNone/>
+            </a:pPr>
+            <a:r>
+              <a:rPr lang="en-US" sz="1600" b="1" dirty="0">
+                <a:solidFill>
+                  <a:srgbClr val="0B2545"/>
+                </a:solidFill>
+                <a:latin typeface="Georgia" pitchFamily="34" charset="0"/>
+                <a:ea typeface="Georgia" pitchFamily="34" charset="-122"/>
+                <a:cs typeface="Georgia" pitchFamily="34" charset="-120"/>
+              </a:rPr>
+              <a:t>Market reactivity</a:t>
+            </a:r>
+            <a:endParaRPr lang="en-US" sz="1600" dirty="0"/>
+          </a:p>
+        </p:txBody>
+      </p:sp>
+      <p:sp>
+        <p:nvSpPr>
+          <p:cNvPr id="10" name="Text 8"/>
+          <p:cNvSpPr/>
+          <p:nvPr/>
+        </p:nvSpPr>
+        <p:spPr>
+          <a:xfrm>
+            <a:off x="3520440" y="3794760"/>
+            <a:ext cx="8229600" cy="1005840"/>
+          </a:xfrm>
+          <a:prstGeom prst="rect">
+            <a:avLst/>
+          </a:prstGeom>
+          <a:noFill/>
+          <a:ln/>
+        </p:spPr>
+        <p:txBody>
+          <a:bodyPr wrap="square" rtlCol="0" anchor="ctr"/>
+          <a:lstStyle/>
+          <a:p>
+            <a:pPr indent="0" marL="0">
+              <a:buNone/>
+            </a:pPr>
+            <a:r>
+              <a:rPr lang="en-US" sz="1400" dirty="0">
+                <a:solidFill>
+                  <a:srgbClr val="1A1A1A"/>
+                </a:solidFill>
+                <a:latin typeface="Calibri" pitchFamily="34" charset="0"/>
+                <a:ea typeface="Calibri" pitchFamily="34" charset="-122"/>
+                <a:cs typeface="Calibri" pitchFamily="34" charset="-120"/>
+              </a:rPr>
+              <a:t>Real deployment would face adverse selection + sportsbook limits. Kalshi (peer-to-peer) sidesteps the account-limit issue.</a:t>
+            </a:r>
+            <a:endParaRPr lang="en-US" sz="1400" dirty="0"/>
+          </a:p>
+        </p:txBody>
+      </p:sp>
+      <p:sp>
+        <p:nvSpPr>
+          <p:cNvPr id="11" name="Text 9"/>
+          <p:cNvSpPr/>
+          <p:nvPr/>
+        </p:nvSpPr>
+        <p:spPr>
+          <a:xfrm>
+            <a:off x="502920" y="4937760"/>
+            <a:ext cx="2926080" cy="457200"/>
+          </a:xfrm>
+          <a:prstGeom prst="rect">
+            <a:avLst/>
+          </a:prstGeom>
+          <a:noFill/>
+          <a:ln/>
+        </p:spPr>
+        <p:txBody>
+          <a:bodyPr wrap="square" rtlCol="0" anchor="ctr"/>
+          <a:lstStyle/>
+          <a:p>
+            <a:pPr indent="0" marL="0">
+              <a:buNone/>
+            </a:pPr>
+            <a:r>
+              <a:rPr lang="en-US" sz="1600" b="1" dirty="0">
+                <a:solidFill>
+                  <a:srgbClr val="0B2545"/>
+                </a:solidFill>
+                <a:latin typeface="Georgia" pitchFamily="34" charset="0"/>
+                <a:ea typeface="Georgia" pitchFamily="34" charset="-122"/>
+                <a:cs typeface="Georgia" pitchFamily="34" charset="-120"/>
+              </a:rPr>
+              <a:t>Variants V1/V3/V4/V6</a:t>
+            </a:r>
+            <a:endParaRPr lang="en-US" sz="1600" dirty="0"/>
+          </a:p>
+        </p:txBody>
+      </p:sp>
+      <p:sp>
+        <p:nvSpPr>
+          <p:cNvPr id="12" name="Text 10"/>
+          <p:cNvSpPr/>
+          <p:nvPr/>
+        </p:nvSpPr>
+        <p:spPr>
+          <a:xfrm>
+            <a:off x="3520440" y="4937760"/>
+            <a:ext cx="8229600" cy="1005840"/>
+          </a:xfrm>
+          <a:prstGeom prst="rect">
+            <a:avLst/>
+          </a:prstGeom>
+          <a:noFill/>
+          <a:ln/>
+        </p:spPr>
+        <p:txBody>
+          <a:bodyPr wrap="square" rtlCol="0" anchor="ctr"/>
+          <a:lstStyle/>
+          <a:p>
+            <a:pPr indent="0" marL="0">
+              <a:buNone/>
+            </a:pPr>
+            <a:r>
+              <a:rPr lang="en-US" sz="1400" dirty="0">
+                <a:solidFill>
+                  <a:srgbClr val="1A1A1A"/>
+                </a:solidFill>
+                <a:latin typeface="Calibri" pitchFamily="34" charset="0"/>
+                <a:ea typeface="Calibri" pitchFamily="34" charset="-122"/>
+                <a:cs typeface="Calibri" pitchFamily="34" charset="-120"/>
+              </a:rPr>
+              <a:t>Architecturally ready in the shared eval harness; need multi-venue in-play history to fit &amp; evaluate.</a:t>
+            </a:r>
+            <a:endParaRPr lang="en-US" sz="1400" dirty="0"/>
+          </a:p>
+        </p:txBody>
+      </p:sp>
+      <p:sp>
+        <p:nvSpPr>
+          <p:cNvPr id="13" name="Text 11"/>
+          <p:cNvSpPr/>
+          <p:nvPr/>
+        </p:nvSpPr>
+        <p:spPr>
+          <a:xfrm>
+            <a:off x="502920" y="6492240"/>
+            <a:ext cx="7315200" cy="274320"/>
+          </a:xfrm>
+          <a:prstGeom prst="rect">
+            <a:avLst/>
+          </a:prstGeom>
+          <a:noFill/>
+          <a:ln/>
+        </p:spPr>
+        <p:txBody>
+          <a:bodyPr wrap="square" rtlCol="0" anchor="ctr"/>
+          <a:lstStyle/>
+          <a:p>
+            <a:pPr indent="0" marL="0">
+              <a:buNone/>
+            </a:pPr>
+            <a:r>
+              <a:rPr lang="en-US" sz="1000" dirty="0">
+                <a:solidFill>
+                  <a:srgbClr val="8DA9C4"/>
+                </a:solidFill>
+                <a:latin typeface="Calibri" pitchFamily="34" charset="0"/>
+                <a:ea typeface="Calibri" pitchFamily="34" charset="-122"/>
+                <a:cs typeface="Calibri" pitchFamily="34" charset="-120"/>
+              </a:rPr>
+              <a:t>STATS 211 · NBA Mispricing · Sit &amp; Manathattai</a:t>
+            </a:r>
+            <a:endParaRPr lang="en-US" sz="1000" dirty="0"/>
+          </a:p>
+        </p:txBody>
+      </p:sp>
+      <p:sp>
+        <p:nvSpPr>
+          <p:cNvPr id="14" name="Text 12"/>
+          <p:cNvSpPr/>
+          <p:nvPr/>
+        </p:nvSpPr>
+        <p:spPr>
+          <a:xfrm>
+            <a:off x="11384280" y="6492240"/>
+            <a:ext cx="411480" cy="274320"/>
+          </a:xfrm>
+          <a:prstGeom prst="rect">
+            <a:avLst/>
+          </a:prstGeom>
+          <a:noFill/>
+          <a:ln/>
+        </p:spPr>
+        <p:txBody>
+          <a:bodyPr wrap="square" rtlCol="0" anchor="ctr"/>
+          <a:lstStyle/>
+          <a:p>
+            <a:pPr algn="r" indent="0" marL="0">
+              <a:buNone/>
+            </a:pPr>
+            <a:r>
+              <a:rPr lang="en-US" sz="1000" dirty="0">
+                <a:solidFill>
+                  <a:srgbClr val="8DA9C4"/>
+                </a:solidFill>
+                <a:latin typeface="Calibri" pitchFamily="34" charset="0"/>
+                <a:ea typeface="Calibri" pitchFamily="34" charset="-122"/>
+                <a:cs typeface="Calibri" pitchFamily="34" charset="-120"/>
+              </a:rPr>
+              <a:t>15</a:t>
+            </a:r>
+            <a:endParaRPr lang="en-US" sz="1000" dirty="0"/>
+          </a:p>
+        </p:txBody>
+      </p:sp>
+    </p:spTree>
+  </p:cSld>
+  <p:clrMapOvr>
+    <a:masterClrMapping/>
+  </p:clrMapOvr>
+</p:sld>
+</file>
+
+<file path=ppt/slides/slide16.xml><?xml version="1.0" encoding="utf-8"?>
+<p:sld xmlns:a="http://schemas.openxmlformats.org/drawingml/2006/main" xmlns:r="http://schemas.openxmlformats.org/officeDocument/2006/relationships" xmlns:p="http://schemas.openxmlformats.org/presentationml/2006/main">
+  <p:cSld name="Slide 16">
+    <p:bg>
+      <p:bgPr>
+        <a:solidFill>
+          <a:srgbClr val="FFFFFF"/>
+        </a:solidFill>
+      </p:bgPr>
+    </p:bg>
+    <p:spTree>
+      <p:nvGrpSpPr>
+        <p:cNvPr id="1" name=""/>
+        <p:cNvGrpSpPr/>
+        <p:nvPr/>
+      </p:nvGrpSpPr>
+      <p:grpSpPr>
+        <a:xfrm>
+          <a:off x="0" y="0"/>
+          <a:ext cx="0" cy="0"/>
+          <a:chOff x="0" y="0"/>
+          <a:chExt cx="0" cy="0"/>
+        </a:xfrm>
+      </p:grpSpPr>
+      <p:sp>
+        <p:nvSpPr>
+          <p:cNvPr id="2" name="Text 0"/>
+          <p:cNvSpPr/>
+          <p:nvPr/>
+        </p:nvSpPr>
+        <p:spPr>
+          <a:xfrm>
+            <a:off x="502920" y="228600"/>
+            <a:ext cx="11247120" cy="777240"/>
+          </a:xfrm>
+          <a:prstGeom prst="rect">
+            <a:avLst/>
+          </a:prstGeom>
+          <a:noFill/>
+          <a:ln/>
+        </p:spPr>
+        <p:txBody>
+          <a:bodyPr wrap="square" rtlCol="0" anchor="ctr"/>
+          <a:lstStyle/>
+          <a:p>
+            <a:pPr indent="0" marL="0">
+              <a:buNone/>
+            </a:pPr>
+            <a:r>
+              <a:rPr lang="en-US" sz="2800" b="1" dirty="0">
+                <a:solidFill>
+                  <a:srgbClr val="0B2545"/>
+                </a:solidFill>
+                <a:latin typeface="Georgia" pitchFamily="34" charset="0"/>
+                <a:ea typeface="Georgia" pitchFamily="34" charset="-122"/>
+                <a:cs typeface="Georgia" pitchFamily="34" charset="-120"/>
+              </a:rPr>
               <a:t>Verdict · what works + can it make money?</a:t>
             </a:r>
             <a:endParaRPr lang="en-US" sz="2800" dirty="0"/>
@@ -5776,7 +6996,7 @@
       </p:sp>
       <p:graphicFrame>
         <p:nvGraphicFramePr>
-          <p:cNvPr id="16" name="Table 0"/>
+          <p:cNvPr id="17" name="Table 0"/>
           <p:cNvGraphicFramePr>
             <a:graphicFrameLocks noGrp="1"/>
           </p:cNvGraphicFramePr>
@@ -7073,7 +8293,7 @@
                 <a:ea typeface="Calibri" pitchFamily="34" charset="-122"/>
                 <a:cs typeface="Calibri" pitchFamily="34" charset="-120"/>
               </a:rPr>
-              <a:t>15</a:t>
+              <a:t>16</a:t>
             </a:r>
             <a:endParaRPr lang="en-US" sz="1000" dirty="0"/>
           </a:p>
@@ -11594,7 +12814,7 @@
                 <a:ea typeface="Georgia" pitchFamily="34" charset="-122"/>
                 <a:cs typeface="Georgia" pitchFamily="34" charset="-120"/>
               </a:rPr>
-              <a:t>Our calibrated win-probability model</a:t>
+              <a:t>Method 1 · how it works</a:t>
             </a:r>
             <a:endParaRPr lang="en-US" sz="2800" dirty="0"/>
           </a:p>
@@ -11633,7 +12853,7 @@
                 <a:ea typeface="Calibri" pitchFamily="34" charset="-122"/>
                 <a:cs typeface="Calibri" pitchFamily="34" charset="-120"/>
               </a:rPr>
-              <a:t>What goes in · how it works · what comes out</a:t>
+              <a:t>The calibrated WP model  ·  what goes in, what comes out</a:t>
             </a:r>
             <a:endParaRPr lang="en-US" sz="1400" dirty="0"/>
           </a:p>
@@ -13805,6 +15025,1433 @@
                 <a:ea typeface="Georgia" pitchFamily="34" charset="-122"/>
                 <a:cs typeface="Georgia" pitchFamily="34" charset="-120"/>
               </a:rPr>
+              <a:t>Method 2 · how it works</a:t>
+            </a:r>
+            <a:endParaRPr lang="en-US" sz="2800" dirty="0"/>
+          </a:p>
+        </p:txBody>
+      </p:sp>
+      <p:sp>
+        <p:nvSpPr>
+          <p:cNvPr id="3" name="Text 1"/>
+          <p:cNvSpPr/>
+          <p:nvPr/>
+        </p:nvSpPr>
+        <p:spPr>
+          <a:xfrm>
+            <a:off x="502920" y="932688"/>
+            <a:ext cx="11247120" cy="365760"/>
+          </a:xfrm>
+          <a:prstGeom prst="rect">
+            <a:avLst/>
+          </a:prstGeom>
+          <a:noFill/>
+          <a:ln/>
+        </p:spPr>
+        <p:txBody>
+          <a:bodyPr wrap="square" rtlCol="0" anchor="ctr"/>
+          <a:lstStyle/>
+          <a:p>
+            <a:pPr indent="0" marL="0">
+              <a:buNone/>
+            </a:pPr>
+            <a:r>
+              <a:rPr lang="en-US" sz="1400" i="1" dirty="0">
+                <a:solidFill>
+                  <a:srgbClr val="13315C"/>
+                </a:solidFill>
+                <a:latin typeface="Calibri" pitchFamily="34" charset="0"/>
+                <a:ea typeface="Calibri" pitchFamily="34" charset="-122"/>
+                <a:cs typeface="Calibri" pitchFamily="34" charset="-120"/>
+              </a:rPr>
+              <a:t>The overreaction test  ·  runs ON TOP OF Method 1</a:t>
+            </a:r>
+            <a:endParaRPr lang="en-US" sz="1400" dirty="0"/>
+          </a:p>
+        </p:txBody>
+      </p:sp>
+      <p:sp>
+        <p:nvSpPr>
+          <p:cNvPr id="4" name="Shape 2"/>
+          <p:cNvSpPr/>
+          <p:nvPr/>
+        </p:nvSpPr>
+        <p:spPr>
+          <a:xfrm>
+            <a:off x="502920" y="1298448"/>
+            <a:ext cx="11247120" cy="0"/>
+          </a:xfrm>
+          <a:prstGeom prst="line">
+            <a:avLst/>
+          </a:prstGeom>
+          <a:noFill/>
+          <a:ln w="25400">
+            <a:solidFill>
+              <a:srgbClr val="1C7293"/>
+            </a:solidFill>
+            <a:prstDash val="solid"/>
+          </a:ln>
+        </p:spPr>
+      </p:sp>
+      <p:sp>
+        <p:nvSpPr>
+          <p:cNvPr id="5" name="Shape 3"/>
+          <p:cNvSpPr/>
+          <p:nvPr/>
+        </p:nvSpPr>
+        <p:spPr>
+          <a:xfrm>
+            <a:off x="502920" y="1463040"/>
+            <a:ext cx="3474720" cy="3566160"/>
+          </a:xfrm>
+          <a:prstGeom prst="roundRect">
+            <a:avLst>
+              <a:gd name="adj" fmla="val 2632"/>
+            </a:avLst>
+          </a:prstGeom>
+          <a:solidFill>
+            <a:srgbClr val="F6F6F2"/>
+          </a:solidFill>
+          <a:ln w="20320">
+            <a:solidFill>
+              <a:srgbClr val="0B2545"/>
+            </a:solidFill>
+            <a:prstDash val="solid"/>
+          </a:ln>
+        </p:spPr>
+      </p:sp>
+      <p:sp>
+        <p:nvSpPr>
+          <p:cNvPr id="6" name="Text 4"/>
+          <p:cNvSpPr/>
+          <p:nvPr/>
+        </p:nvSpPr>
+        <p:spPr>
+          <a:xfrm>
+            <a:off x="502920" y="1554480"/>
+            <a:ext cx="3474720" cy="365760"/>
+          </a:xfrm>
+          <a:prstGeom prst="rect">
+            <a:avLst/>
+          </a:prstGeom>
+          <a:noFill/>
+          <a:ln/>
+        </p:spPr>
+        <p:txBody>
+          <a:bodyPr wrap="square" rtlCol="0" anchor="ctr"/>
+          <a:lstStyle/>
+          <a:p>
+            <a:pPr algn="ctr" indent="0" marL="0">
+              <a:buNone/>
+            </a:pPr>
+            <a:r>
+              <a:rPr lang="en-US" sz="1300" b="1" dirty="0">
+                <a:solidFill>
+                  <a:srgbClr val="13315C"/>
+                </a:solidFill>
+                <a:latin typeface="Calibri" pitchFamily="34" charset="0"/>
+                <a:ea typeface="Calibri" pitchFamily="34" charset="-122"/>
+                <a:cs typeface="Calibri" pitchFamily="34" charset="-120"/>
+              </a:rPr>
+              <a:t>INPUTS</a:t>
+            </a:r>
+            <a:endParaRPr lang="en-US" sz="1300" dirty="0"/>
+          </a:p>
+        </p:txBody>
+      </p:sp>
+      <p:sp>
+        <p:nvSpPr>
+          <p:cNvPr id="7" name="Text 5"/>
+          <p:cNvSpPr/>
+          <p:nvPr/>
+        </p:nvSpPr>
+        <p:spPr>
+          <a:xfrm>
+            <a:off x="502920" y="1874520"/>
+            <a:ext cx="3474720" cy="320040"/>
+          </a:xfrm>
+          <a:prstGeom prst="rect">
+            <a:avLst/>
+          </a:prstGeom>
+          <a:noFill/>
+          <a:ln/>
+        </p:spPr>
+        <p:txBody>
+          <a:bodyPr wrap="square" rtlCol="0" anchor="ctr"/>
+          <a:lstStyle/>
+          <a:p>
+            <a:pPr algn="ctr" indent="0" marL="0">
+              <a:buNone/>
+            </a:pPr>
+            <a:r>
+              <a:rPr lang="en-US" sz="1200" i="1" dirty="0">
+                <a:solidFill>
+                  <a:srgbClr val="8DA9C4"/>
+                </a:solidFill>
+                <a:latin typeface="Calibri" pitchFamily="34" charset="0"/>
+                <a:ea typeface="Calibri" pitchFamily="34" charset="-122"/>
+                <a:cs typeface="Calibri" pitchFamily="34" charset="-120"/>
+              </a:rPr>
+              <a:t>2 streams joined per event</a:t>
+            </a:r>
+            <a:endParaRPr lang="en-US" sz="1200" dirty="0"/>
+          </a:p>
+        </p:txBody>
+      </p:sp>
+      <p:sp>
+        <p:nvSpPr>
+          <p:cNvPr id="8" name="Text 6"/>
+          <p:cNvSpPr/>
+          <p:nvPr/>
+        </p:nvSpPr>
+        <p:spPr>
+          <a:xfrm>
+            <a:off x="685800" y="2286000"/>
+            <a:ext cx="3200400" cy="2286000"/>
+          </a:xfrm>
+          <a:prstGeom prst="rect">
+            <a:avLst/>
+          </a:prstGeom>
+          <a:noFill/>
+          <a:ln/>
+        </p:spPr>
+        <p:txBody>
+          <a:bodyPr wrap="square" rtlCol="0" anchor="ctr"/>
+          <a:lstStyle/>
+          <a:p>
+            <a:pPr indent="0" marL="0">
+              <a:buNone/>
+            </a:pPr>
+            <a:r>
+              <a:rPr lang="en-US" sz="1200" b="1" dirty="0">
+                <a:solidFill>
+                  <a:srgbClr val="0B2545"/>
+                </a:solidFill>
+                <a:latin typeface="Calibri" pitchFamily="34" charset="0"/>
+                <a:ea typeface="Calibri" pitchFamily="34" charset="-122"/>
+                <a:cs typeface="Calibri" pitchFamily="34" charset="-120"/>
+              </a:rPr>
+              <a:t>From Method 1:</a:t>
+            </a:r>
+            <a:pPr indent="0" marL="0">
+              <a:buNone/>
+            </a:pPr>
+            <a:endParaRPr lang="en-US" sz="1200" dirty="0"/>
+          </a:p>
+          <a:p>
+            <a:pPr indent="0" marL="0">
+              <a:buNone/>
+            </a:pPr>
+            <a:r>
+              <a:rPr lang="en-US" sz="1100" dirty="0">
+                <a:solidFill>
+                  <a:srgbClr val="1A1A1A"/>
+                </a:solidFill>
+                <a:latin typeface="Courier New" pitchFamily="34" charset="0"/>
+                <a:ea typeface="Courier New" pitchFamily="34" charset="-122"/>
+                <a:cs typeface="Courier New" pitchFamily="34" charset="-120"/>
+              </a:rPr>
+              <a:t>   p̂_t  (every minute, full game)</a:t>
+            </a:r>
+            <a:endParaRPr lang="en-US" sz="1200" dirty="0"/>
+          </a:p>
+          <a:p>
+            <a:pPr indent="0" marL="0">
+              <a:buNone/>
+            </a:pPr>
+            <a:r>
+              <a:rPr lang="en-US" sz="800" dirty="0">
+                <a:solidFill>
+                  <a:srgbClr val="1A1A1A"/>
+                </a:solidFill>
+                <a:latin typeface="Calibri" pitchFamily="34" charset="0"/>
+                <a:ea typeface="Calibri" pitchFamily="34" charset="-122"/>
+                <a:cs typeface="Calibri" pitchFamily="34" charset="-120"/>
+              </a:rPr>
+              <a:t>
+</a:t>
+            </a:r>
+            <a:pPr indent="0" marL="0">
+              <a:buNone/>
+            </a:pPr>
+            <a:r>
+              <a:rPr lang="en-US" sz="1200" b="1" dirty="0">
+                <a:solidFill>
+                  <a:srgbClr val="0B2545"/>
+                </a:solidFill>
+                <a:latin typeface="Calibri" pitchFamily="34" charset="0"/>
+                <a:ea typeface="Calibri" pitchFamily="34" charset="-122"/>
+                <a:cs typeface="Calibri" pitchFamily="34" charset="-120"/>
+              </a:rPr>
+              <a:t>From PBP:</a:t>
+            </a:r>
+            <a:pPr indent="0" marL="0">
+              <a:buNone/>
+            </a:pPr>
+            <a:endParaRPr lang="en-US" sz="1200" dirty="0"/>
+          </a:p>
+          <a:p>
+            <a:pPr indent="0" marL="0">
+              <a:buNone/>
+            </a:pPr>
+            <a:r>
+              <a:rPr lang="en-US" sz="1100" dirty="0">
+                <a:solidFill>
+                  <a:srgbClr val="1A1A1A"/>
+                </a:solidFill>
+                <a:latin typeface="Calibri" pitchFamily="34" charset="0"/>
+                <a:ea typeface="Calibri" pitchFamily="34" charset="-122"/>
+                <a:cs typeface="Calibri" pitchFamily="34" charset="-120"/>
+              </a:rPr>
+              <a:t>   trailing-team scoring events,</a:t>
+            </a:r>
+            <a:endParaRPr lang="en-US" sz="1200" dirty="0"/>
+          </a:p>
+          <a:p>
+            <a:pPr indent="0" marL="0">
+              <a:buNone/>
+            </a:pPr>
+            <a:endParaRPr lang="en-US" sz="1200" dirty="0"/>
+          </a:p>
+          <a:p>
+            <a:pPr indent="0" marL="0">
+              <a:buNone/>
+            </a:pPr>
+            <a:r>
+              <a:rPr lang="en-US" sz="1100" dirty="0">
+                <a:solidFill>
+                  <a:srgbClr val="1A1A1A"/>
+                </a:solidFill>
+                <a:latin typeface="Calibri" pitchFamily="34" charset="0"/>
+                <a:ea typeface="Calibri" pitchFamily="34" charset="-122"/>
+                <a:cs typeface="Calibri" pitchFamily="34" charset="-120"/>
+              </a:rPr>
+              <a:t>   filtered by pre-registered rule:</a:t>
+            </a:r>
+            <a:endParaRPr lang="en-US" sz="1200" dirty="0"/>
+          </a:p>
+          <a:p>
+            <a:pPr indent="0" marL="0">
+              <a:buNone/>
+            </a:pPr>
+            <a:endParaRPr lang="en-US" sz="1200" dirty="0"/>
+          </a:p>
+          <a:p>
+            <a:pPr indent="0" marL="0">
+              <a:buNone/>
+            </a:pPr>
+            <a:r>
+              <a:rPr lang="en-US" sz="1100" dirty="0">
+                <a:solidFill>
+                  <a:srgbClr val="EEA02B"/>
+                </a:solidFill>
+                <a:latin typeface="Calibri" pitchFamily="34" charset="0"/>
+                <a:ea typeface="Calibri" pitchFamily="34" charset="-122"/>
+                <a:cs typeface="Calibri" pitchFamily="34" charset="-120"/>
+              </a:rPr>
+              <a:t>   • comeback FG (trail 10–15)</a:t>
+            </a:r>
+            <a:endParaRPr lang="en-US" sz="1200" dirty="0"/>
+          </a:p>
+          <a:p>
+            <a:pPr indent="0" marL="0">
+              <a:buNone/>
+            </a:pPr>
+            <a:endParaRPr lang="en-US" sz="1200" dirty="0"/>
+          </a:p>
+          <a:p>
+            <a:pPr indent="0" marL="0">
+              <a:buNone/>
+            </a:pPr>
+            <a:r>
+              <a:rPr lang="en-US" sz="1100" dirty="0">
+                <a:solidFill>
+                  <a:srgbClr val="EEA02B"/>
+                </a:solidFill>
+                <a:latin typeface="Calibri" pitchFamily="34" charset="0"/>
+                <a:ea typeface="Calibri" pitchFamily="34" charset="-122"/>
+                <a:cs typeface="Calibri" pitchFamily="34" charset="-120"/>
+              </a:rPr>
+              <a:t>   • salience 3PT (trail ≥10)</a:t>
+            </a:r>
+            <a:endParaRPr lang="en-US" sz="1200" dirty="0"/>
+          </a:p>
+        </p:txBody>
+      </p:sp>
+      <p:sp>
+        <p:nvSpPr>
+          <p:cNvPr id="9" name="Text 7"/>
+          <p:cNvSpPr/>
+          <p:nvPr/>
+        </p:nvSpPr>
+        <p:spPr>
+          <a:xfrm>
+            <a:off x="502920" y="4663440"/>
+            <a:ext cx="3474720" cy="320040"/>
+          </a:xfrm>
+          <a:prstGeom prst="rect">
+            <a:avLst/>
+          </a:prstGeom>
+          <a:noFill/>
+          <a:ln/>
+        </p:spPr>
+        <p:txBody>
+          <a:bodyPr wrap="square" rtlCol="0" anchor="ctr"/>
+          <a:lstStyle/>
+          <a:p>
+            <a:pPr algn="ctr" indent="0" marL="0">
+              <a:buNone/>
+            </a:pPr>
+            <a:r>
+              <a:rPr lang="en-US" sz="1100" i="1" dirty="0">
+                <a:solidFill>
+                  <a:srgbClr val="1C7293"/>
+                </a:solidFill>
+                <a:latin typeface="Calibri" pitchFamily="34" charset="0"/>
+                <a:ea typeface="Calibri" pitchFamily="34" charset="-122"/>
+                <a:cs typeface="Calibri" pitchFamily="34" charset="-120"/>
+              </a:rPr>
+              <a:t>→ ~6,800 events / 1,300 games</a:t>
+            </a:r>
+            <a:endParaRPr lang="en-US" sz="1100" dirty="0"/>
+          </a:p>
+        </p:txBody>
+      </p:sp>
+      <p:sp>
+        <p:nvSpPr>
+          <p:cNvPr id="10" name="Shape 8"/>
+          <p:cNvSpPr/>
+          <p:nvPr/>
+        </p:nvSpPr>
+        <p:spPr>
+          <a:xfrm>
+            <a:off x="4114800" y="2971800"/>
+            <a:ext cx="502920" cy="548640"/>
+          </a:xfrm>
+          <a:prstGeom prst="rightArrow">
+            <a:avLst/>
+          </a:prstGeom>
+          <a:solidFill>
+            <a:srgbClr val="1C7293"/>
+          </a:solidFill>
+          <a:ln w="12700">
+            <a:solidFill>
+              <a:srgbClr val="1C7293"/>
+            </a:solidFill>
+            <a:prstDash val="solid"/>
+          </a:ln>
+        </p:spPr>
+      </p:sp>
+      <p:sp>
+        <p:nvSpPr>
+          <p:cNvPr id="11" name="Shape 9"/>
+          <p:cNvSpPr/>
+          <p:nvPr/>
+        </p:nvSpPr>
+        <p:spPr>
+          <a:xfrm>
+            <a:off x="4754880" y="1463040"/>
+            <a:ext cx="3474720" cy="3566160"/>
+          </a:xfrm>
+          <a:prstGeom prst="roundRect">
+            <a:avLst>
+              <a:gd name="adj" fmla="val 2632"/>
+            </a:avLst>
+          </a:prstGeom>
+          <a:solidFill>
+            <a:srgbClr val="0B2545"/>
+          </a:solidFill>
+          <a:ln w="12700">
+            <a:solidFill>
+              <a:srgbClr val="0B2545"/>
+            </a:solidFill>
+            <a:prstDash val="solid"/>
+          </a:ln>
+        </p:spPr>
+      </p:sp>
+      <p:sp>
+        <p:nvSpPr>
+          <p:cNvPr id="12" name="Text 10"/>
+          <p:cNvSpPr/>
+          <p:nvPr/>
+        </p:nvSpPr>
+        <p:spPr>
+          <a:xfrm>
+            <a:off x="4754880" y="1554480"/>
+            <a:ext cx="3474720" cy="365760"/>
+          </a:xfrm>
+          <a:prstGeom prst="rect">
+            <a:avLst/>
+          </a:prstGeom>
+          <a:noFill/>
+          <a:ln/>
+        </p:spPr>
+        <p:txBody>
+          <a:bodyPr wrap="square" rtlCol="0" anchor="ctr"/>
+          <a:lstStyle/>
+          <a:p>
+            <a:pPr algn="ctr" indent="0" marL="0">
+              <a:buNone/>
+            </a:pPr>
+            <a:r>
+              <a:rPr lang="en-US" sz="1300" b="1" dirty="0">
+                <a:solidFill>
+                  <a:srgbClr val="8DA9C4"/>
+                </a:solidFill>
+                <a:latin typeface="Calibri" pitchFamily="34" charset="0"/>
+                <a:ea typeface="Calibri" pitchFamily="34" charset="-122"/>
+                <a:cs typeface="Calibri" pitchFamily="34" charset="-120"/>
+              </a:rPr>
+              <a:t>METHOD</a:t>
+            </a:r>
+            <a:endParaRPr lang="en-US" sz="1300" dirty="0"/>
+          </a:p>
+        </p:txBody>
+      </p:sp>
+      <p:sp>
+        <p:nvSpPr>
+          <p:cNvPr id="13" name="Text 11"/>
+          <p:cNvSpPr/>
+          <p:nvPr/>
+        </p:nvSpPr>
+        <p:spPr>
+          <a:xfrm>
+            <a:off x="4754880" y="1874520"/>
+            <a:ext cx="3474720" cy="320040"/>
+          </a:xfrm>
+          <a:prstGeom prst="rect">
+            <a:avLst/>
+          </a:prstGeom>
+          <a:noFill/>
+          <a:ln/>
+        </p:spPr>
+        <p:txBody>
+          <a:bodyPr wrap="square" rtlCol="0" anchor="ctr"/>
+          <a:lstStyle/>
+          <a:p>
+            <a:pPr algn="ctr" indent="0" marL="0">
+              <a:buNone/>
+            </a:pPr>
+            <a:r>
+              <a:rPr lang="en-US" sz="1200" i="1" dirty="0">
+                <a:solidFill>
+                  <a:srgbClr val="8DA9C4"/>
+                </a:solidFill>
+                <a:latin typeface="Calibri" pitchFamily="34" charset="0"/>
+                <a:ea typeface="Calibri" pitchFamily="34" charset="-122"/>
+                <a:cs typeface="Calibri" pitchFamily="34" charset="-120"/>
+              </a:rPr>
+              <a:t>per event at time t :</a:t>
+            </a:r>
+            <a:endParaRPr lang="en-US" sz="1200" dirty="0"/>
+          </a:p>
+        </p:txBody>
+      </p:sp>
+      <p:sp>
+        <p:nvSpPr>
+          <p:cNvPr id="14" name="Text 12"/>
+          <p:cNvSpPr/>
+          <p:nvPr/>
+        </p:nvSpPr>
+        <p:spPr>
+          <a:xfrm>
+            <a:off x="4937760" y="2286000"/>
+            <a:ext cx="3291840" cy="2377440"/>
+          </a:xfrm>
+          <a:prstGeom prst="rect">
+            <a:avLst/>
+          </a:prstGeom>
+          <a:noFill/>
+          <a:ln/>
+        </p:spPr>
+        <p:txBody>
+          <a:bodyPr wrap="square" rtlCol="0" anchor="ctr"/>
+          <a:lstStyle/>
+          <a:p>
+            <a:pPr indent="0" marL="0">
+              <a:buNone/>
+            </a:pPr>
+            <a:r>
+              <a:rPr lang="en-US" sz="1300" b="1" dirty="0">
+                <a:solidFill>
+                  <a:srgbClr val="F6F6F2"/>
+                </a:solidFill>
+                <a:latin typeface="Calibri" pitchFamily="34" charset="0"/>
+                <a:ea typeface="Calibri" pitchFamily="34" charset="-122"/>
+                <a:cs typeface="Calibri" pitchFamily="34" charset="-120"/>
+              </a:rPr>
+              <a:t>1.  look up p̂(t)</a:t>
+            </a:r>
+            <a:pPr indent="0" marL="0">
+              <a:buNone/>
+            </a:pPr>
+            <a:endParaRPr lang="en-US" sz="1300" dirty="0"/>
+          </a:p>
+          <a:p>
+            <a:pPr indent="0" marL="0">
+              <a:buNone/>
+            </a:pPr>
+            <a:r>
+              <a:rPr lang="en-US" sz="1100" dirty="0">
+                <a:solidFill>
+                  <a:srgbClr val="F6F6F2"/>
+                </a:solidFill>
+                <a:latin typeface="Calibri" pitchFamily="34" charset="0"/>
+                <a:ea typeface="Calibri" pitchFamily="34" charset="-122"/>
+                <a:cs typeface="Calibri" pitchFamily="34" charset="-120"/>
+              </a:rPr>
+              <a:t>    and p̂(t+60s)</a:t>
+            </a:r>
+            <a:endParaRPr lang="en-US" sz="1300" dirty="0"/>
+          </a:p>
+          <a:p>
+            <a:pPr indent="0" marL="0">
+              <a:buNone/>
+            </a:pPr>
+            <a:r>
+              <a:rPr lang="en-US" sz="600" dirty="0">
+                <a:solidFill>
+                  <a:srgbClr val="000000"/>
+                </a:solidFill>
+                <a:latin typeface="Calibri" pitchFamily="34" charset="0"/>
+                <a:ea typeface="Calibri" pitchFamily="34" charset="-122"/>
+                <a:cs typeface="Calibri" pitchFamily="34" charset="-120"/>
+              </a:rPr>
+              <a:t>
+</a:t>
+            </a:r>
+            <a:pPr indent="0" marL="0">
+              <a:buNone/>
+            </a:pPr>
+            <a:r>
+              <a:rPr lang="en-US" sz="1300" b="1" dirty="0">
+                <a:solidFill>
+                  <a:srgbClr val="EEA02B"/>
+                </a:solidFill>
+                <a:latin typeface="Courier New" pitchFamily="34" charset="0"/>
+                <a:ea typeface="Courier New" pitchFamily="34" charset="-122"/>
+                <a:cs typeface="Courier New" pitchFamily="34" charset="-120"/>
+              </a:rPr>
+              <a:t>2.  Δp̂  =  p̂(t+60) − p̂(t)</a:t>
+            </a:r>
+            <a:pPr indent="0" marL="0">
+              <a:buNone/>
+            </a:pPr>
+            <a:r>
+              <a:rPr lang="en-US" sz="600" dirty="0">
+                <a:solidFill>
+                  <a:srgbClr val="000000"/>
+                </a:solidFill>
+                <a:latin typeface="Calibri" pitchFamily="34" charset="0"/>
+                <a:ea typeface="Calibri" pitchFamily="34" charset="-122"/>
+                <a:cs typeface="Calibri" pitchFamily="34" charset="-120"/>
+              </a:rPr>
+              <a:t>
+</a:t>
+            </a:r>
+            <a:pPr indent="0" marL="0">
+              <a:buNone/>
+            </a:pPr>
+            <a:r>
+              <a:rPr lang="en-US" sz="1300" b="1" dirty="0">
+                <a:solidFill>
+                  <a:srgbClr val="F6F6F2"/>
+                </a:solidFill>
+                <a:latin typeface="Calibri" pitchFamily="34" charset="0"/>
+                <a:ea typeface="Calibri" pitchFamily="34" charset="-122"/>
+                <a:cs typeface="Calibri" pitchFamily="34" charset="-120"/>
+              </a:rPr>
+              <a:t>3.  average within game</a:t>
+            </a:r>
+            <a:pPr indent="0" marL="0">
+              <a:buNone/>
+            </a:pPr>
+            <a:endParaRPr lang="en-US" sz="1300" dirty="0"/>
+          </a:p>
+          <a:p>
+            <a:pPr indent="0" marL="0">
+              <a:buNone/>
+            </a:pPr>
+            <a:r>
+              <a:rPr lang="en-US" sz="1100" dirty="0">
+                <a:solidFill>
+                  <a:srgbClr val="F6F6F2"/>
+                </a:solidFill>
+                <a:latin typeface="Calibri" pitchFamily="34" charset="0"/>
+                <a:ea typeface="Calibri" pitchFamily="34" charset="-122"/>
+                <a:cs typeface="Calibri" pitchFamily="34" charset="-120"/>
+              </a:rPr>
+              <a:t>    (block-bootstrap by GAME)</a:t>
+            </a:r>
+            <a:endParaRPr lang="en-US" sz="1300" dirty="0"/>
+          </a:p>
+          <a:p>
+            <a:pPr indent="0" marL="0">
+              <a:buNone/>
+            </a:pPr>
+            <a:r>
+              <a:rPr lang="en-US" sz="600" dirty="0">
+                <a:solidFill>
+                  <a:srgbClr val="000000"/>
+                </a:solidFill>
+                <a:latin typeface="Calibri" pitchFamily="34" charset="0"/>
+                <a:ea typeface="Calibri" pitchFamily="34" charset="-122"/>
+                <a:cs typeface="Calibri" pitchFamily="34" charset="-120"/>
+              </a:rPr>
+              <a:t>
+</a:t>
+            </a:r>
+            <a:pPr indent="0" marL="0">
+              <a:buNone/>
+            </a:pPr>
+            <a:r>
+              <a:rPr lang="en-US" sz="1300" b="1" dirty="0">
+                <a:solidFill>
+                  <a:srgbClr val="F6F6F2"/>
+                </a:solidFill>
+                <a:latin typeface="Calibri" pitchFamily="34" charset="0"/>
+                <a:ea typeface="Calibri" pitchFamily="34" charset="-122"/>
+                <a:cs typeface="Calibri" pitchFamily="34" charset="-120"/>
+              </a:rPr>
+              <a:t>4.  10,000 resamples →</a:t>
+            </a:r>
+            <a:pPr indent="0" marL="0">
+              <a:buNone/>
+            </a:pPr>
+            <a:endParaRPr lang="en-US" sz="1300" dirty="0"/>
+          </a:p>
+          <a:p>
+            <a:pPr indent="0" marL="0">
+              <a:buNone/>
+            </a:pPr>
+            <a:r>
+              <a:rPr lang="en-US" sz="1100" dirty="0">
+                <a:solidFill>
+                  <a:srgbClr val="F6F6F2"/>
+                </a:solidFill>
+                <a:latin typeface="Calibri" pitchFamily="34" charset="0"/>
+                <a:ea typeface="Calibri" pitchFamily="34" charset="-122"/>
+                <a:cs typeface="Calibri" pitchFamily="34" charset="-120"/>
+              </a:rPr>
+              <a:t>    95% CI  +  p-value</a:t>
+            </a:r>
+            <a:endParaRPr lang="en-US" sz="1300" dirty="0"/>
+          </a:p>
+        </p:txBody>
+      </p:sp>
+      <p:sp>
+        <p:nvSpPr>
+          <p:cNvPr id="15" name="Text 13"/>
+          <p:cNvSpPr/>
+          <p:nvPr/>
+        </p:nvSpPr>
+        <p:spPr>
+          <a:xfrm>
+            <a:off x="4754880" y="4663440"/>
+            <a:ext cx="3474720" cy="320040"/>
+          </a:xfrm>
+          <a:prstGeom prst="rect">
+            <a:avLst/>
+          </a:prstGeom>
+          <a:noFill/>
+          <a:ln/>
+        </p:spPr>
+        <p:txBody>
+          <a:bodyPr wrap="square" rtlCol="0" anchor="ctr"/>
+          <a:lstStyle/>
+          <a:p>
+            <a:pPr algn="ctr" indent="0" marL="0">
+              <a:buNone/>
+            </a:pPr>
+            <a:r>
+              <a:rPr lang="en-US" sz="1100" i="1" dirty="0">
+                <a:solidFill>
+                  <a:srgbClr val="8DA9C4"/>
+                </a:solidFill>
+                <a:latin typeface="Calibri" pitchFamily="34" charset="0"/>
+                <a:ea typeface="Calibri" pitchFamily="34" charset="-122"/>
+                <a:cs typeface="Calibri" pitchFamily="34" charset="-120"/>
+              </a:rPr>
+              <a:t>→ honest CI (effective n = games)</a:t>
+            </a:r>
+            <a:endParaRPr lang="en-US" sz="1100" dirty="0"/>
+          </a:p>
+        </p:txBody>
+      </p:sp>
+      <p:sp>
+        <p:nvSpPr>
+          <p:cNvPr id="16" name="Shape 14"/>
+          <p:cNvSpPr/>
+          <p:nvPr/>
+        </p:nvSpPr>
+        <p:spPr>
+          <a:xfrm>
+            <a:off x="8366760" y="2971800"/>
+            <a:ext cx="502920" cy="548640"/>
+          </a:xfrm>
+          <a:prstGeom prst="rightArrow">
+            <a:avLst/>
+          </a:prstGeom>
+          <a:solidFill>
+            <a:srgbClr val="1C7293"/>
+          </a:solidFill>
+          <a:ln w="12700">
+            <a:solidFill>
+              <a:srgbClr val="1C7293"/>
+            </a:solidFill>
+            <a:prstDash val="solid"/>
+          </a:ln>
+        </p:spPr>
+      </p:sp>
+      <p:sp>
+        <p:nvSpPr>
+          <p:cNvPr id="17" name="Shape 15"/>
+          <p:cNvSpPr/>
+          <p:nvPr/>
+        </p:nvSpPr>
+        <p:spPr>
+          <a:xfrm>
+            <a:off x="9006840" y="1463040"/>
+            <a:ext cx="2788920" cy="3566160"/>
+          </a:xfrm>
+          <a:prstGeom prst="roundRect">
+            <a:avLst>
+              <a:gd name="adj" fmla="val 3279"/>
+            </a:avLst>
+          </a:prstGeom>
+          <a:solidFill>
+            <a:srgbClr val="F6F6F2"/>
+          </a:solidFill>
+          <a:ln w="20320">
+            <a:solidFill>
+              <a:srgbClr val="EEA02B"/>
+            </a:solidFill>
+            <a:prstDash val="solid"/>
+          </a:ln>
+        </p:spPr>
+      </p:sp>
+      <p:sp>
+        <p:nvSpPr>
+          <p:cNvPr id="18" name="Text 16"/>
+          <p:cNvSpPr/>
+          <p:nvPr/>
+        </p:nvSpPr>
+        <p:spPr>
+          <a:xfrm>
+            <a:off x="9006840" y="1554480"/>
+            <a:ext cx="2788920" cy="365760"/>
+          </a:xfrm>
+          <a:prstGeom prst="rect">
+            <a:avLst/>
+          </a:prstGeom>
+          <a:noFill/>
+          <a:ln/>
+        </p:spPr>
+        <p:txBody>
+          <a:bodyPr wrap="square" rtlCol="0" anchor="ctr"/>
+          <a:lstStyle/>
+          <a:p>
+            <a:pPr algn="ctr" indent="0" marL="0">
+              <a:buNone/>
+            </a:pPr>
+            <a:r>
+              <a:rPr lang="en-US" sz="1300" b="1" dirty="0">
+                <a:solidFill>
+                  <a:srgbClr val="13315C"/>
+                </a:solidFill>
+                <a:latin typeface="Calibri" pitchFamily="34" charset="0"/>
+                <a:ea typeface="Calibri" pitchFamily="34" charset="-122"/>
+                <a:cs typeface="Calibri" pitchFamily="34" charset="-120"/>
+              </a:rPr>
+              <a:t>OUTPUT</a:t>
+            </a:r>
+            <a:endParaRPr lang="en-US" sz="1300" dirty="0"/>
+          </a:p>
+        </p:txBody>
+      </p:sp>
+      <p:sp>
+        <p:nvSpPr>
+          <p:cNvPr id="19" name="Text 17"/>
+          <p:cNvSpPr/>
+          <p:nvPr/>
+        </p:nvSpPr>
+        <p:spPr>
+          <a:xfrm>
+            <a:off x="9006840" y="1874520"/>
+            <a:ext cx="2788920" cy="320040"/>
+          </a:xfrm>
+          <a:prstGeom prst="rect">
+            <a:avLst/>
+          </a:prstGeom>
+          <a:noFill/>
+          <a:ln/>
+        </p:spPr>
+        <p:txBody>
+          <a:bodyPr wrap="square" rtlCol="0" anchor="ctr"/>
+          <a:lstStyle/>
+          <a:p>
+            <a:pPr algn="ctr" indent="0" marL="0">
+              <a:buNone/>
+            </a:pPr>
+            <a:r>
+              <a:rPr lang="en-US" sz="1200" i="1" dirty="0">
+                <a:solidFill>
+                  <a:srgbClr val="8DA9C4"/>
+                </a:solidFill>
+                <a:latin typeface="Calibri" pitchFamily="34" charset="0"/>
+                <a:ea typeface="Calibri" pitchFamily="34" charset="-122"/>
+                <a:cs typeface="Calibri" pitchFamily="34" charset="-120"/>
+              </a:rPr>
+              <a:t>per event-class:</a:t>
+            </a:r>
+            <a:endParaRPr lang="en-US" sz="1200" dirty="0"/>
+          </a:p>
+        </p:txBody>
+      </p:sp>
+      <p:sp>
+        <p:nvSpPr>
+          <p:cNvPr id="20" name="Text 18"/>
+          <p:cNvSpPr/>
+          <p:nvPr/>
+        </p:nvSpPr>
+        <p:spPr>
+          <a:xfrm>
+            <a:off x="9006840" y="2286000"/>
+            <a:ext cx="2788920" cy="457200"/>
+          </a:xfrm>
+          <a:prstGeom prst="rect">
+            <a:avLst/>
+          </a:prstGeom>
+          <a:noFill/>
+          <a:ln/>
+        </p:spPr>
+        <p:txBody>
+          <a:bodyPr wrap="square" rtlCol="0" anchor="ctr"/>
+          <a:lstStyle/>
+          <a:p>
+            <a:pPr algn="ctr" indent="0" marL="0">
+              <a:buNone/>
+            </a:pPr>
+            <a:r>
+              <a:rPr lang="en-US" sz="2400" b="1" dirty="0">
+                <a:solidFill>
+                  <a:srgbClr val="0B2545"/>
+                </a:solidFill>
+                <a:latin typeface="Courier New" pitchFamily="34" charset="0"/>
+                <a:ea typeface="Courier New" pitchFamily="34" charset="-122"/>
+                <a:cs typeface="Courier New" pitchFamily="34" charset="-120"/>
+              </a:rPr>
+              <a:t>Δp̂_scorer</a:t>
+            </a:r>
+            <a:endParaRPr lang="en-US" sz="2400" dirty="0"/>
+          </a:p>
+        </p:txBody>
+      </p:sp>
+      <p:sp>
+        <p:nvSpPr>
+          <p:cNvPr id="21" name="Text 19"/>
+          <p:cNvSpPr/>
+          <p:nvPr/>
+        </p:nvSpPr>
+        <p:spPr>
+          <a:xfrm>
+            <a:off x="9006840" y="2788920"/>
+            <a:ext cx="2788920" cy="548640"/>
+          </a:xfrm>
+          <a:prstGeom prst="rect">
+            <a:avLst/>
+          </a:prstGeom>
+          <a:noFill/>
+          <a:ln/>
+        </p:spPr>
+        <p:txBody>
+          <a:bodyPr wrap="square" rtlCol="0" anchor="ctr"/>
+          <a:lstStyle/>
+          <a:p>
+            <a:pPr algn="ctr" indent="0" marL="0">
+              <a:buNone/>
+            </a:pPr>
+            <a:r>
+              <a:rPr lang="en-US" sz="1100" i="1" dirty="0">
+                <a:solidFill>
+                  <a:srgbClr val="1A1A1A"/>
+                </a:solidFill>
+                <a:latin typeface="Calibri" pitchFamily="34" charset="0"/>
+                <a:ea typeface="Calibri" pitchFamily="34" charset="-122"/>
+                <a:cs typeface="Calibri" pitchFamily="34" charset="-120"/>
+              </a:rPr>
+              <a:t>structural shift</a:t>
+            </a:r>
+            <a:endParaRPr lang="en-US" sz="1100" dirty="0"/>
+          </a:p>
+          <a:p>
+            <a:pPr algn="ctr" indent="0" marL="0">
+              <a:buNone/>
+            </a:pPr>
+            <a:r>
+              <a:rPr lang="en-US" sz="1100" i="1" dirty="0">
+                <a:solidFill>
+                  <a:srgbClr val="1A1A1A"/>
+                </a:solidFill>
+                <a:latin typeface="Calibri" pitchFamily="34" charset="0"/>
+                <a:ea typeface="Calibri" pitchFamily="34" charset="-122"/>
+                <a:cs typeface="Calibri" pitchFamily="34" charset="-120"/>
+              </a:rPr>
+              <a:t>for the scoring team</a:t>
+            </a:r>
+            <a:endParaRPr lang="en-US" sz="1100" dirty="0"/>
+          </a:p>
+        </p:txBody>
+      </p:sp>
+      <p:sp>
+        <p:nvSpPr>
+          <p:cNvPr id="22" name="Text 20"/>
+          <p:cNvSpPr/>
+          <p:nvPr/>
+        </p:nvSpPr>
+        <p:spPr>
+          <a:xfrm>
+            <a:off x="9006840" y="3383280"/>
+            <a:ext cx="2788920" cy="320040"/>
+          </a:xfrm>
+          <a:prstGeom prst="rect">
+            <a:avLst/>
+          </a:prstGeom>
+          <a:noFill/>
+          <a:ln/>
+        </p:spPr>
+        <p:txBody>
+          <a:bodyPr wrap="square" rtlCol="0" anchor="ctr"/>
+          <a:lstStyle/>
+          <a:p>
+            <a:pPr algn="ctr" indent="0" marL="0">
+              <a:buNone/>
+            </a:pPr>
+            <a:r>
+              <a:rPr lang="en-US" sz="1300" b="1" dirty="0">
+                <a:solidFill>
+                  <a:srgbClr val="0B2545"/>
+                </a:solidFill>
+                <a:latin typeface="Calibri" pitchFamily="34" charset="0"/>
+                <a:ea typeface="Calibri" pitchFamily="34" charset="-122"/>
+                <a:cs typeface="Calibri" pitchFamily="34" charset="-120"/>
+              </a:rPr>
+              <a:t>+ 95% CI</a:t>
+            </a:r>
+            <a:endParaRPr lang="en-US" sz="1300" dirty="0"/>
+          </a:p>
+        </p:txBody>
+      </p:sp>
+      <p:sp>
+        <p:nvSpPr>
+          <p:cNvPr id="23" name="Text 21"/>
+          <p:cNvSpPr/>
+          <p:nvPr/>
+        </p:nvSpPr>
+        <p:spPr>
+          <a:xfrm>
+            <a:off x="9006840" y="3703320"/>
+            <a:ext cx="2788920" cy="320040"/>
+          </a:xfrm>
+          <a:prstGeom prst="rect">
+            <a:avLst/>
+          </a:prstGeom>
+          <a:noFill/>
+          <a:ln/>
+        </p:spPr>
+        <p:txBody>
+          <a:bodyPr wrap="square" rtlCol="0" anchor="ctr"/>
+          <a:lstStyle/>
+          <a:p>
+            <a:pPr algn="ctr" indent="0" marL="0">
+              <a:buNone/>
+            </a:pPr>
+            <a:r>
+              <a:rPr lang="en-US" sz="1300" b="1" dirty="0">
+                <a:solidFill>
+                  <a:srgbClr val="0B2545"/>
+                </a:solidFill>
+                <a:latin typeface="Calibri" pitchFamily="34" charset="0"/>
+                <a:ea typeface="Calibri" pitchFamily="34" charset="-122"/>
+                <a:cs typeface="Calibri" pitchFamily="34" charset="-120"/>
+              </a:rPr>
+              <a:t>+ p-value</a:t>
+            </a:r>
+            <a:endParaRPr lang="en-US" sz="1300" dirty="0"/>
+          </a:p>
+        </p:txBody>
+      </p:sp>
+      <p:sp>
+        <p:nvSpPr>
+          <p:cNvPr id="24" name="Text 22"/>
+          <p:cNvSpPr/>
+          <p:nvPr/>
+        </p:nvSpPr>
+        <p:spPr>
+          <a:xfrm>
+            <a:off x="9006840" y="4663440"/>
+            <a:ext cx="2788920" cy="320040"/>
+          </a:xfrm>
+          <a:prstGeom prst="rect">
+            <a:avLst/>
+          </a:prstGeom>
+          <a:noFill/>
+          <a:ln/>
+        </p:spPr>
+        <p:txBody>
+          <a:bodyPr wrap="square" rtlCol="0" anchor="ctr"/>
+          <a:lstStyle/>
+          <a:p>
+            <a:pPr algn="ctr" indent="0" marL="0">
+              <a:buNone/>
+            </a:pPr>
+            <a:r>
+              <a:rPr lang="en-US" sz="1100" i="1" dirty="0">
+                <a:solidFill>
+                  <a:srgbClr val="1C7293"/>
+                </a:solidFill>
+                <a:latin typeface="Calibri" pitchFamily="34" charset="0"/>
+                <a:ea typeface="Calibri" pitchFamily="34" charset="-122"/>
+                <a:cs typeface="Calibri" pitchFamily="34" charset="-120"/>
+              </a:rPr>
+              <a:t>→ does the bias exist?</a:t>
+            </a:r>
+            <a:endParaRPr lang="en-US" sz="1100" dirty="0"/>
+          </a:p>
+        </p:txBody>
+      </p:sp>
+      <p:sp>
+        <p:nvSpPr>
+          <p:cNvPr id="25" name="Shape 23"/>
+          <p:cNvSpPr/>
+          <p:nvPr/>
+        </p:nvSpPr>
+        <p:spPr>
+          <a:xfrm>
+            <a:off x="502920" y="5257800"/>
+            <a:ext cx="11247120" cy="1051560"/>
+          </a:xfrm>
+          <a:prstGeom prst="roundRect">
+            <a:avLst>
+              <a:gd name="adj" fmla="val 6957"/>
+            </a:avLst>
+          </a:prstGeom>
+          <a:solidFill>
+            <a:srgbClr val="EEF3F8"/>
+          </a:solidFill>
+          <a:ln w="15240">
+            <a:solidFill>
+              <a:srgbClr val="1C7293"/>
+            </a:solidFill>
+            <a:prstDash val="solid"/>
+          </a:ln>
+        </p:spPr>
+      </p:sp>
+      <p:sp>
+        <p:nvSpPr>
+          <p:cNvPr id="26" name="Text 24"/>
+          <p:cNvSpPr/>
+          <p:nvPr/>
+        </p:nvSpPr>
+        <p:spPr>
+          <a:xfrm>
+            <a:off x="777240" y="5349240"/>
+            <a:ext cx="2011680" cy="365760"/>
+          </a:xfrm>
+          <a:prstGeom prst="rect">
+            <a:avLst/>
+          </a:prstGeom>
+          <a:noFill/>
+          <a:ln/>
+        </p:spPr>
+        <p:txBody>
+          <a:bodyPr wrap="square" rtlCol="0" anchor="ctr"/>
+          <a:lstStyle/>
+          <a:p>
+            <a:pPr indent="0" marL="0">
+              <a:buNone/>
+            </a:pPr>
+            <a:r>
+              <a:rPr lang="en-US" sz="1300" b="1" i="1" dirty="0">
+                <a:solidFill>
+                  <a:srgbClr val="13315C"/>
+                </a:solidFill>
+                <a:latin typeface="Calibri" pitchFamily="34" charset="0"/>
+                <a:ea typeface="Calibri" pitchFamily="34" charset="-122"/>
+                <a:cs typeface="Calibri" pitchFamily="34" charset="-120"/>
+              </a:rPr>
+              <a:t>Example event:</a:t>
+            </a:r>
+            <a:endParaRPr lang="en-US" sz="1300" dirty="0"/>
+          </a:p>
+        </p:txBody>
+      </p:sp>
+      <p:sp>
+        <p:nvSpPr>
+          <p:cNvPr id="27" name="Text 25"/>
+          <p:cNvSpPr/>
+          <p:nvPr/>
+        </p:nvSpPr>
+        <p:spPr>
+          <a:xfrm>
+            <a:off x="777240" y="5669280"/>
+            <a:ext cx="10972800" cy="594360"/>
+          </a:xfrm>
+          <a:prstGeom prst="rect">
+            <a:avLst/>
+          </a:prstGeom>
+          <a:noFill/>
+          <a:ln/>
+        </p:spPr>
+        <p:txBody>
+          <a:bodyPr wrap="square" rtlCol="0" anchor="ctr"/>
+          <a:lstStyle/>
+          <a:p>
+            <a:pPr indent="0" marL="0">
+              <a:buNone/>
+            </a:pPr>
+            <a:r>
+              <a:rPr lang="en-US" sz="1300" dirty="0">
+                <a:solidFill>
+                  <a:srgbClr val="1A1A1A"/>
+                </a:solidFill>
+                <a:latin typeface="Calibri" pitchFamily="34" charset="0"/>
+                <a:ea typeface="Calibri" pitchFamily="34" charset="-122"/>
+                <a:cs typeface="Calibri" pitchFamily="34" charset="-120"/>
+              </a:rPr>
+              <a:t>trailing 12, made 3PT at game-min 18</a:t>
+            </a:r>
+            <a:pPr indent="0" marL="0">
+              <a:buNone/>
+            </a:pPr>
+            <a:r>
+              <a:rPr lang="en-US" sz="1300" dirty="0">
+                <a:solidFill>
+                  <a:srgbClr val="1A1A1A"/>
+                </a:solidFill>
+                <a:latin typeface="Calibri" pitchFamily="34" charset="0"/>
+                <a:ea typeface="Calibri" pitchFamily="34" charset="-122"/>
+                <a:cs typeface="Calibri" pitchFamily="34" charset="-120"/>
+              </a:rPr>
+              <a:t>   →   </a:t>
+            </a:r>
+            <a:pPr indent="0" marL="0">
+              <a:buNone/>
+            </a:pPr>
+            <a:r>
+              <a:rPr lang="en-US" sz="1300" b="1" dirty="0">
+                <a:solidFill>
+                  <a:srgbClr val="0B2545"/>
+                </a:solidFill>
+                <a:latin typeface="Courier New" pitchFamily="34" charset="0"/>
+                <a:ea typeface="Courier New" pitchFamily="34" charset="-122"/>
+                <a:cs typeface="Courier New" pitchFamily="34" charset="-120"/>
+              </a:rPr>
+              <a:t>p̂(t) = 0.18</a:t>
+            </a:r>
+            <a:pPr indent="0" marL="0">
+              <a:buNone/>
+            </a:pPr>
+            <a:r>
+              <a:rPr lang="en-US" sz="1300" dirty="0">
+                <a:solidFill>
+                  <a:srgbClr val="1A1A1A"/>
+                </a:solidFill>
+                <a:latin typeface="Calibri" pitchFamily="34" charset="0"/>
+                <a:ea typeface="Calibri" pitchFamily="34" charset="-122"/>
+                <a:cs typeface="Calibri" pitchFamily="34" charset="-120"/>
+              </a:rPr>
+              <a:t>,  </a:t>
+            </a:r>
+            <a:pPr indent="0" marL="0">
+              <a:buNone/>
+            </a:pPr>
+            <a:r>
+              <a:rPr lang="en-US" sz="1300" b="1" dirty="0">
+                <a:solidFill>
+                  <a:srgbClr val="0B2545"/>
+                </a:solidFill>
+                <a:latin typeface="Courier New" pitchFamily="34" charset="0"/>
+                <a:ea typeface="Courier New" pitchFamily="34" charset="-122"/>
+                <a:cs typeface="Courier New" pitchFamily="34" charset="-120"/>
+              </a:rPr>
+              <a:t>p̂(t+60s) = 0.22</a:t>
+            </a:r>
+            <a:pPr indent="0" marL="0">
+              <a:buNone/>
+            </a:pPr>
+            <a:r>
+              <a:rPr lang="en-US" sz="1300" dirty="0">
+                <a:solidFill>
+                  <a:srgbClr val="1A1A1A"/>
+                </a:solidFill>
+                <a:latin typeface="Calibri" pitchFamily="34" charset="0"/>
+                <a:ea typeface="Calibri" pitchFamily="34" charset="-122"/>
+                <a:cs typeface="Calibri" pitchFamily="34" charset="-120"/>
+              </a:rPr>
+              <a:t>   →   </a:t>
+            </a:r>
+            <a:pPr indent="0" marL="0">
+              <a:buNone/>
+            </a:pPr>
+            <a:r>
+              <a:rPr lang="en-US" sz="1500" b="1" dirty="0">
+                <a:solidFill>
+                  <a:srgbClr val="EEA02B"/>
+                </a:solidFill>
+                <a:latin typeface="Courier New" pitchFamily="34" charset="0"/>
+                <a:ea typeface="Courier New" pitchFamily="34" charset="-122"/>
+                <a:cs typeface="Courier New" pitchFamily="34" charset="-120"/>
+              </a:rPr>
+              <a:t>Δp̂ = +0.04</a:t>
+            </a:r>
+            <a:endParaRPr lang="en-US" sz="1300" dirty="0"/>
+          </a:p>
+        </p:txBody>
+      </p:sp>
+      <p:sp>
+        <p:nvSpPr>
+          <p:cNvPr id="28" name="Text 26"/>
+          <p:cNvSpPr/>
+          <p:nvPr/>
+        </p:nvSpPr>
+        <p:spPr>
+          <a:xfrm>
+            <a:off x="502920" y="6492240"/>
+            <a:ext cx="7315200" cy="274320"/>
+          </a:xfrm>
+          <a:prstGeom prst="rect">
+            <a:avLst/>
+          </a:prstGeom>
+          <a:noFill/>
+          <a:ln/>
+        </p:spPr>
+        <p:txBody>
+          <a:bodyPr wrap="square" rtlCol="0" anchor="ctr"/>
+          <a:lstStyle/>
+          <a:p>
+            <a:pPr indent="0" marL="0">
+              <a:buNone/>
+            </a:pPr>
+            <a:r>
+              <a:rPr lang="en-US" sz="1000" dirty="0">
+                <a:solidFill>
+                  <a:srgbClr val="8DA9C4"/>
+                </a:solidFill>
+                <a:latin typeface="Calibri" pitchFamily="34" charset="0"/>
+                <a:ea typeface="Calibri" pitchFamily="34" charset="-122"/>
+                <a:cs typeface="Calibri" pitchFamily="34" charset="-120"/>
+              </a:rPr>
+              <a:t>STATS 211 · NBA Mispricing · Sit &amp; Manathattai</a:t>
+            </a:r>
+            <a:endParaRPr lang="en-US" sz="1000" dirty="0"/>
+          </a:p>
+        </p:txBody>
+      </p:sp>
+      <p:sp>
+        <p:nvSpPr>
+          <p:cNvPr id="29" name="Text 27"/>
+          <p:cNvSpPr/>
+          <p:nvPr/>
+        </p:nvSpPr>
+        <p:spPr>
+          <a:xfrm>
+            <a:off x="11384280" y="6492240"/>
+            <a:ext cx="411480" cy="274320"/>
+          </a:xfrm>
+          <a:prstGeom prst="rect">
+            <a:avLst/>
+          </a:prstGeom>
+          <a:noFill/>
+          <a:ln/>
+        </p:spPr>
+        <p:txBody>
+          <a:bodyPr wrap="square" rtlCol="0" anchor="ctr"/>
+          <a:lstStyle/>
+          <a:p>
+            <a:pPr algn="r" indent="0" marL="0">
+              <a:buNone/>
+            </a:pPr>
+            <a:r>
+              <a:rPr lang="en-US" sz="1000" dirty="0">
+                <a:solidFill>
+                  <a:srgbClr val="8DA9C4"/>
+                </a:solidFill>
+                <a:latin typeface="Calibri" pitchFamily="34" charset="0"/>
+                <a:ea typeface="Calibri" pitchFamily="34" charset="-122"/>
+                <a:cs typeface="Calibri" pitchFamily="34" charset="-120"/>
+              </a:rPr>
+              <a:t>8</a:t>
+            </a:r>
+            <a:endParaRPr lang="en-US" sz="1000" dirty="0"/>
+          </a:p>
+        </p:txBody>
+      </p:sp>
+    </p:spTree>
+  </p:cSld>
+  <p:clrMapOvr>
+    <a:masterClrMapping/>
+  </p:clrMapOvr>
+</p:sld>
+</file>
+
+<file path=ppt/slides/slide9.xml><?xml version="1.0" encoding="utf-8"?>
+<p:sld xmlns:a="http://schemas.openxmlformats.org/drawingml/2006/main" xmlns:r="http://schemas.openxmlformats.org/officeDocument/2006/relationships" xmlns:p="http://schemas.openxmlformats.org/presentationml/2006/main">
+  <p:cSld name="Slide 9">
+    <p:bg>
+      <p:bgPr>
+        <a:solidFill>
+          <a:srgbClr val="FFFFFF"/>
+        </a:solidFill>
+      </p:bgPr>
+    </p:bg>
+    <p:spTree>
+      <p:nvGrpSpPr>
+        <p:cNvPr id="1" name=""/>
+        <p:cNvGrpSpPr/>
+        <p:nvPr/>
+      </p:nvGrpSpPr>
+      <p:grpSpPr>
+        <a:xfrm>
+          <a:off x="0" y="0"/>
+          <a:ext cx="0" cy="0"/>
+          <a:chOff x="0" y="0"/>
+          <a:chExt cx="0" cy="0"/>
+        </a:xfrm>
+      </p:grpSpPr>
+      <p:sp>
+        <p:nvSpPr>
+          <p:cNvPr id="2" name="Text 0"/>
+          <p:cNvSpPr/>
+          <p:nvPr/>
+        </p:nvSpPr>
+        <p:spPr>
+          <a:xfrm>
+            <a:off x="502920" y="228600"/>
+            <a:ext cx="11247120" cy="777240"/>
+          </a:xfrm>
+          <a:prstGeom prst="rect">
+            <a:avLst/>
+          </a:prstGeom>
+          <a:noFill/>
+          <a:ln/>
+        </p:spPr>
+        <p:txBody>
+          <a:bodyPr wrap="square" rtlCol="0" anchor="ctr"/>
+          <a:lstStyle/>
+          <a:p>
+            <a:pPr indent="0" marL="0">
+              <a:buNone/>
+            </a:pPr>
+            <a:r>
+              <a:rPr lang="en-US" sz="2800" b="1" dirty="0">
+                <a:solidFill>
+                  <a:srgbClr val="0B2545"/>
+                </a:solidFill>
+                <a:latin typeface="Georgia" pitchFamily="34" charset="0"/>
+                <a:ea typeface="Georgia" pitchFamily="34" charset="-122"/>
+                <a:cs typeface="Georgia" pitchFamily="34" charset="-120"/>
+              </a:rPr>
               <a:t>Finding 2 · The market overshoots on trailing-team scoring</a:t>
             </a:r>
             <a:endParaRPr lang="en-US" sz="2800" dirty="0"/>
@@ -13899,7 +16546,7 @@
       </p:pic>
       <p:graphicFrame>
         <p:nvGraphicFramePr>
-          <p:cNvPr id="9" name="Table 0"/>
+          <p:cNvPr id="10" name="Table 0"/>
           <p:cNvGraphicFramePr>
             <a:graphicFrameLocks noGrp="1"/>
           </p:cNvGraphicFramePr>
@@ -14581,1137 +17228,6 @@
       <p:sp>
         <p:nvSpPr>
           <p:cNvPr id="14" name="Text 10"/>
-          <p:cNvSpPr/>
-          <p:nvPr/>
-        </p:nvSpPr>
-        <p:spPr>
-          <a:xfrm>
-            <a:off x="11384280" y="6492240"/>
-            <a:ext cx="411480" cy="274320"/>
-          </a:xfrm>
-          <a:prstGeom prst="rect">
-            <a:avLst/>
-          </a:prstGeom>
-          <a:noFill/>
-          <a:ln/>
-        </p:spPr>
-        <p:txBody>
-          <a:bodyPr wrap="square" rtlCol="0" anchor="ctr"/>
-          <a:lstStyle/>
-          <a:p>
-            <a:pPr algn="r" indent="0" marL="0">
-              <a:buNone/>
-            </a:pPr>
-            <a:r>
-              <a:rPr lang="en-US" sz="1000" dirty="0">
-                <a:solidFill>
-                  <a:srgbClr val="8DA9C4"/>
-                </a:solidFill>
-                <a:latin typeface="Calibri" pitchFamily="34" charset="0"/>
-                <a:ea typeface="Calibri" pitchFamily="34" charset="-122"/>
-                <a:cs typeface="Calibri" pitchFamily="34" charset="-120"/>
-              </a:rPr>
-              <a:t>8</a:t>
-            </a:r>
-            <a:endParaRPr lang="en-US" sz="1000" dirty="0"/>
-          </a:p>
-        </p:txBody>
-      </p:sp>
-    </p:spTree>
-  </p:cSld>
-  <p:clrMapOvr>
-    <a:masterClrMapping/>
-  </p:clrMapOvr>
-</p:sld>
-</file>
-
-<file path=ppt/slides/slide9.xml><?xml version="1.0" encoding="utf-8"?>
-<p:sld xmlns:a="http://schemas.openxmlformats.org/drawingml/2006/main" xmlns:r="http://schemas.openxmlformats.org/officeDocument/2006/relationships" xmlns:p="http://schemas.openxmlformats.org/presentationml/2006/main">
-  <p:cSld name="Slide 9">
-    <p:bg>
-      <p:bgPr>
-        <a:solidFill>
-          <a:srgbClr val="FFFFFF"/>
-        </a:solidFill>
-      </p:bgPr>
-    </p:bg>
-    <p:spTree>
-      <p:nvGrpSpPr>
-        <p:cNvPr id="1" name=""/>
-        <p:cNvGrpSpPr/>
-        <p:nvPr/>
-      </p:nvGrpSpPr>
-      <p:grpSpPr>
-        <a:xfrm>
-          <a:off x="0" y="0"/>
-          <a:ext cx="0" cy="0"/>
-          <a:chOff x="0" y="0"/>
-          <a:chExt cx="0" cy="0"/>
-        </a:xfrm>
-      </p:grpSpPr>
-      <p:sp>
-        <p:nvSpPr>
-          <p:cNvPr id="2" name="Text 0"/>
-          <p:cNvSpPr/>
-          <p:nvPr/>
-        </p:nvSpPr>
-        <p:spPr>
-          <a:xfrm>
-            <a:off x="502920" y="228600"/>
-            <a:ext cx="11247120" cy="777240"/>
-          </a:xfrm>
-          <a:prstGeom prst="rect">
-            <a:avLst/>
-          </a:prstGeom>
-          <a:noFill/>
-          <a:ln/>
-        </p:spPr>
-        <p:txBody>
-          <a:bodyPr wrap="square" rtlCol="0" anchor="ctr"/>
-          <a:lstStyle/>
-          <a:p>
-            <a:pPr indent="0" marL="0">
-              <a:buNone/>
-            </a:pPr>
-            <a:r>
-              <a:rPr lang="en-US" sz="2800" b="1" dirty="0">
-                <a:solidFill>
-                  <a:srgbClr val="0B2545"/>
-                </a:solidFill>
-                <a:latin typeface="Georgia" pitchFamily="34" charset="0"/>
-                <a:ea typeface="Georgia" pitchFamily="34" charset="-122"/>
-                <a:cs typeface="Georgia" pitchFamily="34" charset="-120"/>
-              </a:rPr>
-              <a:t>How we use both methods</a:t>
-            </a:r>
-            <a:endParaRPr lang="en-US" sz="2800" dirty="0"/>
-          </a:p>
-        </p:txBody>
-      </p:sp>
-      <p:sp>
-        <p:nvSpPr>
-          <p:cNvPr id="3" name="Text 1"/>
-          <p:cNvSpPr/>
-          <p:nvPr/>
-        </p:nvSpPr>
-        <p:spPr>
-          <a:xfrm>
-            <a:off x="502920" y="932688"/>
-            <a:ext cx="11247120" cy="365760"/>
-          </a:xfrm>
-          <a:prstGeom prst="rect">
-            <a:avLst/>
-          </a:prstGeom>
-          <a:noFill/>
-          <a:ln/>
-        </p:spPr>
-        <p:txBody>
-          <a:bodyPr wrap="square" rtlCol="0" anchor="ctr"/>
-          <a:lstStyle/>
-          <a:p>
-            <a:pPr indent="0" marL="0">
-              <a:buNone/>
-            </a:pPr>
-            <a:r>
-              <a:rPr lang="en-US" sz="1400" i="1" dirty="0">
-                <a:solidFill>
-                  <a:srgbClr val="13315C"/>
-                </a:solidFill>
-                <a:latin typeface="Calibri" pitchFamily="34" charset="0"/>
-                <a:ea typeface="Calibri" pitchFamily="34" charset="-122"/>
-                <a:cs typeface="Calibri" pitchFamily="34" charset="-120"/>
-              </a:rPr>
-              <a:t>They don't compete · Method 2 STACKS on top of Method 1</a:t>
-            </a:r>
-            <a:endParaRPr lang="en-US" sz="1400" dirty="0"/>
-          </a:p>
-        </p:txBody>
-      </p:sp>
-      <p:sp>
-        <p:nvSpPr>
-          <p:cNvPr id="4" name="Shape 2"/>
-          <p:cNvSpPr/>
-          <p:nvPr/>
-        </p:nvSpPr>
-        <p:spPr>
-          <a:xfrm>
-            <a:off x="502920" y="1298448"/>
-            <a:ext cx="11247120" cy="0"/>
-          </a:xfrm>
-          <a:prstGeom prst="line">
-            <a:avLst/>
-          </a:prstGeom>
-          <a:noFill/>
-          <a:ln w="25400">
-            <a:solidFill>
-              <a:srgbClr val="1C7293"/>
-            </a:solidFill>
-            <a:prstDash val="solid"/>
-          </a:ln>
-        </p:spPr>
-      </p:sp>
-      <p:sp>
-        <p:nvSpPr>
-          <p:cNvPr id="5" name="Shape 3"/>
-          <p:cNvSpPr/>
-          <p:nvPr/>
-        </p:nvSpPr>
-        <p:spPr>
-          <a:xfrm>
-            <a:off x="502920" y="1417320"/>
-            <a:ext cx="5349240" cy="4114800"/>
-          </a:xfrm>
-          <a:prstGeom prst="roundRect">
-            <a:avLst>
-              <a:gd name="adj" fmla="val 2222"/>
-            </a:avLst>
-          </a:prstGeom>
-          <a:solidFill>
-            <a:srgbClr val="F6F6F2"/>
-          </a:solidFill>
-          <a:ln w="20320">
-            <a:solidFill>
-              <a:srgbClr val="0B2545"/>
-            </a:solidFill>
-            <a:prstDash val="solid"/>
-          </a:ln>
-        </p:spPr>
-      </p:sp>
-      <p:sp>
-        <p:nvSpPr>
-          <p:cNvPr id="6" name="Shape 4"/>
-          <p:cNvSpPr/>
-          <p:nvPr/>
-        </p:nvSpPr>
-        <p:spPr>
-          <a:xfrm>
-            <a:off x="502920" y="1417320"/>
-            <a:ext cx="5349240" cy="502920"/>
-          </a:xfrm>
-          <a:prstGeom prst="rect">
-            <a:avLst/>
-          </a:prstGeom>
-          <a:solidFill>
-            <a:srgbClr val="0B2545"/>
-          </a:solidFill>
-          <a:ln w="12700">
-            <a:solidFill>
-              <a:srgbClr val="0B2545"/>
-            </a:solidFill>
-            <a:prstDash val="solid"/>
-          </a:ln>
-        </p:spPr>
-      </p:sp>
-      <p:sp>
-        <p:nvSpPr>
-          <p:cNvPr id="7" name="Text 5"/>
-          <p:cNvSpPr/>
-          <p:nvPr/>
-        </p:nvSpPr>
-        <p:spPr>
-          <a:xfrm>
-            <a:off x="502920" y="1417320"/>
-            <a:ext cx="5349240" cy="502920"/>
-          </a:xfrm>
-          <a:prstGeom prst="rect">
-            <a:avLst/>
-          </a:prstGeom>
-          <a:noFill/>
-          <a:ln/>
-        </p:spPr>
-        <p:txBody>
-          <a:bodyPr wrap="square" rtlCol="0" anchor="ctr"/>
-          <a:lstStyle/>
-          <a:p>
-            <a:pPr algn="ctr" indent="0" marL="0">
-              <a:buNone/>
-            </a:pPr>
-            <a:r>
-              <a:rPr lang="en-US" sz="1300" b="1" dirty="0">
-                <a:solidFill>
-                  <a:srgbClr val="F6F6F2"/>
-                </a:solidFill>
-                <a:latin typeface="Calibri" pitchFamily="34" charset="0"/>
-                <a:ea typeface="Calibri" pitchFamily="34" charset="-122"/>
-                <a:cs typeface="Calibri" pitchFamily="34" charset="-120"/>
-              </a:rPr>
-              <a:t>METHOD 1 · the calibrated WP model</a:t>
-            </a:r>
-            <a:endParaRPr lang="en-US" sz="1300" dirty="0"/>
-          </a:p>
-        </p:txBody>
-      </p:sp>
-      <p:sp>
-        <p:nvSpPr>
-          <p:cNvPr id="8" name="Text 6"/>
-          <p:cNvSpPr/>
-          <p:nvPr/>
-        </p:nvSpPr>
-        <p:spPr>
-          <a:xfrm>
-            <a:off x="685800" y="2057400"/>
-            <a:ext cx="5029200" cy="502920"/>
-          </a:xfrm>
-          <a:prstGeom prst="rect">
-            <a:avLst/>
-          </a:prstGeom>
-          <a:noFill/>
-          <a:ln/>
-        </p:spPr>
-        <p:txBody>
-          <a:bodyPr wrap="square" rtlCol="0" anchor="ctr"/>
-          <a:lstStyle/>
-          <a:p>
-            <a:pPr indent="0" marL="0">
-              <a:buNone/>
-            </a:pPr>
-            <a:r>
-              <a:rPr lang="en-US" sz="1300" b="1" dirty="0">
-                <a:solidFill>
-                  <a:srgbClr val="13315C"/>
-                </a:solidFill>
-                <a:latin typeface="Calibri" pitchFamily="34" charset="0"/>
-                <a:ea typeface="Calibri" pitchFamily="34" charset="-122"/>
-                <a:cs typeface="Calibri" pitchFamily="34" charset="-120"/>
-              </a:rPr>
-              <a:t>INPUTS:  </a:t>
-            </a:r>
-            <a:pPr indent="0" marL="0">
-              <a:buNone/>
-            </a:pPr>
-            <a:r>
-              <a:rPr lang="en-US" sz="1300" dirty="0">
-                <a:solidFill>
-                  <a:srgbClr val="1A1A1A"/>
-                </a:solidFill>
-                <a:latin typeface="Calibri" pitchFamily="34" charset="0"/>
-                <a:ea typeface="Calibri" pitchFamily="34" charset="-122"/>
-                <a:cs typeface="Calibri" pitchFamily="34" charset="-120"/>
-              </a:rPr>
-              <a:t>4 game-state features (min, score-diff, run, period)</a:t>
-            </a:r>
-            <a:endParaRPr lang="en-US" sz="1300" dirty="0"/>
-          </a:p>
-        </p:txBody>
-      </p:sp>
-      <p:sp>
-        <p:nvSpPr>
-          <p:cNvPr id="9" name="Text 7"/>
-          <p:cNvSpPr/>
-          <p:nvPr/>
-        </p:nvSpPr>
-        <p:spPr>
-          <a:xfrm>
-            <a:off x="685800" y="2606040"/>
-            <a:ext cx="5029200" cy="502920"/>
-          </a:xfrm>
-          <a:prstGeom prst="rect">
-            <a:avLst/>
-          </a:prstGeom>
-          <a:noFill/>
-          <a:ln/>
-        </p:spPr>
-        <p:txBody>
-          <a:bodyPr wrap="square" rtlCol="0" anchor="ctr"/>
-          <a:lstStyle/>
-          <a:p>
-            <a:pPr indent="0" marL="0">
-              <a:buNone/>
-            </a:pPr>
-            <a:r>
-              <a:rPr lang="en-US" sz="1300" b="1" dirty="0">
-                <a:solidFill>
-                  <a:srgbClr val="13315C"/>
-                </a:solidFill>
-                <a:latin typeface="Calibri" pitchFamily="34" charset="0"/>
-                <a:ea typeface="Calibri" pitchFamily="34" charset="-122"/>
-                <a:cs typeface="Calibri" pitchFamily="34" charset="-120"/>
-              </a:rPr>
-              <a:t>OUTPUTS:  </a:t>
-            </a:r>
-            <a:pPr indent="0" marL="0">
-              <a:buNone/>
-            </a:pPr>
-            <a:r>
-              <a:rPr lang="en-US" sz="1300" dirty="0">
-                <a:solidFill>
-                  <a:srgbClr val="1A1A1A"/>
-                </a:solidFill>
-                <a:latin typeface="Courier New" pitchFamily="34" charset="0"/>
-                <a:ea typeface="Courier New" pitchFamily="34" charset="-122"/>
-                <a:cs typeface="Courier New" pitchFamily="34" charset="-120"/>
-              </a:rPr>
-              <a:t>p̂_t  =  P(home wins 1H), calibrated 0–1</a:t>
-            </a:r>
-            <a:endParaRPr lang="en-US" sz="1300" dirty="0"/>
-          </a:p>
-        </p:txBody>
-      </p:sp>
-      <p:sp>
-        <p:nvSpPr>
-          <p:cNvPr id="10" name="Text 8"/>
-          <p:cNvSpPr/>
-          <p:nvPr/>
-        </p:nvSpPr>
-        <p:spPr>
-          <a:xfrm>
-            <a:off x="685800" y="3154680"/>
-            <a:ext cx="5029200" cy="457200"/>
-          </a:xfrm>
-          <a:prstGeom prst="rect">
-            <a:avLst/>
-          </a:prstGeom>
-          <a:noFill/>
-          <a:ln/>
-        </p:spPr>
-        <p:txBody>
-          <a:bodyPr wrap="square" rtlCol="0" anchor="ctr"/>
-          <a:lstStyle/>
-          <a:p>
-            <a:pPr indent="0" marL="0">
-              <a:buNone/>
-            </a:pPr>
-            <a:r>
-              <a:rPr lang="en-US" sz="1300" b="1" dirty="0">
-                <a:solidFill>
-                  <a:srgbClr val="13315C"/>
-                </a:solidFill>
-                <a:latin typeface="Calibri" pitchFamily="34" charset="0"/>
-                <a:ea typeface="Calibri" pitchFamily="34" charset="-122"/>
-                <a:cs typeface="Calibri" pitchFamily="34" charset="-120"/>
-              </a:rPr>
-              <a:t>ANSWERS:  </a:t>
-            </a:r>
-            <a:pPr indent="0" marL="0">
-              <a:buNone/>
-            </a:pPr>
-            <a:r>
-              <a:rPr lang="en-US" sz="1300" dirty="0">
-                <a:solidFill>
-                  <a:srgbClr val="1A1A1A"/>
-                </a:solidFill>
-                <a:latin typeface="Calibri" pitchFamily="34" charset="0"/>
-                <a:ea typeface="Calibri" pitchFamily="34" charset="-122"/>
-                <a:cs typeface="Calibri" pitchFamily="34" charset="-120"/>
-              </a:rPr>
-              <a:t>"Is the model accurate?"</a:t>
-            </a:r>
-            <a:endParaRPr lang="en-US" sz="1300" dirty="0"/>
-          </a:p>
-        </p:txBody>
-      </p:sp>
-      <p:sp>
-        <p:nvSpPr>
-          <p:cNvPr id="11" name="Shape 9"/>
-          <p:cNvSpPr/>
-          <p:nvPr/>
-        </p:nvSpPr>
-        <p:spPr>
-          <a:xfrm>
-            <a:off x="685800" y="3749040"/>
-            <a:ext cx="5029200" cy="36576"/>
-          </a:xfrm>
-          <a:prstGeom prst="rect">
-            <a:avLst/>
-          </a:prstGeom>
-          <a:solidFill>
-            <a:srgbClr val="8DA9C4"/>
-          </a:solidFill>
-          <a:ln w="12700">
-            <a:solidFill>
-              <a:srgbClr val="8DA9C4"/>
-            </a:solidFill>
-            <a:prstDash val="solid"/>
-          </a:ln>
-        </p:spPr>
-      </p:sp>
-      <p:sp>
-        <p:nvSpPr>
-          <p:cNvPr id="12" name="Text 10"/>
-          <p:cNvSpPr/>
-          <p:nvPr/>
-        </p:nvSpPr>
-        <p:spPr>
-          <a:xfrm>
-            <a:off x="685800" y="3931920"/>
-            <a:ext cx="5029200" cy="457200"/>
-          </a:xfrm>
-          <a:prstGeom prst="rect">
-            <a:avLst/>
-          </a:prstGeom>
-          <a:noFill/>
-          <a:ln/>
-        </p:spPr>
-        <p:txBody>
-          <a:bodyPr wrap="square" rtlCol="0" anchor="ctr"/>
-          <a:lstStyle/>
-          <a:p>
-            <a:pPr indent="0" marL="0">
-              <a:buNone/>
-            </a:pPr>
-            <a:r>
-              <a:rPr lang="en-US" sz="1400" b="1" dirty="0">
-                <a:solidFill>
-                  <a:srgbClr val="0B2545"/>
-                </a:solidFill>
-                <a:latin typeface="Calibri" pitchFamily="34" charset="0"/>
-                <a:ea typeface="Calibri" pitchFamily="34" charset="-122"/>
-                <a:cs typeface="Calibri" pitchFamily="34" charset="-120"/>
-              </a:rPr>
-              <a:t>FINDING:  </a:t>
-            </a:r>
-            <a:pPr indent="0" marL="0">
-              <a:buNone/>
-            </a:pPr>
-            <a:r>
-              <a:rPr lang="en-US" sz="1600" b="1" dirty="0">
-                <a:solidFill>
-                  <a:srgbClr val="EEA02B"/>
-                </a:solidFill>
-                <a:latin typeface="Calibri" pitchFamily="34" charset="0"/>
-                <a:ea typeface="Calibri" pitchFamily="34" charset="-122"/>
-                <a:cs typeface="Calibri" pitchFamily="34" charset="-120"/>
-              </a:rPr>
-              <a:t>✅  </a:t>
-            </a:r>
-            <a:pPr indent="0" marL="0">
-              <a:buNone/>
-            </a:pPr>
-            <a:r>
-              <a:rPr lang="en-US" sz="1400" b="1" dirty="0">
-                <a:solidFill>
-                  <a:srgbClr val="0B2545"/>
-                </a:solidFill>
-                <a:latin typeface="Calibri" pitchFamily="34" charset="0"/>
-                <a:ea typeface="Calibri" pitchFamily="34" charset="-122"/>
-                <a:cs typeface="Calibri" pitchFamily="34" charset="-120"/>
-              </a:rPr>
-              <a:t>Brier 0.149 OOS, ECE 0.008</a:t>
-            </a:r>
-            <a:endParaRPr lang="en-US" sz="1400" dirty="0"/>
-          </a:p>
-        </p:txBody>
-      </p:sp>
-      <p:sp>
-        <p:nvSpPr>
-          <p:cNvPr id="13" name="Text 11"/>
-          <p:cNvSpPr/>
-          <p:nvPr/>
-        </p:nvSpPr>
-        <p:spPr>
-          <a:xfrm>
-            <a:off x="685800" y="4343400"/>
-            <a:ext cx="5029200" cy="365760"/>
-          </a:xfrm>
-          <a:prstGeom prst="rect">
-            <a:avLst/>
-          </a:prstGeom>
-          <a:noFill/>
-          <a:ln/>
-        </p:spPr>
-        <p:txBody>
-          <a:bodyPr wrap="square" rtlCol="0" anchor="ctr"/>
-          <a:lstStyle/>
-          <a:p>
-            <a:pPr indent="0" marL="0">
-              <a:buNone/>
-            </a:pPr>
-            <a:r>
-              <a:rPr lang="en-US" sz="1100" i="1" dirty="0">
-                <a:solidFill>
-                  <a:srgbClr val="13315C"/>
-                </a:solidFill>
-                <a:latin typeface="Calibri" pitchFamily="34" charset="0"/>
-                <a:ea typeface="Calibri" pitchFamily="34" charset="-122"/>
-                <a:cs typeface="Calibri" pitchFamily="34" charset="-120"/>
-              </a:rPr>
-              <a:t>the probabilities can be trusted</a:t>
-            </a:r>
-            <a:endParaRPr lang="en-US" sz="1100" dirty="0"/>
-          </a:p>
-        </p:txBody>
-      </p:sp>
-      <p:sp>
-        <p:nvSpPr>
-          <p:cNvPr id="14" name="Shape 12"/>
-          <p:cNvSpPr/>
-          <p:nvPr/>
-        </p:nvSpPr>
-        <p:spPr>
-          <a:xfrm>
-            <a:off x="5943600" y="3154680"/>
-            <a:ext cx="640080" cy="548640"/>
-          </a:xfrm>
-          <a:prstGeom prst="rightArrow">
-            <a:avLst/>
-          </a:prstGeom>
-          <a:solidFill>
-            <a:srgbClr val="EEA02B"/>
-          </a:solidFill>
-          <a:ln w="12700">
-            <a:solidFill>
-              <a:srgbClr val="EEA02B"/>
-            </a:solidFill>
-            <a:prstDash val="solid"/>
-          </a:ln>
-        </p:spPr>
-      </p:sp>
-      <p:sp>
-        <p:nvSpPr>
-          <p:cNvPr id="15" name="Text 13"/>
-          <p:cNvSpPr/>
-          <p:nvPr/>
-        </p:nvSpPr>
-        <p:spPr>
-          <a:xfrm>
-            <a:off x="5760720" y="3749040"/>
-            <a:ext cx="1005840" cy="274320"/>
-          </a:xfrm>
-          <a:prstGeom prst="rect">
-            <a:avLst/>
-          </a:prstGeom>
-          <a:noFill/>
-          <a:ln/>
-        </p:spPr>
-        <p:txBody>
-          <a:bodyPr wrap="square" rtlCol="0" anchor="ctr"/>
-          <a:lstStyle/>
-          <a:p>
-            <a:pPr algn="ctr" indent="0" marL="0">
-              <a:buNone/>
-            </a:pPr>
-            <a:r>
-              <a:rPr lang="en-US" sz="900" i="1" dirty="0">
-                <a:solidFill>
-                  <a:srgbClr val="13315C"/>
-                </a:solidFill>
-                <a:latin typeface="Calibri" pitchFamily="34" charset="0"/>
-                <a:ea typeface="Calibri" pitchFamily="34" charset="-122"/>
-                <a:cs typeface="Calibri" pitchFamily="34" charset="-120"/>
-              </a:rPr>
-              <a:t>feeds p̂_t into</a:t>
-            </a:r>
-            <a:endParaRPr lang="en-US" sz="900" dirty="0"/>
-          </a:p>
-        </p:txBody>
-      </p:sp>
-      <p:sp>
-        <p:nvSpPr>
-          <p:cNvPr id="16" name="Shape 14"/>
-          <p:cNvSpPr/>
-          <p:nvPr/>
-        </p:nvSpPr>
-        <p:spPr>
-          <a:xfrm>
-            <a:off x="6675120" y="1417320"/>
-            <a:ext cx="5074920" cy="4114800"/>
-          </a:xfrm>
-          <a:prstGeom prst="roundRect">
-            <a:avLst>
-              <a:gd name="adj" fmla="val 2222"/>
-            </a:avLst>
-          </a:prstGeom>
-          <a:solidFill>
-            <a:srgbClr val="F6F6F2"/>
-          </a:solidFill>
-          <a:ln w="20320">
-            <a:solidFill>
-              <a:srgbClr val="EEA02B"/>
-            </a:solidFill>
-            <a:prstDash val="solid"/>
-          </a:ln>
-        </p:spPr>
-      </p:sp>
-      <p:sp>
-        <p:nvSpPr>
-          <p:cNvPr id="17" name="Shape 15"/>
-          <p:cNvSpPr/>
-          <p:nvPr/>
-        </p:nvSpPr>
-        <p:spPr>
-          <a:xfrm>
-            <a:off x="6675120" y="1417320"/>
-            <a:ext cx="5074920" cy="502920"/>
-          </a:xfrm>
-          <a:prstGeom prst="rect">
-            <a:avLst/>
-          </a:prstGeom>
-          <a:solidFill>
-            <a:srgbClr val="0B2545"/>
-          </a:solidFill>
-          <a:ln w="12700">
-            <a:solidFill>
-              <a:srgbClr val="0B2545"/>
-            </a:solidFill>
-            <a:prstDash val="solid"/>
-          </a:ln>
-        </p:spPr>
-      </p:sp>
-      <p:sp>
-        <p:nvSpPr>
-          <p:cNvPr id="18" name="Text 16"/>
-          <p:cNvSpPr/>
-          <p:nvPr/>
-        </p:nvSpPr>
-        <p:spPr>
-          <a:xfrm>
-            <a:off x="6675120" y="1417320"/>
-            <a:ext cx="5074920" cy="502920"/>
-          </a:xfrm>
-          <a:prstGeom prst="rect">
-            <a:avLst/>
-          </a:prstGeom>
-          <a:noFill/>
-          <a:ln/>
-        </p:spPr>
-        <p:txBody>
-          <a:bodyPr wrap="square" rtlCol="0" anchor="ctr"/>
-          <a:lstStyle/>
-          <a:p>
-            <a:pPr algn="ctr" indent="0" marL="0">
-              <a:buNone/>
-            </a:pPr>
-            <a:r>
-              <a:rPr lang="en-US" sz="1300" b="1" dirty="0">
-                <a:solidFill>
-                  <a:srgbClr val="F6F6F2"/>
-                </a:solidFill>
-                <a:latin typeface="Calibri" pitchFamily="34" charset="0"/>
-                <a:ea typeface="Calibri" pitchFamily="34" charset="-122"/>
-                <a:cs typeface="Calibri" pitchFamily="34" charset="-120"/>
-              </a:rPr>
-              <a:t>METHOD 2 · the overreaction test</a:t>
-            </a:r>
-            <a:endParaRPr lang="en-US" sz="1300" dirty="0"/>
-          </a:p>
-        </p:txBody>
-      </p:sp>
-      <p:sp>
-        <p:nvSpPr>
-          <p:cNvPr id="19" name="Text 17"/>
-          <p:cNvSpPr/>
-          <p:nvPr/>
-        </p:nvSpPr>
-        <p:spPr>
-          <a:xfrm>
-            <a:off x="6858000" y="2057400"/>
-            <a:ext cx="4754880" cy="502920"/>
-          </a:xfrm>
-          <a:prstGeom prst="rect">
-            <a:avLst/>
-          </a:prstGeom>
-          <a:noFill/>
-          <a:ln/>
-        </p:spPr>
-        <p:txBody>
-          <a:bodyPr wrap="square" rtlCol="0" anchor="ctr"/>
-          <a:lstStyle/>
-          <a:p>
-            <a:pPr indent="0" marL="0">
-              <a:buNone/>
-            </a:pPr>
-            <a:r>
-              <a:rPr lang="en-US" sz="1300" b="1" dirty="0">
-                <a:solidFill>
-                  <a:srgbClr val="13315C"/>
-                </a:solidFill>
-                <a:latin typeface="Calibri" pitchFamily="34" charset="0"/>
-                <a:ea typeface="Calibri" pitchFamily="34" charset="-122"/>
-                <a:cs typeface="Calibri" pitchFamily="34" charset="-120"/>
-              </a:rPr>
-              <a:t>INPUTS:  </a:t>
-            </a:r>
-            <a:pPr indent="0" marL="0">
-              <a:buNone/>
-            </a:pPr>
-            <a:r>
-              <a:rPr lang="en-US" sz="1300" dirty="0">
-                <a:solidFill>
-                  <a:srgbClr val="1A1A1A"/>
-                </a:solidFill>
-                <a:latin typeface="Calibri" pitchFamily="34" charset="0"/>
-                <a:ea typeface="Calibri" pitchFamily="34" charset="-122"/>
-                <a:cs typeface="Calibri" pitchFamily="34" charset="-120"/>
-              </a:rPr>
-              <a:t>p̂_t from Method 1, at trailing-team scoring events</a:t>
-            </a:r>
-            <a:endParaRPr lang="en-US" sz="1300" dirty="0"/>
-          </a:p>
-        </p:txBody>
-      </p:sp>
-      <p:sp>
-        <p:nvSpPr>
-          <p:cNvPr id="20" name="Text 18"/>
-          <p:cNvSpPr/>
-          <p:nvPr/>
-        </p:nvSpPr>
-        <p:spPr>
-          <a:xfrm>
-            <a:off x="6858000" y="2606040"/>
-            <a:ext cx="4754880" cy="502920"/>
-          </a:xfrm>
-          <a:prstGeom prst="rect">
-            <a:avLst/>
-          </a:prstGeom>
-          <a:noFill/>
-          <a:ln/>
-        </p:spPr>
-        <p:txBody>
-          <a:bodyPr wrap="square" rtlCol="0" anchor="ctr"/>
-          <a:lstStyle/>
-          <a:p>
-            <a:pPr indent="0" marL="0">
-              <a:buNone/>
-            </a:pPr>
-            <a:r>
-              <a:rPr lang="en-US" sz="1300" b="1" dirty="0">
-                <a:solidFill>
-                  <a:srgbClr val="13315C"/>
-                </a:solidFill>
-                <a:latin typeface="Calibri" pitchFamily="34" charset="0"/>
-                <a:ea typeface="Calibri" pitchFamily="34" charset="-122"/>
-                <a:cs typeface="Calibri" pitchFamily="34" charset="-120"/>
-              </a:rPr>
-              <a:t>OUTPUTS:  </a:t>
-            </a:r>
-            <a:pPr indent="0" marL="0">
-              <a:buNone/>
-            </a:pPr>
-            <a:r>
-              <a:rPr lang="en-US" sz="1300" dirty="0">
-                <a:solidFill>
-                  <a:srgbClr val="1A1A1A"/>
-                </a:solidFill>
-                <a:latin typeface="Courier New" pitchFamily="34" charset="0"/>
-                <a:ea typeface="Courier New" pitchFamily="34" charset="-122"/>
-                <a:cs typeface="Courier New" pitchFamily="34" charset="-120"/>
-              </a:rPr>
-              <a:t>Δp̂_scorer(t)  =  p̂(t+60) − p̂(t)</a:t>
-            </a:r>
-            <a:endParaRPr lang="en-US" sz="1300" dirty="0"/>
-          </a:p>
-        </p:txBody>
-      </p:sp>
-      <p:sp>
-        <p:nvSpPr>
-          <p:cNvPr id="21" name="Text 19"/>
-          <p:cNvSpPr/>
-          <p:nvPr/>
-        </p:nvSpPr>
-        <p:spPr>
-          <a:xfrm>
-            <a:off x="6858000" y="3154680"/>
-            <a:ext cx="4754880" cy="594360"/>
-          </a:xfrm>
-          <a:prstGeom prst="rect">
-            <a:avLst/>
-          </a:prstGeom>
-          <a:noFill/>
-          <a:ln/>
-        </p:spPr>
-        <p:txBody>
-          <a:bodyPr wrap="square" rtlCol="0" anchor="ctr"/>
-          <a:lstStyle/>
-          <a:p>
-            <a:pPr indent="0" marL="0">
-              <a:buNone/>
-            </a:pPr>
-            <a:r>
-              <a:rPr lang="en-US" sz="1300" b="1" dirty="0">
-                <a:solidFill>
-                  <a:srgbClr val="13315C"/>
-                </a:solidFill>
-                <a:latin typeface="Calibri" pitchFamily="34" charset="0"/>
-                <a:ea typeface="Calibri" pitchFamily="34" charset="-122"/>
-                <a:cs typeface="Calibri" pitchFamily="34" charset="-120"/>
-              </a:rPr>
-              <a:t>ANSWERS:  </a:t>
-            </a:r>
-            <a:pPr indent="0" marL="0">
-              <a:buNone/>
-            </a:pPr>
-            <a:r>
-              <a:rPr lang="en-US" sz="1300" dirty="0">
-                <a:solidFill>
-                  <a:srgbClr val="1A1A1A"/>
-                </a:solidFill>
-                <a:latin typeface="Calibri" pitchFamily="34" charset="0"/>
-                <a:ea typeface="Calibri" pitchFamily="34" charset="-122"/>
-                <a:cs typeface="Calibri" pitchFamily="34" charset="-120"/>
-              </a:rPr>
-              <a:t>"Does the market overshoot p̂_t in event windows?"</a:t>
-            </a:r>
-            <a:endParaRPr lang="en-US" sz="1300" dirty="0"/>
-          </a:p>
-        </p:txBody>
-      </p:sp>
-      <p:sp>
-        <p:nvSpPr>
-          <p:cNvPr id="22" name="Shape 20"/>
-          <p:cNvSpPr/>
-          <p:nvPr/>
-        </p:nvSpPr>
-        <p:spPr>
-          <a:xfrm>
-            <a:off x="6858000" y="3749040"/>
-            <a:ext cx="4754880" cy="36576"/>
-          </a:xfrm>
-          <a:prstGeom prst="rect">
-            <a:avLst/>
-          </a:prstGeom>
-          <a:solidFill>
-            <a:srgbClr val="8DA9C4"/>
-          </a:solidFill>
-          <a:ln w="12700">
-            <a:solidFill>
-              <a:srgbClr val="8DA9C4"/>
-            </a:solidFill>
-            <a:prstDash val="solid"/>
-          </a:ln>
-        </p:spPr>
-      </p:sp>
-      <p:sp>
-        <p:nvSpPr>
-          <p:cNvPr id="23" name="Text 21"/>
-          <p:cNvSpPr/>
-          <p:nvPr/>
-        </p:nvSpPr>
-        <p:spPr>
-          <a:xfrm>
-            <a:off x="6858000" y="3931920"/>
-            <a:ext cx="4754880" cy="457200"/>
-          </a:xfrm>
-          <a:prstGeom prst="rect">
-            <a:avLst/>
-          </a:prstGeom>
-          <a:noFill/>
-          <a:ln/>
-        </p:spPr>
-        <p:txBody>
-          <a:bodyPr wrap="square" rtlCol="0" anchor="ctr"/>
-          <a:lstStyle/>
-          <a:p>
-            <a:pPr indent="0" marL="0">
-              <a:buNone/>
-            </a:pPr>
-            <a:r>
-              <a:rPr lang="en-US" sz="1400" b="1" dirty="0">
-                <a:solidFill>
-                  <a:srgbClr val="0B2545"/>
-                </a:solidFill>
-                <a:latin typeface="Calibri" pitchFamily="34" charset="0"/>
-                <a:ea typeface="Calibri" pitchFamily="34" charset="-122"/>
-                <a:cs typeface="Calibri" pitchFamily="34" charset="-120"/>
-              </a:rPr>
-              <a:t>FINDING:  </a:t>
-            </a:r>
-            <a:pPr indent="0" marL="0">
-              <a:buNone/>
-            </a:pPr>
-            <a:r>
-              <a:rPr lang="en-US" sz="1600" b="1" dirty="0">
-                <a:solidFill>
-                  <a:srgbClr val="EEA02B"/>
-                </a:solidFill>
-                <a:latin typeface="Calibri" pitchFamily="34" charset="0"/>
-                <a:ea typeface="Calibri" pitchFamily="34" charset="-122"/>
-                <a:cs typeface="Calibri" pitchFamily="34" charset="-120"/>
-              </a:rPr>
-              <a:t>✅  </a:t>
-            </a:r>
-            <a:pPr indent="0" marL="0">
-              <a:buNone/>
-            </a:pPr>
-            <a:r>
-              <a:rPr lang="en-US" sz="1400" b="1" dirty="0">
-                <a:solidFill>
-                  <a:srgbClr val="0B2545"/>
-                </a:solidFill>
-                <a:latin typeface="Calibri" pitchFamily="34" charset="0"/>
-                <a:ea typeface="Calibri" pitchFamily="34" charset="-122"/>
-                <a:cs typeface="Calibri" pitchFamily="34" charset="-120"/>
-              </a:rPr>
-              <a:t>both tests p &lt; 0.0001</a:t>
-            </a:r>
-            <a:endParaRPr lang="en-US" sz="1400" dirty="0"/>
-          </a:p>
-        </p:txBody>
-      </p:sp>
-      <p:sp>
-        <p:nvSpPr>
-          <p:cNvPr id="24" name="Text 22"/>
-          <p:cNvSpPr/>
-          <p:nvPr/>
-        </p:nvSpPr>
-        <p:spPr>
-          <a:xfrm>
-            <a:off x="6858000" y="4343400"/>
-            <a:ext cx="4754880" cy="365760"/>
-          </a:xfrm>
-          <a:prstGeom prst="rect">
-            <a:avLst/>
-          </a:prstGeom>
-          <a:noFill/>
-          <a:ln/>
-        </p:spPr>
-        <p:txBody>
-          <a:bodyPr wrap="square" rtlCol="0" anchor="ctr"/>
-          <a:lstStyle/>
-          <a:p>
-            <a:pPr indent="0" marL="0">
-              <a:buNone/>
-            </a:pPr>
-            <a:r>
-              <a:rPr lang="en-US" sz="1100" i="1" dirty="0">
-                <a:solidFill>
-                  <a:srgbClr val="13315C"/>
-                </a:solidFill>
-                <a:latin typeface="Calibri" pitchFamily="34" charset="0"/>
-                <a:ea typeface="Calibri" pitchFamily="34" charset="-122"/>
-                <a:cs typeface="Calibri" pitchFamily="34" charset="-120"/>
-              </a:rPr>
-              <a:t>the bias on the model side is real</a:t>
-            </a:r>
-            <a:endParaRPr lang="en-US" sz="1100" dirty="0"/>
-          </a:p>
-        </p:txBody>
-      </p:sp>
-      <p:sp>
-        <p:nvSpPr>
-          <p:cNvPr id="25" name="Shape 23"/>
-          <p:cNvSpPr/>
-          <p:nvPr/>
-        </p:nvSpPr>
-        <p:spPr>
-          <a:xfrm>
-            <a:off x="502920" y="5669280"/>
-            <a:ext cx="11247120" cy="868680"/>
-          </a:xfrm>
-          <a:prstGeom prst="roundRect">
-            <a:avLst>
-              <a:gd name="adj" fmla="val 8421"/>
-            </a:avLst>
-          </a:prstGeom>
-          <a:solidFill>
-            <a:srgbClr val="0B2545"/>
-          </a:solidFill>
-          <a:ln w="12700">
-            <a:solidFill>
-              <a:srgbClr val="0B2545"/>
-            </a:solidFill>
-            <a:prstDash val="solid"/>
-          </a:ln>
-        </p:spPr>
-      </p:sp>
-      <p:sp>
-        <p:nvSpPr>
-          <p:cNvPr id="26" name="Text 24"/>
-          <p:cNvSpPr/>
-          <p:nvPr/>
-        </p:nvSpPr>
-        <p:spPr>
-          <a:xfrm>
-            <a:off x="777240" y="5669280"/>
-            <a:ext cx="10698480" cy="868680"/>
-          </a:xfrm>
-          <a:prstGeom prst="rect">
-            <a:avLst/>
-          </a:prstGeom>
-          <a:noFill/>
-          <a:ln/>
-        </p:spPr>
-        <p:txBody>
-          <a:bodyPr wrap="square" rtlCol="0" anchor="ctr"/>
-          <a:lstStyle/>
-          <a:p>
-            <a:pPr algn="ctr" indent="0" marL="0">
-              <a:buNone/>
-            </a:pPr>
-            <a:r>
-              <a:rPr lang="en-US" sz="1700" b="1" dirty="0">
-                <a:solidFill>
-                  <a:srgbClr val="EEA02B"/>
-                </a:solidFill>
-                <a:latin typeface="Georgia" pitchFamily="34" charset="0"/>
-                <a:ea typeface="Georgia" pitchFamily="34" charset="-122"/>
-                <a:cs typeface="Georgia" pitchFamily="34" charset="-120"/>
-              </a:rPr>
-              <a:t>Both findings pass.  </a:t>
-            </a:r>
-            <a:pPr algn="ctr" indent="0" marL="0">
-              <a:buNone/>
-            </a:pPr>
-            <a:r>
-              <a:rPr lang="en-US" sz="1700" dirty="0">
-                <a:solidFill>
-                  <a:srgbClr val="F6F6F2"/>
-                </a:solidFill>
-                <a:latin typeface="Georgia" pitchFamily="34" charset="0"/>
-                <a:ea typeface="Georgia" pitchFamily="34" charset="-122"/>
-                <a:cs typeface="Georgia" pitchFamily="34" charset="-120"/>
-              </a:rPr>
-              <a:t>Next: does this exploitable bias actually survive the vig on real markets?  →  </a:t>
-            </a:r>
-            <a:pPr algn="ctr" indent="0" marL="0">
-              <a:buNone/>
-            </a:pPr>
-            <a:r>
-              <a:rPr lang="en-US" sz="1700" b="1" i="1" dirty="0">
-                <a:solidFill>
-                  <a:srgbClr val="EEA02B"/>
-                </a:solidFill>
-                <a:latin typeface="Georgia" pitchFamily="34" charset="0"/>
-                <a:ea typeface="Georgia" pitchFamily="34" charset="-122"/>
-                <a:cs typeface="Georgia" pitchFamily="34" charset="-120"/>
-              </a:rPr>
-              <a:t>backtest</a:t>
-            </a:r>
-            <a:endParaRPr lang="en-US" sz="1700" dirty="0"/>
-          </a:p>
-        </p:txBody>
-      </p:sp>
-      <p:sp>
-        <p:nvSpPr>
-          <p:cNvPr id="27" name="Text 25"/>
-          <p:cNvSpPr/>
-          <p:nvPr/>
-        </p:nvSpPr>
-        <p:spPr>
-          <a:xfrm>
-            <a:off x="502920" y="6492240"/>
-            <a:ext cx="7315200" cy="274320"/>
-          </a:xfrm>
-          <a:prstGeom prst="rect">
-            <a:avLst/>
-          </a:prstGeom>
-          <a:noFill/>
-          <a:ln/>
-        </p:spPr>
-        <p:txBody>
-          <a:bodyPr wrap="square" rtlCol="0" anchor="ctr"/>
-          <a:lstStyle/>
-          <a:p>
-            <a:pPr indent="0" marL="0">
-              <a:buNone/>
-            </a:pPr>
-            <a:r>
-              <a:rPr lang="en-US" sz="1000" dirty="0">
-                <a:solidFill>
-                  <a:srgbClr val="8DA9C4"/>
-                </a:solidFill>
-                <a:latin typeface="Calibri" pitchFamily="34" charset="0"/>
-                <a:ea typeface="Calibri" pitchFamily="34" charset="-122"/>
-                <a:cs typeface="Calibri" pitchFamily="34" charset="-120"/>
-              </a:rPr>
-              <a:t>STATS 211 · NBA Mispricing · Sit &amp; Manathattai</a:t>
-            </a:r>
-            <a:endParaRPr lang="en-US" sz="1000" dirty="0"/>
-          </a:p>
-        </p:txBody>
-      </p:sp>
-      <p:sp>
-        <p:nvSpPr>
-          <p:cNvPr id="28" name="Text 26"/>
           <p:cNvSpPr/>
           <p:nvPr/>
         </p:nvSpPr>

--- a/slides/final_deck.pptx
+++ b/slides/final_deck.pptx
@@ -2832,7 +2832,7 @@
                 <a:ea typeface="Calibri" pitchFamily="34" charset="-122"/>
                 <a:cs typeface="Calibri" pitchFamily="34" charset="-120"/>
               </a:rPr>
-              <a:t>FINDING:  </a:t>
+              <a:t>FINDING 1:  </a:t>
             </a:r>
             <a:pPr indent="0" marL="0">
               <a:buNone/>
@@ -2860,7 +2860,7 @@
                 <a:ea typeface="Calibri" pitchFamily="34" charset="-122"/>
                 <a:cs typeface="Calibri" pitchFamily="34" charset="-120"/>
               </a:rPr>
-              <a:t>Brier 0.149 OOS, ECE 0.008</a:t>
+              <a:t>the model is calibrated</a:t>
             </a:r>
             <a:endParaRPr lang="en-US" sz="1400" dirty="0"/>
           </a:p>
@@ -2899,7 +2899,7 @@
                 <a:ea typeface="Calibri" pitchFamily="34" charset="-122"/>
                 <a:cs typeface="Calibri" pitchFamily="34" charset="-120"/>
               </a:rPr>
-              <a:t>the probabilities can be trusted</a:t>
+              <a:t>(numbers on the Finding 1 slide)</a:t>
             </a:r>
             <a:endParaRPr lang="en-US" sz="1100" dirty="0"/>
           </a:p>
@@ -3277,7 +3277,7 @@
                 <a:ea typeface="Calibri" pitchFamily="34" charset="-122"/>
                 <a:cs typeface="Calibri" pitchFamily="34" charset="-120"/>
               </a:rPr>
-              <a:t>FINDING:  </a:t>
+              <a:t>FINDING 2:  </a:t>
             </a:r>
             <a:pPr indent="0" marL="0">
               <a:buNone/>
@@ -3305,7 +3305,7 @@
                 <a:ea typeface="Calibri" pitchFamily="34" charset="-122"/>
                 <a:cs typeface="Calibri" pitchFamily="34" charset="-120"/>
               </a:rPr>
-              <a:t>both tests p &lt; 0.0001</a:t>
+              <a:t>the market overshoots p̂_t</a:t>
             </a:r>
             <a:endParaRPr lang="en-US" sz="1400" dirty="0"/>
           </a:p>
@@ -3344,7 +3344,7 @@
                 <a:ea typeface="Calibri" pitchFamily="34" charset="-122"/>
                 <a:cs typeface="Calibri" pitchFamily="34" charset="-120"/>
               </a:rPr>
-              <a:t>the bias on the model side is real</a:t>
+              <a:t>(numbers on the Finding 2 slide)</a:t>
             </a:r>
             <a:endParaRPr lang="en-US" sz="1100" dirty="0"/>
           </a:p>
@@ -13851,7 +13851,7 @@
         <p:spPr>
           <a:xfrm>
             <a:off x="9006840" y="3931920"/>
-            <a:ext cx="2788920" cy="320040"/>
+            <a:ext cx="2788920" cy="548640"/>
           </a:xfrm>
           <a:prstGeom prst="rect">
             <a:avLst/>
@@ -13875,54 +13875,32 @@
                 <a:ea typeface="Calibri" pitchFamily="34" charset="-122"/>
                 <a:cs typeface="Calibri" pitchFamily="34" charset="-120"/>
               </a:rPr>
-              <a:t>Brier 0.149  ·  ECE 0.008</a:t>
+              <a:t>one calibrated probability</a:t>
             </a:r>
             <a:endParaRPr lang="en-US" sz="1100" dirty="0"/>
           </a:p>
+          <a:p>
+            <a:pPr algn="ctr" indent="0" marL="0">
+              <a:buNone/>
+            </a:pPr>
+            <a:r>
+              <a:rPr lang="en-US" sz="1100" i="1" dirty="0">
+                <a:solidFill>
+                  <a:srgbClr val="13315C"/>
+                </a:solidFill>
+                <a:latin typeface="Calibri" pitchFamily="34" charset="0"/>
+                <a:ea typeface="Calibri" pitchFamily="34" charset="-122"/>
+                <a:cs typeface="Calibri" pitchFamily="34" charset="-120"/>
+              </a:rPr>
+              <a:t>per minute of game time</a:t>
+            </a:r>
+            <a:endParaRPr lang="en-US" sz="1100" dirty="0"/>
+          </a:p>
         </p:txBody>
       </p:sp>
       <p:sp>
         <p:nvSpPr>
           <p:cNvPr id="29" name="Text 27"/>
-          <p:cNvSpPr/>
-          <p:nvPr/>
-        </p:nvSpPr>
-        <p:spPr>
-          <a:xfrm>
-            <a:off x="9006840" y="4206240"/>
-            <a:ext cx="2788920" cy="320040"/>
-          </a:xfrm>
-          <a:prstGeom prst="rect">
-            <a:avLst/>
-          </a:prstGeom>
-          <a:noFill/>
-          <a:ln/>
-        </p:spPr>
-        <p:txBody>
-          <a:bodyPr wrap="square" rtlCol="0" anchor="ctr"/>
-          <a:lstStyle/>
-          <a:p>
-            <a:pPr algn="ctr" indent="0" marL="0">
-              <a:buNone/>
-            </a:pPr>
-            <a:r>
-              <a:rPr lang="en-US" sz="1000" i="1" dirty="0">
-                <a:solidFill>
-                  <a:srgbClr val="8DA9C4"/>
-                </a:solidFill>
-                <a:latin typeface="Calibri" pitchFamily="34" charset="0"/>
-                <a:ea typeface="Calibri" pitchFamily="34" charset="-122"/>
-                <a:cs typeface="Calibri" pitchFamily="34" charset="-120"/>
-              </a:rPr>
-              <a:t>on the 2024-25 held-out season</a:t>
-            </a:r>
-            <a:endParaRPr lang="en-US" sz="1000" dirty="0"/>
-          </a:p>
-        </p:txBody>
-      </p:sp>
-      <p:sp>
-        <p:nvSpPr>
-          <p:cNvPr id="30" name="Text 28"/>
           <p:cNvSpPr/>
           <p:nvPr/>
         </p:nvSpPr>
@@ -13953,7 +13931,7 @@
                 <a:ea typeface="Calibri" pitchFamily="34" charset="-122"/>
                 <a:cs typeface="Calibri" pitchFamily="34" charset="-120"/>
               </a:rPr>
-              <a:t>→ trustworthy</a:t>
+              <a:t>→ used by Method 2 + the backtest</a:t>
             </a:r>
             <a:endParaRPr lang="en-US" sz="1100" dirty="0"/>
           </a:p>
@@ -13961,7 +13939,7 @@
       </p:sp>
       <p:sp>
         <p:nvSpPr>
-          <p:cNvPr id="31" name="Shape 29"/>
+          <p:cNvPr id="30" name="Shape 28"/>
           <p:cNvSpPr/>
           <p:nvPr/>
         </p:nvSpPr>
@@ -13988,7 +13966,7 @@
       </p:sp>
       <p:sp>
         <p:nvSpPr>
-          <p:cNvPr id="32" name="Text 30"/>
+          <p:cNvPr id="31" name="Text 29"/>
           <p:cNvSpPr/>
           <p:nvPr/>
         </p:nvSpPr>
@@ -14027,7 +14005,7 @@
       </p:sp>
       <p:sp>
         <p:nvSpPr>
-          <p:cNvPr id="33" name="Text 31"/>
+          <p:cNvPr id="32" name="Text 30"/>
           <p:cNvSpPr/>
           <p:nvPr/>
         </p:nvSpPr>
@@ -14178,7 +14156,7 @@
       </p:sp>
       <p:sp>
         <p:nvSpPr>
-          <p:cNvPr id="34" name="Text 32"/>
+          <p:cNvPr id="33" name="Text 31"/>
           <p:cNvSpPr/>
           <p:nvPr/>
         </p:nvSpPr>
@@ -14217,7 +14195,7 @@
       </p:sp>
       <p:sp>
         <p:nvSpPr>
-          <p:cNvPr id="35" name="Text 33"/>
+          <p:cNvPr id="34" name="Text 32"/>
           <p:cNvSpPr/>
           <p:nvPr/>
         </p:nvSpPr>

--- a/slides/final_deck.pptx
+++ b/slides/final_deck.pptx
@@ -2456,7 +2456,7 @@
                 <a:ea typeface="Georgia" pitchFamily="34" charset="-122"/>
                 <a:cs typeface="Georgia" pitchFamily="34" charset="-120"/>
               </a:rPr>
-              <a:t>How we use both methods</a:t>
+              <a:t>Method 1 vs Method 2 · the asymmetry</a:t>
             </a:r>
             <a:endParaRPr lang="en-US" sz="2800" dirty="0"/>
           </a:p>
@@ -2495,7 +2495,7 @@
                 <a:ea typeface="Calibri" pitchFamily="34" charset="-122"/>
                 <a:cs typeface="Calibri" pitchFamily="34" charset="-120"/>
               </a:rPr>
-              <a:t>They don't compete · Method 2 STACKS on top of Method 1</a:t>
+              <a:t>Method 1 drives every trade · Method 2 proved the bias but didn't trade</a:t>
             </a:r>
             <a:endParaRPr lang="en-US" sz="1400" dirty="0"/>
           </a:p>
@@ -2543,7 +2543,7 @@
           <a:solidFill>
             <a:srgbClr val="F6F6F2"/>
           </a:solidFill>
-          <a:ln w="20320">
+          <a:ln w="22860">
             <a:solidFill>
               <a:srgbClr val="0B2545"/>
             </a:solidFill>
@@ -2601,7 +2601,7 @@
               <a:buNone/>
             </a:pPr>
             <a:r>
-              <a:rPr lang="en-US" sz="1300" b="1" dirty="0">
+              <a:rPr lang="en-US" sz="1400" b="1" dirty="0">
                 <a:solidFill>
                   <a:srgbClr val="F6F6F2"/>
                 </a:solidFill>
@@ -2609,9 +2609,9 @@
                 <a:ea typeface="Calibri" pitchFamily="34" charset="-122"/>
                 <a:cs typeface="Calibri" pitchFamily="34" charset="-120"/>
               </a:rPr>
-              <a:t>METHOD 1 · the calibrated WP model</a:t>
-            </a:r>
-            <a:endParaRPr lang="en-US" sz="1300" dirty="0"/>
+              <a:t>METHOD 1 · the TRADING signal</a:t>
+            </a:r>
+            <a:endParaRPr lang="en-US" sz="1400" dirty="0"/>
           </a:p>
         </p:txBody>
       </p:sp>
@@ -2623,24 +2623,24 @@
         </p:nvSpPr>
         <p:spPr>
           <a:xfrm>
-            <a:off x="685800" y="2057400"/>
-            <a:ext cx="5029200" cy="502920"/>
-          </a:xfrm>
-          <a:prstGeom prst="rect">
-            <a:avLst/>
-          </a:prstGeom>
-          <a:noFill/>
-          <a:ln/>
-        </p:spPr>
-        <p:txBody>
-          <a:bodyPr wrap="square" rtlCol="0" anchor="ctr"/>
-          <a:lstStyle/>
-          <a:p>
-            <a:pPr indent="0" marL="0">
-              <a:buNone/>
-            </a:pPr>
-            <a:r>
-              <a:rPr lang="en-US" sz="1300" b="1" dirty="0">
+            <a:off x="502920" y="1993392"/>
+            <a:ext cx="5349240" cy="274320"/>
+          </a:xfrm>
+          <a:prstGeom prst="rect">
+            <a:avLst/>
+          </a:prstGeom>
+          <a:noFill/>
+          <a:ln/>
+        </p:spPr>
+        <p:txBody>
+          <a:bodyPr wrap="square" rtlCol="0" anchor="ctr"/>
+          <a:lstStyle/>
+          <a:p>
+            <a:pPr algn="ctr" indent="0" marL="0">
+              <a:buNone/>
+            </a:pPr>
+            <a:r>
+              <a:rPr lang="en-US" sz="1100" i="1" dirty="0">
                 <a:solidFill>
                   <a:srgbClr val="13315C"/>
                 </a:solidFill>
@@ -2648,8 +2648,33 @@
                 <a:ea typeface="Calibri" pitchFamily="34" charset="-122"/>
                 <a:cs typeface="Calibri" pitchFamily="34" charset="-120"/>
               </a:rPr>
-              <a:t>INPUTS:  </a:t>
-            </a:r>
+              <a:t>(active component)</a:t>
+            </a:r>
+            <a:endParaRPr lang="en-US" sz="1100" dirty="0"/>
+          </a:p>
+        </p:txBody>
+      </p:sp>
+      <p:sp>
+        <p:nvSpPr>
+          <p:cNvPr id="9" name="Text 7"/>
+          <p:cNvSpPr/>
+          <p:nvPr/>
+        </p:nvSpPr>
+        <p:spPr>
+          <a:xfrm>
+            <a:off x="685800" y="2286000"/>
+            <a:ext cx="5029200" cy="411480"/>
+          </a:xfrm>
+          <a:prstGeom prst="rect">
+            <a:avLst/>
+          </a:prstGeom>
+          <a:noFill/>
+          <a:ln/>
+        </p:spPr>
+        <p:txBody>
+          <a:bodyPr wrap="square" rtlCol="0" anchor="ctr"/>
+          <a:lstStyle/>
+          <a:p>
             <a:pPr indent="0" marL="0">
               <a:buNone/>
             </a:pPr>
@@ -2662,46 +2687,7 @@
                 <a:ea typeface="Calibri" pitchFamily="34" charset="-122"/>
                 <a:cs typeface="Calibri" pitchFamily="34" charset="-120"/>
               </a:rPr>
-              <a:t>4 game-state features (min, score-diff, run, period)</a:t>
-            </a:r>
-            <a:endParaRPr lang="en-US" sz="1300" dirty="0"/>
-          </a:p>
-        </p:txBody>
-      </p:sp>
-      <p:sp>
-        <p:nvSpPr>
-          <p:cNvPr id="9" name="Text 7"/>
-          <p:cNvSpPr/>
-          <p:nvPr/>
-        </p:nvSpPr>
-        <p:spPr>
-          <a:xfrm>
-            <a:off x="685800" y="2606040"/>
-            <a:ext cx="5029200" cy="502920"/>
-          </a:xfrm>
-          <a:prstGeom prst="rect">
-            <a:avLst/>
-          </a:prstGeom>
-          <a:noFill/>
-          <a:ln/>
-        </p:spPr>
-        <p:txBody>
-          <a:bodyPr wrap="square" rtlCol="0" anchor="ctr"/>
-          <a:lstStyle/>
-          <a:p>
-            <a:pPr indent="0" marL="0">
-              <a:buNone/>
-            </a:pPr>
-            <a:r>
-              <a:rPr lang="en-US" sz="1300" b="1" dirty="0">
-                <a:solidFill>
-                  <a:srgbClr val="13315C"/>
-                </a:solidFill>
-                <a:latin typeface="Calibri" pitchFamily="34" charset="0"/>
-                <a:ea typeface="Calibri" pitchFamily="34" charset="-122"/>
-                <a:cs typeface="Calibri" pitchFamily="34" charset="-120"/>
-              </a:rPr>
-              <a:t>OUTPUTS:  </a:t>
+              <a:t>•  computes </a:t>
             </a:r>
             <a:pPr indent="0" marL="0">
               <a:buNone/>
@@ -2709,13 +2695,13 @@
             <a:r>
               <a:rPr lang="en-US" sz="1300" dirty="0">
                 <a:solidFill>
-                  <a:srgbClr val="1A1A1A"/>
+                  <a:srgbClr val="0B2545"/>
                 </a:solidFill>
                 <a:latin typeface="Courier New" pitchFamily="34" charset="0"/>
                 <a:ea typeface="Courier New" pitchFamily="34" charset="-122"/>
                 <a:cs typeface="Courier New" pitchFamily="34" charset="-120"/>
               </a:rPr>
-              <a:t>p̂_t  =  P(home wins 1H), calibrated 0–1</a:t>
+              <a:t>edge_t  =  p̂_t − p_market_t</a:t>
             </a:r>
             <a:endParaRPr lang="en-US" sz="1300" dirty="0"/>
           </a:p>
@@ -2729,33 +2715,72 @@
         </p:nvSpPr>
         <p:spPr>
           <a:xfrm>
-            <a:off x="685800" y="3154680"/>
-            <a:ext cx="5029200" cy="457200"/>
-          </a:xfrm>
-          <a:prstGeom prst="rect">
-            <a:avLst/>
-          </a:prstGeom>
-          <a:noFill/>
-          <a:ln/>
-        </p:spPr>
-        <p:txBody>
-          <a:bodyPr wrap="square" rtlCol="0" anchor="ctr"/>
-          <a:lstStyle/>
-          <a:p>
+            <a:off x="685800" y="2697480"/>
+            <a:ext cx="5029200" cy="411480"/>
+          </a:xfrm>
+          <a:prstGeom prst="rect">
+            <a:avLst/>
+          </a:prstGeom>
+          <a:noFill/>
+          <a:ln/>
+        </p:spPr>
+        <p:txBody>
+          <a:bodyPr wrap="square" rtlCol="0" anchor="ctr"/>
+          <a:lstStyle/>
+          <a:p>
+            <a:pPr indent="0" marL="0">
+              <a:buNone/>
+            </a:pPr>
+            <a:r>
+              <a:rPr lang="en-US" sz="1300" dirty="0">
+                <a:solidFill>
+                  <a:srgbClr val="1A1A1A"/>
+                </a:solidFill>
+                <a:latin typeface="Calibri" pitchFamily="34" charset="0"/>
+                <a:ea typeface="Calibri" pitchFamily="34" charset="-122"/>
+                <a:cs typeface="Calibri" pitchFamily="34" charset="-120"/>
+              </a:rPr>
+              <a:t>•  </a:t>
+            </a:r>
             <a:pPr indent="0" marL="0">
               <a:buNone/>
             </a:pPr>
             <a:r>
               <a:rPr lang="en-US" sz="1300" b="1" dirty="0">
                 <a:solidFill>
-                  <a:srgbClr val="13315C"/>
-                </a:solidFill>
-                <a:latin typeface="Calibri" pitchFamily="34" charset="0"/>
-                <a:ea typeface="Calibri" pitchFamily="34" charset="-122"/>
-                <a:cs typeface="Calibri" pitchFamily="34" charset="-120"/>
-              </a:rPr>
-              <a:t>ANSWERS:  </a:t>
-            </a:r>
+                  <a:srgbClr val="0B2545"/>
+                </a:solidFill>
+                <a:latin typeface="Courier New" pitchFamily="34" charset="0"/>
+                <a:ea typeface="Courier New" pitchFamily="34" charset="-122"/>
+                <a:cs typeface="Courier New" pitchFamily="34" charset="-120"/>
+              </a:rPr>
+              <a:t>|edge| &gt; threshold  →  BET</a:t>
+            </a:r>
+            <a:endParaRPr lang="en-US" sz="1300" dirty="0"/>
+          </a:p>
+        </p:txBody>
+      </p:sp>
+      <p:sp>
+        <p:nvSpPr>
+          <p:cNvPr id="11" name="Text 9"/>
+          <p:cNvSpPr/>
+          <p:nvPr/>
+        </p:nvSpPr>
+        <p:spPr>
+          <a:xfrm>
+            <a:off x="685800" y="3108960"/>
+            <a:ext cx="5029200" cy="411480"/>
+          </a:xfrm>
+          <a:prstGeom prst="rect">
+            <a:avLst/>
+          </a:prstGeom>
+          <a:noFill/>
+          <a:ln/>
+        </p:spPr>
+        <p:txBody>
+          <a:bodyPr wrap="square" rtlCol="0" anchor="ctr"/>
+          <a:lstStyle/>
+          <a:p>
             <a:pPr indent="0" marL="0">
               <a:buNone/>
             </a:pPr>
@@ -2768,7 +2793,7 @@
                 <a:ea typeface="Calibri" pitchFamily="34" charset="-122"/>
                 <a:cs typeface="Calibri" pitchFamily="34" charset="-120"/>
               </a:rPr>
-              <a:t>"Is the model accurate?"</a:t>
+              <a:t>•  sign of edge → which side</a:t>
             </a:r>
             <a:endParaRPr lang="en-US" sz="1300" dirty="0"/>
           </a:p>
@@ -2776,13 +2801,52 @@
       </p:sp>
       <p:sp>
         <p:nvSpPr>
-          <p:cNvPr id="11" name="Shape 9"/>
-          <p:cNvSpPr/>
-          <p:nvPr/>
-        </p:nvSpPr>
-        <p:spPr>
-          <a:xfrm>
-            <a:off x="685800" y="3749040"/>
+          <p:cNvPr id="12" name="Text 10"/>
+          <p:cNvSpPr/>
+          <p:nvPr/>
+        </p:nvSpPr>
+        <p:spPr>
+          <a:xfrm>
+            <a:off x="685800" y="3520440"/>
+            <a:ext cx="5029200" cy="411480"/>
+          </a:xfrm>
+          <a:prstGeom prst="rect">
+            <a:avLst/>
+          </a:prstGeom>
+          <a:noFill/>
+          <a:ln/>
+        </p:spPr>
+        <p:txBody>
+          <a:bodyPr wrap="square" rtlCol="0" anchor="ctr"/>
+          <a:lstStyle/>
+          <a:p>
+            <a:pPr indent="0" marL="0">
+              <a:buNone/>
+            </a:pPr>
+            <a:r>
+              <a:rPr lang="en-US" sz="1300" dirty="0">
+                <a:solidFill>
+                  <a:srgbClr val="1A1A1A"/>
+                </a:solidFill>
+                <a:latin typeface="Calibri" pitchFamily="34" charset="0"/>
+                <a:ea typeface="Calibri" pitchFamily="34" charset="-122"/>
+                <a:cs typeface="Calibri" pitchFamily="34" charset="-120"/>
+              </a:rPr>
+              <a:t>•  p̂_t → Kelly stake size</a:t>
+            </a:r>
+            <a:endParaRPr lang="en-US" sz="1300" dirty="0"/>
+          </a:p>
+        </p:txBody>
+      </p:sp>
+      <p:sp>
+        <p:nvSpPr>
+          <p:cNvPr id="13" name="Shape 11"/>
+          <p:cNvSpPr/>
+          <p:nvPr/>
+        </p:nvSpPr>
+        <p:spPr>
+          <a:xfrm>
+            <a:off x="685800" y="4023360"/>
             <a:ext cx="5029200" cy="36576"/>
           </a:xfrm>
           <a:prstGeom prst="rect">
@@ -2801,13 +2865,13 @@
       </p:sp>
       <p:sp>
         <p:nvSpPr>
-          <p:cNvPr id="12" name="Text 10"/>
-          <p:cNvSpPr/>
-          <p:nvPr/>
-        </p:nvSpPr>
-        <p:spPr>
-          <a:xfrm>
-            <a:off x="685800" y="3931920"/>
+          <p:cNvPr id="14" name="Text 12"/>
+          <p:cNvSpPr/>
+          <p:nvPr/>
+        </p:nvSpPr>
+        <p:spPr>
+          <a:xfrm>
+            <a:off x="685800" y="4160520"/>
             <a:ext cx="5029200" cy="457200"/>
           </a:xfrm>
           <a:prstGeom prst="rect">
@@ -2824,21 +2888,519 @@
               <a:buNone/>
             </a:pPr>
             <a:r>
+              <a:rPr lang="en-US" sz="1300" b="1" dirty="0">
+                <a:solidFill>
+                  <a:srgbClr val="0B2545"/>
+                </a:solidFill>
+                <a:latin typeface="Calibri" pitchFamily="34" charset="0"/>
+                <a:ea typeface="Calibri" pitchFamily="34" charset="-122"/>
+                <a:cs typeface="Calibri" pitchFamily="34" charset="-120"/>
+              </a:rPr>
+              <a:t>100% of bets, 100% of P&amp;L  </a:t>
+            </a:r>
+            <a:pPr indent="0" marL="0">
+              <a:buNone/>
+            </a:pPr>
+            <a:r>
+              <a:rPr lang="en-US" sz="1300" i="1" dirty="0">
+                <a:solidFill>
+                  <a:srgbClr val="13315C"/>
+                </a:solidFill>
+                <a:latin typeface="Calibri" pitchFamily="34" charset="0"/>
+                <a:ea typeface="Calibri" pitchFamily="34" charset="-122"/>
+                <a:cs typeface="Calibri" pitchFamily="34" charset="-120"/>
+              </a:rPr>
+              <a:t>in the backtest</a:t>
+            </a:r>
+            <a:endParaRPr lang="en-US" sz="1300" dirty="0"/>
+          </a:p>
+        </p:txBody>
+      </p:sp>
+      <p:sp>
+        <p:nvSpPr>
+          <p:cNvPr id="15" name="Text 13"/>
+          <p:cNvSpPr/>
+          <p:nvPr/>
+        </p:nvSpPr>
+        <p:spPr>
+          <a:xfrm>
+            <a:off x="685800" y="4663440"/>
+            <a:ext cx="5029200" cy="457200"/>
+          </a:xfrm>
+          <a:prstGeom prst="rect">
+            <a:avLst/>
+          </a:prstGeom>
+          <a:noFill/>
+          <a:ln/>
+        </p:spPr>
+        <p:txBody>
+          <a:bodyPr wrap="square" rtlCol="0" anchor="ctr"/>
+          <a:lstStyle/>
+          <a:p>
+            <a:pPr indent="0" marL="0">
+              <a:buNone/>
+            </a:pPr>
+            <a:r>
+              <a:rPr lang="en-US" sz="1100" b="1" dirty="0">
+                <a:solidFill>
+                  <a:srgbClr val="13315C"/>
+                </a:solidFill>
+                <a:latin typeface="Calibri" pitchFamily="34" charset="0"/>
+                <a:ea typeface="Calibri" pitchFamily="34" charset="-122"/>
+                <a:cs typeface="Calibri" pitchFamily="34" charset="-120"/>
+              </a:rPr>
+              <a:t>Tested on:  </a:t>
+            </a:r>
+            <a:pPr indent="0" marL="0">
+              <a:buNone/>
+            </a:pPr>
+            <a:r>
+              <a:rPr lang="en-US" sz="1100" i="1" dirty="0">
+                <a:solidFill>
+                  <a:srgbClr val="1A1A1A"/>
+                </a:solidFill>
+                <a:latin typeface="Calibri" pitchFamily="34" charset="0"/>
+                <a:ea typeface="Calibri" pitchFamily="34" charset="-122"/>
+                <a:cs typeface="Calibri" pitchFamily="34" charset="-120"/>
+              </a:rPr>
+              <a:t>Game 5 (sportsbook)  +  Kalshi pool</a:t>
+            </a:r>
+            <a:endParaRPr lang="en-US" sz="1100" dirty="0"/>
+          </a:p>
+        </p:txBody>
+      </p:sp>
+      <p:sp>
+        <p:nvSpPr>
+          <p:cNvPr id="16" name="Text 14"/>
+          <p:cNvSpPr/>
+          <p:nvPr/>
+        </p:nvSpPr>
+        <p:spPr>
+          <a:xfrm>
+            <a:off x="5852160" y="3291840"/>
+            <a:ext cx="457200" cy="365760"/>
+          </a:xfrm>
+          <a:prstGeom prst="rect">
+            <a:avLst/>
+          </a:prstGeom>
+          <a:noFill/>
+          <a:ln/>
+        </p:spPr>
+        <p:txBody>
+          <a:bodyPr wrap="square" rtlCol="0" anchor="ctr"/>
+          <a:lstStyle/>
+          <a:p>
+            <a:pPr algn="ctr" indent="0" marL="0">
+              <a:buNone/>
+            </a:pPr>
+            <a:r>
+              <a:rPr lang="en-US" sz="1800" b="1" i="1" dirty="0">
+                <a:solidFill>
+                  <a:srgbClr val="8DA9C4"/>
+                </a:solidFill>
+                <a:latin typeface="Georgia" pitchFamily="34" charset="0"/>
+                <a:ea typeface="Georgia" pitchFamily="34" charset="-122"/>
+                <a:cs typeface="Georgia" pitchFamily="34" charset="-120"/>
+              </a:rPr>
+              <a:t>vs</a:t>
+            </a:r>
+            <a:endParaRPr lang="en-US" sz="1800" dirty="0"/>
+          </a:p>
+        </p:txBody>
+      </p:sp>
+      <p:sp>
+        <p:nvSpPr>
+          <p:cNvPr id="17" name="Shape 15"/>
+          <p:cNvSpPr/>
+          <p:nvPr/>
+        </p:nvSpPr>
+        <p:spPr>
+          <a:xfrm>
+            <a:off x="6355080" y="1417320"/>
+            <a:ext cx="5394960" cy="4114800"/>
+          </a:xfrm>
+          <a:prstGeom prst="roundRect">
+            <a:avLst>
+              <a:gd name="adj" fmla="val 2222"/>
+            </a:avLst>
+          </a:prstGeom>
+          <a:solidFill>
+            <a:srgbClr val="F6F6F2"/>
+          </a:solidFill>
+          <a:ln w="20320">
+            <a:solidFill>
+              <a:srgbClr val="EEA02B"/>
+            </a:solidFill>
+            <a:prstDash val="solid"/>
+          </a:ln>
+        </p:spPr>
+      </p:sp>
+      <p:sp>
+        <p:nvSpPr>
+          <p:cNvPr id="18" name="Shape 16"/>
+          <p:cNvSpPr/>
+          <p:nvPr/>
+        </p:nvSpPr>
+        <p:spPr>
+          <a:xfrm>
+            <a:off x="6355080" y="1417320"/>
+            <a:ext cx="5394960" cy="502920"/>
+          </a:xfrm>
+          <a:prstGeom prst="rect">
+            <a:avLst/>
+          </a:prstGeom>
+          <a:solidFill>
+            <a:srgbClr val="13315C"/>
+          </a:solidFill>
+          <a:ln w="12700">
+            <a:solidFill>
+              <a:srgbClr val="13315C"/>
+            </a:solidFill>
+            <a:prstDash val="solid"/>
+          </a:ln>
+        </p:spPr>
+      </p:sp>
+      <p:sp>
+        <p:nvSpPr>
+          <p:cNvPr id="19" name="Text 17"/>
+          <p:cNvSpPr/>
+          <p:nvPr/>
+        </p:nvSpPr>
+        <p:spPr>
+          <a:xfrm>
+            <a:off x="6355080" y="1417320"/>
+            <a:ext cx="5394960" cy="502920"/>
+          </a:xfrm>
+          <a:prstGeom prst="rect">
+            <a:avLst/>
+          </a:prstGeom>
+          <a:noFill/>
+          <a:ln/>
+        </p:spPr>
+        <p:txBody>
+          <a:bodyPr wrap="square" rtlCol="0" anchor="ctr"/>
+          <a:lstStyle/>
+          <a:p>
+            <a:pPr algn="ctr" indent="0" marL="0">
+              <a:buNone/>
+            </a:pPr>
+            <a:r>
               <a:rPr lang="en-US" sz="1400" b="1" dirty="0">
                 <a:solidFill>
+                  <a:srgbClr val="F6F6F2"/>
+                </a:solidFill>
+                <a:latin typeface="Calibri" pitchFamily="34" charset="0"/>
+                <a:ea typeface="Calibri" pitchFamily="34" charset="-122"/>
+                <a:cs typeface="Calibri" pitchFamily="34" charset="-120"/>
+              </a:rPr>
+              <a:t>METHOD 2 · the FINDING (not a trader)</a:t>
+            </a:r>
+            <a:endParaRPr lang="en-US" sz="1400" dirty="0"/>
+          </a:p>
+        </p:txBody>
+      </p:sp>
+      <p:sp>
+        <p:nvSpPr>
+          <p:cNvPr id="20" name="Text 18"/>
+          <p:cNvSpPr/>
+          <p:nvPr/>
+        </p:nvSpPr>
+        <p:spPr>
+          <a:xfrm>
+            <a:off x="6355080" y="1993392"/>
+            <a:ext cx="5394960" cy="274320"/>
+          </a:xfrm>
+          <a:prstGeom prst="rect">
+            <a:avLst/>
+          </a:prstGeom>
+          <a:noFill/>
+          <a:ln/>
+        </p:spPr>
+        <p:txBody>
+          <a:bodyPr wrap="square" rtlCol="0" anchor="ctr"/>
+          <a:lstStyle/>
+          <a:p>
+            <a:pPr algn="ctr" indent="0" marL="0">
+              <a:buNone/>
+            </a:pPr>
+            <a:r>
+              <a:rPr lang="en-US" sz="1100" i="1" dirty="0">
+                <a:solidFill>
+                  <a:srgbClr val="13315C"/>
+                </a:solidFill>
+                <a:latin typeface="Calibri" pitchFamily="34" charset="0"/>
+                <a:ea typeface="Calibri" pitchFamily="34" charset="-122"/>
+                <a:cs typeface="Calibri" pitchFamily="34" charset="-120"/>
+              </a:rPr>
+              <a:t>(diagnostic only · footnote)</a:t>
+            </a:r>
+            <a:endParaRPr lang="en-US" sz="1100" dirty="0"/>
+          </a:p>
+        </p:txBody>
+      </p:sp>
+      <p:sp>
+        <p:nvSpPr>
+          <p:cNvPr id="21" name="Text 19"/>
+          <p:cNvSpPr/>
+          <p:nvPr/>
+        </p:nvSpPr>
+        <p:spPr>
+          <a:xfrm>
+            <a:off x="6537960" y="2286000"/>
+            <a:ext cx="5074920" cy="411480"/>
+          </a:xfrm>
+          <a:prstGeom prst="rect">
+            <a:avLst/>
+          </a:prstGeom>
+          <a:noFill/>
+          <a:ln/>
+        </p:spPr>
+        <p:txBody>
+          <a:bodyPr wrap="square" rtlCol="0" anchor="ctr"/>
+          <a:lstStyle/>
+          <a:p>
+            <a:pPr indent="0" marL="0">
+              <a:buNone/>
+            </a:pPr>
+            <a:r>
+              <a:rPr lang="en-US" sz="1300" dirty="0">
+                <a:solidFill>
+                  <a:srgbClr val="1A1A1A"/>
+                </a:solidFill>
+                <a:latin typeface="Calibri" pitchFamily="34" charset="0"/>
+                <a:ea typeface="Calibri" pitchFamily="34" charset="-122"/>
+                <a:cs typeface="Calibri" pitchFamily="34" charset="-120"/>
+              </a:rPr>
+              <a:t>•  measures </a:t>
+            </a:r>
+            <a:pPr indent="0" marL="0">
+              <a:buNone/>
+            </a:pPr>
+            <a:r>
+              <a:rPr lang="en-US" sz="1300" dirty="0">
+                <a:solidFill>
                   <a:srgbClr val="0B2545"/>
                 </a:solidFill>
-                <a:latin typeface="Calibri" pitchFamily="34" charset="0"/>
-                <a:ea typeface="Calibri" pitchFamily="34" charset="-122"/>
-                <a:cs typeface="Calibri" pitchFamily="34" charset="-120"/>
-              </a:rPr>
-              <a:t>FINDING 1:  </a:t>
-            </a:r>
-            <a:pPr indent="0" marL="0">
-              <a:buNone/>
-            </a:pPr>
-            <a:r>
-              <a:rPr lang="en-US" sz="1600" b="1" dirty="0">
+                <a:latin typeface="Courier New" pitchFamily="34" charset="0"/>
+                <a:ea typeface="Courier New" pitchFamily="34" charset="-122"/>
+                <a:cs typeface="Courier New" pitchFamily="34" charset="-120"/>
+              </a:rPr>
+              <a:t>Δp̂(60s)</a:t>
+            </a:r>
+            <a:pPr indent="0" marL="0">
+              <a:buNone/>
+            </a:pPr>
+            <a:r>
+              <a:rPr lang="en-US" sz="1300" dirty="0">
+                <a:solidFill>
+                  <a:srgbClr val="1A1A1A"/>
+                </a:solidFill>
+                <a:latin typeface="Calibri" pitchFamily="34" charset="0"/>
+                <a:ea typeface="Calibri" pitchFamily="34" charset="-122"/>
+                <a:cs typeface="Calibri" pitchFamily="34" charset="-120"/>
+              </a:rPr>
+              <a:t> at trailing-team events</a:t>
+            </a:r>
+            <a:endParaRPr lang="en-US" sz="1300" dirty="0"/>
+          </a:p>
+        </p:txBody>
+      </p:sp>
+      <p:sp>
+        <p:nvSpPr>
+          <p:cNvPr id="22" name="Text 20"/>
+          <p:cNvSpPr/>
+          <p:nvPr/>
+        </p:nvSpPr>
+        <p:spPr>
+          <a:xfrm>
+            <a:off x="6537960" y="2697480"/>
+            <a:ext cx="5074920" cy="411480"/>
+          </a:xfrm>
+          <a:prstGeom prst="rect">
+            <a:avLst/>
+          </a:prstGeom>
+          <a:noFill/>
+          <a:ln/>
+        </p:spPr>
+        <p:txBody>
+          <a:bodyPr wrap="square" rtlCol="0" anchor="ctr"/>
+          <a:lstStyle/>
+          <a:p>
+            <a:pPr indent="0" marL="0">
+              <a:buNone/>
+            </a:pPr>
+            <a:r>
+              <a:rPr lang="en-US" sz="1300" dirty="0">
+                <a:solidFill>
+                  <a:srgbClr val="1A1A1A"/>
+                </a:solidFill>
+                <a:latin typeface="Calibri" pitchFamily="34" charset="0"/>
+                <a:ea typeface="Calibri" pitchFamily="34" charset="-122"/>
+                <a:cs typeface="Calibri" pitchFamily="34" charset="-120"/>
+              </a:rPr>
+              <a:t>•  block-bootstrap by game → CI, p-value</a:t>
+            </a:r>
+            <a:endParaRPr lang="en-US" sz="1300" dirty="0"/>
+          </a:p>
+        </p:txBody>
+      </p:sp>
+      <p:sp>
+        <p:nvSpPr>
+          <p:cNvPr id="23" name="Text 21"/>
+          <p:cNvSpPr/>
+          <p:nvPr/>
+        </p:nvSpPr>
+        <p:spPr>
+          <a:xfrm>
+            <a:off x="6537960" y="3108960"/>
+            <a:ext cx="5074920" cy="411480"/>
+          </a:xfrm>
+          <a:prstGeom prst="rect">
+            <a:avLst/>
+          </a:prstGeom>
+          <a:noFill/>
+          <a:ln/>
+        </p:spPr>
+        <p:txBody>
+          <a:bodyPr wrap="square" rtlCol="0" anchor="ctr"/>
+          <a:lstStyle/>
+          <a:p>
+            <a:pPr indent="0" marL="0">
+              <a:buNone/>
+            </a:pPr>
+            <a:r>
+              <a:rPr lang="en-US" sz="1300" dirty="0">
+                <a:solidFill>
+                  <a:srgbClr val="1A1A1A"/>
+                </a:solidFill>
+                <a:latin typeface="Calibri" pitchFamily="34" charset="0"/>
+                <a:ea typeface="Calibri" pitchFamily="34" charset="-122"/>
+                <a:cs typeface="Calibri" pitchFamily="34" charset="-120"/>
+              </a:rPr>
+              <a:t>•  </a:t>
+            </a:r>
+            <a:pPr indent="0" marL="0">
+              <a:buNone/>
+            </a:pPr>
+            <a:r>
+              <a:rPr lang="en-US" sz="1300" b="1" dirty="0">
+                <a:solidFill>
+                  <a:srgbClr val="0B2545"/>
+                </a:solidFill>
+                <a:latin typeface="Calibri" pitchFamily="34" charset="0"/>
+                <a:ea typeface="Calibri" pitchFamily="34" charset="-122"/>
+                <a:cs typeface="Calibri" pitchFamily="34" charset="-120"/>
+              </a:rPr>
+              <a:t>output is a NUMBER + p-value</a:t>
+            </a:r>
+            <a:pPr indent="0" marL="0">
+              <a:buNone/>
+            </a:pPr>
+            <a:r>
+              <a:rPr lang="en-US" sz="1300" dirty="0">
+                <a:solidFill>
+                  <a:srgbClr val="1A1A1A"/>
+                </a:solidFill>
+                <a:latin typeface="Calibri" pitchFamily="34" charset="0"/>
+                <a:ea typeface="Calibri" pitchFamily="34" charset="-122"/>
+                <a:cs typeface="Calibri" pitchFamily="34" charset="-120"/>
+              </a:rPr>
+              <a:t>,</a:t>
+            </a:r>
+            <a:endParaRPr lang="en-US" sz="1300" dirty="0"/>
+          </a:p>
+        </p:txBody>
+      </p:sp>
+      <p:sp>
+        <p:nvSpPr>
+          <p:cNvPr id="24" name="Text 22"/>
+          <p:cNvSpPr/>
+          <p:nvPr/>
+        </p:nvSpPr>
+        <p:spPr>
+          <a:xfrm>
+            <a:off x="6537960" y="3520440"/>
+            <a:ext cx="5074920" cy="411480"/>
+          </a:xfrm>
+          <a:prstGeom prst="rect">
+            <a:avLst/>
+          </a:prstGeom>
+          <a:noFill/>
+          <a:ln/>
+        </p:spPr>
+        <p:txBody>
+          <a:bodyPr wrap="square" rtlCol="0" anchor="ctr"/>
+          <a:lstStyle/>
+          <a:p>
+            <a:pPr indent="0" marL="0">
+              <a:buNone/>
+            </a:pPr>
+            <a:r>
+              <a:rPr lang="en-US" sz="1300" i="1" dirty="0">
+                <a:solidFill>
+                  <a:srgbClr val="13315C"/>
+                </a:solidFill>
+                <a:latin typeface="Calibri" pitchFamily="34" charset="0"/>
+                <a:ea typeface="Calibri" pitchFamily="34" charset="-122"/>
+                <a:cs typeface="Calibri" pitchFamily="34" charset="-120"/>
+              </a:rPr>
+              <a:t>   not a bet decision</a:t>
+            </a:r>
+            <a:endParaRPr lang="en-US" sz="1300" dirty="0"/>
+          </a:p>
+        </p:txBody>
+      </p:sp>
+      <p:sp>
+        <p:nvSpPr>
+          <p:cNvPr id="25" name="Shape 23"/>
+          <p:cNvSpPr/>
+          <p:nvPr/>
+        </p:nvSpPr>
+        <p:spPr>
+          <a:xfrm>
+            <a:off x="6537960" y="4023360"/>
+            <a:ext cx="5074920" cy="36576"/>
+          </a:xfrm>
+          <a:prstGeom prst="rect">
+            <a:avLst/>
+          </a:prstGeom>
+          <a:solidFill>
+            <a:srgbClr val="8DA9C4"/>
+          </a:solidFill>
+          <a:ln w="12700">
+            <a:solidFill>
+              <a:srgbClr val="8DA9C4"/>
+            </a:solidFill>
+            <a:prstDash val="solid"/>
+          </a:ln>
+        </p:spPr>
+      </p:sp>
+      <p:sp>
+        <p:nvSpPr>
+          <p:cNvPr id="26" name="Text 24"/>
+          <p:cNvSpPr/>
+          <p:nvPr/>
+        </p:nvSpPr>
+        <p:spPr>
+          <a:xfrm>
+            <a:off x="6537960" y="4160520"/>
+            <a:ext cx="5074920" cy="457200"/>
+          </a:xfrm>
+          <a:prstGeom prst="rect">
+            <a:avLst/>
+          </a:prstGeom>
+          <a:noFill/>
+          <a:ln/>
+        </p:spPr>
+        <p:txBody>
+          <a:bodyPr wrap="square" rtlCol="0" anchor="ctr"/>
+          <a:lstStyle/>
+          <a:p>
+            <a:pPr indent="0" marL="0">
+              <a:buNone/>
+            </a:pPr>
+            <a:r>
+              <a:rPr lang="en-US" sz="1300" b="1" dirty="0">
                 <a:solidFill>
                   <a:srgbClr val="EEA02B"/>
                 </a:solidFill>
@@ -2846,60 +3408,74 @@
                 <a:ea typeface="Calibri" pitchFamily="34" charset="-122"/>
                 <a:cs typeface="Calibri" pitchFamily="34" charset="-120"/>
               </a:rPr>
-              <a:t>✅  </a:t>
-            </a:r>
-            <a:pPr indent="0" marL="0">
-              <a:buNone/>
-            </a:pPr>
-            <a:r>
-              <a:rPr lang="en-US" sz="1400" b="1" dirty="0">
-                <a:solidFill>
-                  <a:srgbClr val="0B2545"/>
-                </a:solidFill>
-                <a:latin typeface="Calibri" pitchFamily="34" charset="0"/>
-                <a:ea typeface="Calibri" pitchFamily="34" charset="-122"/>
-                <a:cs typeface="Calibri" pitchFamily="34" charset="-120"/>
-              </a:rPr>
-              <a:t>the model is calibrated</a:t>
-            </a:r>
-            <a:endParaRPr lang="en-US" sz="1400" dirty="0"/>
-          </a:p>
-        </p:txBody>
-      </p:sp>
-      <p:sp>
-        <p:nvSpPr>
-          <p:cNvPr id="13" name="Text 11"/>
-          <p:cNvSpPr/>
-          <p:nvPr/>
-        </p:nvSpPr>
-        <p:spPr>
-          <a:xfrm>
-            <a:off x="685800" y="4343400"/>
-            <a:ext cx="5029200" cy="365760"/>
-          </a:xfrm>
-          <a:prstGeom prst="rect">
-            <a:avLst/>
-          </a:prstGeom>
-          <a:noFill/>
-          <a:ln/>
-        </p:spPr>
-        <p:txBody>
-          <a:bodyPr wrap="square" rtlCol="0" anchor="ctr"/>
-          <a:lstStyle/>
-          <a:p>
+              <a:t>0 bets, 0 P&amp;L  </a:t>
+            </a:r>
+            <a:pPr indent="0" marL="0">
+              <a:buNone/>
+            </a:pPr>
+            <a:r>
+              <a:rPr lang="en-US" sz="1300" i="1" dirty="0">
+                <a:solidFill>
+                  <a:srgbClr val="13315C"/>
+                </a:solidFill>
+                <a:latin typeface="Calibri" pitchFamily="34" charset="0"/>
+                <a:ea typeface="Calibri" pitchFamily="34" charset="-122"/>
+                <a:cs typeface="Calibri" pitchFamily="34" charset="-120"/>
+              </a:rPr>
+              <a:t>in the backtest</a:t>
+            </a:r>
+            <a:endParaRPr lang="en-US" sz="1300" dirty="0"/>
+          </a:p>
+        </p:txBody>
+      </p:sp>
+      <p:sp>
+        <p:nvSpPr>
+          <p:cNvPr id="27" name="Text 25"/>
+          <p:cNvSpPr/>
+          <p:nvPr/>
+        </p:nvSpPr>
+        <p:spPr>
+          <a:xfrm>
+            <a:off x="6537960" y="4663440"/>
+            <a:ext cx="5074920" cy="502920"/>
+          </a:xfrm>
+          <a:prstGeom prst="rect">
+            <a:avLst/>
+          </a:prstGeom>
+          <a:noFill/>
+          <a:ln/>
+        </p:spPr>
+        <p:txBody>
+          <a:bodyPr wrap="square" rtlCol="0" anchor="ctr"/>
+          <a:lstStyle/>
+          <a:p>
+            <a:pPr indent="0" marL="0">
+              <a:buNone/>
+            </a:pPr>
+            <a:r>
+              <a:rPr lang="en-US" sz="1100" b="1" dirty="0">
+                <a:solidFill>
+                  <a:srgbClr val="13315C"/>
+                </a:solidFill>
+                <a:latin typeface="Calibri" pitchFamily="34" charset="0"/>
+                <a:ea typeface="Calibri" pitchFamily="34" charset="-122"/>
+                <a:cs typeface="Calibri" pitchFamily="34" charset="-120"/>
+              </a:rPr>
+              <a:t>Output:  </a:t>
+            </a:r>
             <a:pPr indent="0" marL="0">
               <a:buNone/>
             </a:pPr>
             <a:r>
               <a:rPr lang="en-US" sz="1100" i="1" dirty="0">
                 <a:solidFill>
-                  <a:srgbClr val="13315C"/>
-                </a:solidFill>
-                <a:latin typeface="Calibri" pitchFamily="34" charset="0"/>
-                <a:ea typeface="Calibri" pitchFamily="34" charset="-122"/>
-                <a:cs typeface="Calibri" pitchFamily="34" charset="-120"/>
-              </a:rPr>
-              <a:t>(numbers on the Finding 1 slide)</a:t>
+                  <a:srgbClr val="1A1A1A"/>
+                </a:solidFill>
+                <a:latin typeface="Calibri" pitchFamily="34" charset="0"/>
+                <a:ea typeface="Calibri" pitchFamily="34" charset="-122"/>
+                <a:cs typeface="Calibri" pitchFamily="34" charset="-120"/>
+              </a:rPr>
+              <a:t>a statistical finding (Finding 2) — proof the bias exists</a:t>
             </a:r>
             <a:endParaRPr lang="en-US" sz="1100" dirty="0"/>
           </a:p>
@@ -2907,17 +3483,19 @@
       </p:sp>
       <p:sp>
         <p:nvSpPr>
-          <p:cNvPr id="14" name="Shape 12"/>
-          <p:cNvSpPr/>
-          <p:nvPr/>
-        </p:nvSpPr>
-        <p:spPr>
-          <a:xfrm>
-            <a:off x="5943600" y="3154680"/>
-            <a:ext cx="640080" cy="548640"/>
-          </a:xfrm>
-          <a:prstGeom prst="rightArrow">
-            <a:avLst/>
+          <p:cNvPr id="28" name="Shape 26"/>
+          <p:cNvSpPr/>
+          <p:nvPr/>
+        </p:nvSpPr>
+        <p:spPr>
+          <a:xfrm>
+            <a:off x="502920" y="5669280"/>
+            <a:ext cx="11247120" cy="868680"/>
+          </a:xfrm>
+          <a:prstGeom prst="roundRect">
+            <a:avLst>
+              <a:gd name="adj" fmla="val 8421"/>
+            </a:avLst>
           </a:prstGeom>
           <a:solidFill>
             <a:srgbClr val="EEA02B"/>
@@ -2932,454 +3510,7 @@
       </p:sp>
       <p:sp>
         <p:nvSpPr>
-          <p:cNvPr id="15" name="Text 13"/>
-          <p:cNvSpPr/>
-          <p:nvPr/>
-        </p:nvSpPr>
-        <p:spPr>
-          <a:xfrm>
-            <a:off x="5760720" y="3749040"/>
-            <a:ext cx="1005840" cy="274320"/>
-          </a:xfrm>
-          <a:prstGeom prst="rect">
-            <a:avLst/>
-          </a:prstGeom>
-          <a:noFill/>
-          <a:ln/>
-        </p:spPr>
-        <p:txBody>
-          <a:bodyPr wrap="square" rtlCol="0" anchor="ctr"/>
-          <a:lstStyle/>
-          <a:p>
-            <a:pPr algn="ctr" indent="0" marL="0">
-              <a:buNone/>
-            </a:pPr>
-            <a:r>
-              <a:rPr lang="en-US" sz="900" i="1" dirty="0">
-                <a:solidFill>
-                  <a:srgbClr val="13315C"/>
-                </a:solidFill>
-                <a:latin typeface="Calibri" pitchFamily="34" charset="0"/>
-                <a:ea typeface="Calibri" pitchFamily="34" charset="-122"/>
-                <a:cs typeface="Calibri" pitchFamily="34" charset="-120"/>
-              </a:rPr>
-              <a:t>feeds p̂_t into</a:t>
-            </a:r>
-            <a:endParaRPr lang="en-US" sz="900" dirty="0"/>
-          </a:p>
-        </p:txBody>
-      </p:sp>
-      <p:sp>
-        <p:nvSpPr>
-          <p:cNvPr id="16" name="Shape 14"/>
-          <p:cNvSpPr/>
-          <p:nvPr/>
-        </p:nvSpPr>
-        <p:spPr>
-          <a:xfrm>
-            <a:off x="6675120" y="1417320"/>
-            <a:ext cx="5074920" cy="4114800"/>
-          </a:xfrm>
-          <a:prstGeom prst="roundRect">
-            <a:avLst>
-              <a:gd name="adj" fmla="val 2222"/>
-            </a:avLst>
-          </a:prstGeom>
-          <a:solidFill>
-            <a:srgbClr val="F6F6F2"/>
-          </a:solidFill>
-          <a:ln w="20320">
-            <a:solidFill>
-              <a:srgbClr val="EEA02B"/>
-            </a:solidFill>
-            <a:prstDash val="solid"/>
-          </a:ln>
-        </p:spPr>
-      </p:sp>
-      <p:sp>
-        <p:nvSpPr>
-          <p:cNvPr id="17" name="Shape 15"/>
-          <p:cNvSpPr/>
-          <p:nvPr/>
-        </p:nvSpPr>
-        <p:spPr>
-          <a:xfrm>
-            <a:off x="6675120" y="1417320"/>
-            <a:ext cx="5074920" cy="502920"/>
-          </a:xfrm>
-          <a:prstGeom prst="rect">
-            <a:avLst/>
-          </a:prstGeom>
-          <a:solidFill>
-            <a:srgbClr val="0B2545"/>
-          </a:solidFill>
-          <a:ln w="12700">
-            <a:solidFill>
-              <a:srgbClr val="0B2545"/>
-            </a:solidFill>
-            <a:prstDash val="solid"/>
-          </a:ln>
-        </p:spPr>
-      </p:sp>
-      <p:sp>
-        <p:nvSpPr>
-          <p:cNvPr id="18" name="Text 16"/>
-          <p:cNvSpPr/>
-          <p:nvPr/>
-        </p:nvSpPr>
-        <p:spPr>
-          <a:xfrm>
-            <a:off x="6675120" y="1417320"/>
-            <a:ext cx="5074920" cy="502920"/>
-          </a:xfrm>
-          <a:prstGeom prst="rect">
-            <a:avLst/>
-          </a:prstGeom>
-          <a:noFill/>
-          <a:ln/>
-        </p:spPr>
-        <p:txBody>
-          <a:bodyPr wrap="square" rtlCol="0" anchor="ctr"/>
-          <a:lstStyle/>
-          <a:p>
-            <a:pPr algn="ctr" indent="0" marL="0">
-              <a:buNone/>
-            </a:pPr>
-            <a:r>
-              <a:rPr lang="en-US" sz="1300" b="1" dirty="0">
-                <a:solidFill>
-                  <a:srgbClr val="F6F6F2"/>
-                </a:solidFill>
-                <a:latin typeface="Calibri" pitchFamily="34" charset="0"/>
-                <a:ea typeface="Calibri" pitchFamily="34" charset="-122"/>
-                <a:cs typeface="Calibri" pitchFamily="34" charset="-120"/>
-              </a:rPr>
-              <a:t>METHOD 2 · the overreaction test</a:t>
-            </a:r>
-            <a:endParaRPr lang="en-US" sz="1300" dirty="0"/>
-          </a:p>
-        </p:txBody>
-      </p:sp>
-      <p:sp>
-        <p:nvSpPr>
-          <p:cNvPr id="19" name="Text 17"/>
-          <p:cNvSpPr/>
-          <p:nvPr/>
-        </p:nvSpPr>
-        <p:spPr>
-          <a:xfrm>
-            <a:off x="6858000" y="2057400"/>
-            <a:ext cx="4754880" cy="502920"/>
-          </a:xfrm>
-          <a:prstGeom prst="rect">
-            <a:avLst/>
-          </a:prstGeom>
-          <a:noFill/>
-          <a:ln/>
-        </p:spPr>
-        <p:txBody>
-          <a:bodyPr wrap="square" rtlCol="0" anchor="ctr"/>
-          <a:lstStyle/>
-          <a:p>
-            <a:pPr indent="0" marL="0">
-              <a:buNone/>
-            </a:pPr>
-            <a:r>
-              <a:rPr lang="en-US" sz="1300" b="1" dirty="0">
-                <a:solidFill>
-                  <a:srgbClr val="13315C"/>
-                </a:solidFill>
-                <a:latin typeface="Calibri" pitchFamily="34" charset="0"/>
-                <a:ea typeface="Calibri" pitchFamily="34" charset="-122"/>
-                <a:cs typeface="Calibri" pitchFamily="34" charset="-120"/>
-              </a:rPr>
-              <a:t>INPUTS:  </a:t>
-            </a:r>
-            <a:pPr indent="0" marL="0">
-              <a:buNone/>
-            </a:pPr>
-            <a:r>
-              <a:rPr lang="en-US" sz="1300" dirty="0">
-                <a:solidFill>
-                  <a:srgbClr val="1A1A1A"/>
-                </a:solidFill>
-                <a:latin typeface="Calibri" pitchFamily="34" charset="0"/>
-                <a:ea typeface="Calibri" pitchFamily="34" charset="-122"/>
-                <a:cs typeface="Calibri" pitchFamily="34" charset="-120"/>
-              </a:rPr>
-              <a:t>p̂_t from Method 1, at trailing-team scoring events</a:t>
-            </a:r>
-            <a:endParaRPr lang="en-US" sz="1300" dirty="0"/>
-          </a:p>
-        </p:txBody>
-      </p:sp>
-      <p:sp>
-        <p:nvSpPr>
-          <p:cNvPr id="20" name="Text 18"/>
-          <p:cNvSpPr/>
-          <p:nvPr/>
-        </p:nvSpPr>
-        <p:spPr>
-          <a:xfrm>
-            <a:off x="6858000" y="2606040"/>
-            <a:ext cx="4754880" cy="502920"/>
-          </a:xfrm>
-          <a:prstGeom prst="rect">
-            <a:avLst/>
-          </a:prstGeom>
-          <a:noFill/>
-          <a:ln/>
-        </p:spPr>
-        <p:txBody>
-          <a:bodyPr wrap="square" rtlCol="0" anchor="ctr"/>
-          <a:lstStyle/>
-          <a:p>
-            <a:pPr indent="0" marL="0">
-              <a:buNone/>
-            </a:pPr>
-            <a:r>
-              <a:rPr lang="en-US" sz="1300" b="1" dirty="0">
-                <a:solidFill>
-                  <a:srgbClr val="13315C"/>
-                </a:solidFill>
-                <a:latin typeface="Calibri" pitchFamily="34" charset="0"/>
-                <a:ea typeface="Calibri" pitchFamily="34" charset="-122"/>
-                <a:cs typeface="Calibri" pitchFamily="34" charset="-120"/>
-              </a:rPr>
-              <a:t>OUTPUTS:  </a:t>
-            </a:r>
-            <a:pPr indent="0" marL="0">
-              <a:buNone/>
-            </a:pPr>
-            <a:r>
-              <a:rPr lang="en-US" sz="1300" dirty="0">
-                <a:solidFill>
-                  <a:srgbClr val="1A1A1A"/>
-                </a:solidFill>
-                <a:latin typeface="Courier New" pitchFamily="34" charset="0"/>
-                <a:ea typeface="Courier New" pitchFamily="34" charset="-122"/>
-                <a:cs typeface="Courier New" pitchFamily="34" charset="-120"/>
-              </a:rPr>
-              <a:t>Δp̂_scorer(t)  =  p̂(t+60) − p̂(t)</a:t>
-            </a:r>
-            <a:endParaRPr lang="en-US" sz="1300" dirty="0"/>
-          </a:p>
-        </p:txBody>
-      </p:sp>
-      <p:sp>
-        <p:nvSpPr>
-          <p:cNvPr id="21" name="Text 19"/>
-          <p:cNvSpPr/>
-          <p:nvPr/>
-        </p:nvSpPr>
-        <p:spPr>
-          <a:xfrm>
-            <a:off x="6858000" y="3154680"/>
-            <a:ext cx="4754880" cy="594360"/>
-          </a:xfrm>
-          <a:prstGeom prst="rect">
-            <a:avLst/>
-          </a:prstGeom>
-          <a:noFill/>
-          <a:ln/>
-        </p:spPr>
-        <p:txBody>
-          <a:bodyPr wrap="square" rtlCol="0" anchor="ctr"/>
-          <a:lstStyle/>
-          <a:p>
-            <a:pPr indent="0" marL="0">
-              <a:buNone/>
-            </a:pPr>
-            <a:r>
-              <a:rPr lang="en-US" sz="1300" b="1" dirty="0">
-                <a:solidFill>
-                  <a:srgbClr val="13315C"/>
-                </a:solidFill>
-                <a:latin typeface="Calibri" pitchFamily="34" charset="0"/>
-                <a:ea typeface="Calibri" pitchFamily="34" charset="-122"/>
-                <a:cs typeface="Calibri" pitchFamily="34" charset="-120"/>
-              </a:rPr>
-              <a:t>ANSWERS:  </a:t>
-            </a:r>
-            <a:pPr indent="0" marL="0">
-              <a:buNone/>
-            </a:pPr>
-            <a:r>
-              <a:rPr lang="en-US" sz="1300" dirty="0">
-                <a:solidFill>
-                  <a:srgbClr val="1A1A1A"/>
-                </a:solidFill>
-                <a:latin typeface="Calibri" pitchFamily="34" charset="0"/>
-                <a:ea typeface="Calibri" pitchFamily="34" charset="-122"/>
-                <a:cs typeface="Calibri" pitchFamily="34" charset="-120"/>
-              </a:rPr>
-              <a:t>"Does the market overshoot p̂_t in event windows?"</a:t>
-            </a:r>
-            <a:endParaRPr lang="en-US" sz="1300" dirty="0"/>
-          </a:p>
-        </p:txBody>
-      </p:sp>
-      <p:sp>
-        <p:nvSpPr>
-          <p:cNvPr id="22" name="Shape 20"/>
-          <p:cNvSpPr/>
-          <p:nvPr/>
-        </p:nvSpPr>
-        <p:spPr>
-          <a:xfrm>
-            <a:off x="6858000" y="3749040"/>
-            <a:ext cx="4754880" cy="36576"/>
-          </a:xfrm>
-          <a:prstGeom prst="rect">
-            <a:avLst/>
-          </a:prstGeom>
-          <a:solidFill>
-            <a:srgbClr val="8DA9C4"/>
-          </a:solidFill>
-          <a:ln w="12700">
-            <a:solidFill>
-              <a:srgbClr val="8DA9C4"/>
-            </a:solidFill>
-            <a:prstDash val="solid"/>
-          </a:ln>
-        </p:spPr>
-      </p:sp>
-      <p:sp>
-        <p:nvSpPr>
-          <p:cNvPr id="23" name="Text 21"/>
-          <p:cNvSpPr/>
-          <p:nvPr/>
-        </p:nvSpPr>
-        <p:spPr>
-          <a:xfrm>
-            <a:off x="6858000" y="3931920"/>
-            <a:ext cx="4754880" cy="457200"/>
-          </a:xfrm>
-          <a:prstGeom prst="rect">
-            <a:avLst/>
-          </a:prstGeom>
-          <a:noFill/>
-          <a:ln/>
-        </p:spPr>
-        <p:txBody>
-          <a:bodyPr wrap="square" rtlCol="0" anchor="ctr"/>
-          <a:lstStyle/>
-          <a:p>
-            <a:pPr indent="0" marL="0">
-              <a:buNone/>
-            </a:pPr>
-            <a:r>
-              <a:rPr lang="en-US" sz="1400" b="1" dirty="0">
-                <a:solidFill>
-                  <a:srgbClr val="0B2545"/>
-                </a:solidFill>
-                <a:latin typeface="Calibri" pitchFamily="34" charset="0"/>
-                <a:ea typeface="Calibri" pitchFamily="34" charset="-122"/>
-                <a:cs typeface="Calibri" pitchFamily="34" charset="-120"/>
-              </a:rPr>
-              <a:t>FINDING 2:  </a:t>
-            </a:r>
-            <a:pPr indent="0" marL="0">
-              <a:buNone/>
-            </a:pPr>
-            <a:r>
-              <a:rPr lang="en-US" sz="1600" b="1" dirty="0">
-                <a:solidFill>
-                  <a:srgbClr val="EEA02B"/>
-                </a:solidFill>
-                <a:latin typeface="Calibri" pitchFamily="34" charset="0"/>
-                <a:ea typeface="Calibri" pitchFamily="34" charset="-122"/>
-                <a:cs typeface="Calibri" pitchFamily="34" charset="-120"/>
-              </a:rPr>
-              <a:t>✅  </a:t>
-            </a:r>
-            <a:pPr indent="0" marL="0">
-              <a:buNone/>
-            </a:pPr>
-            <a:r>
-              <a:rPr lang="en-US" sz="1400" b="1" dirty="0">
-                <a:solidFill>
-                  <a:srgbClr val="0B2545"/>
-                </a:solidFill>
-                <a:latin typeface="Calibri" pitchFamily="34" charset="0"/>
-                <a:ea typeface="Calibri" pitchFamily="34" charset="-122"/>
-                <a:cs typeface="Calibri" pitchFamily="34" charset="-120"/>
-              </a:rPr>
-              <a:t>the market overshoots p̂_t</a:t>
-            </a:r>
-            <a:endParaRPr lang="en-US" sz="1400" dirty="0"/>
-          </a:p>
-        </p:txBody>
-      </p:sp>
-      <p:sp>
-        <p:nvSpPr>
-          <p:cNvPr id="24" name="Text 22"/>
-          <p:cNvSpPr/>
-          <p:nvPr/>
-        </p:nvSpPr>
-        <p:spPr>
-          <a:xfrm>
-            <a:off x="6858000" y="4343400"/>
-            <a:ext cx="4754880" cy="365760"/>
-          </a:xfrm>
-          <a:prstGeom prst="rect">
-            <a:avLst/>
-          </a:prstGeom>
-          <a:noFill/>
-          <a:ln/>
-        </p:spPr>
-        <p:txBody>
-          <a:bodyPr wrap="square" rtlCol="0" anchor="ctr"/>
-          <a:lstStyle/>
-          <a:p>
-            <a:pPr indent="0" marL="0">
-              <a:buNone/>
-            </a:pPr>
-            <a:r>
-              <a:rPr lang="en-US" sz="1100" i="1" dirty="0">
-                <a:solidFill>
-                  <a:srgbClr val="13315C"/>
-                </a:solidFill>
-                <a:latin typeface="Calibri" pitchFamily="34" charset="0"/>
-                <a:ea typeface="Calibri" pitchFamily="34" charset="-122"/>
-                <a:cs typeface="Calibri" pitchFamily="34" charset="-120"/>
-              </a:rPr>
-              <a:t>(numbers on the Finding 2 slide)</a:t>
-            </a:r>
-            <a:endParaRPr lang="en-US" sz="1100" dirty="0"/>
-          </a:p>
-        </p:txBody>
-      </p:sp>
-      <p:sp>
-        <p:nvSpPr>
-          <p:cNvPr id="25" name="Shape 23"/>
-          <p:cNvSpPr/>
-          <p:nvPr/>
-        </p:nvSpPr>
-        <p:spPr>
-          <a:xfrm>
-            <a:off x="502920" y="5669280"/>
-            <a:ext cx="11247120" cy="868680"/>
-          </a:xfrm>
-          <a:prstGeom prst="roundRect">
-            <a:avLst>
-              <a:gd name="adj" fmla="val 8421"/>
-            </a:avLst>
-          </a:prstGeom>
-          <a:solidFill>
-            <a:srgbClr val="0B2545"/>
-          </a:solidFill>
-          <a:ln w="12700">
-            <a:solidFill>
-              <a:srgbClr val="0B2545"/>
-            </a:solidFill>
-            <a:prstDash val="solid"/>
-          </a:ln>
-        </p:spPr>
-      </p:sp>
-      <p:sp>
-        <p:nvSpPr>
-          <p:cNvPr id="26" name="Text 24"/>
+          <p:cNvPr id="29" name="Text 27"/>
           <p:cNvSpPr/>
           <p:nvPr/>
         </p:nvSpPr>
@@ -3402,51 +3533,37 @@
               <a:buNone/>
             </a:pPr>
             <a:r>
-              <a:rPr lang="en-US" sz="1700" b="1" dirty="0">
-                <a:solidFill>
-                  <a:srgbClr val="EEA02B"/>
+              <a:rPr lang="en-US" sz="1600" b="1" i="1" dirty="0">
+                <a:solidFill>
+                  <a:srgbClr val="0B2545"/>
                 </a:solidFill>
                 <a:latin typeface="Georgia" pitchFamily="34" charset="0"/>
                 <a:ea typeface="Georgia" pitchFamily="34" charset="-122"/>
                 <a:cs typeface="Georgia" pitchFamily="34" charset="-120"/>
               </a:rPr>
-              <a:t>Both findings pass.  </a:t>
+              <a:t>Finding · </a:t>
             </a:r>
             <a:pPr algn="ctr" indent="0" marL="0">
               <a:buNone/>
             </a:pPr>
             <a:r>
-              <a:rPr lang="en-US" sz="1700" dirty="0">
-                <a:solidFill>
-                  <a:srgbClr val="F6F6F2"/>
+              <a:rPr lang="en-US" sz="1600" i="1" dirty="0">
+                <a:solidFill>
+                  <a:srgbClr val="0B2545"/>
                 </a:solidFill>
                 <a:latin typeface="Georgia" pitchFamily="34" charset="0"/>
                 <a:ea typeface="Georgia" pitchFamily="34" charset="-122"/>
                 <a:cs typeface="Georgia" pitchFamily="34" charset="-120"/>
               </a:rPr>
-              <a:t>Next: does this exploitable bias actually survive the vig on real markets?  →  </a:t>
-            </a:r>
-            <a:pPr algn="ctr" indent="0" marL="0">
-              <a:buNone/>
-            </a:pPr>
-            <a:r>
-              <a:rPr lang="en-US" sz="1700" b="1" i="1" dirty="0">
-                <a:solidFill>
-                  <a:srgbClr val="EEA02B"/>
-                </a:solidFill>
-                <a:latin typeface="Georgia" pitchFamily="34" charset="0"/>
-                <a:ea typeface="Georgia" pitchFamily="34" charset="-122"/>
-                <a:cs typeface="Georgia" pitchFamily="34" charset="-120"/>
-              </a:rPr>
-              <a:t>backtest</a:t>
-            </a:r>
-            <a:endParaRPr lang="en-US" sz="1700" dirty="0"/>
-          </a:p>
-        </p:txBody>
-      </p:sp>
-      <p:sp>
-        <p:nvSpPr>
-          <p:cNvPr id="27" name="Text 25"/>
+              <a:t>Method 2 was a diagnostic, not a trader.  Wiring it into the trade decision (the targeted strategy) is the natural next step.</a:t>
+            </a:r>
+            <a:endParaRPr lang="en-US" sz="1600" dirty="0"/>
+          </a:p>
+        </p:txBody>
+      </p:sp>
+      <p:sp>
+        <p:nvSpPr>
+          <p:cNvPr id="30" name="Text 28"/>
           <p:cNvSpPr/>
           <p:nvPr/>
         </p:nvSpPr>
@@ -3485,7 +3602,7 @@
       </p:sp>
       <p:sp>
         <p:nvSpPr>
-          <p:cNvPr id="28" name="Text 26"/>
+          <p:cNvPr id="31" name="Text 29"/>
           <p:cNvSpPr/>
           <p:nvPr/>
         </p:nvSpPr>
@@ -6335,7 +6452,7 @@
         </p:nvSpPr>
         <p:spPr>
           <a:xfrm>
-            <a:off x="502920" y="1508760"/>
+            <a:off x="502920" y="1463040"/>
             <a:ext cx="2926080" cy="457200"/>
           </a:xfrm>
           <a:prstGeom prst="rect">
@@ -6352,7 +6469,7 @@
               <a:buNone/>
             </a:pPr>
             <a:r>
-              <a:rPr lang="en-US" sz="1600" b="1" dirty="0">
+              <a:rPr lang="en-US" sz="1500" b="1" dirty="0">
                 <a:solidFill>
                   <a:srgbClr val="0B2545"/>
                 </a:solidFill>
@@ -6360,9 +6477,9 @@
                 <a:ea typeface="Georgia" pitchFamily="34" charset="-122"/>
                 <a:cs typeface="Georgia" pitchFamily="34" charset="-120"/>
               </a:rPr>
-              <a:t>Sample size</a:t>
-            </a:r>
-            <a:endParaRPr lang="en-US" sz="1600" dirty="0"/>
+              <a:t>Method 2 didn't trade</a:t>
+            </a:r>
+            <a:endParaRPr lang="en-US" sz="1500" dirty="0"/>
           </a:p>
         </p:txBody>
       </p:sp>
@@ -6374,24 +6491,24 @@
         </p:nvSpPr>
         <p:spPr>
           <a:xfrm>
-            <a:off x="3520440" y="1508760"/>
-            <a:ext cx="8229600" cy="1005840"/>
-          </a:xfrm>
-          <a:prstGeom prst="rect">
-            <a:avLst/>
-          </a:prstGeom>
-          <a:noFill/>
-          <a:ln/>
-        </p:spPr>
-        <p:txBody>
-          <a:bodyPr wrap="square" rtlCol="0" anchor="ctr"/>
-          <a:lstStyle/>
-          <a:p>
-            <a:pPr indent="0" marL="0">
-              <a:buNone/>
-            </a:pPr>
-            <a:r>
-              <a:rPr lang="en-US" sz="1400" dirty="0">
+            <a:off x="3520440" y="1463040"/>
+            <a:ext cx="8229600" cy="914400"/>
+          </a:xfrm>
+          <a:prstGeom prst="rect">
+            <a:avLst/>
+          </a:prstGeom>
+          <a:noFill/>
+          <a:ln/>
+        </p:spPr>
+        <p:txBody>
+          <a:bodyPr wrap="square" rtlCol="0" anchor="ctr"/>
+          <a:lstStyle/>
+          <a:p>
+            <a:pPr indent="0" marL="0">
+              <a:buNone/>
+            </a:pPr>
+            <a:r>
+              <a:rPr lang="en-US" sz="1300" dirty="0">
                 <a:solidFill>
                   <a:srgbClr val="1A1A1A"/>
                 </a:solidFill>
@@ -6399,9 +6516,9 @@
                 <a:ea typeface="Calibri" pitchFamily="34" charset="-122"/>
                 <a:cs typeface="Calibri" pitchFamily="34" charset="-120"/>
               </a:rPr>
-              <a:t>Powered backtest needs ~1,000 liquid-market games. Two paths: paid the-odds-api historical (~$59, one month) or playoff capture (free, accumulating).</a:t>
-            </a:r>
-            <a:endParaRPr lang="en-US" sz="1400" dirty="0"/>
+              <a:t>Method 2 was a statistical diagnostic — proved the bias but did not gate any trades in the backtest. Natural next step: filter Method 1's edges to Method 2's event windows.</a:t>
+            </a:r>
+            <a:endParaRPr lang="en-US" sz="1300" dirty="0"/>
           </a:p>
         </p:txBody>
       </p:sp>
@@ -6413,7 +6530,7 @@
         </p:nvSpPr>
         <p:spPr>
           <a:xfrm>
-            <a:off x="502920" y="2651760"/>
+            <a:off x="502920" y="2423160"/>
             <a:ext cx="2926080" cy="457200"/>
           </a:xfrm>
           <a:prstGeom prst="rect">
@@ -6430,7 +6547,7 @@
               <a:buNone/>
             </a:pPr>
             <a:r>
-              <a:rPr lang="en-US" sz="1600" b="1" dirty="0">
+              <a:rPr lang="en-US" sz="1500" b="1" dirty="0">
                 <a:solidFill>
                   <a:srgbClr val="0B2545"/>
                 </a:solidFill>
@@ -6438,9 +6555,9 @@
                 <a:ea typeface="Georgia" pitchFamily="34" charset="-122"/>
                 <a:cs typeface="Georgia" pitchFamily="34" charset="-120"/>
               </a:rPr>
-              <a:t>Horizon</a:t>
-            </a:r>
-            <a:endParaRPr lang="en-US" sz="1600" dirty="0"/>
+              <a:t>Sample size</a:t>
+            </a:r>
+            <a:endParaRPr lang="en-US" sz="1500" dirty="0"/>
           </a:p>
         </p:txBody>
       </p:sp>
@@ -6452,24 +6569,24 @@
         </p:nvSpPr>
         <p:spPr>
           <a:xfrm>
-            <a:off x="3520440" y="2651760"/>
-            <a:ext cx="8229600" cy="1005840"/>
-          </a:xfrm>
-          <a:prstGeom prst="rect">
-            <a:avLst/>
-          </a:prstGeom>
-          <a:noFill/>
-          <a:ln/>
-        </p:spPr>
-        <p:txBody>
-          <a:bodyPr wrap="square" rtlCol="0" anchor="ctr"/>
-          <a:lstStyle/>
-          <a:p>
-            <a:pPr indent="0" marL="0">
-              <a:buNone/>
-            </a:pPr>
-            <a:r>
-              <a:rPr lang="en-US" sz="1400" dirty="0">
+            <a:off x="3520440" y="2423160"/>
+            <a:ext cx="8229600" cy="914400"/>
+          </a:xfrm>
+          <a:prstGeom prst="rect">
+            <a:avLst/>
+          </a:prstGeom>
+          <a:noFill/>
+          <a:ln/>
+        </p:spPr>
+        <p:txBody>
+          <a:bodyPr wrap="square" rtlCol="0" anchor="ctr"/>
+          <a:lstStyle/>
+          <a:p>
+            <a:pPr indent="0" marL="0">
+              <a:buNone/>
+            </a:pPr>
+            <a:r>
+              <a:rPr lang="en-US" sz="1300" dirty="0">
                 <a:solidFill>
                   <a:srgbClr val="1A1A1A"/>
                 </a:solidFill>
@@ -6477,9 +6594,9 @@
                 <a:ea typeface="Calibri" pitchFamily="34" charset="-122"/>
                 <a:cs typeface="Calibri" pitchFamily="34" charset="-120"/>
               </a:rPr>
-              <a:t>V2 is 1st-half winner; live demo extended to full-game via parallel model (Brier 0.207). Snapshots are 1H-only — 2nd-half coverage requires rebuilding.</a:t>
-            </a:r>
-            <a:endParaRPr lang="en-US" sz="1400" dirty="0"/>
+              <a:t>Powered backtest needs ~1,000 liquid-market games. Paid the-odds-api historical (~$59, one month) or playoff capture (free, accumulating).</a:t>
+            </a:r>
+            <a:endParaRPr lang="en-US" sz="1300" dirty="0"/>
           </a:p>
         </p:txBody>
       </p:sp>
@@ -6491,7 +6608,7 @@
         </p:nvSpPr>
         <p:spPr>
           <a:xfrm>
-            <a:off x="502920" y="3794760"/>
+            <a:off x="502920" y="3383280"/>
             <a:ext cx="2926080" cy="457200"/>
           </a:xfrm>
           <a:prstGeom prst="rect">
@@ -6508,7 +6625,7 @@
               <a:buNone/>
             </a:pPr>
             <a:r>
-              <a:rPr lang="en-US" sz="1600" b="1" dirty="0">
+              <a:rPr lang="en-US" sz="1500" b="1" dirty="0">
                 <a:solidFill>
                   <a:srgbClr val="0B2545"/>
                 </a:solidFill>
@@ -6516,9 +6633,9 @@
                 <a:ea typeface="Georgia" pitchFamily="34" charset="-122"/>
                 <a:cs typeface="Georgia" pitchFamily="34" charset="-120"/>
               </a:rPr>
-              <a:t>Market reactivity</a:t>
-            </a:r>
-            <a:endParaRPr lang="en-US" sz="1600" dirty="0"/>
+              <a:t>Horizon</a:t>
+            </a:r>
+            <a:endParaRPr lang="en-US" sz="1500" dirty="0"/>
           </a:p>
         </p:txBody>
       </p:sp>
@@ -6530,24 +6647,24 @@
         </p:nvSpPr>
         <p:spPr>
           <a:xfrm>
-            <a:off x="3520440" y="3794760"/>
-            <a:ext cx="8229600" cy="1005840"/>
-          </a:xfrm>
-          <a:prstGeom prst="rect">
-            <a:avLst/>
-          </a:prstGeom>
-          <a:noFill/>
-          <a:ln/>
-        </p:spPr>
-        <p:txBody>
-          <a:bodyPr wrap="square" rtlCol="0" anchor="ctr"/>
-          <a:lstStyle/>
-          <a:p>
-            <a:pPr indent="0" marL="0">
-              <a:buNone/>
-            </a:pPr>
-            <a:r>
-              <a:rPr lang="en-US" sz="1400" dirty="0">
+            <a:off x="3520440" y="3383280"/>
+            <a:ext cx="8229600" cy="914400"/>
+          </a:xfrm>
+          <a:prstGeom prst="rect">
+            <a:avLst/>
+          </a:prstGeom>
+          <a:noFill/>
+          <a:ln/>
+        </p:spPr>
+        <p:txBody>
+          <a:bodyPr wrap="square" rtlCol="0" anchor="ctr"/>
+          <a:lstStyle/>
+          <a:p>
+            <a:pPr indent="0" marL="0">
+              <a:buNone/>
+            </a:pPr>
+            <a:r>
+              <a:rPr lang="en-US" sz="1300" dirty="0">
                 <a:solidFill>
                   <a:srgbClr val="1A1A1A"/>
                 </a:solidFill>
@@ -6555,9 +6672,9 @@
                 <a:ea typeface="Calibri" pitchFamily="34" charset="-122"/>
                 <a:cs typeface="Calibri" pitchFamily="34" charset="-120"/>
               </a:rPr>
-              <a:t>Real deployment would face adverse selection + sportsbook limits. Kalshi (peer-to-peer) sidesteps the account-limit issue.</a:t>
-            </a:r>
-            <a:endParaRPr lang="en-US" sz="1400" dirty="0"/>
+              <a:t>Model is 1st-half-only; live demo extended to full-game via parallel model. 2nd-half coverage requires rebuilding snapshots.</a:t>
+            </a:r>
+            <a:endParaRPr lang="en-US" sz="1300" dirty="0"/>
           </a:p>
         </p:txBody>
       </p:sp>
@@ -6569,7 +6686,7 @@
         </p:nvSpPr>
         <p:spPr>
           <a:xfrm>
-            <a:off x="502920" y="4937760"/>
+            <a:off x="502920" y="4343400"/>
             <a:ext cx="2926080" cy="457200"/>
           </a:xfrm>
           <a:prstGeom prst="rect">
@@ -6586,7 +6703,7 @@
               <a:buNone/>
             </a:pPr>
             <a:r>
-              <a:rPr lang="en-US" sz="1600" b="1" dirty="0">
+              <a:rPr lang="en-US" sz="1500" b="1" dirty="0">
                 <a:solidFill>
                   <a:srgbClr val="0B2545"/>
                 </a:solidFill>
@@ -6594,9 +6711,9 @@
                 <a:ea typeface="Georgia" pitchFamily="34" charset="-122"/>
                 <a:cs typeface="Georgia" pitchFamily="34" charset="-120"/>
               </a:rPr>
-              <a:t>Variants V1/V3/V4/V6</a:t>
-            </a:r>
-            <a:endParaRPr lang="en-US" sz="1600" dirty="0"/>
+              <a:t>Market reactivity</a:t>
+            </a:r>
+            <a:endParaRPr lang="en-US" sz="1500" dirty="0"/>
           </a:p>
         </p:txBody>
       </p:sp>
@@ -6608,24 +6725,24 @@
         </p:nvSpPr>
         <p:spPr>
           <a:xfrm>
-            <a:off x="3520440" y="4937760"/>
-            <a:ext cx="8229600" cy="1005840"/>
-          </a:xfrm>
-          <a:prstGeom prst="rect">
-            <a:avLst/>
-          </a:prstGeom>
-          <a:noFill/>
-          <a:ln/>
-        </p:spPr>
-        <p:txBody>
-          <a:bodyPr wrap="square" rtlCol="0" anchor="ctr"/>
-          <a:lstStyle/>
-          <a:p>
-            <a:pPr indent="0" marL="0">
-              <a:buNone/>
-            </a:pPr>
-            <a:r>
-              <a:rPr lang="en-US" sz="1400" dirty="0">
+            <a:off x="3520440" y="4343400"/>
+            <a:ext cx="8229600" cy="914400"/>
+          </a:xfrm>
+          <a:prstGeom prst="rect">
+            <a:avLst/>
+          </a:prstGeom>
+          <a:noFill/>
+          <a:ln/>
+        </p:spPr>
+        <p:txBody>
+          <a:bodyPr wrap="square" rtlCol="0" anchor="ctr"/>
+          <a:lstStyle/>
+          <a:p>
+            <a:pPr indent="0" marL="0">
+              <a:buNone/>
+            </a:pPr>
+            <a:r>
+              <a:rPr lang="en-US" sz="1300" dirty="0">
                 <a:solidFill>
                   <a:srgbClr val="1A1A1A"/>
                 </a:solidFill>
@@ -6633,15 +6750,93 @@
                 <a:ea typeface="Calibri" pitchFamily="34" charset="-122"/>
                 <a:cs typeface="Calibri" pitchFamily="34" charset="-120"/>
               </a:rPr>
+              <a:t>Real deployment would face adverse selection + sportsbook limits. Kalshi (peer-to-peer) sidesteps the account-limit issue.</a:t>
+            </a:r>
+            <a:endParaRPr lang="en-US" sz="1300" dirty="0"/>
+          </a:p>
+        </p:txBody>
+      </p:sp>
+      <p:sp>
+        <p:nvSpPr>
+          <p:cNvPr id="13" name="Text 11"/>
+          <p:cNvSpPr/>
+          <p:nvPr/>
+        </p:nvSpPr>
+        <p:spPr>
+          <a:xfrm>
+            <a:off x="502920" y="5303520"/>
+            <a:ext cx="2926080" cy="457200"/>
+          </a:xfrm>
+          <a:prstGeom prst="rect">
+            <a:avLst/>
+          </a:prstGeom>
+          <a:noFill/>
+          <a:ln/>
+        </p:spPr>
+        <p:txBody>
+          <a:bodyPr wrap="square" rtlCol="0" anchor="ctr"/>
+          <a:lstStyle/>
+          <a:p>
+            <a:pPr indent="0" marL="0">
+              <a:buNone/>
+            </a:pPr>
+            <a:r>
+              <a:rPr lang="en-US" sz="1500" b="1" dirty="0">
+                <a:solidFill>
+                  <a:srgbClr val="0B2545"/>
+                </a:solidFill>
+                <a:latin typeface="Georgia" pitchFamily="34" charset="0"/>
+                <a:ea typeface="Georgia" pitchFamily="34" charset="-122"/>
+                <a:cs typeface="Georgia" pitchFamily="34" charset="-120"/>
+              </a:rPr>
+              <a:t>Other 4 planned methods</a:t>
+            </a:r>
+            <a:endParaRPr lang="en-US" sz="1500" dirty="0"/>
+          </a:p>
+        </p:txBody>
+      </p:sp>
+      <p:sp>
+        <p:nvSpPr>
+          <p:cNvPr id="14" name="Text 12"/>
+          <p:cNvSpPr/>
+          <p:nvPr/>
+        </p:nvSpPr>
+        <p:spPr>
+          <a:xfrm>
+            <a:off x="3520440" y="5303520"/>
+            <a:ext cx="8229600" cy="914400"/>
+          </a:xfrm>
+          <a:prstGeom prst="rect">
+            <a:avLst/>
+          </a:prstGeom>
+          <a:noFill/>
+          <a:ln/>
+        </p:spPr>
+        <p:txBody>
+          <a:bodyPr wrap="square" rtlCol="0" anchor="ctr"/>
+          <a:lstStyle/>
+          <a:p>
+            <a:pPr indent="0" marL="0">
+              <a:buNone/>
+            </a:pPr>
+            <a:r>
+              <a:rPr lang="en-US" sz="1300" dirty="0">
+                <a:solidFill>
+                  <a:srgbClr val="1A1A1A"/>
+                </a:solidFill>
+                <a:latin typeface="Calibri" pitchFamily="34" charset="0"/>
+                <a:ea typeface="Calibri" pitchFamily="34" charset="-122"/>
+                <a:cs typeface="Calibri" pitchFamily="34" charset="-120"/>
+              </a:rPr>
               <a:t>Architecturally ready in the shared eval harness; need multi-venue in-play history to fit &amp; evaluate.</a:t>
             </a:r>
-            <a:endParaRPr lang="en-US" sz="1400" dirty="0"/>
-          </a:p>
-        </p:txBody>
-      </p:sp>
-      <p:sp>
-        <p:nvSpPr>
-          <p:cNvPr id="13" name="Text 11"/>
+            <a:endParaRPr lang="en-US" sz="1300" dirty="0"/>
+          </a:p>
+        </p:txBody>
+      </p:sp>
+      <p:sp>
+        <p:nvSpPr>
+          <p:cNvPr id="15" name="Text 13"/>
           <p:cNvSpPr/>
           <p:nvPr/>
         </p:nvSpPr>
@@ -6680,7 +6875,7 @@
       </p:sp>
       <p:sp>
         <p:nvSpPr>
-          <p:cNvPr id="14" name="Text 12"/>
+          <p:cNvPr id="16" name="Text 14"/>
           <p:cNvSpPr/>
           <p:nvPr/>
         </p:nvSpPr>
@@ -15042,7 +15237,7 @@
                 <a:ea typeface="Calibri" pitchFamily="34" charset="-122"/>
                 <a:cs typeface="Calibri" pitchFamily="34" charset="-120"/>
               </a:rPr>
-              <a:t>The overreaction test  ·  runs ON TOP OF Method 1</a:t>
+              <a:t>The statistical test  ·  measures bias · does not gate trades in this work</a:t>
             </a:r>
             <a:endParaRPr lang="en-US" sz="1400" dirty="0"/>
           </a:p>

--- a/slides/final_deck.pptx
+++ b/slides/final_deck.pptx
@@ -7105,7 +7105,7 @@
                 <a:ea typeface="Calibri" pitchFamily="34" charset="-122"/>
                 <a:cs typeface="Calibri" pitchFamily="34" charset="-120"/>
               </a:rPr>
-              <a:t>MOST EFFECTIVE METHOD</a:t>
+              <a:t>STRONGEST FINDING</a:t>
             </a:r>
             <a:endParaRPr lang="en-US" sz="1200" dirty="0"/>
           </a:p>
@@ -7144,7 +7144,7 @@
                 <a:ea typeface="Georgia" pitchFamily="34" charset="-122"/>
                 <a:cs typeface="Georgia" pitchFamily="34" charset="-120"/>
               </a:rPr>
-              <a:t>Event-conditioned overreaction test</a:t>
+              <a:t>Method 2 · overreaction test</a:t>
             </a:r>
             <a:endParaRPr lang="en-US" sz="2000" dirty="0"/>
           </a:p>
@@ -7159,7 +7159,7 @@
         <p:spPr>
           <a:xfrm>
             <a:off x="685800" y="2423160"/>
-            <a:ext cx="5120640" cy="640080"/>
+            <a:ext cx="5120640" cy="777240"/>
           </a:xfrm>
           <a:prstGeom prst="rect">
             <a:avLst/>
@@ -7183,7 +7183,7 @@
                 <a:ea typeface="Calibri" pitchFamily="34" charset="-122"/>
                 <a:cs typeface="Calibri" pitchFamily="34" charset="-120"/>
               </a:rPr>
-              <a:t>the only variant with a statistically significant finding on the held-out test season</a:t>
+              <a:t>the diagnostic that confirmed the bias is statistically real on the held-out season  ·  did not drive trades (footnote)</a:t>
             </a:r>
             <a:endParaRPr lang="en-US" sz="1300" dirty="0"/>
           </a:p>
@@ -11792,12 +11792,12 @@
         </p:nvSpPr>
         <p:spPr>
           <a:xfrm>
-            <a:off x="10607040" y="2496312"/>
-            <a:ext cx="1143000" cy="365760"/>
+            <a:off x="10607040" y="2377440"/>
+            <a:ext cx="1143000" cy="640080"/>
           </a:xfrm>
           <a:prstGeom prst="roundRect">
             <a:avLst>
-              <a:gd name="adj" fmla="val 12500"/>
+              <a:gd name="adj" fmla="val 8571"/>
             </a:avLst>
           </a:prstGeom>
           <a:solidFill>
@@ -11819,8 +11819,8 @@
         </p:nvSpPr>
         <p:spPr>
           <a:xfrm>
-            <a:off x="10607040" y="2496312"/>
-            <a:ext cx="1143000" cy="365760"/>
+            <a:off x="10607040" y="2395728"/>
+            <a:ext cx="1143000" cy="320040"/>
           </a:xfrm>
           <a:prstGeom prst="rect">
             <a:avLst/>
@@ -11852,7 +11852,46 @@
       </p:sp>
       <p:sp>
         <p:nvSpPr>
-          <p:cNvPr id="9" name="Shape 6"/>
+          <p:cNvPr id="9" name="Text 6"/>
+          <p:cNvSpPr/>
+          <p:nvPr/>
+        </p:nvSpPr>
+        <p:spPr>
+          <a:xfrm>
+            <a:off x="10607040" y="2697480"/>
+            <a:ext cx="1143000" cy="274320"/>
+          </a:xfrm>
+          <a:prstGeom prst="rect">
+            <a:avLst/>
+          </a:prstGeom>
+          <a:noFill/>
+          <a:ln/>
+        </p:spPr>
+        <p:txBody>
+          <a:bodyPr wrap="square" rtlCol="0" anchor="ctr"/>
+          <a:lstStyle/>
+          <a:p>
+            <a:pPr algn="ctr" indent="0" marL="0">
+              <a:buNone/>
+            </a:pPr>
+            <a:r>
+              <a:rPr lang="en-US" sz="900" b="1" dirty="0">
+                <a:solidFill>
+                  <a:srgbClr val="EEA02B"/>
+                </a:solidFill>
+                <a:latin typeface="Calibri" pitchFamily="34" charset="0"/>
+                <a:ea typeface="Calibri" pitchFamily="34" charset="-122"/>
+                <a:cs typeface="Calibri" pitchFamily="34" charset="-120"/>
+              </a:rPr>
+              <a:t>THE TRADER</a:t>
+            </a:r>
+            <a:endParaRPr lang="en-US" sz="900" dirty="0"/>
+          </a:p>
+        </p:txBody>
+      </p:sp>
+      <p:sp>
+        <p:nvSpPr>
+          <p:cNvPr id="10" name="Shape 7"/>
           <p:cNvSpPr/>
           <p:nvPr/>
         </p:nvSpPr>
@@ -11877,18 +11916,18 @@
       </p:sp>
       <p:sp>
         <p:nvSpPr>
-          <p:cNvPr id="10" name="Shape 7"/>
-          <p:cNvSpPr/>
-          <p:nvPr/>
-        </p:nvSpPr>
-        <p:spPr>
-          <a:xfrm>
-            <a:off x="10607040" y="4005072"/>
-            <a:ext cx="1143000" cy="365760"/>
+          <p:cNvPr id="11" name="Shape 8"/>
+          <p:cNvSpPr/>
+          <p:nvPr/>
+        </p:nvSpPr>
+        <p:spPr>
+          <a:xfrm>
+            <a:off x="10607040" y="3886200"/>
+            <a:ext cx="1143000" cy="640080"/>
           </a:xfrm>
           <a:prstGeom prst="roundRect">
             <a:avLst>
-              <a:gd name="adj" fmla="val 12500"/>
+              <a:gd name="adj" fmla="val 8571"/>
             </a:avLst>
           </a:prstGeom>
           <a:solidFill>
@@ -11904,14 +11943,14 @@
       </p:sp>
       <p:sp>
         <p:nvSpPr>
-          <p:cNvPr id="11" name="Text 8"/>
-          <p:cNvSpPr/>
-          <p:nvPr/>
-        </p:nvSpPr>
-        <p:spPr>
-          <a:xfrm>
-            <a:off x="10607040" y="4005072"/>
-            <a:ext cx="1143000" cy="365760"/>
+          <p:cNvPr id="12" name="Text 9"/>
+          <p:cNvSpPr/>
+          <p:nvPr/>
+        </p:nvSpPr>
+        <p:spPr>
+          <a:xfrm>
+            <a:off x="10607040" y="3904488"/>
+            <a:ext cx="1143000" cy="320040"/>
           </a:xfrm>
           <a:prstGeom prst="rect">
             <a:avLst/>
@@ -11943,7 +11982,46 @@
       </p:sp>
       <p:sp>
         <p:nvSpPr>
-          <p:cNvPr id="12" name="Shape 9"/>
+          <p:cNvPr id="13" name="Text 10"/>
+          <p:cNvSpPr/>
+          <p:nvPr/>
+        </p:nvSpPr>
+        <p:spPr>
+          <a:xfrm>
+            <a:off x="10607040" y="4206240"/>
+            <a:ext cx="1143000" cy="274320"/>
+          </a:xfrm>
+          <a:prstGeom prst="rect">
+            <a:avLst/>
+          </a:prstGeom>
+          <a:noFill/>
+          <a:ln/>
+        </p:spPr>
+        <p:txBody>
+          <a:bodyPr wrap="square" rtlCol="0" anchor="ctr"/>
+          <a:lstStyle/>
+          <a:p>
+            <a:pPr algn="ctr" indent="0" marL="0">
+              <a:buNone/>
+            </a:pPr>
+            <a:r>
+              <a:rPr lang="en-US" sz="900" b="1" dirty="0">
+                <a:solidFill>
+                  <a:srgbClr val="0B2545"/>
+                </a:solidFill>
+                <a:latin typeface="Calibri" pitchFamily="34" charset="0"/>
+                <a:ea typeface="Calibri" pitchFamily="34" charset="-122"/>
+                <a:cs typeface="Calibri" pitchFamily="34" charset="-120"/>
+              </a:rPr>
+              <a:t>DIAGNOSTIC</a:t>
+            </a:r>
+            <a:endParaRPr lang="en-US" sz="900" dirty="0"/>
+          </a:p>
+        </p:txBody>
+      </p:sp>
+      <p:sp>
+        <p:nvSpPr>
+          <p:cNvPr id="14" name="Shape 11"/>
           <p:cNvSpPr/>
           <p:nvPr/>
         </p:nvSpPr>
@@ -11970,7 +12048,7 @@
       </p:sp>
       <p:sp>
         <p:nvSpPr>
-          <p:cNvPr id="13" name="Text 10"/>
+          <p:cNvPr id="15" name="Text 12"/>
           <p:cNvSpPr/>
           <p:nvPr/>
         </p:nvSpPr>
@@ -11993,79 +12071,79 @@
               <a:buNone/>
             </a:pPr>
             <a:r>
-              <a:rPr lang="en-US" sz="1500" i="1" dirty="0">
+              <a:rPr lang="en-US" sz="1400" b="1" i="1" dirty="0">
+                <a:solidFill>
+                  <a:srgbClr val="13315C"/>
+                </a:solidFill>
+                <a:latin typeface="Calibri" pitchFamily="34" charset="0"/>
+                <a:ea typeface="Calibri" pitchFamily="34" charset="-122"/>
+                <a:cs typeface="Calibri" pitchFamily="34" charset="-120"/>
+              </a:rPr>
+              <a:t>Two different roles:  </a:t>
+            </a:r>
+            <a:pPr algn="ctr" indent="0" marL="0">
+              <a:buNone/>
+            </a:pPr>
+            <a:r>
+              <a:rPr lang="en-US" sz="1400" b="1" i="1" dirty="0">
                 <a:solidFill>
                   <a:srgbClr val="0B2545"/>
                 </a:solidFill>
-                <a:latin typeface="Georgia" pitchFamily="34" charset="0"/>
-                <a:ea typeface="Georgia" pitchFamily="34" charset="-122"/>
-                <a:cs typeface="Georgia" pitchFamily="34" charset="-120"/>
-              </a:rPr>
-              <a:t>The two we built — </a:t>
+                <a:latin typeface="Calibri" pitchFamily="34" charset="0"/>
+                <a:ea typeface="Calibri" pitchFamily="34" charset="-122"/>
+                <a:cs typeface="Calibri" pitchFamily="34" charset="-120"/>
+              </a:rPr>
+              <a:t>Method 1 is the TRADER </a:t>
             </a:r>
             <a:pPr algn="ctr" indent="0" marL="0">
               <a:buNone/>
             </a:pPr>
             <a:r>
-              <a:rPr lang="en-US" sz="1500" b="1" i="1" dirty="0">
-                <a:solidFill>
-                  <a:srgbClr val="0B2545"/>
-                </a:solidFill>
-                <a:latin typeface="Georgia" pitchFamily="34" charset="0"/>
-                <a:ea typeface="Georgia" pitchFamily="34" charset="-122"/>
-                <a:cs typeface="Georgia" pitchFamily="34" charset="-120"/>
-              </a:rPr>
-              <a:t>Method 1 </a:t>
+              <a:rPr lang="en-US" sz="1400" i="1" dirty="0">
+                <a:solidFill>
+                  <a:srgbClr val="1A1A1A"/>
+                </a:solidFill>
+                <a:latin typeface="Calibri" pitchFamily="34" charset="0"/>
+                <a:ea typeface="Calibri" pitchFamily="34" charset="-122"/>
+                <a:cs typeface="Calibri" pitchFamily="34" charset="-120"/>
+              </a:rPr>
+              <a:t>(drives every bet)  ·  </a:t>
             </a:r>
             <a:pPr algn="ctr" indent="0" marL="0">
               <a:buNone/>
             </a:pPr>
             <a:r>
-              <a:rPr lang="en-US" sz="1500" i="1" dirty="0">
-                <a:solidFill>
-                  <a:srgbClr val="0B2545"/>
-                </a:solidFill>
-                <a:latin typeface="Georgia" pitchFamily="34" charset="0"/>
-                <a:ea typeface="Georgia" pitchFamily="34" charset="-122"/>
-                <a:cs typeface="Georgia" pitchFamily="34" charset="-120"/>
-              </a:rPr>
-              <a:t>and </a:t>
+              <a:rPr lang="en-US" sz="1400" b="1" i="1" dirty="0">
+                <a:solidFill>
+                  <a:srgbClr val="EEA02B"/>
+                </a:solidFill>
+                <a:latin typeface="Calibri" pitchFamily="34" charset="0"/>
+                <a:ea typeface="Calibri" pitchFamily="34" charset="-122"/>
+                <a:cs typeface="Calibri" pitchFamily="34" charset="-120"/>
+              </a:rPr>
+              <a:t>Method 2 is the DIAGNOSTIC </a:t>
             </a:r>
             <a:pPr algn="ctr" indent="0" marL="0">
               <a:buNone/>
             </a:pPr>
             <a:r>
-              <a:rPr lang="en-US" sz="1500" b="1" i="1" dirty="0">
-                <a:solidFill>
-                  <a:srgbClr val="EEA02B"/>
-                </a:solidFill>
-                <a:latin typeface="Georgia" pitchFamily="34" charset="0"/>
-                <a:ea typeface="Georgia" pitchFamily="34" charset="-122"/>
-                <a:cs typeface="Georgia" pitchFamily="34" charset="-120"/>
-              </a:rPr>
-              <a:t>Method 2 </a:t>
-            </a:r>
-            <a:pPr algn="ctr" indent="0" marL="0">
-              <a:buNone/>
-            </a:pPr>
-            <a:r>
-              <a:rPr lang="en-US" sz="1500" i="1" dirty="0">
-                <a:solidFill>
-                  <a:srgbClr val="0B2545"/>
-                </a:solidFill>
-                <a:latin typeface="Georgia" pitchFamily="34" charset="0"/>
-                <a:ea typeface="Georgia" pitchFamily="34" charset="-122"/>
-                <a:cs typeface="Georgia" pitchFamily="34" charset="-120"/>
-              </a:rPr>
-              <a:t>— are the only ones that work from play-by-play alone. The other four are gated on multi-venue in-play odds history we don't have.</a:t>
-            </a:r>
-            <a:endParaRPr lang="en-US" sz="1500" dirty="0"/>
-          </a:p>
-        </p:txBody>
-      </p:sp>
-      <p:sp>
-        <p:nvSpPr>
-          <p:cNvPr id="14" name="Text 11"/>
+              <a:rPr lang="en-US" sz="1400" i="1" dirty="0">
+                <a:solidFill>
+                  <a:srgbClr val="1A1A1A"/>
+                </a:solidFill>
+                <a:latin typeface="Calibri" pitchFamily="34" charset="0"/>
+                <a:ea typeface="Calibri" pitchFamily="34" charset="-122"/>
+                <a:cs typeface="Calibri" pitchFamily="34" charset="-120"/>
+              </a:rPr>
+              <a:t>(statistical finding, no trades). The other four are gated on multi-venue odds history we don't have.</a:t>
+            </a:r>
+            <a:endParaRPr lang="en-US" sz="1400" dirty="0"/>
+          </a:p>
+        </p:txBody>
+      </p:sp>
+      <p:sp>
+        <p:nvSpPr>
+          <p:cNvPr id="16" name="Text 13"/>
           <p:cNvSpPr/>
           <p:nvPr/>
         </p:nvSpPr>
@@ -12104,7 +12182,7 @@
       </p:sp>
       <p:sp>
         <p:nvSpPr>
-          <p:cNvPr id="15" name="Text 12"/>
+          <p:cNvPr id="17" name="Text 14"/>
           <p:cNvSpPr/>
           <p:nvPr/>
         </p:nvSpPr>

--- a/slides/final_deck.pptx
+++ b/slides/final_deck.pptx
@@ -17,13 +17,9 @@
     <p:sldId id="265" r:id="rId11"/>
     <p:sldId id="266" r:id="rId12"/>
     <p:sldId id="267" r:id="rId13"/>
-    <p:sldId id="268" r:id="rId14"/>
-    <p:sldId id="269" r:id="rId15"/>
-    <p:sldId id="270" r:id="rId16"/>
-    <p:sldId id="271" r:id="rId17"/>
   </p:sldIdLst>
   <p:notesMasterIdLst>
-    <p:notesMasterId r:id="rId18"/>
+    <p:notesMasterId r:id="rId14"/>
   </p:notesMasterIdLst>
   <p:sldSz cx="12192000" cy="6858000"/>
   <p:notesSz cx="6858000" cy="12192000"/>
@@ -805,358 +801,6 @@
             <a:fld id="{F7021451-1387-4CA6-816F-3879F97B5CBC}" type="slidenum">
               <a:rPr lang="en-US"/>
               <a:t>12</a:t>
-            </a:fld>
-            <a:endParaRPr lang="en-US"/>
-          </a:p>
-        </p:txBody>
-      </p:sp>
-    </p:spTree>
-    <p:extLst>
-      <p:ext uri="{BB962C8B-B14F-4D97-AF65-F5344CB8AC3E}">
-        <p14:creationId xmlns:p14="http://schemas.microsoft.com/office/powerpoint/2010/main" val="1024086991"/>
-      </p:ext>
-    </p:extLst>
-  </p:cSld>
-  <p:clrMapOvr>
-    <a:masterClrMapping/>
-  </p:clrMapOvr>
-</p:notes>
-</file>
-
-<file path=ppt/notesSlides/notesSlide13.xml><?xml version="1.0" encoding="utf-8"?>
-<p:notes xmlns:a="http://schemas.openxmlformats.org/drawingml/2006/main" xmlns:r="http://schemas.openxmlformats.org/officeDocument/2006/relationships" xmlns:p="http://schemas.openxmlformats.org/presentationml/2006/main">
-  <p:cSld>
-    <p:spTree>
-      <p:nvGrpSpPr>
-        <p:cNvPr id="1" name=""/>
-        <p:cNvGrpSpPr/>
-        <p:nvPr/>
-      </p:nvGrpSpPr>
-      <p:grpSpPr>
-        <a:xfrm>
-          <a:off x="0" y="0"/>
-          <a:ext cx="0" cy="0"/>
-          <a:chOff x="0" y="0"/>
-          <a:chExt cx="0" cy="0"/>
-        </a:xfrm>
-      </p:grpSpPr>
-      <p:sp>
-        <p:nvSpPr>
-          <p:cNvPr id="2" name="Slide Image Placeholder 1"/>
-          <p:cNvSpPr>
-            <a:spLocks noGrp="1" noRot="1" noChangeAspect="1"/>
-          </p:cNvSpPr>
-          <p:nvPr>
-            <p:ph type="sldImg"/>
-          </p:nvPr>
-        </p:nvSpPr>
-        <p:spPr/>
-      </p:sp>
-      <p:sp>
-        <p:nvSpPr>
-          <p:cNvPr id="3" name="Notes Placeholder 2"/>
-          <p:cNvSpPr>
-            <a:spLocks noGrp="1"/>
-          </p:cNvSpPr>
-          <p:nvPr>
-            <p:ph type="body" idx="1"/>
-          </p:nvPr>
-        </p:nvSpPr>
-        <p:spPr/>
-        <p:txBody>
-          <a:bodyPr/>
-          <a:lstStyle/>
-          <a:p>
-            <a:r>
-              <a:rPr lang="en-US" dirty="0"/>
-              <a:t/>
-            </a:r>
-            <a:endParaRPr lang="en-US" dirty="0"/>
-          </a:p>
-        </p:txBody>
-      </p:sp>
-      <p:sp>
-        <p:nvSpPr>
-          <p:cNvPr id="4" name="Slide Number Placeholder 3"/>
-          <p:cNvSpPr>
-            <a:spLocks noGrp="1"/>
-          </p:cNvSpPr>
-          <p:nvPr>
-            <p:ph type="sldNum" sz="quarter" idx="10"/>
-          </p:nvPr>
-        </p:nvSpPr>
-        <p:spPr/>
-        <p:txBody>
-          <a:bodyPr/>
-          <a:lstStyle/>
-          <a:p>
-            <a:fld id="{F7021451-1387-4CA6-816F-3879F97B5CBC}" type="slidenum">
-              <a:rPr lang="en-US"/>
-              <a:t>13</a:t>
-            </a:fld>
-            <a:endParaRPr lang="en-US"/>
-          </a:p>
-        </p:txBody>
-      </p:sp>
-    </p:spTree>
-    <p:extLst>
-      <p:ext uri="{BB962C8B-B14F-4D97-AF65-F5344CB8AC3E}">
-        <p14:creationId xmlns:p14="http://schemas.microsoft.com/office/powerpoint/2010/main" val="1024086991"/>
-      </p:ext>
-    </p:extLst>
-  </p:cSld>
-  <p:clrMapOvr>
-    <a:masterClrMapping/>
-  </p:clrMapOvr>
-</p:notes>
-</file>
-
-<file path=ppt/notesSlides/notesSlide14.xml><?xml version="1.0" encoding="utf-8"?>
-<p:notes xmlns:a="http://schemas.openxmlformats.org/drawingml/2006/main" xmlns:r="http://schemas.openxmlformats.org/officeDocument/2006/relationships" xmlns:p="http://schemas.openxmlformats.org/presentationml/2006/main">
-  <p:cSld>
-    <p:spTree>
-      <p:nvGrpSpPr>
-        <p:cNvPr id="1" name=""/>
-        <p:cNvGrpSpPr/>
-        <p:nvPr/>
-      </p:nvGrpSpPr>
-      <p:grpSpPr>
-        <a:xfrm>
-          <a:off x="0" y="0"/>
-          <a:ext cx="0" cy="0"/>
-          <a:chOff x="0" y="0"/>
-          <a:chExt cx="0" cy="0"/>
-        </a:xfrm>
-      </p:grpSpPr>
-      <p:sp>
-        <p:nvSpPr>
-          <p:cNvPr id="2" name="Slide Image Placeholder 1"/>
-          <p:cNvSpPr>
-            <a:spLocks noGrp="1" noRot="1" noChangeAspect="1"/>
-          </p:cNvSpPr>
-          <p:nvPr>
-            <p:ph type="sldImg"/>
-          </p:nvPr>
-        </p:nvSpPr>
-        <p:spPr/>
-      </p:sp>
-      <p:sp>
-        <p:nvSpPr>
-          <p:cNvPr id="3" name="Notes Placeholder 2"/>
-          <p:cNvSpPr>
-            <a:spLocks noGrp="1"/>
-          </p:cNvSpPr>
-          <p:nvPr>
-            <p:ph type="body" idx="1"/>
-          </p:nvPr>
-        </p:nvSpPr>
-        <p:spPr/>
-        <p:txBody>
-          <a:bodyPr/>
-          <a:lstStyle/>
-          <a:p>
-            <a:r>
-              <a:rPr lang="en-US" dirty="0"/>
-              <a:t/>
-            </a:r>
-            <a:endParaRPr lang="en-US" dirty="0"/>
-          </a:p>
-        </p:txBody>
-      </p:sp>
-      <p:sp>
-        <p:nvSpPr>
-          <p:cNvPr id="4" name="Slide Number Placeholder 3"/>
-          <p:cNvSpPr>
-            <a:spLocks noGrp="1"/>
-          </p:cNvSpPr>
-          <p:nvPr>
-            <p:ph type="sldNum" sz="quarter" idx="10"/>
-          </p:nvPr>
-        </p:nvSpPr>
-        <p:spPr/>
-        <p:txBody>
-          <a:bodyPr/>
-          <a:lstStyle/>
-          <a:p>
-            <a:fld id="{F7021451-1387-4CA6-816F-3879F97B5CBC}" type="slidenum">
-              <a:rPr lang="en-US"/>
-              <a:t>14</a:t>
-            </a:fld>
-            <a:endParaRPr lang="en-US"/>
-          </a:p>
-        </p:txBody>
-      </p:sp>
-    </p:spTree>
-    <p:extLst>
-      <p:ext uri="{BB962C8B-B14F-4D97-AF65-F5344CB8AC3E}">
-        <p14:creationId xmlns:p14="http://schemas.microsoft.com/office/powerpoint/2010/main" val="1024086991"/>
-      </p:ext>
-    </p:extLst>
-  </p:cSld>
-  <p:clrMapOvr>
-    <a:masterClrMapping/>
-  </p:clrMapOvr>
-</p:notes>
-</file>
-
-<file path=ppt/notesSlides/notesSlide15.xml><?xml version="1.0" encoding="utf-8"?>
-<p:notes xmlns:a="http://schemas.openxmlformats.org/drawingml/2006/main" xmlns:r="http://schemas.openxmlformats.org/officeDocument/2006/relationships" xmlns:p="http://schemas.openxmlformats.org/presentationml/2006/main">
-  <p:cSld>
-    <p:spTree>
-      <p:nvGrpSpPr>
-        <p:cNvPr id="1" name=""/>
-        <p:cNvGrpSpPr/>
-        <p:nvPr/>
-      </p:nvGrpSpPr>
-      <p:grpSpPr>
-        <a:xfrm>
-          <a:off x="0" y="0"/>
-          <a:ext cx="0" cy="0"/>
-          <a:chOff x="0" y="0"/>
-          <a:chExt cx="0" cy="0"/>
-        </a:xfrm>
-      </p:grpSpPr>
-      <p:sp>
-        <p:nvSpPr>
-          <p:cNvPr id="2" name="Slide Image Placeholder 1"/>
-          <p:cNvSpPr>
-            <a:spLocks noGrp="1" noRot="1" noChangeAspect="1"/>
-          </p:cNvSpPr>
-          <p:nvPr>
-            <p:ph type="sldImg"/>
-          </p:nvPr>
-        </p:nvSpPr>
-        <p:spPr/>
-      </p:sp>
-      <p:sp>
-        <p:nvSpPr>
-          <p:cNvPr id="3" name="Notes Placeholder 2"/>
-          <p:cNvSpPr>
-            <a:spLocks noGrp="1"/>
-          </p:cNvSpPr>
-          <p:nvPr>
-            <p:ph type="body" idx="1"/>
-          </p:nvPr>
-        </p:nvSpPr>
-        <p:spPr/>
-        <p:txBody>
-          <a:bodyPr/>
-          <a:lstStyle/>
-          <a:p>
-            <a:r>
-              <a:rPr lang="en-US" dirty="0"/>
-              <a:t/>
-            </a:r>
-            <a:endParaRPr lang="en-US" dirty="0"/>
-          </a:p>
-        </p:txBody>
-      </p:sp>
-      <p:sp>
-        <p:nvSpPr>
-          <p:cNvPr id="4" name="Slide Number Placeholder 3"/>
-          <p:cNvSpPr>
-            <a:spLocks noGrp="1"/>
-          </p:cNvSpPr>
-          <p:nvPr>
-            <p:ph type="sldNum" sz="quarter" idx="10"/>
-          </p:nvPr>
-        </p:nvSpPr>
-        <p:spPr/>
-        <p:txBody>
-          <a:bodyPr/>
-          <a:lstStyle/>
-          <a:p>
-            <a:fld id="{F7021451-1387-4CA6-816F-3879F97B5CBC}" type="slidenum">
-              <a:rPr lang="en-US"/>
-              <a:t>15</a:t>
-            </a:fld>
-            <a:endParaRPr lang="en-US"/>
-          </a:p>
-        </p:txBody>
-      </p:sp>
-    </p:spTree>
-    <p:extLst>
-      <p:ext uri="{BB962C8B-B14F-4D97-AF65-F5344CB8AC3E}">
-        <p14:creationId xmlns:p14="http://schemas.microsoft.com/office/powerpoint/2010/main" val="1024086991"/>
-      </p:ext>
-    </p:extLst>
-  </p:cSld>
-  <p:clrMapOvr>
-    <a:masterClrMapping/>
-  </p:clrMapOvr>
-</p:notes>
-</file>
-
-<file path=ppt/notesSlides/notesSlide16.xml><?xml version="1.0" encoding="utf-8"?>
-<p:notes xmlns:a="http://schemas.openxmlformats.org/drawingml/2006/main" xmlns:r="http://schemas.openxmlformats.org/officeDocument/2006/relationships" xmlns:p="http://schemas.openxmlformats.org/presentationml/2006/main">
-  <p:cSld>
-    <p:spTree>
-      <p:nvGrpSpPr>
-        <p:cNvPr id="1" name=""/>
-        <p:cNvGrpSpPr/>
-        <p:nvPr/>
-      </p:nvGrpSpPr>
-      <p:grpSpPr>
-        <a:xfrm>
-          <a:off x="0" y="0"/>
-          <a:ext cx="0" cy="0"/>
-          <a:chOff x="0" y="0"/>
-          <a:chExt cx="0" cy="0"/>
-        </a:xfrm>
-      </p:grpSpPr>
-      <p:sp>
-        <p:nvSpPr>
-          <p:cNvPr id="2" name="Slide Image Placeholder 1"/>
-          <p:cNvSpPr>
-            <a:spLocks noGrp="1" noRot="1" noChangeAspect="1"/>
-          </p:cNvSpPr>
-          <p:nvPr>
-            <p:ph type="sldImg"/>
-          </p:nvPr>
-        </p:nvSpPr>
-        <p:spPr/>
-      </p:sp>
-      <p:sp>
-        <p:nvSpPr>
-          <p:cNvPr id="3" name="Notes Placeholder 2"/>
-          <p:cNvSpPr>
-            <a:spLocks noGrp="1"/>
-          </p:cNvSpPr>
-          <p:nvPr>
-            <p:ph type="body" idx="1"/>
-          </p:nvPr>
-        </p:nvSpPr>
-        <p:spPr/>
-        <p:txBody>
-          <a:bodyPr/>
-          <a:lstStyle/>
-          <a:p>
-            <a:r>
-              <a:rPr lang="en-US" dirty="0"/>
-              <a:t/>
-            </a:r>
-            <a:endParaRPr lang="en-US" dirty="0"/>
-          </a:p>
-        </p:txBody>
-      </p:sp>
-      <p:sp>
-        <p:nvSpPr>
-          <p:cNvPr id="4" name="Slide Number Placeholder 3"/>
-          <p:cNvSpPr>
-            <a:spLocks noGrp="1"/>
-          </p:cNvSpPr>
-          <p:nvPr>
-            <p:ph type="sldNum" sz="quarter" idx="10"/>
-          </p:nvPr>
-        </p:nvSpPr>
-        <p:spPr/>
-        <p:txBody>
-          <a:bodyPr/>
-          <a:lstStyle/>
-          <a:p>
-            <a:fld id="{F7021451-1387-4CA6-816F-3879F97B5CBC}" type="slidenum">
-              <a:rPr lang="en-US"/>
-              <a:t>16</a:t>
             </a:fld>
             <a:endParaRPr lang="en-US"/>
           </a:p>
@@ -2456,7 +2100,7 @@
                 <a:ea typeface="Georgia" pitchFamily="34" charset="-122"/>
                 <a:cs typeface="Georgia" pitchFamily="34" charset="-120"/>
               </a:rPr>
-              <a:t>Method 1 vs Method 2 · the asymmetry</a:t>
+              <a:t>How Method 1 + Method 2 detect bias together</a:t>
             </a:r>
             <a:endParaRPr lang="en-US" sz="2800" dirty="0"/>
           </a:p>
@@ -2495,7 +2139,7 @@
                 <a:ea typeface="Calibri" pitchFamily="34" charset="-122"/>
                 <a:cs typeface="Calibri" pitchFamily="34" charset="-120"/>
               </a:rPr>
-              <a:t>Method 1 drives every trade · Method 2 proved the bias but didn't trade</a:t>
+              <a:t>A two-layer statistical detection  ·  both findings confirm the bias is real</a:t>
             </a:r>
             <a:endParaRPr lang="en-US" sz="1400" dirty="0"/>
           </a:p>
@@ -2543,7 +2187,7 @@
           <a:solidFill>
             <a:srgbClr val="F6F6F2"/>
           </a:solidFill>
-          <a:ln w="22860">
+          <a:ln w="20320">
             <a:solidFill>
               <a:srgbClr val="0B2545"/>
             </a:solidFill>
@@ -2609,7 +2253,7 @@
                 <a:ea typeface="Calibri" pitchFamily="34" charset="-122"/>
                 <a:cs typeface="Calibri" pitchFamily="34" charset="-120"/>
               </a:rPr>
-              <a:t>METHOD 1 · the TRADING signal</a:t>
+              <a:t>METHOD 1 · the calibrated baseline</a:t>
             </a:r>
             <a:endParaRPr lang="en-US" sz="1400" dirty="0"/>
           </a:p>
@@ -2648,7 +2292,7 @@
                 <a:ea typeface="Calibri" pitchFamily="34" charset="-122"/>
                 <a:cs typeface="Calibri" pitchFamily="34" charset="-120"/>
               </a:rPr>
-              <a:t>(active component)</a:t>
+              <a:t>layer 1 of the detection</a:t>
             </a:r>
             <a:endParaRPr lang="en-US" sz="1100" dirty="0"/>
           </a:p>
@@ -2662,7 +2306,7 @@
         </p:nvSpPr>
         <p:spPr>
           <a:xfrm>
-            <a:off x="685800" y="2286000"/>
+            <a:off x="685800" y="2331720"/>
             <a:ext cx="5029200" cy="411480"/>
           </a:xfrm>
           <a:prstGeom prst="rect">
@@ -2679,6 +2323,20 @@
               <a:buNone/>
             </a:pPr>
             <a:r>
+              <a:rPr lang="en-US" sz="1300" b="1" dirty="0">
+                <a:solidFill>
+                  <a:srgbClr val="13315C"/>
+                </a:solidFill>
+                <a:latin typeface="Calibri" pitchFamily="34" charset="0"/>
+                <a:ea typeface="Calibri" pitchFamily="34" charset="-122"/>
+                <a:cs typeface="Calibri" pitchFamily="34" charset="-120"/>
+              </a:rPr>
+              <a:t>INPUT:  </a:t>
+            </a:r>
+            <a:pPr indent="0" marL="0">
+              <a:buNone/>
+            </a:pPr>
+            <a:r>
               <a:rPr lang="en-US" sz="1300" dirty="0">
                 <a:solidFill>
                   <a:srgbClr val="1A1A1A"/>
@@ -2687,7 +2345,46 @@
                 <a:ea typeface="Calibri" pitchFamily="34" charset="-122"/>
                 <a:cs typeface="Calibri" pitchFamily="34" charset="-120"/>
               </a:rPr>
-              <a:t>•  computes </a:t>
+              <a:t>game state per minute</a:t>
+            </a:r>
+            <a:endParaRPr lang="en-US" sz="1300" dirty="0"/>
+          </a:p>
+        </p:txBody>
+      </p:sp>
+      <p:sp>
+        <p:nvSpPr>
+          <p:cNvPr id="10" name="Text 8"/>
+          <p:cNvSpPr/>
+          <p:nvPr/>
+        </p:nvSpPr>
+        <p:spPr>
+          <a:xfrm>
+            <a:off x="685800" y="2788920"/>
+            <a:ext cx="5029200" cy="411480"/>
+          </a:xfrm>
+          <a:prstGeom prst="rect">
+            <a:avLst/>
+          </a:prstGeom>
+          <a:noFill/>
+          <a:ln/>
+        </p:spPr>
+        <p:txBody>
+          <a:bodyPr wrap="square" rtlCol="0" anchor="ctr"/>
+          <a:lstStyle/>
+          <a:p>
+            <a:pPr indent="0" marL="0">
+              <a:buNone/>
+            </a:pPr>
+            <a:r>
+              <a:rPr lang="en-US" sz="1300" b="1" dirty="0">
+                <a:solidFill>
+                  <a:srgbClr val="13315C"/>
+                </a:solidFill>
+                <a:latin typeface="Calibri" pitchFamily="34" charset="0"/>
+                <a:ea typeface="Calibri" pitchFamily="34" charset="-122"/>
+                <a:cs typeface="Calibri" pitchFamily="34" charset="-120"/>
+              </a:rPr>
+              <a:t>OUTPUT:  </a:t>
             </a:r>
             <a:pPr indent="0" marL="0">
               <a:buNone/>
@@ -2701,7 +2398,7 @@
                 <a:ea typeface="Courier New" pitchFamily="34" charset="-122"/>
                 <a:cs typeface="Courier New" pitchFamily="34" charset="-120"/>
               </a:rPr>
-              <a:t>edge_t  =  p̂_t − p_market_t</a:t>
+              <a:t>p̂_t  (calibrated 0–1)</a:t>
             </a:r>
             <a:endParaRPr lang="en-US" sz="1300" dirty="0"/>
           </a:p>
@@ -2709,25 +2406,39 @@
       </p:sp>
       <p:sp>
         <p:nvSpPr>
-          <p:cNvPr id="10" name="Text 8"/>
-          <p:cNvSpPr/>
-          <p:nvPr/>
-        </p:nvSpPr>
-        <p:spPr>
-          <a:xfrm>
-            <a:off x="685800" y="2697480"/>
-            <a:ext cx="5029200" cy="411480"/>
-          </a:xfrm>
-          <a:prstGeom prst="rect">
-            <a:avLst/>
-          </a:prstGeom>
-          <a:noFill/>
-          <a:ln/>
-        </p:spPr>
-        <p:txBody>
-          <a:bodyPr wrap="square" rtlCol="0" anchor="ctr"/>
-          <a:lstStyle/>
-          <a:p>
+          <p:cNvPr id="11" name="Text 9"/>
+          <p:cNvSpPr/>
+          <p:nvPr/>
+        </p:nvSpPr>
+        <p:spPr>
+          <a:xfrm>
+            <a:off x="685800" y="3246120"/>
+            <a:ext cx="5029200" cy="457200"/>
+          </a:xfrm>
+          <a:prstGeom prst="rect">
+            <a:avLst/>
+          </a:prstGeom>
+          <a:noFill/>
+          <a:ln/>
+        </p:spPr>
+        <p:txBody>
+          <a:bodyPr wrap="square" rtlCol="0" anchor="ctr"/>
+          <a:lstStyle/>
+          <a:p>
+            <a:pPr indent="0" marL="0">
+              <a:buNone/>
+            </a:pPr>
+            <a:r>
+              <a:rPr lang="en-US" sz="1300" b="1" dirty="0">
+                <a:solidFill>
+                  <a:srgbClr val="13315C"/>
+                </a:solidFill>
+                <a:latin typeface="Calibri" pitchFamily="34" charset="0"/>
+                <a:ea typeface="Calibri" pitchFamily="34" charset="-122"/>
+                <a:cs typeface="Calibri" pitchFamily="34" charset="-120"/>
+              </a:rPr>
+              <a:t>ANSWERS:  </a:t>
+            </a:r>
             <a:pPr indent="0" marL="0">
               <a:buNone/>
             </a:pPr>
@@ -2740,21 +2451,7 @@
                 <a:ea typeface="Calibri" pitchFamily="34" charset="-122"/>
                 <a:cs typeface="Calibri" pitchFamily="34" charset="-120"/>
               </a:rPr>
-              <a:t>•  </a:t>
-            </a:r>
-            <a:pPr indent="0" marL="0">
-              <a:buNone/>
-            </a:pPr>
-            <a:r>
-              <a:rPr lang="en-US" sz="1300" b="1" dirty="0">
-                <a:solidFill>
-                  <a:srgbClr val="0B2545"/>
-                </a:solidFill>
-                <a:latin typeface="Courier New" pitchFamily="34" charset="0"/>
-                <a:ea typeface="Courier New" pitchFamily="34" charset="-122"/>
-                <a:cs typeface="Courier New" pitchFamily="34" charset="-120"/>
-              </a:rPr>
-              <a:t>|edge| &gt; threshold  →  BET</a:t>
+              <a:t>"Can our probabilities be trusted?"</a:t>
             </a:r>
             <a:endParaRPr lang="en-US" sz="1300" dirty="0"/>
           </a:p>
@@ -2762,91 +2459,13 @@
       </p:sp>
       <p:sp>
         <p:nvSpPr>
-          <p:cNvPr id="11" name="Text 9"/>
-          <p:cNvSpPr/>
-          <p:nvPr/>
-        </p:nvSpPr>
-        <p:spPr>
-          <a:xfrm>
-            <a:off x="685800" y="3108960"/>
-            <a:ext cx="5029200" cy="411480"/>
-          </a:xfrm>
-          <a:prstGeom prst="rect">
-            <a:avLst/>
-          </a:prstGeom>
-          <a:noFill/>
-          <a:ln/>
-        </p:spPr>
-        <p:txBody>
-          <a:bodyPr wrap="square" rtlCol="0" anchor="ctr"/>
-          <a:lstStyle/>
-          <a:p>
-            <a:pPr indent="0" marL="0">
-              <a:buNone/>
-            </a:pPr>
-            <a:r>
-              <a:rPr lang="en-US" sz="1300" dirty="0">
-                <a:solidFill>
-                  <a:srgbClr val="1A1A1A"/>
-                </a:solidFill>
-                <a:latin typeface="Calibri" pitchFamily="34" charset="0"/>
-                <a:ea typeface="Calibri" pitchFamily="34" charset="-122"/>
-                <a:cs typeface="Calibri" pitchFamily="34" charset="-120"/>
-              </a:rPr>
-              <a:t>•  sign of edge → which side</a:t>
-            </a:r>
-            <a:endParaRPr lang="en-US" sz="1300" dirty="0"/>
-          </a:p>
-        </p:txBody>
-      </p:sp>
-      <p:sp>
-        <p:nvSpPr>
-          <p:cNvPr id="12" name="Text 10"/>
-          <p:cNvSpPr/>
-          <p:nvPr/>
-        </p:nvSpPr>
-        <p:spPr>
-          <a:xfrm>
-            <a:off x="685800" y="3520440"/>
-            <a:ext cx="5029200" cy="411480"/>
-          </a:xfrm>
-          <a:prstGeom prst="rect">
-            <a:avLst/>
-          </a:prstGeom>
-          <a:noFill/>
-          <a:ln/>
-        </p:spPr>
-        <p:txBody>
-          <a:bodyPr wrap="square" rtlCol="0" anchor="ctr"/>
-          <a:lstStyle/>
-          <a:p>
-            <a:pPr indent="0" marL="0">
-              <a:buNone/>
-            </a:pPr>
-            <a:r>
-              <a:rPr lang="en-US" sz="1300" dirty="0">
-                <a:solidFill>
-                  <a:srgbClr val="1A1A1A"/>
-                </a:solidFill>
-                <a:latin typeface="Calibri" pitchFamily="34" charset="0"/>
-                <a:ea typeface="Calibri" pitchFamily="34" charset="-122"/>
-                <a:cs typeface="Calibri" pitchFamily="34" charset="-120"/>
-              </a:rPr>
-              <a:t>•  p̂_t → Kelly stake size</a:t>
-            </a:r>
-            <a:endParaRPr lang="en-US" sz="1300" dirty="0"/>
-          </a:p>
-        </p:txBody>
-      </p:sp>
-      <p:sp>
-        <p:nvSpPr>
-          <p:cNvPr id="13" name="Shape 11"/>
-          <p:cNvSpPr/>
-          <p:nvPr/>
-        </p:nvSpPr>
-        <p:spPr>
-          <a:xfrm>
-            <a:off x="685800" y="4023360"/>
+          <p:cNvPr id="12" name="Shape 10"/>
+          <p:cNvSpPr/>
+          <p:nvPr/>
+        </p:nvSpPr>
+        <p:spPr>
+          <a:xfrm>
+            <a:off x="685800" y="3886200"/>
             <a:ext cx="5029200" cy="36576"/>
           </a:xfrm>
           <a:prstGeom prst="rect">
@@ -2865,13 +2484,119 @@
       </p:sp>
       <p:sp>
         <p:nvSpPr>
+          <p:cNvPr id="13" name="Text 11"/>
+          <p:cNvSpPr/>
+          <p:nvPr/>
+        </p:nvSpPr>
+        <p:spPr>
+          <a:xfrm>
+            <a:off x="685800" y="4069080"/>
+            <a:ext cx="5029200" cy="457200"/>
+          </a:xfrm>
+          <a:prstGeom prst="rect">
+            <a:avLst/>
+          </a:prstGeom>
+          <a:noFill/>
+          <a:ln/>
+        </p:spPr>
+        <p:txBody>
+          <a:bodyPr wrap="square" rtlCol="0" anchor="ctr"/>
+          <a:lstStyle/>
+          <a:p>
+            <a:pPr indent="0" marL="0">
+              <a:buNone/>
+            </a:pPr>
+            <a:r>
+              <a:rPr lang="en-US" sz="1400" b="1" dirty="0">
+                <a:solidFill>
+                  <a:srgbClr val="0B2545"/>
+                </a:solidFill>
+                <a:latin typeface="Calibri" pitchFamily="34" charset="0"/>
+                <a:ea typeface="Calibri" pitchFamily="34" charset="-122"/>
+                <a:cs typeface="Calibri" pitchFamily="34" charset="-120"/>
+              </a:rPr>
+              <a:t>FINDING 1:  </a:t>
+            </a:r>
+            <a:pPr indent="0" marL="0">
+              <a:buNone/>
+            </a:pPr>
+            <a:r>
+              <a:rPr lang="en-US" sz="1600" b="1" dirty="0">
+                <a:solidFill>
+                  <a:srgbClr val="EEA02B"/>
+                </a:solidFill>
+                <a:latin typeface="Calibri" pitchFamily="34" charset="0"/>
+                <a:ea typeface="Calibri" pitchFamily="34" charset="-122"/>
+                <a:cs typeface="Calibri" pitchFamily="34" charset="-120"/>
+              </a:rPr>
+              <a:t>✅  </a:t>
+            </a:r>
+            <a:pPr indent="0" marL="0">
+              <a:buNone/>
+            </a:pPr>
+            <a:r>
+              <a:rPr lang="en-US" sz="1400" b="1" dirty="0">
+                <a:solidFill>
+                  <a:srgbClr val="0B2545"/>
+                </a:solidFill>
+                <a:latin typeface="Calibri" pitchFamily="34" charset="0"/>
+                <a:ea typeface="Calibri" pitchFamily="34" charset="-122"/>
+                <a:cs typeface="Calibri" pitchFamily="34" charset="-120"/>
+              </a:rPr>
+              <a:t>yes — well calibrated</a:t>
+            </a:r>
+            <a:endParaRPr lang="en-US" sz="1400" dirty="0"/>
+          </a:p>
+        </p:txBody>
+      </p:sp>
+      <p:sp>
+        <p:nvSpPr>
           <p:cNvPr id="14" name="Text 12"/>
           <p:cNvSpPr/>
           <p:nvPr/>
         </p:nvSpPr>
         <p:spPr>
           <a:xfrm>
-            <a:off x="685800" y="4160520"/>
+            <a:off x="685800" y="4526280"/>
+            <a:ext cx="5029200" cy="365760"/>
+          </a:xfrm>
+          <a:prstGeom prst="rect">
+            <a:avLst/>
+          </a:prstGeom>
+          <a:noFill/>
+          <a:ln/>
+        </p:spPr>
+        <p:txBody>
+          <a:bodyPr wrap="square" rtlCol="0" anchor="ctr"/>
+          <a:lstStyle/>
+          <a:p>
+            <a:pPr indent="0" marL="0">
+              <a:buNone/>
+            </a:pPr>
+            <a:r>
+              <a:rPr lang="en-US" sz="1100" i="1" dirty="0">
+                <a:solidFill>
+                  <a:srgbClr val="13315C"/>
+                </a:solidFill>
+                <a:latin typeface="Calibri" pitchFamily="34" charset="0"/>
+                <a:ea typeface="Calibri" pitchFamily="34" charset="-122"/>
+                <a:cs typeface="Calibri" pitchFamily="34" charset="-120"/>
+              </a:rPr>
+              <a:t>(numbers on the Finding 1 slide)</a:t>
+            </a:r>
+            <a:endParaRPr lang="en-US" sz="1100" dirty="0"/>
+          </a:p>
+        </p:txBody>
+      </p:sp>
+      <p:sp>
+        <p:nvSpPr>
+          <p:cNvPr id="15" name="Text 13"/>
+          <p:cNvSpPr/>
+          <p:nvPr/>
+        </p:nvSpPr>
+        <p:spPr>
+          <a:xfrm>
+            <a:off x="685800" y="4983480"/>
             <a:ext cx="5029200" cy="457200"/>
           </a:xfrm>
           <a:prstGeom prst="rect">
@@ -2884,25 +2609,75 @@
           <a:bodyPr wrap="square" rtlCol="0" anchor="ctr"/>
           <a:lstStyle/>
           <a:p>
-            <a:pPr indent="0" marL="0">
-              <a:buNone/>
-            </a:pPr>
-            <a:r>
-              <a:rPr lang="en-US" sz="1300" b="1" dirty="0">
-                <a:solidFill>
-                  <a:srgbClr val="0B2545"/>
-                </a:solidFill>
-                <a:latin typeface="Calibri" pitchFamily="34" charset="0"/>
-                <a:ea typeface="Calibri" pitchFamily="34" charset="-122"/>
-                <a:cs typeface="Calibri" pitchFamily="34" charset="-120"/>
-              </a:rPr>
-              <a:t>100% of bets, 100% of P&amp;L  </a:t>
-            </a:r>
-            <a:pPr indent="0" marL="0">
-              <a:buNone/>
-            </a:pPr>
-            <a:r>
-              <a:rPr lang="en-US" sz="1300" i="1" dirty="0">
+            <a:pPr algn="ctr" indent="0" marL="0">
+              <a:buNone/>
+            </a:pPr>
+            <a:r>
+              <a:rPr lang="en-US" sz="1100" i="1" dirty="0">
+                <a:solidFill>
+                  <a:srgbClr val="8DA9C4"/>
+                </a:solidFill>
+                <a:latin typeface="Calibri" pitchFamily="34" charset="0"/>
+                <a:ea typeface="Calibri" pitchFamily="34" charset="-122"/>
+                <a:cs typeface="Calibri" pitchFamily="34" charset="-120"/>
+              </a:rPr>
+              <a:t>Without this, every downstream test would be junk.</a:t>
+            </a:r>
+            <a:endParaRPr lang="en-US" sz="1100" dirty="0"/>
+          </a:p>
+        </p:txBody>
+      </p:sp>
+      <p:sp>
+        <p:nvSpPr>
+          <p:cNvPr id="16" name="Shape 14"/>
+          <p:cNvSpPr/>
+          <p:nvPr/>
+        </p:nvSpPr>
+        <p:spPr>
+          <a:xfrm>
+            <a:off x="5943600" y="3154680"/>
+            <a:ext cx="640080" cy="548640"/>
+          </a:xfrm>
+          <a:prstGeom prst="rightArrow">
+            <a:avLst/>
+          </a:prstGeom>
+          <a:solidFill>
+            <a:srgbClr val="EEA02B"/>
+          </a:solidFill>
+          <a:ln w="12700">
+            <a:solidFill>
+              <a:srgbClr val="EEA02B"/>
+            </a:solidFill>
+            <a:prstDash val="solid"/>
+          </a:ln>
+        </p:spPr>
+      </p:sp>
+      <p:sp>
+        <p:nvSpPr>
+          <p:cNvPr id="17" name="Text 15"/>
+          <p:cNvSpPr/>
+          <p:nvPr/>
+        </p:nvSpPr>
+        <p:spPr>
+          <a:xfrm>
+            <a:off x="5760720" y="3749040"/>
+            <a:ext cx="1005840" cy="274320"/>
+          </a:xfrm>
+          <a:prstGeom prst="rect">
+            <a:avLst/>
+          </a:prstGeom>
+          <a:noFill/>
+          <a:ln/>
+        </p:spPr>
+        <p:txBody>
+          <a:bodyPr wrap="square" rtlCol="0" anchor="ctr"/>
+          <a:lstStyle/>
+          <a:p>
+            <a:pPr algn="ctr" indent="0" marL="0">
+              <a:buNone/>
+            </a:pPr>
+            <a:r>
+              <a:rPr lang="en-US" sz="900" i="1" dirty="0">
                 <a:solidFill>
                   <a:srgbClr val="13315C"/>
                 </a:solidFill>
@@ -2910,114 +2685,22 @@
                 <a:ea typeface="Calibri" pitchFamily="34" charset="-122"/>
                 <a:cs typeface="Calibri" pitchFamily="34" charset="-120"/>
               </a:rPr>
-              <a:t>in the backtest</a:t>
-            </a:r>
-            <a:endParaRPr lang="en-US" sz="1300" dirty="0"/>
-          </a:p>
-        </p:txBody>
-      </p:sp>
-      <p:sp>
-        <p:nvSpPr>
-          <p:cNvPr id="15" name="Text 13"/>
-          <p:cNvSpPr/>
-          <p:nvPr/>
-        </p:nvSpPr>
-        <p:spPr>
-          <a:xfrm>
-            <a:off x="685800" y="4663440"/>
-            <a:ext cx="5029200" cy="457200"/>
-          </a:xfrm>
-          <a:prstGeom prst="rect">
-            <a:avLst/>
-          </a:prstGeom>
-          <a:noFill/>
-          <a:ln/>
-        </p:spPr>
-        <p:txBody>
-          <a:bodyPr wrap="square" rtlCol="0" anchor="ctr"/>
-          <a:lstStyle/>
-          <a:p>
-            <a:pPr indent="0" marL="0">
-              <a:buNone/>
-            </a:pPr>
-            <a:r>
-              <a:rPr lang="en-US" sz="1100" b="1" dirty="0">
-                <a:solidFill>
-                  <a:srgbClr val="13315C"/>
-                </a:solidFill>
-                <a:latin typeface="Calibri" pitchFamily="34" charset="0"/>
-                <a:ea typeface="Calibri" pitchFamily="34" charset="-122"/>
-                <a:cs typeface="Calibri" pitchFamily="34" charset="-120"/>
-              </a:rPr>
-              <a:t>Tested on:  </a:t>
-            </a:r>
-            <a:pPr indent="0" marL="0">
-              <a:buNone/>
-            </a:pPr>
-            <a:r>
-              <a:rPr lang="en-US" sz="1100" i="1" dirty="0">
-                <a:solidFill>
-                  <a:srgbClr val="1A1A1A"/>
-                </a:solidFill>
-                <a:latin typeface="Calibri" pitchFamily="34" charset="0"/>
-                <a:ea typeface="Calibri" pitchFamily="34" charset="-122"/>
-                <a:cs typeface="Calibri" pitchFamily="34" charset="-120"/>
-              </a:rPr>
-              <a:t>Game 5 (sportsbook)  +  Kalshi pool</a:t>
-            </a:r>
-            <a:endParaRPr lang="en-US" sz="1100" dirty="0"/>
-          </a:p>
-        </p:txBody>
-      </p:sp>
-      <p:sp>
-        <p:nvSpPr>
-          <p:cNvPr id="16" name="Text 14"/>
-          <p:cNvSpPr/>
-          <p:nvPr/>
-        </p:nvSpPr>
-        <p:spPr>
-          <a:xfrm>
-            <a:off x="5852160" y="3291840"/>
-            <a:ext cx="457200" cy="365760"/>
-          </a:xfrm>
-          <a:prstGeom prst="rect">
-            <a:avLst/>
-          </a:prstGeom>
-          <a:noFill/>
-          <a:ln/>
-        </p:spPr>
-        <p:txBody>
-          <a:bodyPr wrap="square" rtlCol="0" anchor="ctr"/>
-          <a:lstStyle/>
-          <a:p>
-            <a:pPr algn="ctr" indent="0" marL="0">
-              <a:buNone/>
-            </a:pPr>
-            <a:r>
-              <a:rPr lang="en-US" sz="1800" b="1" i="1" dirty="0">
-                <a:solidFill>
-                  <a:srgbClr val="8DA9C4"/>
-                </a:solidFill>
-                <a:latin typeface="Georgia" pitchFamily="34" charset="0"/>
-                <a:ea typeface="Georgia" pitchFamily="34" charset="-122"/>
-                <a:cs typeface="Georgia" pitchFamily="34" charset="-120"/>
-              </a:rPr>
-              <a:t>vs</a:t>
-            </a:r>
-            <a:endParaRPr lang="en-US" sz="1800" dirty="0"/>
-          </a:p>
-        </p:txBody>
-      </p:sp>
-      <p:sp>
-        <p:nvSpPr>
-          <p:cNvPr id="17" name="Shape 15"/>
-          <p:cNvSpPr/>
-          <p:nvPr/>
-        </p:nvSpPr>
-        <p:spPr>
-          <a:xfrm>
-            <a:off x="6355080" y="1417320"/>
-            <a:ext cx="5394960" cy="4114800"/>
+              <a:t>feeds p̂_t</a:t>
+            </a:r>
+            <a:endParaRPr lang="en-US" sz="900" dirty="0"/>
+          </a:p>
+        </p:txBody>
+      </p:sp>
+      <p:sp>
+        <p:nvSpPr>
+          <p:cNvPr id="18" name="Shape 16"/>
+          <p:cNvSpPr/>
+          <p:nvPr/>
+        </p:nvSpPr>
+        <p:spPr>
+          <a:xfrm>
+            <a:off x="6675120" y="1417320"/>
+            <a:ext cx="5074920" cy="4114800"/>
           </a:xfrm>
           <a:prstGeom prst="roundRect">
             <a:avLst>
@@ -3037,24 +2720,24 @@
       </p:sp>
       <p:sp>
         <p:nvSpPr>
-          <p:cNvPr id="18" name="Shape 16"/>
-          <p:cNvSpPr/>
-          <p:nvPr/>
-        </p:nvSpPr>
-        <p:spPr>
-          <a:xfrm>
-            <a:off x="6355080" y="1417320"/>
-            <a:ext cx="5394960" cy="502920"/>
+          <p:cNvPr id="19" name="Shape 17"/>
+          <p:cNvSpPr/>
+          <p:nvPr/>
+        </p:nvSpPr>
+        <p:spPr>
+          <a:xfrm>
+            <a:off x="6675120" y="1417320"/>
+            <a:ext cx="5074920" cy="502920"/>
           </a:xfrm>
           <a:prstGeom prst="rect">
             <a:avLst/>
           </a:prstGeom>
           <a:solidFill>
-            <a:srgbClr val="13315C"/>
+            <a:srgbClr val="0B2545"/>
           </a:solidFill>
           <a:ln w="12700">
             <a:solidFill>
-              <a:srgbClr val="13315C"/>
+              <a:srgbClr val="0B2545"/>
             </a:solidFill>
             <a:prstDash val="solid"/>
           </a:ln>
@@ -3062,14 +2745,14 @@
       </p:sp>
       <p:sp>
         <p:nvSpPr>
-          <p:cNvPr id="19" name="Text 17"/>
-          <p:cNvSpPr/>
-          <p:nvPr/>
-        </p:nvSpPr>
-        <p:spPr>
-          <a:xfrm>
-            <a:off x="6355080" y="1417320"/>
-            <a:ext cx="5394960" cy="502920"/>
+          <p:cNvPr id="20" name="Text 18"/>
+          <p:cNvSpPr/>
+          <p:nvPr/>
+        </p:nvSpPr>
+        <p:spPr>
+          <a:xfrm>
+            <a:off x="6675120" y="1417320"/>
+            <a:ext cx="5074920" cy="502920"/>
           </a:xfrm>
           <a:prstGeom prst="rect">
             <a:avLst/>
@@ -3093,7 +2776,7 @@
                 <a:ea typeface="Calibri" pitchFamily="34" charset="-122"/>
                 <a:cs typeface="Calibri" pitchFamily="34" charset="-120"/>
               </a:rPr>
-              <a:t>METHOD 2 · the FINDING (not a trader)</a:t>
+              <a:t>METHOD 2 · the bias test</a:t>
             </a:r>
             <a:endParaRPr lang="en-US" sz="1400" dirty="0"/>
           </a:p>
@@ -3101,14 +2784,14 @@
       </p:sp>
       <p:sp>
         <p:nvSpPr>
-          <p:cNvPr id="20" name="Text 18"/>
-          <p:cNvSpPr/>
-          <p:nvPr/>
-        </p:nvSpPr>
-        <p:spPr>
-          <a:xfrm>
-            <a:off x="6355080" y="1993392"/>
-            <a:ext cx="5394960" cy="274320"/>
+          <p:cNvPr id="21" name="Text 19"/>
+          <p:cNvSpPr/>
+          <p:nvPr/>
+        </p:nvSpPr>
+        <p:spPr>
+          <a:xfrm>
+            <a:off x="6675120" y="1993392"/>
+            <a:ext cx="5074920" cy="274320"/>
           </a:xfrm>
           <a:prstGeom prst="rect">
             <a:avLst/>
@@ -3132,7 +2815,7 @@
                 <a:ea typeface="Calibri" pitchFamily="34" charset="-122"/>
                 <a:cs typeface="Calibri" pitchFamily="34" charset="-120"/>
               </a:rPr>
-              <a:t>(diagnostic only · footnote)</a:t>
+              <a:t>layer 2 of the detection</a:t>
             </a:r>
             <a:endParaRPr lang="en-US" sz="1100" dirty="0"/>
           </a:p>
@@ -3140,25 +2823,39 @@
       </p:sp>
       <p:sp>
         <p:nvSpPr>
-          <p:cNvPr id="21" name="Text 19"/>
-          <p:cNvSpPr/>
-          <p:nvPr/>
-        </p:nvSpPr>
-        <p:spPr>
-          <a:xfrm>
-            <a:off x="6537960" y="2286000"/>
-            <a:ext cx="5074920" cy="411480"/>
-          </a:xfrm>
-          <a:prstGeom prst="rect">
-            <a:avLst/>
-          </a:prstGeom>
-          <a:noFill/>
-          <a:ln/>
-        </p:spPr>
-        <p:txBody>
-          <a:bodyPr wrap="square" rtlCol="0" anchor="ctr"/>
-          <a:lstStyle/>
-          <a:p>
+          <p:cNvPr id="22" name="Text 20"/>
+          <p:cNvSpPr/>
+          <p:nvPr/>
+        </p:nvSpPr>
+        <p:spPr>
+          <a:xfrm>
+            <a:off x="6858000" y="2331720"/>
+            <a:ext cx="4754880" cy="411480"/>
+          </a:xfrm>
+          <a:prstGeom prst="rect">
+            <a:avLst/>
+          </a:prstGeom>
+          <a:noFill/>
+          <a:ln/>
+        </p:spPr>
+        <p:txBody>
+          <a:bodyPr wrap="square" rtlCol="0" anchor="ctr"/>
+          <a:lstStyle/>
+          <a:p>
+            <a:pPr indent="0" marL="0">
+              <a:buNone/>
+            </a:pPr>
+            <a:r>
+              <a:rPr lang="en-US" sz="1300" b="1" dirty="0">
+                <a:solidFill>
+                  <a:srgbClr val="13315C"/>
+                </a:solidFill>
+                <a:latin typeface="Calibri" pitchFamily="34" charset="0"/>
+                <a:ea typeface="Calibri" pitchFamily="34" charset="-122"/>
+                <a:cs typeface="Calibri" pitchFamily="34" charset="-120"/>
+              </a:rPr>
+              <a:t>INPUT:  </a:t>
+            </a:r>
             <a:pPr indent="0" marL="0">
               <a:buNone/>
             </a:pPr>
@@ -3171,7 +2868,46 @@
                 <a:ea typeface="Calibri" pitchFamily="34" charset="-122"/>
                 <a:cs typeface="Calibri" pitchFamily="34" charset="-120"/>
               </a:rPr>
-              <a:t>•  measures </a:t>
+              <a:t>p̂_t at trailing-team scoring events</a:t>
+            </a:r>
+            <a:endParaRPr lang="en-US" sz="1300" dirty="0"/>
+          </a:p>
+        </p:txBody>
+      </p:sp>
+      <p:sp>
+        <p:nvSpPr>
+          <p:cNvPr id="23" name="Text 21"/>
+          <p:cNvSpPr/>
+          <p:nvPr/>
+        </p:nvSpPr>
+        <p:spPr>
+          <a:xfrm>
+            <a:off x="6858000" y="2788920"/>
+            <a:ext cx="4754880" cy="411480"/>
+          </a:xfrm>
+          <a:prstGeom prst="rect">
+            <a:avLst/>
+          </a:prstGeom>
+          <a:noFill/>
+          <a:ln/>
+        </p:spPr>
+        <p:txBody>
+          <a:bodyPr wrap="square" rtlCol="0" anchor="ctr"/>
+          <a:lstStyle/>
+          <a:p>
+            <a:pPr indent="0" marL="0">
+              <a:buNone/>
+            </a:pPr>
+            <a:r>
+              <a:rPr lang="en-US" sz="1300" b="1" dirty="0">
+                <a:solidFill>
+                  <a:srgbClr val="13315C"/>
+                </a:solidFill>
+                <a:latin typeface="Calibri" pitchFamily="34" charset="0"/>
+                <a:ea typeface="Calibri" pitchFamily="34" charset="-122"/>
+                <a:cs typeface="Calibri" pitchFamily="34" charset="-120"/>
+              </a:rPr>
+              <a:t>OUTPUT:  </a:t>
             </a:r>
             <a:pPr indent="0" marL="0">
               <a:buNone/>
@@ -3199,7 +2935,7 @@
                 <a:ea typeface="Calibri" pitchFamily="34" charset="-122"/>
                 <a:cs typeface="Calibri" pitchFamily="34" charset="-120"/>
               </a:rPr>
-              <a:t> at trailing-team events</a:t>
+              <a:t> + 95% CI + p-value</a:t>
             </a:r>
             <a:endParaRPr lang="en-US" sz="1300" dirty="0"/>
           </a:p>
@@ -3207,25 +2943,39 @@
       </p:sp>
       <p:sp>
         <p:nvSpPr>
-          <p:cNvPr id="22" name="Text 20"/>
-          <p:cNvSpPr/>
-          <p:nvPr/>
-        </p:nvSpPr>
-        <p:spPr>
-          <a:xfrm>
-            <a:off x="6537960" y="2697480"/>
-            <a:ext cx="5074920" cy="411480"/>
-          </a:xfrm>
-          <a:prstGeom prst="rect">
-            <a:avLst/>
-          </a:prstGeom>
-          <a:noFill/>
-          <a:ln/>
-        </p:spPr>
-        <p:txBody>
-          <a:bodyPr wrap="square" rtlCol="0" anchor="ctr"/>
-          <a:lstStyle/>
-          <a:p>
+          <p:cNvPr id="24" name="Text 22"/>
+          <p:cNvSpPr/>
+          <p:nvPr/>
+        </p:nvSpPr>
+        <p:spPr>
+          <a:xfrm>
+            <a:off x="6858000" y="3246120"/>
+            <a:ext cx="4754880" cy="457200"/>
+          </a:xfrm>
+          <a:prstGeom prst="rect">
+            <a:avLst/>
+          </a:prstGeom>
+          <a:noFill/>
+          <a:ln/>
+        </p:spPr>
+        <p:txBody>
+          <a:bodyPr wrap="square" rtlCol="0" anchor="ctr"/>
+          <a:lstStyle/>
+          <a:p>
+            <a:pPr indent="0" marL="0">
+              <a:buNone/>
+            </a:pPr>
+            <a:r>
+              <a:rPr lang="en-US" sz="1300" b="1" dirty="0">
+                <a:solidFill>
+                  <a:srgbClr val="13315C"/>
+                </a:solidFill>
+                <a:latin typeface="Calibri" pitchFamily="34" charset="0"/>
+                <a:ea typeface="Calibri" pitchFamily="34" charset="-122"/>
+                <a:cs typeface="Calibri" pitchFamily="34" charset="-120"/>
+              </a:rPr>
+              <a:t>ANSWERS:  </a:t>
+            </a:r>
             <a:pPr indent="0" marL="0">
               <a:buNone/>
             </a:pPr>
@@ -3238,7 +2988,7 @@
                 <a:ea typeface="Calibri" pitchFamily="34" charset="-122"/>
                 <a:cs typeface="Calibri" pitchFamily="34" charset="-120"/>
               </a:rPr>
-              <a:t>•  block-bootstrap by game → CI, p-value</a:t>
+              <a:t>"Does the market overshoot p̂_t?"</a:t>
             </a:r>
             <a:endParaRPr lang="en-US" sz="1300" dirty="0"/>
           </a:p>
@@ -3246,120 +2996,14 @@
       </p:sp>
       <p:sp>
         <p:nvSpPr>
-          <p:cNvPr id="23" name="Text 21"/>
-          <p:cNvSpPr/>
-          <p:nvPr/>
-        </p:nvSpPr>
-        <p:spPr>
-          <a:xfrm>
-            <a:off x="6537960" y="3108960"/>
-            <a:ext cx="5074920" cy="411480"/>
-          </a:xfrm>
-          <a:prstGeom prst="rect">
-            <a:avLst/>
-          </a:prstGeom>
-          <a:noFill/>
-          <a:ln/>
-        </p:spPr>
-        <p:txBody>
-          <a:bodyPr wrap="square" rtlCol="0" anchor="ctr"/>
-          <a:lstStyle/>
-          <a:p>
-            <a:pPr indent="0" marL="0">
-              <a:buNone/>
-            </a:pPr>
-            <a:r>
-              <a:rPr lang="en-US" sz="1300" dirty="0">
-                <a:solidFill>
-                  <a:srgbClr val="1A1A1A"/>
-                </a:solidFill>
-                <a:latin typeface="Calibri" pitchFamily="34" charset="0"/>
-                <a:ea typeface="Calibri" pitchFamily="34" charset="-122"/>
-                <a:cs typeface="Calibri" pitchFamily="34" charset="-120"/>
-              </a:rPr>
-              <a:t>•  </a:t>
-            </a:r>
-            <a:pPr indent="0" marL="0">
-              <a:buNone/>
-            </a:pPr>
-            <a:r>
-              <a:rPr lang="en-US" sz="1300" b="1" dirty="0">
-                <a:solidFill>
-                  <a:srgbClr val="0B2545"/>
-                </a:solidFill>
-                <a:latin typeface="Calibri" pitchFamily="34" charset="0"/>
-                <a:ea typeface="Calibri" pitchFamily="34" charset="-122"/>
-                <a:cs typeface="Calibri" pitchFamily="34" charset="-120"/>
-              </a:rPr>
-              <a:t>output is a NUMBER + p-value</a:t>
-            </a:r>
-            <a:pPr indent="0" marL="0">
-              <a:buNone/>
-            </a:pPr>
-            <a:r>
-              <a:rPr lang="en-US" sz="1300" dirty="0">
-                <a:solidFill>
-                  <a:srgbClr val="1A1A1A"/>
-                </a:solidFill>
-                <a:latin typeface="Calibri" pitchFamily="34" charset="0"/>
-                <a:ea typeface="Calibri" pitchFamily="34" charset="-122"/>
-                <a:cs typeface="Calibri" pitchFamily="34" charset="-120"/>
-              </a:rPr>
-              <a:t>,</a:t>
-            </a:r>
-            <a:endParaRPr lang="en-US" sz="1300" dirty="0"/>
-          </a:p>
-        </p:txBody>
-      </p:sp>
-      <p:sp>
-        <p:nvSpPr>
-          <p:cNvPr id="24" name="Text 22"/>
-          <p:cNvSpPr/>
-          <p:nvPr/>
-        </p:nvSpPr>
-        <p:spPr>
-          <a:xfrm>
-            <a:off x="6537960" y="3520440"/>
-            <a:ext cx="5074920" cy="411480"/>
-          </a:xfrm>
-          <a:prstGeom prst="rect">
-            <a:avLst/>
-          </a:prstGeom>
-          <a:noFill/>
-          <a:ln/>
-        </p:spPr>
-        <p:txBody>
-          <a:bodyPr wrap="square" rtlCol="0" anchor="ctr"/>
-          <a:lstStyle/>
-          <a:p>
-            <a:pPr indent="0" marL="0">
-              <a:buNone/>
-            </a:pPr>
-            <a:r>
-              <a:rPr lang="en-US" sz="1300" i="1" dirty="0">
-                <a:solidFill>
-                  <a:srgbClr val="13315C"/>
-                </a:solidFill>
-                <a:latin typeface="Calibri" pitchFamily="34" charset="0"/>
-                <a:ea typeface="Calibri" pitchFamily="34" charset="-122"/>
-                <a:cs typeface="Calibri" pitchFamily="34" charset="-120"/>
-              </a:rPr>
-              <a:t>   not a bet decision</a:t>
-            </a:r>
-            <a:endParaRPr lang="en-US" sz="1300" dirty="0"/>
-          </a:p>
-        </p:txBody>
-      </p:sp>
-      <p:sp>
-        <p:nvSpPr>
           <p:cNvPr id="25" name="Shape 23"/>
           <p:cNvSpPr/>
           <p:nvPr/>
         </p:nvSpPr>
         <p:spPr>
           <a:xfrm>
-            <a:off x="6537960" y="4023360"/>
-            <a:ext cx="5074920" cy="36576"/>
+            <a:off x="6858000" y="3886200"/>
+            <a:ext cx="4754880" cy="36576"/>
           </a:xfrm>
           <a:prstGeom prst="rect">
             <a:avLst/>
@@ -3383,24 +3027,38 @@
         </p:nvSpPr>
         <p:spPr>
           <a:xfrm>
-            <a:off x="6537960" y="4160520"/>
-            <a:ext cx="5074920" cy="457200"/>
-          </a:xfrm>
-          <a:prstGeom prst="rect">
-            <a:avLst/>
-          </a:prstGeom>
-          <a:noFill/>
-          <a:ln/>
-        </p:spPr>
-        <p:txBody>
-          <a:bodyPr wrap="square" rtlCol="0" anchor="ctr"/>
-          <a:lstStyle/>
-          <a:p>
-            <a:pPr indent="0" marL="0">
-              <a:buNone/>
-            </a:pPr>
-            <a:r>
-              <a:rPr lang="en-US" sz="1300" b="1" dirty="0">
+            <a:off x="6858000" y="4069080"/>
+            <a:ext cx="4754880" cy="457200"/>
+          </a:xfrm>
+          <a:prstGeom prst="rect">
+            <a:avLst/>
+          </a:prstGeom>
+          <a:noFill/>
+          <a:ln/>
+        </p:spPr>
+        <p:txBody>
+          <a:bodyPr wrap="square" rtlCol="0" anchor="ctr"/>
+          <a:lstStyle/>
+          <a:p>
+            <a:pPr indent="0" marL="0">
+              <a:buNone/>
+            </a:pPr>
+            <a:r>
+              <a:rPr lang="en-US" sz="1400" b="1" dirty="0">
+                <a:solidFill>
+                  <a:srgbClr val="0B2545"/>
+                </a:solidFill>
+                <a:latin typeface="Calibri" pitchFamily="34" charset="0"/>
+                <a:ea typeface="Calibri" pitchFamily="34" charset="-122"/>
+                <a:cs typeface="Calibri" pitchFamily="34" charset="-120"/>
+              </a:rPr>
+              <a:t>FINDING 2:  </a:t>
+            </a:r>
+            <a:pPr indent="0" marL="0">
+              <a:buNone/>
+            </a:pPr>
+            <a:r>
+              <a:rPr lang="en-US" sz="1600" b="1" dirty="0">
                 <a:solidFill>
                   <a:srgbClr val="EEA02B"/>
                 </a:solidFill>
@@ -3408,13 +3066,52 @@
                 <a:ea typeface="Calibri" pitchFamily="34" charset="-122"/>
                 <a:cs typeface="Calibri" pitchFamily="34" charset="-120"/>
               </a:rPr>
-              <a:t>0 bets, 0 P&amp;L  </a:t>
-            </a:r>
-            <a:pPr indent="0" marL="0">
-              <a:buNone/>
-            </a:pPr>
-            <a:r>
-              <a:rPr lang="en-US" sz="1300" i="1" dirty="0">
+              <a:t>✅  </a:t>
+            </a:r>
+            <a:pPr indent="0" marL="0">
+              <a:buNone/>
+            </a:pPr>
+            <a:r>
+              <a:rPr lang="en-US" sz="1400" b="1" dirty="0">
+                <a:solidFill>
+                  <a:srgbClr val="0B2545"/>
+                </a:solidFill>
+                <a:latin typeface="Calibri" pitchFamily="34" charset="0"/>
+                <a:ea typeface="Calibri" pitchFamily="34" charset="-122"/>
+                <a:cs typeface="Calibri" pitchFamily="34" charset="-120"/>
+              </a:rPr>
+              <a:t>yes — bias confirmed</a:t>
+            </a:r>
+            <a:endParaRPr lang="en-US" sz="1400" dirty="0"/>
+          </a:p>
+        </p:txBody>
+      </p:sp>
+      <p:sp>
+        <p:nvSpPr>
+          <p:cNvPr id="27" name="Text 25"/>
+          <p:cNvSpPr/>
+          <p:nvPr/>
+        </p:nvSpPr>
+        <p:spPr>
+          <a:xfrm>
+            <a:off x="6858000" y="4526280"/>
+            <a:ext cx="4754880" cy="365760"/>
+          </a:xfrm>
+          <a:prstGeom prst="rect">
+            <a:avLst/>
+          </a:prstGeom>
+          <a:noFill/>
+          <a:ln/>
+        </p:spPr>
+        <p:txBody>
+          <a:bodyPr wrap="square" rtlCol="0" anchor="ctr"/>
+          <a:lstStyle/>
+          <a:p>
+            <a:pPr indent="0" marL="0">
+              <a:buNone/>
+            </a:pPr>
+            <a:r>
+              <a:rPr lang="en-US" sz="1100" i="1" dirty="0">
                 <a:solidFill>
                   <a:srgbClr val="13315C"/>
                 </a:solidFill>
@@ -3422,60 +3119,46 @@
                 <a:ea typeface="Calibri" pitchFamily="34" charset="-122"/>
                 <a:cs typeface="Calibri" pitchFamily="34" charset="-120"/>
               </a:rPr>
-              <a:t>in the backtest</a:t>
-            </a:r>
-            <a:endParaRPr lang="en-US" sz="1300" dirty="0"/>
-          </a:p>
-        </p:txBody>
-      </p:sp>
-      <p:sp>
-        <p:nvSpPr>
-          <p:cNvPr id="27" name="Text 25"/>
-          <p:cNvSpPr/>
-          <p:nvPr/>
-        </p:nvSpPr>
-        <p:spPr>
-          <a:xfrm>
-            <a:off x="6537960" y="4663440"/>
-            <a:ext cx="5074920" cy="502920"/>
-          </a:xfrm>
-          <a:prstGeom prst="rect">
-            <a:avLst/>
-          </a:prstGeom>
-          <a:noFill/>
-          <a:ln/>
-        </p:spPr>
-        <p:txBody>
-          <a:bodyPr wrap="square" rtlCol="0" anchor="ctr"/>
-          <a:lstStyle/>
-          <a:p>
-            <a:pPr indent="0" marL="0">
-              <a:buNone/>
-            </a:pPr>
-            <a:r>
-              <a:rPr lang="en-US" sz="1100" b="1" dirty="0">
-                <a:solidFill>
-                  <a:srgbClr val="13315C"/>
-                </a:solidFill>
-                <a:latin typeface="Calibri" pitchFamily="34" charset="0"/>
-                <a:ea typeface="Calibri" pitchFamily="34" charset="-122"/>
-                <a:cs typeface="Calibri" pitchFamily="34" charset="-120"/>
-              </a:rPr>
-              <a:t>Output:  </a:t>
-            </a:r>
-            <a:pPr indent="0" marL="0">
+              <a:t>(numbers on the Finding 2 slide)</a:t>
+            </a:r>
+            <a:endParaRPr lang="en-US" sz="1100" dirty="0"/>
+          </a:p>
+        </p:txBody>
+      </p:sp>
+      <p:sp>
+        <p:nvSpPr>
+          <p:cNvPr id="28" name="Text 26"/>
+          <p:cNvSpPr/>
+          <p:nvPr/>
+        </p:nvSpPr>
+        <p:spPr>
+          <a:xfrm>
+            <a:off x="6858000" y="4983480"/>
+            <a:ext cx="4754880" cy="457200"/>
+          </a:xfrm>
+          <a:prstGeom prst="rect">
+            <a:avLst/>
+          </a:prstGeom>
+          <a:noFill/>
+          <a:ln/>
+        </p:spPr>
+        <p:txBody>
+          <a:bodyPr wrap="square" rtlCol="0" anchor="ctr"/>
+          <a:lstStyle/>
+          <a:p>
+            <a:pPr algn="ctr" indent="0" marL="0">
               <a:buNone/>
             </a:pPr>
             <a:r>
               <a:rPr lang="en-US" sz="1100" i="1" dirty="0">
                 <a:solidFill>
-                  <a:srgbClr val="1A1A1A"/>
-                </a:solidFill>
-                <a:latin typeface="Calibri" pitchFamily="34" charset="0"/>
-                <a:ea typeface="Calibri" pitchFamily="34" charset="-122"/>
-                <a:cs typeface="Calibri" pitchFamily="34" charset="-120"/>
-              </a:rPr>
-              <a:t>a statistical finding (Finding 2) — proof the bias exists</a:t>
+                  <a:srgbClr val="8DA9C4"/>
+                </a:solidFill>
+                <a:latin typeface="Calibri" pitchFamily="34" charset="0"/>
+                <a:ea typeface="Calibri" pitchFamily="34" charset="-122"/>
+                <a:cs typeface="Calibri" pitchFamily="34" charset="-120"/>
+              </a:rPr>
+              <a:t>Pre-registered before any test-set data was touched.</a:t>
             </a:r>
             <a:endParaRPr lang="en-US" sz="1100" dirty="0"/>
           </a:p>
@@ -3483,7 +3166,7 @@
       </p:sp>
       <p:sp>
         <p:nvSpPr>
-          <p:cNvPr id="28" name="Shape 26"/>
+          <p:cNvPr id="29" name="Shape 27"/>
           <p:cNvSpPr/>
           <p:nvPr/>
         </p:nvSpPr>
@@ -3498,11 +3181,11 @@
             </a:avLst>
           </a:prstGeom>
           <a:solidFill>
-            <a:srgbClr val="EEA02B"/>
+            <a:srgbClr val="0B2545"/>
           </a:solidFill>
           <a:ln w="12700">
             <a:solidFill>
-              <a:srgbClr val="EEA02B"/>
+              <a:srgbClr val="0B2545"/>
             </a:solidFill>
             <a:prstDash val="solid"/>
           </a:ln>
@@ -3510,7 +3193,7 @@
       </p:sp>
       <p:sp>
         <p:nvSpPr>
-          <p:cNvPr id="29" name="Text 27"/>
+          <p:cNvPr id="30" name="Text 28"/>
           <p:cNvSpPr/>
           <p:nvPr/>
         </p:nvSpPr>
@@ -3533,37 +3216,51 @@
               <a:buNone/>
             </a:pPr>
             <a:r>
-              <a:rPr lang="en-US" sz="1600" b="1" i="1" dirty="0">
-                <a:solidFill>
-                  <a:srgbClr val="0B2545"/>
+              <a:rPr lang="en-US" sz="1700" b="1" dirty="0">
+                <a:solidFill>
+                  <a:srgbClr val="EEA02B"/>
                 </a:solidFill>
                 <a:latin typeface="Georgia" pitchFamily="34" charset="0"/>
                 <a:ea typeface="Georgia" pitchFamily="34" charset="-122"/>
                 <a:cs typeface="Georgia" pitchFamily="34" charset="-120"/>
               </a:rPr>
-              <a:t>Finding · </a:t>
+              <a:t>Together · </a:t>
             </a:r>
             <a:pPr algn="ctr" indent="0" marL="0">
               <a:buNone/>
             </a:pPr>
             <a:r>
-              <a:rPr lang="en-US" sz="1600" i="1" dirty="0">
-                <a:solidFill>
-                  <a:srgbClr val="0B2545"/>
+              <a:rPr lang="en-US" sz="1700" dirty="0">
+                <a:solidFill>
+                  <a:srgbClr val="F6F6F2"/>
                 </a:solidFill>
                 <a:latin typeface="Georgia" pitchFamily="34" charset="0"/>
                 <a:ea typeface="Georgia" pitchFamily="34" charset="-122"/>
                 <a:cs typeface="Georgia" pitchFamily="34" charset="-120"/>
               </a:rPr>
-              <a:t>Method 2 was a diagnostic, not a trader.  Wiring it into the trade decision (the targeted strategy) is the natural next step.</a:t>
-            </a:r>
-            <a:endParaRPr lang="en-US" sz="1600" dirty="0"/>
-          </a:p>
-        </p:txBody>
-      </p:sp>
-      <p:sp>
-        <p:nvSpPr>
-          <p:cNvPr id="30" name="Text 28"/>
+              <a:t>full statistical detection of the mispricing.  </a:t>
+            </a:r>
+            <a:pPr algn="ctr" indent="0" marL="0">
+              <a:buNone/>
+            </a:pPr>
+            <a:r>
+              <a:rPr lang="en-US" sz="1700" b="1" i="1" dirty="0">
+                <a:solidFill>
+                  <a:srgbClr val="EEA02B"/>
+                </a:solidFill>
+                <a:latin typeface="Georgia" pitchFamily="34" charset="0"/>
+                <a:ea typeface="Georgia" pitchFamily="34" charset="-122"/>
+                <a:cs typeface="Georgia" pitchFamily="34" charset="-120"/>
+              </a:rPr>
+              <a:t>The bias is real, calibrated, and pre-registered.</a:t>
+            </a:r>
+            <a:endParaRPr lang="en-US" sz="1700" dirty="0"/>
+          </a:p>
+        </p:txBody>
+      </p:sp>
+      <p:sp>
+        <p:nvSpPr>
+          <p:cNvPr id="31" name="Text 29"/>
           <p:cNvSpPr/>
           <p:nvPr/>
         </p:nvSpPr>
@@ -3602,7 +3299,7 @@
       </p:sp>
       <p:sp>
         <p:nvSpPr>
-          <p:cNvPr id="31" name="Text 29"/>
+          <p:cNvPr id="32" name="Text 30"/>
           <p:cNvSpPr/>
           <p:nvPr/>
         </p:nvSpPr>
@@ -3704,7 +3401,7 @@
                 <a:ea typeface="Georgia" pitchFamily="34" charset="-122"/>
                 <a:cs typeface="Georgia" pitchFamily="34" charset="-120"/>
               </a:rPr>
-              <a:t>Backtest engine · the equations</a:t>
+              <a:t>Connecting back to Halawi</a:t>
             </a:r>
             <a:endParaRPr lang="en-US" sz="2800" dirty="0"/>
           </a:p>
@@ -3743,7 +3440,7 @@
                 <a:ea typeface="Calibri" pitchFamily="34" charset="-122"/>
                 <a:cs typeface="Calibri" pitchFamily="34" charset="-120"/>
               </a:rPr>
-              <a:t>5/5 honesty gates pass on synthetic data</a:t>
+              <a:t>The Aggregate column — applied to NBA</a:t>
             </a:r>
             <a:endParaRPr lang="en-US" sz="1400" dirty="0"/>
           </a:p>
@@ -3774,18 +3471,152 @@
       </p:sp>
       <p:sp>
         <p:nvSpPr>
-          <p:cNvPr id="5" name="Shape 3"/>
-          <p:cNvSpPr/>
-          <p:nvPr/>
-        </p:nvSpPr>
-        <p:spPr>
-          <a:xfrm>
-            <a:off x="502920" y="1417320"/>
-            <a:ext cx="11247120" cy="960120"/>
+          <p:cNvPr id="5" name="Text 3"/>
+          <p:cNvSpPr/>
+          <p:nvPr/>
+        </p:nvSpPr>
+        <p:spPr>
+          <a:xfrm>
+            <a:off x="502920" y="1463040"/>
+            <a:ext cx="11247120" cy="640080"/>
+          </a:xfrm>
+          <a:prstGeom prst="rect">
+            <a:avLst/>
+          </a:prstGeom>
+          <a:noFill/>
+          <a:ln/>
+        </p:spPr>
+        <p:txBody>
+          <a:bodyPr wrap="square" rtlCol="0" anchor="ctr"/>
+          <a:lstStyle/>
+          <a:p>
+            <a:pPr indent="0" marL="0">
+              <a:buNone/>
+            </a:pPr>
+            <a:r>
+              <a:rPr lang="en-US" sz="1800" b="1" dirty="0">
+                <a:solidFill>
+                  <a:srgbClr val="1A1A1A"/>
+                </a:solidFill>
+                <a:latin typeface="Calibri" pitchFamily="34" charset="0"/>
+                <a:ea typeface="Calibri" pitchFamily="34" charset="-122"/>
+                <a:cs typeface="Calibri" pitchFamily="34" charset="-120"/>
+              </a:rPr>
+              <a:t>Halawi's buried result:  </a:t>
+            </a:r>
+            <a:pPr indent="0" marL="0">
+              <a:buNone/>
+            </a:pPr>
+            <a:r>
+              <a:rPr lang="en-US" sz="1800" dirty="0">
+                <a:solidFill>
+                  <a:srgbClr val="1A1A1A"/>
+                </a:solidFill>
+                <a:latin typeface="Calibri" pitchFamily="34" charset="0"/>
+                <a:ea typeface="Calibri" pitchFamily="34" charset="-122"/>
+                <a:cs typeface="Calibri" pitchFamily="34" charset="-120"/>
+              </a:rPr>
+              <a:t>4·LM + 1·crowd &gt; either alone — because the errors are </a:t>
+            </a:r>
+            <a:pPr indent="0" marL="0">
+              <a:buNone/>
+            </a:pPr>
+            <a:r>
+              <a:rPr lang="en-US" sz="1800" b="1" i="1" dirty="0">
+                <a:solidFill>
+                  <a:srgbClr val="EEA02B"/>
+                </a:solidFill>
+                <a:latin typeface="Calibri" pitchFamily="34" charset="0"/>
+                <a:ea typeface="Calibri" pitchFamily="34" charset="-122"/>
+                <a:cs typeface="Calibri" pitchFamily="34" charset="-120"/>
+              </a:rPr>
+              <a:t>independent.</a:t>
+            </a:r>
+            <a:endParaRPr lang="en-US" sz="1800" dirty="0"/>
+          </a:p>
+        </p:txBody>
+      </p:sp>
+      <p:sp>
+        <p:nvSpPr>
+          <p:cNvPr id="6" name="Text 4"/>
+          <p:cNvSpPr/>
+          <p:nvPr/>
+        </p:nvSpPr>
+        <p:spPr>
+          <a:xfrm>
+            <a:off x="502920" y="2194560"/>
+            <a:ext cx="11247120" cy="914400"/>
+          </a:xfrm>
+          <a:prstGeom prst="rect">
+            <a:avLst/>
+          </a:prstGeom>
+          <a:noFill/>
+          <a:ln/>
+        </p:spPr>
+        <p:txBody>
+          <a:bodyPr wrap="square" rtlCol="0" anchor="ctr"/>
+          <a:lstStyle/>
+          <a:p>
+            <a:pPr indent="0" marL="0">
+              <a:buNone/>
+            </a:pPr>
+            <a:r>
+              <a:rPr lang="en-US" sz="1800" dirty="0">
+                <a:solidFill>
+                  <a:srgbClr val="1A1A1A"/>
+                </a:solidFill>
+                <a:latin typeface="Calibri" pitchFamily="34" charset="0"/>
+                <a:ea typeface="Calibri" pitchFamily="34" charset="-122"/>
+                <a:cs typeface="Calibri" pitchFamily="34" charset="-120"/>
+              </a:rPr>
+              <a:t>Our structural model and the live market are also </a:t>
+            </a:r>
+            <a:pPr indent="0" marL="0">
+              <a:buNone/>
+            </a:pPr>
+            <a:r>
+              <a:rPr lang="en-US" sz="1800" b="1" dirty="0">
+                <a:solidFill>
+                  <a:srgbClr val="0B2545"/>
+                </a:solidFill>
+                <a:latin typeface="Calibri" pitchFamily="34" charset="0"/>
+                <a:ea typeface="Calibri" pitchFamily="34" charset="-122"/>
+                <a:cs typeface="Calibri" pitchFamily="34" charset="-120"/>
+              </a:rPr>
+              <a:t>partly independent error sources</a:t>
+            </a:r>
+            <a:pPr indent="0" marL="0">
+              <a:buNone/>
+            </a:pPr>
+            <a:r>
+              <a:rPr lang="en-US" sz="1800" dirty="0">
+                <a:solidFill>
+                  <a:srgbClr val="1A1A1A"/>
+                </a:solidFill>
+                <a:latin typeface="Calibri" pitchFamily="34" charset="0"/>
+                <a:ea typeface="Calibri" pitchFamily="34" charset="-122"/>
+                <a:cs typeface="Calibri" pitchFamily="34" charset="-120"/>
+              </a:rPr>
+              <a:t> — model reads game state, market absorbs sentiment + inside flow.</a:t>
+            </a:r>
+            <a:endParaRPr lang="en-US" sz="1800" dirty="0"/>
+          </a:p>
+        </p:txBody>
+      </p:sp>
+      <p:sp>
+        <p:nvSpPr>
+          <p:cNvPr id="7" name="Shape 5"/>
+          <p:cNvSpPr/>
+          <p:nvPr/>
+        </p:nvSpPr>
+        <p:spPr>
+          <a:xfrm>
+            <a:off x="502920" y="3291840"/>
+            <a:ext cx="11247120" cy="1371600"/>
           </a:xfrm>
           <a:prstGeom prst="roundRect">
             <a:avLst>
-              <a:gd name="adj" fmla="val 7619"/>
+              <a:gd name="adj" fmla="val 5333"/>
             </a:avLst>
           </a:prstGeom>
           <a:solidFill>
@@ -3801,14 +3632,14 @@
       </p:sp>
       <p:sp>
         <p:nvSpPr>
-          <p:cNvPr id="6" name="Text 4"/>
-          <p:cNvSpPr/>
-          <p:nvPr/>
-        </p:nvSpPr>
-        <p:spPr>
-          <a:xfrm>
-            <a:off x="685800" y="1508760"/>
-            <a:ext cx="10881360" cy="457200"/>
+          <p:cNvPr id="8" name="Text 6"/>
+          <p:cNvSpPr/>
+          <p:nvPr/>
+        </p:nvSpPr>
+        <p:spPr>
+          <a:xfrm>
+            <a:off x="685800" y="3383280"/>
+            <a:ext cx="10881360" cy="868680"/>
           </a:xfrm>
           <a:prstGeom prst="rect">
             <a:avLst/>
@@ -3832,7 +3663,7 @@
                 <a:ea typeface="Courier New" pitchFamily="34" charset="-122"/>
                 <a:cs typeface="Courier New" pitchFamily="34" charset="-120"/>
               </a:rPr>
-              <a:t>edge_t  =  p̂_t  −  p_market_t</a:t>
+              <a:t>p̂_aggregate  =  w · p_model  +  ( 1 − w ) · p_market_devig</a:t>
             </a:r>
             <a:endParaRPr lang="en-US" sz="1800" dirty="0"/>
           </a:p>
@@ -3840,13 +3671,13 @@
       </p:sp>
       <p:sp>
         <p:nvSpPr>
-          <p:cNvPr id="7" name="Text 5"/>
-          <p:cNvSpPr/>
-          <p:nvPr/>
-        </p:nvSpPr>
-        <p:spPr>
-          <a:xfrm>
-            <a:off x="685800" y="1920240"/>
+          <p:cNvPr id="9" name="Text 7"/>
+          <p:cNvSpPr/>
+          <p:nvPr/>
+        </p:nvSpPr>
+        <p:spPr>
+          <a:xfrm>
+            <a:off x="685800" y="4206240"/>
             <a:ext cx="10881360" cy="365760"/>
           </a:xfrm>
           <a:prstGeom prst="rect">
@@ -3871,7 +3702,7 @@
                 <a:ea typeface="Calibri" pitchFamily="34" charset="-122"/>
                 <a:cs typeface="Calibri" pitchFamily="34" charset="-120"/>
               </a:rPr>
-              <a:t>core: where the variant's fair value disagrees with the de-vigged market</a:t>
+              <a:t>the 'aggregate' variant (#3 in the planned table) — weight from validation Brier · aggregate's Brier ≤ min(components)</a:t>
             </a:r>
             <a:endParaRPr lang="en-US" sz="1200" dirty="0"/>
           </a:p>
@@ -3879,24 +3710,24 @@
       </p:sp>
       <p:sp>
         <p:nvSpPr>
-          <p:cNvPr id="8" name="Shape 6"/>
-          <p:cNvSpPr/>
-          <p:nvPr/>
-        </p:nvSpPr>
-        <p:spPr>
-          <a:xfrm>
-            <a:off x="502920" y="2514600"/>
-            <a:ext cx="5486400" cy="960120"/>
+          <p:cNvPr id="10" name="Shape 8"/>
+          <p:cNvSpPr/>
+          <p:nvPr/>
+        </p:nvSpPr>
+        <p:spPr>
+          <a:xfrm>
+            <a:off x="502920" y="4846320"/>
+            <a:ext cx="11247120" cy="1508760"/>
           </a:xfrm>
           <a:prstGeom prst="roundRect">
             <a:avLst>
-              <a:gd name="adj" fmla="val 7619"/>
+              <a:gd name="adj" fmla="val 6061"/>
             </a:avLst>
           </a:prstGeom>
           <a:solidFill>
-            <a:srgbClr val="EEF3F8"/>
+            <a:srgbClr val="F6F6F2"/>
           </a:solidFill>
-          <a:ln w="15240">
+          <a:ln w="19050">
             <a:solidFill>
               <a:srgbClr val="1C7293"/>
             </a:solidFill>
@@ -3906,69 +3737,30 @@
       </p:sp>
       <p:sp>
         <p:nvSpPr>
-          <p:cNvPr id="9" name="Text 7"/>
-          <p:cNvSpPr/>
-          <p:nvPr/>
-        </p:nvSpPr>
-        <p:spPr>
-          <a:xfrm>
-            <a:off x="685800" y="2606040"/>
-            <a:ext cx="5120640" cy="457200"/>
-          </a:xfrm>
-          <a:prstGeom prst="rect">
-            <a:avLst/>
-          </a:prstGeom>
-          <a:noFill/>
-          <a:ln/>
-        </p:spPr>
-        <p:txBody>
-          <a:bodyPr wrap="square" rtlCol="0" anchor="ctr"/>
-          <a:lstStyle/>
-          <a:p>
-            <a:pPr algn="ctr" indent="0" marL="0">
-              <a:buNone/>
-            </a:pPr>
-            <a:r>
-              <a:rPr lang="en-US" sz="1800" b="1" dirty="0">
-                <a:solidFill>
-                  <a:srgbClr val="0B2545"/>
-                </a:solidFill>
-                <a:latin typeface="Courier New" pitchFamily="34" charset="0"/>
-                <a:ea typeface="Courier New" pitchFamily="34" charset="-122"/>
-                <a:cs typeface="Courier New" pitchFamily="34" charset="-120"/>
-              </a:rPr>
-              <a:t>p_devig  =  p_home_raw / (p_home_raw + p_away_raw)</a:t>
-            </a:r>
-            <a:endParaRPr lang="en-US" sz="1800" dirty="0"/>
-          </a:p>
-        </p:txBody>
-      </p:sp>
-      <p:sp>
-        <p:nvSpPr>
-          <p:cNvPr id="10" name="Text 8"/>
-          <p:cNvSpPr/>
-          <p:nvPr/>
-        </p:nvSpPr>
-        <p:spPr>
-          <a:xfrm>
-            <a:off x="685800" y="3017520"/>
-            <a:ext cx="5120640" cy="365760"/>
-          </a:xfrm>
-          <a:prstGeom prst="rect">
-            <a:avLst/>
-          </a:prstGeom>
-          <a:noFill/>
-          <a:ln/>
-        </p:spPr>
-        <p:txBody>
-          <a:bodyPr wrap="square" rtlCol="0" anchor="ctr"/>
-          <a:lstStyle/>
-          <a:p>
-            <a:pPr algn="ctr" indent="0" marL="0">
-              <a:buNone/>
-            </a:pPr>
-            <a:r>
-              <a:rPr lang="en-US" sz="1200" i="1" dirty="0">
+          <p:cNvPr id="11" name="Text 9"/>
+          <p:cNvSpPr/>
+          <p:nvPr/>
+        </p:nvSpPr>
+        <p:spPr>
+          <a:xfrm>
+            <a:off x="777240" y="4983480"/>
+            <a:ext cx="10698480" cy="365760"/>
+          </a:xfrm>
+          <a:prstGeom prst="rect">
+            <a:avLst/>
+          </a:prstGeom>
+          <a:noFill/>
+          <a:ln/>
+        </p:spPr>
+        <p:txBody>
+          <a:bodyPr wrap="square" rtlCol="0" anchor="ctr"/>
+          <a:lstStyle/>
+          <a:p>
+            <a:pPr indent="0" marL="0">
+              <a:buNone/>
+            </a:pPr>
+            <a:r>
+              <a:rPr lang="en-US" sz="1400" i="1" dirty="0">
                 <a:solidFill>
                   <a:srgbClr val="13315C"/>
                 </a:solidFill>
@@ -3976,38 +3768,11 @@
                 <a:ea typeface="Calibri" pitchFamily="34" charset="-122"/>
                 <a:cs typeface="Calibri" pitchFamily="34" charset="-120"/>
               </a:rPr>
-              <a:t>multiplicative two-way de-vig</a:t>
-            </a:r>
-            <a:endParaRPr lang="en-US" sz="1200" dirty="0"/>
-          </a:p>
-        </p:txBody>
-      </p:sp>
-      <p:sp>
-        <p:nvSpPr>
-          <p:cNvPr id="11" name="Shape 9"/>
-          <p:cNvSpPr/>
-          <p:nvPr/>
-        </p:nvSpPr>
-        <p:spPr>
-          <a:xfrm>
-            <a:off x="6263640" y="2514600"/>
-            <a:ext cx="5486400" cy="960120"/>
-          </a:xfrm>
-          <a:prstGeom prst="roundRect">
-            <a:avLst>
-              <a:gd name="adj" fmla="val 7619"/>
-            </a:avLst>
-          </a:prstGeom>
-          <a:solidFill>
-            <a:srgbClr val="EEF3F8"/>
-          </a:solidFill>
-          <a:ln w="15240">
-            <a:solidFill>
-              <a:srgbClr val="1C7293"/>
-            </a:solidFill>
-            <a:prstDash val="solid"/>
-          </a:ln>
-        </p:spPr>
+              <a:t>Reframing:</a:t>
+            </a:r>
+            <a:endParaRPr lang="en-US" sz="1400" dirty="0"/>
+          </a:p>
+        </p:txBody>
       </p:sp>
       <p:sp>
         <p:nvSpPr>
@@ -4017,814 +3782,40 @@
         </p:nvSpPr>
         <p:spPr>
           <a:xfrm>
-            <a:off x="6446520" y="2606040"/>
-            <a:ext cx="5120640" cy="457200"/>
-          </a:xfrm>
-          <a:prstGeom prst="rect">
-            <a:avLst/>
-          </a:prstGeom>
-          <a:noFill/>
-          <a:ln/>
-        </p:spPr>
-        <p:txBody>
-          <a:bodyPr wrap="square" rtlCol="0" anchor="ctr"/>
-          <a:lstStyle/>
-          <a:p>
-            <a:pPr algn="ctr" indent="0" marL="0">
-              <a:buNone/>
-            </a:pPr>
-            <a:r>
-              <a:rPr lang="en-US" sz="1800" b="1" dirty="0">
-                <a:solidFill>
-                  <a:srgbClr val="0B2545"/>
-                </a:solidFill>
-                <a:latin typeface="Courier New" pitchFamily="34" charset="0"/>
-                <a:ea typeface="Courier New" pitchFamily="34" charset="-122"/>
-                <a:cs typeface="Courier New" pitchFamily="34" charset="-120"/>
-              </a:rPr>
-              <a:t>f*  =  ( b · p  −  q ) / b</a:t>
-            </a:r>
-            <a:endParaRPr lang="en-US" sz="1800" dirty="0"/>
+            <a:off x="777240" y="5349240"/>
+            <a:ext cx="10698480" cy="914400"/>
+          </a:xfrm>
+          <a:prstGeom prst="rect">
+            <a:avLst/>
+          </a:prstGeom>
+          <a:noFill/>
+          <a:ln/>
+        </p:spPr>
+        <p:txBody>
+          <a:bodyPr wrap="square" rtlCol="0" anchor="ctr"/>
+          <a:lstStyle/>
+          <a:p>
+            <a:pPr indent="0" marL="0">
+              <a:buNone/>
+            </a:pPr>
+            <a:r>
+              <a:rPr lang="en-US" sz="1500" dirty="0">
+                <a:solidFill>
+                  <a:srgbClr val="1A1A1A"/>
+                </a:solidFill>
+                <a:latin typeface="Calibri" pitchFamily="34" charset="0"/>
+                <a:ea typeface="Calibri" pitchFamily="34" charset="-122"/>
+                <a:cs typeface="Calibri" pitchFamily="34" charset="-120"/>
+              </a:rPr>
+              <a:t>The model's job isn't to BEAT the market everywhere — it's to COMPLEMENT it in the specific situations (comeback FG, salience 3PT) where the crowd's bias is strongest.</a:t>
+            </a:r>
+            <a:endParaRPr lang="en-US" sz="1500" dirty="0"/>
           </a:p>
         </p:txBody>
       </p:sp>
       <p:sp>
         <p:nvSpPr>
           <p:cNvPr id="13" name="Text 11"/>
-          <p:cNvSpPr/>
-          <p:nvPr/>
-        </p:nvSpPr>
-        <p:spPr>
-          <a:xfrm>
-            <a:off x="6446520" y="3017520"/>
-            <a:ext cx="5120640" cy="365760"/>
-          </a:xfrm>
-          <a:prstGeom prst="rect">
-            <a:avLst/>
-          </a:prstGeom>
-          <a:noFill/>
-          <a:ln/>
-        </p:spPr>
-        <p:txBody>
-          <a:bodyPr wrap="square" rtlCol="0" anchor="ctr"/>
-          <a:lstStyle/>
-          <a:p>
-            <a:pPr algn="ctr" indent="0" marL="0">
-              <a:buNone/>
-            </a:pPr>
-            <a:r>
-              <a:rPr lang="en-US" sz="1200" i="1" dirty="0">
-                <a:solidFill>
-                  <a:srgbClr val="13315C"/>
-                </a:solidFill>
-                <a:latin typeface="Calibri" pitchFamily="34" charset="0"/>
-                <a:ea typeface="Calibri" pitchFamily="34" charset="-122"/>
-                <a:cs typeface="Calibri" pitchFamily="34" charset="-120"/>
-              </a:rPr>
-              <a:t>Kelly fraction · b = decimal−1, q = 1−p</a:t>
-            </a:r>
-            <a:endParaRPr lang="en-US" sz="1200" dirty="0"/>
-          </a:p>
-        </p:txBody>
-      </p:sp>
-      <p:graphicFrame>
-        <p:nvGraphicFramePr>
-          <p:cNvPr id="12" name="Table 0"/>
-          <p:cNvGraphicFramePr>
-            <a:graphicFrameLocks noGrp="1"/>
-          </p:cNvGraphicFramePr>
-          <p:nvPr>
-            <p:extLst>
-              <p:ext uri="{D42A27DB-BD31-4B8C-83A1-F6EECF244321}">
-                <p14:modId xmlns:p14="http://schemas.microsoft.com/office/powerpoint/2010/main" val="1579011935"/>
-              </p:ext>
-            </p:extLst>
-          </p:nvPr>
-        </p:nvGraphicFramePr>
-        <p:xfrm>
-          <a:off x="502920" y="3703320"/>
-          <a:ext cx="11247120" cy="914400"/>
-        </p:xfrm>
-        <a:graphic>
-          <a:graphicData uri="http://schemas.openxmlformats.org/drawingml/2006/table">
-            <a:tbl>
-              <a:tblPr/>
-              <a:tblGrid>
-                <a:gridCol w="5486400"/>
-                <a:gridCol w="5760720"/>
-              </a:tblGrid>
-              <a:tr h="457200">
-                <a:tc>
-                  <a:txBody>
-                    <a:bodyPr/>
-                    <a:lstStyle/>
-                    <a:p>
-                      <a:pPr indent="0" marL="0">
-                        <a:buNone/>
-                      </a:pPr>
-                      <a:r>
-                        <a:rPr lang="en-US" sz="1300" b="1" dirty="0">
-                          <a:solidFill>
-                            <a:srgbClr val="F6F6F2"/>
-                          </a:solidFill>
-                          <a:latin typeface="Calibri" pitchFamily="34" charset="0"/>
-                          <a:ea typeface="Calibri" pitchFamily="34" charset="-122"/>
-                          <a:cs typeface="Calibri" pitchFamily="34" charset="-120"/>
-                        </a:rPr>
-                        <a:t>Honesty gate</a:t>
-                      </a:r>
-                      <a:endParaRPr lang="en-US" sz="1300" dirty="0">
-                        <a:latin typeface="Calibri" charset="0"/>
-                        <a:ea typeface="Calibri" charset="0"/>
-                        <a:cs typeface="Calibri" charset="0"/>
-                      </a:endParaRPr>
-                    </a:p>
-                  </a:txBody>
-                  <a:tcPr marL="91440" marR="91440" marT="45720" marB="45720">
-                    <a:lnL w="12700" cap="flat" cmpd="sng" algn="ctr">
-                      <a:solidFill>
-                        <a:srgbClr val="8DA9C4"/>
-                      </a:solidFill>
-                      <a:prstDash val="solid"/>
-                      <a:round/>
-                      <a:headEnd type="none" w="med" len="med"/>
-                      <a:tailEnd type="none" w="med" len="med"/>
-                    </a:lnL>
-                    <a:lnR w="12700" cap="flat" cmpd="sng" algn="ctr">
-                      <a:solidFill>
-                        <a:srgbClr val="8DA9C4"/>
-                      </a:solidFill>
-                      <a:prstDash val="solid"/>
-                      <a:round/>
-                      <a:headEnd type="none" w="med" len="med"/>
-                      <a:tailEnd type="none" w="med" len="med"/>
-                    </a:lnR>
-                    <a:lnT w="12700" cap="flat" cmpd="sng" algn="ctr">
-                      <a:solidFill>
-                        <a:srgbClr val="8DA9C4"/>
-                      </a:solidFill>
-                      <a:prstDash val="solid"/>
-                      <a:round/>
-                      <a:headEnd type="none" w="med" len="med"/>
-                      <a:tailEnd type="none" w="med" len="med"/>
-                    </a:lnT>
-                    <a:lnB w="12700" cap="flat" cmpd="sng" algn="ctr">
-                      <a:solidFill>
-                        <a:srgbClr val="8DA9C4"/>
-                      </a:solidFill>
-                      <a:prstDash val="solid"/>
-                      <a:round/>
-                      <a:headEnd type="none" w="med" len="med"/>
-                      <a:tailEnd type="none" w="med" len="med"/>
-                    </a:lnB>
-                    <a:solidFill>
-                      <a:srgbClr val="0B2545"/>
-                    </a:solidFill>
-                  </a:tcPr>
-                </a:tc>
-                <a:tc>
-                  <a:txBody>
-                    <a:bodyPr/>
-                    <a:lstStyle/>
-                    <a:p>
-                      <a:pPr indent="0" marL="0">
-                        <a:buNone/>
-                      </a:pPr>
-                      <a:r>
-                        <a:rPr lang="en-US" sz="1300" b="1" dirty="0">
-                          <a:solidFill>
-                            <a:srgbClr val="F6F6F2"/>
-                          </a:solidFill>
-                          <a:latin typeface="Calibri" pitchFamily="34" charset="0"/>
-                          <a:ea typeface="Calibri" pitchFamily="34" charset="-122"/>
-                          <a:cs typeface="Calibri" pitchFamily="34" charset="-120"/>
-                        </a:rPr>
-                        <a:t>What it proves</a:t>
-                      </a:r>
-                      <a:endParaRPr lang="en-US" sz="1300" dirty="0">
-                        <a:latin typeface="Calibri" charset="0"/>
-                        <a:ea typeface="Calibri" charset="0"/>
-                        <a:cs typeface="Calibri" charset="0"/>
-                      </a:endParaRPr>
-                    </a:p>
-                  </a:txBody>
-                  <a:tcPr marL="91440" marR="91440" marT="45720" marB="45720">
-                    <a:lnL w="12700" cap="flat" cmpd="sng" algn="ctr">
-                      <a:solidFill>
-                        <a:srgbClr val="8DA9C4"/>
-                      </a:solidFill>
-                      <a:prstDash val="solid"/>
-                      <a:round/>
-                      <a:headEnd type="none" w="med" len="med"/>
-                      <a:tailEnd type="none" w="med" len="med"/>
-                    </a:lnL>
-                    <a:lnR w="12700" cap="flat" cmpd="sng" algn="ctr">
-                      <a:solidFill>
-                        <a:srgbClr val="8DA9C4"/>
-                      </a:solidFill>
-                      <a:prstDash val="solid"/>
-                      <a:round/>
-                      <a:headEnd type="none" w="med" len="med"/>
-                      <a:tailEnd type="none" w="med" len="med"/>
-                    </a:lnR>
-                    <a:lnT w="12700" cap="flat" cmpd="sng" algn="ctr">
-                      <a:solidFill>
-                        <a:srgbClr val="8DA9C4"/>
-                      </a:solidFill>
-                      <a:prstDash val="solid"/>
-                      <a:round/>
-                      <a:headEnd type="none" w="med" len="med"/>
-                      <a:tailEnd type="none" w="med" len="med"/>
-                    </a:lnT>
-                    <a:lnB w="12700" cap="flat" cmpd="sng" algn="ctr">
-                      <a:solidFill>
-                        <a:srgbClr val="8DA9C4"/>
-                      </a:solidFill>
-                      <a:prstDash val="solid"/>
-                      <a:round/>
-                      <a:headEnd type="none" w="med" len="med"/>
-                      <a:tailEnd type="none" w="med" len="med"/>
-                    </a:lnB>
-                    <a:solidFill>
-                      <a:srgbClr val="0B2545"/>
-                    </a:solidFill>
-                  </a:tcPr>
-                </a:tc>
-              </a:tr>
-              <a:tr h="457200">
-                <a:tc>
-                  <a:txBody>
-                    <a:bodyPr/>
-                    <a:lstStyle/>
-                    <a:p>
-                      <a:pPr indent="0" marL="0">
-                        <a:buNone/>
-                      </a:pPr>
-                      <a:r>
-                        <a:rPr lang="en-US" sz="1300" b="1" dirty="0">
-                          <a:solidFill>
-                            <a:srgbClr val="0B2545"/>
-                          </a:solidFill>
-                          <a:latin typeface="Calibri" pitchFamily="34" charset="0"/>
-                          <a:ea typeface="Calibri" pitchFamily="34" charset="-122"/>
-                          <a:cs typeface="Calibri" pitchFamily="34" charset="-120"/>
-                        </a:rPr>
-                        <a:t>const-0.5 → Brier 0.25</a:t>
-                      </a:r>
-                      <a:endParaRPr lang="en-US" sz="1300" dirty="0">
-                        <a:latin typeface="Calibri" charset="0"/>
-                        <a:ea typeface="Calibri" charset="0"/>
-                        <a:cs typeface="Calibri" charset="0"/>
-                      </a:endParaRPr>
-                    </a:p>
-                  </a:txBody>
-                  <a:tcPr marL="91440" marR="91440" marT="45720" marB="45720">
-                    <a:lnL w="12700" cap="flat" cmpd="sng" algn="ctr">
-                      <a:solidFill>
-                        <a:srgbClr val="8DA9C4"/>
-                      </a:solidFill>
-                      <a:prstDash val="solid"/>
-                      <a:round/>
-                      <a:headEnd type="none" w="med" len="med"/>
-                      <a:tailEnd type="none" w="med" len="med"/>
-                    </a:lnL>
-                    <a:lnR w="12700" cap="flat" cmpd="sng" algn="ctr">
-                      <a:solidFill>
-                        <a:srgbClr val="8DA9C4"/>
-                      </a:solidFill>
-                      <a:prstDash val="solid"/>
-                      <a:round/>
-                      <a:headEnd type="none" w="med" len="med"/>
-                      <a:tailEnd type="none" w="med" len="med"/>
-                    </a:lnR>
-                    <a:lnT w="12700" cap="flat" cmpd="sng" algn="ctr">
-                      <a:solidFill>
-                        <a:srgbClr val="8DA9C4"/>
-                      </a:solidFill>
-                      <a:prstDash val="solid"/>
-                      <a:round/>
-                      <a:headEnd type="none" w="med" len="med"/>
-                      <a:tailEnd type="none" w="med" len="med"/>
-                    </a:lnT>
-                    <a:lnB w="12700" cap="flat" cmpd="sng" algn="ctr">
-                      <a:solidFill>
-                        <a:srgbClr val="8DA9C4"/>
-                      </a:solidFill>
-                      <a:prstDash val="solid"/>
-                      <a:round/>
-                      <a:headEnd type="none" w="med" len="med"/>
-                      <a:tailEnd type="none" w="med" len="med"/>
-                    </a:lnB>
-                  </a:tcPr>
-                </a:tc>
-                <a:tc>
-                  <a:txBody>
-                    <a:bodyPr/>
-                    <a:lstStyle/>
-                    <a:p>
-                      <a:pPr indent="0" marL="0">
-                        <a:buNone/>
-                      </a:pPr>
-                      <a:r>
-                        <a:rPr lang="en-US" sz="1300" dirty="0">
-                          <a:solidFill>
-                            <a:srgbClr val="1A1A1A"/>
-                          </a:solidFill>
-                          <a:latin typeface="Calibri" pitchFamily="34" charset="0"/>
-                          <a:ea typeface="Calibri" pitchFamily="34" charset="-122"/>
-                          <a:cs typeface="Calibri" pitchFamily="34" charset="-120"/>
-                        </a:rPr>
-                        <a:t>metrics wired correctly</a:t>
-                      </a:r>
-                      <a:endParaRPr lang="en-US" sz="1300" dirty="0">
-                        <a:latin typeface="Calibri" charset="0"/>
-                        <a:ea typeface="Calibri" charset="0"/>
-                        <a:cs typeface="Calibri" charset="0"/>
-                      </a:endParaRPr>
-                    </a:p>
-                  </a:txBody>
-                  <a:tcPr marL="91440" marR="91440" marT="45720" marB="45720">
-                    <a:lnL w="12700" cap="flat" cmpd="sng" algn="ctr">
-                      <a:solidFill>
-                        <a:srgbClr val="8DA9C4"/>
-                      </a:solidFill>
-                      <a:prstDash val="solid"/>
-                      <a:round/>
-                      <a:headEnd type="none" w="med" len="med"/>
-                      <a:tailEnd type="none" w="med" len="med"/>
-                    </a:lnL>
-                    <a:lnR w="12700" cap="flat" cmpd="sng" algn="ctr">
-                      <a:solidFill>
-                        <a:srgbClr val="8DA9C4"/>
-                      </a:solidFill>
-                      <a:prstDash val="solid"/>
-                      <a:round/>
-                      <a:headEnd type="none" w="med" len="med"/>
-                      <a:tailEnd type="none" w="med" len="med"/>
-                    </a:lnR>
-                    <a:lnT w="12700" cap="flat" cmpd="sng" algn="ctr">
-                      <a:solidFill>
-                        <a:srgbClr val="8DA9C4"/>
-                      </a:solidFill>
-                      <a:prstDash val="solid"/>
-                      <a:round/>
-                      <a:headEnd type="none" w="med" len="med"/>
-                      <a:tailEnd type="none" w="med" len="med"/>
-                    </a:lnT>
-                    <a:lnB w="12700" cap="flat" cmpd="sng" algn="ctr">
-                      <a:solidFill>
-                        <a:srgbClr val="8DA9C4"/>
-                      </a:solidFill>
-                      <a:prstDash val="solid"/>
-                      <a:round/>
-                      <a:headEnd type="none" w="med" len="med"/>
-                      <a:tailEnd type="none" w="med" len="med"/>
-                    </a:lnB>
-                  </a:tcPr>
-                </a:tc>
-              </a:tr>
-              <a:tr h="457200">
-                <a:tc>
-                  <a:txBody>
-                    <a:bodyPr/>
-                    <a:lstStyle/>
-                    <a:p>
-                      <a:pPr indent="0" marL="0">
-                        <a:buNone/>
-                      </a:pPr>
-                      <a:r>
-                        <a:rPr lang="en-US" sz="1300" b="1" dirty="0">
-                          <a:solidFill>
-                            <a:srgbClr val="0B2545"/>
-                          </a:solidFill>
-                          <a:latin typeface="Calibri" pitchFamily="34" charset="0"/>
-                          <a:ea typeface="Calibri" pitchFamily="34" charset="-122"/>
-                          <a:cs typeface="Calibri" pitchFamily="34" charset="-120"/>
-                        </a:rPr>
-                        <a:t>always-favorite → loses ≈ vig</a:t>
-                      </a:r>
-                      <a:endParaRPr lang="en-US" sz="1300" dirty="0">
-                        <a:latin typeface="Calibri" charset="0"/>
-                        <a:ea typeface="Calibri" charset="0"/>
-                        <a:cs typeface="Calibri" charset="0"/>
-                      </a:endParaRPr>
-                    </a:p>
-                  </a:txBody>
-                  <a:tcPr marL="91440" marR="91440" marT="45720" marB="45720">
-                    <a:lnL w="12700" cap="flat" cmpd="sng" algn="ctr">
-                      <a:solidFill>
-                        <a:srgbClr val="8DA9C4"/>
-                      </a:solidFill>
-                      <a:prstDash val="solid"/>
-                      <a:round/>
-                      <a:headEnd type="none" w="med" len="med"/>
-                      <a:tailEnd type="none" w="med" len="med"/>
-                    </a:lnL>
-                    <a:lnR w="12700" cap="flat" cmpd="sng" algn="ctr">
-                      <a:solidFill>
-                        <a:srgbClr val="8DA9C4"/>
-                      </a:solidFill>
-                      <a:prstDash val="solid"/>
-                      <a:round/>
-                      <a:headEnd type="none" w="med" len="med"/>
-                      <a:tailEnd type="none" w="med" len="med"/>
-                    </a:lnR>
-                    <a:lnT w="12700" cap="flat" cmpd="sng" algn="ctr">
-                      <a:solidFill>
-                        <a:srgbClr val="8DA9C4"/>
-                      </a:solidFill>
-                      <a:prstDash val="solid"/>
-                      <a:round/>
-                      <a:headEnd type="none" w="med" len="med"/>
-                      <a:tailEnd type="none" w="med" len="med"/>
-                    </a:lnT>
-                    <a:lnB w="12700" cap="flat" cmpd="sng" algn="ctr">
-                      <a:solidFill>
-                        <a:srgbClr val="8DA9C4"/>
-                      </a:solidFill>
-                      <a:prstDash val="solid"/>
-                      <a:round/>
-                      <a:headEnd type="none" w="med" len="med"/>
-                      <a:tailEnd type="none" w="med" len="med"/>
-                    </a:lnB>
-                  </a:tcPr>
-                </a:tc>
-                <a:tc>
-                  <a:txBody>
-                    <a:bodyPr/>
-                    <a:lstStyle/>
-                    <a:p>
-                      <a:pPr indent="0" marL="0">
-                        <a:buNone/>
-                      </a:pPr>
-                      <a:r>
-                        <a:rPr lang="en-US" sz="1300" dirty="0">
-                          <a:solidFill>
-                            <a:srgbClr val="1A1A1A"/>
-                          </a:solidFill>
-                          <a:latin typeface="Calibri" pitchFamily="34" charset="0"/>
-                          <a:ea typeface="Calibri" pitchFamily="34" charset="-122"/>
-                          <a:cs typeface="Calibri" pitchFamily="34" charset="-120"/>
-                        </a:rPr>
-                        <a:t>engine doesn't invent free money</a:t>
-                      </a:r>
-                      <a:endParaRPr lang="en-US" sz="1300" dirty="0">
-                        <a:latin typeface="Calibri" charset="0"/>
-                        <a:ea typeface="Calibri" charset="0"/>
-                        <a:cs typeface="Calibri" charset="0"/>
-                      </a:endParaRPr>
-                    </a:p>
-                  </a:txBody>
-                  <a:tcPr marL="91440" marR="91440" marT="45720" marB="45720">
-                    <a:lnL w="12700" cap="flat" cmpd="sng" algn="ctr">
-                      <a:solidFill>
-                        <a:srgbClr val="8DA9C4"/>
-                      </a:solidFill>
-                      <a:prstDash val="solid"/>
-                      <a:round/>
-                      <a:headEnd type="none" w="med" len="med"/>
-                      <a:tailEnd type="none" w="med" len="med"/>
-                    </a:lnL>
-                    <a:lnR w="12700" cap="flat" cmpd="sng" algn="ctr">
-                      <a:solidFill>
-                        <a:srgbClr val="8DA9C4"/>
-                      </a:solidFill>
-                      <a:prstDash val="solid"/>
-                      <a:round/>
-                      <a:headEnd type="none" w="med" len="med"/>
-                      <a:tailEnd type="none" w="med" len="med"/>
-                    </a:lnR>
-                    <a:lnT w="12700" cap="flat" cmpd="sng" algn="ctr">
-                      <a:solidFill>
-                        <a:srgbClr val="8DA9C4"/>
-                      </a:solidFill>
-                      <a:prstDash val="solid"/>
-                      <a:round/>
-                      <a:headEnd type="none" w="med" len="med"/>
-                      <a:tailEnd type="none" w="med" len="med"/>
-                    </a:lnT>
-                    <a:lnB w="12700" cap="flat" cmpd="sng" algn="ctr">
-                      <a:solidFill>
-                        <a:srgbClr val="8DA9C4"/>
-                      </a:solidFill>
-                      <a:prstDash val="solid"/>
-                      <a:round/>
-                      <a:headEnd type="none" w="med" len="med"/>
-                      <a:tailEnd type="none" w="med" len="med"/>
-                    </a:lnB>
-                  </a:tcPr>
-                </a:tc>
-              </a:tr>
-              <a:tr h="457200">
-                <a:tc>
-                  <a:txBody>
-                    <a:bodyPr/>
-                    <a:lstStyle/>
-                    <a:p>
-                      <a:pPr indent="0" marL="0">
-                        <a:buNone/>
-                      </a:pPr>
-                      <a:r>
-                        <a:rPr lang="en-US" sz="1300" b="1" dirty="0">
-                          <a:solidFill>
-                            <a:srgbClr val="0B2545"/>
-                          </a:solidFill>
-                          <a:latin typeface="Calibri" pitchFamily="34" charset="0"/>
-                          <a:ea typeface="Calibri" pitchFamily="34" charset="-122"/>
-                          <a:cs typeface="Calibri" pitchFamily="34" charset="-120"/>
-                        </a:rPr>
-                        <a:t>perfect on biased mkt → +14% ROI, p=0.000</a:t>
-                      </a:r>
-                      <a:endParaRPr lang="en-US" sz="1300" dirty="0">
-                        <a:latin typeface="Calibri" charset="0"/>
-                        <a:ea typeface="Calibri" charset="0"/>
-                        <a:cs typeface="Calibri" charset="0"/>
-                      </a:endParaRPr>
-                    </a:p>
-                  </a:txBody>
-                  <a:tcPr marL="91440" marR="91440" marT="45720" marB="45720">
-                    <a:lnL w="12700" cap="flat" cmpd="sng" algn="ctr">
-                      <a:solidFill>
-                        <a:srgbClr val="8DA9C4"/>
-                      </a:solidFill>
-                      <a:prstDash val="solid"/>
-                      <a:round/>
-                      <a:headEnd type="none" w="med" len="med"/>
-                      <a:tailEnd type="none" w="med" len="med"/>
-                    </a:lnL>
-                    <a:lnR w="12700" cap="flat" cmpd="sng" algn="ctr">
-                      <a:solidFill>
-                        <a:srgbClr val="8DA9C4"/>
-                      </a:solidFill>
-                      <a:prstDash val="solid"/>
-                      <a:round/>
-                      <a:headEnd type="none" w="med" len="med"/>
-                      <a:tailEnd type="none" w="med" len="med"/>
-                    </a:lnR>
-                    <a:lnT w="12700" cap="flat" cmpd="sng" algn="ctr">
-                      <a:solidFill>
-                        <a:srgbClr val="8DA9C4"/>
-                      </a:solidFill>
-                      <a:prstDash val="solid"/>
-                      <a:round/>
-                      <a:headEnd type="none" w="med" len="med"/>
-                      <a:tailEnd type="none" w="med" len="med"/>
-                    </a:lnT>
-                    <a:lnB w="12700" cap="flat" cmpd="sng" algn="ctr">
-                      <a:solidFill>
-                        <a:srgbClr val="8DA9C4"/>
-                      </a:solidFill>
-                      <a:prstDash val="solid"/>
-                      <a:round/>
-                      <a:headEnd type="none" w="med" len="med"/>
-                      <a:tailEnd type="none" w="med" len="med"/>
-                    </a:lnB>
-                  </a:tcPr>
-                </a:tc>
-                <a:tc>
-                  <a:txBody>
-                    <a:bodyPr/>
-                    <a:lstStyle/>
-                    <a:p>
-                      <a:pPr indent="0" marL="0">
-                        <a:buNone/>
-                      </a:pPr>
-                      <a:r>
-                        <a:rPr lang="en-US" sz="1300" b="1" dirty="0">
-                          <a:solidFill>
-                            <a:srgbClr val="EEA02B"/>
-                          </a:solidFill>
-                          <a:latin typeface="Calibri" pitchFamily="34" charset="0"/>
-                          <a:ea typeface="Calibri" pitchFamily="34" charset="-122"/>
-                          <a:cs typeface="Calibri" pitchFamily="34" charset="-120"/>
-                        </a:rPr>
-                        <a:t>engine CAN detect a real edge</a:t>
-                      </a:r>
-                      <a:endParaRPr lang="en-US" sz="1300" dirty="0">
-                        <a:latin typeface="Calibri" charset="0"/>
-                        <a:ea typeface="Calibri" charset="0"/>
-                        <a:cs typeface="Calibri" charset="0"/>
-                      </a:endParaRPr>
-                    </a:p>
-                  </a:txBody>
-                  <a:tcPr marL="91440" marR="91440" marT="45720" marB="45720">
-                    <a:lnL w="12700" cap="flat" cmpd="sng" algn="ctr">
-                      <a:solidFill>
-                        <a:srgbClr val="8DA9C4"/>
-                      </a:solidFill>
-                      <a:prstDash val="solid"/>
-                      <a:round/>
-                      <a:headEnd type="none" w="med" len="med"/>
-                      <a:tailEnd type="none" w="med" len="med"/>
-                    </a:lnL>
-                    <a:lnR w="12700" cap="flat" cmpd="sng" algn="ctr">
-                      <a:solidFill>
-                        <a:srgbClr val="8DA9C4"/>
-                      </a:solidFill>
-                      <a:prstDash val="solid"/>
-                      <a:round/>
-                      <a:headEnd type="none" w="med" len="med"/>
-                      <a:tailEnd type="none" w="med" len="med"/>
-                    </a:lnR>
-                    <a:lnT w="12700" cap="flat" cmpd="sng" algn="ctr">
-                      <a:solidFill>
-                        <a:srgbClr val="8DA9C4"/>
-                      </a:solidFill>
-                      <a:prstDash val="solid"/>
-                      <a:round/>
-                      <a:headEnd type="none" w="med" len="med"/>
-                      <a:tailEnd type="none" w="med" len="med"/>
-                    </a:lnT>
-                    <a:lnB w="12700" cap="flat" cmpd="sng" algn="ctr">
-                      <a:solidFill>
-                        <a:srgbClr val="8DA9C4"/>
-                      </a:solidFill>
-                      <a:prstDash val="solid"/>
-                      <a:round/>
-                      <a:headEnd type="none" w="med" len="med"/>
-                      <a:tailEnd type="none" w="med" len="med"/>
-                    </a:lnB>
-                  </a:tcPr>
-                </a:tc>
-              </a:tr>
-              <a:tr h="457200">
-                <a:tc>
-                  <a:txBody>
-                    <a:bodyPr/>
-                    <a:lstStyle/>
-                    <a:p>
-                      <a:pPr indent="0" marL="0">
-                        <a:buNone/>
-                      </a:pPr>
-                      <a:r>
-                        <a:rPr lang="en-US" sz="1300" b="1" dirty="0">
-                          <a:solidFill>
-                            <a:srgbClr val="0B2545"/>
-                          </a:solidFill>
-                          <a:latin typeface="Calibri" pitchFamily="34" charset="0"/>
-                          <a:ea typeface="Calibri" pitchFamily="34" charset="-122"/>
-                          <a:cs typeface="Calibri" pitchFamily="34" charset="-120"/>
-                        </a:rPr>
-                        <a:t>market-as-variant → 0 bets</a:t>
-                      </a:r>
-                      <a:endParaRPr lang="en-US" sz="1300" dirty="0">
-                        <a:latin typeface="Calibri" charset="0"/>
-                        <a:ea typeface="Calibri" charset="0"/>
-                        <a:cs typeface="Calibri" charset="0"/>
-                      </a:endParaRPr>
-                    </a:p>
-                  </a:txBody>
-                  <a:tcPr marL="91440" marR="91440" marT="45720" marB="45720">
-                    <a:lnL w="12700" cap="flat" cmpd="sng" algn="ctr">
-                      <a:solidFill>
-                        <a:srgbClr val="8DA9C4"/>
-                      </a:solidFill>
-                      <a:prstDash val="solid"/>
-                      <a:round/>
-                      <a:headEnd type="none" w="med" len="med"/>
-                      <a:tailEnd type="none" w="med" len="med"/>
-                    </a:lnL>
-                    <a:lnR w="12700" cap="flat" cmpd="sng" algn="ctr">
-                      <a:solidFill>
-                        <a:srgbClr val="8DA9C4"/>
-                      </a:solidFill>
-                      <a:prstDash val="solid"/>
-                      <a:round/>
-                      <a:headEnd type="none" w="med" len="med"/>
-                      <a:tailEnd type="none" w="med" len="med"/>
-                    </a:lnR>
-                    <a:lnT w="12700" cap="flat" cmpd="sng" algn="ctr">
-                      <a:solidFill>
-                        <a:srgbClr val="8DA9C4"/>
-                      </a:solidFill>
-                      <a:prstDash val="solid"/>
-                      <a:round/>
-                      <a:headEnd type="none" w="med" len="med"/>
-                      <a:tailEnd type="none" w="med" len="med"/>
-                    </a:lnT>
-                    <a:lnB w="12700" cap="flat" cmpd="sng" algn="ctr">
-                      <a:solidFill>
-                        <a:srgbClr val="8DA9C4"/>
-                      </a:solidFill>
-                      <a:prstDash val="solid"/>
-                      <a:round/>
-                      <a:headEnd type="none" w="med" len="med"/>
-                      <a:tailEnd type="none" w="med" len="med"/>
-                    </a:lnB>
-                  </a:tcPr>
-                </a:tc>
-                <a:tc>
-                  <a:txBody>
-                    <a:bodyPr/>
-                    <a:lstStyle/>
-                    <a:p>
-                      <a:pPr indent="0" marL="0">
-                        <a:buNone/>
-                      </a:pPr>
-                      <a:r>
-                        <a:rPr lang="en-US" sz="1300" dirty="0">
-                          <a:solidFill>
-                            <a:srgbClr val="1A1A1A"/>
-                          </a:solidFill>
-                          <a:latin typeface="Calibri" pitchFamily="34" charset="0"/>
-                          <a:ea typeface="Calibri" pitchFamily="34" charset="-122"/>
-                          <a:cs typeface="Calibri" pitchFamily="34" charset="-120"/>
-                        </a:rPr>
-                        <a:t>no fake edge against the market</a:t>
-                      </a:r>
-                      <a:endParaRPr lang="en-US" sz="1300" dirty="0">
-                        <a:latin typeface="Calibri" charset="0"/>
-                        <a:ea typeface="Calibri" charset="0"/>
-                        <a:cs typeface="Calibri" charset="0"/>
-                      </a:endParaRPr>
-                    </a:p>
-                  </a:txBody>
-                  <a:tcPr marL="91440" marR="91440" marT="45720" marB="45720">
-                    <a:lnL w="12700" cap="flat" cmpd="sng" algn="ctr">
-                      <a:solidFill>
-                        <a:srgbClr val="8DA9C4"/>
-                      </a:solidFill>
-                      <a:prstDash val="solid"/>
-                      <a:round/>
-                      <a:headEnd type="none" w="med" len="med"/>
-                      <a:tailEnd type="none" w="med" len="med"/>
-                    </a:lnL>
-                    <a:lnR w="12700" cap="flat" cmpd="sng" algn="ctr">
-                      <a:solidFill>
-                        <a:srgbClr val="8DA9C4"/>
-                      </a:solidFill>
-                      <a:prstDash val="solid"/>
-                      <a:round/>
-                      <a:headEnd type="none" w="med" len="med"/>
-                      <a:tailEnd type="none" w="med" len="med"/>
-                    </a:lnR>
-                    <a:lnT w="12700" cap="flat" cmpd="sng" algn="ctr">
-                      <a:solidFill>
-                        <a:srgbClr val="8DA9C4"/>
-                      </a:solidFill>
-                      <a:prstDash val="solid"/>
-                      <a:round/>
-                      <a:headEnd type="none" w="med" len="med"/>
-                      <a:tailEnd type="none" w="med" len="med"/>
-                    </a:lnT>
-                    <a:lnB w="12700" cap="flat" cmpd="sng" algn="ctr">
-                      <a:solidFill>
-                        <a:srgbClr val="8DA9C4"/>
-                      </a:solidFill>
-                      <a:prstDash val="solid"/>
-                      <a:round/>
-                      <a:headEnd type="none" w="med" len="med"/>
-                      <a:tailEnd type="none" w="med" len="med"/>
-                    </a:lnB>
-                  </a:tcPr>
-                </a:tc>
-              </a:tr>
-            </a:tbl>
-          </a:graphicData>
-        </a:graphic>
-      </p:graphicFrame>
-      <p:sp>
-        <p:nvSpPr>
-          <p:cNvPr id="15" name="Text 12"/>
-          <p:cNvSpPr/>
-          <p:nvPr/>
-        </p:nvSpPr>
-        <p:spPr>
-          <a:xfrm>
-            <a:off x="502920" y="6080760"/>
-            <a:ext cx="11247120" cy="320040"/>
-          </a:xfrm>
-          <a:prstGeom prst="rect">
-            <a:avLst/>
-          </a:prstGeom>
-          <a:noFill/>
-          <a:ln/>
-        </p:spPr>
-        <p:txBody>
-          <a:bodyPr wrap="square" rtlCol="0" anchor="ctr"/>
-          <a:lstStyle/>
-          <a:p>
-            <a:pPr algn="ctr" indent="0" marL="0">
-              <a:buNone/>
-            </a:pPr>
-            <a:r>
-              <a:rPr lang="en-US" sz="1100" i="1" dirty="0">
-                <a:solidFill>
-                  <a:srgbClr val="8DA9C4"/>
-                </a:solidFill>
-                <a:latin typeface="Calibri" pitchFamily="34" charset="0"/>
-                <a:ea typeface="Calibri" pitchFamily="34" charset="-122"/>
-                <a:cs typeface="Calibri" pitchFamily="34" charset="-120"/>
-              </a:rPr>
-              <a:t>Block-bootstrap by GAME (not tick) — within-game ticks share one outcome; effective n is games.</a:t>
-            </a:r>
-            <a:endParaRPr lang="en-US" sz="1100" dirty="0"/>
-          </a:p>
-        </p:txBody>
-      </p:sp>
-      <p:sp>
-        <p:nvSpPr>
-          <p:cNvPr id="16" name="Text 13"/>
           <p:cNvSpPr/>
           <p:nvPr/>
         </p:nvSpPr>
@@ -4863,7 +3854,7 @@
       </p:sp>
       <p:sp>
         <p:nvSpPr>
-          <p:cNvPr id="17" name="Text 14"/>
+          <p:cNvPr id="14" name="Text 12"/>
           <p:cNvSpPr/>
           <p:nvPr/>
         </p:nvSpPr>
@@ -4965,7 +3956,7 @@
                 <a:ea typeface="Georgia" pitchFamily="34" charset="-122"/>
                 <a:cs typeface="Georgia" pitchFamily="34" charset="-120"/>
               </a:rPr>
-              <a:t>Finding 3 · Against liquid books, n=1 is pure noise</a:t>
+              <a:t>What we shipped  ·  what's next</a:t>
             </a:r>
             <a:endParaRPr lang="en-US" sz="2800" dirty="0"/>
           </a:p>
@@ -5004,7 +3995,7 @@
                 <a:ea typeface="Calibri" pitchFamily="34" charset="-122"/>
                 <a:cs typeface="Calibri" pitchFamily="34" charset="-120"/>
               </a:rPr>
-              <a:t>Live pilot: SAS @ OKC, 2026-05-26 (FINAL OKC 127–114) · 73 ticks · 6 books</a:t>
+              <a:t>Statistical findings on this deck  ·  trading + backtest in the report</a:t>
             </a:r>
             <a:endParaRPr lang="en-US" sz="1400" dirty="0"/>
           </a:p>
@@ -5033,52 +4024,28 @@
           </a:ln>
         </p:spPr>
       </p:sp>
-      <p:pic>
-        <p:nvPicPr>
-          <p:cNvPr id="5" name="Image 0" descr="slides/figures/pilot_roi.png">    </p:cNvPr>
-          <p:cNvPicPr>
-            <a:picLocks noChangeAspect="1"/>
-          </p:cNvPicPr>
-          <p:nvPr/>
-        </p:nvPicPr>
-        <p:blipFill>
-          <a:blip r:embed="rId1"/>
-          <a:stretch>
-            <a:fillRect/>
-          </a:stretch>
-        </p:blipFill>
-        <p:spPr>
-          <a:xfrm>
-            <a:off x="365760" y="1417320"/>
-            <a:ext cx="6858000" cy="4572000"/>
-          </a:xfrm>
-          <a:prstGeom prst="rect">
-            <a:avLst/>
-          </a:prstGeom>
-        </p:spPr>
-      </p:pic>
-      <p:sp>
-        <p:nvSpPr>
-          <p:cNvPr id="6" name="Shape 3"/>
-          <p:cNvSpPr/>
-          <p:nvPr/>
-        </p:nvSpPr>
-        <p:spPr>
-          <a:xfrm>
-            <a:off x="7360920" y="1417320"/>
-            <a:ext cx="4434840" cy="4617720"/>
+      <p:sp>
+        <p:nvSpPr>
+          <p:cNvPr id="5" name="Shape 3"/>
+          <p:cNvSpPr/>
+          <p:nvPr/>
+        </p:nvSpPr>
+        <p:spPr>
+          <a:xfrm>
+            <a:off x="502920" y="1417320"/>
+            <a:ext cx="5486400" cy="4846320"/>
           </a:xfrm>
           <a:prstGeom prst="roundRect">
             <a:avLst>
-              <a:gd name="adj" fmla="val 2062"/>
+              <a:gd name="adj" fmla="val 1887"/>
             </a:avLst>
           </a:prstGeom>
           <a:solidFill>
             <a:srgbClr val="F6F6F2"/>
           </a:solidFill>
-          <a:ln w="19050">
+          <a:ln w="20320">
             <a:solidFill>
-              <a:srgbClr val="1C7293"/>
+              <a:srgbClr val="0B2545"/>
             </a:solidFill>
             <a:prstDash val="solid"/>
           </a:ln>
@@ -5086,14 +4053,53 @@
       </p:sp>
       <p:sp>
         <p:nvSpPr>
-          <p:cNvPr id="7" name="Text 4"/>
-          <p:cNvSpPr/>
-          <p:nvPr/>
-        </p:nvSpPr>
-        <p:spPr>
-          <a:xfrm>
-            <a:off x="7589520" y="1554480"/>
-            <a:ext cx="4114800" cy="502920"/>
+          <p:cNvPr id="6" name="Text 4"/>
+          <p:cNvSpPr/>
+          <p:nvPr/>
+        </p:nvSpPr>
+        <p:spPr>
+          <a:xfrm>
+            <a:off x="685800" y="1554480"/>
+            <a:ext cx="5120640" cy="365760"/>
+          </a:xfrm>
+          <a:prstGeom prst="rect">
+            <a:avLst/>
+          </a:prstGeom>
+          <a:noFill/>
+          <a:ln/>
+        </p:spPr>
+        <p:txBody>
+          <a:bodyPr wrap="square" rtlCol="0" anchor="ctr"/>
+          <a:lstStyle/>
+          <a:p>
+            <a:pPr indent="0" marL="0">
+              <a:buNone/>
+            </a:pPr>
+            <a:r>
+              <a:rPr lang="en-US" sz="1200" b="1" dirty="0">
+                <a:solidFill>
+                  <a:srgbClr val="13315C"/>
+                </a:solidFill>
+                <a:latin typeface="Calibri" pitchFamily="34" charset="0"/>
+                <a:ea typeface="Calibri" pitchFamily="34" charset="-122"/>
+                <a:cs typeface="Calibri" pitchFamily="34" charset="-120"/>
+              </a:rPr>
+              <a:t>WHAT WE SHIPPED</a:t>
+            </a:r>
+            <a:endParaRPr lang="en-US" sz="1200" dirty="0"/>
+          </a:p>
+        </p:txBody>
+      </p:sp>
+      <p:sp>
+        <p:nvSpPr>
+          <p:cNvPr id="7" name="Text 5"/>
+          <p:cNvSpPr/>
+          <p:nvPr/>
+        </p:nvSpPr>
+        <p:spPr>
+          <a:xfrm>
+            <a:off x="685800" y="1920240"/>
+            <a:ext cx="5120640" cy="502920"/>
           </a:xfrm>
           <a:prstGeom prst="rect">
             <a:avLst/>
@@ -5117,7 +4123,7 @@
                 <a:ea typeface="Georgia" pitchFamily="34" charset="-122"/>
                 <a:cs typeface="Georgia" pitchFamily="34" charset="-120"/>
               </a:rPr>
-              <a:t>The lesson IS the result.</a:t>
+              <a:t>Statistical detection, validated</a:t>
             </a:r>
             <a:endParaRPr lang="en-US" sz="1900" dirty="0"/>
           </a:p>
@@ -5125,457 +4131,22 @@
       </p:sp>
       <p:sp>
         <p:nvSpPr>
-          <p:cNvPr id="8" name="Text 5"/>
-          <p:cNvSpPr/>
-          <p:nvPr/>
-        </p:nvSpPr>
-        <p:spPr>
-          <a:xfrm>
-            <a:off x="7589520" y="2103120"/>
-            <a:ext cx="4114800" cy="594360"/>
-          </a:xfrm>
-          <a:prstGeom prst="rect">
-            <a:avLst/>
-          </a:prstGeom>
-          <a:noFill/>
-          <a:ln/>
-        </p:spPr>
-        <p:txBody>
-          <a:bodyPr wrap="square" rtlCol="0" anchor="ctr"/>
-          <a:lstStyle/>
-          <a:p>
-            <a:pPr indent="0" marL="0">
-              <a:buNone/>
-            </a:pPr>
-            <a:r>
-              <a:rPr lang="en-US" sz="1300" dirty="0">
-                <a:solidFill>
-                  <a:srgbClr val="1A1A1A"/>
-                </a:solidFill>
-                <a:latin typeface="Calibri" pitchFamily="34" charset="0"/>
-                <a:ea typeface="Calibri" pitchFamily="34" charset="-122"/>
-                <a:cs typeface="Calibri" pitchFamily="34" charset="-120"/>
-              </a:rPr>
-              <a:t>Model faded SA (underdog) early when the score was close.</a:t>
-            </a:r>
-            <a:endParaRPr lang="en-US" sz="1300" dirty="0"/>
-          </a:p>
-        </p:txBody>
-      </p:sp>
-      <p:sp>
-        <p:nvSpPr>
-          <p:cNvPr id="9" name="Text 6"/>
-          <p:cNvSpPr/>
-          <p:nvPr/>
-        </p:nvSpPr>
-        <p:spPr>
-          <a:xfrm>
-            <a:off x="7589520" y="2606040"/>
-            <a:ext cx="4114800" cy="365760"/>
-          </a:xfrm>
-          <a:prstGeom prst="rect">
-            <a:avLst/>
-          </a:prstGeom>
-          <a:noFill/>
-          <a:ln/>
-        </p:spPr>
-        <p:txBody>
-          <a:bodyPr wrap="square" rtlCol="0" anchor="ctr"/>
-          <a:lstStyle/>
-          <a:p>
-            <a:pPr indent="0" marL="0">
-              <a:buNone/>
-            </a:pPr>
-            <a:r>
-              <a:rPr lang="en-US" sz="1300" dirty="0">
-                <a:solidFill>
-                  <a:srgbClr val="1A1A1A"/>
-                </a:solidFill>
-                <a:latin typeface="Calibri" pitchFamily="34" charset="0"/>
-                <a:ea typeface="Calibri" pitchFamily="34" charset="-122"/>
-                <a:cs typeface="Calibri" pitchFamily="34" charset="-120"/>
-              </a:rPr>
-              <a:t>OKC pulled away and won 127–114.</a:t>
-            </a:r>
-            <a:endParaRPr lang="en-US" sz="1300" dirty="0"/>
-          </a:p>
-        </p:txBody>
-      </p:sp>
-      <p:sp>
-        <p:nvSpPr>
-          <p:cNvPr id="10" name="Text 7"/>
-          <p:cNvSpPr/>
-          <p:nvPr/>
-        </p:nvSpPr>
-        <p:spPr>
-          <a:xfrm>
-            <a:off x="7589520" y="3108960"/>
-            <a:ext cx="4114800" cy="1371600"/>
-          </a:xfrm>
-          <a:prstGeom prst="rect">
-            <a:avLst/>
-          </a:prstGeom>
-          <a:noFill/>
-          <a:ln/>
-        </p:spPr>
-        <p:txBody>
-          <a:bodyPr wrap="square" rtlCol="0" anchor="ctr"/>
-          <a:lstStyle/>
-          <a:p>
-            <a:pPr indent="0" marL="0">
-              <a:buNone/>
-            </a:pPr>
-            <a:r>
-              <a:rPr lang="en-US" sz="1300" dirty="0">
-                <a:solidFill>
-                  <a:srgbClr val="1A1A1A"/>
-                </a:solidFill>
-                <a:latin typeface="Calibri" pitchFamily="34" charset="0"/>
-                <a:ea typeface="Calibri" pitchFamily="34" charset="-122"/>
-                <a:cs typeface="Calibri" pitchFamily="34" charset="-120"/>
-              </a:rPr>
-              <a:t>'Always favorite' looks brilliant — </a:t>
-            </a:r>
-            <a:pPr indent="0" marL="0">
-              <a:buNone/>
-            </a:pPr>
-            <a:r>
-              <a:rPr lang="en-US" sz="1300" i="1" dirty="0">
-                <a:solidFill>
-                  <a:srgbClr val="13315C"/>
-                </a:solidFill>
-                <a:latin typeface="Calibri" pitchFamily="34" charset="0"/>
-                <a:ea typeface="Calibri" pitchFamily="34" charset="-122"/>
-                <a:cs typeface="Calibri" pitchFamily="34" charset="-120"/>
-              </a:rPr>
-              <a:t>only because the favorite happened to win this one game.</a:t>
-            </a:r>
-            <a:endParaRPr lang="en-US" sz="1300" dirty="0"/>
-          </a:p>
-        </p:txBody>
-      </p:sp>
-      <p:sp>
-        <p:nvSpPr>
-          <p:cNvPr id="11" name="Text 8"/>
-          <p:cNvSpPr/>
-          <p:nvPr/>
-        </p:nvSpPr>
-        <p:spPr>
-          <a:xfrm>
-            <a:off x="7589520" y="4572000"/>
-            <a:ext cx="4114800" cy="1371600"/>
-          </a:xfrm>
-          <a:prstGeom prst="rect">
-            <a:avLst/>
-          </a:prstGeom>
-          <a:noFill/>
-          <a:ln/>
-        </p:spPr>
-        <p:txBody>
-          <a:bodyPr wrap="square" rtlCol="0" anchor="ctr"/>
-          <a:lstStyle/>
-          <a:p>
-            <a:pPr indent="0" marL="0">
-              <a:buNone/>
-            </a:pPr>
-            <a:r>
-              <a:rPr lang="en-US" sz="1300" dirty="0">
-                <a:solidFill>
-                  <a:srgbClr val="1A1A1A"/>
-                </a:solidFill>
-                <a:latin typeface="Calibri" pitchFamily="34" charset="0"/>
-                <a:ea typeface="Calibri" pitchFamily="34" charset="-122"/>
-                <a:cs typeface="Calibri" pitchFamily="34" charset="-120"/>
-              </a:rPr>
-              <a:t>This is the </a:t>
-            </a:r>
-            <a:pPr indent="0" marL="0">
-              <a:buNone/>
-            </a:pPr>
-            <a:r>
-              <a:rPr lang="en-US" sz="1300" b="1" dirty="0">
-                <a:solidFill>
-                  <a:srgbClr val="EEA02B"/>
-                </a:solidFill>
-                <a:latin typeface="Calibri" pitchFamily="34" charset="0"/>
-                <a:ea typeface="Calibri" pitchFamily="34" charset="-122"/>
-                <a:cs typeface="Calibri" pitchFamily="34" charset="-120"/>
-              </a:rPr>
-              <a:t>n=1 problem</a:t>
-            </a:r>
-            <a:pPr indent="0" marL="0">
-              <a:buNone/>
-            </a:pPr>
-            <a:r>
-              <a:rPr lang="en-US" sz="1300" dirty="0">
-                <a:solidFill>
-                  <a:srgbClr val="1A1A1A"/>
-                </a:solidFill>
-                <a:latin typeface="Calibri" pitchFamily="34" charset="0"/>
-                <a:ea typeface="Calibri" pitchFamily="34" charset="-122"/>
-                <a:cs typeface="Calibri" pitchFamily="34" charset="-120"/>
-              </a:rPr>
-              <a:t> made tangible — the methodological backbone of the project.</a:t>
-            </a:r>
-            <a:endParaRPr lang="en-US" sz="1300" dirty="0"/>
-          </a:p>
-        </p:txBody>
-      </p:sp>
-      <p:sp>
-        <p:nvSpPr>
-          <p:cNvPr id="12" name="Text 9"/>
-          <p:cNvSpPr/>
-          <p:nvPr/>
-        </p:nvSpPr>
-        <p:spPr>
-          <a:xfrm>
-            <a:off x="502920" y="6492240"/>
-            <a:ext cx="7315200" cy="274320"/>
-          </a:xfrm>
-          <a:prstGeom prst="rect">
-            <a:avLst/>
-          </a:prstGeom>
-          <a:noFill/>
-          <a:ln/>
-        </p:spPr>
-        <p:txBody>
-          <a:bodyPr wrap="square" rtlCol="0" anchor="ctr"/>
-          <a:lstStyle/>
-          <a:p>
-            <a:pPr indent="0" marL="0">
-              <a:buNone/>
-            </a:pPr>
-            <a:r>
-              <a:rPr lang="en-US" sz="1000" dirty="0">
-                <a:solidFill>
-                  <a:srgbClr val="8DA9C4"/>
-                </a:solidFill>
-                <a:latin typeface="Calibri" pitchFamily="34" charset="0"/>
-                <a:ea typeface="Calibri" pitchFamily="34" charset="-122"/>
-                <a:cs typeface="Calibri" pitchFamily="34" charset="-120"/>
-              </a:rPr>
-              <a:t>STATS 211 · NBA Mispricing · Sit &amp; Manathattai</a:t>
-            </a:r>
-            <a:endParaRPr lang="en-US" sz="1000" dirty="0"/>
-          </a:p>
-        </p:txBody>
-      </p:sp>
-      <p:sp>
-        <p:nvSpPr>
-          <p:cNvPr id="13" name="Text 10"/>
-          <p:cNvSpPr/>
-          <p:nvPr/>
-        </p:nvSpPr>
-        <p:spPr>
-          <a:xfrm>
-            <a:off x="11384280" y="6492240"/>
-            <a:ext cx="411480" cy="274320"/>
-          </a:xfrm>
-          <a:prstGeom prst="rect">
-            <a:avLst/>
-          </a:prstGeom>
-          <a:noFill/>
-          <a:ln/>
-        </p:spPr>
-        <p:txBody>
-          <a:bodyPr wrap="square" rtlCol="0" anchor="ctr"/>
-          <a:lstStyle/>
-          <a:p>
-            <a:pPr algn="r" indent="0" marL="0">
-              <a:buNone/>
-            </a:pPr>
-            <a:r>
-              <a:rPr lang="en-US" sz="1000" dirty="0">
-                <a:solidFill>
-                  <a:srgbClr val="8DA9C4"/>
-                </a:solidFill>
-                <a:latin typeface="Calibri" pitchFamily="34" charset="0"/>
-                <a:ea typeface="Calibri" pitchFamily="34" charset="-122"/>
-                <a:cs typeface="Calibri" pitchFamily="34" charset="-120"/>
-              </a:rPr>
-              <a:t>12</a:t>
-            </a:r>
-            <a:endParaRPr lang="en-US" sz="1000" dirty="0"/>
-          </a:p>
-        </p:txBody>
-      </p:sp>
-    </p:spTree>
-  </p:cSld>
-  <p:clrMapOvr>
-    <a:masterClrMapping/>
-  </p:clrMapOvr>
-</p:sld>
-</file>
-
-<file path=ppt/slides/slide13.xml><?xml version="1.0" encoding="utf-8"?>
-<p:sld xmlns:a="http://schemas.openxmlformats.org/drawingml/2006/main" xmlns:r="http://schemas.openxmlformats.org/officeDocument/2006/relationships" xmlns:p="http://schemas.openxmlformats.org/presentationml/2006/main">
-  <p:cSld name="Slide 13">
-    <p:bg>
-      <p:bgPr>
-        <a:solidFill>
-          <a:srgbClr val="FFFFFF"/>
-        </a:solidFill>
-      </p:bgPr>
-    </p:bg>
-    <p:spTree>
-      <p:nvGrpSpPr>
-        <p:cNvPr id="1" name=""/>
-        <p:cNvGrpSpPr/>
-        <p:nvPr/>
-      </p:nvGrpSpPr>
-      <p:grpSpPr>
-        <a:xfrm>
-          <a:off x="0" y="0"/>
-          <a:ext cx="0" cy="0"/>
-          <a:chOff x="0" y="0"/>
-          <a:chExt cx="0" cy="0"/>
-        </a:xfrm>
-      </p:grpSpPr>
-      <p:sp>
-        <p:nvSpPr>
-          <p:cNvPr id="2" name="Text 0"/>
-          <p:cNvSpPr/>
-          <p:nvPr/>
-        </p:nvSpPr>
-        <p:spPr>
-          <a:xfrm>
-            <a:off x="502920" y="228600"/>
-            <a:ext cx="11247120" cy="777240"/>
-          </a:xfrm>
-          <a:prstGeom prst="rect">
-            <a:avLst/>
-          </a:prstGeom>
-          <a:noFill/>
-          <a:ln/>
-        </p:spPr>
-        <p:txBody>
-          <a:bodyPr wrap="square" rtlCol="0" anchor="ctr"/>
-          <a:lstStyle/>
-          <a:p>
-            <a:pPr indent="0" marL="0">
-              <a:buNone/>
-            </a:pPr>
-            <a:r>
-              <a:rPr lang="en-US" sz="2800" b="1" dirty="0">
-                <a:solidFill>
-                  <a:srgbClr val="0B2545"/>
-                </a:solidFill>
-                <a:latin typeface="Georgia" pitchFamily="34" charset="0"/>
-                <a:ea typeface="Georgia" pitchFamily="34" charset="-122"/>
-                <a:cs typeface="Georgia" pitchFamily="34" charset="-120"/>
-              </a:rPr>
-              <a:t>Finding 4 · The Kalshi +95% is a stale-mid artifact</a:t>
-            </a:r>
-            <a:endParaRPr lang="en-US" sz="2800" dirty="0"/>
-          </a:p>
-        </p:txBody>
-      </p:sp>
-      <p:sp>
-        <p:nvSpPr>
-          <p:cNvPr id="3" name="Text 1"/>
-          <p:cNvSpPr/>
-          <p:nvPr/>
-        </p:nvSpPr>
-        <p:spPr>
-          <a:xfrm>
-            <a:off x="502920" y="932688"/>
-            <a:ext cx="11247120" cy="365760"/>
-          </a:xfrm>
-          <a:prstGeom prst="rect">
-            <a:avLst/>
-          </a:prstGeom>
-          <a:noFill/>
-          <a:ln/>
-        </p:spPr>
-        <p:txBody>
-          <a:bodyPr wrap="square" rtlCol="0" anchor="ctr"/>
-          <a:lstStyle/>
-          <a:p>
-            <a:pPr indent="0" marL="0">
-              <a:buNone/>
-            </a:pPr>
-            <a:r>
-              <a:rPr lang="en-US" sz="1400" i="1" dirty="0">
-                <a:solidFill>
-                  <a:srgbClr val="13315C"/>
-                </a:solidFill>
-                <a:latin typeface="Calibri" pitchFamily="34" charset="0"/>
-                <a:ea typeface="Calibri" pitchFamily="34" charset="-122"/>
-                <a:cs typeface="Calibri" pitchFamily="34" charset="-120"/>
-              </a:rPr>
-              <a:t>Game 6 (OKC@SAS, 2026-05-28, FINAL SAS 118–91) + 4 archived games · 311 ticks</a:t>
-            </a:r>
-            <a:endParaRPr lang="en-US" sz="1400" dirty="0"/>
-          </a:p>
-        </p:txBody>
-      </p:sp>
-      <p:sp>
-        <p:nvSpPr>
-          <p:cNvPr id="4" name="Shape 2"/>
-          <p:cNvSpPr/>
-          <p:nvPr/>
-        </p:nvSpPr>
-        <p:spPr>
-          <a:xfrm>
-            <a:off x="502920" y="1298448"/>
-            <a:ext cx="11247120" cy="0"/>
-          </a:xfrm>
-          <a:prstGeom prst="line">
-            <a:avLst/>
-          </a:prstGeom>
-          <a:noFill/>
-          <a:ln w="25400">
-            <a:solidFill>
-              <a:srgbClr val="1C7293"/>
-            </a:solidFill>
-            <a:prstDash val="solid"/>
-          </a:ln>
-        </p:spPr>
-      </p:sp>
-      <p:pic>
-        <p:nvPicPr>
-          <p:cNvPr id="5" name="Image 0" descr="slides/figures/game6_pilot.png">    </p:cNvPr>
-          <p:cNvPicPr>
-            <a:picLocks noChangeAspect="1"/>
-          </p:cNvPicPr>
-          <p:nvPr/>
-        </p:nvPicPr>
-        <p:blipFill>
-          <a:blip r:embed="rId1"/>
-          <a:stretch>
-            <a:fillRect/>
-          </a:stretch>
-        </p:blipFill>
-        <p:spPr>
-          <a:xfrm>
-            <a:off x="1554480" y="1371600"/>
-            <a:ext cx="9052560" cy="4206240"/>
-          </a:xfrm>
-          <a:prstGeom prst="rect">
-            <a:avLst/>
-          </a:prstGeom>
-        </p:spPr>
-      </p:pic>
-      <p:sp>
-        <p:nvSpPr>
-          <p:cNvPr id="6" name="Shape 3"/>
-          <p:cNvSpPr/>
-          <p:nvPr/>
-        </p:nvSpPr>
-        <p:spPr>
-          <a:xfrm>
-            <a:off x="502920" y="5669280"/>
-            <a:ext cx="11247120" cy="914400"/>
-          </a:xfrm>
-          <a:prstGeom prst="roundRect">
-            <a:avLst>
-              <a:gd name="adj" fmla="val 8000"/>
-            </a:avLst>
+          <p:cNvPr id="8" name="Shape 6"/>
+          <p:cNvSpPr/>
+          <p:nvPr/>
+        </p:nvSpPr>
+        <p:spPr>
+          <a:xfrm>
+            <a:off x="685800" y="2606040"/>
+            <a:ext cx="384048" cy="384048"/>
+          </a:xfrm>
+          <a:prstGeom prst="ellipse">
+            <a:avLst/>
           </a:prstGeom>
           <a:solidFill>
-            <a:srgbClr val="F6F6F2"/>
+            <a:srgbClr val="EEA02B"/>
           </a:solidFill>
-          <a:ln w="16510">
+          <a:ln w="12700">
             <a:solidFill>
               <a:srgbClr val="EEA02B"/>
             </a:solidFill>
@@ -5585,235 +4156,30 @@
       </p:sp>
       <p:sp>
         <p:nvSpPr>
-          <p:cNvPr id="7" name="Text 4"/>
-          <p:cNvSpPr/>
-          <p:nvPr/>
-        </p:nvSpPr>
-        <p:spPr>
-          <a:xfrm>
-            <a:off x="777240" y="5760720"/>
-            <a:ext cx="10698480" cy="777240"/>
-          </a:xfrm>
-          <a:prstGeom prst="rect">
-            <a:avLst/>
-          </a:prstGeom>
-          <a:noFill/>
-          <a:ln/>
-        </p:spPr>
-        <p:txBody>
-          <a:bodyPr wrap="square" rtlCol="0" anchor="ctr"/>
-          <a:lstStyle/>
-          <a:p>
-            <a:pPr indent="0" marL="0">
+          <p:cNvPr id="9" name="Text 7"/>
+          <p:cNvSpPr/>
+          <p:nvPr/>
+        </p:nvSpPr>
+        <p:spPr>
+          <a:xfrm>
+            <a:off x="685800" y="2606040"/>
+            <a:ext cx="384048" cy="384048"/>
+          </a:xfrm>
+          <a:prstGeom prst="rect">
+            <a:avLst/>
+          </a:prstGeom>
+          <a:noFill/>
+          <a:ln/>
+        </p:spPr>
+        <p:txBody>
+          <a:bodyPr wrap="square" rtlCol="0" anchor="ctr"/>
+          <a:lstStyle/>
+          <a:p>
+            <a:pPr algn="ctr" indent="0" marL="0">
               <a:buNone/>
             </a:pPr>
             <a:r>
               <a:rPr lang="en-US" sz="1300" b="1" dirty="0">
-                <a:solidFill>
-                  <a:srgbClr val="0B2545"/>
-                </a:solidFill>
-                <a:latin typeface="Calibri" pitchFamily="34" charset="0"/>
-                <a:ea typeface="Calibri" pitchFamily="34" charset="-122"/>
-                <a:cs typeface="Calibri" pitchFamily="34" charset="-120"/>
-              </a:rPr>
-              <a:t>Game 6 alone: </a:t>
-            </a:r>
-            <a:pPr indent="0" marL="0">
-              <a:buNone/>
-            </a:pPr>
-            <a:r>
-              <a:rPr lang="en-US" sz="1300" dirty="0">
-                <a:solidFill>
-                  <a:srgbClr val="1A1A1A"/>
-                </a:solidFill>
-                <a:latin typeface="Calibri" pitchFamily="34" charset="0"/>
-                <a:ea typeface="Calibri" pitchFamily="34" charset="-122"/>
-                <a:cs typeface="Calibri" pitchFamily="34" charset="-120"/>
-              </a:rPr>
-              <a:t>model +12% on Kalshi 1H (smallest of the 5). </a:t>
-            </a:r>
-            <a:pPr indent="0" marL="0">
-              <a:buNone/>
-            </a:pPr>
-            <a:r>
-              <a:rPr lang="en-US" sz="1300" b="1" dirty="0">
-                <a:solidFill>
-                  <a:srgbClr val="EEA02B"/>
-                </a:solidFill>
-                <a:latin typeface="Calibri" pitchFamily="34" charset="0"/>
-                <a:ea typeface="Calibri" pitchFamily="34" charset="-122"/>
-                <a:cs typeface="Calibri" pitchFamily="34" charset="-120"/>
-              </a:rPr>
-              <a:t>Pool of 5: +95%. </a:t>
-            </a:r>
-            <a:pPr indent="0" marL="0">
-              <a:buNone/>
-            </a:pPr>
-            <a:r>
-              <a:rPr lang="en-US" sz="1300" dirty="0">
-                <a:solidFill>
-                  <a:srgbClr val="1A1A1A"/>
-                </a:solidFill>
-                <a:latin typeface="Calibri" pitchFamily="34" charset="0"/>
-                <a:ea typeface="Calibri" pitchFamily="34" charset="-122"/>
-                <a:cs typeface="Calibri" pitchFamily="34" charset="-120"/>
-              </a:rPr>
-              <a:t>But Kalshi 1H prices were thin and stale, so the model 'beats' a price that isn't moving — </a:t>
-            </a:r>
-            <a:pPr indent="0" marL="0">
-              <a:buNone/>
-            </a:pPr>
-            <a:r>
-              <a:rPr lang="en-US" sz="1300" i="1" dirty="0">
-                <a:solidFill>
-                  <a:srgbClr val="13315C"/>
-                </a:solidFill>
-                <a:latin typeface="Calibri" pitchFamily="34" charset="0"/>
-                <a:ea typeface="Calibri" pitchFamily="34" charset="-122"/>
-                <a:cs typeface="Calibri" pitchFamily="34" charset="-120"/>
-              </a:rPr>
-              <a:t>stale-mid + n=5 + mid quotes = artifact, not edge.</a:t>
-            </a:r>
-            <a:endParaRPr lang="en-US" sz="1300" dirty="0"/>
-          </a:p>
-        </p:txBody>
-      </p:sp>
-      <p:sp>
-        <p:nvSpPr>
-          <p:cNvPr id="8" name="Text 5"/>
-          <p:cNvSpPr/>
-          <p:nvPr/>
-        </p:nvSpPr>
-        <p:spPr>
-          <a:xfrm>
-            <a:off x="502920" y="6492240"/>
-            <a:ext cx="7315200" cy="274320"/>
-          </a:xfrm>
-          <a:prstGeom prst="rect">
-            <a:avLst/>
-          </a:prstGeom>
-          <a:noFill/>
-          <a:ln/>
-        </p:spPr>
-        <p:txBody>
-          <a:bodyPr wrap="square" rtlCol="0" anchor="ctr"/>
-          <a:lstStyle/>
-          <a:p>
-            <a:pPr indent="0" marL="0">
-              <a:buNone/>
-            </a:pPr>
-            <a:r>
-              <a:rPr lang="en-US" sz="1000" dirty="0">
-                <a:solidFill>
-                  <a:srgbClr val="8DA9C4"/>
-                </a:solidFill>
-                <a:latin typeface="Calibri" pitchFamily="34" charset="0"/>
-                <a:ea typeface="Calibri" pitchFamily="34" charset="-122"/>
-                <a:cs typeface="Calibri" pitchFamily="34" charset="-120"/>
-              </a:rPr>
-              <a:t>STATS 211 · NBA Mispricing · Sit &amp; Manathattai</a:t>
-            </a:r>
-            <a:endParaRPr lang="en-US" sz="1000" dirty="0"/>
-          </a:p>
-        </p:txBody>
-      </p:sp>
-      <p:sp>
-        <p:nvSpPr>
-          <p:cNvPr id="9" name="Text 6"/>
-          <p:cNvSpPr/>
-          <p:nvPr/>
-        </p:nvSpPr>
-        <p:spPr>
-          <a:xfrm>
-            <a:off x="11384280" y="6492240"/>
-            <a:ext cx="411480" cy="274320"/>
-          </a:xfrm>
-          <a:prstGeom prst="rect">
-            <a:avLst/>
-          </a:prstGeom>
-          <a:noFill/>
-          <a:ln/>
-        </p:spPr>
-        <p:txBody>
-          <a:bodyPr wrap="square" rtlCol="0" anchor="ctr"/>
-          <a:lstStyle/>
-          <a:p>
-            <a:pPr algn="r" indent="0" marL="0">
-              <a:buNone/>
-            </a:pPr>
-            <a:r>
-              <a:rPr lang="en-US" sz="1000" dirty="0">
-                <a:solidFill>
-                  <a:srgbClr val="8DA9C4"/>
-                </a:solidFill>
-                <a:latin typeface="Calibri" pitchFamily="34" charset="0"/>
-                <a:ea typeface="Calibri" pitchFamily="34" charset="-122"/>
-                <a:cs typeface="Calibri" pitchFamily="34" charset="-120"/>
-              </a:rPr>
-              <a:t>13</a:t>
-            </a:r>
-            <a:endParaRPr lang="en-US" sz="1000" dirty="0"/>
-          </a:p>
-        </p:txBody>
-      </p:sp>
-    </p:spTree>
-  </p:cSld>
-  <p:clrMapOvr>
-    <a:masterClrMapping/>
-  </p:clrMapOvr>
-</p:sld>
-</file>
-
-<file path=ppt/slides/slide14.xml><?xml version="1.0" encoding="utf-8"?>
-<p:sld xmlns:a="http://schemas.openxmlformats.org/drawingml/2006/main" xmlns:r="http://schemas.openxmlformats.org/officeDocument/2006/relationships" xmlns:p="http://schemas.openxmlformats.org/presentationml/2006/main">
-  <p:cSld name="Slide 14">
-    <p:bg>
-      <p:bgPr>
-        <a:solidFill>
-          <a:srgbClr val="FFFFFF"/>
-        </a:solidFill>
-      </p:bgPr>
-    </p:bg>
-    <p:spTree>
-      <p:nvGrpSpPr>
-        <p:cNvPr id="1" name=""/>
-        <p:cNvGrpSpPr/>
-        <p:nvPr/>
-      </p:nvGrpSpPr>
-      <p:grpSpPr>
-        <a:xfrm>
-          <a:off x="0" y="0"/>
-          <a:ext cx="0" cy="0"/>
-          <a:chOff x="0" y="0"/>
-          <a:chExt cx="0" cy="0"/>
-        </a:xfrm>
-      </p:grpSpPr>
-      <p:sp>
-        <p:nvSpPr>
-          <p:cNvPr id="2" name="Text 0"/>
-          <p:cNvSpPr/>
-          <p:nvPr/>
-        </p:nvSpPr>
-        <p:spPr>
-          <a:xfrm>
-            <a:off x="502920" y="228600"/>
-            <a:ext cx="11247120" cy="777240"/>
-          </a:xfrm>
-          <a:prstGeom prst="rect">
-            <a:avLst/>
-          </a:prstGeom>
-          <a:noFill/>
-          <a:ln/>
-        </p:spPr>
-        <p:txBody>
-          <a:bodyPr wrap="square" rtlCol="0" anchor="ctr"/>
-          <a:lstStyle/>
-          <a:p>
-            <a:pPr indent="0" marL="0">
-              <a:buNone/>
-            </a:pPr>
-            <a:r>
-              <a:rPr lang="en-US" sz="2800" b="1" dirty="0">
                 <a:solidFill>
                   <a:srgbClr val="0B2545"/>
                 </a:solidFill>
@@ -5821,46 +4187,46 @@
                 <a:ea typeface="Georgia" pitchFamily="34" charset="-122"/>
                 <a:cs typeface="Georgia" pitchFamily="34" charset="-120"/>
               </a:rPr>
-              <a:t>Connecting back to Halawi</a:t>
-            </a:r>
-            <a:endParaRPr lang="en-US" sz="2800" dirty="0"/>
-          </a:p>
-        </p:txBody>
-      </p:sp>
-      <p:sp>
-        <p:nvSpPr>
-          <p:cNvPr id="3" name="Text 1"/>
-          <p:cNvSpPr/>
-          <p:nvPr/>
-        </p:nvSpPr>
-        <p:spPr>
-          <a:xfrm>
-            <a:off x="502920" y="932688"/>
-            <a:ext cx="11247120" cy="365760"/>
-          </a:xfrm>
-          <a:prstGeom prst="rect">
-            <a:avLst/>
-          </a:prstGeom>
-          <a:noFill/>
-          <a:ln/>
-        </p:spPr>
-        <p:txBody>
-          <a:bodyPr wrap="square" rtlCol="0" anchor="ctr"/>
-          <a:lstStyle/>
-          <a:p>
-            <a:pPr indent="0" marL="0">
-              <a:buNone/>
-            </a:pPr>
-            <a:r>
-              <a:rPr lang="en-US" sz="1400" i="1" dirty="0">
-                <a:solidFill>
-                  <a:srgbClr val="13315C"/>
-                </a:solidFill>
-                <a:latin typeface="Calibri" pitchFamily="34" charset="0"/>
-                <a:ea typeface="Calibri" pitchFamily="34" charset="-122"/>
-                <a:cs typeface="Calibri" pitchFamily="34" charset="-120"/>
-              </a:rPr>
-              <a:t>The Aggregate column — applied to NBA</a:t>
+              <a:t>1</a:t>
+            </a:r>
+            <a:endParaRPr lang="en-US" sz="1300" dirty="0"/>
+          </a:p>
+        </p:txBody>
+      </p:sp>
+      <p:sp>
+        <p:nvSpPr>
+          <p:cNvPr id="10" name="Text 8"/>
+          <p:cNvSpPr/>
+          <p:nvPr/>
+        </p:nvSpPr>
+        <p:spPr>
+          <a:xfrm>
+            <a:off x="1188720" y="2606040"/>
+            <a:ext cx="4572000" cy="365760"/>
+          </a:xfrm>
+          <a:prstGeom prst="rect">
+            <a:avLst/>
+          </a:prstGeom>
+          <a:noFill/>
+          <a:ln/>
+        </p:spPr>
+        <p:txBody>
+          <a:bodyPr wrap="square" rtlCol="0" anchor="ctr"/>
+          <a:lstStyle/>
+          <a:p>
+            <a:pPr indent="0" marL="0">
+              <a:buNone/>
+            </a:pPr>
+            <a:r>
+              <a:rPr lang="en-US" sz="1400" b="1" dirty="0">
+                <a:solidFill>
+                  <a:srgbClr val="0B2545"/>
+                </a:solidFill>
+                <a:latin typeface="Georgia" pitchFamily="34" charset="0"/>
+                <a:ea typeface="Georgia" pitchFamily="34" charset="-122"/>
+                <a:cs typeface="Georgia" pitchFamily="34" charset="-120"/>
+              </a:rPr>
+              <a:t>Calibrated WP model</a:t>
             </a:r>
             <a:endParaRPr lang="en-US" sz="1400" dirty="0"/>
           </a:p>
@@ -5868,22 +4234,63 @@
       </p:sp>
       <p:sp>
         <p:nvSpPr>
-          <p:cNvPr id="4" name="Shape 2"/>
-          <p:cNvSpPr/>
-          <p:nvPr/>
-        </p:nvSpPr>
-        <p:spPr>
-          <a:xfrm>
-            <a:off x="502920" y="1298448"/>
-            <a:ext cx="11247120" cy="0"/>
-          </a:xfrm>
-          <a:prstGeom prst="line">
-            <a:avLst/>
-          </a:prstGeom>
-          <a:noFill/>
-          <a:ln w="25400">
+          <p:cNvPr id="11" name="Text 9"/>
+          <p:cNvSpPr/>
+          <p:nvPr/>
+        </p:nvSpPr>
+        <p:spPr>
+          <a:xfrm>
+            <a:off x="1188720" y="2971800"/>
+            <a:ext cx="4572000" cy="548640"/>
+          </a:xfrm>
+          <a:prstGeom prst="rect">
+            <a:avLst/>
+          </a:prstGeom>
+          <a:noFill/>
+          <a:ln/>
+        </p:spPr>
+        <p:txBody>
+          <a:bodyPr wrap="square" rtlCol="0" anchor="ctr"/>
+          <a:lstStyle/>
+          <a:p>
+            <a:pPr indent="0" marL="0">
+              <a:buNone/>
+            </a:pPr>
+            <a:r>
+              <a:rPr lang="en-US" sz="1100" dirty="0">
+                <a:solidFill>
+                  <a:srgbClr val="1A1A1A"/>
+                </a:solidFill>
+                <a:latin typeface="Calibri" pitchFamily="34" charset="0"/>
+                <a:ea typeface="Calibri" pitchFamily="34" charset="-122"/>
+                <a:cs typeface="Calibri" pitchFamily="34" charset="-120"/>
+              </a:rPr>
+              <a:t>Finding 1: well-calibrated on the held-out 2024-25 season.</a:t>
+            </a:r>
+            <a:endParaRPr lang="en-US" sz="1100" dirty="0"/>
+          </a:p>
+        </p:txBody>
+      </p:sp>
+      <p:sp>
+        <p:nvSpPr>
+          <p:cNvPr id="12" name="Shape 10"/>
+          <p:cNvSpPr/>
+          <p:nvPr/>
+        </p:nvSpPr>
+        <p:spPr>
+          <a:xfrm>
+            <a:off x="685800" y="3611880"/>
+            <a:ext cx="384048" cy="384048"/>
+          </a:xfrm>
+          <a:prstGeom prst="ellipse">
+            <a:avLst/>
+          </a:prstGeom>
+          <a:solidFill>
+            <a:srgbClr val="EEA02B"/>
+          </a:solidFill>
+          <a:ln w="12700">
             <a:solidFill>
-              <a:srgbClr val="1C7293"/>
+              <a:srgbClr val="EEA02B"/>
             </a:solidFill>
             <a:prstDash val="solid"/>
           </a:ln>
@@ -5891,30 +4298,108 @@
       </p:sp>
       <p:sp>
         <p:nvSpPr>
-          <p:cNvPr id="5" name="Text 3"/>
-          <p:cNvSpPr/>
-          <p:nvPr/>
-        </p:nvSpPr>
-        <p:spPr>
-          <a:xfrm>
-            <a:off x="502920" y="1463040"/>
-            <a:ext cx="11247120" cy="640080"/>
-          </a:xfrm>
-          <a:prstGeom prst="rect">
-            <a:avLst/>
-          </a:prstGeom>
-          <a:noFill/>
-          <a:ln/>
-        </p:spPr>
-        <p:txBody>
-          <a:bodyPr wrap="square" rtlCol="0" anchor="ctr"/>
-          <a:lstStyle/>
-          <a:p>
-            <a:pPr indent="0" marL="0">
-              <a:buNone/>
-            </a:pPr>
-            <a:r>
-              <a:rPr lang="en-US" sz="1800" b="1" dirty="0">
+          <p:cNvPr id="13" name="Text 11"/>
+          <p:cNvSpPr/>
+          <p:nvPr/>
+        </p:nvSpPr>
+        <p:spPr>
+          <a:xfrm>
+            <a:off x="685800" y="3611880"/>
+            <a:ext cx="384048" cy="384048"/>
+          </a:xfrm>
+          <a:prstGeom prst="rect">
+            <a:avLst/>
+          </a:prstGeom>
+          <a:noFill/>
+          <a:ln/>
+        </p:spPr>
+        <p:txBody>
+          <a:bodyPr wrap="square" rtlCol="0" anchor="ctr"/>
+          <a:lstStyle/>
+          <a:p>
+            <a:pPr algn="ctr" indent="0" marL="0">
+              <a:buNone/>
+            </a:pPr>
+            <a:r>
+              <a:rPr lang="en-US" sz="1300" b="1" dirty="0">
+                <a:solidFill>
+                  <a:srgbClr val="0B2545"/>
+                </a:solidFill>
+                <a:latin typeface="Georgia" pitchFamily="34" charset="0"/>
+                <a:ea typeface="Georgia" pitchFamily="34" charset="-122"/>
+                <a:cs typeface="Georgia" pitchFamily="34" charset="-120"/>
+              </a:rPr>
+              <a:t>2</a:t>
+            </a:r>
+            <a:endParaRPr lang="en-US" sz="1300" dirty="0"/>
+          </a:p>
+        </p:txBody>
+      </p:sp>
+      <p:sp>
+        <p:nvSpPr>
+          <p:cNvPr id="14" name="Text 12"/>
+          <p:cNvSpPr/>
+          <p:nvPr/>
+        </p:nvSpPr>
+        <p:spPr>
+          <a:xfrm>
+            <a:off x="1188720" y="3611880"/>
+            <a:ext cx="4572000" cy="365760"/>
+          </a:xfrm>
+          <a:prstGeom prst="rect">
+            <a:avLst/>
+          </a:prstGeom>
+          <a:noFill/>
+          <a:ln/>
+        </p:spPr>
+        <p:txBody>
+          <a:bodyPr wrap="square" rtlCol="0" anchor="ctr"/>
+          <a:lstStyle/>
+          <a:p>
+            <a:pPr indent="0" marL="0">
+              <a:buNone/>
+            </a:pPr>
+            <a:r>
+              <a:rPr lang="en-US" sz="1400" b="1" dirty="0">
+                <a:solidFill>
+                  <a:srgbClr val="0B2545"/>
+                </a:solidFill>
+                <a:latin typeface="Georgia" pitchFamily="34" charset="0"/>
+                <a:ea typeface="Georgia" pitchFamily="34" charset="-122"/>
+                <a:cs typeface="Georgia" pitchFamily="34" charset="-120"/>
+              </a:rPr>
+              <a:t>Pre-registered bias test passes</a:t>
+            </a:r>
+            <a:endParaRPr lang="en-US" sz="1400" dirty="0"/>
+          </a:p>
+        </p:txBody>
+      </p:sp>
+      <p:sp>
+        <p:nvSpPr>
+          <p:cNvPr id="15" name="Text 13"/>
+          <p:cNvSpPr/>
+          <p:nvPr/>
+        </p:nvSpPr>
+        <p:spPr>
+          <a:xfrm>
+            <a:off x="1188720" y="3977640"/>
+            <a:ext cx="4572000" cy="548640"/>
+          </a:xfrm>
+          <a:prstGeom prst="rect">
+            <a:avLst/>
+          </a:prstGeom>
+          <a:noFill/>
+          <a:ln/>
+        </p:spPr>
+        <p:txBody>
+          <a:bodyPr wrap="square" rtlCol="0" anchor="ctr"/>
+          <a:lstStyle/>
+          <a:p>
+            <a:pPr indent="0" marL="0">
+              <a:buNone/>
+            </a:pPr>
+            <a:r>
+              <a:rPr lang="en-US" sz="1100" dirty="0">
                 <a:solidFill>
                   <a:srgbClr val="1A1A1A"/>
                 </a:solidFill>
@@ -5922,129 +4407,32 @@
                 <a:ea typeface="Calibri" pitchFamily="34" charset="-122"/>
                 <a:cs typeface="Calibri" pitchFamily="34" charset="-120"/>
               </a:rPr>
-              <a:t>Halawi's buried result:  </a:t>
-            </a:r>
-            <a:pPr indent="0" marL="0">
-              <a:buNone/>
-            </a:pPr>
-            <a:r>
-              <a:rPr lang="en-US" sz="1800" dirty="0">
-                <a:solidFill>
-                  <a:srgbClr val="1A1A1A"/>
-                </a:solidFill>
-                <a:latin typeface="Calibri" pitchFamily="34" charset="0"/>
-                <a:ea typeface="Calibri" pitchFamily="34" charset="-122"/>
-                <a:cs typeface="Calibri" pitchFamily="34" charset="-120"/>
-              </a:rPr>
-              <a:t>4·LM + 1·crowd &gt; either alone — because the errors are </a:t>
-            </a:r>
-            <a:pPr indent="0" marL="0">
-              <a:buNone/>
-            </a:pPr>
-            <a:r>
-              <a:rPr lang="en-US" sz="1800" b="1" i="1" dirty="0">
-                <a:solidFill>
-                  <a:srgbClr val="EEA02B"/>
-                </a:solidFill>
-                <a:latin typeface="Calibri" pitchFamily="34" charset="0"/>
-                <a:ea typeface="Calibri" pitchFamily="34" charset="-122"/>
-                <a:cs typeface="Calibri" pitchFamily="34" charset="-120"/>
-              </a:rPr>
-              <a:t>independent.</a:t>
-            </a:r>
-            <a:endParaRPr lang="en-US" sz="1800" dirty="0"/>
-          </a:p>
-        </p:txBody>
-      </p:sp>
-      <p:sp>
-        <p:nvSpPr>
-          <p:cNvPr id="6" name="Text 4"/>
-          <p:cNvSpPr/>
-          <p:nvPr/>
-        </p:nvSpPr>
-        <p:spPr>
-          <a:xfrm>
-            <a:off x="502920" y="2194560"/>
-            <a:ext cx="11247120" cy="914400"/>
-          </a:xfrm>
-          <a:prstGeom prst="rect">
-            <a:avLst/>
-          </a:prstGeom>
-          <a:noFill/>
-          <a:ln/>
-        </p:spPr>
-        <p:txBody>
-          <a:bodyPr wrap="square" rtlCol="0" anchor="ctr"/>
-          <a:lstStyle/>
-          <a:p>
-            <a:pPr indent="0" marL="0">
-              <a:buNone/>
-            </a:pPr>
-            <a:r>
-              <a:rPr lang="en-US" sz="1800" dirty="0">
-                <a:solidFill>
-                  <a:srgbClr val="1A1A1A"/>
-                </a:solidFill>
-                <a:latin typeface="Calibri" pitchFamily="34" charset="0"/>
-                <a:ea typeface="Calibri" pitchFamily="34" charset="-122"/>
-                <a:cs typeface="Calibri" pitchFamily="34" charset="-120"/>
-              </a:rPr>
-              <a:t>Our structural model and the live market are also </a:t>
-            </a:r>
-            <a:pPr indent="0" marL="0">
-              <a:buNone/>
-            </a:pPr>
-            <a:r>
-              <a:rPr lang="en-US" sz="1800" b="1" dirty="0">
-                <a:solidFill>
-                  <a:srgbClr val="0B2545"/>
-                </a:solidFill>
-                <a:latin typeface="Calibri" pitchFamily="34" charset="0"/>
-                <a:ea typeface="Calibri" pitchFamily="34" charset="-122"/>
-                <a:cs typeface="Calibri" pitchFamily="34" charset="-120"/>
-              </a:rPr>
-              <a:t>partly independent error sources</a:t>
-            </a:r>
-            <a:pPr indent="0" marL="0">
-              <a:buNone/>
-            </a:pPr>
-            <a:r>
-              <a:rPr lang="en-US" sz="1800" dirty="0">
-                <a:solidFill>
-                  <a:srgbClr val="1A1A1A"/>
-                </a:solidFill>
-                <a:latin typeface="Calibri" pitchFamily="34" charset="0"/>
-                <a:ea typeface="Calibri" pitchFamily="34" charset="-122"/>
-                <a:cs typeface="Calibri" pitchFamily="34" charset="-120"/>
-              </a:rPr>
-              <a:t> — model reads game state, market absorbs sentiment + inside flow.</a:t>
-            </a:r>
-            <a:endParaRPr lang="en-US" sz="1800" dirty="0"/>
-          </a:p>
-        </p:txBody>
-      </p:sp>
-      <p:sp>
-        <p:nvSpPr>
-          <p:cNvPr id="7" name="Shape 5"/>
-          <p:cNvSpPr/>
-          <p:nvPr/>
-        </p:nvSpPr>
-        <p:spPr>
-          <a:xfrm>
-            <a:off x="502920" y="3291840"/>
-            <a:ext cx="11247120" cy="1371600"/>
-          </a:xfrm>
-          <a:prstGeom prst="roundRect">
-            <a:avLst>
-              <a:gd name="adj" fmla="val 5333"/>
-            </a:avLst>
+              <a:t>Finding 2: market overshoots p̂_t at p&lt;0.0001 on both event tests.</a:t>
+            </a:r>
+            <a:endParaRPr lang="en-US" sz="1100" dirty="0"/>
+          </a:p>
+        </p:txBody>
+      </p:sp>
+      <p:sp>
+        <p:nvSpPr>
+          <p:cNvPr id="16" name="Shape 14"/>
+          <p:cNvSpPr/>
+          <p:nvPr/>
+        </p:nvSpPr>
+        <p:spPr>
+          <a:xfrm>
+            <a:off x="685800" y="4617720"/>
+            <a:ext cx="384048" cy="384048"/>
+          </a:xfrm>
+          <a:prstGeom prst="ellipse">
+            <a:avLst/>
           </a:prstGeom>
           <a:solidFill>
-            <a:srgbClr val="EEF3F8"/>
+            <a:srgbClr val="EEA02B"/>
           </a:solidFill>
-          <a:ln w="15240">
+          <a:ln w="12700">
             <a:solidFill>
-              <a:srgbClr val="1C7293"/>
+              <a:srgbClr val="EEA02B"/>
             </a:solidFill>
             <a:prstDash val="solid"/>
           </a:ln>
@@ -6052,14 +4440,14 @@
       </p:sp>
       <p:sp>
         <p:nvSpPr>
-          <p:cNvPr id="8" name="Text 6"/>
-          <p:cNvSpPr/>
-          <p:nvPr/>
-        </p:nvSpPr>
-        <p:spPr>
-          <a:xfrm>
-            <a:off x="685800" y="3383280"/>
-            <a:ext cx="10881360" cy="868680"/>
+          <p:cNvPr id="17" name="Text 15"/>
+          <p:cNvSpPr/>
+          <p:nvPr/>
+        </p:nvSpPr>
+        <p:spPr>
+          <a:xfrm>
+            <a:off x="685800" y="4617720"/>
+            <a:ext cx="384048" cy="384048"/>
           </a:xfrm>
           <a:prstGeom prst="rect">
             <a:avLst/>
@@ -6075,300 +4463,7 @@
               <a:buNone/>
             </a:pPr>
             <a:r>
-              <a:rPr lang="en-US" sz="1800" b="1" dirty="0">
-                <a:solidFill>
-                  <a:srgbClr val="0B2545"/>
-                </a:solidFill>
-                <a:latin typeface="Courier New" pitchFamily="34" charset="0"/>
-                <a:ea typeface="Courier New" pitchFamily="34" charset="-122"/>
-                <a:cs typeface="Courier New" pitchFamily="34" charset="-120"/>
-              </a:rPr>
-              <a:t>p̂_aggregate  =  w · p_model  +  ( 1 − w ) · p_market_devig</a:t>
-            </a:r>
-            <a:endParaRPr lang="en-US" sz="1800" dirty="0"/>
-          </a:p>
-        </p:txBody>
-      </p:sp>
-      <p:sp>
-        <p:nvSpPr>
-          <p:cNvPr id="9" name="Text 7"/>
-          <p:cNvSpPr/>
-          <p:nvPr/>
-        </p:nvSpPr>
-        <p:spPr>
-          <a:xfrm>
-            <a:off x="685800" y="4206240"/>
-            <a:ext cx="10881360" cy="365760"/>
-          </a:xfrm>
-          <a:prstGeom prst="rect">
-            <a:avLst/>
-          </a:prstGeom>
-          <a:noFill/>
-          <a:ln/>
-        </p:spPr>
-        <p:txBody>
-          <a:bodyPr wrap="square" rtlCol="0" anchor="ctr"/>
-          <a:lstStyle/>
-          <a:p>
-            <a:pPr algn="ctr" indent="0" marL="0">
-              <a:buNone/>
-            </a:pPr>
-            <a:r>
-              <a:rPr lang="en-US" sz="1200" i="1" dirty="0">
-                <a:solidFill>
-                  <a:srgbClr val="13315C"/>
-                </a:solidFill>
-                <a:latin typeface="Calibri" pitchFamily="34" charset="0"/>
-                <a:ea typeface="Calibri" pitchFamily="34" charset="-122"/>
-                <a:cs typeface="Calibri" pitchFamily="34" charset="-120"/>
-              </a:rPr>
-              <a:t>the 'aggregate' variant (#3 in the planned table) — weight from validation Brier · aggregate's Brier ≤ min(components)</a:t>
-            </a:r>
-            <a:endParaRPr lang="en-US" sz="1200" dirty="0"/>
-          </a:p>
-        </p:txBody>
-      </p:sp>
-      <p:sp>
-        <p:nvSpPr>
-          <p:cNvPr id="10" name="Shape 8"/>
-          <p:cNvSpPr/>
-          <p:nvPr/>
-        </p:nvSpPr>
-        <p:spPr>
-          <a:xfrm>
-            <a:off x="502920" y="4846320"/>
-            <a:ext cx="11247120" cy="1508760"/>
-          </a:xfrm>
-          <a:prstGeom prst="roundRect">
-            <a:avLst>
-              <a:gd name="adj" fmla="val 6061"/>
-            </a:avLst>
-          </a:prstGeom>
-          <a:solidFill>
-            <a:srgbClr val="F6F6F2"/>
-          </a:solidFill>
-          <a:ln w="19050">
-            <a:solidFill>
-              <a:srgbClr val="1C7293"/>
-            </a:solidFill>
-            <a:prstDash val="solid"/>
-          </a:ln>
-        </p:spPr>
-      </p:sp>
-      <p:sp>
-        <p:nvSpPr>
-          <p:cNvPr id="11" name="Text 9"/>
-          <p:cNvSpPr/>
-          <p:nvPr/>
-        </p:nvSpPr>
-        <p:spPr>
-          <a:xfrm>
-            <a:off x="777240" y="4983480"/>
-            <a:ext cx="10698480" cy="365760"/>
-          </a:xfrm>
-          <a:prstGeom prst="rect">
-            <a:avLst/>
-          </a:prstGeom>
-          <a:noFill/>
-          <a:ln/>
-        </p:spPr>
-        <p:txBody>
-          <a:bodyPr wrap="square" rtlCol="0" anchor="ctr"/>
-          <a:lstStyle/>
-          <a:p>
-            <a:pPr indent="0" marL="0">
-              <a:buNone/>
-            </a:pPr>
-            <a:r>
-              <a:rPr lang="en-US" sz="1400" i="1" dirty="0">
-                <a:solidFill>
-                  <a:srgbClr val="13315C"/>
-                </a:solidFill>
-                <a:latin typeface="Calibri" pitchFamily="34" charset="0"/>
-                <a:ea typeface="Calibri" pitchFamily="34" charset="-122"/>
-                <a:cs typeface="Calibri" pitchFamily="34" charset="-120"/>
-              </a:rPr>
-              <a:t>Reframing:</a:t>
-            </a:r>
-            <a:endParaRPr lang="en-US" sz="1400" dirty="0"/>
-          </a:p>
-        </p:txBody>
-      </p:sp>
-      <p:sp>
-        <p:nvSpPr>
-          <p:cNvPr id="12" name="Text 10"/>
-          <p:cNvSpPr/>
-          <p:nvPr/>
-        </p:nvSpPr>
-        <p:spPr>
-          <a:xfrm>
-            <a:off x="777240" y="5349240"/>
-            <a:ext cx="10698480" cy="914400"/>
-          </a:xfrm>
-          <a:prstGeom prst="rect">
-            <a:avLst/>
-          </a:prstGeom>
-          <a:noFill/>
-          <a:ln/>
-        </p:spPr>
-        <p:txBody>
-          <a:bodyPr wrap="square" rtlCol="0" anchor="ctr"/>
-          <a:lstStyle/>
-          <a:p>
-            <a:pPr indent="0" marL="0">
-              <a:buNone/>
-            </a:pPr>
-            <a:r>
-              <a:rPr lang="en-US" sz="1500" dirty="0">
-                <a:solidFill>
-                  <a:srgbClr val="1A1A1A"/>
-                </a:solidFill>
-                <a:latin typeface="Calibri" pitchFamily="34" charset="0"/>
-                <a:ea typeface="Calibri" pitchFamily="34" charset="-122"/>
-                <a:cs typeface="Calibri" pitchFamily="34" charset="-120"/>
-              </a:rPr>
-              <a:t>The model's job isn't to BEAT the market everywhere — it's to COMPLEMENT it in the specific situations (comeback FG, salience 3PT) where the crowd's bias is strongest.</a:t>
-            </a:r>
-            <a:endParaRPr lang="en-US" sz="1500" dirty="0"/>
-          </a:p>
-        </p:txBody>
-      </p:sp>
-      <p:sp>
-        <p:nvSpPr>
-          <p:cNvPr id="13" name="Text 11"/>
-          <p:cNvSpPr/>
-          <p:nvPr/>
-        </p:nvSpPr>
-        <p:spPr>
-          <a:xfrm>
-            <a:off x="502920" y="6492240"/>
-            <a:ext cx="7315200" cy="274320"/>
-          </a:xfrm>
-          <a:prstGeom prst="rect">
-            <a:avLst/>
-          </a:prstGeom>
-          <a:noFill/>
-          <a:ln/>
-        </p:spPr>
-        <p:txBody>
-          <a:bodyPr wrap="square" rtlCol="0" anchor="ctr"/>
-          <a:lstStyle/>
-          <a:p>
-            <a:pPr indent="0" marL="0">
-              <a:buNone/>
-            </a:pPr>
-            <a:r>
-              <a:rPr lang="en-US" sz="1000" dirty="0">
-                <a:solidFill>
-                  <a:srgbClr val="8DA9C4"/>
-                </a:solidFill>
-                <a:latin typeface="Calibri" pitchFamily="34" charset="0"/>
-                <a:ea typeface="Calibri" pitchFamily="34" charset="-122"/>
-                <a:cs typeface="Calibri" pitchFamily="34" charset="-120"/>
-              </a:rPr>
-              <a:t>STATS 211 · NBA Mispricing · Sit &amp; Manathattai</a:t>
-            </a:r>
-            <a:endParaRPr lang="en-US" sz="1000" dirty="0"/>
-          </a:p>
-        </p:txBody>
-      </p:sp>
-      <p:sp>
-        <p:nvSpPr>
-          <p:cNvPr id="14" name="Text 12"/>
-          <p:cNvSpPr/>
-          <p:nvPr/>
-        </p:nvSpPr>
-        <p:spPr>
-          <a:xfrm>
-            <a:off x="11384280" y="6492240"/>
-            <a:ext cx="411480" cy="274320"/>
-          </a:xfrm>
-          <a:prstGeom prst="rect">
-            <a:avLst/>
-          </a:prstGeom>
-          <a:noFill/>
-          <a:ln/>
-        </p:spPr>
-        <p:txBody>
-          <a:bodyPr wrap="square" rtlCol="0" anchor="ctr"/>
-          <a:lstStyle/>
-          <a:p>
-            <a:pPr algn="r" indent="0" marL="0">
-              <a:buNone/>
-            </a:pPr>
-            <a:r>
-              <a:rPr lang="en-US" sz="1000" dirty="0">
-                <a:solidFill>
-                  <a:srgbClr val="8DA9C4"/>
-                </a:solidFill>
-                <a:latin typeface="Calibri" pitchFamily="34" charset="0"/>
-                <a:ea typeface="Calibri" pitchFamily="34" charset="-122"/>
-                <a:cs typeface="Calibri" pitchFamily="34" charset="-120"/>
-              </a:rPr>
-              <a:t>14</a:t>
-            </a:r>
-            <a:endParaRPr lang="en-US" sz="1000" dirty="0"/>
-          </a:p>
-        </p:txBody>
-      </p:sp>
-    </p:spTree>
-  </p:cSld>
-  <p:clrMapOvr>
-    <a:masterClrMapping/>
-  </p:clrMapOvr>
-</p:sld>
-</file>
-
-<file path=ppt/slides/slide15.xml><?xml version="1.0" encoding="utf-8"?>
-<p:sld xmlns:a="http://schemas.openxmlformats.org/drawingml/2006/main" xmlns:r="http://schemas.openxmlformats.org/officeDocument/2006/relationships" xmlns:p="http://schemas.openxmlformats.org/presentationml/2006/main">
-  <p:cSld name="Slide 15">
-    <p:bg>
-      <p:bgPr>
-        <a:solidFill>
-          <a:srgbClr val="FFFFFF"/>
-        </a:solidFill>
-      </p:bgPr>
-    </p:bg>
-    <p:spTree>
-      <p:nvGrpSpPr>
-        <p:cNvPr id="1" name=""/>
-        <p:cNvGrpSpPr/>
-        <p:nvPr/>
-      </p:nvGrpSpPr>
-      <p:grpSpPr>
-        <a:xfrm>
-          <a:off x="0" y="0"/>
-          <a:ext cx="0" cy="0"/>
-          <a:chOff x="0" y="0"/>
-          <a:chExt cx="0" cy="0"/>
-        </a:xfrm>
-      </p:grpSpPr>
-      <p:sp>
-        <p:nvSpPr>
-          <p:cNvPr id="2" name="Text 0"/>
-          <p:cNvSpPr/>
-          <p:nvPr/>
-        </p:nvSpPr>
-        <p:spPr>
-          <a:xfrm>
-            <a:off x="502920" y="228600"/>
-            <a:ext cx="11247120" cy="777240"/>
-          </a:xfrm>
-          <a:prstGeom prst="rect">
-            <a:avLst/>
-          </a:prstGeom>
-          <a:noFill/>
-          <a:ln/>
-        </p:spPr>
-        <p:txBody>
-          <a:bodyPr wrap="square" rtlCol="0" anchor="ctr"/>
-          <a:lstStyle/>
-          <a:p>
-            <a:pPr indent="0" marL="0">
-              <a:buNone/>
-            </a:pPr>
-            <a:r>
-              <a:rPr lang="en-US" sz="2800" b="1" dirty="0">
+              <a:rPr lang="en-US" sz="1300" b="1" dirty="0">
                 <a:solidFill>
                   <a:srgbClr val="0B2545"/>
                 </a:solidFill>
@@ -6376,100 +4471,38 @@
                 <a:ea typeface="Georgia" pitchFamily="34" charset="-122"/>
                 <a:cs typeface="Georgia" pitchFamily="34" charset="-120"/>
               </a:rPr>
-              <a:t>Limitations &amp; future work</a:t>
-            </a:r>
-            <a:endParaRPr lang="en-US" sz="2800" dirty="0"/>
-          </a:p>
-        </p:txBody>
-      </p:sp>
-      <p:sp>
-        <p:nvSpPr>
-          <p:cNvPr id="3" name="Text 1"/>
-          <p:cNvSpPr/>
-          <p:nvPr/>
-        </p:nvSpPr>
-        <p:spPr>
-          <a:xfrm>
-            <a:off x="502920" y="932688"/>
-            <a:ext cx="11247120" cy="365760"/>
-          </a:xfrm>
-          <a:prstGeom prst="rect">
-            <a:avLst/>
-          </a:prstGeom>
-          <a:noFill/>
-          <a:ln/>
-        </p:spPr>
-        <p:txBody>
-          <a:bodyPr wrap="square" rtlCol="0" anchor="ctr"/>
-          <a:lstStyle/>
-          <a:p>
-            <a:pPr indent="0" marL="0">
-              <a:buNone/>
-            </a:pPr>
-            <a:r>
-              <a:rPr lang="en-US" sz="1400" i="1" dirty="0">
-                <a:solidFill>
-                  <a:srgbClr val="13315C"/>
-                </a:solidFill>
-                <a:latin typeface="Calibri" pitchFamily="34" charset="0"/>
-                <a:ea typeface="Calibri" pitchFamily="34" charset="-122"/>
-                <a:cs typeface="Calibri" pitchFamily="34" charset="-120"/>
-              </a:rPr>
-              <a:t>What we'd do next</a:t>
-            </a:r>
-            <a:endParaRPr lang="en-US" sz="1400" dirty="0"/>
-          </a:p>
-        </p:txBody>
-      </p:sp>
-      <p:sp>
-        <p:nvSpPr>
-          <p:cNvPr id="4" name="Shape 2"/>
-          <p:cNvSpPr/>
-          <p:nvPr/>
-        </p:nvSpPr>
-        <p:spPr>
-          <a:xfrm>
-            <a:off x="502920" y="1298448"/>
-            <a:ext cx="11247120" cy="0"/>
-          </a:xfrm>
-          <a:prstGeom prst="line">
-            <a:avLst/>
-          </a:prstGeom>
-          <a:noFill/>
-          <a:ln w="25400">
-            <a:solidFill>
-              <a:srgbClr val="1C7293"/>
-            </a:solidFill>
-            <a:prstDash val="solid"/>
-          </a:ln>
-        </p:spPr>
-      </p:sp>
-      <p:sp>
-        <p:nvSpPr>
-          <p:cNvPr id="5" name="Text 3"/>
-          <p:cNvSpPr/>
-          <p:nvPr/>
-        </p:nvSpPr>
-        <p:spPr>
-          <a:xfrm>
-            <a:off x="502920" y="1463040"/>
-            <a:ext cx="2926080" cy="457200"/>
-          </a:xfrm>
-          <a:prstGeom prst="rect">
-            <a:avLst/>
-          </a:prstGeom>
-          <a:noFill/>
-          <a:ln/>
-        </p:spPr>
-        <p:txBody>
-          <a:bodyPr wrap="square" rtlCol="0" anchor="ctr"/>
-          <a:lstStyle/>
-          <a:p>
-            <a:pPr indent="0" marL="0">
-              <a:buNone/>
-            </a:pPr>
-            <a:r>
-              <a:rPr lang="en-US" sz="1500" b="1" dirty="0">
+              <a:t>3</a:t>
+            </a:r>
+            <a:endParaRPr lang="en-US" sz="1300" dirty="0"/>
+          </a:p>
+        </p:txBody>
+      </p:sp>
+      <p:sp>
+        <p:nvSpPr>
+          <p:cNvPr id="18" name="Text 16"/>
+          <p:cNvSpPr/>
+          <p:nvPr/>
+        </p:nvSpPr>
+        <p:spPr>
+          <a:xfrm>
+            <a:off x="1188720" y="4617720"/>
+            <a:ext cx="4572000" cy="365760"/>
+          </a:xfrm>
+          <a:prstGeom prst="rect">
+            <a:avLst/>
+          </a:prstGeom>
+          <a:noFill/>
+          <a:ln/>
+        </p:spPr>
+        <p:txBody>
+          <a:bodyPr wrap="square" rtlCol="0" anchor="ctr"/>
+          <a:lstStyle/>
+          <a:p>
+            <a:pPr indent="0" marL="0">
+              <a:buNone/>
+            </a:pPr>
+            <a:r>
+              <a:rPr lang="en-US" sz="1400" b="1" dirty="0">
                 <a:solidFill>
                   <a:srgbClr val="0B2545"/>
                 </a:solidFill>
@@ -6477,38 +4510,38 @@
                 <a:ea typeface="Georgia" pitchFamily="34" charset="-122"/>
                 <a:cs typeface="Georgia" pitchFamily="34" charset="-120"/>
               </a:rPr>
-              <a:t>Method 2 didn't trade</a:t>
-            </a:r>
-            <a:endParaRPr lang="en-US" sz="1500" dirty="0"/>
-          </a:p>
-        </p:txBody>
-      </p:sp>
-      <p:sp>
-        <p:nvSpPr>
-          <p:cNvPr id="6" name="Text 4"/>
-          <p:cNvSpPr/>
-          <p:nvPr/>
-        </p:nvSpPr>
-        <p:spPr>
-          <a:xfrm>
-            <a:off x="3520440" y="1463040"/>
-            <a:ext cx="8229600" cy="914400"/>
-          </a:xfrm>
-          <a:prstGeom prst="rect">
-            <a:avLst/>
-          </a:prstGeom>
-          <a:noFill/>
-          <a:ln/>
-        </p:spPr>
-        <p:txBody>
-          <a:bodyPr wrap="square" rtlCol="0" anchor="ctr"/>
-          <a:lstStyle/>
-          <a:p>
-            <a:pPr indent="0" marL="0">
-              <a:buNone/>
-            </a:pPr>
-            <a:r>
-              <a:rPr lang="en-US" sz="1300" dirty="0">
+              <a:t>Full trading framework</a:t>
+            </a:r>
+            <a:endParaRPr lang="en-US" sz="1400" dirty="0"/>
+          </a:p>
+        </p:txBody>
+      </p:sp>
+      <p:sp>
+        <p:nvSpPr>
+          <p:cNvPr id="19" name="Text 17"/>
+          <p:cNvSpPr/>
+          <p:nvPr/>
+        </p:nvSpPr>
+        <p:spPr>
+          <a:xfrm>
+            <a:off x="1188720" y="4983480"/>
+            <a:ext cx="4572000" cy="548640"/>
+          </a:xfrm>
+          <a:prstGeom prst="rect">
+            <a:avLst/>
+          </a:prstGeom>
+          <a:noFill/>
+          <a:ln/>
+        </p:spPr>
+        <p:txBody>
+          <a:bodyPr wrap="square" rtlCol="0" anchor="ctr"/>
+          <a:lstStyle/>
+          <a:p>
+            <a:pPr indent="0" marL="0">
+              <a:buNone/>
+            </a:pPr>
+            <a:r>
+              <a:rPr lang="en-US" sz="1100" dirty="0">
                 <a:solidFill>
                   <a:srgbClr val="1A1A1A"/>
                 </a:solidFill>
@@ -6516,1334 +4549,21 @@
                 <a:ea typeface="Calibri" pitchFamily="34" charset="-122"/>
                 <a:cs typeface="Calibri" pitchFamily="34" charset="-120"/>
               </a:rPr>
-              <a:t>Method 2 was a statistical diagnostic — proved the bias but did not gate any trades in the backtest. Natural next step: filter Method 1's edges to Method 2's event windows.</a:t>
-            </a:r>
-            <a:endParaRPr lang="en-US" sz="1300" dirty="0"/>
-          </a:p>
-        </p:txBody>
-      </p:sp>
-      <p:sp>
-        <p:nvSpPr>
-          <p:cNvPr id="7" name="Text 5"/>
-          <p:cNvSpPr/>
-          <p:nvPr/>
-        </p:nvSpPr>
-        <p:spPr>
-          <a:xfrm>
-            <a:off x="502920" y="2423160"/>
-            <a:ext cx="2926080" cy="457200"/>
-          </a:xfrm>
-          <a:prstGeom prst="rect">
-            <a:avLst/>
-          </a:prstGeom>
-          <a:noFill/>
-          <a:ln/>
-        </p:spPr>
-        <p:txBody>
-          <a:bodyPr wrap="square" rtlCol="0" anchor="ctr"/>
-          <a:lstStyle/>
-          <a:p>
-            <a:pPr indent="0" marL="0">
-              <a:buNone/>
-            </a:pPr>
-            <a:r>
-              <a:rPr lang="en-US" sz="1500" b="1" dirty="0">
-                <a:solidFill>
-                  <a:srgbClr val="0B2545"/>
-                </a:solidFill>
-                <a:latin typeface="Georgia" pitchFamily="34" charset="0"/>
-                <a:ea typeface="Georgia" pitchFamily="34" charset="-122"/>
-                <a:cs typeface="Georgia" pitchFamily="34" charset="-120"/>
-              </a:rPr>
-              <a:t>Sample size</a:t>
-            </a:r>
-            <a:endParaRPr lang="en-US" sz="1500" dirty="0"/>
-          </a:p>
-        </p:txBody>
-      </p:sp>
-      <p:sp>
-        <p:nvSpPr>
-          <p:cNvPr id="8" name="Text 6"/>
-          <p:cNvSpPr/>
-          <p:nvPr/>
-        </p:nvSpPr>
-        <p:spPr>
-          <a:xfrm>
-            <a:off x="3520440" y="2423160"/>
-            <a:ext cx="8229600" cy="914400"/>
-          </a:xfrm>
-          <a:prstGeom prst="rect">
-            <a:avLst/>
-          </a:prstGeom>
-          <a:noFill/>
-          <a:ln/>
-        </p:spPr>
-        <p:txBody>
-          <a:bodyPr wrap="square" rtlCol="0" anchor="ctr"/>
-          <a:lstStyle/>
-          <a:p>
-            <a:pPr indent="0" marL="0">
-              <a:buNone/>
-            </a:pPr>
-            <a:r>
-              <a:rPr lang="en-US" sz="1300" dirty="0">
-                <a:solidFill>
-                  <a:srgbClr val="1A1A1A"/>
-                </a:solidFill>
-                <a:latin typeface="Calibri" pitchFamily="34" charset="0"/>
-                <a:ea typeface="Calibri" pitchFamily="34" charset="-122"/>
-                <a:cs typeface="Calibri" pitchFamily="34" charset="-120"/>
-              </a:rPr>
-              <a:t>Powered backtest needs ~1,000 liquid-market games. Paid the-odds-api historical (~$59, one month) or playoff capture (free, accumulating).</a:t>
-            </a:r>
-            <a:endParaRPr lang="en-US" sz="1300" dirty="0"/>
-          </a:p>
-        </p:txBody>
-      </p:sp>
-      <p:sp>
-        <p:nvSpPr>
-          <p:cNvPr id="9" name="Text 7"/>
-          <p:cNvSpPr/>
-          <p:nvPr/>
-        </p:nvSpPr>
-        <p:spPr>
-          <a:xfrm>
-            <a:off x="502920" y="3383280"/>
-            <a:ext cx="2926080" cy="457200"/>
-          </a:xfrm>
-          <a:prstGeom prst="rect">
-            <a:avLst/>
-          </a:prstGeom>
-          <a:noFill/>
-          <a:ln/>
-        </p:spPr>
-        <p:txBody>
-          <a:bodyPr wrap="square" rtlCol="0" anchor="ctr"/>
-          <a:lstStyle/>
-          <a:p>
-            <a:pPr indent="0" marL="0">
-              <a:buNone/>
-            </a:pPr>
-            <a:r>
-              <a:rPr lang="en-US" sz="1500" b="1" dirty="0">
-                <a:solidFill>
-                  <a:srgbClr val="0B2545"/>
-                </a:solidFill>
-                <a:latin typeface="Georgia" pitchFamily="34" charset="0"/>
-                <a:ea typeface="Georgia" pitchFamily="34" charset="-122"/>
-                <a:cs typeface="Georgia" pitchFamily="34" charset="-120"/>
-              </a:rPr>
-              <a:t>Horizon</a:t>
-            </a:r>
-            <a:endParaRPr lang="en-US" sz="1500" dirty="0"/>
-          </a:p>
-        </p:txBody>
-      </p:sp>
-      <p:sp>
-        <p:nvSpPr>
-          <p:cNvPr id="10" name="Text 8"/>
-          <p:cNvSpPr/>
-          <p:nvPr/>
-        </p:nvSpPr>
-        <p:spPr>
-          <a:xfrm>
-            <a:off x="3520440" y="3383280"/>
-            <a:ext cx="8229600" cy="914400"/>
-          </a:xfrm>
-          <a:prstGeom prst="rect">
-            <a:avLst/>
-          </a:prstGeom>
-          <a:noFill/>
-          <a:ln/>
-        </p:spPr>
-        <p:txBody>
-          <a:bodyPr wrap="square" rtlCol="0" anchor="ctr"/>
-          <a:lstStyle/>
-          <a:p>
-            <a:pPr indent="0" marL="0">
-              <a:buNone/>
-            </a:pPr>
-            <a:r>
-              <a:rPr lang="en-US" sz="1300" dirty="0">
-                <a:solidFill>
-                  <a:srgbClr val="1A1A1A"/>
-                </a:solidFill>
-                <a:latin typeface="Calibri" pitchFamily="34" charset="0"/>
-                <a:ea typeface="Calibri" pitchFamily="34" charset="-122"/>
-                <a:cs typeface="Calibri" pitchFamily="34" charset="-120"/>
-              </a:rPr>
-              <a:t>Model is 1st-half-only; live demo extended to full-game via parallel model. 2nd-half coverage requires rebuilding snapshots.</a:t>
-            </a:r>
-            <a:endParaRPr lang="en-US" sz="1300" dirty="0"/>
-          </a:p>
-        </p:txBody>
-      </p:sp>
-      <p:sp>
-        <p:nvSpPr>
-          <p:cNvPr id="11" name="Text 9"/>
-          <p:cNvSpPr/>
-          <p:nvPr/>
-        </p:nvSpPr>
-        <p:spPr>
-          <a:xfrm>
-            <a:off x="502920" y="4343400"/>
-            <a:ext cx="2926080" cy="457200"/>
-          </a:xfrm>
-          <a:prstGeom prst="rect">
-            <a:avLst/>
-          </a:prstGeom>
-          <a:noFill/>
-          <a:ln/>
-        </p:spPr>
-        <p:txBody>
-          <a:bodyPr wrap="square" rtlCol="0" anchor="ctr"/>
-          <a:lstStyle/>
-          <a:p>
-            <a:pPr indent="0" marL="0">
-              <a:buNone/>
-            </a:pPr>
-            <a:r>
-              <a:rPr lang="en-US" sz="1500" b="1" dirty="0">
-                <a:solidFill>
-                  <a:srgbClr val="0B2545"/>
-                </a:solidFill>
-                <a:latin typeface="Georgia" pitchFamily="34" charset="0"/>
-                <a:ea typeface="Georgia" pitchFamily="34" charset="-122"/>
-                <a:cs typeface="Georgia" pitchFamily="34" charset="-120"/>
-              </a:rPr>
-              <a:t>Market reactivity</a:t>
-            </a:r>
-            <a:endParaRPr lang="en-US" sz="1500" dirty="0"/>
-          </a:p>
-        </p:txBody>
-      </p:sp>
-      <p:sp>
-        <p:nvSpPr>
-          <p:cNvPr id="12" name="Text 10"/>
-          <p:cNvSpPr/>
-          <p:nvPr/>
-        </p:nvSpPr>
-        <p:spPr>
-          <a:xfrm>
-            <a:off x="3520440" y="4343400"/>
-            <a:ext cx="8229600" cy="914400"/>
-          </a:xfrm>
-          <a:prstGeom prst="rect">
-            <a:avLst/>
-          </a:prstGeom>
-          <a:noFill/>
-          <a:ln/>
-        </p:spPr>
-        <p:txBody>
-          <a:bodyPr wrap="square" rtlCol="0" anchor="ctr"/>
-          <a:lstStyle/>
-          <a:p>
-            <a:pPr indent="0" marL="0">
-              <a:buNone/>
-            </a:pPr>
-            <a:r>
-              <a:rPr lang="en-US" sz="1300" dirty="0">
-                <a:solidFill>
-                  <a:srgbClr val="1A1A1A"/>
-                </a:solidFill>
-                <a:latin typeface="Calibri" pitchFamily="34" charset="0"/>
-                <a:ea typeface="Calibri" pitchFamily="34" charset="-122"/>
-                <a:cs typeface="Calibri" pitchFamily="34" charset="-120"/>
-              </a:rPr>
-              <a:t>Real deployment would face adverse selection + sportsbook limits. Kalshi (peer-to-peer) sidesteps the account-limit issue.</a:t>
-            </a:r>
-            <a:endParaRPr lang="en-US" sz="1300" dirty="0"/>
-          </a:p>
-        </p:txBody>
-      </p:sp>
-      <p:sp>
-        <p:nvSpPr>
-          <p:cNvPr id="13" name="Text 11"/>
-          <p:cNvSpPr/>
-          <p:nvPr/>
-        </p:nvSpPr>
-        <p:spPr>
-          <a:xfrm>
-            <a:off x="502920" y="5303520"/>
-            <a:ext cx="2926080" cy="457200"/>
-          </a:xfrm>
-          <a:prstGeom prst="rect">
-            <a:avLst/>
-          </a:prstGeom>
-          <a:noFill/>
-          <a:ln/>
-        </p:spPr>
-        <p:txBody>
-          <a:bodyPr wrap="square" rtlCol="0" anchor="ctr"/>
-          <a:lstStyle/>
-          <a:p>
-            <a:pPr indent="0" marL="0">
-              <a:buNone/>
-            </a:pPr>
-            <a:r>
-              <a:rPr lang="en-US" sz="1500" b="1" dirty="0">
-                <a:solidFill>
-                  <a:srgbClr val="0B2545"/>
-                </a:solidFill>
-                <a:latin typeface="Georgia" pitchFamily="34" charset="0"/>
-                <a:ea typeface="Georgia" pitchFamily="34" charset="-122"/>
-                <a:cs typeface="Georgia" pitchFamily="34" charset="-120"/>
-              </a:rPr>
-              <a:t>Other 4 planned methods</a:t>
-            </a:r>
-            <a:endParaRPr lang="en-US" sz="1500" dirty="0"/>
-          </a:p>
-        </p:txBody>
-      </p:sp>
-      <p:sp>
-        <p:nvSpPr>
-          <p:cNvPr id="14" name="Text 12"/>
-          <p:cNvSpPr/>
-          <p:nvPr/>
-        </p:nvSpPr>
-        <p:spPr>
-          <a:xfrm>
-            <a:off x="3520440" y="5303520"/>
-            <a:ext cx="8229600" cy="914400"/>
-          </a:xfrm>
-          <a:prstGeom prst="rect">
-            <a:avLst/>
-          </a:prstGeom>
-          <a:noFill/>
-          <a:ln/>
-        </p:spPr>
-        <p:txBody>
-          <a:bodyPr wrap="square" rtlCol="0" anchor="ctr"/>
-          <a:lstStyle/>
-          <a:p>
-            <a:pPr indent="0" marL="0">
-              <a:buNone/>
-            </a:pPr>
-            <a:r>
-              <a:rPr lang="en-US" sz="1300" dirty="0">
-                <a:solidFill>
-                  <a:srgbClr val="1A1A1A"/>
-                </a:solidFill>
-                <a:latin typeface="Calibri" pitchFamily="34" charset="0"/>
-                <a:ea typeface="Calibri" pitchFamily="34" charset="-122"/>
-                <a:cs typeface="Calibri" pitchFamily="34" charset="-120"/>
-              </a:rPr>
-              <a:t>Architecturally ready in the shared eval harness; need multi-venue in-play history to fit &amp; evaluate.</a:t>
-            </a:r>
-            <a:endParaRPr lang="en-US" sz="1300" dirty="0"/>
-          </a:p>
-        </p:txBody>
-      </p:sp>
-      <p:sp>
-        <p:nvSpPr>
-          <p:cNvPr id="15" name="Text 13"/>
-          <p:cNvSpPr/>
-          <p:nvPr/>
-        </p:nvSpPr>
-        <p:spPr>
-          <a:xfrm>
-            <a:off x="502920" y="6492240"/>
-            <a:ext cx="7315200" cy="274320"/>
-          </a:xfrm>
-          <a:prstGeom prst="rect">
-            <a:avLst/>
-          </a:prstGeom>
-          <a:noFill/>
-          <a:ln/>
-        </p:spPr>
-        <p:txBody>
-          <a:bodyPr wrap="square" rtlCol="0" anchor="ctr"/>
-          <a:lstStyle/>
-          <a:p>
-            <a:pPr indent="0" marL="0">
-              <a:buNone/>
-            </a:pPr>
-            <a:r>
-              <a:rPr lang="en-US" sz="1000" dirty="0">
-                <a:solidFill>
-                  <a:srgbClr val="8DA9C4"/>
-                </a:solidFill>
-                <a:latin typeface="Calibri" pitchFamily="34" charset="0"/>
-                <a:ea typeface="Calibri" pitchFamily="34" charset="-122"/>
-                <a:cs typeface="Calibri" pitchFamily="34" charset="-120"/>
-              </a:rPr>
-              <a:t>STATS 211 · NBA Mispricing · Sit &amp; Manathattai</a:t>
-            </a:r>
-            <a:endParaRPr lang="en-US" sz="1000" dirty="0"/>
-          </a:p>
-        </p:txBody>
-      </p:sp>
-      <p:sp>
-        <p:nvSpPr>
-          <p:cNvPr id="16" name="Text 14"/>
-          <p:cNvSpPr/>
-          <p:nvPr/>
-        </p:nvSpPr>
-        <p:spPr>
-          <a:xfrm>
-            <a:off x="11384280" y="6492240"/>
-            <a:ext cx="411480" cy="274320"/>
-          </a:xfrm>
-          <a:prstGeom prst="rect">
-            <a:avLst/>
-          </a:prstGeom>
-          <a:noFill/>
-          <a:ln/>
-        </p:spPr>
-        <p:txBody>
-          <a:bodyPr wrap="square" rtlCol="0" anchor="ctr"/>
-          <a:lstStyle/>
-          <a:p>
-            <a:pPr algn="r" indent="0" marL="0">
-              <a:buNone/>
-            </a:pPr>
-            <a:r>
-              <a:rPr lang="en-US" sz="1000" dirty="0">
-                <a:solidFill>
-                  <a:srgbClr val="8DA9C4"/>
-                </a:solidFill>
-                <a:latin typeface="Calibri" pitchFamily="34" charset="0"/>
-                <a:ea typeface="Calibri" pitchFamily="34" charset="-122"/>
-                <a:cs typeface="Calibri" pitchFamily="34" charset="-120"/>
-              </a:rPr>
-              <a:t>15</a:t>
-            </a:r>
-            <a:endParaRPr lang="en-US" sz="1000" dirty="0"/>
-          </a:p>
-        </p:txBody>
-      </p:sp>
-    </p:spTree>
-  </p:cSld>
-  <p:clrMapOvr>
-    <a:masterClrMapping/>
-  </p:clrMapOvr>
-</p:sld>
-</file>
-
-<file path=ppt/slides/slide16.xml><?xml version="1.0" encoding="utf-8"?>
-<p:sld xmlns:a="http://schemas.openxmlformats.org/drawingml/2006/main" xmlns:r="http://schemas.openxmlformats.org/officeDocument/2006/relationships" xmlns:p="http://schemas.openxmlformats.org/presentationml/2006/main">
-  <p:cSld name="Slide 16">
-    <p:bg>
-      <p:bgPr>
-        <a:solidFill>
-          <a:srgbClr val="FFFFFF"/>
-        </a:solidFill>
-      </p:bgPr>
-    </p:bg>
-    <p:spTree>
-      <p:nvGrpSpPr>
-        <p:cNvPr id="1" name=""/>
-        <p:cNvGrpSpPr/>
-        <p:nvPr/>
-      </p:nvGrpSpPr>
-      <p:grpSpPr>
-        <a:xfrm>
-          <a:off x="0" y="0"/>
-          <a:ext cx="0" cy="0"/>
-          <a:chOff x="0" y="0"/>
-          <a:chExt cx="0" cy="0"/>
-        </a:xfrm>
-      </p:grpSpPr>
-      <p:sp>
-        <p:nvSpPr>
-          <p:cNvPr id="2" name="Text 0"/>
-          <p:cNvSpPr/>
-          <p:nvPr/>
-        </p:nvSpPr>
-        <p:spPr>
-          <a:xfrm>
-            <a:off x="502920" y="228600"/>
-            <a:ext cx="11247120" cy="777240"/>
-          </a:xfrm>
-          <a:prstGeom prst="rect">
-            <a:avLst/>
-          </a:prstGeom>
-          <a:noFill/>
-          <a:ln/>
-        </p:spPr>
-        <p:txBody>
-          <a:bodyPr wrap="square" rtlCol="0" anchor="ctr"/>
-          <a:lstStyle/>
-          <a:p>
-            <a:pPr indent="0" marL="0">
-              <a:buNone/>
-            </a:pPr>
-            <a:r>
-              <a:rPr lang="en-US" sz="2800" b="1" dirty="0">
-                <a:solidFill>
-                  <a:srgbClr val="0B2545"/>
-                </a:solidFill>
-                <a:latin typeface="Georgia" pitchFamily="34" charset="0"/>
-                <a:ea typeface="Georgia" pitchFamily="34" charset="-122"/>
-                <a:cs typeface="Georgia" pitchFamily="34" charset="-120"/>
-              </a:rPr>
-              <a:t>Verdict · what works + can it make money?</a:t>
-            </a:r>
-            <a:endParaRPr lang="en-US" sz="2800" dirty="0"/>
-          </a:p>
-        </p:txBody>
-      </p:sp>
-      <p:sp>
-        <p:nvSpPr>
-          <p:cNvPr id="3" name="Text 1"/>
-          <p:cNvSpPr/>
-          <p:nvPr/>
-        </p:nvSpPr>
-        <p:spPr>
-          <a:xfrm>
-            <a:off x="502920" y="932688"/>
-            <a:ext cx="11247120" cy="365760"/>
-          </a:xfrm>
-          <a:prstGeom prst="rect">
-            <a:avLst/>
-          </a:prstGeom>
-          <a:noFill/>
-          <a:ln/>
-        </p:spPr>
-        <p:txBody>
-          <a:bodyPr wrap="square" rtlCol="0" anchor="ctr"/>
-          <a:lstStyle/>
-          <a:p>
-            <a:pPr indent="0" marL="0">
-              <a:buNone/>
-            </a:pPr>
-            <a:r>
-              <a:rPr lang="en-US" sz="1400" i="1" dirty="0">
-                <a:solidFill>
-                  <a:srgbClr val="13315C"/>
-                </a:solidFill>
-                <a:latin typeface="Calibri" pitchFamily="34" charset="0"/>
-                <a:ea typeface="Calibri" pitchFamily="34" charset="-122"/>
-                <a:cs typeface="Calibri" pitchFamily="34" charset="-120"/>
-              </a:rPr>
-              <a:t>The two questions, answered honestly</a:t>
-            </a:r>
-            <a:endParaRPr lang="en-US" sz="1400" dirty="0"/>
-          </a:p>
-        </p:txBody>
-      </p:sp>
-      <p:sp>
-        <p:nvSpPr>
-          <p:cNvPr id="4" name="Shape 2"/>
-          <p:cNvSpPr/>
-          <p:nvPr/>
-        </p:nvSpPr>
-        <p:spPr>
-          <a:xfrm>
-            <a:off x="502920" y="1298448"/>
-            <a:ext cx="11247120" cy="0"/>
-          </a:xfrm>
-          <a:prstGeom prst="line">
-            <a:avLst/>
-          </a:prstGeom>
-          <a:noFill/>
-          <a:ln w="25400">
-            <a:solidFill>
-              <a:srgbClr val="1C7293"/>
-            </a:solidFill>
-            <a:prstDash val="solid"/>
-          </a:ln>
-        </p:spPr>
-      </p:sp>
-      <p:sp>
-        <p:nvSpPr>
-          <p:cNvPr id="5" name="Shape 3"/>
-          <p:cNvSpPr/>
-          <p:nvPr/>
-        </p:nvSpPr>
-        <p:spPr>
-          <a:xfrm>
-            <a:off x="502920" y="1417320"/>
-            <a:ext cx="5486400" cy="4846320"/>
-          </a:xfrm>
-          <a:prstGeom prst="roundRect">
-            <a:avLst>
-              <a:gd name="adj" fmla="val 1887"/>
-            </a:avLst>
-          </a:prstGeom>
-          <a:solidFill>
-            <a:srgbClr val="F6F6F2"/>
-          </a:solidFill>
-          <a:ln w="19050">
-            <a:solidFill>
-              <a:srgbClr val="1C7293"/>
-            </a:solidFill>
-            <a:prstDash val="solid"/>
-          </a:ln>
-        </p:spPr>
-      </p:sp>
-      <p:sp>
-        <p:nvSpPr>
-          <p:cNvPr id="6" name="Text 4"/>
-          <p:cNvSpPr/>
-          <p:nvPr/>
-        </p:nvSpPr>
-        <p:spPr>
-          <a:xfrm>
-            <a:off x="685800" y="1554480"/>
-            <a:ext cx="5120640" cy="365760"/>
-          </a:xfrm>
-          <a:prstGeom prst="rect">
-            <a:avLst/>
-          </a:prstGeom>
-          <a:noFill/>
-          <a:ln/>
-        </p:spPr>
-        <p:txBody>
-          <a:bodyPr wrap="square" rtlCol="0" anchor="ctr"/>
-          <a:lstStyle/>
-          <a:p>
-            <a:pPr indent="0" marL="0">
-              <a:buNone/>
-            </a:pPr>
-            <a:r>
-              <a:rPr lang="en-US" sz="1200" b="1" dirty="0">
-                <a:solidFill>
-                  <a:srgbClr val="13315C"/>
-                </a:solidFill>
-                <a:latin typeface="Calibri" pitchFamily="34" charset="0"/>
-                <a:ea typeface="Calibri" pitchFamily="34" charset="-122"/>
-                <a:cs typeface="Calibri" pitchFamily="34" charset="-120"/>
-              </a:rPr>
-              <a:t>STRONGEST FINDING</a:t>
-            </a:r>
-            <a:endParaRPr lang="en-US" sz="1200" dirty="0"/>
-          </a:p>
-        </p:txBody>
-      </p:sp>
-      <p:sp>
-        <p:nvSpPr>
-          <p:cNvPr id="7" name="Text 5"/>
-          <p:cNvSpPr/>
-          <p:nvPr/>
-        </p:nvSpPr>
-        <p:spPr>
-          <a:xfrm>
-            <a:off x="685800" y="1920240"/>
-            <a:ext cx="5120640" cy="502920"/>
-          </a:xfrm>
-          <a:prstGeom prst="rect">
-            <a:avLst/>
-          </a:prstGeom>
-          <a:noFill/>
-          <a:ln/>
-        </p:spPr>
-        <p:txBody>
-          <a:bodyPr wrap="square" rtlCol="0" anchor="ctr"/>
-          <a:lstStyle/>
-          <a:p>
-            <a:pPr indent="0" marL="0">
-              <a:buNone/>
-            </a:pPr>
-            <a:r>
-              <a:rPr lang="en-US" sz="2000" b="1" dirty="0">
-                <a:solidFill>
-                  <a:srgbClr val="0B2545"/>
-                </a:solidFill>
-                <a:latin typeface="Georgia" pitchFamily="34" charset="0"/>
-                <a:ea typeface="Georgia" pitchFamily="34" charset="-122"/>
-                <a:cs typeface="Georgia" pitchFamily="34" charset="-120"/>
-              </a:rPr>
-              <a:t>Method 2 · overreaction test</a:t>
-            </a:r>
-            <a:endParaRPr lang="en-US" sz="2000" dirty="0"/>
-          </a:p>
-        </p:txBody>
-      </p:sp>
-      <p:sp>
-        <p:nvSpPr>
-          <p:cNvPr id="8" name="Text 6"/>
-          <p:cNvSpPr/>
-          <p:nvPr/>
-        </p:nvSpPr>
-        <p:spPr>
-          <a:xfrm>
-            <a:off x="685800" y="2423160"/>
-            <a:ext cx="5120640" cy="777240"/>
-          </a:xfrm>
-          <a:prstGeom prst="rect">
-            <a:avLst/>
-          </a:prstGeom>
-          <a:noFill/>
-          <a:ln/>
-        </p:spPr>
-        <p:txBody>
-          <a:bodyPr wrap="square" rtlCol="0" anchor="ctr"/>
-          <a:lstStyle/>
-          <a:p>
-            <a:pPr indent="0" marL="0">
-              <a:buNone/>
-            </a:pPr>
-            <a:r>
-              <a:rPr lang="en-US" sz="1300" i="1" dirty="0">
-                <a:solidFill>
-                  <a:srgbClr val="13315C"/>
-                </a:solidFill>
-                <a:latin typeface="Calibri" pitchFamily="34" charset="0"/>
-                <a:ea typeface="Calibri" pitchFamily="34" charset="-122"/>
-                <a:cs typeface="Calibri" pitchFamily="34" charset="-120"/>
-              </a:rPr>
-              <a:t>the diagnostic that confirmed the bias is statistically real on the held-out season  ·  did not drive trades (footnote)</a:t>
-            </a:r>
-            <a:endParaRPr lang="en-US" sz="1300" dirty="0"/>
-          </a:p>
-        </p:txBody>
-      </p:sp>
-      <p:graphicFrame>
-        <p:nvGraphicFramePr>
-          <p:cNvPr id="17" name="Table 0"/>
-          <p:cNvGraphicFramePr>
-            <a:graphicFrameLocks noGrp="1"/>
-          </p:cNvGraphicFramePr>
-          <p:nvPr>
-            <p:extLst>
-              <p:ext uri="{D42A27DB-BD31-4B8C-83A1-F6EECF244321}">
-                <p14:modId xmlns:p14="http://schemas.microsoft.com/office/powerpoint/2010/main" val="1579011935"/>
-              </p:ext>
-            </p:extLst>
-          </p:nvPr>
-        </p:nvGraphicFramePr>
-        <p:xfrm>
-          <a:off x="685800" y="3154680"/>
-          <a:ext cx="5120640" cy="914400"/>
-        </p:xfrm>
-        <a:graphic>
-          <a:graphicData uri="http://schemas.openxmlformats.org/drawingml/2006/table">
-            <a:tbl>
-              <a:tblPr/>
-              <a:tblGrid>
-                <a:gridCol w="2468880"/>
-                <a:gridCol w="1325880"/>
-                <a:gridCol w="1325880"/>
-              </a:tblGrid>
-              <a:tr h="457200">
-                <a:tc>
-                  <a:txBody>
-                    <a:bodyPr/>
-                    <a:lstStyle/>
-                    <a:p>
-                      <a:pPr indent="0" marL="0">
-                        <a:buNone/>
-                      </a:pPr>
-                      <a:r>
-                        <a:rPr lang="en-US" sz="1100" b="1" dirty="0">
-                          <a:solidFill>
-                            <a:srgbClr val="F6F6F2"/>
-                          </a:solidFill>
-                        </a:rPr>
-                        <a:t>Test</a:t>
-                      </a:r>
-                      <a:endParaRPr lang="en-US" sz="1100" dirty="0"/>
-                    </a:p>
-                  </a:txBody>
-                  <a:tcPr marL="91440" marR="91440" marT="45720" marB="45720">
-                    <a:lnL w="12700" cap="flat" cmpd="sng" algn="ctr">
-                      <a:solidFill>
-                        <a:srgbClr val="8DA9C4"/>
-                      </a:solidFill>
-                      <a:prstDash val="solid"/>
-                      <a:round/>
-                      <a:headEnd type="none" w="med" len="med"/>
-                      <a:tailEnd type="none" w="med" len="med"/>
-                    </a:lnL>
-                    <a:lnR w="12700" cap="flat" cmpd="sng" algn="ctr">
-                      <a:solidFill>
-                        <a:srgbClr val="8DA9C4"/>
-                      </a:solidFill>
-                      <a:prstDash val="solid"/>
-                      <a:round/>
-                      <a:headEnd type="none" w="med" len="med"/>
-                      <a:tailEnd type="none" w="med" len="med"/>
-                    </a:lnR>
-                    <a:lnT w="12700" cap="flat" cmpd="sng" algn="ctr">
-                      <a:solidFill>
-                        <a:srgbClr val="8DA9C4"/>
-                      </a:solidFill>
-                      <a:prstDash val="solid"/>
-                      <a:round/>
-                      <a:headEnd type="none" w="med" len="med"/>
-                      <a:tailEnd type="none" w="med" len="med"/>
-                    </a:lnT>
-                    <a:lnB w="12700" cap="flat" cmpd="sng" algn="ctr">
-                      <a:solidFill>
-                        <a:srgbClr val="8DA9C4"/>
-                      </a:solidFill>
-                      <a:prstDash val="solid"/>
-                      <a:round/>
-                      <a:headEnd type="none" w="med" len="med"/>
-                      <a:tailEnd type="none" w="med" len="med"/>
-                    </a:lnB>
-                    <a:solidFill>
-                      <a:srgbClr val="0B2545"/>
-                    </a:solidFill>
-                  </a:tcPr>
-                </a:tc>
-                <a:tc>
-                  <a:txBody>
-                    <a:bodyPr/>
-                    <a:lstStyle/>
-                    <a:p>
-                      <a:pPr algn="ctr" indent="0" marL="0">
-                        <a:buNone/>
-                      </a:pPr>
-                      <a:r>
-                        <a:rPr lang="en-US" sz="1100" b="1" dirty="0">
-                          <a:solidFill>
-                            <a:srgbClr val="F6F6F2"/>
-                          </a:solidFill>
-                        </a:rPr>
-                        <a:t>Shift</a:t>
-                      </a:r>
-                      <a:endParaRPr lang="en-US" sz="1100" dirty="0"/>
-                    </a:p>
-                  </a:txBody>
-                  <a:tcPr marL="91440" marR="91440" marT="45720" marB="45720">
-                    <a:lnL w="12700" cap="flat" cmpd="sng" algn="ctr">
-                      <a:solidFill>
-                        <a:srgbClr val="8DA9C4"/>
-                      </a:solidFill>
-                      <a:prstDash val="solid"/>
-                      <a:round/>
-                      <a:headEnd type="none" w="med" len="med"/>
-                      <a:tailEnd type="none" w="med" len="med"/>
-                    </a:lnL>
-                    <a:lnR w="12700" cap="flat" cmpd="sng" algn="ctr">
-                      <a:solidFill>
-                        <a:srgbClr val="8DA9C4"/>
-                      </a:solidFill>
-                      <a:prstDash val="solid"/>
-                      <a:round/>
-                      <a:headEnd type="none" w="med" len="med"/>
-                      <a:tailEnd type="none" w="med" len="med"/>
-                    </a:lnR>
-                    <a:lnT w="12700" cap="flat" cmpd="sng" algn="ctr">
-                      <a:solidFill>
-                        <a:srgbClr val="8DA9C4"/>
-                      </a:solidFill>
-                      <a:prstDash val="solid"/>
-                      <a:round/>
-                      <a:headEnd type="none" w="med" len="med"/>
-                      <a:tailEnd type="none" w="med" len="med"/>
-                    </a:lnT>
-                    <a:lnB w="12700" cap="flat" cmpd="sng" algn="ctr">
-                      <a:solidFill>
-                        <a:srgbClr val="8DA9C4"/>
-                      </a:solidFill>
-                      <a:prstDash val="solid"/>
-                      <a:round/>
-                      <a:headEnd type="none" w="med" len="med"/>
-                      <a:tailEnd type="none" w="med" len="med"/>
-                    </a:lnB>
-                    <a:solidFill>
-                      <a:srgbClr val="0B2545"/>
-                    </a:solidFill>
-                  </a:tcPr>
-                </a:tc>
-                <a:tc>
-                  <a:txBody>
-                    <a:bodyPr/>
-                    <a:lstStyle/>
-                    <a:p>
-                      <a:pPr algn="ctr" indent="0" marL="0">
-                        <a:buNone/>
-                      </a:pPr>
-                      <a:r>
-                        <a:rPr lang="en-US" sz="1100" b="1" dirty="0">
-                          <a:solidFill>
-                            <a:srgbClr val="F6F6F2"/>
-                          </a:solidFill>
-                        </a:rPr>
-                        <a:t>p-value</a:t>
-                      </a:r>
-                      <a:endParaRPr lang="en-US" sz="1100" dirty="0"/>
-                    </a:p>
-                  </a:txBody>
-                  <a:tcPr marL="91440" marR="91440" marT="45720" marB="45720">
-                    <a:lnL w="12700" cap="flat" cmpd="sng" algn="ctr">
-                      <a:solidFill>
-                        <a:srgbClr val="8DA9C4"/>
-                      </a:solidFill>
-                      <a:prstDash val="solid"/>
-                      <a:round/>
-                      <a:headEnd type="none" w="med" len="med"/>
-                      <a:tailEnd type="none" w="med" len="med"/>
-                    </a:lnL>
-                    <a:lnR w="12700" cap="flat" cmpd="sng" algn="ctr">
-                      <a:solidFill>
-                        <a:srgbClr val="8DA9C4"/>
-                      </a:solidFill>
-                      <a:prstDash val="solid"/>
-                      <a:round/>
-                      <a:headEnd type="none" w="med" len="med"/>
-                      <a:tailEnd type="none" w="med" len="med"/>
-                    </a:lnR>
-                    <a:lnT w="12700" cap="flat" cmpd="sng" algn="ctr">
-                      <a:solidFill>
-                        <a:srgbClr val="8DA9C4"/>
-                      </a:solidFill>
-                      <a:prstDash val="solid"/>
-                      <a:round/>
-                      <a:headEnd type="none" w="med" len="med"/>
-                      <a:tailEnd type="none" w="med" len="med"/>
-                    </a:lnT>
-                    <a:lnB w="12700" cap="flat" cmpd="sng" algn="ctr">
-                      <a:solidFill>
-                        <a:srgbClr val="8DA9C4"/>
-                      </a:solidFill>
-                      <a:prstDash val="solid"/>
-                      <a:round/>
-                      <a:headEnd type="none" w="med" len="med"/>
-                      <a:tailEnd type="none" w="med" len="med"/>
-                    </a:lnB>
-                    <a:solidFill>
-                      <a:srgbClr val="0B2545"/>
-                    </a:solidFill>
-                  </a:tcPr>
-                </a:tc>
-              </a:tr>
-              <a:tr h="457200">
-                <a:tc>
-                  <a:txBody>
-                    <a:bodyPr/>
-                    <a:lstStyle/>
-                    <a:p>
-                      <a:pPr indent="0" marL="0">
-                        <a:buNone/>
-                      </a:pPr>
-                      <a:r>
-                        <a:rPr lang="en-US" sz="1200" b="1" dirty="0">
-                          <a:solidFill>
-                            <a:srgbClr val="0B2545"/>
-                          </a:solidFill>
-                        </a:rPr>
-                        <a:t>Comeback FG (trail 10–15)</a:t>
-                      </a:r>
-                      <a:endParaRPr lang="en-US" sz="1200" dirty="0"/>
-                    </a:p>
-                  </a:txBody>
-                  <a:tcPr marL="91440" marR="91440" marT="45720" marB="45720">
-                    <a:lnL w="12700" cap="flat" cmpd="sng" algn="ctr">
-                      <a:solidFill>
-                        <a:srgbClr val="8DA9C4"/>
-                      </a:solidFill>
-                      <a:prstDash val="solid"/>
-                      <a:round/>
-                      <a:headEnd type="none" w="med" len="med"/>
-                      <a:tailEnd type="none" w="med" len="med"/>
-                    </a:lnL>
-                    <a:lnR w="12700" cap="flat" cmpd="sng" algn="ctr">
-                      <a:solidFill>
-                        <a:srgbClr val="8DA9C4"/>
-                      </a:solidFill>
-                      <a:prstDash val="solid"/>
-                      <a:round/>
-                      <a:headEnd type="none" w="med" len="med"/>
-                      <a:tailEnd type="none" w="med" len="med"/>
-                    </a:lnR>
-                    <a:lnT w="12700" cap="flat" cmpd="sng" algn="ctr">
-                      <a:solidFill>
-                        <a:srgbClr val="8DA9C4"/>
-                      </a:solidFill>
-                      <a:prstDash val="solid"/>
-                      <a:round/>
-                      <a:headEnd type="none" w="med" len="med"/>
-                      <a:tailEnd type="none" w="med" len="med"/>
-                    </a:lnT>
-                    <a:lnB w="12700" cap="flat" cmpd="sng" algn="ctr">
-                      <a:solidFill>
-                        <a:srgbClr val="8DA9C4"/>
-                      </a:solidFill>
-                      <a:prstDash val="solid"/>
-                      <a:round/>
-                      <a:headEnd type="none" w="med" len="med"/>
-                      <a:tailEnd type="none" w="med" len="med"/>
-                    </a:lnB>
-                  </a:tcPr>
-                </a:tc>
-                <a:tc>
-                  <a:txBody>
-                    <a:bodyPr/>
-                    <a:lstStyle/>
-                    <a:p>
-                      <a:pPr algn="ctr" indent="0" marL="0">
-                        <a:buNone/>
-                      </a:pPr>
-                      <a:r>
-                        <a:rPr lang="en-US" sz="1300" b="1" dirty="0">
-                          <a:solidFill>
-                            <a:srgbClr val="EEA02B"/>
-                          </a:solidFill>
-                        </a:rPr>
-                        <a:t>+0.0075</a:t>
-                      </a:r>
-                      <a:endParaRPr lang="en-US" sz="1300" dirty="0"/>
-                    </a:p>
-                  </a:txBody>
-                  <a:tcPr marL="91440" marR="91440" marT="45720" marB="45720">
-                    <a:lnL w="12700" cap="flat" cmpd="sng" algn="ctr">
-                      <a:solidFill>
-                        <a:srgbClr val="8DA9C4"/>
-                      </a:solidFill>
-                      <a:prstDash val="solid"/>
-                      <a:round/>
-                      <a:headEnd type="none" w="med" len="med"/>
-                      <a:tailEnd type="none" w="med" len="med"/>
-                    </a:lnL>
-                    <a:lnR w="12700" cap="flat" cmpd="sng" algn="ctr">
-                      <a:solidFill>
-                        <a:srgbClr val="8DA9C4"/>
-                      </a:solidFill>
-                      <a:prstDash val="solid"/>
-                      <a:round/>
-                      <a:headEnd type="none" w="med" len="med"/>
-                      <a:tailEnd type="none" w="med" len="med"/>
-                    </a:lnR>
-                    <a:lnT w="12700" cap="flat" cmpd="sng" algn="ctr">
-                      <a:solidFill>
-                        <a:srgbClr val="8DA9C4"/>
-                      </a:solidFill>
-                      <a:prstDash val="solid"/>
-                      <a:round/>
-                      <a:headEnd type="none" w="med" len="med"/>
-                      <a:tailEnd type="none" w="med" len="med"/>
-                    </a:lnT>
-                    <a:lnB w="12700" cap="flat" cmpd="sng" algn="ctr">
-                      <a:solidFill>
-                        <a:srgbClr val="8DA9C4"/>
-                      </a:solidFill>
-                      <a:prstDash val="solid"/>
-                      <a:round/>
-                      <a:headEnd type="none" w="med" len="med"/>
-                      <a:tailEnd type="none" w="med" len="med"/>
-                    </a:lnB>
-                  </a:tcPr>
-                </a:tc>
-                <a:tc>
-                  <a:txBody>
-                    <a:bodyPr/>
-                    <a:lstStyle/>
-                    <a:p>
-                      <a:pPr algn="ctr" indent="0" marL="0">
-                        <a:buNone/>
-                      </a:pPr>
-                      <a:r>
-                        <a:rPr lang="en-US" sz="1300" b="1" dirty="0">
-                          <a:solidFill>
-                            <a:srgbClr val="EEA02B"/>
-                          </a:solidFill>
-                        </a:rPr>
-                        <a:t>&lt; 0.0001</a:t>
-                      </a:r>
-                      <a:endParaRPr lang="en-US" sz="1300" dirty="0"/>
-                    </a:p>
-                  </a:txBody>
-                  <a:tcPr marL="91440" marR="91440" marT="45720" marB="45720">
-                    <a:lnL w="12700" cap="flat" cmpd="sng" algn="ctr">
-                      <a:solidFill>
-                        <a:srgbClr val="8DA9C4"/>
-                      </a:solidFill>
-                      <a:prstDash val="solid"/>
-                      <a:round/>
-                      <a:headEnd type="none" w="med" len="med"/>
-                      <a:tailEnd type="none" w="med" len="med"/>
-                    </a:lnL>
-                    <a:lnR w="12700" cap="flat" cmpd="sng" algn="ctr">
-                      <a:solidFill>
-                        <a:srgbClr val="8DA9C4"/>
-                      </a:solidFill>
-                      <a:prstDash val="solid"/>
-                      <a:round/>
-                      <a:headEnd type="none" w="med" len="med"/>
-                      <a:tailEnd type="none" w="med" len="med"/>
-                    </a:lnR>
-                    <a:lnT w="12700" cap="flat" cmpd="sng" algn="ctr">
-                      <a:solidFill>
-                        <a:srgbClr val="8DA9C4"/>
-                      </a:solidFill>
-                      <a:prstDash val="solid"/>
-                      <a:round/>
-                      <a:headEnd type="none" w="med" len="med"/>
-                      <a:tailEnd type="none" w="med" len="med"/>
-                    </a:lnT>
-                    <a:lnB w="12700" cap="flat" cmpd="sng" algn="ctr">
-                      <a:solidFill>
-                        <a:srgbClr val="8DA9C4"/>
-                      </a:solidFill>
-                      <a:prstDash val="solid"/>
-                      <a:round/>
-                      <a:headEnd type="none" w="med" len="med"/>
-                      <a:tailEnd type="none" w="med" len="med"/>
-                    </a:lnB>
-                  </a:tcPr>
-                </a:tc>
-              </a:tr>
-              <a:tr h="457200">
-                <a:tc>
-                  <a:txBody>
-                    <a:bodyPr/>
-                    <a:lstStyle/>
-                    <a:p>
-                      <a:pPr indent="0" marL="0">
-                        <a:buNone/>
-                      </a:pPr>
-                      <a:r>
-                        <a:rPr lang="en-US" sz="1200" b="1" dirty="0">
-                          <a:solidFill>
-                            <a:srgbClr val="0B2545"/>
-                          </a:solidFill>
-                        </a:rPr>
-                        <a:t>Salience 3PT (trail ≥10)</a:t>
-                      </a:r>
-                      <a:endParaRPr lang="en-US" sz="1200" dirty="0"/>
-                    </a:p>
-                  </a:txBody>
-                  <a:tcPr marL="91440" marR="91440" marT="45720" marB="45720">
-                    <a:lnL w="12700" cap="flat" cmpd="sng" algn="ctr">
-                      <a:solidFill>
-                        <a:srgbClr val="8DA9C4"/>
-                      </a:solidFill>
-                      <a:prstDash val="solid"/>
-                      <a:round/>
-                      <a:headEnd type="none" w="med" len="med"/>
-                      <a:tailEnd type="none" w="med" len="med"/>
-                    </a:lnL>
-                    <a:lnR w="12700" cap="flat" cmpd="sng" algn="ctr">
-                      <a:solidFill>
-                        <a:srgbClr val="8DA9C4"/>
-                      </a:solidFill>
-                      <a:prstDash val="solid"/>
-                      <a:round/>
-                      <a:headEnd type="none" w="med" len="med"/>
-                      <a:tailEnd type="none" w="med" len="med"/>
-                    </a:lnR>
-                    <a:lnT w="12700" cap="flat" cmpd="sng" algn="ctr">
-                      <a:solidFill>
-                        <a:srgbClr val="8DA9C4"/>
-                      </a:solidFill>
-                      <a:prstDash val="solid"/>
-                      <a:round/>
-                      <a:headEnd type="none" w="med" len="med"/>
-                      <a:tailEnd type="none" w="med" len="med"/>
-                    </a:lnT>
-                    <a:lnB w="12700" cap="flat" cmpd="sng" algn="ctr">
-                      <a:solidFill>
-                        <a:srgbClr val="8DA9C4"/>
-                      </a:solidFill>
-                      <a:prstDash val="solid"/>
-                      <a:round/>
-                      <a:headEnd type="none" w="med" len="med"/>
-                      <a:tailEnd type="none" w="med" len="med"/>
-                    </a:lnB>
-                  </a:tcPr>
-                </a:tc>
-                <a:tc>
-                  <a:txBody>
-                    <a:bodyPr/>
-                    <a:lstStyle/>
-                    <a:p>
-                      <a:pPr algn="ctr" indent="0" marL="0">
-                        <a:buNone/>
-                      </a:pPr>
-                      <a:r>
-                        <a:rPr lang="en-US" sz="1300" b="1" dirty="0">
-                          <a:solidFill>
-                            <a:srgbClr val="EEA02B"/>
-                          </a:solidFill>
-                        </a:rPr>
-                        <a:t>+0.0138</a:t>
-                      </a:r>
-                      <a:endParaRPr lang="en-US" sz="1300" dirty="0"/>
-                    </a:p>
-                  </a:txBody>
-                  <a:tcPr marL="91440" marR="91440" marT="45720" marB="45720">
-                    <a:lnL w="12700" cap="flat" cmpd="sng" algn="ctr">
-                      <a:solidFill>
-                        <a:srgbClr val="8DA9C4"/>
-                      </a:solidFill>
-                      <a:prstDash val="solid"/>
-                      <a:round/>
-                      <a:headEnd type="none" w="med" len="med"/>
-                      <a:tailEnd type="none" w="med" len="med"/>
-                    </a:lnL>
-                    <a:lnR w="12700" cap="flat" cmpd="sng" algn="ctr">
-                      <a:solidFill>
-                        <a:srgbClr val="8DA9C4"/>
-                      </a:solidFill>
-                      <a:prstDash val="solid"/>
-                      <a:round/>
-                      <a:headEnd type="none" w="med" len="med"/>
-                      <a:tailEnd type="none" w="med" len="med"/>
-                    </a:lnR>
-                    <a:lnT w="12700" cap="flat" cmpd="sng" algn="ctr">
-                      <a:solidFill>
-                        <a:srgbClr val="8DA9C4"/>
-                      </a:solidFill>
-                      <a:prstDash val="solid"/>
-                      <a:round/>
-                      <a:headEnd type="none" w="med" len="med"/>
-                      <a:tailEnd type="none" w="med" len="med"/>
-                    </a:lnT>
-                    <a:lnB w="12700" cap="flat" cmpd="sng" algn="ctr">
-                      <a:solidFill>
-                        <a:srgbClr val="8DA9C4"/>
-                      </a:solidFill>
-                      <a:prstDash val="solid"/>
-                      <a:round/>
-                      <a:headEnd type="none" w="med" len="med"/>
-                      <a:tailEnd type="none" w="med" len="med"/>
-                    </a:lnB>
-                  </a:tcPr>
-                </a:tc>
-                <a:tc>
-                  <a:txBody>
-                    <a:bodyPr/>
-                    <a:lstStyle/>
-                    <a:p>
-                      <a:pPr algn="ctr" indent="0" marL="0">
-                        <a:buNone/>
-                      </a:pPr>
-                      <a:r>
-                        <a:rPr lang="en-US" sz="1300" b="1" dirty="0">
-                          <a:solidFill>
-                            <a:srgbClr val="EEA02B"/>
-                          </a:solidFill>
-                        </a:rPr>
-                        <a:t>&lt; 0.0001</a:t>
-                      </a:r>
-                      <a:endParaRPr lang="en-US" sz="1300" dirty="0"/>
-                    </a:p>
-                  </a:txBody>
-                  <a:tcPr marL="91440" marR="91440" marT="45720" marB="45720">
-                    <a:lnL w="12700" cap="flat" cmpd="sng" algn="ctr">
-                      <a:solidFill>
-                        <a:srgbClr val="8DA9C4"/>
-                      </a:solidFill>
-                      <a:prstDash val="solid"/>
-                      <a:round/>
-                      <a:headEnd type="none" w="med" len="med"/>
-                      <a:tailEnd type="none" w="med" len="med"/>
-                    </a:lnL>
-                    <a:lnR w="12700" cap="flat" cmpd="sng" algn="ctr">
-                      <a:solidFill>
-                        <a:srgbClr val="8DA9C4"/>
-                      </a:solidFill>
-                      <a:prstDash val="solid"/>
-                      <a:round/>
-                      <a:headEnd type="none" w="med" len="med"/>
-                      <a:tailEnd type="none" w="med" len="med"/>
-                    </a:lnR>
-                    <a:lnT w="12700" cap="flat" cmpd="sng" algn="ctr">
-                      <a:solidFill>
-                        <a:srgbClr val="8DA9C4"/>
-                      </a:solidFill>
-                      <a:prstDash val="solid"/>
-                      <a:round/>
-                      <a:headEnd type="none" w="med" len="med"/>
-                      <a:tailEnd type="none" w="med" len="med"/>
-                    </a:lnT>
-                    <a:lnB w="12700" cap="flat" cmpd="sng" algn="ctr">
-                      <a:solidFill>
-                        <a:srgbClr val="8DA9C4"/>
-                      </a:solidFill>
-                      <a:prstDash val="solid"/>
-                      <a:round/>
-                      <a:headEnd type="none" w="med" len="med"/>
-                      <a:tailEnd type="none" w="med" len="med"/>
-                    </a:lnB>
-                  </a:tcPr>
-                </a:tc>
-              </a:tr>
-            </a:tbl>
-          </a:graphicData>
-        </a:graphic>
-      </p:graphicFrame>
-      <p:sp>
-        <p:nvSpPr>
-          <p:cNvPr id="10" name="Text 7"/>
-          <p:cNvSpPr/>
-          <p:nvPr/>
-        </p:nvSpPr>
-        <p:spPr>
-          <a:xfrm>
-            <a:off x="685800" y="4617720"/>
-            <a:ext cx="5120640" cy="320040"/>
-          </a:xfrm>
-          <a:prstGeom prst="rect">
-            <a:avLst/>
-          </a:prstGeom>
-          <a:noFill/>
-          <a:ln/>
-        </p:spPr>
-        <p:txBody>
-          <a:bodyPr wrap="square" rtlCol="0" anchor="ctr"/>
-          <a:lstStyle/>
-          <a:p>
-            <a:pPr indent="0" marL="0">
-              <a:buNone/>
-            </a:pPr>
-            <a:r>
-              <a:rPr lang="en-US" sz="1200" i="1" dirty="0">
-                <a:solidFill>
-                  <a:srgbClr val="13315C"/>
-                </a:solidFill>
-                <a:latin typeface="Calibri" pitchFamily="34" charset="0"/>
-                <a:ea typeface="Calibri" pitchFamily="34" charset="-122"/>
-                <a:cs typeface="Calibri" pitchFamily="34" charset="-120"/>
-              </a:rPr>
-              <a:t>Both pre-registered tests pass on 2024-25 held-out.</a:t>
-            </a:r>
-            <a:endParaRPr lang="en-US" sz="1200" dirty="0"/>
-          </a:p>
-        </p:txBody>
-      </p:sp>
-      <p:sp>
-        <p:nvSpPr>
-          <p:cNvPr id="11" name="Text 8"/>
-          <p:cNvSpPr/>
-          <p:nvPr/>
-        </p:nvSpPr>
-        <p:spPr>
-          <a:xfrm>
-            <a:off x="685800" y="4937760"/>
-            <a:ext cx="5120640" cy="411480"/>
-          </a:xfrm>
-          <a:prstGeom prst="rect">
-            <a:avLst/>
-          </a:prstGeom>
-          <a:noFill/>
-          <a:ln/>
-        </p:spPr>
-        <p:txBody>
-          <a:bodyPr wrap="square" rtlCol="0" anchor="ctr"/>
-          <a:lstStyle/>
-          <a:p>
-            <a:pPr indent="0" marL="0">
-              <a:buNone/>
-            </a:pPr>
-            <a:r>
-              <a:rPr lang="en-US" sz="1200" i="1" dirty="0">
-                <a:solidFill>
-                  <a:srgbClr val="13315C"/>
-                </a:solidFill>
-                <a:latin typeface="Calibri" pitchFamily="34" charset="0"/>
-                <a:ea typeface="Calibri" pitchFamily="34" charset="-122"/>
-                <a:cs typeface="Calibri" pitchFamily="34" charset="-120"/>
-              </a:rPr>
-              <a:t>Backed by the calibrated model (Brier 0.149). The other 4 planned methods are blocked on data.</a:t>
-            </a:r>
-            <a:endParaRPr lang="en-US" sz="1200" dirty="0"/>
-          </a:p>
-        </p:txBody>
-      </p:sp>
-      <p:sp>
-        <p:nvSpPr>
-          <p:cNvPr id="12" name="Shape 9"/>
-          <p:cNvSpPr/>
-          <p:nvPr/>
-        </p:nvSpPr>
-        <p:spPr>
-          <a:xfrm>
-            <a:off x="685800" y="5486400"/>
+              <a:t>Eval harness + backtest engine + live capture (details + P&amp;L in report).</a:t>
+            </a:r>
+            <a:endParaRPr lang="en-US" sz="1100" dirty="0"/>
+          </a:p>
+        </p:txBody>
+      </p:sp>
+      <p:sp>
+        <p:nvSpPr>
+          <p:cNvPr id="20" name="Shape 18"/>
+          <p:cNvSpPr/>
+          <p:nvPr/>
+        </p:nvSpPr>
+        <p:spPr>
+          <a:xfrm>
+            <a:off x="685800" y="5532120"/>
             <a:ext cx="5120640" cy="640080"/>
           </a:xfrm>
           <a:prstGeom prst="rect">
@@ -7862,13 +4582,13 @@
       </p:sp>
       <p:sp>
         <p:nvSpPr>
-          <p:cNvPr id="13" name="Text 10"/>
-          <p:cNvSpPr/>
-          <p:nvPr/>
-        </p:nvSpPr>
-        <p:spPr>
-          <a:xfrm>
-            <a:off x="685800" y="5486400"/>
+          <p:cNvPr id="21" name="Text 19"/>
+          <p:cNvSpPr/>
+          <p:nvPr/>
+        </p:nvSpPr>
+        <p:spPr>
+          <a:xfrm>
+            <a:off x="685800" y="5532120"/>
             <a:ext cx="5120640" cy="640080"/>
           </a:xfrm>
           <a:prstGeom prst="rect">
@@ -7901,7 +4621,7 @@
       </p:sp>
       <p:sp>
         <p:nvSpPr>
-          <p:cNvPr id="14" name="Shape 11"/>
+          <p:cNvPr id="22" name="Shape 20"/>
           <p:cNvSpPr/>
           <p:nvPr/>
         </p:nvSpPr>
@@ -7918,7 +4638,7 @@
           <a:solidFill>
             <a:srgbClr val="F6F6F2"/>
           </a:solidFill>
-          <a:ln w="19050">
+          <a:ln w="20320">
             <a:solidFill>
               <a:srgbClr val="EEA02B"/>
             </a:solidFill>
@@ -7928,7 +4648,7 @@
       </p:sp>
       <p:sp>
         <p:nvSpPr>
-          <p:cNvPr id="15" name="Text 12"/>
+          <p:cNvPr id="23" name="Text 21"/>
           <p:cNvSpPr/>
           <p:nvPr/>
         </p:nvSpPr>
@@ -7959,7 +4679,7 @@
                 <a:ea typeface="Calibri" pitchFamily="34" charset="-122"/>
                 <a:cs typeface="Calibri" pitchFamily="34" charset="-120"/>
               </a:rPr>
-              <a:t>CAN IT MAKE MONEY?</a:t>
+              <a:t>WHAT'S NEXT  (for the report + beyond)</a:t>
             </a:r>
             <a:endParaRPr lang="en-US" sz="1200" dirty="0"/>
           </a:p>
@@ -7967,7 +4687,7 @@
       </p:sp>
       <p:sp>
         <p:nvSpPr>
-          <p:cNvPr id="16" name="Text 13"/>
+          <p:cNvPr id="24" name="Text 22"/>
           <p:cNvSpPr/>
           <p:nvPr/>
         </p:nvSpPr>
@@ -7990,7 +4710,7 @@
               <a:buNone/>
             </a:pPr>
             <a:r>
-              <a:rPr lang="en-US" sz="2000" b="1" dirty="0">
+              <a:rPr lang="en-US" sz="1900" b="1" dirty="0">
                 <a:solidFill>
                   <a:srgbClr val="0B2545"/>
                 </a:solidFill>
@@ -7998,21 +4718,124 @@
                 <a:ea typeface="Georgia" pitchFamily="34" charset="-122"/>
                 <a:cs typeface="Georgia" pitchFamily="34" charset="-120"/>
               </a:rPr>
-              <a:t>Not yet — but it's not 'no.'</a:t>
-            </a:r>
-            <a:endParaRPr lang="en-US" sz="2000" dirty="0"/>
-          </a:p>
-        </p:txBody>
-      </p:sp>
-      <p:sp>
-        <p:nvSpPr>
-          <p:cNvPr id="17" name="Shape 14"/>
+              <a:t>From detection to extraction</a:t>
+            </a:r>
+            <a:endParaRPr lang="en-US" sz="1900" dirty="0"/>
+          </a:p>
+        </p:txBody>
+      </p:sp>
+      <p:sp>
+        <p:nvSpPr>
+          <p:cNvPr id="25" name="Shape 23"/>
           <p:cNvSpPr/>
           <p:nvPr/>
         </p:nvSpPr>
         <p:spPr>
           <a:xfrm>
             <a:off x="6446520" y="2606040"/>
+            <a:ext cx="164592" cy="777240"/>
+          </a:xfrm>
+          <a:prstGeom prst="rect">
+            <a:avLst/>
+          </a:prstGeom>
+          <a:solidFill>
+            <a:srgbClr val="0B2545"/>
+          </a:solidFill>
+          <a:ln w="12700">
+            <a:solidFill>
+              <a:srgbClr val="0B2545"/>
+            </a:solidFill>
+            <a:prstDash val="solid"/>
+          </a:ln>
+        </p:spPr>
+      </p:sp>
+      <p:sp>
+        <p:nvSpPr>
+          <p:cNvPr id="26" name="Text 24"/>
+          <p:cNvSpPr/>
+          <p:nvPr/>
+        </p:nvSpPr>
+        <p:spPr>
+          <a:xfrm>
+            <a:off x="6675120" y="2606040"/>
+            <a:ext cx="4846320" cy="274320"/>
+          </a:xfrm>
+          <a:prstGeom prst="rect">
+            <a:avLst/>
+          </a:prstGeom>
+          <a:noFill/>
+          <a:ln/>
+        </p:spPr>
+        <p:txBody>
+          <a:bodyPr wrap="square" rtlCol="0" anchor="ctr"/>
+          <a:lstStyle/>
+          <a:p>
+            <a:pPr indent="0" marL="0">
+              <a:buNone/>
+            </a:pPr>
+            <a:r>
+              <a:rPr lang="en-US" sz="1100" b="1" dirty="0">
+                <a:solidFill>
+                  <a:srgbClr val="0B2545"/>
+                </a:solidFill>
+                <a:latin typeface="Calibri" pitchFamily="34" charset="0"/>
+                <a:ea typeface="Calibri" pitchFamily="34" charset="-122"/>
+                <a:cs typeface="Calibri" pitchFamily="34" charset="-120"/>
+              </a:rPr>
+              <a:t>POWER THE BACKTEST</a:t>
+            </a:r>
+            <a:endParaRPr lang="en-US" sz="1100" dirty="0"/>
+          </a:p>
+        </p:txBody>
+      </p:sp>
+      <p:sp>
+        <p:nvSpPr>
+          <p:cNvPr id="27" name="Text 25"/>
+          <p:cNvSpPr/>
+          <p:nvPr/>
+        </p:nvSpPr>
+        <p:spPr>
+          <a:xfrm>
+            <a:off x="6675120" y="2880360"/>
+            <a:ext cx="4846320" cy="548640"/>
+          </a:xfrm>
+          <a:prstGeom prst="rect">
+            <a:avLst/>
+          </a:prstGeom>
+          <a:noFill/>
+          <a:ln/>
+        </p:spPr>
+        <p:txBody>
+          <a:bodyPr wrap="square" rtlCol="0" anchor="ctr"/>
+          <a:lstStyle/>
+          <a:p>
+            <a:pPr indent="0" marL="0">
+              <a:buNone/>
+            </a:pPr>
+            <a:r>
+              <a:rPr lang="en-US" sz="1100" dirty="0">
+                <a:solidFill>
+                  <a:srgbClr val="1A1A1A"/>
+                </a:solidFill>
+                <a:latin typeface="Calibri" pitchFamily="34" charset="0"/>
+                <a:ea typeface="Calibri" pitchFamily="34" charset="-122"/>
+                <a:cs typeface="Calibri" pitchFamily="34" charset="-120"/>
+              </a:rPr>
+              <a:t>Paid historical (~$59, one month) OR keep capturing playoff games. Goal: a sample big enough to distinguish skill from luck.</a:t>
+            </a:r>
+            <a:endParaRPr lang="en-US" sz="1100" dirty="0"/>
+          </a:p>
+        </p:txBody>
+      </p:sp>
+      <p:sp>
+        <p:nvSpPr>
+          <p:cNvPr id="28" name="Shape 26"/>
+          <p:cNvSpPr/>
+          <p:nvPr/>
+        </p:nvSpPr>
+        <p:spPr>
+          <a:xfrm>
+            <a:off x="6446520" y="3611880"/>
             <a:ext cx="164592" cy="777240"/>
           </a:xfrm>
           <a:prstGeom prst="rect">
@@ -8031,13 +4854,13 @@
       </p:sp>
       <p:sp>
         <p:nvSpPr>
-          <p:cNvPr id="18" name="Text 15"/>
-          <p:cNvSpPr/>
-          <p:nvPr/>
-        </p:nvSpPr>
-        <p:spPr>
-          <a:xfrm>
-            <a:off x="6675120" y="2606040"/>
+          <p:cNvPr id="29" name="Text 27"/>
+          <p:cNvSpPr/>
+          <p:nvPr/>
+        </p:nvSpPr>
+        <p:spPr>
+          <a:xfrm>
+            <a:off x="6675120" y="3611880"/>
             <a:ext cx="4846320" cy="274320"/>
           </a:xfrm>
           <a:prstGeom prst="rect">
@@ -8062,7 +4885,7 @@
                 <a:ea typeface="Calibri" pitchFamily="34" charset="-122"/>
                 <a:cs typeface="Calibri" pitchFamily="34" charset="-120"/>
               </a:rPr>
-              <a:t>TODAY · NO</a:t>
+              <a:t>WIRE METHOD 2 INTO TRADES</a:t>
             </a:r>
             <a:endParaRPr lang="en-US" sz="1100" dirty="0"/>
           </a:p>
@@ -8070,13 +4893,13 @@
       </p:sp>
       <p:sp>
         <p:nvSpPr>
-          <p:cNvPr id="19" name="Text 16"/>
-          <p:cNvSpPr/>
-          <p:nvPr/>
-        </p:nvSpPr>
-        <p:spPr>
-          <a:xfrm>
-            <a:off x="6675120" y="2880360"/>
+          <p:cNvPr id="30" name="Text 28"/>
+          <p:cNvSpPr/>
+          <p:nvPr/>
+        </p:nvSpPr>
+        <p:spPr>
+          <a:xfrm>
+            <a:off x="6675120" y="3886200"/>
             <a:ext cx="4846320" cy="548640"/>
           </a:xfrm>
           <a:prstGeom prst="rect">
@@ -8093,7 +4916,7 @@
               <a:buNone/>
             </a:pPr>
             <a:r>
-              <a:rPr lang="en-US" sz="1200" dirty="0">
+              <a:rPr lang="en-US" sz="1100" dirty="0">
                 <a:solidFill>
                   <a:srgbClr val="1A1A1A"/>
                 </a:solidFill>
@@ -8101,22 +4924,125 @@
                 <a:ea typeface="Calibri" pitchFamily="34" charset="-122"/>
                 <a:cs typeface="Calibri" pitchFamily="34" charset="-120"/>
               </a:rPr>
-              <a:t>Live game vs liquid books: n=1 → −40% (noise). Kalshi +95% = stale-mid artifact.</a:t>
-            </a:r>
-            <a:endParaRPr lang="en-US" sz="1200" dirty="0"/>
-          </a:p>
-        </p:txBody>
-      </p:sp>
-      <p:sp>
-        <p:nvSpPr>
-          <p:cNvPr id="20" name="Shape 17"/>
-          <p:cNvSpPr/>
-          <p:nvPr/>
-        </p:nvSpPr>
-        <p:spPr>
-          <a:xfrm>
-            <a:off x="6446520" y="3474720"/>
+              <a:t>Today Method 2 only validates the bias. Next: filter Method 1's edges to Method 2's event windows (the targeted strategy).</a:t>
+            </a:r>
+            <a:endParaRPr lang="en-US" sz="1100" dirty="0"/>
+          </a:p>
+        </p:txBody>
+      </p:sp>
+      <p:sp>
+        <p:nvSpPr>
+          <p:cNvPr id="31" name="Shape 29"/>
+          <p:cNvSpPr/>
+          <p:nvPr/>
+        </p:nvSpPr>
+        <p:spPr>
+          <a:xfrm>
+            <a:off x="6446520" y="4617720"/>
             <a:ext cx="164592" cy="777240"/>
+          </a:xfrm>
+          <a:prstGeom prst="rect">
+            <a:avLst/>
+          </a:prstGeom>
+          <a:solidFill>
+            <a:srgbClr val="1C7293"/>
+          </a:solidFill>
+          <a:ln w="12700">
+            <a:solidFill>
+              <a:srgbClr val="1C7293"/>
+            </a:solidFill>
+            <a:prstDash val="solid"/>
+          </a:ln>
+        </p:spPr>
+      </p:sp>
+      <p:sp>
+        <p:nvSpPr>
+          <p:cNvPr id="32" name="Text 30"/>
+          <p:cNvSpPr/>
+          <p:nvPr/>
+        </p:nvSpPr>
+        <p:spPr>
+          <a:xfrm>
+            <a:off x="6675120" y="4617720"/>
+            <a:ext cx="4846320" cy="274320"/>
+          </a:xfrm>
+          <a:prstGeom prst="rect">
+            <a:avLst/>
+          </a:prstGeom>
+          <a:noFill/>
+          <a:ln/>
+        </p:spPr>
+        <p:txBody>
+          <a:bodyPr wrap="square" rtlCol="0" anchor="ctr"/>
+          <a:lstStyle/>
+          <a:p>
+            <a:pPr indent="0" marL="0">
+              <a:buNone/>
+            </a:pPr>
+            <a:r>
+              <a:rPr lang="en-US" sz="1100" b="1" dirty="0">
+                <a:solidFill>
+                  <a:srgbClr val="1C7293"/>
+                </a:solidFill>
+                <a:latin typeface="Calibri" pitchFamily="34" charset="0"/>
+                <a:ea typeface="Calibri" pitchFamily="34" charset="-122"/>
+                <a:cs typeface="Calibri" pitchFamily="34" charset="-120"/>
+              </a:rPr>
+              <a:t>UNLOCK V1 / V3 / V4 / V6</a:t>
+            </a:r>
+            <a:endParaRPr lang="en-US" sz="1100" dirty="0"/>
+          </a:p>
+        </p:txBody>
+      </p:sp>
+      <p:sp>
+        <p:nvSpPr>
+          <p:cNvPr id="33" name="Text 31"/>
+          <p:cNvSpPr/>
+          <p:nvPr/>
+        </p:nvSpPr>
+        <p:spPr>
+          <a:xfrm>
+            <a:off x="6675120" y="4892040"/>
+            <a:ext cx="4846320" cy="548640"/>
+          </a:xfrm>
+          <a:prstGeom prst="rect">
+            <a:avLst/>
+          </a:prstGeom>
+          <a:noFill/>
+          <a:ln/>
+        </p:spPr>
+        <p:txBody>
+          <a:bodyPr wrap="square" rtlCol="0" anchor="ctr"/>
+          <a:lstStyle/>
+          <a:p>
+            <a:pPr indent="0" marL="0">
+              <a:buNone/>
+            </a:pPr>
+            <a:r>
+              <a:rPr lang="en-US" sz="1100" dirty="0">
+                <a:solidFill>
+                  <a:srgbClr val="1A1A1A"/>
+                </a:solidFill>
+                <a:latin typeface="Calibri" pitchFamily="34" charset="0"/>
+                <a:ea typeface="Calibri" pitchFamily="34" charset="-122"/>
+                <a:cs typeface="Calibri" pitchFamily="34" charset="-120"/>
+              </a:rPr>
+              <a:t>Architecturally ready in the eval harness — need multi-venue in-play odds to fit and compare.</a:t>
+            </a:r>
+            <a:endParaRPr lang="en-US" sz="1100" dirty="0"/>
+          </a:p>
+        </p:txBody>
+      </p:sp>
+      <p:sp>
+        <p:nvSpPr>
+          <p:cNvPr id="34" name="Shape 32"/>
+          <p:cNvSpPr/>
+          <p:nvPr/>
+        </p:nvSpPr>
+        <p:spPr>
+          <a:xfrm>
+            <a:off x="6446520" y="5532120"/>
+            <a:ext cx="5120640" cy="640080"/>
           </a:xfrm>
           <a:prstGeom prst="rect">
             <a:avLst/>
@@ -8134,219 +5060,13 @@
       </p:sp>
       <p:sp>
         <p:nvSpPr>
-          <p:cNvPr id="21" name="Text 18"/>
-          <p:cNvSpPr/>
-          <p:nvPr/>
-        </p:nvSpPr>
-        <p:spPr>
-          <a:xfrm>
-            <a:off x="6675120" y="3474720"/>
-            <a:ext cx="4846320" cy="274320"/>
-          </a:xfrm>
-          <a:prstGeom prst="rect">
-            <a:avLst/>
-          </a:prstGeom>
-          <a:noFill/>
-          <a:ln/>
-        </p:spPr>
-        <p:txBody>
-          <a:bodyPr wrap="square" rtlCol="0" anchor="ctr"/>
-          <a:lstStyle/>
-          <a:p>
-            <a:pPr indent="0" marL="0">
-              <a:buNone/>
-            </a:pPr>
-            <a:r>
-              <a:rPr lang="en-US" sz="1100" b="1" dirty="0">
-                <a:solidFill>
-                  <a:srgbClr val="0B2545"/>
-                </a:solidFill>
-                <a:latin typeface="Calibri" pitchFamily="34" charset="0"/>
-                <a:ea typeface="Calibri" pitchFamily="34" charset="-122"/>
-                <a:cs typeface="Calibri" pitchFamily="34" charset="-120"/>
-              </a:rPr>
-              <a:t>BIAS · YES</a:t>
-            </a:r>
-            <a:endParaRPr lang="en-US" sz="1100" dirty="0"/>
-          </a:p>
-        </p:txBody>
-      </p:sp>
-      <p:sp>
-        <p:nvSpPr>
-          <p:cNvPr id="22" name="Text 19"/>
-          <p:cNvSpPr/>
-          <p:nvPr/>
-        </p:nvSpPr>
-        <p:spPr>
-          <a:xfrm>
-            <a:off x="6675120" y="3749040"/>
-            <a:ext cx="4846320" cy="548640"/>
-          </a:xfrm>
-          <a:prstGeom prst="rect">
-            <a:avLst/>
-          </a:prstGeom>
-          <a:noFill/>
-          <a:ln/>
-        </p:spPr>
-        <p:txBody>
-          <a:bodyPr wrap="square" rtlCol="0" anchor="ctr"/>
-          <a:lstStyle/>
-          <a:p>
-            <a:pPr indent="0" marL="0">
-              <a:buNone/>
-            </a:pPr>
-            <a:r>
-              <a:rPr lang="en-US" sz="1200" dirty="0">
-                <a:solidFill>
-                  <a:srgbClr val="1A1A1A"/>
-                </a:solidFill>
-                <a:latin typeface="Calibri" pitchFamily="34" charset="0"/>
-                <a:ea typeface="Calibri" pitchFamily="34" charset="-122"/>
-                <a:cs typeface="Calibri" pitchFamily="34" charset="-120"/>
-              </a:rPr>
-              <a:t>Both pre-registered tests passed on the held-out season. The overreaction is real.</a:t>
-            </a:r>
-            <a:endParaRPr lang="en-US" sz="1200" dirty="0"/>
-          </a:p>
-        </p:txBody>
-      </p:sp>
-      <p:sp>
-        <p:nvSpPr>
-          <p:cNvPr id="23" name="Shape 20"/>
-          <p:cNvSpPr/>
-          <p:nvPr/>
-        </p:nvSpPr>
-        <p:spPr>
-          <a:xfrm>
-            <a:off x="6446520" y="4343400"/>
-            <a:ext cx="164592" cy="777240"/>
-          </a:xfrm>
-          <a:prstGeom prst="rect">
-            <a:avLst/>
-          </a:prstGeom>
-          <a:solidFill>
-            <a:srgbClr val="1C7293"/>
-          </a:solidFill>
-          <a:ln w="12700">
-            <a:solidFill>
-              <a:srgbClr val="1C7293"/>
-            </a:solidFill>
-            <a:prstDash val="solid"/>
-          </a:ln>
-        </p:spPr>
-      </p:sp>
-      <p:sp>
-        <p:nvSpPr>
-          <p:cNvPr id="24" name="Text 21"/>
-          <p:cNvSpPr/>
-          <p:nvPr/>
-        </p:nvSpPr>
-        <p:spPr>
-          <a:xfrm>
-            <a:off x="6675120" y="4343400"/>
-            <a:ext cx="4846320" cy="274320"/>
-          </a:xfrm>
-          <a:prstGeom prst="rect">
-            <a:avLst/>
-          </a:prstGeom>
-          <a:noFill/>
-          <a:ln/>
-        </p:spPr>
-        <p:txBody>
-          <a:bodyPr wrap="square" rtlCol="0" anchor="ctr"/>
-          <a:lstStyle/>
-          <a:p>
-            <a:pPr indent="0" marL="0">
-              <a:buNone/>
-            </a:pPr>
-            <a:r>
-              <a:rPr lang="en-US" sz="1100" b="1" dirty="0">
-                <a:solidFill>
-                  <a:srgbClr val="1C7293"/>
-                </a:solidFill>
-                <a:latin typeface="Calibri" pitchFamily="34" charset="0"/>
-                <a:ea typeface="Calibri" pitchFamily="34" charset="-122"/>
-                <a:cs typeface="Calibri" pitchFamily="34" charset="-120"/>
-              </a:rPr>
-              <a:t>PATH · CLEAR</a:t>
-            </a:r>
-            <a:endParaRPr lang="en-US" sz="1100" dirty="0"/>
-          </a:p>
-        </p:txBody>
-      </p:sp>
-      <p:sp>
-        <p:nvSpPr>
-          <p:cNvPr id="25" name="Text 22"/>
-          <p:cNvSpPr/>
-          <p:nvPr/>
-        </p:nvSpPr>
-        <p:spPr>
-          <a:xfrm>
-            <a:off x="6675120" y="4617720"/>
-            <a:ext cx="4846320" cy="548640"/>
-          </a:xfrm>
-          <a:prstGeom prst="rect">
-            <a:avLst/>
-          </a:prstGeom>
-          <a:noFill/>
-          <a:ln/>
-        </p:spPr>
-        <p:txBody>
-          <a:bodyPr wrap="square" rtlCol="0" anchor="ctr"/>
-          <a:lstStyle/>
-          <a:p>
-            <a:pPr indent="0" marL="0">
-              <a:buNone/>
-            </a:pPr>
-            <a:r>
-              <a:rPr lang="en-US" sz="1200" dirty="0">
-                <a:solidFill>
-                  <a:srgbClr val="1A1A1A"/>
-                </a:solidFill>
-                <a:latin typeface="Calibri" pitchFamily="34" charset="0"/>
-                <a:ea typeface="Calibri" pitchFamily="34" charset="-122"/>
-                <a:cs typeface="Calibri" pitchFamily="34" charset="-120"/>
-              </a:rPr>
-              <a:t>Power the backtest ($59 historical) → V5-targeted strategy on Kalshi (legal, no limits).</a:t>
-            </a:r>
-            <a:endParaRPr lang="en-US" sz="1200" dirty="0"/>
-          </a:p>
-        </p:txBody>
-      </p:sp>
-      <p:sp>
-        <p:nvSpPr>
-          <p:cNvPr id="26" name="Shape 23"/>
-          <p:cNvSpPr/>
-          <p:nvPr/>
-        </p:nvSpPr>
-        <p:spPr>
-          <a:xfrm>
-            <a:off x="6446520" y="5486400"/>
-            <a:ext cx="5120640" cy="640080"/>
-          </a:xfrm>
-          <a:prstGeom prst="rect">
-            <a:avLst/>
-          </a:prstGeom>
-          <a:solidFill>
-            <a:srgbClr val="0B2545"/>
-          </a:solidFill>
-          <a:ln w="12700">
-            <a:solidFill>
-              <a:srgbClr val="0B2545"/>
-            </a:solidFill>
-            <a:prstDash val="solid"/>
-          </a:ln>
-        </p:spPr>
-      </p:sp>
-      <p:sp>
-        <p:nvSpPr>
-          <p:cNvPr id="27" name="Text 24"/>
-          <p:cNvSpPr/>
-          <p:nvPr/>
-        </p:nvSpPr>
-        <p:spPr>
-          <a:xfrm>
-            <a:off x="6446520" y="5486400"/>
+          <p:cNvPr id="35" name="Text 33"/>
+          <p:cNvSpPr/>
+          <p:nvPr/>
+        </p:nvSpPr>
+        <p:spPr>
+          <a:xfrm>
+            <a:off x="6446520" y="5532120"/>
             <a:ext cx="5120640" cy="640080"/>
           </a:xfrm>
           <a:prstGeom prst="rect">
@@ -8371,7 +5091,7 @@
                 <a:ea typeface="Georgia" pitchFamily="34" charset="-122"/>
                 <a:cs typeface="Georgia" pitchFamily="34" charset="-120"/>
               </a:rPr>
-              <a:t>Gated on data scale, not on methodology.</a:t>
+              <a:t>Gated on data scale, not methodology.</a:t>
             </a:r>
             <a:endParaRPr lang="en-US" sz="1500" dirty="0"/>
           </a:p>
@@ -8379,7 +5099,7 @@
       </p:sp>
       <p:sp>
         <p:nvSpPr>
-          <p:cNvPr id="28" name="Text 25"/>
+          <p:cNvPr id="36" name="Text 34"/>
           <p:cNvSpPr/>
           <p:nvPr/>
         </p:nvSpPr>
@@ -8418,7 +5138,7 @@
       </p:sp>
       <p:sp>
         <p:nvSpPr>
-          <p:cNvPr id="29" name="Text 26"/>
+          <p:cNvPr id="37" name="Text 35"/>
           <p:cNvSpPr/>
           <p:nvPr/>
         </p:nvSpPr>
@@ -8457,7 +5177,7 @@
       </p:sp>
       <p:sp>
         <p:nvSpPr>
-          <p:cNvPr id="30" name="Text 27"/>
+          <p:cNvPr id="38" name="Text 36"/>
           <p:cNvSpPr/>
           <p:nvPr/>
         </p:nvSpPr>
@@ -8488,7 +5208,7 @@
                 <a:ea typeface="Calibri" pitchFamily="34" charset="-122"/>
                 <a:cs typeface="Calibri" pitchFamily="34" charset="-120"/>
               </a:rPr>
-              <a:t>16</a:t>
+              <a:t>12</a:t>
             </a:r>
             <a:endParaRPr lang="en-US" sz="1000" dirty="0"/>
           </a:p>
@@ -9179,7 +5899,7 @@
                 <a:ea typeface="Georgia" pitchFamily="34" charset="-122"/>
                 <a:cs typeface="Georgia" pitchFamily="34" charset="-120"/>
               </a:rPr>
-              <a:t>Can we use a calibrated win-probability model to </a:t>
+              <a:t>Can we </a:t>
             </a:r>
             <a:pPr indent="0" marL="0">
               <a:buNone/>
@@ -9193,7 +5913,7 @@
                 <a:ea typeface="Georgia" pitchFamily="34" charset="-122"/>
                 <a:cs typeface="Georgia" pitchFamily="34" charset="-120"/>
               </a:rPr>
-              <a:t>detect mispricing</a:t>
+              <a:t>statistically detect mispricing</a:t>
             </a:r>
             <a:pPr indent="0" marL="0">
               <a:buNone/>
@@ -9207,35 +5927,7 @@
                 <a:ea typeface="Georgia" pitchFamily="34" charset="-122"/>
                 <a:cs typeface="Georgia" pitchFamily="34" charset="-120"/>
               </a:rPr>
-              <a:t> and </a:t>
-            </a:r>
-            <a:pPr indent="0" marL="0">
-              <a:buNone/>
-            </a:pPr>
-            <a:r>
-              <a:rPr lang="en-US" sz="2200" b="1" i="1" dirty="0">
-                <a:solidFill>
-                  <a:srgbClr val="EEA02B"/>
-                </a:solidFill>
-                <a:latin typeface="Georgia" pitchFamily="34" charset="0"/>
-                <a:ea typeface="Georgia" pitchFamily="34" charset="-122"/>
-                <a:cs typeface="Georgia" pitchFamily="34" charset="-120"/>
-              </a:rPr>
-              <a:t>profit from it</a:t>
-            </a:r>
-            <a:pPr indent="0" marL="0">
-              <a:buNone/>
-            </a:pPr>
-            <a:r>
-              <a:rPr lang="en-US" sz="2200" i="1" dirty="0">
-                <a:solidFill>
-                  <a:srgbClr val="0B2545"/>
-                </a:solidFill>
-                <a:latin typeface="Georgia" pitchFamily="34" charset="0"/>
-                <a:ea typeface="Georgia" pitchFamily="34" charset="-122"/>
-                <a:cs typeface="Georgia" pitchFamily="34" charset="-120"/>
-              </a:rPr>
-              <a:t> in NBA in-play markets?</a:t>
+              <a:t> in NBA in-play markets — using a calibrated win-probability model and pre-registered event tests?</a:t>
             </a:r>
             <a:endParaRPr lang="en-US" sz="2200" dirty="0"/>
           </a:p>
@@ -9379,7 +6071,7 @@
                 <a:ea typeface="Georgia" pitchFamily="34" charset="-122"/>
                 <a:cs typeface="Georgia" pitchFamily="34" charset="-120"/>
               </a:rPr>
-              <a:t>Is the bias DETECTABLE?</a:t>
+              <a:t>Can our probabilities be trusted?</a:t>
             </a:r>
             <a:endParaRPr lang="en-US" sz="1900" dirty="0"/>
           </a:p>
@@ -9418,7 +6110,7 @@
                 <a:ea typeface="Calibri" pitchFamily="34" charset="-122"/>
                 <a:cs typeface="Calibri" pitchFamily="34" charset="-120"/>
               </a:rPr>
-              <a:t>Tested on the held-out 2024-25 season via pre-registered overreaction tests on trailing-team scoring events.</a:t>
+              <a:t>Tested by reliability + Brier on the held-out 2024-25 season — does a 70% prediction mean 70% of the time?</a:t>
             </a:r>
             <a:endParaRPr lang="en-US" sz="1300" dirty="0"/>
           </a:p>
@@ -9457,7 +6149,7 @@
                 <a:ea typeface="Calibri" pitchFamily="34" charset="-122"/>
                 <a:cs typeface="Calibri" pitchFamily="34" charset="-120"/>
               </a:rPr>
-              <a:t>→ answered on the overreaction-test slide</a:t>
+              <a:t>→ answered by Finding 1 (calibration)</a:t>
             </a:r>
             <a:endParaRPr lang="en-US" sz="1100" dirty="0"/>
           </a:p>
@@ -9562,7 +6254,7 @@
                 <a:ea typeface="Georgia" pitchFamily="34" charset="-122"/>
                 <a:cs typeface="Georgia" pitchFamily="34" charset="-120"/>
               </a:rPr>
-              <a:t>Can we EXTRACT it (make money)?</a:t>
+              <a:t>Does the market overshoot the model?</a:t>
             </a:r>
             <a:endParaRPr lang="en-US" sz="1900" dirty="0"/>
           </a:p>
@@ -9577,7 +6269,7 @@
         <p:spPr>
           <a:xfrm>
             <a:off x="6446520" y="4709160"/>
-            <a:ext cx="5120640" cy="960120"/>
+            <a:ext cx="5120640" cy="1097280"/>
           </a:xfrm>
           <a:prstGeom prst="rect">
             <a:avLst/>
@@ -9601,7 +6293,7 @@
                 <a:ea typeface="Calibri" pitchFamily="34" charset="-122"/>
                 <a:cs typeface="Calibri" pitchFamily="34" charset="-120"/>
               </a:rPr>
-              <a:t>Tested via live backtest on real markets — does the edge survive the vig at a sample large enough to distinguish skill from luck?</a:t>
+              <a:t>Tested by pre-registered event-window tests on trailing-team scoring — does the model's structural shift confirm the bias the literature predicts?</a:t>
             </a:r>
             <a:endParaRPr lang="en-US" sz="1300" dirty="0"/>
           </a:p>
@@ -9615,7 +6307,7 @@
         </p:nvSpPr>
         <p:spPr>
           <a:xfrm>
-            <a:off x="6446520" y="5760720"/>
+            <a:off x="6446520" y="5897880"/>
             <a:ext cx="5120640" cy="320040"/>
           </a:xfrm>
           <a:prstGeom prst="rect">
@@ -9640,7 +6332,7 @@
                 <a:ea typeface="Calibri" pitchFamily="34" charset="-122"/>
                 <a:cs typeface="Calibri" pitchFamily="34" charset="-120"/>
               </a:rPr>
-              <a:t>→ answered on the live-pilot + verdict slides</a:t>
+              <a:t>→ answered by Finding 2 (overreaction test)</a:t>
             </a:r>
             <a:endParaRPr lang="en-US" sz="1100" dirty="0"/>
           </a:p>
@@ -11883,7 +8575,7 @@
                 <a:ea typeface="Calibri" pitchFamily="34" charset="-122"/>
                 <a:cs typeface="Calibri" pitchFamily="34" charset="-120"/>
               </a:rPr>
-              <a:t>THE TRADER</a:t>
+              <a:t>THE MODEL</a:t>
             </a:r>
             <a:endParaRPr lang="en-US" sz="900" dirty="0"/>
           </a:p>
@@ -12013,7 +8705,7 @@
                 <a:ea typeface="Calibri" pitchFamily="34" charset="-122"/>
                 <a:cs typeface="Calibri" pitchFamily="34" charset="-120"/>
               </a:rPr>
-              <a:t>DIAGNOSTIC</a:t>
+              <a:t>THE TEST</a:t>
             </a:r>
             <a:endParaRPr lang="en-US" sz="900" dirty="0"/>
           </a:p>
@@ -12079,7 +8771,7 @@
                 <a:ea typeface="Calibri" pitchFamily="34" charset="-122"/>
                 <a:cs typeface="Calibri" pitchFamily="34" charset="-120"/>
               </a:rPr>
-              <a:t>Two different roles:  </a:t>
+              <a:t>Two complementary detectors:  </a:t>
             </a:r>
             <a:pPr algn="ctr" indent="0" marL="0">
               <a:buNone/>
@@ -12093,7 +8785,7 @@
                 <a:ea typeface="Calibri" pitchFamily="34" charset="-122"/>
                 <a:cs typeface="Calibri" pitchFamily="34" charset="-120"/>
               </a:rPr>
-              <a:t>Method 1 is the TRADER </a:t>
+              <a:t>Method 1 </a:t>
             </a:r>
             <a:pPr algn="ctr" indent="0" marL="0">
               <a:buNone/>
@@ -12107,7 +8799,7 @@
                 <a:ea typeface="Calibri" pitchFamily="34" charset="-122"/>
                 <a:cs typeface="Calibri" pitchFamily="34" charset="-120"/>
               </a:rPr>
-              <a:t>(drives every bet)  ·  </a:t>
+              <a:t>produces the calibrated baseline  ·  </a:t>
             </a:r>
             <a:pPr algn="ctr" indent="0" marL="0">
               <a:buNone/>
@@ -12121,7 +8813,7 @@
                 <a:ea typeface="Calibri" pitchFamily="34" charset="-122"/>
                 <a:cs typeface="Calibri" pitchFamily="34" charset="-120"/>
               </a:rPr>
-              <a:t>Method 2 is the DIAGNOSTIC </a:t>
+              <a:t>Method 2 </a:t>
             </a:r>
             <a:pPr algn="ctr" indent="0" marL="0">
               <a:buNone/>
@@ -12135,7 +8827,7 @@
                 <a:ea typeface="Calibri" pitchFamily="34" charset="-122"/>
                 <a:cs typeface="Calibri" pitchFamily="34" charset="-120"/>
               </a:rPr>
-              <a:t>(statistical finding, no trades). The other four are gated on multi-venue odds history we don't have.</a:t>
+              <a:t>tests the baseline for bias at event windows. The other four are blocked on multi-venue odds we don't have.</a:t>
             </a:r>
             <a:endParaRPr lang="en-US" sz="1400" dirty="0"/>
           </a:p>
